--- a/report/Proyect_US_v4.pptx
+++ b/report/Proyect_US_v4.pptx
@@ -15,8 +15,8 @@
     <p:sldId id="297" r:id="rId43"/>
     <p:sldId id="256" r:id="rId5"/>
     <p:sldId id="298" r:id="rId44"/>
+    <p:sldId id="300" r:id="rId46"/>
     <p:sldId id="299" r:id="rId45"/>
-    <p:sldId id="300" r:id="rId46"/>
     <p:sldId id="301" r:id="rId47"/>
     <p:sldId id="291" r:id="rId37"/>
     <p:sldId id="258" r:id="rId6"/>
@@ -7236,7 +7236,7 @@
           </a:bodyPr>
           <a:lstStyle/>
           <a:p>
-            <a:pPr algn="l">
+            <a:pPr algn="just">
               <a:lnSpc>
                 <a:spcPts val="2400"/>
               </a:lnSpc>
@@ -7255,7 +7255,7 @@
             </a:r>
           </a:p>
           <a:p>
-            <a:pPr algn="l">
+            <a:pPr algn="just">
               <a:lnSpc>
                 <a:spcPts val="2400"/>
               </a:lnSpc>
@@ -7274,7 +7274,7 @@
             </a:r>
           </a:p>
           <a:p>
-            <a:pPr algn="l">
+            <a:pPr algn="just">
               <a:lnSpc>
                 <a:spcPts val="2400"/>
               </a:lnSpc>
@@ -7404,7 +7404,7 @@
           </a:bodyPr>
           <a:lstStyle/>
           <a:p>
-            <a:pPr algn="l">
+            <a:pPr algn="just">
               <a:lnSpc>
                 <a:spcPts val="2400"/>
               </a:lnSpc>
@@ -7423,7 +7423,7 @@
             </a:r>
           </a:p>
           <a:p>
-            <a:pPr algn="l">
+            <a:pPr algn="just">
               <a:lnSpc>
                 <a:spcPts val="2400"/>
               </a:lnSpc>
@@ -7442,7 +7442,7 @@
             </a:r>
           </a:p>
           <a:p>
-            <a:pPr algn="l">
+            <a:pPr algn="just">
               <a:lnSpc>
                 <a:spcPts val="2400"/>
               </a:lnSpc>
@@ -7510,7 +7510,7 @@
                 </a:solidFill>
                 <a:latin typeface="Garamond"/>
               </a:rPr>
-              <a:t>Two ways to measure leaving</a:t>
+              <a:t>Linking individuals across waves</a:t>
             </a:r>
           </a:p>
         </p:txBody>
@@ -7558,8 +7558,8 @@
         </p:nvSpPr>
         <p:spPr>
           <a:xfrm>
-            <a:off x="822960" y="1920240"/>
-            <a:ext cx="10058400" cy="3657600"/>
+            <a:off x="822960" y="1325880"/>
+            <a:ext cx="10543032" cy="1463040"/>
           </a:xfrm>
           <a:prstGeom prst="rect">
             <a:avLst/>
@@ -7572,60 +7572,202 @@
           </a:bodyPr>
           <a:lstStyle/>
           <a:p>
+            <a:pPr algn="just">
+              <a:lnSpc>
+                <a:spcPts val="2400"/>
+              </a:lnSpc>
+              <a:spcAft>
+                <a:spcPts val="0"/>
+              </a:spcAft>
+            </a:pPr>
+            <a:r>
+              <a:rPr sz="1600" b="0" i="0">
+                <a:solidFill>
+                  <a:srgbClr val="1A2430"/>
+                </a:solidFill>
+                <a:latin typeface="Garamond"/>
+              </a:rPr>
+              <a:t>The CPS carries no individual identifier across interviews: sampling follows addresses, not persons. Records are therefore linked across waves on household-level identifiers, and each candidate link is validated on demographic consistency, following Madrian and Lefgren (1999).</a:t>
+            </a:r>
+          </a:p>
+        </p:txBody>
+      </p:sp>
+      <p:cxnSp>
+        <p:nvCxnSpPr>
+          <p:cNvPr id="5" name="Connector 4"/>
+          <p:cNvCxnSpPr/>
+          <p:nvPr/>
+        </p:nvCxnSpPr>
+        <p:spPr>
+          <a:xfrm>
+            <a:off x="822960" y="2788920"/>
+            <a:ext cx="10543032" cy="0"/>
+          </a:xfrm>
+          <a:prstGeom prst="line">
+            <a:avLst/>
+          </a:prstGeom>
+          <a:ln w="12700">
+            <a:solidFill>
+              <a:srgbClr val="1A2430"/>
+            </a:solidFill>
+          </a:ln>
+        </p:spPr>
+        <p:style>
+          <a:lnRef idx="2">
+            <a:schemeClr val="accent1"/>
+          </a:lnRef>
+          <a:fillRef idx="0">
+            <a:schemeClr val="accent1"/>
+          </a:fillRef>
+          <a:effectRef idx="1">
+            <a:schemeClr val="accent1"/>
+          </a:effectRef>
+          <a:fontRef idx="minor">
+            <a:schemeClr val="tx1"/>
+          </a:fontRef>
+        </p:style>
+      </p:cxnSp>
+      <p:sp>
+        <p:nvSpPr>
+          <p:cNvPr id="6" name="TextBox 5"/>
+          <p:cNvSpPr txBox="1"/>
+          <p:nvPr/>
+        </p:nvSpPr>
+        <p:spPr>
+          <a:xfrm>
+            <a:off x="1005840" y="2971800"/>
+            <a:ext cx="4206240" cy="365760"/>
+          </a:xfrm>
+          <a:prstGeom prst="rect">
+            <a:avLst/>
+          </a:prstGeom>
+          <a:noFill/>
+        </p:spPr>
+        <p:txBody>
+          <a:bodyPr wrap="square" lIns="0" rIns="0" tIns="0" bIns="0">
+            <a:spAutoFit/>
+          </a:bodyPr>
+          <a:lstStyle/>
+          <a:p>
             <a:pPr algn="l">
               <a:lnSpc>
-                <a:spcPts val="3000"/>
+                <a:spcPts val="2025"/>
               </a:lnSpc>
               <a:spcAft>
-                <a:spcPts val="600"/>
+                <a:spcPts val="0"/>
               </a:spcAft>
             </a:pPr>
             <a:r>
-              <a:rPr sz="2000" b="0" i="0">
-                <a:solidFill>
-                  <a:srgbClr val="1A2430"/>
+              <a:rPr sz="1350" b="1" i="0">
+                <a:solidFill>
+                  <a:srgbClr val="1F3864"/>
                 </a:solidFill>
                 <a:latin typeface="Garamond"/>
               </a:rPr>
-              <a:t>Ask people what they did last year, and look at what they do today.</a:t>
-            </a:r>
-          </a:p>
+              <a:t>Linkage keys (exact match)</a:t>
+            </a:r>
+          </a:p>
+        </p:txBody>
+      </p:sp>
+      <p:sp>
+        <p:nvSpPr>
+          <p:cNvPr id="7" name="TextBox 6"/>
+          <p:cNvSpPr txBox="1"/>
+          <p:nvPr/>
+        </p:nvSpPr>
+        <p:spPr>
+          <a:xfrm>
+            <a:off x="6035040" y="2971800"/>
+            <a:ext cx="4937760" cy="365760"/>
+          </a:xfrm>
+          <a:prstGeom prst="rect">
+            <a:avLst/>
+          </a:prstGeom>
+          <a:noFill/>
+        </p:spPr>
+        <p:txBody>
+          <a:bodyPr wrap="square" lIns="0" rIns="0" tIns="0" bIns="0">
+            <a:spAutoFit/>
+          </a:bodyPr>
+          <a:lstStyle/>
+          <a:p>
+            <a:pPr algn="l">
+              <a:lnSpc>
+                <a:spcPts val="2025"/>
+              </a:lnSpc>
+              <a:spcAft>
+                <a:spcPts val="0"/>
+              </a:spcAft>
+            </a:pPr>
+            <a:r>
+              <a:rPr sz="1350" b="1" i="0">
+                <a:solidFill>
+                  <a:srgbClr val="1F3864"/>
+                </a:solidFill>
+                <a:latin typeface="Garamond"/>
+              </a:rPr>
+              <a:t>Validation (demographic consistency)</a:t>
+            </a:r>
+          </a:p>
+        </p:txBody>
+      </p:sp>
+      <p:sp>
+        <p:nvSpPr>
+          <p:cNvPr id="8" name="TextBox 7"/>
+          <p:cNvSpPr txBox="1"/>
+          <p:nvPr/>
+        </p:nvSpPr>
+        <p:spPr>
+          <a:xfrm>
+            <a:off x="1005840" y="3456432"/>
+            <a:ext cx="4206240" cy="1463040"/>
+          </a:xfrm>
+          <a:prstGeom prst="rect">
+            <a:avLst/>
+          </a:prstGeom>
+          <a:noFill/>
+        </p:spPr>
+        <p:txBody>
+          <a:bodyPr wrap="square" lIns="0" rIns="0" tIns="0" bIns="0">
+            <a:spAutoFit/>
+          </a:bodyPr>
+          <a:lstStyle/>
           <a:p>
             <a:pPr algn="l">
               <a:lnSpc>
                 <a:spcPts val="1950"/>
               </a:lnSpc>
               <a:spcAft>
-                <a:spcPts val="3000"/>
+                <a:spcPts val="800"/>
               </a:spcAft>
             </a:pPr>
             <a:r>
-              <a:rPr sz="1300" b="0" i="1">
-                <a:solidFill>
-                  <a:srgbClr val="6B7480"/>
+              <a:rPr sz="1300" b="0" i="0">
+                <a:solidFill>
+                  <a:srgbClr val="1A2430"/>
                 </a:solidFill>
                 <a:latin typeface="Garamond"/>
               </a:rPr>
-              <a:t>One question, one record, no matching. This is the March measure.</a:t>
+              <a:t>Household identifier</a:t>
             </a:r>
           </a:p>
           <a:p>
             <a:pPr algn="l">
               <a:lnSpc>
-                <a:spcPts val="3000"/>
+                <a:spcPts val="1950"/>
               </a:lnSpc>
               <a:spcAft>
-                <a:spcPts val="600"/>
+                <a:spcPts val="800"/>
               </a:spcAft>
             </a:pPr>
             <a:r>
-              <a:rPr sz="2000" b="0" i="0">
+              <a:rPr sz="1300" b="0" i="0">
                 <a:solidFill>
                   <a:srgbClr val="1A2430"/>
                 </a:solidFill>
                 <a:latin typeface="Garamond"/>
               </a:rPr>
-              <a:t>Or find the same person twice, a year apart, and compare.</a:t>
+              <a:t>Dwelling identifier</a:t>
             </a:r>
           </a:p>
           <a:p>
@@ -7638,13 +7780,170 @@
               </a:spcAft>
             </a:pPr>
             <a:r>
-              <a:rPr sz="1300" b="0" i="1">
-                <a:solidFill>
-                  <a:srgbClr val="6B7480"/>
+              <a:rPr sz="1300" b="0" i="0">
+                <a:solidFill>
+                  <a:srgbClr val="1A2430"/>
                 </a:solidFill>
                 <a:latin typeface="Garamond"/>
               </a:rPr>
-              <a:t>No person identifier exists, so the second look is built from household records.</a:t>
+              <a:t>Person line number within the household</a:t>
+            </a:r>
+          </a:p>
+        </p:txBody>
+      </p:sp>
+      <p:sp>
+        <p:nvSpPr>
+          <p:cNvPr id="9" name="TextBox 8"/>
+          <p:cNvSpPr txBox="1"/>
+          <p:nvPr/>
+        </p:nvSpPr>
+        <p:spPr>
+          <a:xfrm>
+            <a:off x="6035040" y="3456432"/>
+            <a:ext cx="4937760" cy="1463040"/>
+          </a:xfrm>
+          <a:prstGeom prst="rect">
+            <a:avLst/>
+          </a:prstGeom>
+          <a:noFill/>
+        </p:spPr>
+        <p:txBody>
+          <a:bodyPr wrap="square" lIns="0" rIns="0" tIns="0" bIns="0">
+            <a:spAutoFit/>
+          </a:bodyPr>
+          <a:lstStyle/>
+          <a:p>
+            <a:pPr algn="l">
+              <a:lnSpc>
+                <a:spcPts val="1950"/>
+              </a:lnSpc>
+              <a:spcAft>
+                <a:spcPts val="800"/>
+              </a:spcAft>
+            </a:pPr>
+            <a:r>
+              <a:rPr sz="1300" b="0" i="0">
+                <a:solidFill>
+                  <a:srgbClr val="1A2430"/>
+                </a:solidFill>
+                <a:latin typeface="Garamond"/>
+              </a:rPr>
+              <a:t>Sex, identical across interviews</a:t>
+            </a:r>
+          </a:p>
+          <a:p>
+            <a:pPr algn="l">
+              <a:lnSpc>
+                <a:spcPts val="1950"/>
+              </a:lnSpc>
+              <a:spcAft>
+                <a:spcPts val="800"/>
+              </a:spcAft>
+            </a:pPr>
+            <a:r>
+              <a:rPr sz="1300" b="0" i="0">
+                <a:solidFill>
+                  <a:srgbClr val="1A2430"/>
+                </a:solidFill>
+                <a:latin typeface="Garamond"/>
+              </a:rPr>
+              <a:t>Race, identical across interviews</a:t>
+            </a:r>
+          </a:p>
+          <a:p>
+            <a:pPr algn="l">
+              <a:lnSpc>
+                <a:spcPts val="1950"/>
+              </a:lnSpc>
+              <a:spcAft>
+                <a:spcPts val="0"/>
+              </a:spcAft>
+            </a:pPr>
+            <a:r>
+              <a:rPr sz="1300" b="0" i="0">
+                <a:solidFill>
+                  <a:srgbClr val="1A2430"/>
+                </a:solidFill>
+                <a:latin typeface="Garamond"/>
+              </a:rPr>
+              <a:t>Age, increasing by zero to two years</a:t>
+            </a:r>
+          </a:p>
+        </p:txBody>
+      </p:sp>
+      <p:cxnSp>
+        <p:nvCxnSpPr>
+          <p:cNvPr id="10" name="Connector 9"/>
+          <p:cNvCxnSpPr/>
+          <p:nvPr/>
+        </p:nvCxnSpPr>
+        <p:spPr>
+          <a:xfrm>
+            <a:off x="822960" y="5029200"/>
+            <a:ext cx="10543032" cy="0"/>
+          </a:xfrm>
+          <a:prstGeom prst="line">
+            <a:avLst/>
+          </a:prstGeom>
+          <a:ln w="12700">
+            <a:solidFill>
+              <a:srgbClr val="1A2430"/>
+            </a:solidFill>
+          </a:ln>
+        </p:spPr>
+        <p:style>
+          <a:lnRef idx="2">
+            <a:schemeClr val="accent1"/>
+          </a:lnRef>
+          <a:fillRef idx="0">
+            <a:schemeClr val="accent1"/>
+          </a:fillRef>
+          <a:effectRef idx="1">
+            <a:schemeClr val="accent1"/>
+          </a:effectRef>
+          <a:fontRef idx="minor">
+            <a:schemeClr val="tx1"/>
+          </a:fontRef>
+        </p:style>
+      </p:cxnSp>
+      <p:sp>
+        <p:nvSpPr>
+          <p:cNvPr id="11" name="TextBox 10"/>
+          <p:cNvSpPr txBox="1"/>
+          <p:nvPr/>
+        </p:nvSpPr>
+        <p:spPr>
+          <a:xfrm>
+            <a:off x="822960" y="5349240"/>
+            <a:ext cx="10543032" cy="1097280"/>
+          </a:xfrm>
+          <a:prstGeom prst="rect">
+            <a:avLst/>
+          </a:prstGeom>
+          <a:noFill/>
+        </p:spPr>
+        <p:txBody>
+          <a:bodyPr wrap="square" lIns="0" rIns="0" tIns="0" bIns="0">
+            <a:spAutoFit/>
+          </a:bodyPr>
+          <a:lstStyle/>
+          <a:p>
+            <a:pPr algn="just">
+              <a:lnSpc>
+                <a:spcPts val="2025"/>
+              </a:lnSpc>
+              <a:spcAft>
+                <a:spcPts val="0"/>
+              </a:spcAft>
+            </a:pPr>
+            <a:r>
+              <a:rPr sz="1350" b="0" i="0">
+                <a:solidFill>
+                  <a:srgbClr val="1A2430"/>
+                </a:solidFill>
+                <a:latin typeface="Garamond"/>
+              </a:rPr>
+              <a:t>Validated links are obtained for 78 percent of teacher observations (74 percent of other college graduates). The loss is concentrated among movers, whose exit propensity exceeds that of non-movers; panel-based estimates are therefore lower bounds on mobility-related exit.</a:t>
             </a:r>
           </a:p>
         </p:txBody>
@@ -7697,7 +7996,7 @@
                 </a:solidFill>
                 <a:latin typeface="Garamond"/>
               </a:rPr>
-              <a:t>Who is a stayer</a:t>
+              <a:t>Definition 1: illustrative cases</a:t>
             </a:r>
           </a:p>
         </p:txBody>
@@ -7739,22 +8038,20 @@
       </p:cxnSp>
       <p:sp>
         <p:nvSpPr>
-          <p:cNvPr id="4" name="Rounded Rectangle 3"/>
+          <p:cNvPr id="4" name="Rectangle 3"/>
           <p:cNvSpPr/>
           <p:nvPr/>
         </p:nvSpPr>
         <p:spPr>
           <a:xfrm>
-            <a:off x="822960" y="1600200"/>
-            <a:ext cx="566928" cy="566928"/>
-          </a:xfrm>
-          <a:prstGeom prst="roundRect">
-            <a:avLst>
-              <a:gd name="adj" fmla="val 12000"/>
-            </a:avLst>
+            <a:off x="822960" y="1691640"/>
+            <a:ext cx="548640" cy="548640"/>
+          </a:xfrm>
+          <a:prstGeom prst="rect">
+            <a:avLst/>
           </a:prstGeom>
           <a:solidFill>
-            <a:srgbClr val="00549F"/>
+            <a:srgbClr val="1F3864"/>
           </a:solidFill>
           <a:ln>
             <a:noFill/>
@@ -7781,7 +8078,7 @@
           <a:p>
             <a:pPr algn="ctr"/>
             <a:r>
-              <a:rPr sz="1300" b="1">
+              <a:rPr sz="1200" b="1">
                 <a:solidFill>
                   <a:srgbClr val="FFFFFF"/>
                 </a:solidFill>
@@ -7794,22 +8091,20 @@
       </p:sp>
       <p:sp>
         <p:nvSpPr>
-          <p:cNvPr id="5" name="Rounded Rectangle 4"/>
+          <p:cNvPr id="5" name="Rectangle 4"/>
           <p:cNvSpPr/>
           <p:nvPr/>
         </p:nvSpPr>
         <p:spPr>
           <a:xfrm>
-            <a:off x="1481328" y="1600200"/>
-            <a:ext cx="566928" cy="566928"/>
-          </a:xfrm>
-          <a:prstGeom prst="roundRect">
-            <a:avLst>
-              <a:gd name="adj" fmla="val 12000"/>
-            </a:avLst>
+            <a:off x="1426464" y="1691640"/>
+            <a:ext cx="548640" cy="548640"/>
+          </a:xfrm>
+          <a:prstGeom prst="rect">
+            <a:avLst/>
           </a:prstGeom>
           <a:solidFill>
-            <a:srgbClr val="00549F"/>
+            <a:srgbClr val="1F3864"/>
           </a:solidFill>
           <a:ln>
             <a:noFill/>
@@ -7836,7 +8131,7 @@
           <a:p>
             <a:pPr algn="ctr"/>
             <a:r>
-              <a:rPr sz="1300" b="1">
+              <a:rPr sz="1200" b="1">
                 <a:solidFill>
                   <a:srgbClr val="FFFFFF"/>
                 </a:solidFill>
@@ -7849,22 +8144,20 @@
       </p:sp>
       <p:sp>
         <p:nvSpPr>
-          <p:cNvPr id="6" name="Rounded Rectangle 5"/>
+          <p:cNvPr id="6" name="Rectangle 5"/>
           <p:cNvSpPr/>
           <p:nvPr/>
         </p:nvSpPr>
         <p:spPr>
           <a:xfrm>
-            <a:off x="2139696" y="1600200"/>
-            <a:ext cx="566928" cy="566928"/>
-          </a:xfrm>
-          <a:prstGeom prst="roundRect">
-            <a:avLst>
-              <a:gd name="adj" fmla="val 12000"/>
-            </a:avLst>
+            <a:off x="2029967" y="1691640"/>
+            <a:ext cx="548640" cy="548640"/>
+          </a:xfrm>
+          <a:prstGeom prst="rect">
+            <a:avLst/>
           </a:prstGeom>
           <a:solidFill>
-            <a:srgbClr val="00549F"/>
+            <a:srgbClr val="1F3864"/>
           </a:solidFill>
           <a:ln>
             <a:noFill/>
@@ -7891,7 +8184,7 @@
           <a:p>
             <a:pPr algn="ctr"/>
             <a:r>
-              <a:rPr sz="1300" b="1">
+              <a:rPr sz="1200" b="1">
                 <a:solidFill>
                   <a:srgbClr val="FFFFFF"/>
                 </a:solidFill>
@@ -7904,22 +8197,20 @@
       </p:sp>
       <p:sp>
         <p:nvSpPr>
-          <p:cNvPr id="7" name="Rounded Rectangle 6"/>
+          <p:cNvPr id="7" name="Rectangle 6"/>
           <p:cNvSpPr/>
           <p:nvPr/>
         </p:nvSpPr>
         <p:spPr>
           <a:xfrm>
-            <a:off x="2798063" y="1600200"/>
-            <a:ext cx="566928" cy="566928"/>
-          </a:xfrm>
-          <a:prstGeom prst="roundRect">
-            <a:avLst>
-              <a:gd name="adj" fmla="val 12000"/>
-            </a:avLst>
+            <a:off x="2633472" y="1691640"/>
+            <a:ext cx="548640" cy="548640"/>
+          </a:xfrm>
+          <a:prstGeom prst="rect">
+            <a:avLst/>
           </a:prstGeom>
           <a:solidFill>
-            <a:srgbClr val="00549F"/>
+            <a:srgbClr val="1F3864"/>
           </a:solidFill>
           <a:ln>
             <a:noFill/>
@@ -7946,7 +8237,7 @@
           <a:p>
             <a:pPr algn="ctr"/>
             <a:r>
-              <a:rPr sz="1300" b="1">
+              <a:rPr sz="1200" b="1">
                 <a:solidFill>
                   <a:srgbClr val="FFFFFF"/>
                 </a:solidFill>
@@ -7959,22 +8250,20 @@
       </p:sp>
       <p:sp>
         <p:nvSpPr>
-          <p:cNvPr id="8" name="Rounded Rectangle 7"/>
+          <p:cNvPr id="8" name="Rectangle 7"/>
           <p:cNvSpPr/>
           <p:nvPr/>
         </p:nvSpPr>
         <p:spPr>
           <a:xfrm>
-            <a:off x="4279392" y="1600200"/>
-            <a:ext cx="566928" cy="566928"/>
-          </a:xfrm>
-          <a:prstGeom prst="roundRect">
-            <a:avLst>
-              <a:gd name="adj" fmla="val 12000"/>
-            </a:avLst>
+            <a:off x="4014215" y="1691640"/>
+            <a:ext cx="548640" cy="548640"/>
+          </a:xfrm>
+          <a:prstGeom prst="rect">
+            <a:avLst/>
           </a:prstGeom>
           <a:solidFill>
-            <a:srgbClr val="00549F"/>
+            <a:srgbClr val="7B2530"/>
           </a:solidFill>
           <a:ln>
             <a:noFill/>
@@ -8001,7 +8290,7 @@
           <a:p>
             <a:pPr algn="ctr"/>
             <a:r>
-              <a:rPr sz="1300" b="1">
+              <a:rPr sz="1200" b="1">
                 <a:solidFill>
                   <a:srgbClr val="FFFFFF"/>
                 </a:solidFill>
@@ -8014,22 +8303,20 @@
       </p:sp>
       <p:sp>
         <p:nvSpPr>
-          <p:cNvPr id="9" name="Rounded Rectangle 8"/>
+          <p:cNvPr id="9" name="Rectangle 8"/>
           <p:cNvSpPr/>
           <p:nvPr/>
         </p:nvSpPr>
         <p:spPr>
           <a:xfrm>
-            <a:off x="4937759" y="1600200"/>
-            <a:ext cx="566928" cy="566928"/>
-          </a:xfrm>
-          <a:prstGeom prst="roundRect">
-            <a:avLst>
-              <a:gd name="adj" fmla="val 12000"/>
-            </a:avLst>
+            <a:off x="4617720" y="1691640"/>
+            <a:ext cx="548640" cy="548640"/>
+          </a:xfrm>
+          <a:prstGeom prst="rect">
+            <a:avLst/>
           </a:prstGeom>
           <a:solidFill>
-            <a:srgbClr val="00549F"/>
+            <a:srgbClr val="7B2530"/>
           </a:solidFill>
           <a:ln>
             <a:noFill/>
@@ -8056,7 +8343,7 @@
           <a:p>
             <a:pPr algn="ctr"/>
             <a:r>
-              <a:rPr sz="1300" b="1">
+              <a:rPr sz="1200" b="1">
                 <a:solidFill>
                   <a:srgbClr val="FFFFFF"/>
                 </a:solidFill>
@@ -8069,22 +8356,20 @@
       </p:sp>
       <p:sp>
         <p:nvSpPr>
-          <p:cNvPr id="10" name="Rounded Rectangle 9"/>
+          <p:cNvPr id="10" name="Rectangle 9"/>
           <p:cNvSpPr/>
           <p:nvPr/>
         </p:nvSpPr>
         <p:spPr>
           <a:xfrm>
-            <a:off x="5596127" y="1600200"/>
-            <a:ext cx="566928" cy="566928"/>
-          </a:xfrm>
-          <a:prstGeom prst="roundRect">
-            <a:avLst>
-              <a:gd name="adj" fmla="val 12000"/>
-            </a:avLst>
+            <a:off x="5221224" y="1691640"/>
+            <a:ext cx="548640" cy="548640"/>
+          </a:xfrm>
+          <a:prstGeom prst="rect">
+            <a:avLst/>
           </a:prstGeom>
           <a:solidFill>
-            <a:srgbClr val="00549F"/>
+            <a:srgbClr val="7B2530"/>
           </a:solidFill>
           <a:ln>
             <a:noFill/>
@@ -8111,7 +8396,7 @@
           <a:p>
             <a:pPr algn="ctr"/>
             <a:r>
-              <a:rPr sz="1300" b="1">
+              <a:rPr sz="1200" b="1">
                 <a:solidFill>
                   <a:srgbClr val="FFFFFF"/>
                 </a:solidFill>
@@ -8124,22 +8409,20 @@
       </p:sp>
       <p:sp>
         <p:nvSpPr>
-          <p:cNvPr id="11" name="Rounded Rectangle 10"/>
+          <p:cNvPr id="11" name="Rectangle 10"/>
           <p:cNvSpPr/>
           <p:nvPr/>
         </p:nvSpPr>
         <p:spPr>
           <a:xfrm>
-            <a:off x="6254495" y="1600200"/>
-            <a:ext cx="566928" cy="566928"/>
-          </a:xfrm>
-          <a:prstGeom prst="roundRect">
-            <a:avLst>
-              <a:gd name="adj" fmla="val 12000"/>
-            </a:avLst>
+            <a:off x="5824728" y="1691640"/>
+            <a:ext cx="548640" cy="548640"/>
+          </a:xfrm>
+          <a:prstGeom prst="rect">
+            <a:avLst/>
           </a:prstGeom>
           <a:solidFill>
-            <a:srgbClr val="00549F"/>
+            <a:srgbClr val="7B2530"/>
           </a:solidFill>
           <a:ln>
             <a:noFill/>
@@ -8166,7 +8449,7 @@
           <a:p>
             <a:pPr algn="ctr"/>
             <a:r>
-              <a:rPr sz="1300" b="1">
+              <a:rPr sz="1200" b="1">
                 <a:solidFill>
                   <a:srgbClr val="FFFFFF"/>
                 </a:solidFill>
@@ -8179,22 +8462,62 @@
       </p:sp>
       <p:sp>
         <p:nvSpPr>
-          <p:cNvPr id="12" name="Rounded Rectangle 11"/>
+          <p:cNvPr id="12" name="TextBox 11"/>
+          <p:cNvSpPr txBox="1"/>
+          <p:nvPr/>
+        </p:nvSpPr>
+        <p:spPr>
+          <a:xfrm>
+            <a:off x="6748272" y="1801368"/>
+            <a:ext cx="4572000" cy="411480"/>
+          </a:xfrm>
+          <a:prstGeom prst="rect">
+            <a:avLst/>
+          </a:prstGeom>
+          <a:noFill/>
+        </p:spPr>
+        <p:txBody>
+          <a:bodyPr wrap="square" lIns="0" rIns="0" tIns="0" bIns="0">
+            <a:spAutoFit/>
+          </a:bodyPr>
+          <a:lstStyle/>
+          <a:p>
+            <a:pPr algn="l">
+              <a:lnSpc>
+                <a:spcPts val="2100"/>
+              </a:lnSpc>
+              <a:spcAft>
+                <a:spcPts val="0"/>
+              </a:spcAft>
+            </a:pPr>
+            <a:r>
+              <a:rPr sz="1400" b="1" i="0">
+                <a:solidFill>
+                  <a:srgbClr val="1F3864"/>
+                </a:solidFill>
+                <a:latin typeface="Garamond"/>
+              </a:rPr>
+              <a:t>stayer</a:t>
+            </a:r>
+          </a:p>
+        </p:txBody>
+      </p:sp>
+      <p:sp>
+        <p:nvSpPr>
+          <p:cNvPr id="13" name="Rectangle 12"/>
           <p:cNvSpPr/>
           <p:nvPr/>
         </p:nvSpPr>
         <p:spPr>
           <a:xfrm>
-            <a:off x="7370063" y="1655064"/>
-            <a:ext cx="2011680" cy="457200"/>
-          </a:xfrm>
-          <a:prstGeom prst="roundRect">
-            <a:avLst>
-              <a:gd name="adj" fmla="val 12000"/>
-            </a:avLst>
+            <a:off x="822960" y="2624328"/>
+            <a:ext cx="548640" cy="548640"/>
+          </a:xfrm>
+          <a:prstGeom prst="rect">
+            <a:avLst/>
           </a:prstGeom>
           <a:solidFill>
-            <a:srgbClr val="00549F"/>
+            <a:srgbClr val="1F3864"/>
           </a:solidFill>
           <a:ln>
             <a:noFill/>
@@ -8221,35 +8544,33 @@
           <a:p>
             <a:pPr algn="ctr"/>
             <a:r>
-              <a:rPr sz="1300" b="1">
+              <a:rPr sz="1200" b="1">
                 <a:solidFill>
                   <a:srgbClr val="FFFFFF"/>
                 </a:solidFill>
                 <a:latin typeface="Garamond"/>
               </a:rPr>
-              <a:t>stayer</a:t>
-            </a:r>
-          </a:p>
-        </p:txBody>
-      </p:sp>
-      <p:sp>
-        <p:nvSpPr>
-          <p:cNvPr id="13" name="Rounded Rectangle 12"/>
+              <a:t>T</a:t>
+            </a:r>
+          </a:p>
+        </p:txBody>
+      </p:sp>
+      <p:sp>
+        <p:nvSpPr>
+          <p:cNvPr id="14" name="Rectangle 13"/>
           <p:cNvSpPr/>
           <p:nvPr/>
         </p:nvSpPr>
         <p:spPr>
           <a:xfrm>
-            <a:off x="822960" y="2624328"/>
-            <a:ext cx="566928" cy="566928"/>
-          </a:xfrm>
-          <a:prstGeom prst="roundRect">
-            <a:avLst>
-              <a:gd name="adj" fmla="val 12000"/>
-            </a:avLst>
+            <a:off x="1426464" y="2624328"/>
+            <a:ext cx="548640" cy="548640"/>
+          </a:xfrm>
+          <a:prstGeom prst="rect">
+            <a:avLst/>
           </a:prstGeom>
           <a:solidFill>
-            <a:srgbClr val="00549F"/>
+            <a:srgbClr val="1F3864"/>
           </a:solidFill>
           <a:ln>
             <a:noFill/>
@@ -8276,7 +8597,7 @@
           <a:p>
             <a:pPr algn="ctr"/>
             <a:r>
-              <a:rPr sz="1300" b="1">
+              <a:rPr sz="1200" b="1">
                 <a:solidFill>
                   <a:srgbClr val="FFFFFF"/>
                 </a:solidFill>
@@ -8289,22 +8610,20 @@
       </p:sp>
       <p:sp>
         <p:nvSpPr>
-          <p:cNvPr id="14" name="Rounded Rectangle 13"/>
+          <p:cNvPr id="15" name="Rectangle 14"/>
           <p:cNvSpPr/>
           <p:nvPr/>
         </p:nvSpPr>
         <p:spPr>
           <a:xfrm>
-            <a:off x="1481328" y="2624328"/>
-            <a:ext cx="566928" cy="566928"/>
-          </a:xfrm>
-          <a:prstGeom prst="roundRect">
-            <a:avLst>
-              <a:gd name="adj" fmla="val 12000"/>
-            </a:avLst>
+            <a:off x="2029967" y="2624328"/>
+            <a:ext cx="548640" cy="548640"/>
+          </a:xfrm>
+          <a:prstGeom prst="rect">
+            <a:avLst/>
           </a:prstGeom>
           <a:solidFill>
-            <a:srgbClr val="00549F"/>
+            <a:srgbClr val="1F3864"/>
           </a:solidFill>
           <a:ln>
             <a:noFill/>
@@ -8331,7 +8650,7 @@
           <a:p>
             <a:pPr algn="ctr"/>
             <a:r>
-              <a:rPr sz="1300" b="1">
+              <a:rPr sz="1200" b="1">
                 <a:solidFill>
                   <a:srgbClr val="FFFFFF"/>
                 </a:solidFill>
@@ -8344,22 +8663,20 @@
       </p:sp>
       <p:sp>
         <p:nvSpPr>
-          <p:cNvPr id="15" name="Rounded Rectangle 14"/>
+          <p:cNvPr id="16" name="Rectangle 15"/>
           <p:cNvSpPr/>
           <p:nvPr/>
         </p:nvSpPr>
         <p:spPr>
           <a:xfrm>
-            <a:off x="2139696" y="2624328"/>
-            <a:ext cx="566928" cy="566928"/>
-          </a:xfrm>
-          <a:prstGeom prst="roundRect">
-            <a:avLst>
-              <a:gd name="adj" fmla="val 12000"/>
-            </a:avLst>
+            <a:off x="2633472" y="2624328"/>
+            <a:ext cx="548640" cy="548640"/>
+          </a:xfrm>
+          <a:prstGeom prst="rect">
+            <a:avLst/>
           </a:prstGeom>
           <a:solidFill>
-            <a:srgbClr val="00549F"/>
+            <a:srgbClr val="1F3864"/>
           </a:solidFill>
           <a:ln>
             <a:noFill/>
@@ -8386,7 +8703,7 @@
           <a:p>
             <a:pPr algn="ctr"/>
             <a:r>
-              <a:rPr sz="1300" b="1">
+              <a:rPr sz="1200" b="1">
                 <a:solidFill>
                   <a:srgbClr val="FFFFFF"/>
                 </a:solidFill>
@@ -8399,22 +8716,158 @@
       </p:sp>
       <p:sp>
         <p:nvSpPr>
-          <p:cNvPr id="16" name="Rounded Rectangle 15"/>
+          <p:cNvPr id="17" name="Rectangle 16"/>
           <p:cNvSpPr/>
           <p:nvPr/>
         </p:nvSpPr>
         <p:spPr>
           <a:xfrm>
-            <a:off x="2798063" y="2624328"/>
-            <a:ext cx="566928" cy="566928"/>
-          </a:xfrm>
-          <a:prstGeom prst="roundRect">
-            <a:avLst>
-              <a:gd name="adj" fmla="val 12000"/>
-            </a:avLst>
+            <a:off x="4014215" y="2624328"/>
+            <a:ext cx="548640" cy="548640"/>
+          </a:xfrm>
+          <a:prstGeom prst="rect">
+            <a:avLst/>
           </a:prstGeom>
           <a:solidFill>
-            <a:srgbClr val="00549F"/>
+            <a:srgbClr val="FFFFFF"/>
+          </a:solidFill>
+          <a:ln w="9525">
+            <a:solidFill>
+              <a:srgbClr val="C9CFD6"/>
+            </a:solidFill>
+          </a:ln>
+          <a:effectLst/>
+        </p:spPr>
+        <p:style>
+          <a:lnRef idx="1">
+            <a:schemeClr val="accent1"/>
+          </a:lnRef>
+          <a:fillRef idx="3">
+            <a:schemeClr val="accent1"/>
+          </a:fillRef>
+          <a:effectRef idx="2">
+            <a:schemeClr val="accent1"/>
+          </a:effectRef>
+          <a:fontRef idx="minor">
+            <a:schemeClr val="lt1"/>
+          </a:fontRef>
+        </p:style>
+        <p:txBody>
+          <a:bodyPr rtlCol="0" anchor="ctr"/>
+          <a:lstStyle/>
+          <a:p>
+            <a:pPr algn="ctr"/>
+          </a:p>
+        </p:txBody>
+      </p:sp>
+      <p:sp>
+        <p:nvSpPr>
+          <p:cNvPr id="18" name="Rectangle 17"/>
+          <p:cNvSpPr/>
+          <p:nvPr/>
+        </p:nvSpPr>
+        <p:spPr>
+          <a:xfrm>
+            <a:off x="4617720" y="2624328"/>
+            <a:ext cx="548640" cy="548640"/>
+          </a:xfrm>
+          <a:prstGeom prst="rect">
+            <a:avLst/>
+          </a:prstGeom>
+          <a:solidFill>
+            <a:srgbClr val="FFFFFF"/>
+          </a:solidFill>
+          <a:ln w="9525">
+            <a:solidFill>
+              <a:srgbClr val="C9CFD6"/>
+            </a:solidFill>
+          </a:ln>
+          <a:effectLst/>
+        </p:spPr>
+        <p:style>
+          <a:lnRef idx="1">
+            <a:schemeClr val="accent1"/>
+          </a:lnRef>
+          <a:fillRef idx="3">
+            <a:schemeClr val="accent1"/>
+          </a:fillRef>
+          <a:effectRef idx="2">
+            <a:schemeClr val="accent1"/>
+          </a:effectRef>
+          <a:fontRef idx="minor">
+            <a:schemeClr val="lt1"/>
+          </a:fontRef>
+        </p:style>
+        <p:txBody>
+          <a:bodyPr rtlCol="0" anchor="ctr"/>
+          <a:lstStyle/>
+          <a:p>
+            <a:pPr algn="ctr"/>
+          </a:p>
+        </p:txBody>
+      </p:sp>
+      <p:sp>
+        <p:nvSpPr>
+          <p:cNvPr id="19" name="Rectangle 18"/>
+          <p:cNvSpPr/>
+          <p:nvPr/>
+        </p:nvSpPr>
+        <p:spPr>
+          <a:xfrm>
+            <a:off x="5221224" y="2624328"/>
+            <a:ext cx="548640" cy="548640"/>
+          </a:xfrm>
+          <a:prstGeom prst="rect">
+            <a:avLst/>
+          </a:prstGeom>
+          <a:solidFill>
+            <a:srgbClr val="FFFFFF"/>
+          </a:solidFill>
+          <a:ln w="9525">
+            <a:solidFill>
+              <a:srgbClr val="C9CFD6"/>
+            </a:solidFill>
+          </a:ln>
+          <a:effectLst/>
+        </p:spPr>
+        <p:style>
+          <a:lnRef idx="1">
+            <a:schemeClr val="accent1"/>
+          </a:lnRef>
+          <a:fillRef idx="3">
+            <a:schemeClr val="accent1"/>
+          </a:fillRef>
+          <a:effectRef idx="2">
+            <a:schemeClr val="accent1"/>
+          </a:effectRef>
+          <a:fontRef idx="minor">
+            <a:schemeClr val="lt1"/>
+          </a:fontRef>
+        </p:style>
+        <p:txBody>
+          <a:bodyPr rtlCol="0" anchor="ctr"/>
+          <a:lstStyle/>
+          <a:p>
+            <a:pPr algn="ctr"/>
+          </a:p>
+        </p:txBody>
+      </p:sp>
+      <p:sp>
+        <p:nvSpPr>
+          <p:cNvPr id="20" name="Rectangle 19"/>
+          <p:cNvSpPr/>
+          <p:nvPr/>
+        </p:nvSpPr>
+        <p:spPr>
+          <a:xfrm>
+            <a:off x="5824728" y="2624328"/>
+            <a:ext cx="548640" cy="548640"/>
+          </a:xfrm>
+          <a:prstGeom prst="rect">
+            <a:avLst/>
+          </a:prstGeom>
+          <a:solidFill>
+            <a:srgbClr val="7B2530"/>
           </a:solidFill>
           <a:ln>
             <a:noFill/>
@@ -8441,7 +8894,7 @@
           <a:p>
             <a:pPr algn="ctr"/>
             <a:r>
-              <a:rPr sz="1300" b="1">
+              <a:rPr sz="1200" b="1">
                 <a:solidFill>
                   <a:srgbClr val="FFFFFF"/>
                 </a:solidFill>
@@ -8454,22 +8907,62 @@
       </p:sp>
       <p:sp>
         <p:nvSpPr>
-          <p:cNvPr id="17" name="Rounded Rectangle 16"/>
+          <p:cNvPr id="21" name="TextBox 20"/>
+          <p:cNvSpPr txBox="1"/>
+          <p:nvPr/>
+        </p:nvSpPr>
+        <p:spPr>
+          <a:xfrm>
+            <a:off x="6748272" y="2734056"/>
+            <a:ext cx="4572000" cy="411480"/>
+          </a:xfrm>
+          <a:prstGeom prst="rect">
+            <a:avLst/>
+          </a:prstGeom>
+          <a:noFill/>
+        </p:spPr>
+        <p:txBody>
+          <a:bodyPr wrap="square" lIns="0" rIns="0" tIns="0" bIns="0">
+            <a:spAutoFit/>
+          </a:bodyPr>
+          <a:lstStyle/>
+          <a:p>
+            <a:pPr algn="l">
+              <a:lnSpc>
+                <a:spcPts val="2100"/>
+              </a:lnSpc>
+              <a:spcAft>
+                <a:spcPts val="0"/>
+              </a:spcAft>
+            </a:pPr>
+            <a:r>
+              <a:rPr sz="1400" b="1" i="0">
+                <a:solidFill>
+                  <a:srgbClr val="1F3864"/>
+                </a:solidFill>
+                <a:latin typeface="Garamond"/>
+              </a:rPr>
+              <a:t>stayer</a:t>
+            </a:r>
+          </a:p>
+        </p:txBody>
+      </p:sp>
+      <p:sp>
+        <p:nvSpPr>
+          <p:cNvPr id="22" name="Rectangle 21"/>
           <p:cNvSpPr/>
           <p:nvPr/>
         </p:nvSpPr>
         <p:spPr>
           <a:xfrm>
-            <a:off x="4279392" y="2624328"/>
-            <a:ext cx="566928" cy="566928"/>
-          </a:xfrm>
-          <a:prstGeom prst="roundRect">
-            <a:avLst>
-              <a:gd name="adj" fmla="val 12000"/>
-            </a:avLst>
+            <a:off x="822960" y="3557016"/>
+            <a:ext cx="548640" cy="548640"/>
+          </a:xfrm>
+          <a:prstGeom prst="rect">
+            <a:avLst/>
           </a:prstGeom>
           <a:solidFill>
-            <a:srgbClr val="E3E6EA"/>
+            <a:srgbClr val="1F3864"/>
           </a:solidFill>
           <a:ln>
             <a:noFill/>
@@ -8491,31 +8984,38 @@
           </a:fontRef>
         </p:style>
         <p:txBody>
-          <a:bodyPr rtlCol="0" anchor="ctr"/>
+          <a:bodyPr rtlCol="0" anchor="ctr" wrap="none"/>
           <a:lstStyle/>
           <a:p>
             <a:pPr algn="ctr"/>
-          </a:p>
-        </p:txBody>
-      </p:sp>
-      <p:sp>
-        <p:nvSpPr>
-          <p:cNvPr id="18" name="Rounded Rectangle 17"/>
+            <a:r>
+              <a:rPr sz="1200" b="1">
+                <a:solidFill>
+                  <a:srgbClr val="FFFFFF"/>
+                </a:solidFill>
+                <a:latin typeface="Garamond"/>
+              </a:rPr>
+              <a:t>T</a:t>
+            </a:r>
+          </a:p>
+        </p:txBody>
+      </p:sp>
+      <p:sp>
+        <p:nvSpPr>
+          <p:cNvPr id="23" name="Rectangle 22"/>
           <p:cNvSpPr/>
           <p:nvPr/>
         </p:nvSpPr>
         <p:spPr>
           <a:xfrm>
-            <a:off x="4937759" y="2624328"/>
-            <a:ext cx="566928" cy="566928"/>
-          </a:xfrm>
-          <a:prstGeom prst="roundRect">
-            <a:avLst>
-              <a:gd name="adj" fmla="val 12000"/>
-            </a:avLst>
+            <a:off x="1426464" y="3557016"/>
+            <a:ext cx="548640" cy="548640"/>
+          </a:xfrm>
+          <a:prstGeom prst="rect">
+            <a:avLst/>
           </a:prstGeom>
           <a:solidFill>
-            <a:srgbClr val="E3E6EA"/>
+            <a:srgbClr val="1F3864"/>
           </a:solidFill>
           <a:ln>
             <a:noFill/>
@@ -8537,6 +9037,61 @@
           </a:fontRef>
         </p:style>
         <p:txBody>
+          <a:bodyPr rtlCol="0" anchor="ctr" wrap="none"/>
+          <a:lstStyle/>
+          <a:p>
+            <a:pPr algn="ctr"/>
+            <a:r>
+              <a:rPr sz="1200" b="1">
+                <a:solidFill>
+                  <a:srgbClr val="FFFFFF"/>
+                </a:solidFill>
+                <a:latin typeface="Garamond"/>
+              </a:rPr>
+              <a:t>T</a:t>
+            </a:r>
+          </a:p>
+        </p:txBody>
+      </p:sp>
+      <p:sp>
+        <p:nvSpPr>
+          <p:cNvPr id="24" name="Rectangle 23"/>
+          <p:cNvSpPr/>
+          <p:nvPr/>
+        </p:nvSpPr>
+        <p:spPr>
+          <a:xfrm>
+            <a:off x="2029967" y="3557016"/>
+            <a:ext cx="548640" cy="548640"/>
+          </a:xfrm>
+          <a:prstGeom prst="rect">
+            <a:avLst/>
+          </a:prstGeom>
+          <a:solidFill>
+            <a:srgbClr val="FFFFFF"/>
+          </a:solidFill>
+          <a:ln w="9525">
+            <a:solidFill>
+              <a:srgbClr val="C9CFD6"/>
+            </a:solidFill>
+          </a:ln>
+          <a:effectLst/>
+        </p:spPr>
+        <p:style>
+          <a:lnRef idx="1">
+            <a:schemeClr val="accent1"/>
+          </a:lnRef>
+          <a:fillRef idx="3">
+            <a:schemeClr val="accent1"/>
+          </a:fillRef>
+          <a:effectRef idx="2">
+            <a:schemeClr val="accent1"/>
+          </a:effectRef>
+          <a:fontRef idx="minor">
+            <a:schemeClr val="lt1"/>
+          </a:fontRef>
+        </p:style>
+        <p:txBody>
           <a:bodyPr rtlCol="0" anchor="ctr"/>
           <a:lstStyle/>
           <a:p>
@@ -8546,22 +9101,292 @@
       </p:sp>
       <p:sp>
         <p:nvSpPr>
-          <p:cNvPr id="19" name="Rounded Rectangle 18"/>
+          <p:cNvPr id="25" name="Rectangle 24"/>
           <p:cNvSpPr/>
           <p:nvPr/>
         </p:nvSpPr>
         <p:spPr>
           <a:xfrm>
-            <a:off x="5596127" y="2624328"/>
-            <a:ext cx="566928" cy="566928"/>
-          </a:xfrm>
-          <a:prstGeom prst="roundRect">
-            <a:avLst>
-              <a:gd name="adj" fmla="val 12000"/>
-            </a:avLst>
+            <a:off x="2633472" y="3557016"/>
+            <a:ext cx="548640" cy="548640"/>
+          </a:xfrm>
+          <a:prstGeom prst="rect">
+            <a:avLst/>
           </a:prstGeom>
           <a:solidFill>
-            <a:srgbClr val="E3E6EA"/>
+            <a:srgbClr val="FFFFFF"/>
+          </a:solidFill>
+          <a:ln w="9525">
+            <a:solidFill>
+              <a:srgbClr val="C9CFD6"/>
+            </a:solidFill>
+          </a:ln>
+          <a:effectLst/>
+        </p:spPr>
+        <p:style>
+          <a:lnRef idx="1">
+            <a:schemeClr val="accent1"/>
+          </a:lnRef>
+          <a:fillRef idx="3">
+            <a:schemeClr val="accent1"/>
+          </a:fillRef>
+          <a:effectRef idx="2">
+            <a:schemeClr val="accent1"/>
+          </a:effectRef>
+          <a:fontRef idx="minor">
+            <a:schemeClr val="lt1"/>
+          </a:fontRef>
+        </p:style>
+        <p:txBody>
+          <a:bodyPr rtlCol="0" anchor="ctr"/>
+          <a:lstStyle/>
+          <a:p>
+            <a:pPr algn="ctr"/>
+          </a:p>
+        </p:txBody>
+      </p:sp>
+      <p:sp>
+        <p:nvSpPr>
+          <p:cNvPr id="26" name="Rectangle 25"/>
+          <p:cNvSpPr/>
+          <p:nvPr/>
+        </p:nvSpPr>
+        <p:spPr>
+          <a:xfrm>
+            <a:off x="4014215" y="3557016"/>
+            <a:ext cx="548640" cy="548640"/>
+          </a:xfrm>
+          <a:prstGeom prst="rect">
+            <a:avLst/>
+          </a:prstGeom>
+          <a:solidFill>
+            <a:srgbClr val="FFFFFF"/>
+          </a:solidFill>
+          <a:ln w="9525">
+            <a:solidFill>
+              <a:srgbClr val="C9CFD6"/>
+            </a:solidFill>
+          </a:ln>
+          <a:effectLst/>
+        </p:spPr>
+        <p:style>
+          <a:lnRef idx="1">
+            <a:schemeClr val="accent1"/>
+          </a:lnRef>
+          <a:fillRef idx="3">
+            <a:schemeClr val="accent1"/>
+          </a:fillRef>
+          <a:effectRef idx="2">
+            <a:schemeClr val="accent1"/>
+          </a:effectRef>
+          <a:fontRef idx="minor">
+            <a:schemeClr val="lt1"/>
+          </a:fontRef>
+        </p:style>
+        <p:txBody>
+          <a:bodyPr rtlCol="0" anchor="ctr"/>
+          <a:lstStyle/>
+          <a:p>
+            <a:pPr algn="ctr"/>
+          </a:p>
+        </p:txBody>
+      </p:sp>
+      <p:sp>
+        <p:nvSpPr>
+          <p:cNvPr id="27" name="Rectangle 26"/>
+          <p:cNvSpPr/>
+          <p:nvPr/>
+        </p:nvSpPr>
+        <p:spPr>
+          <a:xfrm>
+            <a:off x="4617720" y="3557016"/>
+            <a:ext cx="548640" cy="548640"/>
+          </a:xfrm>
+          <a:prstGeom prst="rect">
+            <a:avLst/>
+          </a:prstGeom>
+          <a:solidFill>
+            <a:srgbClr val="FFFFFF"/>
+          </a:solidFill>
+          <a:ln w="9525">
+            <a:solidFill>
+              <a:srgbClr val="C9CFD6"/>
+            </a:solidFill>
+          </a:ln>
+          <a:effectLst/>
+        </p:spPr>
+        <p:style>
+          <a:lnRef idx="1">
+            <a:schemeClr val="accent1"/>
+          </a:lnRef>
+          <a:fillRef idx="3">
+            <a:schemeClr val="accent1"/>
+          </a:fillRef>
+          <a:effectRef idx="2">
+            <a:schemeClr val="accent1"/>
+          </a:effectRef>
+          <a:fontRef idx="minor">
+            <a:schemeClr val="lt1"/>
+          </a:fontRef>
+        </p:style>
+        <p:txBody>
+          <a:bodyPr rtlCol="0" anchor="ctr"/>
+          <a:lstStyle/>
+          <a:p>
+            <a:pPr algn="ctr"/>
+          </a:p>
+        </p:txBody>
+      </p:sp>
+      <p:sp>
+        <p:nvSpPr>
+          <p:cNvPr id="28" name="Rectangle 27"/>
+          <p:cNvSpPr/>
+          <p:nvPr/>
+        </p:nvSpPr>
+        <p:spPr>
+          <a:xfrm>
+            <a:off x="5221224" y="3557016"/>
+            <a:ext cx="548640" cy="548640"/>
+          </a:xfrm>
+          <a:prstGeom prst="rect">
+            <a:avLst/>
+          </a:prstGeom>
+          <a:solidFill>
+            <a:srgbClr val="FFFFFF"/>
+          </a:solidFill>
+          <a:ln w="9525">
+            <a:solidFill>
+              <a:srgbClr val="C9CFD6"/>
+            </a:solidFill>
+          </a:ln>
+          <a:effectLst/>
+        </p:spPr>
+        <p:style>
+          <a:lnRef idx="1">
+            <a:schemeClr val="accent1"/>
+          </a:lnRef>
+          <a:fillRef idx="3">
+            <a:schemeClr val="accent1"/>
+          </a:fillRef>
+          <a:effectRef idx="2">
+            <a:schemeClr val="accent1"/>
+          </a:effectRef>
+          <a:fontRef idx="minor">
+            <a:schemeClr val="lt1"/>
+          </a:fontRef>
+        </p:style>
+        <p:txBody>
+          <a:bodyPr rtlCol="0" anchor="ctr"/>
+          <a:lstStyle/>
+          <a:p>
+            <a:pPr algn="ctr"/>
+          </a:p>
+        </p:txBody>
+      </p:sp>
+      <p:sp>
+        <p:nvSpPr>
+          <p:cNvPr id="29" name="Rectangle 28"/>
+          <p:cNvSpPr/>
+          <p:nvPr/>
+        </p:nvSpPr>
+        <p:spPr>
+          <a:xfrm>
+            <a:off x="5824728" y="3557016"/>
+            <a:ext cx="548640" cy="548640"/>
+          </a:xfrm>
+          <a:prstGeom prst="rect">
+            <a:avLst/>
+          </a:prstGeom>
+          <a:solidFill>
+            <a:srgbClr val="FFFFFF"/>
+          </a:solidFill>
+          <a:ln w="9525">
+            <a:solidFill>
+              <a:srgbClr val="C9CFD6"/>
+            </a:solidFill>
+          </a:ln>
+          <a:effectLst/>
+        </p:spPr>
+        <p:style>
+          <a:lnRef idx="1">
+            <a:schemeClr val="accent1"/>
+          </a:lnRef>
+          <a:fillRef idx="3">
+            <a:schemeClr val="accent1"/>
+          </a:fillRef>
+          <a:effectRef idx="2">
+            <a:schemeClr val="accent1"/>
+          </a:effectRef>
+          <a:fontRef idx="minor">
+            <a:schemeClr val="lt1"/>
+          </a:fontRef>
+        </p:style>
+        <p:txBody>
+          <a:bodyPr rtlCol="0" anchor="ctr"/>
+          <a:lstStyle/>
+          <a:p>
+            <a:pPr algn="ctr"/>
+          </a:p>
+        </p:txBody>
+      </p:sp>
+      <p:sp>
+        <p:nvSpPr>
+          <p:cNvPr id="30" name="TextBox 29"/>
+          <p:cNvSpPr txBox="1"/>
+          <p:nvPr/>
+        </p:nvSpPr>
+        <p:spPr>
+          <a:xfrm>
+            <a:off x="6748272" y="3666744"/>
+            <a:ext cx="4572000" cy="411480"/>
+          </a:xfrm>
+          <a:prstGeom prst="rect">
+            <a:avLst/>
+          </a:prstGeom>
+          <a:noFill/>
+        </p:spPr>
+        <p:txBody>
+          <a:bodyPr wrap="square" lIns="0" rIns="0" tIns="0" bIns="0">
+            <a:spAutoFit/>
+          </a:bodyPr>
+          <a:lstStyle/>
+          <a:p>
+            <a:pPr algn="l">
+              <a:lnSpc>
+                <a:spcPts val="2100"/>
+              </a:lnSpc>
+              <a:spcAft>
+                <a:spcPts val="0"/>
+              </a:spcAft>
+            </a:pPr>
+            <a:r>
+              <a:rPr sz="1400" b="1" i="0">
+                <a:solidFill>
+                  <a:srgbClr val="7B2530"/>
+                </a:solidFill>
+                <a:latin typeface="Garamond"/>
+              </a:rPr>
+              <a:t>leaver</a:t>
+            </a:r>
+          </a:p>
+        </p:txBody>
+      </p:sp>
+      <p:sp>
+        <p:nvSpPr>
+          <p:cNvPr id="31" name="Rectangle 30"/>
+          <p:cNvSpPr/>
+          <p:nvPr/>
+        </p:nvSpPr>
+        <p:spPr>
+          <a:xfrm>
+            <a:off x="822960" y="4489704"/>
+            <a:ext cx="548640" cy="548640"/>
+          </a:xfrm>
+          <a:prstGeom prst="rect">
+            <a:avLst/>
+          </a:prstGeom>
+          <a:solidFill>
+            <a:srgbClr val="1F3864"/>
           </a:solidFill>
           <a:ln>
             <a:noFill/>
@@ -8583,34 +9408,43 @@
           </a:fontRef>
         </p:style>
         <p:txBody>
-          <a:bodyPr rtlCol="0" anchor="ctr"/>
+          <a:bodyPr rtlCol="0" anchor="ctr" wrap="none"/>
           <a:lstStyle/>
           <a:p>
             <a:pPr algn="ctr"/>
-          </a:p>
-        </p:txBody>
-      </p:sp>
-      <p:sp>
-        <p:nvSpPr>
-          <p:cNvPr id="20" name="Rounded Rectangle 19"/>
+            <a:r>
+              <a:rPr sz="1200" b="1">
+                <a:solidFill>
+                  <a:srgbClr val="FFFFFF"/>
+                </a:solidFill>
+                <a:latin typeface="Garamond"/>
+              </a:rPr>
+              <a:t>T</a:t>
+            </a:r>
+          </a:p>
+        </p:txBody>
+      </p:sp>
+      <p:sp>
+        <p:nvSpPr>
+          <p:cNvPr id="32" name="Rectangle 31"/>
           <p:cNvSpPr/>
           <p:nvPr/>
         </p:nvSpPr>
         <p:spPr>
           <a:xfrm>
-            <a:off x="6254495" y="2624328"/>
-            <a:ext cx="566928" cy="566928"/>
-          </a:xfrm>
-          <a:prstGeom prst="roundRect">
-            <a:avLst>
-              <a:gd name="adj" fmla="val 12000"/>
-            </a:avLst>
+            <a:off x="1426464" y="4489704"/>
+            <a:ext cx="548640" cy="548640"/>
+          </a:xfrm>
+          <a:prstGeom prst="rect">
+            <a:avLst/>
           </a:prstGeom>
           <a:solidFill>
-            <a:srgbClr val="00549F"/>
+            <a:srgbClr val="FFFFFF"/>
           </a:solidFill>
-          <a:ln>
-            <a:noFill/>
+          <a:ln w="9525">
+            <a:solidFill>
+              <a:srgbClr val="C9CFD6"/>
+            </a:solidFill>
           </a:ln>
           <a:effectLst/>
         </p:spPr>
@@ -8629,43 +9463,34 @@
           </a:fontRef>
         </p:style>
         <p:txBody>
-          <a:bodyPr rtlCol="0" anchor="ctr" wrap="none"/>
+          <a:bodyPr rtlCol="0" anchor="ctr"/>
           <a:lstStyle/>
           <a:p>
             <a:pPr algn="ctr"/>
-            <a:r>
-              <a:rPr sz="1300" b="1">
-                <a:solidFill>
-                  <a:srgbClr val="FFFFFF"/>
-                </a:solidFill>
-                <a:latin typeface="Garamond"/>
-              </a:rPr>
-              <a:t>T</a:t>
-            </a:r>
-          </a:p>
-        </p:txBody>
-      </p:sp>
-      <p:sp>
-        <p:nvSpPr>
-          <p:cNvPr id="21" name="Rounded Rectangle 20"/>
+          </a:p>
+        </p:txBody>
+      </p:sp>
+      <p:sp>
+        <p:nvSpPr>
+          <p:cNvPr id="33" name="Rectangle 32"/>
           <p:cNvSpPr/>
           <p:nvPr/>
         </p:nvSpPr>
         <p:spPr>
           <a:xfrm>
-            <a:off x="7370063" y="2679192"/>
-            <a:ext cx="2011680" cy="457200"/>
-          </a:xfrm>
-          <a:prstGeom prst="roundRect">
-            <a:avLst>
-              <a:gd name="adj" fmla="val 12000"/>
-            </a:avLst>
+            <a:off x="2029967" y="4489704"/>
+            <a:ext cx="548640" cy="548640"/>
+          </a:xfrm>
+          <a:prstGeom prst="rect">
+            <a:avLst/>
           </a:prstGeom>
           <a:solidFill>
-            <a:srgbClr val="00549F"/>
+            <a:srgbClr val="FFFFFF"/>
           </a:solidFill>
-          <a:ln>
-            <a:noFill/>
+          <a:ln w="9525">
+            <a:solidFill>
+              <a:srgbClr val="C9CFD6"/>
+            </a:solidFill>
           </a:ln>
           <a:effectLst/>
         </p:spPr>
@@ -8684,43 +9509,34 @@
           </a:fontRef>
         </p:style>
         <p:txBody>
-          <a:bodyPr rtlCol="0" anchor="ctr" wrap="none"/>
+          <a:bodyPr rtlCol="0" anchor="ctr"/>
           <a:lstStyle/>
           <a:p>
             <a:pPr algn="ctr"/>
-            <a:r>
-              <a:rPr sz="1300" b="1">
-                <a:solidFill>
-                  <a:srgbClr val="FFFFFF"/>
-                </a:solidFill>
-                <a:latin typeface="Garamond"/>
-              </a:rPr>
-              <a:t>stayer</a:t>
-            </a:r>
-          </a:p>
-        </p:txBody>
-      </p:sp>
-      <p:sp>
-        <p:nvSpPr>
-          <p:cNvPr id="22" name="Rounded Rectangle 21"/>
+          </a:p>
+        </p:txBody>
+      </p:sp>
+      <p:sp>
+        <p:nvSpPr>
+          <p:cNvPr id="34" name="Rectangle 33"/>
           <p:cNvSpPr/>
           <p:nvPr/>
         </p:nvSpPr>
         <p:spPr>
           <a:xfrm>
-            <a:off x="822960" y="3648456"/>
-            <a:ext cx="566928" cy="566928"/>
-          </a:xfrm>
-          <a:prstGeom prst="roundRect">
-            <a:avLst>
-              <a:gd name="adj" fmla="val 12000"/>
-            </a:avLst>
+            <a:off x="2633472" y="4489704"/>
+            <a:ext cx="548640" cy="548640"/>
+          </a:xfrm>
+          <a:prstGeom prst="rect">
+            <a:avLst/>
           </a:prstGeom>
           <a:solidFill>
-            <a:srgbClr val="00549F"/>
+            <a:srgbClr val="FFFFFF"/>
           </a:solidFill>
-          <a:ln>
-            <a:noFill/>
+          <a:ln w="9525">
+            <a:solidFill>
+              <a:srgbClr val="C9CFD6"/>
+            </a:solidFill>
           </a:ln>
           <a:effectLst/>
         </p:spPr>
@@ -8739,43 +9555,34 @@
           </a:fontRef>
         </p:style>
         <p:txBody>
-          <a:bodyPr rtlCol="0" anchor="ctr" wrap="none"/>
+          <a:bodyPr rtlCol="0" anchor="ctr"/>
           <a:lstStyle/>
           <a:p>
             <a:pPr algn="ctr"/>
-            <a:r>
-              <a:rPr sz="1300" b="1">
-                <a:solidFill>
-                  <a:srgbClr val="FFFFFF"/>
-                </a:solidFill>
-                <a:latin typeface="Garamond"/>
-              </a:rPr>
-              <a:t>T</a:t>
-            </a:r>
-          </a:p>
-        </p:txBody>
-      </p:sp>
-      <p:sp>
-        <p:nvSpPr>
-          <p:cNvPr id="23" name="Rounded Rectangle 22"/>
+          </a:p>
+        </p:txBody>
+      </p:sp>
+      <p:sp>
+        <p:nvSpPr>
+          <p:cNvPr id="35" name="Rectangle 34"/>
           <p:cNvSpPr/>
           <p:nvPr/>
         </p:nvSpPr>
         <p:spPr>
           <a:xfrm>
-            <a:off x="1481328" y="3648456"/>
-            <a:ext cx="566928" cy="566928"/>
-          </a:xfrm>
-          <a:prstGeom prst="roundRect">
-            <a:avLst>
-              <a:gd name="adj" fmla="val 12000"/>
-            </a:avLst>
+            <a:off x="4014215" y="4489704"/>
+            <a:ext cx="548640" cy="548640"/>
+          </a:xfrm>
+          <a:prstGeom prst="rect">
+            <a:avLst/>
           </a:prstGeom>
           <a:solidFill>
-            <a:srgbClr val="00549F"/>
+            <a:srgbClr val="FFFFFF"/>
           </a:solidFill>
-          <a:ln>
-            <a:noFill/>
+          <a:ln w="9525">
+            <a:solidFill>
+              <a:srgbClr val="C9CFD6"/>
+            </a:solidFill>
           </a:ln>
           <a:effectLst/>
         </p:spPr>
@@ -8794,43 +9601,34 @@
           </a:fontRef>
         </p:style>
         <p:txBody>
-          <a:bodyPr rtlCol="0" anchor="ctr" wrap="none"/>
+          <a:bodyPr rtlCol="0" anchor="ctr"/>
           <a:lstStyle/>
           <a:p>
             <a:pPr algn="ctr"/>
-            <a:r>
-              <a:rPr sz="1300" b="1">
-                <a:solidFill>
-                  <a:srgbClr val="FFFFFF"/>
-                </a:solidFill>
-                <a:latin typeface="Garamond"/>
-              </a:rPr>
-              <a:t>T</a:t>
-            </a:r>
-          </a:p>
-        </p:txBody>
-      </p:sp>
-      <p:sp>
-        <p:nvSpPr>
-          <p:cNvPr id="24" name="Rounded Rectangle 23"/>
+          </a:p>
+        </p:txBody>
+      </p:sp>
+      <p:sp>
+        <p:nvSpPr>
+          <p:cNvPr id="36" name="Rectangle 35"/>
           <p:cNvSpPr/>
           <p:nvPr/>
         </p:nvSpPr>
         <p:spPr>
           <a:xfrm>
-            <a:off x="2139696" y="3648456"/>
-            <a:ext cx="566928" cy="566928"/>
-          </a:xfrm>
-          <a:prstGeom prst="roundRect">
-            <a:avLst>
-              <a:gd name="adj" fmla="val 12000"/>
-            </a:avLst>
+            <a:off x="4617720" y="4489704"/>
+            <a:ext cx="548640" cy="548640"/>
+          </a:xfrm>
+          <a:prstGeom prst="rect">
+            <a:avLst/>
           </a:prstGeom>
           <a:solidFill>
-            <a:srgbClr val="E3E6EA"/>
+            <a:srgbClr val="FFFFFF"/>
           </a:solidFill>
-          <a:ln>
-            <a:noFill/>
+          <a:ln w="9525">
+            <a:solidFill>
+              <a:srgbClr val="C9CFD6"/>
+            </a:solidFill>
           </a:ln>
           <a:effectLst/>
         </p:spPr>
@@ -8858,25 +9656,25 @@
       </p:sp>
       <p:sp>
         <p:nvSpPr>
-          <p:cNvPr id="25" name="Rounded Rectangle 24"/>
+          <p:cNvPr id="37" name="Rectangle 36"/>
           <p:cNvSpPr/>
           <p:nvPr/>
         </p:nvSpPr>
         <p:spPr>
           <a:xfrm>
-            <a:off x="2798063" y="3648456"/>
-            <a:ext cx="566928" cy="566928"/>
-          </a:xfrm>
-          <a:prstGeom prst="roundRect">
-            <a:avLst>
-              <a:gd name="adj" fmla="val 12000"/>
-            </a:avLst>
+            <a:off x="5221224" y="4489704"/>
+            <a:ext cx="548640" cy="548640"/>
+          </a:xfrm>
+          <a:prstGeom prst="rect">
+            <a:avLst/>
           </a:prstGeom>
           <a:solidFill>
-            <a:srgbClr val="E3E6EA"/>
+            <a:srgbClr val="FFFFFF"/>
           </a:solidFill>
-          <a:ln>
-            <a:noFill/>
+          <a:ln w="9525">
+            <a:solidFill>
+              <a:srgbClr val="C9CFD6"/>
+            </a:solidFill>
           </a:ln>
           <a:effectLst/>
         </p:spPr>
@@ -8904,25 +9702,25 @@
       </p:sp>
       <p:sp>
         <p:nvSpPr>
-          <p:cNvPr id="26" name="Rounded Rectangle 25"/>
+          <p:cNvPr id="38" name="Rectangle 37"/>
           <p:cNvSpPr/>
           <p:nvPr/>
         </p:nvSpPr>
         <p:spPr>
           <a:xfrm>
-            <a:off x="4279392" y="3648456"/>
-            <a:ext cx="566928" cy="566928"/>
-          </a:xfrm>
-          <a:prstGeom prst="roundRect">
-            <a:avLst>
-              <a:gd name="adj" fmla="val 12000"/>
-            </a:avLst>
+            <a:off x="5824728" y="4489704"/>
+            <a:ext cx="548640" cy="548640"/>
+          </a:xfrm>
+          <a:prstGeom prst="rect">
+            <a:avLst/>
           </a:prstGeom>
           <a:solidFill>
-            <a:srgbClr val="E3E6EA"/>
+            <a:srgbClr val="FFFFFF"/>
           </a:solidFill>
-          <a:ln>
-            <a:noFill/>
+          <a:ln w="9525">
+            <a:solidFill>
+              <a:srgbClr val="C9CFD6"/>
+            </a:solidFill>
           </a:ln>
           <a:effectLst/>
         </p:spPr>
@@ -8950,625 +9748,42 @@
       </p:sp>
       <p:sp>
         <p:nvSpPr>
-          <p:cNvPr id="27" name="Rounded Rectangle 26"/>
-          <p:cNvSpPr/>
-          <p:nvPr/>
-        </p:nvSpPr>
-        <p:spPr>
-          <a:xfrm>
-            <a:off x="4937759" y="3648456"/>
-            <a:ext cx="566928" cy="566928"/>
-          </a:xfrm>
-          <a:prstGeom prst="roundRect">
-            <a:avLst>
-              <a:gd name="adj" fmla="val 12000"/>
-            </a:avLst>
-          </a:prstGeom>
-          <a:solidFill>
-            <a:srgbClr val="E3E6EA"/>
-          </a:solidFill>
-          <a:ln>
-            <a:noFill/>
-          </a:ln>
-          <a:effectLst/>
-        </p:spPr>
-        <p:style>
-          <a:lnRef idx="1">
-            <a:schemeClr val="accent1"/>
-          </a:lnRef>
-          <a:fillRef idx="3">
-            <a:schemeClr val="accent1"/>
-          </a:fillRef>
-          <a:effectRef idx="2">
-            <a:schemeClr val="accent1"/>
-          </a:effectRef>
-          <a:fontRef idx="minor">
-            <a:schemeClr val="lt1"/>
-          </a:fontRef>
-        </p:style>
-        <p:txBody>
-          <a:bodyPr rtlCol="0" anchor="ctr"/>
-          <a:lstStyle/>
-          <a:p>
-            <a:pPr algn="ctr"/>
-          </a:p>
-        </p:txBody>
-      </p:sp>
-      <p:sp>
-        <p:nvSpPr>
-          <p:cNvPr id="28" name="Rounded Rectangle 27"/>
-          <p:cNvSpPr/>
-          <p:nvPr/>
-        </p:nvSpPr>
-        <p:spPr>
-          <a:xfrm>
-            <a:off x="5596127" y="3648456"/>
-            <a:ext cx="566928" cy="566928"/>
-          </a:xfrm>
-          <a:prstGeom prst="roundRect">
-            <a:avLst>
-              <a:gd name="adj" fmla="val 12000"/>
-            </a:avLst>
-          </a:prstGeom>
-          <a:solidFill>
-            <a:srgbClr val="E3E6EA"/>
-          </a:solidFill>
-          <a:ln>
-            <a:noFill/>
-          </a:ln>
-          <a:effectLst/>
-        </p:spPr>
-        <p:style>
-          <a:lnRef idx="1">
-            <a:schemeClr val="accent1"/>
-          </a:lnRef>
-          <a:fillRef idx="3">
-            <a:schemeClr val="accent1"/>
-          </a:fillRef>
-          <a:effectRef idx="2">
-            <a:schemeClr val="accent1"/>
-          </a:effectRef>
-          <a:fontRef idx="minor">
-            <a:schemeClr val="lt1"/>
-          </a:fontRef>
-        </p:style>
-        <p:txBody>
-          <a:bodyPr rtlCol="0" anchor="ctr"/>
-          <a:lstStyle/>
-          <a:p>
-            <a:pPr algn="ctr"/>
-          </a:p>
-        </p:txBody>
-      </p:sp>
-      <p:sp>
-        <p:nvSpPr>
-          <p:cNvPr id="29" name="Rounded Rectangle 28"/>
-          <p:cNvSpPr/>
-          <p:nvPr/>
-        </p:nvSpPr>
-        <p:spPr>
-          <a:xfrm>
-            <a:off x="6254495" y="3648456"/>
-            <a:ext cx="566928" cy="566928"/>
-          </a:xfrm>
-          <a:prstGeom prst="roundRect">
-            <a:avLst>
-              <a:gd name="adj" fmla="val 12000"/>
-            </a:avLst>
-          </a:prstGeom>
-          <a:solidFill>
-            <a:srgbClr val="E3E6EA"/>
-          </a:solidFill>
-          <a:ln>
-            <a:noFill/>
-          </a:ln>
-          <a:effectLst/>
-        </p:spPr>
-        <p:style>
-          <a:lnRef idx="1">
-            <a:schemeClr val="accent1"/>
-          </a:lnRef>
-          <a:fillRef idx="3">
-            <a:schemeClr val="accent1"/>
-          </a:fillRef>
-          <a:effectRef idx="2">
-            <a:schemeClr val="accent1"/>
-          </a:effectRef>
-          <a:fontRef idx="minor">
-            <a:schemeClr val="lt1"/>
-          </a:fontRef>
-        </p:style>
-        <p:txBody>
-          <a:bodyPr rtlCol="0" anchor="ctr"/>
-          <a:lstStyle/>
-          <a:p>
-            <a:pPr algn="ctr"/>
-          </a:p>
-        </p:txBody>
-      </p:sp>
-      <p:sp>
-        <p:nvSpPr>
-          <p:cNvPr id="30" name="Rounded Rectangle 29"/>
-          <p:cNvSpPr/>
-          <p:nvPr/>
-        </p:nvSpPr>
-        <p:spPr>
-          <a:xfrm>
-            <a:off x="7370063" y="3703320"/>
-            <a:ext cx="2011680" cy="457200"/>
-          </a:xfrm>
-          <a:prstGeom prst="roundRect">
-            <a:avLst>
-              <a:gd name="adj" fmla="val 12000"/>
-            </a:avLst>
-          </a:prstGeom>
-          <a:solidFill>
-            <a:srgbClr val="B5443C"/>
-          </a:solidFill>
-          <a:ln>
-            <a:noFill/>
-          </a:ln>
-          <a:effectLst/>
-        </p:spPr>
-        <p:style>
-          <a:lnRef idx="1">
-            <a:schemeClr val="accent1"/>
-          </a:lnRef>
-          <a:fillRef idx="3">
-            <a:schemeClr val="accent1"/>
-          </a:fillRef>
-          <a:effectRef idx="2">
-            <a:schemeClr val="accent1"/>
-          </a:effectRef>
-          <a:fontRef idx="minor">
-            <a:schemeClr val="lt1"/>
-          </a:fontRef>
-        </p:style>
-        <p:txBody>
-          <a:bodyPr rtlCol="0" anchor="ctr" wrap="none"/>
-          <a:lstStyle/>
-          <a:p>
-            <a:pPr algn="ctr"/>
-            <a:r>
-              <a:rPr sz="1300" b="1">
-                <a:solidFill>
-                  <a:srgbClr val="FFFFFF"/>
+          <p:cNvPr id="39" name="TextBox 38"/>
+          <p:cNvSpPr txBox="1"/>
+          <p:nvPr/>
+        </p:nvSpPr>
+        <p:spPr>
+          <a:xfrm>
+            <a:off x="6748272" y="4599432"/>
+            <a:ext cx="4572000" cy="411480"/>
+          </a:xfrm>
+          <a:prstGeom prst="rect">
+            <a:avLst/>
+          </a:prstGeom>
+          <a:noFill/>
+        </p:spPr>
+        <p:txBody>
+          <a:bodyPr wrap="square" lIns="0" rIns="0" tIns="0" bIns="0">
+            <a:spAutoFit/>
+          </a:bodyPr>
+          <a:lstStyle/>
+          <a:p>
+            <a:pPr algn="l">
+              <a:lnSpc>
+                <a:spcPts val="2100"/>
+              </a:lnSpc>
+              <a:spcAft>
+                <a:spcPts val="0"/>
+              </a:spcAft>
+            </a:pPr>
+            <a:r>
+              <a:rPr sz="1400" b="1" i="0">
+                <a:solidFill>
+                  <a:srgbClr val="6B7480"/>
                 </a:solidFill>
                 <a:latin typeface="Garamond"/>
               </a:rPr>
-              <a:t>leaver</a:t>
-            </a:r>
-          </a:p>
-        </p:txBody>
-      </p:sp>
-      <p:sp>
-        <p:nvSpPr>
-          <p:cNvPr id="31" name="Rounded Rectangle 30"/>
-          <p:cNvSpPr/>
-          <p:nvPr/>
-        </p:nvSpPr>
-        <p:spPr>
-          <a:xfrm>
-            <a:off x="822960" y="4672584"/>
-            <a:ext cx="566928" cy="566928"/>
-          </a:xfrm>
-          <a:prstGeom prst="roundRect">
-            <a:avLst>
-              <a:gd name="adj" fmla="val 12000"/>
-            </a:avLst>
-          </a:prstGeom>
-          <a:solidFill>
-            <a:srgbClr val="00549F"/>
-          </a:solidFill>
-          <a:ln>
-            <a:noFill/>
-          </a:ln>
-          <a:effectLst/>
-        </p:spPr>
-        <p:style>
-          <a:lnRef idx="1">
-            <a:schemeClr val="accent1"/>
-          </a:lnRef>
-          <a:fillRef idx="3">
-            <a:schemeClr val="accent1"/>
-          </a:fillRef>
-          <a:effectRef idx="2">
-            <a:schemeClr val="accent1"/>
-          </a:effectRef>
-          <a:fontRef idx="minor">
-            <a:schemeClr val="lt1"/>
-          </a:fontRef>
-        </p:style>
-        <p:txBody>
-          <a:bodyPr rtlCol="0" anchor="ctr" wrap="none"/>
-          <a:lstStyle/>
-          <a:p>
-            <a:pPr algn="ctr"/>
-            <a:r>
-              <a:rPr sz="1300" b="1">
-                <a:solidFill>
-                  <a:srgbClr val="FFFFFF"/>
-                </a:solidFill>
-                <a:latin typeface="Garamond"/>
-              </a:rPr>
-              <a:t>T</a:t>
-            </a:r>
-          </a:p>
-        </p:txBody>
-      </p:sp>
-      <p:sp>
-        <p:nvSpPr>
-          <p:cNvPr id="32" name="Rounded Rectangle 31"/>
-          <p:cNvSpPr/>
-          <p:nvPr/>
-        </p:nvSpPr>
-        <p:spPr>
-          <a:xfrm>
-            <a:off x="1481328" y="4672584"/>
-            <a:ext cx="566928" cy="566928"/>
-          </a:xfrm>
-          <a:prstGeom prst="roundRect">
-            <a:avLst>
-              <a:gd name="adj" fmla="val 12000"/>
-            </a:avLst>
-          </a:prstGeom>
-          <a:solidFill>
-            <a:srgbClr val="E3E6EA"/>
-          </a:solidFill>
-          <a:ln>
-            <a:noFill/>
-          </a:ln>
-          <a:effectLst/>
-        </p:spPr>
-        <p:style>
-          <a:lnRef idx="1">
-            <a:schemeClr val="accent1"/>
-          </a:lnRef>
-          <a:fillRef idx="3">
-            <a:schemeClr val="accent1"/>
-          </a:fillRef>
-          <a:effectRef idx="2">
-            <a:schemeClr val="accent1"/>
-          </a:effectRef>
-          <a:fontRef idx="minor">
-            <a:schemeClr val="lt1"/>
-          </a:fontRef>
-        </p:style>
-        <p:txBody>
-          <a:bodyPr rtlCol="0" anchor="ctr"/>
-          <a:lstStyle/>
-          <a:p>
-            <a:pPr algn="ctr"/>
-          </a:p>
-        </p:txBody>
-      </p:sp>
-      <p:sp>
-        <p:nvSpPr>
-          <p:cNvPr id="33" name="Rounded Rectangle 32"/>
-          <p:cNvSpPr/>
-          <p:nvPr/>
-        </p:nvSpPr>
-        <p:spPr>
-          <a:xfrm>
-            <a:off x="2139696" y="4672584"/>
-            <a:ext cx="566928" cy="566928"/>
-          </a:xfrm>
-          <a:prstGeom prst="roundRect">
-            <a:avLst>
-              <a:gd name="adj" fmla="val 12000"/>
-            </a:avLst>
-          </a:prstGeom>
-          <a:solidFill>
-            <a:srgbClr val="E3E6EA"/>
-          </a:solidFill>
-          <a:ln>
-            <a:noFill/>
-          </a:ln>
-          <a:effectLst/>
-        </p:spPr>
-        <p:style>
-          <a:lnRef idx="1">
-            <a:schemeClr val="accent1"/>
-          </a:lnRef>
-          <a:fillRef idx="3">
-            <a:schemeClr val="accent1"/>
-          </a:fillRef>
-          <a:effectRef idx="2">
-            <a:schemeClr val="accent1"/>
-          </a:effectRef>
-          <a:fontRef idx="minor">
-            <a:schemeClr val="lt1"/>
-          </a:fontRef>
-        </p:style>
-        <p:txBody>
-          <a:bodyPr rtlCol="0" anchor="ctr"/>
-          <a:lstStyle/>
-          <a:p>
-            <a:pPr algn="ctr"/>
-          </a:p>
-        </p:txBody>
-      </p:sp>
-      <p:sp>
-        <p:nvSpPr>
-          <p:cNvPr id="34" name="Rounded Rectangle 33"/>
-          <p:cNvSpPr/>
-          <p:nvPr/>
-        </p:nvSpPr>
-        <p:spPr>
-          <a:xfrm>
-            <a:off x="2798063" y="4672584"/>
-            <a:ext cx="566928" cy="566928"/>
-          </a:xfrm>
-          <a:prstGeom prst="roundRect">
-            <a:avLst>
-              <a:gd name="adj" fmla="val 12000"/>
-            </a:avLst>
-          </a:prstGeom>
-          <a:solidFill>
-            <a:srgbClr val="E3E6EA"/>
-          </a:solidFill>
-          <a:ln>
-            <a:noFill/>
-          </a:ln>
-          <a:effectLst/>
-        </p:spPr>
-        <p:style>
-          <a:lnRef idx="1">
-            <a:schemeClr val="accent1"/>
-          </a:lnRef>
-          <a:fillRef idx="3">
-            <a:schemeClr val="accent1"/>
-          </a:fillRef>
-          <a:effectRef idx="2">
-            <a:schemeClr val="accent1"/>
-          </a:effectRef>
-          <a:fontRef idx="minor">
-            <a:schemeClr val="lt1"/>
-          </a:fontRef>
-        </p:style>
-        <p:txBody>
-          <a:bodyPr rtlCol="0" anchor="ctr"/>
-          <a:lstStyle/>
-          <a:p>
-            <a:pPr algn="ctr"/>
-          </a:p>
-        </p:txBody>
-      </p:sp>
-      <p:sp>
-        <p:nvSpPr>
-          <p:cNvPr id="35" name="Rounded Rectangle 34"/>
-          <p:cNvSpPr/>
-          <p:nvPr/>
-        </p:nvSpPr>
-        <p:spPr>
-          <a:xfrm>
-            <a:off x="4279392" y="4672584"/>
-            <a:ext cx="566928" cy="566928"/>
-          </a:xfrm>
-          <a:prstGeom prst="roundRect">
-            <a:avLst>
-              <a:gd name="adj" fmla="val 12000"/>
-            </a:avLst>
-          </a:prstGeom>
-          <a:solidFill>
-            <a:srgbClr val="E3E6EA"/>
-          </a:solidFill>
-          <a:ln>
-            <a:noFill/>
-          </a:ln>
-          <a:effectLst/>
-        </p:spPr>
-        <p:style>
-          <a:lnRef idx="1">
-            <a:schemeClr val="accent1"/>
-          </a:lnRef>
-          <a:fillRef idx="3">
-            <a:schemeClr val="accent1"/>
-          </a:fillRef>
-          <a:effectRef idx="2">
-            <a:schemeClr val="accent1"/>
-          </a:effectRef>
-          <a:fontRef idx="minor">
-            <a:schemeClr val="lt1"/>
-          </a:fontRef>
-        </p:style>
-        <p:txBody>
-          <a:bodyPr rtlCol="0" anchor="ctr"/>
-          <a:lstStyle/>
-          <a:p>
-            <a:pPr algn="ctr"/>
-          </a:p>
-        </p:txBody>
-      </p:sp>
-      <p:sp>
-        <p:nvSpPr>
-          <p:cNvPr id="36" name="Rounded Rectangle 35"/>
-          <p:cNvSpPr/>
-          <p:nvPr/>
-        </p:nvSpPr>
-        <p:spPr>
-          <a:xfrm>
-            <a:off x="4937759" y="4672584"/>
-            <a:ext cx="566928" cy="566928"/>
-          </a:xfrm>
-          <a:prstGeom prst="roundRect">
-            <a:avLst>
-              <a:gd name="adj" fmla="val 12000"/>
-            </a:avLst>
-          </a:prstGeom>
-          <a:solidFill>
-            <a:srgbClr val="E3E6EA"/>
-          </a:solidFill>
-          <a:ln>
-            <a:noFill/>
-          </a:ln>
-          <a:effectLst/>
-        </p:spPr>
-        <p:style>
-          <a:lnRef idx="1">
-            <a:schemeClr val="accent1"/>
-          </a:lnRef>
-          <a:fillRef idx="3">
-            <a:schemeClr val="accent1"/>
-          </a:fillRef>
-          <a:effectRef idx="2">
-            <a:schemeClr val="accent1"/>
-          </a:effectRef>
-          <a:fontRef idx="minor">
-            <a:schemeClr val="lt1"/>
-          </a:fontRef>
-        </p:style>
-        <p:txBody>
-          <a:bodyPr rtlCol="0" anchor="ctr"/>
-          <a:lstStyle/>
-          <a:p>
-            <a:pPr algn="ctr"/>
-          </a:p>
-        </p:txBody>
-      </p:sp>
-      <p:sp>
-        <p:nvSpPr>
-          <p:cNvPr id="37" name="Rounded Rectangle 36"/>
-          <p:cNvSpPr/>
-          <p:nvPr/>
-        </p:nvSpPr>
-        <p:spPr>
-          <a:xfrm>
-            <a:off x="5596127" y="4672584"/>
-            <a:ext cx="566928" cy="566928"/>
-          </a:xfrm>
-          <a:prstGeom prst="roundRect">
-            <a:avLst>
-              <a:gd name="adj" fmla="val 12000"/>
-            </a:avLst>
-          </a:prstGeom>
-          <a:solidFill>
-            <a:srgbClr val="E3E6EA"/>
-          </a:solidFill>
-          <a:ln>
-            <a:noFill/>
-          </a:ln>
-          <a:effectLst/>
-        </p:spPr>
-        <p:style>
-          <a:lnRef idx="1">
-            <a:schemeClr val="accent1"/>
-          </a:lnRef>
-          <a:fillRef idx="3">
-            <a:schemeClr val="accent1"/>
-          </a:fillRef>
-          <a:effectRef idx="2">
-            <a:schemeClr val="accent1"/>
-          </a:effectRef>
-          <a:fontRef idx="minor">
-            <a:schemeClr val="lt1"/>
-          </a:fontRef>
-        </p:style>
-        <p:txBody>
-          <a:bodyPr rtlCol="0" anchor="ctr"/>
-          <a:lstStyle/>
-          <a:p>
-            <a:pPr algn="ctr"/>
-          </a:p>
-        </p:txBody>
-      </p:sp>
-      <p:sp>
-        <p:nvSpPr>
-          <p:cNvPr id="38" name="Rounded Rectangle 37"/>
-          <p:cNvSpPr/>
-          <p:nvPr/>
-        </p:nvSpPr>
-        <p:spPr>
-          <a:xfrm>
-            <a:off x="6254495" y="4672584"/>
-            <a:ext cx="566928" cy="566928"/>
-          </a:xfrm>
-          <a:prstGeom prst="roundRect">
-            <a:avLst>
-              <a:gd name="adj" fmla="val 12000"/>
-            </a:avLst>
-          </a:prstGeom>
-          <a:solidFill>
-            <a:srgbClr val="E3E6EA"/>
-          </a:solidFill>
-          <a:ln>
-            <a:noFill/>
-          </a:ln>
-          <a:effectLst/>
-        </p:spPr>
-        <p:style>
-          <a:lnRef idx="1">
-            <a:schemeClr val="accent1"/>
-          </a:lnRef>
-          <a:fillRef idx="3">
-            <a:schemeClr val="accent1"/>
-          </a:fillRef>
-          <a:effectRef idx="2">
-            <a:schemeClr val="accent1"/>
-          </a:effectRef>
-          <a:fontRef idx="minor">
-            <a:schemeClr val="lt1"/>
-          </a:fontRef>
-        </p:style>
-        <p:txBody>
-          <a:bodyPr rtlCol="0" anchor="ctr"/>
-          <a:lstStyle/>
-          <a:p>
-            <a:pPr algn="ctr"/>
-          </a:p>
-        </p:txBody>
-      </p:sp>
-      <p:sp>
-        <p:nvSpPr>
-          <p:cNvPr id="39" name="Rounded Rectangle 38"/>
-          <p:cNvSpPr/>
-          <p:nvPr/>
-        </p:nvSpPr>
-        <p:spPr>
-          <a:xfrm>
-            <a:off x="7370063" y="4727448"/>
-            <a:ext cx="2011680" cy="457200"/>
-          </a:xfrm>
-          <a:prstGeom prst="roundRect">
-            <a:avLst>
-              <a:gd name="adj" fmla="val 12000"/>
-            </a:avLst>
-          </a:prstGeom>
-          <a:solidFill>
-            <a:srgbClr val="8A9096"/>
-          </a:solidFill>
-          <a:ln>
-            <a:noFill/>
-          </a:ln>
-          <a:effectLst/>
-        </p:spPr>
-        <p:style>
-          <a:lnRef idx="1">
-            <a:schemeClr val="accent1"/>
-          </a:lnRef>
-          <a:fillRef idx="3">
-            <a:schemeClr val="accent1"/>
-          </a:fillRef>
-          <a:effectRef idx="2">
-            <a:schemeClr val="accent1"/>
-          </a:effectRef>
-          <a:fontRef idx="minor">
-            <a:schemeClr val="lt1"/>
-          </a:fontRef>
-        </p:style>
-        <p:txBody>
-          <a:bodyPr rtlCol="0" anchor="ctr" wrap="none"/>
-          <a:lstStyle/>
-          <a:p>
-            <a:pPr algn="ctr"/>
-            <a:r>
-              <a:rPr sz="1300" b="1">
-                <a:solidFill>
-                  <a:srgbClr val="FFFFFF"/>
-                </a:solidFill>
-                <a:latin typeface="Garamond"/>
-              </a:rPr>
-              <a:t>not counted</a:t>
+              <a:t>excluded: a single year-1 observation</a:t>
             </a:r>
           </a:p>
         </p:txBody>
@@ -9581,8 +9796,8 @@
         </p:nvSpPr>
         <p:spPr>
           <a:xfrm>
-            <a:off x="822960" y="5742432"/>
-            <a:ext cx="4572000" cy="365760"/>
+            <a:off x="822960" y="5495544"/>
+            <a:ext cx="4572000" cy="320040"/>
           </a:xfrm>
           <a:prstGeom prst="rect">
             <a:avLst/>
@@ -9604,13 +9819,13 @@
               </a:spcAft>
             </a:pPr>
             <a:r>
-              <a:rPr sz="1200" b="0" i="0">
+              <a:rPr sz="1200" b="0" i="1">
                 <a:solidFill>
                   <a:srgbClr val="6B7480"/>
                 </a:solidFill>
                 <a:latin typeface="Garamond"/>
               </a:rPr>
-              <a:t>year one</a:t>
+              <a:t>Year 1</a:t>
             </a:r>
           </a:p>
         </p:txBody>
@@ -9623,8 +9838,8 @@
         </p:nvSpPr>
         <p:spPr>
           <a:xfrm>
-            <a:off x="5852160" y="5742432"/>
-            <a:ext cx="4572000" cy="365760"/>
+            <a:off x="5806440" y="5495544"/>
+            <a:ext cx="4572000" cy="320040"/>
           </a:xfrm>
           <a:prstGeom prst="rect">
             <a:avLst/>
@@ -9646,13 +9861,13 @@
               </a:spcAft>
             </a:pPr>
             <a:r>
-              <a:rPr sz="1200" b="0" i="0">
+              <a:rPr sz="1200" b="0" i="1">
                 <a:solidFill>
                   <a:srgbClr val="6B7480"/>
                 </a:solidFill>
                 <a:latin typeface="Garamond"/>
               </a:rPr>
-              <a:t>one year later</a:t>
+              <a:t>Year 2</a:t>
             </a:r>
           </a:p>
         </p:txBody>
@@ -9665,7 +9880,7 @@
         </p:nvSpPr>
         <p:spPr>
           <a:xfrm>
-            <a:off x="822960" y="6153912"/>
+            <a:off x="822960" y="5897879"/>
             <a:ext cx="10515600" cy="365760"/>
           </a:xfrm>
           <a:prstGeom prst="rect">
@@ -9681,20 +9896,20 @@
           <a:p>
             <a:pPr algn="l">
               <a:lnSpc>
-                <a:spcPts val="1650"/>
+                <a:spcPts val="1800"/>
               </a:lnSpc>
               <a:spcAft>
                 <a:spcPts val="0"/>
               </a:spcAft>
             </a:pPr>
             <a:r>
-              <a:rPr sz="1100" b="0" i="1">
+              <a:rPr sz="1200" b="0" i="1">
                 <a:solidFill>
                   <a:srgbClr val="6B7480"/>
                 </a:solidFill>
                 <a:latin typeface="Garamond"/>
               </a:rPr>
-              <a:t>Filled: seen teaching.  Light: interviewed, not teaching.</a:t>
+              <a:t>Filled cells denote interviews in which the individual is observed teaching; bordered cells, interviews without teaching.</a:t>
             </a:r>
           </a:p>
         </p:txBody>
@@ -9747,7 +9962,7 @@
                 </a:solidFill>
                 <a:latin typeface="Garamond"/>
               </a:rPr>
-              <a:t>Six measures, one year</a:t>
+              <a:t>Measuring attrition: definitions</a:t>
             </a:r>
           </a:p>
         </p:txBody>
@@ -9795,8 +10010,8 @@
         </p:nvSpPr>
         <p:spPr>
           <a:xfrm>
-            <a:off x="822960" y="1170432"/>
-            <a:ext cx="10543032" cy="365760"/>
+            <a:off x="822960" y="1152144"/>
+            <a:ext cx="3200400" cy="320040"/>
           </a:xfrm>
           <a:prstGeom prst="rect">
             <a:avLst/>
@@ -9818,13 +10033,13 @@
               </a:spcAft>
             </a:pPr>
             <a:r>
-              <a:rPr sz="1300" b="0" i="1">
-                <a:solidFill>
-                  <a:srgbClr val="6B7480"/>
+              <a:rPr sz="1300" b="1" i="0">
+                <a:solidFill>
+                  <a:srgbClr val="1F3864"/>
                 </a:solidFill>
                 <a:latin typeface="Garamond"/>
               </a:rPr>
-              <a:t>Percent of teachers leaving between 2021 and 2022</a:t>
+              <a:t>Year 1: interviews 1–4</a:t>
             </a:r>
           </a:p>
         </p:txBody>
@@ -9837,8 +10052,1033 @@
         </p:nvSpPr>
         <p:spPr>
           <a:xfrm>
-            <a:off x="822960" y="1783080"/>
-            <a:ext cx="3108960" cy="365760"/>
+            <a:off x="4480560" y="1152144"/>
+            <a:ext cx="3291840" cy="320040"/>
+          </a:xfrm>
+          <a:prstGeom prst="rect">
+            <a:avLst/>
+          </a:prstGeom>
+          <a:noFill/>
+        </p:spPr>
+        <p:txBody>
+          <a:bodyPr wrap="square" lIns="0" rIns="0" tIns="0" bIns="0">
+            <a:spAutoFit/>
+          </a:bodyPr>
+          <a:lstStyle/>
+          <a:p>
+            <a:pPr algn="ctr">
+              <a:lnSpc>
+                <a:spcPts val="1875"/>
+              </a:lnSpc>
+              <a:spcAft>
+                <a:spcPts val="0"/>
+              </a:spcAft>
+            </a:pPr>
+            <a:r>
+              <a:rPr sz="1250" b="0" i="1">
+                <a:solidFill>
+                  <a:srgbClr val="6B7480"/>
+                </a:solidFill>
+                <a:latin typeface="Garamond"/>
+              </a:rPr>
+              <a:t>8 months out of the sample</a:t>
+            </a:r>
+          </a:p>
+        </p:txBody>
+      </p:sp>
+      <p:sp>
+        <p:nvSpPr>
+          <p:cNvPr id="6" name="TextBox 5"/>
+          <p:cNvSpPr txBox="1"/>
+          <p:nvPr/>
+        </p:nvSpPr>
+        <p:spPr>
+          <a:xfrm>
+            <a:off x="8229600" y="1152144"/>
+            <a:ext cx="3200400" cy="320040"/>
+          </a:xfrm>
+          <a:prstGeom prst="rect">
+            <a:avLst/>
+          </a:prstGeom>
+          <a:noFill/>
+        </p:spPr>
+        <p:txBody>
+          <a:bodyPr wrap="square" lIns="0" rIns="0" tIns="0" bIns="0">
+            <a:spAutoFit/>
+          </a:bodyPr>
+          <a:lstStyle/>
+          <a:p>
+            <a:pPr algn="r">
+              <a:lnSpc>
+                <a:spcPts val="1950"/>
+              </a:lnSpc>
+              <a:spcAft>
+                <a:spcPts val="0"/>
+              </a:spcAft>
+            </a:pPr>
+            <a:r>
+              <a:rPr sz="1300" b="1" i="0">
+                <a:solidFill>
+                  <a:srgbClr val="7B2530"/>
+                </a:solidFill>
+                <a:latin typeface="Garamond"/>
+              </a:rPr>
+              <a:t>Year 2: interviews 5–8</a:t>
+            </a:r>
+          </a:p>
+        </p:txBody>
+      </p:sp>
+      <p:sp>
+        <p:nvSpPr>
+          <p:cNvPr id="7" name="Rectangle 6"/>
+          <p:cNvSpPr/>
+          <p:nvPr/>
+        </p:nvSpPr>
+        <p:spPr>
+          <a:xfrm>
+            <a:off x="822960" y="1481328"/>
+            <a:ext cx="658939" cy="457200"/>
+          </a:xfrm>
+          <a:prstGeom prst="rect">
+            <a:avLst/>
+          </a:prstGeom>
+          <a:solidFill>
+            <a:srgbClr val="1F3864"/>
+          </a:solidFill>
+          <a:ln>
+            <a:noFill/>
+          </a:ln>
+          <a:effectLst/>
+        </p:spPr>
+        <p:style>
+          <a:lnRef idx="1">
+            <a:schemeClr val="accent1"/>
+          </a:lnRef>
+          <a:fillRef idx="3">
+            <a:schemeClr val="accent1"/>
+          </a:fillRef>
+          <a:effectRef idx="2">
+            <a:schemeClr val="accent1"/>
+          </a:effectRef>
+          <a:fontRef idx="minor">
+            <a:schemeClr val="lt1"/>
+          </a:fontRef>
+        </p:style>
+        <p:txBody>
+          <a:bodyPr rtlCol="0" anchor="ctr" wrap="none"/>
+          <a:lstStyle/>
+          <a:p>
+            <a:pPr algn="ctr"/>
+            <a:r>
+              <a:rPr sz="1200" b="1">
+                <a:solidFill>
+                  <a:srgbClr val="FFFFFF"/>
+                </a:solidFill>
+                <a:latin typeface="Garamond"/>
+              </a:rPr>
+              <a:t>1</a:t>
+            </a:r>
+          </a:p>
+        </p:txBody>
+      </p:sp>
+      <p:sp>
+        <p:nvSpPr>
+          <p:cNvPr id="8" name="Rectangle 7"/>
+          <p:cNvSpPr/>
+          <p:nvPr/>
+        </p:nvSpPr>
+        <p:spPr>
+          <a:xfrm>
+            <a:off x="1481899" y="1481328"/>
+            <a:ext cx="658939" cy="457200"/>
+          </a:xfrm>
+          <a:prstGeom prst="rect">
+            <a:avLst/>
+          </a:prstGeom>
+          <a:solidFill>
+            <a:srgbClr val="1F3864"/>
+          </a:solidFill>
+          <a:ln>
+            <a:noFill/>
+          </a:ln>
+          <a:effectLst/>
+        </p:spPr>
+        <p:style>
+          <a:lnRef idx="1">
+            <a:schemeClr val="accent1"/>
+          </a:lnRef>
+          <a:fillRef idx="3">
+            <a:schemeClr val="accent1"/>
+          </a:fillRef>
+          <a:effectRef idx="2">
+            <a:schemeClr val="accent1"/>
+          </a:effectRef>
+          <a:fontRef idx="minor">
+            <a:schemeClr val="lt1"/>
+          </a:fontRef>
+        </p:style>
+        <p:txBody>
+          <a:bodyPr rtlCol="0" anchor="ctr" wrap="none"/>
+          <a:lstStyle/>
+          <a:p>
+            <a:pPr algn="ctr"/>
+            <a:r>
+              <a:rPr sz="1200" b="1">
+                <a:solidFill>
+                  <a:srgbClr val="FFFFFF"/>
+                </a:solidFill>
+                <a:latin typeface="Garamond"/>
+              </a:rPr>
+              <a:t>2</a:t>
+            </a:r>
+          </a:p>
+        </p:txBody>
+      </p:sp>
+      <p:sp>
+        <p:nvSpPr>
+          <p:cNvPr id="9" name="Rectangle 8"/>
+          <p:cNvSpPr/>
+          <p:nvPr/>
+        </p:nvSpPr>
+        <p:spPr>
+          <a:xfrm>
+            <a:off x="2140839" y="1481328"/>
+            <a:ext cx="658939" cy="457200"/>
+          </a:xfrm>
+          <a:prstGeom prst="rect">
+            <a:avLst/>
+          </a:prstGeom>
+          <a:solidFill>
+            <a:srgbClr val="1F3864"/>
+          </a:solidFill>
+          <a:ln>
+            <a:noFill/>
+          </a:ln>
+          <a:effectLst/>
+        </p:spPr>
+        <p:style>
+          <a:lnRef idx="1">
+            <a:schemeClr val="accent1"/>
+          </a:lnRef>
+          <a:fillRef idx="3">
+            <a:schemeClr val="accent1"/>
+          </a:fillRef>
+          <a:effectRef idx="2">
+            <a:schemeClr val="accent1"/>
+          </a:effectRef>
+          <a:fontRef idx="minor">
+            <a:schemeClr val="lt1"/>
+          </a:fontRef>
+        </p:style>
+        <p:txBody>
+          <a:bodyPr rtlCol="0" anchor="ctr" wrap="none"/>
+          <a:lstStyle/>
+          <a:p>
+            <a:pPr algn="ctr"/>
+            <a:r>
+              <a:rPr sz="1200" b="1">
+                <a:solidFill>
+                  <a:srgbClr val="FFFFFF"/>
+                </a:solidFill>
+                <a:latin typeface="Garamond"/>
+              </a:rPr>
+              <a:t>3</a:t>
+            </a:r>
+          </a:p>
+        </p:txBody>
+      </p:sp>
+      <p:sp>
+        <p:nvSpPr>
+          <p:cNvPr id="10" name="Rectangle 9"/>
+          <p:cNvSpPr/>
+          <p:nvPr/>
+        </p:nvSpPr>
+        <p:spPr>
+          <a:xfrm>
+            <a:off x="2799778" y="1481328"/>
+            <a:ext cx="658939" cy="457200"/>
+          </a:xfrm>
+          <a:prstGeom prst="rect">
+            <a:avLst/>
+          </a:prstGeom>
+          <a:solidFill>
+            <a:srgbClr val="1F3864"/>
+          </a:solidFill>
+          <a:ln>
+            <a:noFill/>
+          </a:ln>
+          <a:effectLst/>
+        </p:spPr>
+        <p:style>
+          <a:lnRef idx="1">
+            <a:schemeClr val="accent1"/>
+          </a:lnRef>
+          <a:fillRef idx="3">
+            <a:schemeClr val="accent1"/>
+          </a:fillRef>
+          <a:effectRef idx="2">
+            <a:schemeClr val="accent1"/>
+          </a:effectRef>
+          <a:fontRef idx="minor">
+            <a:schemeClr val="lt1"/>
+          </a:fontRef>
+        </p:style>
+        <p:txBody>
+          <a:bodyPr rtlCol="0" anchor="ctr" wrap="none"/>
+          <a:lstStyle/>
+          <a:p>
+            <a:pPr algn="ctr"/>
+            <a:r>
+              <a:rPr sz="1200" b="1">
+                <a:solidFill>
+                  <a:srgbClr val="FFFFFF"/>
+                </a:solidFill>
+                <a:latin typeface="Garamond"/>
+              </a:rPr>
+              <a:t>4</a:t>
+            </a:r>
+          </a:p>
+        </p:txBody>
+      </p:sp>
+      <p:sp>
+        <p:nvSpPr>
+          <p:cNvPr id="11" name="Rectangle 10"/>
+          <p:cNvSpPr/>
+          <p:nvPr/>
+        </p:nvSpPr>
+        <p:spPr>
+          <a:xfrm>
+            <a:off x="3458718" y="1481328"/>
+            <a:ext cx="658939" cy="457200"/>
+          </a:xfrm>
+          <a:prstGeom prst="rect">
+            <a:avLst/>
+          </a:prstGeom>
+          <a:solidFill>
+            <a:srgbClr val="FFFFFF"/>
+          </a:solidFill>
+          <a:ln w="9525">
+            <a:solidFill>
+              <a:srgbClr val="C9CFD6"/>
+            </a:solidFill>
+          </a:ln>
+          <a:effectLst/>
+        </p:spPr>
+        <p:style>
+          <a:lnRef idx="1">
+            <a:schemeClr val="accent1"/>
+          </a:lnRef>
+          <a:fillRef idx="3">
+            <a:schemeClr val="accent1"/>
+          </a:fillRef>
+          <a:effectRef idx="2">
+            <a:schemeClr val="accent1"/>
+          </a:effectRef>
+          <a:fontRef idx="minor">
+            <a:schemeClr val="lt1"/>
+          </a:fontRef>
+        </p:style>
+        <p:txBody>
+          <a:bodyPr rtlCol="0" anchor="ctr" wrap="none"/>
+          <a:lstStyle/>
+          <a:p>
+            <a:pPr algn="ctr"/>
+            <a:r>
+              <a:rPr sz="1200" b="1">
+                <a:solidFill>
+                  <a:srgbClr val="6B7480"/>
+                </a:solidFill>
+                <a:latin typeface="Garamond"/>
+              </a:rPr>
+              <a:t>5</a:t>
+            </a:r>
+          </a:p>
+        </p:txBody>
+      </p:sp>
+      <p:sp>
+        <p:nvSpPr>
+          <p:cNvPr id="12" name="Rectangle 11"/>
+          <p:cNvSpPr/>
+          <p:nvPr/>
+        </p:nvSpPr>
+        <p:spPr>
+          <a:xfrm>
+            <a:off x="4117657" y="1481328"/>
+            <a:ext cx="658939" cy="457200"/>
+          </a:xfrm>
+          <a:prstGeom prst="rect">
+            <a:avLst/>
+          </a:prstGeom>
+          <a:solidFill>
+            <a:srgbClr val="FFFFFF"/>
+          </a:solidFill>
+          <a:ln w="9525">
+            <a:solidFill>
+              <a:srgbClr val="C9CFD6"/>
+            </a:solidFill>
+          </a:ln>
+          <a:effectLst/>
+        </p:spPr>
+        <p:style>
+          <a:lnRef idx="1">
+            <a:schemeClr val="accent1"/>
+          </a:lnRef>
+          <a:fillRef idx="3">
+            <a:schemeClr val="accent1"/>
+          </a:fillRef>
+          <a:effectRef idx="2">
+            <a:schemeClr val="accent1"/>
+          </a:effectRef>
+          <a:fontRef idx="minor">
+            <a:schemeClr val="lt1"/>
+          </a:fontRef>
+        </p:style>
+        <p:txBody>
+          <a:bodyPr rtlCol="0" anchor="ctr" wrap="none"/>
+          <a:lstStyle/>
+          <a:p>
+            <a:pPr algn="ctr"/>
+            <a:r>
+              <a:rPr sz="1200" b="1">
+                <a:solidFill>
+                  <a:srgbClr val="6B7480"/>
+                </a:solidFill>
+                <a:latin typeface="Garamond"/>
+              </a:rPr>
+              <a:t>6</a:t>
+            </a:r>
+          </a:p>
+        </p:txBody>
+      </p:sp>
+      <p:sp>
+        <p:nvSpPr>
+          <p:cNvPr id="13" name="Rectangle 12"/>
+          <p:cNvSpPr/>
+          <p:nvPr/>
+        </p:nvSpPr>
+        <p:spPr>
+          <a:xfrm>
+            <a:off x="4776597" y="1481328"/>
+            <a:ext cx="658939" cy="457200"/>
+          </a:xfrm>
+          <a:prstGeom prst="rect">
+            <a:avLst/>
+          </a:prstGeom>
+          <a:solidFill>
+            <a:srgbClr val="FFFFFF"/>
+          </a:solidFill>
+          <a:ln w="9525">
+            <a:solidFill>
+              <a:srgbClr val="C9CFD6"/>
+            </a:solidFill>
+          </a:ln>
+          <a:effectLst/>
+        </p:spPr>
+        <p:style>
+          <a:lnRef idx="1">
+            <a:schemeClr val="accent1"/>
+          </a:lnRef>
+          <a:fillRef idx="3">
+            <a:schemeClr val="accent1"/>
+          </a:fillRef>
+          <a:effectRef idx="2">
+            <a:schemeClr val="accent1"/>
+          </a:effectRef>
+          <a:fontRef idx="minor">
+            <a:schemeClr val="lt1"/>
+          </a:fontRef>
+        </p:style>
+        <p:txBody>
+          <a:bodyPr rtlCol="0" anchor="ctr" wrap="none"/>
+          <a:lstStyle/>
+          <a:p>
+            <a:pPr algn="ctr"/>
+            <a:r>
+              <a:rPr sz="1200" b="1">
+                <a:solidFill>
+                  <a:srgbClr val="6B7480"/>
+                </a:solidFill>
+                <a:latin typeface="Garamond"/>
+              </a:rPr>
+              <a:t>7</a:t>
+            </a:r>
+          </a:p>
+        </p:txBody>
+      </p:sp>
+      <p:sp>
+        <p:nvSpPr>
+          <p:cNvPr id="14" name="Rectangle 13"/>
+          <p:cNvSpPr/>
+          <p:nvPr/>
+        </p:nvSpPr>
+        <p:spPr>
+          <a:xfrm>
+            <a:off x="5435536" y="1481328"/>
+            <a:ext cx="658939" cy="457200"/>
+          </a:xfrm>
+          <a:prstGeom prst="rect">
+            <a:avLst/>
+          </a:prstGeom>
+          <a:solidFill>
+            <a:srgbClr val="FFFFFF"/>
+          </a:solidFill>
+          <a:ln w="9525">
+            <a:solidFill>
+              <a:srgbClr val="C9CFD6"/>
+            </a:solidFill>
+          </a:ln>
+          <a:effectLst/>
+        </p:spPr>
+        <p:style>
+          <a:lnRef idx="1">
+            <a:schemeClr val="accent1"/>
+          </a:lnRef>
+          <a:fillRef idx="3">
+            <a:schemeClr val="accent1"/>
+          </a:fillRef>
+          <a:effectRef idx="2">
+            <a:schemeClr val="accent1"/>
+          </a:effectRef>
+          <a:fontRef idx="minor">
+            <a:schemeClr val="lt1"/>
+          </a:fontRef>
+        </p:style>
+        <p:txBody>
+          <a:bodyPr rtlCol="0" anchor="ctr" wrap="none"/>
+          <a:lstStyle/>
+          <a:p>
+            <a:pPr algn="ctr"/>
+            <a:r>
+              <a:rPr sz="1200" b="1">
+                <a:solidFill>
+                  <a:srgbClr val="6B7480"/>
+                </a:solidFill>
+                <a:latin typeface="Garamond"/>
+              </a:rPr>
+              <a:t>8</a:t>
+            </a:r>
+          </a:p>
+        </p:txBody>
+      </p:sp>
+      <p:sp>
+        <p:nvSpPr>
+          <p:cNvPr id="15" name="Rectangle 14"/>
+          <p:cNvSpPr/>
+          <p:nvPr/>
+        </p:nvSpPr>
+        <p:spPr>
+          <a:xfrm>
+            <a:off x="6094476" y="1481328"/>
+            <a:ext cx="658939" cy="457200"/>
+          </a:xfrm>
+          <a:prstGeom prst="rect">
+            <a:avLst/>
+          </a:prstGeom>
+          <a:solidFill>
+            <a:srgbClr val="FFFFFF"/>
+          </a:solidFill>
+          <a:ln w="9525">
+            <a:solidFill>
+              <a:srgbClr val="C9CFD6"/>
+            </a:solidFill>
+          </a:ln>
+          <a:effectLst/>
+        </p:spPr>
+        <p:style>
+          <a:lnRef idx="1">
+            <a:schemeClr val="accent1"/>
+          </a:lnRef>
+          <a:fillRef idx="3">
+            <a:schemeClr val="accent1"/>
+          </a:fillRef>
+          <a:effectRef idx="2">
+            <a:schemeClr val="accent1"/>
+          </a:effectRef>
+          <a:fontRef idx="minor">
+            <a:schemeClr val="lt1"/>
+          </a:fontRef>
+        </p:style>
+        <p:txBody>
+          <a:bodyPr rtlCol="0" anchor="ctr" wrap="none"/>
+          <a:lstStyle/>
+          <a:p>
+            <a:pPr algn="ctr"/>
+            <a:r>
+              <a:rPr sz="1200" b="1">
+                <a:solidFill>
+                  <a:srgbClr val="6B7480"/>
+                </a:solidFill>
+                <a:latin typeface="Garamond"/>
+              </a:rPr>
+              <a:t>9</a:t>
+            </a:r>
+          </a:p>
+        </p:txBody>
+      </p:sp>
+      <p:sp>
+        <p:nvSpPr>
+          <p:cNvPr id="16" name="Rectangle 15"/>
+          <p:cNvSpPr/>
+          <p:nvPr/>
+        </p:nvSpPr>
+        <p:spPr>
+          <a:xfrm>
+            <a:off x="6753415" y="1481328"/>
+            <a:ext cx="658939" cy="457200"/>
+          </a:xfrm>
+          <a:prstGeom prst="rect">
+            <a:avLst/>
+          </a:prstGeom>
+          <a:solidFill>
+            <a:srgbClr val="FFFFFF"/>
+          </a:solidFill>
+          <a:ln w="9525">
+            <a:solidFill>
+              <a:srgbClr val="C9CFD6"/>
+            </a:solidFill>
+          </a:ln>
+          <a:effectLst/>
+        </p:spPr>
+        <p:style>
+          <a:lnRef idx="1">
+            <a:schemeClr val="accent1"/>
+          </a:lnRef>
+          <a:fillRef idx="3">
+            <a:schemeClr val="accent1"/>
+          </a:fillRef>
+          <a:effectRef idx="2">
+            <a:schemeClr val="accent1"/>
+          </a:effectRef>
+          <a:fontRef idx="minor">
+            <a:schemeClr val="lt1"/>
+          </a:fontRef>
+        </p:style>
+        <p:txBody>
+          <a:bodyPr rtlCol="0" anchor="ctr" wrap="none"/>
+          <a:lstStyle/>
+          <a:p>
+            <a:pPr algn="ctr"/>
+            <a:r>
+              <a:rPr sz="1200" b="1">
+                <a:solidFill>
+                  <a:srgbClr val="6B7480"/>
+                </a:solidFill>
+                <a:latin typeface="Garamond"/>
+              </a:rPr>
+              <a:t>10</a:t>
+            </a:r>
+          </a:p>
+        </p:txBody>
+      </p:sp>
+      <p:sp>
+        <p:nvSpPr>
+          <p:cNvPr id="17" name="Rectangle 16"/>
+          <p:cNvSpPr/>
+          <p:nvPr/>
+        </p:nvSpPr>
+        <p:spPr>
+          <a:xfrm>
+            <a:off x="7412354" y="1481328"/>
+            <a:ext cx="658939" cy="457200"/>
+          </a:xfrm>
+          <a:prstGeom prst="rect">
+            <a:avLst/>
+          </a:prstGeom>
+          <a:solidFill>
+            <a:srgbClr val="FFFFFF"/>
+          </a:solidFill>
+          <a:ln w="9525">
+            <a:solidFill>
+              <a:srgbClr val="C9CFD6"/>
+            </a:solidFill>
+          </a:ln>
+          <a:effectLst/>
+        </p:spPr>
+        <p:style>
+          <a:lnRef idx="1">
+            <a:schemeClr val="accent1"/>
+          </a:lnRef>
+          <a:fillRef idx="3">
+            <a:schemeClr val="accent1"/>
+          </a:fillRef>
+          <a:effectRef idx="2">
+            <a:schemeClr val="accent1"/>
+          </a:effectRef>
+          <a:fontRef idx="minor">
+            <a:schemeClr val="lt1"/>
+          </a:fontRef>
+        </p:style>
+        <p:txBody>
+          <a:bodyPr rtlCol="0" anchor="ctr" wrap="none"/>
+          <a:lstStyle/>
+          <a:p>
+            <a:pPr algn="ctr"/>
+            <a:r>
+              <a:rPr sz="1200" b="1">
+                <a:solidFill>
+                  <a:srgbClr val="6B7480"/>
+                </a:solidFill>
+                <a:latin typeface="Garamond"/>
+              </a:rPr>
+              <a:t>11</a:t>
+            </a:r>
+          </a:p>
+        </p:txBody>
+      </p:sp>
+      <p:sp>
+        <p:nvSpPr>
+          <p:cNvPr id="18" name="Rectangle 17"/>
+          <p:cNvSpPr/>
+          <p:nvPr/>
+        </p:nvSpPr>
+        <p:spPr>
+          <a:xfrm>
+            <a:off x="8071294" y="1481328"/>
+            <a:ext cx="658939" cy="457200"/>
+          </a:xfrm>
+          <a:prstGeom prst="rect">
+            <a:avLst/>
+          </a:prstGeom>
+          <a:solidFill>
+            <a:srgbClr val="FFFFFF"/>
+          </a:solidFill>
+          <a:ln w="9525">
+            <a:solidFill>
+              <a:srgbClr val="C9CFD6"/>
+            </a:solidFill>
+          </a:ln>
+          <a:effectLst/>
+        </p:spPr>
+        <p:style>
+          <a:lnRef idx="1">
+            <a:schemeClr val="accent1"/>
+          </a:lnRef>
+          <a:fillRef idx="3">
+            <a:schemeClr val="accent1"/>
+          </a:fillRef>
+          <a:effectRef idx="2">
+            <a:schemeClr val="accent1"/>
+          </a:effectRef>
+          <a:fontRef idx="minor">
+            <a:schemeClr val="lt1"/>
+          </a:fontRef>
+        </p:style>
+        <p:txBody>
+          <a:bodyPr rtlCol="0" anchor="ctr" wrap="none"/>
+          <a:lstStyle/>
+          <a:p>
+            <a:pPr algn="ctr"/>
+            <a:r>
+              <a:rPr sz="1200" b="1">
+                <a:solidFill>
+                  <a:srgbClr val="6B7480"/>
+                </a:solidFill>
+                <a:latin typeface="Garamond"/>
+              </a:rPr>
+              <a:t>12</a:t>
+            </a:r>
+          </a:p>
+        </p:txBody>
+      </p:sp>
+      <p:sp>
+        <p:nvSpPr>
+          <p:cNvPr id="19" name="Rectangle 18"/>
+          <p:cNvSpPr/>
+          <p:nvPr/>
+        </p:nvSpPr>
+        <p:spPr>
+          <a:xfrm>
+            <a:off x="8730234" y="1481328"/>
+            <a:ext cx="658939" cy="457200"/>
+          </a:xfrm>
+          <a:prstGeom prst="rect">
+            <a:avLst/>
+          </a:prstGeom>
+          <a:solidFill>
+            <a:srgbClr val="7B2530"/>
+          </a:solidFill>
+          <a:ln>
+            <a:noFill/>
+          </a:ln>
+          <a:effectLst/>
+        </p:spPr>
+        <p:style>
+          <a:lnRef idx="1">
+            <a:schemeClr val="accent1"/>
+          </a:lnRef>
+          <a:fillRef idx="3">
+            <a:schemeClr val="accent1"/>
+          </a:fillRef>
+          <a:effectRef idx="2">
+            <a:schemeClr val="accent1"/>
+          </a:effectRef>
+          <a:fontRef idx="minor">
+            <a:schemeClr val="lt1"/>
+          </a:fontRef>
+        </p:style>
+        <p:txBody>
+          <a:bodyPr rtlCol="0" anchor="ctr" wrap="none"/>
+          <a:lstStyle/>
+          <a:p>
+            <a:pPr algn="ctr"/>
+            <a:r>
+              <a:rPr sz="1200" b="1">
+                <a:solidFill>
+                  <a:srgbClr val="FFFFFF"/>
+                </a:solidFill>
+                <a:latin typeface="Garamond"/>
+              </a:rPr>
+              <a:t>13</a:t>
+            </a:r>
+          </a:p>
+        </p:txBody>
+      </p:sp>
+      <p:sp>
+        <p:nvSpPr>
+          <p:cNvPr id="20" name="Rectangle 19"/>
+          <p:cNvSpPr/>
+          <p:nvPr/>
+        </p:nvSpPr>
+        <p:spPr>
+          <a:xfrm>
+            <a:off x="9389173" y="1481328"/>
+            <a:ext cx="658939" cy="457200"/>
+          </a:xfrm>
+          <a:prstGeom prst="rect">
+            <a:avLst/>
+          </a:prstGeom>
+          <a:solidFill>
+            <a:srgbClr val="7B2530"/>
+          </a:solidFill>
+          <a:ln>
+            <a:noFill/>
+          </a:ln>
+          <a:effectLst/>
+        </p:spPr>
+        <p:style>
+          <a:lnRef idx="1">
+            <a:schemeClr val="accent1"/>
+          </a:lnRef>
+          <a:fillRef idx="3">
+            <a:schemeClr val="accent1"/>
+          </a:fillRef>
+          <a:effectRef idx="2">
+            <a:schemeClr val="accent1"/>
+          </a:effectRef>
+          <a:fontRef idx="minor">
+            <a:schemeClr val="lt1"/>
+          </a:fontRef>
+        </p:style>
+        <p:txBody>
+          <a:bodyPr rtlCol="0" anchor="ctr" wrap="none"/>
+          <a:lstStyle/>
+          <a:p>
+            <a:pPr algn="ctr"/>
+            <a:r>
+              <a:rPr sz="1200" b="1">
+                <a:solidFill>
+                  <a:srgbClr val="FFFFFF"/>
+                </a:solidFill>
+                <a:latin typeface="Garamond"/>
+              </a:rPr>
+              <a:t>14</a:t>
+            </a:r>
+          </a:p>
+        </p:txBody>
+      </p:sp>
+      <p:sp>
+        <p:nvSpPr>
+          <p:cNvPr id="21" name="Rectangle 20"/>
+          <p:cNvSpPr/>
+          <p:nvPr/>
+        </p:nvSpPr>
+        <p:spPr>
+          <a:xfrm>
+            <a:off x="10048113" y="1481328"/>
+            <a:ext cx="658939" cy="457200"/>
+          </a:xfrm>
+          <a:prstGeom prst="rect">
+            <a:avLst/>
+          </a:prstGeom>
+          <a:solidFill>
+            <a:srgbClr val="7B2530"/>
+          </a:solidFill>
+          <a:ln>
+            <a:noFill/>
+          </a:ln>
+          <a:effectLst/>
+        </p:spPr>
+        <p:style>
+          <a:lnRef idx="1">
+            <a:schemeClr val="accent1"/>
+          </a:lnRef>
+          <a:fillRef idx="3">
+            <a:schemeClr val="accent1"/>
+          </a:fillRef>
+          <a:effectRef idx="2">
+            <a:schemeClr val="accent1"/>
+          </a:effectRef>
+          <a:fontRef idx="minor">
+            <a:schemeClr val="lt1"/>
+          </a:fontRef>
+        </p:style>
+        <p:txBody>
+          <a:bodyPr rtlCol="0" anchor="ctr" wrap="none"/>
+          <a:lstStyle/>
+          <a:p>
+            <a:pPr algn="ctr"/>
+            <a:r>
+              <a:rPr sz="1200" b="1">
+                <a:solidFill>
+                  <a:srgbClr val="FFFFFF"/>
+                </a:solidFill>
+                <a:latin typeface="Garamond"/>
+              </a:rPr>
+              <a:t>15</a:t>
+            </a:r>
+          </a:p>
+        </p:txBody>
+      </p:sp>
+      <p:sp>
+        <p:nvSpPr>
+          <p:cNvPr id="22" name="Rectangle 21"/>
+          <p:cNvSpPr/>
+          <p:nvPr/>
+        </p:nvSpPr>
+        <p:spPr>
+          <a:xfrm>
+            <a:off x="10707052" y="1481328"/>
+            <a:ext cx="658939" cy="457200"/>
+          </a:xfrm>
+          <a:prstGeom prst="rect">
+            <a:avLst/>
+          </a:prstGeom>
+          <a:solidFill>
+            <a:srgbClr val="7B2530"/>
+          </a:solidFill>
+          <a:ln>
+            <a:noFill/>
+          </a:ln>
+          <a:effectLst/>
+        </p:spPr>
+        <p:style>
+          <a:lnRef idx="1">
+            <a:schemeClr val="accent1"/>
+          </a:lnRef>
+          <a:fillRef idx="3">
+            <a:schemeClr val="accent1"/>
+          </a:fillRef>
+          <a:effectRef idx="2">
+            <a:schemeClr val="accent1"/>
+          </a:effectRef>
+          <a:fontRef idx="minor">
+            <a:schemeClr val="lt1"/>
+          </a:fontRef>
+        </p:style>
+        <p:txBody>
+          <a:bodyPr rtlCol="0" anchor="ctr" wrap="none"/>
+          <a:lstStyle/>
+          <a:p>
+            <a:pPr algn="ctr"/>
+            <a:r>
+              <a:rPr sz="1200" b="1">
+                <a:solidFill>
+                  <a:srgbClr val="FFFFFF"/>
+                </a:solidFill>
+                <a:latin typeface="Garamond"/>
+              </a:rPr>
+              <a:t>16</a:t>
+            </a:r>
+          </a:p>
+        </p:txBody>
+      </p:sp>
+      <p:sp>
+        <p:nvSpPr>
+          <p:cNvPr id="23" name="TextBox 22"/>
+          <p:cNvSpPr txBox="1"/>
+          <p:nvPr/>
+        </p:nvSpPr>
+        <p:spPr>
+          <a:xfrm>
+            <a:off x="822960" y="2066543"/>
+            <a:ext cx="3657600" cy="365760"/>
+          </a:xfrm>
+          <a:prstGeom prst="rect">
+            <a:avLst/>
+          </a:prstGeom>
+          <a:noFill/>
+        </p:spPr>
+        <p:txBody>
+          <a:bodyPr wrap="square" lIns="0" rIns="0" tIns="0" bIns="0">
+            <a:spAutoFit/>
+          </a:bodyPr>
+          <a:lstStyle/>
+          <a:p>
+            <a:pPr algn="l">
+              <a:lnSpc>
+                <a:spcPts val="2100"/>
+              </a:lnSpc>
+              <a:spcAft>
+                <a:spcPts val="0"/>
+              </a:spcAft>
+            </a:pPr>
+            <a:r>
+              <a:rPr sz="1400" b="1" i="0">
+                <a:solidFill>
+                  <a:srgbClr val="1A2430"/>
+                </a:solidFill>
+                <a:latin typeface="Garamond"/>
+              </a:rPr>
+              <a:t>Definition 1  (benchmark)</a:t>
+            </a:r>
+          </a:p>
+        </p:txBody>
+      </p:sp>
+      <p:cxnSp>
+        <p:nvCxnSpPr>
+          <p:cNvPr id="24" name="Connector 23"/>
+          <p:cNvCxnSpPr/>
+          <p:nvPr/>
+        </p:nvCxnSpPr>
+        <p:spPr>
+          <a:xfrm>
+            <a:off x="822960" y="2468880"/>
+            <a:ext cx="10543032" cy="0"/>
+          </a:xfrm>
+          <a:prstGeom prst="line">
+            <a:avLst/>
+          </a:prstGeom>
+          <a:ln w="12700">
+            <a:solidFill>
+              <a:srgbClr val="1A2430"/>
+            </a:solidFill>
+          </a:ln>
+        </p:spPr>
+        <p:style>
+          <a:lnRef idx="2">
+            <a:schemeClr val="accent1"/>
+          </a:lnRef>
+          <a:fillRef idx="0">
+            <a:schemeClr val="accent1"/>
+          </a:fillRef>
+          <a:effectRef idx="1">
+            <a:schemeClr val="accent1"/>
+          </a:effectRef>
+          <a:fontRef idx="minor">
+            <a:schemeClr val="tx1"/>
+          </a:fontRef>
+        </p:style>
+      </p:cxnSp>
+      <p:sp>
+        <p:nvSpPr>
+          <p:cNvPr id="25" name="TextBox 24"/>
+          <p:cNvSpPr txBox="1"/>
+          <p:nvPr/>
+        </p:nvSpPr>
+        <p:spPr>
+          <a:xfrm>
+            <a:off x="1005840" y="2596896"/>
+            <a:ext cx="1463040" cy="384048"/>
           </a:xfrm>
           <a:prstGeom prst="rect">
             <a:avLst/>
@@ -9862,25 +11102,25 @@
             <a:r>
               <a:rPr sz="1300" b="1" i="0">
                 <a:solidFill>
-                  <a:srgbClr val="1A2430"/>
+                  <a:srgbClr val="1F3864"/>
                 </a:solidFill>
                 <a:latin typeface="Garamond"/>
               </a:rPr>
-              <a:t>Measure</a:t>
-            </a:r>
-          </a:p>
-        </p:txBody>
-      </p:sp>
-      <p:sp>
-        <p:nvSpPr>
-          <p:cNvPr id="6" name="TextBox 5"/>
+              <a:t>Teacher</a:t>
+            </a:r>
+          </a:p>
+        </p:txBody>
+      </p:sp>
+      <p:sp>
+        <p:nvSpPr>
+          <p:cNvPr id="26" name="TextBox 25"/>
           <p:cNvSpPr txBox="1"/>
           <p:nvPr/>
         </p:nvSpPr>
         <p:spPr>
           <a:xfrm>
-            <a:off x="4023360" y="1783080"/>
-            <a:ext cx="5760720" cy="365760"/>
+            <a:off x="2651760" y="2596896"/>
+            <a:ext cx="8503920" cy="384048"/>
           </a:xfrm>
           <a:prstGeom prst="rect">
             <a:avLst/>
@@ -9902,27 +11142,27 @@
               </a:spcAft>
             </a:pPr>
             <a:r>
-              <a:rPr sz="1300" b="1" i="0">
+              <a:rPr sz="1300" b="0" i="0">
                 <a:solidFill>
                   <a:srgbClr val="1A2430"/>
                 </a:solidFill>
                 <a:latin typeface="Garamond"/>
               </a:rPr>
-              <a:t>In words</a:t>
-            </a:r>
-          </a:p>
-        </p:txBody>
-      </p:sp>
-      <p:sp>
-        <p:nvSpPr>
-          <p:cNvPr id="7" name="TextBox 6"/>
+              <a:t>employed with a teaching occupation, holding a bachelor’s degree, in at least two year-1 interviews</a:t>
+            </a:r>
+          </a:p>
+        </p:txBody>
+      </p:sp>
+      <p:sp>
+        <p:nvSpPr>
+          <p:cNvPr id="27" name="TextBox 26"/>
           <p:cNvSpPr txBox="1"/>
           <p:nvPr/>
         </p:nvSpPr>
         <p:spPr>
           <a:xfrm>
-            <a:off x="9966960" y="1783080"/>
-            <a:ext cx="1371600" cy="365760"/>
+            <a:off x="1005840" y="2999232"/>
+            <a:ext cx="1463040" cy="384048"/>
           </a:xfrm>
           <a:prstGeom prst="rect">
             <a:avLst/>
@@ -9946,60 +11186,25 @@
             <a:r>
               <a:rPr sz="1300" b="1" i="0">
                 <a:solidFill>
-                  <a:srgbClr val="1A2430"/>
+                  <a:srgbClr val="1F3864"/>
                 </a:solidFill>
                 <a:latin typeface="Garamond"/>
               </a:rPr>
-              <a:t>2021</a:t>
-            </a:r>
-          </a:p>
-        </p:txBody>
-      </p:sp>
-      <p:cxnSp>
-        <p:nvCxnSpPr>
-          <p:cNvPr id="8" name="Connector 7"/>
-          <p:cNvCxnSpPr/>
-          <p:nvPr/>
-        </p:nvCxnSpPr>
-        <p:spPr>
-          <a:xfrm>
-            <a:off x="822960" y="2167128"/>
-            <a:ext cx="10543032" cy="0"/>
-          </a:xfrm>
-          <a:prstGeom prst="line">
-            <a:avLst/>
-          </a:prstGeom>
-          <a:ln w="7620">
-            <a:solidFill>
-              <a:srgbClr val="1A2430"/>
-            </a:solidFill>
-          </a:ln>
-        </p:spPr>
-        <p:style>
-          <a:lnRef idx="2">
-            <a:schemeClr val="accent1"/>
-          </a:lnRef>
-          <a:fillRef idx="0">
-            <a:schemeClr val="accent1"/>
-          </a:fillRef>
-          <a:effectRef idx="1">
-            <a:schemeClr val="accent1"/>
-          </a:effectRef>
-          <a:fontRef idx="minor">
-            <a:schemeClr val="tx1"/>
-          </a:fontRef>
-        </p:style>
-      </p:cxnSp>
-      <p:sp>
-        <p:nvSpPr>
-          <p:cNvPr id="9" name="TextBox 8"/>
+              <a:t>Stayer</a:t>
+            </a:r>
+          </a:p>
+        </p:txBody>
+      </p:sp>
+      <p:sp>
+        <p:nvSpPr>
+          <p:cNvPr id="28" name="TextBox 27"/>
           <p:cNvSpPr txBox="1"/>
           <p:nvPr/>
         </p:nvSpPr>
         <p:spPr>
           <a:xfrm>
-            <a:off x="822960" y="2313432"/>
-            <a:ext cx="3108960" cy="548640"/>
+            <a:off x="2651760" y="2999232"/>
+            <a:ext cx="8503920" cy="384048"/>
           </a:xfrm>
           <a:prstGeom prst="rect">
             <a:avLst/>
@@ -10021,27 +11226,27 @@
               </a:spcAft>
             </a:pPr>
             <a:r>
-              <a:rPr sz="1300" b="1" i="0">
+              <a:rPr sz="1300" b="0" i="0">
                 <a:solidFill>
                   <a:srgbClr val="1A2430"/>
                 </a:solidFill>
                 <a:latin typeface="Garamond"/>
               </a:rPr>
-              <a:t>March recall  (this paper)</a:t>
-            </a:r>
-          </a:p>
-        </p:txBody>
-      </p:sp>
-      <p:sp>
-        <p:nvSpPr>
-          <p:cNvPr id="10" name="TextBox 9"/>
+              <a:t>observed teaching in at least one year-2 interview</a:t>
+            </a:r>
+          </a:p>
+        </p:txBody>
+      </p:sp>
+      <p:sp>
+        <p:nvSpPr>
+          <p:cNvPr id="29" name="TextBox 28"/>
           <p:cNvSpPr txBox="1"/>
           <p:nvPr/>
         </p:nvSpPr>
         <p:spPr>
           <a:xfrm>
-            <a:off x="4023360" y="2313432"/>
-            <a:ext cx="5760720" cy="548640"/>
+            <a:off x="1005840" y="3401568"/>
+            <a:ext cx="1463040" cy="384048"/>
           </a:xfrm>
           <a:prstGeom prst="rect">
             <a:avLst/>
@@ -10063,27 +11268,27 @@
               </a:spcAft>
             </a:pPr>
             <a:r>
-              <a:rPr sz="1300" b="0" i="0">
-                <a:solidFill>
-                  <a:srgbClr val="1A2430"/>
+              <a:rPr sz="1300" b="1" i="0">
+                <a:solidFill>
+                  <a:srgbClr val="7B2530"/>
                 </a:solidFill>
                 <a:latin typeface="Garamond"/>
               </a:rPr>
-              <a:t>the main job of last year was teaching, and it is gone by March</a:t>
-            </a:r>
-          </a:p>
-        </p:txBody>
-      </p:sp>
-      <p:sp>
-        <p:nvSpPr>
-          <p:cNvPr id="11" name="TextBox 10"/>
+              <a:t>Leaver</a:t>
+            </a:r>
+          </a:p>
+        </p:txBody>
+      </p:sp>
+      <p:sp>
+        <p:nvSpPr>
+          <p:cNvPr id="30" name="TextBox 29"/>
           <p:cNvSpPr txBox="1"/>
           <p:nvPr/>
         </p:nvSpPr>
         <p:spPr>
           <a:xfrm>
-            <a:off x="9966960" y="2313432"/>
-            <a:ext cx="1371600" cy="548640"/>
+            <a:off x="2651760" y="3401568"/>
+            <a:ext cx="8503920" cy="384048"/>
           </a:xfrm>
           <a:prstGeom prst="rect">
             <a:avLst/>
@@ -10105,27 +11310,104 @@
               </a:spcAft>
             </a:pPr>
             <a:r>
-              <a:rPr sz="1300" b="1" i="0">
+              <a:rPr sz="1300" b="0" i="0">
                 <a:solidFill>
                   <a:srgbClr val="1A2430"/>
                 </a:solidFill>
                 <a:latin typeface="Garamond"/>
               </a:rPr>
-              <a:t>7.1</a:t>
-            </a:r>
-          </a:p>
-        </p:txBody>
-      </p:sp>
-      <p:sp>
-        <p:nvSpPr>
-          <p:cNvPr id="12" name="TextBox 11"/>
+              <a:t>never observed teaching in year 2, given two or more year-2 interviews, one outside June–August</a:t>
+            </a:r>
+          </a:p>
+        </p:txBody>
+      </p:sp>
+      <p:cxnSp>
+        <p:nvCxnSpPr>
+          <p:cNvPr id="31" name="Connector 30"/>
+          <p:cNvCxnSpPr/>
+          <p:nvPr/>
+        </p:nvCxnSpPr>
+        <p:spPr>
+          <a:xfrm>
+            <a:off x="822960" y="3849624"/>
+            <a:ext cx="10543032" cy="0"/>
+          </a:xfrm>
+          <a:prstGeom prst="line">
+            <a:avLst/>
+          </a:prstGeom>
+          <a:ln w="12700">
+            <a:solidFill>
+              <a:srgbClr val="1A2430"/>
+            </a:solidFill>
+          </a:ln>
+        </p:spPr>
+        <p:style>
+          <a:lnRef idx="2">
+            <a:schemeClr val="accent1"/>
+          </a:lnRef>
+          <a:fillRef idx="0">
+            <a:schemeClr val="accent1"/>
+          </a:fillRef>
+          <a:effectRef idx="1">
+            <a:schemeClr val="accent1"/>
+          </a:effectRef>
+          <a:fontRef idx="minor">
+            <a:schemeClr val="tx1"/>
+          </a:fontRef>
+        </p:style>
+      </p:cxnSp>
+      <p:sp>
+        <p:nvSpPr>
+          <p:cNvPr id="32" name="TextBox 31"/>
           <p:cNvSpPr txBox="1"/>
           <p:nvPr/>
         </p:nvSpPr>
         <p:spPr>
           <a:xfrm>
-            <a:off x="822960" y="2843784"/>
-            <a:ext cx="3108960" cy="548640"/>
+            <a:off x="822960" y="3931920"/>
+            <a:ext cx="5486400" cy="365760"/>
+          </a:xfrm>
+          <a:prstGeom prst="rect">
+            <a:avLst/>
+          </a:prstGeom>
+          <a:noFill/>
+        </p:spPr>
+        <p:txBody>
+          <a:bodyPr wrap="square" lIns="0" rIns="0" tIns="0" bIns="0">
+            <a:spAutoFit/>
+          </a:bodyPr>
+          <a:lstStyle/>
+          <a:p>
+            <a:pPr algn="l">
+              <a:lnSpc>
+                <a:spcPts val="2100"/>
+              </a:lnSpc>
+              <a:spcAft>
+                <a:spcPts val="0"/>
+              </a:spcAft>
+            </a:pPr>
+            <a:r>
+              <a:rPr sz="1400" b="1" i="0">
+                <a:solidFill>
+                  <a:srgbClr val="1A2430"/>
+                </a:solidFill>
+                <a:latin typeface="Garamond"/>
+              </a:rPr>
+              <a:t>Alternative measures</a:t>
+            </a:r>
+          </a:p>
+        </p:txBody>
+      </p:sp>
+      <p:sp>
+        <p:nvSpPr>
+          <p:cNvPr id="33" name="TextBox 32"/>
+          <p:cNvSpPr txBox="1"/>
+          <p:nvPr/>
+        </p:nvSpPr>
+        <p:spPr>
+          <a:xfrm>
+            <a:off x="10058400" y="3931920"/>
+            <a:ext cx="1280160" cy="365760"/>
           </a:xfrm>
           <a:prstGeom prst="rect">
             <a:avLst/>
@@ -10153,21 +11435,56 @@
                 </a:solidFill>
                 <a:latin typeface="Garamond"/>
               </a:rPr>
-              <a:t>Pure occupation pair</a:t>
-            </a:r>
-          </a:p>
-        </p:txBody>
-      </p:sp>
-      <p:sp>
-        <p:nvSpPr>
-          <p:cNvPr id="13" name="TextBox 12"/>
+              <a:t>2021</a:t>
+            </a:r>
+          </a:p>
+        </p:txBody>
+      </p:sp>
+      <p:cxnSp>
+        <p:nvCxnSpPr>
+          <p:cNvPr id="34" name="Connector 33"/>
+          <p:cNvCxnSpPr/>
+          <p:nvPr/>
+        </p:nvCxnSpPr>
+        <p:spPr>
+          <a:xfrm>
+            <a:off x="822960" y="4334256"/>
+            <a:ext cx="10543032" cy="0"/>
+          </a:xfrm>
+          <a:prstGeom prst="line">
+            <a:avLst/>
+          </a:prstGeom>
+          <a:ln w="7620">
+            <a:solidFill>
+              <a:srgbClr val="1A2430"/>
+            </a:solidFill>
+          </a:ln>
+        </p:spPr>
+        <p:style>
+          <a:lnRef idx="2">
+            <a:schemeClr val="accent1"/>
+          </a:lnRef>
+          <a:fillRef idx="0">
+            <a:schemeClr val="accent1"/>
+          </a:fillRef>
+          <a:effectRef idx="1">
+            <a:schemeClr val="accent1"/>
+          </a:effectRef>
+          <a:fontRef idx="minor">
+            <a:schemeClr val="tx1"/>
+          </a:fontRef>
+        </p:style>
+      </p:cxnSp>
+      <p:sp>
+        <p:nvSpPr>
+          <p:cNvPr id="35" name="TextBox 34"/>
           <p:cNvSpPr txBox="1"/>
           <p:nvPr/>
         </p:nvSpPr>
         <p:spPr>
           <a:xfrm>
-            <a:off x="4023360" y="2843784"/>
-            <a:ext cx="5760720" cy="548640"/>
+            <a:off x="1005840" y="4462272"/>
+            <a:ext cx="2834640" cy="329184"/>
           </a:xfrm>
           <a:prstGeom prst="rect">
             <a:avLst/>
@@ -10182,34 +11499,34 @@
           <a:p>
             <a:pPr algn="l">
               <a:lnSpc>
-                <a:spcPts val="1950"/>
+                <a:spcPts val="1725"/>
               </a:lnSpc>
               <a:spcAft>
                 <a:spcPts val="0"/>
               </a:spcAft>
             </a:pPr>
             <a:r>
-              <a:rPr sz="1300" b="0" i="0">
+              <a:rPr sz="1150" b="1" i="0">
                 <a:solidFill>
                   <a:srgbClr val="1A2430"/>
                 </a:solidFill>
                 <a:latin typeface="Garamond"/>
               </a:rPr>
-              <a:t>last year’s and today’s occupation compared directly, nothing else</a:t>
-            </a:r>
-          </a:p>
-        </p:txBody>
-      </p:sp>
-      <p:sp>
-        <p:nvSpPr>
-          <p:cNvPr id="14" name="TextBox 13"/>
+              <a:t>Definition 1, as above</a:t>
+            </a:r>
+          </a:p>
+        </p:txBody>
+      </p:sp>
+      <p:sp>
+        <p:nvSpPr>
+          <p:cNvPr id="36" name="TextBox 35"/>
           <p:cNvSpPr txBox="1"/>
           <p:nvPr/>
         </p:nvSpPr>
         <p:spPr>
           <a:xfrm>
-            <a:off x="9966960" y="2843784"/>
-            <a:ext cx="1371600" cy="548640"/>
+            <a:off x="3977639" y="4462272"/>
+            <a:ext cx="5852160" cy="329184"/>
           </a:xfrm>
           <a:prstGeom prst="rect">
             <a:avLst/>
@@ -10224,34 +11541,34 @@
           <a:p>
             <a:pPr algn="l">
               <a:lnSpc>
-                <a:spcPts val="1950"/>
+                <a:spcPts val="1725"/>
               </a:lnSpc>
               <a:spcAft>
                 <a:spcPts val="0"/>
               </a:spcAft>
             </a:pPr>
             <a:r>
-              <a:rPr sz="1300" b="1" i="0">
+              <a:rPr sz="1150" b="0" i="0">
                 <a:solidFill>
                   <a:srgbClr val="1A2430"/>
                 </a:solidFill>
                 <a:latin typeface="Garamond"/>
               </a:rPr>
-              <a:t>5.0</a:t>
-            </a:r>
-          </a:p>
-        </p:txBody>
-      </p:sp>
-      <p:sp>
-        <p:nvSpPr>
-          <p:cNvPr id="15" name="TextBox 14"/>
+              <a:t>one classification per individual</a:t>
+            </a:r>
+          </a:p>
+        </p:txBody>
+      </p:sp>
+      <p:sp>
+        <p:nvSpPr>
+          <p:cNvPr id="37" name="TextBox 36"/>
           <p:cNvSpPr txBox="1"/>
           <p:nvPr/>
         </p:nvSpPr>
         <p:spPr>
           <a:xfrm>
-            <a:off x="822960" y="3374136"/>
-            <a:ext cx="3108960" cy="548640"/>
+            <a:off x="10058400" y="4462272"/>
+            <a:ext cx="1097280" cy="329184"/>
           </a:xfrm>
           <a:prstGeom prst="rect">
             <a:avLst/>
@@ -10266,34 +11583,34 @@
           <a:p>
             <a:pPr algn="l">
               <a:lnSpc>
-                <a:spcPts val="1950"/>
+                <a:spcPts val="1725"/>
               </a:lnSpc>
               <a:spcAft>
                 <a:spcPts val="0"/>
               </a:spcAft>
             </a:pPr>
             <a:r>
-              <a:rPr sz="1300" b="1" i="0">
+              <a:rPr sz="1150" b="1" i="0">
                 <a:solidFill>
                   <a:srgbClr val="1A2430"/>
                 </a:solidFill>
                 <a:latin typeface="Garamond"/>
               </a:rPr>
-              <a:t>Panel, one verdict per teacher</a:t>
-            </a:r>
-          </a:p>
-        </p:txBody>
-      </p:sp>
-      <p:sp>
-        <p:nvSpPr>
-          <p:cNvPr id="16" name="TextBox 15"/>
+              <a:t>12.9</a:t>
+            </a:r>
+          </a:p>
+        </p:txBody>
+      </p:sp>
+      <p:sp>
+        <p:nvSpPr>
+          <p:cNvPr id="38" name="TextBox 37"/>
           <p:cNvSpPr txBox="1"/>
           <p:nvPr/>
         </p:nvSpPr>
         <p:spPr>
           <a:xfrm>
-            <a:off x="4023360" y="3374136"/>
-            <a:ext cx="5760720" cy="548640"/>
+            <a:off x="1005840" y="4800600"/>
+            <a:ext cx="2834640" cy="329184"/>
           </a:xfrm>
           <a:prstGeom prst="rect">
             <a:avLst/>
@@ -10308,34 +11625,34 @@
           <a:p>
             <a:pPr algn="l">
               <a:lnSpc>
-                <a:spcPts val="1950"/>
+                <a:spcPts val="1725"/>
               </a:lnSpc>
               <a:spcAft>
                 <a:spcPts val="0"/>
               </a:spcAft>
             </a:pPr>
             <a:r>
-              <a:rPr sz="1300" b="0" i="0">
+              <a:rPr sz="1150" b="1" i="0">
                 <a:solidFill>
                   <a:srgbClr val="1A2430"/>
                 </a:solidFill>
                 <a:latin typeface="Garamond"/>
               </a:rPr>
-              <a:t>seen teaching twice; never seen teaching again a year later</a:t>
-            </a:r>
-          </a:p>
-        </p:txBody>
-      </p:sp>
-      <p:sp>
-        <p:nvSpPr>
-          <p:cNvPr id="17" name="TextBox 16"/>
+              <a:t>Retrospective annual measure</a:t>
+            </a:r>
+          </a:p>
+        </p:txBody>
+      </p:sp>
+      <p:sp>
+        <p:nvSpPr>
+          <p:cNvPr id="39" name="TextBox 38"/>
           <p:cNvSpPr txBox="1"/>
           <p:nvPr/>
         </p:nvSpPr>
         <p:spPr>
           <a:xfrm>
-            <a:off x="9966960" y="3374136"/>
-            <a:ext cx="1371600" cy="548640"/>
+            <a:off x="3977639" y="4800600"/>
+            <a:ext cx="5852160" cy="329184"/>
           </a:xfrm>
           <a:prstGeom prst="rect">
             <a:avLst/>
@@ -10350,34 +11667,34 @@
           <a:p>
             <a:pPr algn="l">
               <a:lnSpc>
-                <a:spcPts val="1950"/>
+                <a:spcPts val="1725"/>
               </a:lnSpc>
               <a:spcAft>
                 <a:spcPts val="0"/>
               </a:spcAft>
             </a:pPr>
             <a:r>
-              <a:rPr sz="1300" b="1" i="0">
+              <a:rPr sz="1150" b="0" i="0">
                 <a:solidFill>
                   <a:srgbClr val="1A2430"/>
                 </a:solidFill>
                 <a:latin typeface="Garamond"/>
               </a:rPr>
-              <a:t>12.9</a:t>
-            </a:r>
-          </a:p>
-        </p:txBody>
-      </p:sp>
-      <p:sp>
-        <p:nvSpPr>
-          <p:cNvPr id="18" name="TextBox 17"/>
+              <a:t>longest job of the previous year no longer held at the March interview</a:t>
+            </a:r>
+          </a:p>
+        </p:txBody>
+      </p:sp>
+      <p:sp>
+        <p:nvSpPr>
+          <p:cNvPr id="40" name="TextBox 39"/>
           <p:cNvSpPr txBox="1"/>
           <p:nvPr/>
         </p:nvSpPr>
         <p:spPr>
           <a:xfrm>
-            <a:off x="822960" y="3904487"/>
-            <a:ext cx="3108960" cy="548640"/>
+            <a:off x="10058400" y="4800600"/>
+            <a:ext cx="1097280" cy="329184"/>
           </a:xfrm>
           <a:prstGeom prst="rect">
             <a:avLst/>
@@ -10392,34 +11709,34 @@
           <a:p>
             <a:pPr algn="l">
               <a:lnSpc>
-                <a:spcPts val="1950"/>
+                <a:spcPts val="1725"/>
               </a:lnSpc>
               <a:spcAft>
                 <a:spcPts val="0"/>
               </a:spcAft>
             </a:pPr>
             <a:r>
-              <a:rPr sz="1300" b="1" i="0">
+              <a:rPr sz="1150" b="1" i="0">
                 <a:solidFill>
                   <a:srgbClr val="1A2430"/>
                 </a:solidFill>
                 <a:latin typeface="Garamond"/>
               </a:rPr>
-              <a:t>Panel, month pairs</a:t>
-            </a:r>
-          </a:p>
-        </p:txBody>
-      </p:sp>
-      <p:sp>
-        <p:nvSpPr>
-          <p:cNvPr id="19" name="TextBox 18"/>
+              <a:t>7.1</a:t>
+            </a:r>
+          </a:p>
+        </p:txBody>
+      </p:sp>
+      <p:sp>
+        <p:nvSpPr>
+          <p:cNvPr id="41" name="TextBox 40"/>
           <p:cNvSpPr txBox="1"/>
           <p:nvPr/>
         </p:nvSpPr>
         <p:spPr>
           <a:xfrm>
-            <a:off x="4023360" y="3904487"/>
-            <a:ext cx="5760720" cy="548640"/>
+            <a:off x="1005840" y="5138928"/>
+            <a:ext cx="2834640" cy="329184"/>
           </a:xfrm>
           <a:prstGeom prst="rect">
             <a:avLst/>
@@ -10434,34 +11751,34 @@
           <a:p>
             <a:pPr algn="l">
               <a:lnSpc>
-                <a:spcPts val="1950"/>
+                <a:spcPts val="1725"/>
               </a:lnSpc>
               <a:spcAft>
                 <a:spcPts val="0"/>
               </a:spcAft>
             </a:pPr>
             <a:r>
-              <a:rPr sz="1300" b="0" i="0">
+              <a:rPr sz="1150" b="1" i="0">
                 <a:solidFill>
                   <a:srgbClr val="1A2430"/>
                 </a:solidFill>
                 <a:latin typeface="Garamond"/>
               </a:rPr>
-              <a:t>every teaching month checked exactly twelve months later</a:t>
-            </a:r>
-          </a:p>
-        </p:txBody>
-      </p:sp>
-      <p:sp>
-        <p:nvSpPr>
-          <p:cNvPr id="20" name="TextBox 19"/>
+              <a:t>Occupation-pair measure</a:t>
+            </a:r>
+          </a:p>
+        </p:txBody>
+      </p:sp>
+      <p:sp>
+        <p:nvSpPr>
+          <p:cNvPr id="42" name="TextBox 41"/>
           <p:cNvSpPr txBox="1"/>
           <p:nvPr/>
         </p:nvSpPr>
         <p:spPr>
           <a:xfrm>
-            <a:off x="9966960" y="3904487"/>
-            <a:ext cx="1371600" cy="548640"/>
+            <a:off x="3977639" y="5138928"/>
+            <a:ext cx="5852160" cy="329184"/>
           </a:xfrm>
           <a:prstGeom prst="rect">
             <a:avLst/>
@@ -10476,34 +11793,34 @@
           <a:p>
             <a:pPr algn="l">
               <a:lnSpc>
-                <a:spcPts val="1950"/>
+                <a:spcPts val="1725"/>
               </a:lnSpc>
               <a:spcAft>
                 <a:spcPts val="0"/>
               </a:spcAft>
             </a:pPr>
             <a:r>
-              <a:rPr sz="1300" b="1" i="0">
+              <a:rPr sz="1150" b="0" i="0">
                 <a:solidFill>
                   <a:srgbClr val="1A2430"/>
                 </a:solidFill>
                 <a:latin typeface="Garamond"/>
               </a:rPr>
-              <a:t>16.0</a:t>
-            </a:r>
-          </a:p>
-        </p:txBody>
-      </p:sp>
-      <p:sp>
-        <p:nvSpPr>
-          <p:cNvPr id="21" name="TextBox 20"/>
+              <a:t>previous-year and current occupation codes compared directly</a:t>
+            </a:r>
+          </a:p>
+        </p:txBody>
+      </p:sp>
+      <p:sp>
+        <p:nvSpPr>
+          <p:cNvPr id="43" name="TextBox 42"/>
           <p:cNvSpPr txBox="1"/>
           <p:nvPr/>
         </p:nvSpPr>
         <p:spPr>
           <a:xfrm>
-            <a:off x="822960" y="4434840"/>
-            <a:ext cx="3108960" cy="548640"/>
+            <a:off x="10058400" y="5138928"/>
+            <a:ext cx="1097280" cy="329184"/>
           </a:xfrm>
           <a:prstGeom prst="rect">
             <a:avLst/>
@@ -10518,34 +11835,34 @@
           <a:p>
             <a:pPr algn="l">
               <a:lnSpc>
-                <a:spcPts val="1950"/>
+                <a:spcPts val="1725"/>
               </a:lnSpc>
               <a:spcAft>
                 <a:spcPts val="0"/>
               </a:spcAft>
             </a:pPr>
             <a:r>
-              <a:rPr sz="1300" b="1" i="0">
+              <a:rPr sz="1150" b="1" i="0">
                 <a:solidFill>
                   <a:srgbClr val="1A2430"/>
                 </a:solidFill>
                 <a:latin typeface="Garamond"/>
               </a:rPr>
-              <a:t>Panel, any sighting</a:t>
-            </a:r>
-          </a:p>
-        </p:txBody>
-      </p:sp>
-      <p:sp>
-        <p:nvSpPr>
-          <p:cNvPr id="22" name="TextBox 21"/>
+              <a:t>5.0</a:t>
+            </a:r>
+          </a:p>
+        </p:txBody>
+      </p:sp>
+      <p:sp>
+        <p:nvSpPr>
+          <p:cNvPr id="44" name="TextBox 43"/>
           <p:cNvSpPr txBox="1"/>
           <p:nvPr/>
         </p:nvSpPr>
         <p:spPr>
           <a:xfrm>
-            <a:off x="4023360" y="4434840"/>
-            <a:ext cx="5760720" cy="548640"/>
+            <a:off x="1005840" y="5477256"/>
+            <a:ext cx="2834640" cy="329184"/>
           </a:xfrm>
           <a:prstGeom prst="rect">
             <a:avLst/>
@@ -10560,34 +11877,34 @@
           <a:p>
             <a:pPr algn="l">
               <a:lnSpc>
-                <a:spcPts val="1950"/>
+                <a:spcPts val="1725"/>
               </a:lnSpc>
               <a:spcAft>
                 <a:spcPts val="0"/>
               </a:spcAft>
             </a:pPr>
             <a:r>
-              <a:rPr sz="1300" b="0" i="0">
+              <a:rPr sz="1150" b="1" i="0">
                 <a:solidFill>
                   <a:srgbClr val="1A2430"/>
                 </a:solidFill>
                 <a:latin typeface="Garamond"/>
               </a:rPr>
-              <a:t>one teaching month is enough to enter the count</a:t>
-            </a:r>
-          </a:p>
-        </p:txBody>
-      </p:sp>
-      <p:sp>
-        <p:nvSpPr>
-          <p:cNvPr id="23" name="TextBox 22"/>
+              <a:t>Month-pair measure</a:t>
+            </a:r>
+          </a:p>
+        </p:txBody>
+      </p:sp>
+      <p:sp>
+        <p:nvSpPr>
+          <p:cNvPr id="45" name="TextBox 44"/>
           <p:cNvSpPr txBox="1"/>
           <p:nvPr/>
         </p:nvSpPr>
         <p:spPr>
           <a:xfrm>
-            <a:off x="9966960" y="4434840"/>
-            <a:ext cx="1371600" cy="548640"/>
+            <a:off x="3977639" y="5477256"/>
+            <a:ext cx="5852160" cy="329184"/>
           </a:xfrm>
           <a:prstGeom prst="rect">
             <a:avLst/>
@@ -10602,34 +11919,34 @@
           <a:p>
             <a:pPr algn="l">
               <a:lnSpc>
-                <a:spcPts val="1950"/>
+                <a:spcPts val="1725"/>
               </a:lnSpc>
               <a:spcAft>
                 <a:spcPts val="0"/>
               </a:spcAft>
             </a:pPr>
             <a:r>
-              <a:rPr sz="1300" b="1" i="0">
+              <a:rPr sz="1150" b="0" i="0">
                 <a:solidFill>
                   <a:srgbClr val="1A2430"/>
                 </a:solidFill>
                 <a:latin typeface="Garamond"/>
               </a:rPr>
-              <a:t>19.4</a:t>
-            </a:r>
-          </a:p>
-        </p:txBody>
-      </p:sp>
-      <p:sp>
-        <p:nvSpPr>
-          <p:cNvPr id="24" name="TextBox 23"/>
+              <a:t>each teaching month matched to its interview twelve months ahead</a:t>
+            </a:r>
+          </a:p>
+        </p:txBody>
+      </p:sp>
+      <p:sp>
+        <p:nvSpPr>
+          <p:cNvPr id="46" name="TextBox 45"/>
           <p:cNvSpPr txBox="1"/>
           <p:nvPr/>
         </p:nvSpPr>
         <p:spPr>
           <a:xfrm>
-            <a:off x="822960" y="4965192"/>
-            <a:ext cx="3108960" cy="548640"/>
+            <a:off x="10058400" y="5477256"/>
+            <a:ext cx="1097280" cy="329184"/>
           </a:xfrm>
           <a:prstGeom prst="rect">
             <a:avLst/>
@@ -10644,34 +11961,34 @@
           <a:p>
             <a:pPr algn="l">
               <a:lnSpc>
-                <a:spcPts val="1950"/>
+                <a:spcPts val="1725"/>
               </a:lnSpc>
               <a:spcAft>
                 <a:spcPts val="0"/>
               </a:spcAft>
             </a:pPr>
             <a:r>
-              <a:rPr sz="1300" b="1" i="0">
+              <a:rPr sz="1150" b="1" i="0">
                 <a:solidFill>
                   <a:srgbClr val="1A2430"/>
                 </a:solidFill>
                 <a:latin typeface="Garamond"/>
               </a:rPr>
-              <a:t>NCES follow-up survey</a:t>
-            </a:r>
-          </a:p>
-        </p:txBody>
-      </p:sp>
-      <p:sp>
-        <p:nvSpPr>
-          <p:cNvPr id="25" name="TextBox 24"/>
+              <a:t>16.0</a:t>
+            </a:r>
+          </a:p>
+        </p:txBody>
+      </p:sp>
+      <p:sp>
+        <p:nvSpPr>
+          <p:cNvPr id="47" name="TextBox 46"/>
           <p:cNvSpPr txBox="1"/>
           <p:nvPr/>
         </p:nvSpPr>
         <p:spPr>
           <a:xfrm>
-            <a:off x="4023360" y="4965192"/>
-            <a:ext cx="5760720" cy="548640"/>
+            <a:off x="1005840" y="5815584"/>
+            <a:ext cx="2834640" cy="329184"/>
           </a:xfrm>
           <a:prstGeom prst="rect">
             <a:avLst/>
@@ -10686,34 +12003,34 @@
           <a:p>
             <a:pPr algn="l">
               <a:lnSpc>
-                <a:spcPts val="1950"/>
+                <a:spcPts val="1725"/>
               </a:lnSpc>
               <a:spcAft>
                 <a:spcPts val="0"/>
               </a:spcAft>
             </a:pPr>
             <a:r>
-              <a:rPr sz="1300" b="0" i="0">
+              <a:rPr sz="1150" b="1" i="0">
                 <a:solidFill>
                   <a:srgbClr val="1A2430"/>
                 </a:solidFill>
                 <a:latin typeface="Garamond"/>
               </a:rPr>
-              <a:t>school rosters re-surveyed the following fall</a:t>
-            </a:r>
-          </a:p>
-        </p:txBody>
-      </p:sp>
-      <p:sp>
-        <p:nvSpPr>
-          <p:cNvPr id="26" name="TextBox 25"/>
+              <a:t>Any-sighting measure</a:t>
+            </a:r>
+          </a:p>
+        </p:txBody>
+      </p:sp>
+      <p:sp>
+        <p:nvSpPr>
+          <p:cNvPr id="48" name="TextBox 47"/>
           <p:cNvSpPr txBox="1"/>
           <p:nvPr/>
         </p:nvSpPr>
         <p:spPr>
           <a:xfrm>
-            <a:off x="9966960" y="4965192"/>
-            <a:ext cx="1371600" cy="548640"/>
+            <a:off x="3977639" y="5815584"/>
+            <a:ext cx="5852160" cy="329184"/>
           </a:xfrm>
           <a:prstGeom prst="rect">
             <a:avLst/>
@@ -10728,14 +12045,182 @@
           <a:p>
             <a:pPr algn="l">
               <a:lnSpc>
-                <a:spcPts val="1950"/>
+                <a:spcPts val="1725"/>
               </a:lnSpc>
               <a:spcAft>
                 <a:spcPts val="0"/>
               </a:spcAft>
             </a:pPr>
             <a:r>
-              <a:rPr sz="1300" b="1" i="0">
+              <a:rPr sz="1150" b="0" i="0">
+                <a:solidFill>
+                  <a:srgbClr val="1A2430"/>
+                </a:solidFill>
+                <a:latin typeface="Garamond"/>
+              </a:rPr>
+              <a:t>any individual observed teaching once in year 1 enters the denominator</a:t>
+            </a:r>
+          </a:p>
+        </p:txBody>
+      </p:sp>
+      <p:sp>
+        <p:nvSpPr>
+          <p:cNvPr id="49" name="TextBox 48"/>
+          <p:cNvSpPr txBox="1"/>
+          <p:nvPr/>
+        </p:nvSpPr>
+        <p:spPr>
+          <a:xfrm>
+            <a:off x="10058400" y="5815584"/>
+            <a:ext cx="1097280" cy="329184"/>
+          </a:xfrm>
+          <a:prstGeom prst="rect">
+            <a:avLst/>
+          </a:prstGeom>
+          <a:noFill/>
+        </p:spPr>
+        <p:txBody>
+          <a:bodyPr wrap="square" lIns="0" rIns="0" tIns="0" bIns="0">
+            <a:spAutoFit/>
+          </a:bodyPr>
+          <a:lstStyle/>
+          <a:p>
+            <a:pPr algn="l">
+              <a:lnSpc>
+                <a:spcPts val="1725"/>
+              </a:lnSpc>
+              <a:spcAft>
+                <a:spcPts val="0"/>
+              </a:spcAft>
+            </a:pPr>
+            <a:r>
+              <a:rPr sz="1150" b="1" i="0">
+                <a:solidFill>
+                  <a:srgbClr val="1A2430"/>
+                </a:solidFill>
+                <a:latin typeface="Garamond"/>
+              </a:rPr>
+              <a:t>19.4</a:t>
+            </a:r>
+          </a:p>
+        </p:txBody>
+      </p:sp>
+      <p:sp>
+        <p:nvSpPr>
+          <p:cNvPr id="50" name="TextBox 49"/>
+          <p:cNvSpPr txBox="1"/>
+          <p:nvPr/>
+        </p:nvSpPr>
+        <p:spPr>
+          <a:xfrm>
+            <a:off x="1005840" y="6153912"/>
+            <a:ext cx="2834640" cy="329184"/>
+          </a:xfrm>
+          <a:prstGeom prst="rect">
+            <a:avLst/>
+          </a:prstGeom>
+          <a:noFill/>
+        </p:spPr>
+        <p:txBody>
+          <a:bodyPr wrap="square" lIns="0" rIns="0" tIns="0" bIns="0">
+            <a:spAutoFit/>
+          </a:bodyPr>
+          <a:lstStyle/>
+          <a:p>
+            <a:pPr algn="l">
+              <a:lnSpc>
+                <a:spcPts val="1725"/>
+              </a:lnSpc>
+              <a:spcAft>
+                <a:spcPts val="0"/>
+              </a:spcAft>
+            </a:pPr>
+            <a:r>
+              <a:rPr sz="1150" b="1" i="0">
+                <a:solidFill>
+                  <a:srgbClr val="1A2430"/>
+                </a:solidFill>
+                <a:latin typeface="Garamond"/>
+              </a:rPr>
+              <a:t>NCES Teacher Follow-up Survey</a:t>
+            </a:r>
+          </a:p>
+        </p:txBody>
+      </p:sp>
+      <p:sp>
+        <p:nvSpPr>
+          <p:cNvPr id="51" name="TextBox 50"/>
+          <p:cNvSpPr txBox="1"/>
+          <p:nvPr/>
+        </p:nvSpPr>
+        <p:spPr>
+          <a:xfrm>
+            <a:off x="3977639" y="6153912"/>
+            <a:ext cx="5852160" cy="329184"/>
+          </a:xfrm>
+          <a:prstGeom prst="rect">
+            <a:avLst/>
+          </a:prstGeom>
+          <a:noFill/>
+        </p:spPr>
+        <p:txBody>
+          <a:bodyPr wrap="square" lIns="0" rIns="0" tIns="0" bIns="0">
+            <a:spAutoFit/>
+          </a:bodyPr>
+          <a:lstStyle/>
+          <a:p>
+            <a:pPr algn="l">
+              <a:lnSpc>
+                <a:spcPts val="1725"/>
+              </a:lnSpc>
+              <a:spcAft>
+                <a:spcPts val="0"/>
+              </a:spcAft>
+            </a:pPr>
+            <a:r>
+              <a:rPr sz="1150" b="0" i="0">
+                <a:solidFill>
+                  <a:srgbClr val="1A2430"/>
+                </a:solidFill>
+                <a:latin typeface="Garamond"/>
+              </a:rPr>
+              <a:t>roster-based re-survey of a teacher sample; wave 2021–22</a:t>
+            </a:r>
+          </a:p>
+        </p:txBody>
+      </p:sp>
+      <p:sp>
+        <p:nvSpPr>
+          <p:cNvPr id="52" name="TextBox 51"/>
+          <p:cNvSpPr txBox="1"/>
+          <p:nvPr/>
+        </p:nvSpPr>
+        <p:spPr>
+          <a:xfrm>
+            <a:off x="10058400" y="6153912"/>
+            <a:ext cx="1097280" cy="329184"/>
+          </a:xfrm>
+          <a:prstGeom prst="rect">
+            <a:avLst/>
+          </a:prstGeom>
+          <a:noFill/>
+        </p:spPr>
+        <p:txBody>
+          <a:bodyPr wrap="square" lIns="0" rIns="0" tIns="0" bIns="0">
+            <a:spAutoFit/>
+          </a:bodyPr>
+          <a:lstStyle/>
+          <a:p>
+            <a:pPr algn="l">
+              <a:lnSpc>
+                <a:spcPts val="1725"/>
+              </a:lnSpc>
+              <a:spcAft>
+                <a:spcPts val="0"/>
+              </a:spcAft>
+            </a:pPr>
+            <a:r>
+              <a:rPr sz="1150" b="1" i="0">
                 <a:solidFill>
                   <a:srgbClr val="1A2430"/>
                 </a:solidFill>
@@ -10748,19 +12233,19 @@
       </p:sp>
       <p:cxnSp>
         <p:nvCxnSpPr>
-          <p:cNvPr id="27" name="Connector 26"/>
+          <p:cNvPr id="53" name="Connector 52"/>
           <p:cNvCxnSpPr/>
           <p:nvPr/>
         </p:nvCxnSpPr>
         <p:spPr>
           <a:xfrm>
-            <a:off x="822960" y="5541264"/>
+            <a:off x="822960" y="6510528"/>
             <a:ext cx="10543032" cy="0"/>
           </a:xfrm>
           <a:prstGeom prst="line">
             <a:avLst/>
           </a:prstGeom>
-          <a:ln w="15240">
+          <a:ln w="12700">
             <a:solidFill>
               <a:srgbClr val="1A2430"/>
             </a:solidFill>

--- a/report/Proyect_US_v4.pptx
+++ b/report/Proyect_US_v4.pptx
@@ -7495,7 +7495,7 @@
         <p:spPr>
           <a:xfrm>
             <a:off x="777240" y="1691640"/>
-            <a:ext cx="10698480" cy="1188720"/>
+            <a:ext cx="10698480" cy="731520"/>
           </a:xfrm>
           <a:prstGeom prst="rect">
             <a:avLst/>
@@ -7523,7 +7523,7 @@
                 </a:solidFill>
                 <a:latin typeface="Garamond"/>
               </a:rPr>
-              <a:t>The CPS is the household survey from which the official employment and unemployment statistics of the United States are computed. It has been conducted by the Census Bureau for the Bureau of Labor Statistics since 1940.</a:t>
+              <a:t>The monthly household survey behind the official employment statistics: about 60,000 households, the civilian non-institutional population.</a:t>
             </a:r>
           </a:p>
         </p:txBody>
@@ -7536,7 +7536,7 @@
         </p:nvCxnSpPr>
         <p:spPr>
           <a:xfrm>
-            <a:off x="822960" y="3017520"/>
+            <a:off x="822960" y="2743200"/>
             <a:ext cx="10543032" cy="0"/>
           </a:xfrm>
           <a:prstGeom prst="line">
@@ -7571,8 +7571,8 @@
         </p:nvSpPr>
         <p:spPr>
           <a:xfrm>
-            <a:off x="1005840" y="3200400"/>
-            <a:ext cx="1554480" cy="384048"/>
+            <a:off x="960120" y="2871216"/>
+            <a:ext cx="640080" cy="365760"/>
           </a:xfrm>
           <a:prstGeom prst="rect">
             <a:avLst/>
@@ -7587,20 +7587,20 @@
           <a:p>
             <a:pPr algn="l">
               <a:lnSpc>
-                <a:spcPts val="2100"/>
+                <a:spcPts val="1950"/>
               </a:lnSpc>
               <a:spcAft>
                 <a:spcPts val="0"/>
               </a:spcAft>
             </a:pPr>
             <a:r>
-              <a:rPr sz="1400" b="1" i="0">
+              <a:rPr sz="1300" b="1" i="0">
                 <a:solidFill>
                   <a:srgbClr val="26456E"/>
                 </a:solidFill>
                 <a:latin typeface="Garamond"/>
               </a:rPr>
-              <a:t>Scope</a:t>
+              <a:t>Age</a:t>
             </a:r>
           </a:p>
         </p:txBody>
@@ -7613,8 +7613,8 @@
         </p:nvSpPr>
         <p:spPr>
           <a:xfrm>
-            <a:off x="2697480" y="3200400"/>
-            <a:ext cx="8503920" cy="384048"/>
+            <a:off x="1737360" y="2871216"/>
+            <a:ext cx="3017520" cy="365760"/>
           </a:xfrm>
           <a:prstGeom prst="rect">
             <a:avLst/>
@@ -7629,20 +7629,20 @@
           <a:p>
             <a:pPr algn="l">
               <a:lnSpc>
-                <a:spcPts val="2100"/>
+                <a:spcPts val="1950"/>
               </a:lnSpc>
               <a:spcAft>
                 <a:spcPts val="0"/>
               </a:spcAft>
             </a:pPr>
             <a:r>
-              <a:rPr sz="1400" b="0" i="0">
-                <a:solidFill>
-                  <a:srgbClr val="1A2430"/>
+              <a:rPr sz="1300" b="1" i="0">
+                <a:solidFill>
+                  <a:srgbClr val="26456E"/>
                 </a:solidFill>
                 <a:latin typeface="Garamond"/>
               </a:rPr>
-              <a:t>the civilian non-institutional population of the fifty states and the District of Columbia</a:t>
+              <a:t>Longest job last year</a:t>
             </a:r>
           </a:p>
         </p:txBody>
@@ -7655,8 +7655,8 @@
         </p:nvSpPr>
         <p:spPr>
           <a:xfrm>
-            <a:off x="1005840" y="3675887"/>
-            <a:ext cx="1554480" cy="384048"/>
+            <a:off x="4892040" y="2871216"/>
+            <a:ext cx="777240" cy="365760"/>
           </a:xfrm>
           <a:prstGeom prst="rect">
             <a:avLst/>
@@ -7671,20 +7671,20 @@
           <a:p>
             <a:pPr algn="l">
               <a:lnSpc>
-                <a:spcPts val="2100"/>
+                <a:spcPts val="1950"/>
               </a:lnSpc>
               <a:spcAft>
                 <a:spcPts val="0"/>
               </a:spcAft>
             </a:pPr>
             <a:r>
-              <a:rPr sz="1400" b="1" i="0">
+              <a:rPr sz="1300" b="1" i="0">
                 <a:solidFill>
                   <a:srgbClr val="26456E"/>
                 </a:solidFill>
                 <a:latin typeface="Garamond"/>
               </a:rPr>
-              <a:t>Frequency</a:t>
+              <a:t>Weeks</a:t>
             </a:r>
           </a:p>
         </p:txBody>
@@ -7697,8 +7697,8 @@
         </p:nvSpPr>
         <p:spPr>
           <a:xfrm>
-            <a:off x="2697480" y="3675887"/>
-            <a:ext cx="8503920" cy="384048"/>
+            <a:off x="5806440" y="2871216"/>
+            <a:ext cx="1097280" cy="365760"/>
           </a:xfrm>
           <a:prstGeom prst="rect">
             <a:avLst/>
@@ -7713,20 +7713,20 @@
           <a:p>
             <a:pPr algn="l">
               <a:lnSpc>
-                <a:spcPts val="2100"/>
+                <a:spcPts val="1950"/>
               </a:lnSpc>
               <a:spcAft>
                 <a:spcPts val="0"/>
               </a:spcAft>
             </a:pPr>
             <a:r>
-              <a:rPr sz="1400" b="0" i="0">
-                <a:solidFill>
-                  <a:srgbClr val="1A2430"/>
+              <a:rPr sz="1300" b="1" i="0">
+                <a:solidFill>
+                  <a:srgbClr val="26456E"/>
                 </a:solidFill>
                 <a:latin typeface="Garamond"/>
               </a:rPr>
-              <a:t>monthly, with a single reference week in every month</a:t>
+              <a:t>Wage</a:t>
             </a:r>
           </a:p>
         </p:txBody>
@@ -7739,8 +7739,8 @@
         </p:nvSpPr>
         <p:spPr>
           <a:xfrm>
-            <a:off x="1005840" y="4151375"/>
-            <a:ext cx="1554480" cy="384048"/>
+            <a:off x="7040880" y="2871216"/>
+            <a:ext cx="3017520" cy="365760"/>
           </a:xfrm>
           <a:prstGeom prst="rect">
             <a:avLst/>
@@ -7755,165 +7755,39 @@
           <a:p>
             <a:pPr algn="l">
               <a:lnSpc>
-                <a:spcPts val="2100"/>
+                <a:spcPts val="1950"/>
               </a:lnSpc>
               <a:spcAft>
                 <a:spcPts val="0"/>
               </a:spcAft>
             </a:pPr>
             <a:r>
-              <a:rPr sz="1400" b="1" i="0">
+              <a:rPr sz="1300" b="1" i="0">
                 <a:solidFill>
                   <a:srgbClr val="26456E"/>
                 </a:solidFill>
                 <a:latin typeface="Garamond"/>
               </a:rPr>
-              <a:t>Sample</a:t>
-            </a:r>
-          </a:p>
-        </p:txBody>
-      </p:sp>
-      <p:sp>
-        <p:nvSpPr>
-          <p:cNvPr id="11" name="TextBox 10"/>
-          <p:cNvSpPr txBox="1"/>
-          <p:nvPr/>
-        </p:nvSpPr>
-        <p:spPr>
-          <a:xfrm>
-            <a:off x="2697480" y="4151375"/>
-            <a:ext cx="8503920" cy="384048"/>
-          </a:xfrm>
-          <a:prstGeom prst="rect">
-            <a:avLst/>
-          </a:prstGeom>
-          <a:noFill/>
-        </p:spPr>
-        <p:txBody>
-          <a:bodyPr wrap="square" lIns="0" rIns="0" tIns="0" bIns="0">
-            <a:spAutoFit/>
-          </a:bodyPr>
-          <a:lstStyle/>
-          <a:p>
-            <a:pPr algn="l">
-              <a:lnSpc>
-                <a:spcPts val="2100"/>
-              </a:lnSpc>
-              <a:spcAft>
-                <a:spcPts val="0"/>
-              </a:spcAft>
-            </a:pPr>
-            <a:r>
-              <a:rPr sz="1400" b="0" i="0">
-                <a:solidFill>
-                  <a:srgbClr val="1A2430"/>
-                </a:solidFill>
-                <a:latin typeface="Garamond"/>
-              </a:rPr>
-              <a:t>about 60,000 households, some 110,000 individuals, in each monthly round</a:t>
-            </a:r>
-          </a:p>
-        </p:txBody>
-      </p:sp>
-      <p:sp>
-        <p:nvSpPr>
-          <p:cNvPr id="12" name="TextBox 11"/>
-          <p:cNvSpPr txBox="1"/>
-          <p:nvPr/>
-        </p:nvSpPr>
-        <p:spPr>
-          <a:xfrm>
-            <a:off x="1005840" y="4626863"/>
-            <a:ext cx="1554480" cy="384048"/>
-          </a:xfrm>
-          <a:prstGeom prst="rect">
-            <a:avLst/>
-          </a:prstGeom>
-          <a:noFill/>
-        </p:spPr>
-        <p:txBody>
-          <a:bodyPr wrap="square" lIns="0" rIns="0" tIns="0" bIns="0">
-            <a:spAutoFit/>
-          </a:bodyPr>
-          <a:lstStyle/>
-          <a:p>
-            <a:pPr algn="l">
-              <a:lnSpc>
-                <a:spcPts val="2100"/>
-              </a:lnSpc>
-              <a:spcAft>
-                <a:spcPts val="0"/>
-              </a:spcAft>
-            </a:pPr>
-            <a:r>
-              <a:rPr sz="1400" b="1" i="0">
-                <a:solidFill>
-                  <a:srgbClr val="26456E"/>
-                </a:solidFill>
-                <a:latin typeface="Garamond"/>
-              </a:rPr>
-              <a:t>Rotation</a:t>
-            </a:r>
-          </a:p>
-        </p:txBody>
-      </p:sp>
-      <p:sp>
-        <p:nvSpPr>
-          <p:cNvPr id="13" name="TextBox 12"/>
-          <p:cNvSpPr txBox="1"/>
-          <p:nvPr/>
-        </p:nvSpPr>
-        <p:spPr>
-          <a:xfrm>
-            <a:off x="2697480" y="4626863"/>
-            <a:ext cx="8503920" cy="384048"/>
-          </a:xfrm>
-          <a:prstGeom prst="rect">
-            <a:avLst/>
-          </a:prstGeom>
-          <a:noFill/>
-        </p:spPr>
-        <p:txBody>
-          <a:bodyPr wrap="square" lIns="0" rIns="0" tIns="0" bIns="0">
-            <a:spAutoFit/>
-          </a:bodyPr>
-          <a:lstStyle/>
-          <a:p>
-            <a:pPr algn="l">
-              <a:lnSpc>
-                <a:spcPts val="2100"/>
-              </a:lnSpc>
-              <a:spcAft>
-                <a:spcPts val="0"/>
-              </a:spcAft>
-            </a:pPr>
-            <a:r>
-              <a:rPr sz="1400" b="0" i="0">
-                <a:solidFill>
-                  <a:srgbClr val="1A2430"/>
-                </a:solidFill>
-                <a:latin typeface="Garamond"/>
-              </a:rPr>
-              <a:t>four monthly interviews, eight months out, four more: eight interviews over sixteen months</a:t>
+              <a:t>Occupation this March</a:t>
             </a:r>
           </a:p>
         </p:txBody>
       </p:sp>
       <p:cxnSp>
         <p:nvCxnSpPr>
-          <p:cNvPr id="14" name="Connector 13"/>
+          <p:cNvPr id="11" name="Connector 10"/>
           <p:cNvCxnSpPr/>
           <p:nvPr/>
         </p:nvCxnSpPr>
         <p:spPr>
           <a:xfrm>
-            <a:off x="822960" y="5148071"/>
+            <a:off x="822960" y="3255264"/>
             <a:ext cx="10543032" cy="0"/>
           </a:xfrm>
           <a:prstGeom prst="line">
             <a:avLst/>
           </a:prstGeom>
-          <a:ln w="12700">
+          <a:ln w="7620">
             <a:solidFill>
               <a:srgbClr val="1A2430"/>
             </a:solidFill>
@@ -7936,14 +7810,14 @@
       </p:cxnSp>
       <p:sp>
         <p:nvSpPr>
-          <p:cNvPr id="15" name="TextBox 14"/>
+          <p:cNvPr id="12" name="TextBox 11"/>
           <p:cNvSpPr txBox="1"/>
           <p:nvPr/>
         </p:nvSpPr>
         <p:spPr>
           <a:xfrm>
-            <a:off x="777240" y="5422391"/>
-            <a:ext cx="10698480" cy="914400"/>
+            <a:off x="960120" y="3401568"/>
+            <a:ext cx="640080" cy="384048"/>
           </a:xfrm>
           <a:prstGeom prst="rect">
             <a:avLst/>
@@ -7956,22 +7830,1065 @@
           </a:bodyPr>
           <a:lstStyle/>
           <a:p>
-            <a:pPr algn="just">
+            <a:pPr algn="l">
               <a:lnSpc>
-                <a:spcPts val="2250"/>
+                <a:spcPts val="1875"/>
               </a:lnSpc>
               <a:spcAft>
                 <a:spcPts val="0"/>
               </a:spcAft>
             </a:pPr>
             <a:r>
-              <a:rPr sz="1500" b="0" i="0">
+              <a:rPr sz="1250" b="0" i="0">
                 <a:solidFill>
                   <a:srgbClr val="1A2430"/>
                 </a:solidFill>
                 <a:latin typeface="Garamond"/>
               </a:rPr>
-              <a:t>The rotation is the property this paper exploits: because a household returns to the sample exactly one year after its first interviews, the same individual can be observed twelve months apart.</a:t>
+              <a:t>58</a:t>
+            </a:r>
+          </a:p>
+        </p:txBody>
+      </p:sp>
+      <p:sp>
+        <p:nvSpPr>
+          <p:cNvPr id="13" name="TextBox 12"/>
+          <p:cNvSpPr txBox="1"/>
+          <p:nvPr/>
+        </p:nvSpPr>
+        <p:spPr>
+          <a:xfrm>
+            <a:off x="1737360" y="3401568"/>
+            <a:ext cx="3017520" cy="384048"/>
+          </a:xfrm>
+          <a:prstGeom prst="rect">
+            <a:avLst/>
+          </a:prstGeom>
+          <a:noFill/>
+        </p:spPr>
+        <p:txBody>
+          <a:bodyPr wrap="square" lIns="0" rIns="0" tIns="0" bIns="0">
+            <a:spAutoFit/>
+          </a:bodyPr>
+          <a:lstStyle/>
+          <a:p>
+            <a:pPr algn="l">
+              <a:lnSpc>
+                <a:spcPts val="1875"/>
+              </a:lnSpc>
+              <a:spcAft>
+                <a:spcPts val="0"/>
+              </a:spcAft>
+            </a:pPr>
+            <a:r>
+              <a:rPr sz="1250" b="0" i="0">
+                <a:solidFill>
+                  <a:srgbClr val="1A2430"/>
+                </a:solidFill>
+                <a:latin typeface="Garamond"/>
+              </a:rPr>
+              <a:t>Elementary and middle school teachers</a:t>
+            </a:r>
+          </a:p>
+        </p:txBody>
+      </p:sp>
+      <p:sp>
+        <p:nvSpPr>
+          <p:cNvPr id="14" name="TextBox 13"/>
+          <p:cNvSpPr txBox="1"/>
+          <p:nvPr/>
+        </p:nvSpPr>
+        <p:spPr>
+          <a:xfrm>
+            <a:off x="4892040" y="3401568"/>
+            <a:ext cx="777240" cy="384048"/>
+          </a:xfrm>
+          <a:prstGeom prst="rect">
+            <a:avLst/>
+          </a:prstGeom>
+          <a:noFill/>
+        </p:spPr>
+        <p:txBody>
+          <a:bodyPr wrap="square" lIns="0" rIns="0" tIns="0" bIns="0">
+            <a:spAutoFit/>
+          </a:bodyPr>
+          <a:lstStyle/>
+          <a:p>
+            <a:pPr algn="l">
+              <a:lnSpc>
+                <a:spcPts val="1875"/>
+              </a:lnSpc>
+              <a:spcAft>
+                <a:spcPts val="0"/>
+              </a:spcAft>
+            </a:pPr>
+            <a:r>
+              <a:rPr sz="1250" b="0" i="0">
+                <a:solidFill>
+                  <a:srgbClr val="1A2430"/>
+                </a:solidFill>
+                <a:latin typeface="Garamond"/>
+              </a:rPr>
+              <a:t>52</a:t>
+            </a:r>
+          </a:p>
+        </p:txBody>
+      </p:sp>
+      <p:sp>
+        <p:nvSpPr>
+          <p:cNvPr id="15" name="TextBox 14"/>
+          <p:cNvSpPr txBox="1"/>
+          <p:nvPr/>
+        </p:nvSpPr>
+        <p:spPr>
+          <a:xfrm>
+            <a:off x="5806440" y="3401568"/>
+            <a:ext cx="1097280" cy="384048"/>
+          </a:xfrm>
+          <a:prstGeom prst="rect">
+            <a:avLst/>
+          </a:prstGeom>
+          <a:noFill/>
+        </p:spPr>
+        <p:txBody>
+          <a:bodyPr wrap="square" lIns="0" rIns="0" tIns="0" bIns="0">
+            <a:spAutoFit/>
+          </a:bodyPr>
+          <a:lstStyle/>
+          <a:p>
+            <a:pPr algn="l">
+              <a:lnSpc>
+                <a:spcPts val="1875"/>
+              </a:lnSpc>
+              <a:spcAft>
+                <a:spcPts val="0"/>
+              </a:spcAft>
+            </a:pPr>
+            <a:r>
+              <a:rPr sz="1250" b="0" i="0">
+                <a:solidFill>
+                  <a:srgbClr val="1A2430"/>
+                </a:solidFill>
+                <a:latin typeface="Garamond"/>
+              </a:rPr>
+              <a:t>$76,375</a:t>
+            </a:r>
+          </a:p>
+        </p:txBody>
+      </p:sp>
+      <p:sp>
+        <p:nvSpPr>
+          <p:cNvPr id="16" name="TextBox 15"/>
+          <p:cNvSpPr txBox="1"/>
+          <p:nvPr/>
+        </p:nvSpPr>
+        <p:spPr>
+          <a:xfrm>
+            <a:off x="7040880" y="3401568"/>
+            <a:ext cx="3017520" cy="384048"/>
+          </a:xfrm>
+          <a:prstGeom prst="rect">
+            <a:avLst/>
+          </a:prstGeom>
+          <a:noFill/>
+        </p:spPr>
+        <p:txBody>
+          <a:bodyPr wrap="square" lIns="0" rIns="0" tIns="0" bIns="0">
+            <a:spAutoFit/>
+          </a:bodyPr>
+          <a:lstStyle/>
+          <a:p>
+            <a:pPr algn="l">
+              <a:lnSpc>
+                <a:spcPts val="1875"/>
+              </a:lnSpc>
+              <a:spcAft>
+                <a:spcPts val="0"/>
+              </a:spcAft>
+            </a:pPr>
+            <a:r>
+              <a:rPr sz="1250" b="0" i="0">
+                <a:solidFill>
+                  <a:srgbClr val="1A2430"/>
+                </a:solidFill>
+                <a:latin typeface="Garamond"/>
+              </a:rPr>
+              <a:t>Elementary and middle school teachers</a:t>
+            </a:r>
+          </a:p>
+        </p:txBody>
+      </p:sp>
+      <p:sp>
+        <p:nvSpPr>
+          <p:cNvPr id="17" name="TextBox 16"/>
+          <p:cNvSpPr txBox="1"/>
+          <p:nvPr/>
+        </p:nvSpPr>
+        <p:spPr>
+          <a:xfrm>
+            <a:off x="10195560" y="3401568"/>
+            <a:ext cx="1143000" cy="384048"/>
+          </a:xfrm>
+          <a:prstGeom prst="rect">
+            <a:avLst/>
+          </a:prstGeom>
+          <a:noFill/>
+        </p:spPr>
+        <p:txBody>
+          <a:bodyPr wrap="square" lIns="0" rIns="0" tIns="0" bIns="0">
+            <a:spAutoFit/>
+          </a:bodyPr>
+          <a:lstStyle/>
+          <a:p>
+            <a:pPr algn="l">
+              <a:lnSpc>
+                <a:spcPts val="1875"/>
+              </a:lnSpc>
+              <a:spcAft>
+                <a:spcPts val="0"/>
+              </a:spcAft>
+            </a:pPr>
+            <a:r>
+              <a:rPr sz="1250" b="1" i="0">
+                <a:solidFill>
+                  <a:srgbClr val="1F3864"/>
+                </a:solidFill>
+                <a:latin typeface="Garamond"/>
+              </a:rPr>
+              <a:t>stayer</a:t>
+            </a:r>
+          </a:p>
+        </p:txBody>
+      </p:sp>
+      <p:sp>
+        <p:nvSpPr>
+          <p:cNvPr id="18" name="TextBox 17"/>
+          <p:cNvSpPr txBox="1"/>
+          <p:nvPr/>
+        </p:nvSpPr>
+        <p:spPr>
+          <a:xfrm>
+            <a:off x="960120" y="3877056"/>
+            <a:ext cx="640080" cy="384048"/>
+          </a:xfrm>
+          <a:prstGeom prst="rect">
+            <a:avLst/>
+          </a:prstGeom>
+          <a:noFill/>
+        </p:spPr>
+        <p:txBody>
+          <a:bodyPr wrap="square" lIns="0" rIns="0" tIns="0" bIns="0">
+            <a:spAutoFit/>
+          </a:bodyPr>
+          <a:lstStyle/>
+          <a:p>
+            <a:pPr algn="l">
+              <a:lnSpc>
+                <a:spcPts val="1875"/>
+              </a:lnSpc>
+              <a:spcAft>
+                <a:spcPts val="0"/>
+              </a:spcAft>
+            </a:pPr>
+            <a:r>
+              <a:rPr sz="1250" b="0" i="0">
+                <a:solidFill>
+                  <a:srgbClr val="1A2430"/>
+                </a:solidFill>
+                <a:latin typeface="Garamond"/>
+              </a:rPr>
+              <a:t>28</a:t>
+            </a:r>
+          </a:p>
+        </p:txBody>
+      </p:sp>
+      <p:sp>
+        <p:nvSpPr>
+          <p:cNvPr id="19" name="TextBox 18"/>
+          <p:cNvSpPr txBox="1"/>
+          <p:nvPr/>
+        </p:nvSpPr>
+        <p:spPr>
+          <a:xfrm>
+            <a:off x="1737360" y="3877056"/>
+            <a:ext cx="3017520" cy="384048"/>
+          </a:xfrm>
+          <a:prstGeom prst="rect">
+            <a:avLst/>
+          </a:prstGeom>
+          <a:noFill/>
+        </p:spPr>
+        <p:txBody>
+          <a:bodyPr wrap="square" lIns="0" rIns="0" tIns="0" bIns="0">
+            <a:spAutoFit/>
+          </a:bodyPr>
+          <a:lstStyle/>
+          <a:p>
+            <a:pPr algn="l">
+              <a:lnSpc>
+                <a:spcPts val="1875"/>
+              </a:lnSpc>
+              <a:spcAft>
+                <a:spcPts val="0"/>
+              </a:spcAft>
+            </a:pPr>
+            <a:r>
+              <a:rPr sz="1250" b="0" i="0">
+                <a:solidFill>
+                  <a:srgbClr val="1A2430"/>
+                </a:solidFill>
+                <a:latin typeface="Garamond"/>
+              </a:rPr>
+              <a:t>Elementary and middle school teachers</a:t>
+            </a:r>
+          </a:p>
+        </p:txBody>
+      </p:sp>
+      <p:sp>
+        <p:nvSpPr>
+          <p:cNvPr id="20" name="TextBox 19"/>
+          <p:cNvSpPr txBox="1"/>
+          <p:nvPr/>
+        </p:nvSpPr>
+        <p:spPr>
+          <a:xfrm>
+            <a:off x="4892040" y="3877056"/>
+            <a:ext cx="777240" cy="384048"/>
+          </a:xfrm>
+          <a:prstGeom prst="rect">
+            <a:avLst/>
+          </a:prstGeom>
+          <a:noFill/>
+        </p:spPr>
+        <p:txBody>
+          <a:bodyPr wrap="square" lIns="0" rIns="0" tIns="0" bIns="0">
+            <a:spAutoFit/>
+          </a:bodyPr>
+          <a:lstStyle/>
+          <a:p>
+            <a:pPr algn="l">
+              <a:lnSpc>
+                <a:spcPts val="1875"/>
+              </a:lnSpc>
+              <a:spcAft>
+                <a:spcPts val="0"/>
+              </a:spcAft>
+            </a:pPr>
+            <a:r>
+              <a:rPr sz="1250" b="0" i="0">
+                <a:solidFill>
+                  <a:srgbClr val="1A2430"/>
+                </a:solidFill>
+                <a:latin typeface="Garamond"/>
+              </a:rPr>
+              <a:t>52</a:t>
+            </a:r>
+          </a:p>
+        </p:txBody>
+      </p:sp>
+      <p:sp>
+        <p:nvSpPr>
+          <p:cNvPr id="21" name="TextBox 20"/>
+          <p:cNvSpPr txBox="1"/>
+          <p:nvPr/>
+        </p:nvSpPr>
+        <p:spPr>
+          <a:xfrm>
+            <a:off x="5806440" y="3877056"/>
+            <a:ext cx="1097280" cy="384048"/>
+          </a:xfrm>
+          <a:prstGeom prst="rect">
+            <a:avLst/>
+          </a:prstGeom>
+          <a:noFill/>
+        </p:spPr>
+        <p:txBody>
+          <a:bodyPr wrap="square" lIns="0" rIns="0" tIns="0" bIns="0">
+            <a:spAutoFit/>
+          </a:bodyPr>
+          <a:lstStyle/>
+          <a:p>
+            <a:pPr algn="l">
+              <a:lnSpc>
+                <a:spcPts val="1875"/>
+              </a:lnSpc>
+              <a:spcAft>
+                <a:spcPts val="0"/>
+              </a:spcAft>
+            </a:pPr>
+            <a:r>
+              <a:rPr sz="1250" b="0" i="0">
+                <a:solidFill>
+                  <a:srgbClr val="1A2430"/>
+                </a:solidFill>
+                <a:latin typeface="Garamond"/>
+              </a:rPr>
+              <a:t>$57,000</a:t>
+            </a:r>
+          </a:p>
+        </p:txBody>
+      </p:sp>
+      <p:sp>
+        <p:nvSpPr>
+          <p:cNvPr id="22" name="TextBox 21"/>
+          <p:cNvSpPr txBox="1"/>
+          <p:nvPr/>
+        </p:nvSpPr>
+        <p:spPr>
+          <a:xfrm>
+            <a:off x="7040880" y="3877056"/>
+            <a:ext cx="3017520" cy="384048"/>
+          </a:xfrm>
+          <a:prstGeom prst="rect">
+            <a:avLst/>
+          </a:prstGeom>
+          <a:noFill/>
+        </p:spPr>
+        <p:txBody>
+          <a:bodyPr wrap="square" lIns="0" rIns="0" tIns="0" bIns="0">
+            <a:spAutoFit/>
+          </a:bodyPr>
+          <a:lstStyle/>
+          <a:p>
+            <a:pPr algn="l">
+              <a:lnSpc>
+                <a:spcPts val="1875"/>
+              </a:lnSpc>
+              <a:spcAft>
+                <a:spcPts val="0"/>
+              </a:spcAft>
+            </a:pPr>
+            <a:r>
+              <a:rPr sz="1250" b="0" i="0">
+                <a:solidFill>
+                  <a:srgbClr val="1A2430"/>
+                </a:solidFill>
+                <a:latin typeface="Garamond"/>
+              </a:rPr>
+              <a:t>Secretary and administrative assistant</a:t>
+            </a:r>
+          </a:p>
+        </p:txBody>
+      </p:sp>
+      <p:sp>
+        <p:nvSpPr>
+          <p:cNvPr id="23" name="TextBox 22"/>
+          <p:cNvSpPr txBox="1"/>
+          <p:nvPr/>
+        </p:nvSpPr>
+        <p:spPr>
+          <a:xfrm>
+            <a:off x="10195560" y="3877056"/>
+            <a:ext cx="1143000" cy="384048"/>
+          </a:xfrm>
+          <a:prstGeom prst="rect">
+            <a:avLst/>
+          </a:prstGeom>
+          <a:noFill/>
+        </p:spPr>
+        <p:txBody>
+          <a:bodyPr wrap="square" lIns="0" rIns="0" tIns="0" bIns="0">
+            <a:spAutoFit/>
+          </a:bodyPr>
+          <a:lstStyle/>
+          <a:p>
+            <a:pPr algn="l">
+              <a:lnSpc>
+                <a:spcPts val="1875"/>
+              </a:lnSpc>
+              <a:spcAft>
+                <a:spcPts val="0"/>
+              </a:spcAft>
+            </a:pPr>
+            <a:r>
+              <a:rPr sz="1250" b="1" i="0">
+                <a:solidFill>
+                  <a:srgbClr val="7B2530"/>
+                </a:solidFill>
+                <a:latin typeface="Garamond"/>
+              </a:rPr>
+              <a:t>leaver</a:t>
+            </a:r>
+          </a:p>
+        </p:txBody>
+      </p:sp>
+      <p:sp>
+        <p:nvSpPr>
+          <p:cNvPr id="24" name="TextBox 23"/>
+          <p:cNvSpPr txBox="1"/>
+          <p:nvPr/>
+        </p:nvSpPr>
+        <p:spPr>
+          <a:xfrm>
+            <a:off x="960120" y="4352544"/>
+            <a:ext cx="640080" cy="384048"/>
+          </a:xfrm>
+          <a:prstGeom prst="rect">
+            <a:avLst/>
+          </a:prstGeom>
+          <a:noFill/>
+        </p:spPr>
+        <p:txBody>
+          <a:bodyPr wrap="square" lIns="0" rIns="0" tIns="0" bIns="0">
+            <a:spAutoFit/>
+          </a:bodyPr>
+          <a:lstStyle/>
+          <a:p>
+            <a:pPr algn="l">
+              <a:lnSpc>
+                <a:spcPts val="1875"/>
+              </a:lnSpc>
+              <a:spcAft>
+                <a:spcPts val="0"/>
+              </a:spcAft>
+            </a:pPr>
+            <a:r>
+              <a:rPr sz="1250" b="0" i="0">
+                <a:solidFill>
+                  <a:srgbClr val="1A2430"/>
+                </a:solidFill>
+                <a:latin typeface="Garamond"/>
+              </a:rPr>
+              <a:t>24</a:t>
+            </a:r>
+          </a:p>
+        </p:txBody>
+      </p:sp>
+      <p:sp>
+        <p:nvSpPr>
+          <p:cNvPr id="25" name="TextBox 24"/>
+          <p:cNvSpPr txBox="1"/>
+          <p:nvPr/>
+        </p:nvSpPr>
+        <p:spPr>
+          <a:xfrm>
+            <a:off x="1737360" y="4352544"/>
+            <a:ext cx="3017520" cy="384048"/>
+          </a:xfrm>
+          <a:prstGeom prst="rect">
+            <a:avLst/>
+          </a:prstGeom>
+          <a:noFill/>
+        </p:spPr>
+        <p:txBody>
+          <a:bodyPr wrap="square" lIns="0" rIns="0" tIns="0" bIns="0">
+            <a:spAutoFit/>
+          </a:bodyPr>
+          <a:lstStyle/>
+          <a:p>
+            <a:pPr algn="l">
+              <a:lnSpc>
+                <a:spcPts val="1875"/>
+              </a:lnSpc>
+              <a:spcAft>
+                <a:spcPts val="0"/>
+              </a:spcAft>
+            </a:pPr>
+            <a:r>
+              <a:rPr sz="1250" b="0" i="0">
+                <a:solidFill>
+                  <a:srgbClr val="1A2430"/>
+                </a:solidFill>
+                <a:latin typeface="Garamond"/>
+              </a:rPr>
+              <a:t>Elementary and middle school teachers</a:t>
+            </a:r>
+          </a:p>
+        </p:txBody>
+      </p:sp>
+      <p:sp>
+        <p:nvSpPr>
+          <p:cNvPr id="26" name="TextBox 25"/>
+          <p:cNvSpPr txBox="1"/>
+          <p:nvPr/>
+        </p:nvSpPr>
+        <p:spPr>
+          <a:xfrm>
+            <a:off x="4892040" y="4352544"/>
+            <a:ext cx="777240" cy="384048"/>
+          </a:xfrm>
+          <a:prstGeom prst="rect">
+            <a:avLst/>
+          </a:prstGeom>
+          <a:noFill/>
+        </p:spPr>
+        <p:txBody>
+          <a:bodyPr wrap="square" lIns="0" rIns="0" tIns="0" bIns="0">
+            <a:spAutoFit/>
+          </a:bodyPr>
+          <a:lstStyle/>
+          <a:p>
+            <a:pPr algn="l">
+              <a:lnSpc>
+                <a:spcPts val="1875"/>
+              </a:lnSpc>
+              <a:spcAft>
+                <a:spcPts val="0"/>
+              </a:spcAft>
+            </a:pPr>
+            <a:r>
+              <a:rPr sz="1250" b="0" i="0">
+                <a:solidFill>
+                  <a:srgbClr val="1A2430"/>
+                </a:solidFill>
+                <a:latin typeface="Garamond"/>
+              </a:rPr>
+              <a:t>40</a:t>
+            </a:r>
+          </a:p>
+        </p:txBody>
+      </p:sp>
+      <p:sp>
+        <p:nvSpPr>
+          <p:cNvPr id="27" name="TextBox 26"/>
+          <p:cNvSpPr txBox="1"/>
+          <p:nvPr/>
+        </p:nvSpPr>
+        <p:spPr>
+          <a:xfrm>
+            <a:off x="5806440" y="4352544"/>
+            <a:ext cx="1097280" cy="384048"/>
+          </a:xfrm>
+          <a:prstGeom prst="rect">
+            <a:avLst/>
+          </a:prstGeom>
+          <a:noFill/>
+        </p:spPr>
+        <p:txBody>
+          <a:bodyPr wrap="square" lIns="0" rIns="0" tIns="0" bIns="0">
+            <a:spAutoFit/>
+          </a:bodyPr>
+          <a:lstStyle/>
+          <a:p>
+            <a:pPr algn="l">
+              <a:lnSpc>
+                <a:spcPts val="1875"/>
+              </a:lnSpc>
+              <a:spcAft>
+                <a:spcPts val="0"/>
+              </a:spcAft>
+            </a:pPr>
+            <a:r>
+              <a:rPr sz="1250" b="0" i="0">
+                <a:solidFill>
+                  <a:srgbClr val="1A2430"/>
+                </a:solidFill>
+                <a:latin typeface="Garamond"/>
+              </a:rPr>
+              <a:t>$81,500</a:t>
+            </a:r>
+          </a:p>
+        </p:txBody>
+      </p:sp>
+      <p:sp>
+        <p:nvSpPr>
+          <p:cNvPr id="28" name="TextBox 27"/>
+          <p:cNvSpPr txBox="1"/>
+          <p:nvPr/>
+        </p:nvSpPr>
+        <p:spPr>
+          <a:xfrm>
+            <a:off x="7040880" y="4352544"/>
+            <a:ext cx="3017520" cy="384048"/>
+          </a:xfrm>
+          <a:prstGeom prst="rect">
+            <a:avLst/>
+          </a:prstGeom>
+          <a:noFill/>
+        </p:spPr>
+        <p:txBody>
+          <a:bodyPr wrap="square" lIns="0" rIns="0" tIns="0" bIns="0">
+            <a:spAutoFit/>
+          </a:bodyPr>
+          <a:lstStyle/>
+          <a:p>
+            <a:pPr algn="l">
+              <a:lnSpc>
+                <a:spcPts val="1875"/>
+              </a:lnSpc>
+              <a:spcAft>
+                <a:spcPts val="0"/>
+              </a:spcAft>
+            </a:pPr>
+            <a:r>
+              <a:rPr sz="1250" b="0" i="0">
+                <a:solidFill>
+                  <a:srgbClr val="1A2430"/>
+                </a:solidFill>
+                <a:latin typeface="Garamond"/>
+              </a:rPr>
+              <a:t>Teaching assistant</a:t>
+            </a:r>
+          </a:p>
+        </p:txBody>
+      </p:sp>
+      <p:sp>
+        <p:nvSpPr>
+          <p:cNvPr id="29" name="TextBox 28"/>
+          <p:cNvSpPr txBox="1"/>
+          <p:nvPr/>
+        </p:nvSpPr>
+        <p:spPr>
+          <a:xfrm>
+            <a:off x="10195560" y="4352544"/>
+            <a:ext cx="1143000" cy="384048"/>
+          </a:xfrm>
+          <a:prstGeom prst="rect">
+            <a:avLst/>
+          </a:prstGeom>
+          <a:noFill/>
+        </p:spPr>
+        <p:txBody>
+          <a:bodyPr wrap="square" lIns="0" rIns="0" tIns="0" bIns="0">
+            <a:spAutoFit/>
+          </a:bodyPr>
+          <a:lstStyle/>
+          <a:p>
+            <a:pPr algn="l">
+              <a:lnSpc>
+                <a:spcPts val="1875"/>
+              </a:lnSpc>
+              <a:spcAft>
+                <a:spcPts val="0"/>
+              </a:spcAft>
+            </a:pPr>
+            <a:r>
+              <a:rPr sz="1250" b="1" i="0">
+                <a:solidFill>
+                  <a:srgbClr val="7B2530"/>
+                </a:solidFill>
+                <a:latin typeface="Garamond"/>
+              </a:rPr>
+              <a:t>leaver</a:t>
+            </a:r>
+          </a:p>
+        </p:txBody>
+      </p:sp>
+      <p:sp>
+        <p:nvSpPr>
+          <p:cNvPr id="30" name="TextBox 29"/>
+          <p:cNvSpPr txBox="1"/>
+          <p:nvPr/>
+        </p:nvSpPr>
+        <p:spPr>
+          <a:xfrm>
+            <a:off x="960120" y="4828031"/>
+            <a:ext cx="640080" cy="384048"/>
+          </a:xfrm>
+          <a:prstGeom prst="rect">
+            <a:avLst/>
+          </a:prstGeom>
+          <a:noFill/>
+        </p:spPr>
+        <p:txBody>
+          <a:bodyPr wrap="square" lIns="0" rIns="0" tIns="0" bIns="0">
+            <a:spAutoFit/>
+          </a:bodyPr>
+          <a:lstStyle/>
+          <a:p>
+            <a:pPr algn="l">
+              <a:lnSpc>
+                <a:spcPts val="1875"/>
+              </a:lnSpc>
+              <a:spcAft>
+                <a:spcPts val="0"/>
+              </a:spcAft>
+            </a:pPr>
+            <a:r>
+              <a:rPr sz="1250" b="0" i="0">
+                <a:solidFill>
+                  <a:srgbClr val="1A2430"/>
+                </a:solidFill>
+                <a:latin typeface="Garamond"/>
+              </a:rPr>
+              <a:t>62</a:t>
+            </a:r>
+          </a:p>
+        </p:txBody>
+      </p:sp>
+      <p:sp>
+        <p:nvSpPr>
+          <p:cNvPr id="31" name="TextBox 30"/>
+          <p:cNvSpPr txBox="1"/>
+          <p:nvPr/>
+        </p:nvSpPr>
+        <p:spPr>
+          <a:xfrm>
+            <a:off x="1737360" y="4828031"/>
+            <a:ext cx="3017520" cy="384048"/>
+          </a:xfrm>
+          <a:prstGeom prst="rect">
+            <a:avLst/>
+          </a:prstGeom>
+          <a:noFill/>
+        </p:spPr>
+        <p:txBody>
+          <a:bodyPr wrap="square" lIns="0" rIns="0" tIns="0" bIns="0">
+            <a:spAutoFit/>
+          </a:bodyPr>
+          <a:lstStyle/>
+          <a:p>
+            <a:pPr algn="l">
+              <a:lnSpc>
+                <a:spcPts val="1875"/>
+              </a:lnSpc>
+              <a:spcAft>
+                <a:spcPts val="0"/>
+              </a:spcAft>
+            </a:pPr>
+            <a:r>
+              <a:rPr sz="1250" b="0" i="0">
+                <a:solidFill>
+                  <a:srgbClr val="1A2430"/>
+                </a:solidFill>
+                <a:latin typeface="Garamond"/>
+              </a:rPr>
+              <a:t>Elementary and middle school teachers</a:t>
+            </a:r>
+          </a:p>
+        </p:txBody>
+      </p:sp>
+      <p:sp>
+        <p:nvSpPr>
+          <p:cNvPr id="32" name="TextBox 31"/>
+          <p:cNvSpPr txBox="1"/>
+          <p:nvPr/>
+        </p:nvSpPr>
+        <p:spPr>
+          <a:xfrm>
+            <a:off x="4892040" y="4828031"/>
+            <a:ext cx="777240" cy="384048"/>
+          </a:xfrm>
+          <a:prstGeom prst="rect">
+            <a:avLst/>
+          </a:prstGeom>
+          <a:noFill/>
+        </p:spPr>
+        <p:txBody>
+          <a:bodyPr wrap="square" lIns="0" rIns="0" tIns="0" bIns="0">
+            <a:spAutoFit/>
+          </a:bodyPr>
+          <a:lstStyle/>
+          <a:p>
+            <a:pPr algn="l">
+              <a:lnSpc>
+                <a:spcPts val="1875"/>
+              </a:lnSpc>
+              <a:spcAft>
+                <a:spcPts val="0"/>
+              </a:spcAft>
+            </a:pPr>
+            <a:r>
+              <a:rPr sz="1250" b="0" i="0">
+                <a:solidFill>
+                  <a:srgbClr val="1A2430"/>
+                </a:solidFill>
+                <a:latin typeface="Garamond"/>
+              </a:rPr>
+              <a:t>26</a:t>
+            </a:r>
+          </a:p>
+        </p:txBody>
+      </p:sp>
+      <p:sp>
+        <p:nvSpPr>
+          <p:cNvPr id="33" name="TextBox 32"/>
+          <p:cNvSpPr txBox="1"/>
+          <p:nvPr/>
+        </p:nvSpPr>
+        <p:spPr>
+          <a:xfrm>
+            <a:off x="5806440" y="4828031"/>
+            <a:ext cx="1097280" cy="384048"/>
+          </a:xfrm>
+          <a:prstGeom prst="rect">
+            <a:avLst/>
+          </a:prstGeom>
+          <a:noFill/>
+        </p:spPr>
+        <p:txBody>
+          <a:bodyPr wrap="square" lIns="0" rIns="0" tIns="0" bIns="0">
+            <a:spAutoFit/>
+          </a:bodyPr>
+          <a:lstStyle/>
+          <a:p>
+            <a:pPr algn="l">
+              <a:lnSpc>
+                <a:spcPts val="1875"/>
+              </a:lnSpc>
+              <a:spcAft>
+                <a:spcPts val="0"/>
+              </a:spcAft>
+            </a:pPr>
+            <a:r>
+              <a:rPr sz="1250" b="0" i="0">
+                <a:solidFill>
+                  <a:srgbClr val="1A2430"/>
+                </a:solidFill>
+                <a:latin typeface="Garamond"/>
+              </a:rPr>
+              <a:t>$62,000</a:t>
+            </a:r>
+          </a:p>
+        </p:txBody>
+      </p:sp>
+      <p:sp>
+        <p:nvSpPr>
+          <p:cNvPr id="34" name="TextBox 33"/>
+          <p:cNvSpPr txBox="1"/>
+          <p:nvPr/>
+        </p:nvSpPr>
+        <p:spPr>
+          <a:xfrm>
+            <a:off x="7040880" y="4828031"/>
+            <a:ext cx="3017520" cy="384048"/>
+          </a:xfrm>
+          <a:prstGeom prst="rect">
+            <a:avLst/>
+          </a:prstGeom>
+          <a:noFill/>
+        </p:spPr>
+        <p:txBody>
+          <a:bodyPr wrap="square" lIns="0" rIns="0" tIns="0" bIns="0">
+            <a:spAutoFit/>
+          </a:bodyPr>
+          <a:lstStyle/>
+          <a:p>
+            <a:pPr algn="l">
+              <a:lnSpc>
+                <a:spcPts val="1875"/>
+              </a:lnSpc>
+              <a:spcAft>
+                <a:spcPts val="0"/>
+              </a:spcAft>
+            </a:pPr>
+            <a:r>
+              <a:rPr sz="1250" b="0" i="0">
+                <a:solidFill>
+                  <a:srgbClr val="1A2430"/>
+                </a:solidFill>
+                <a:latin typeface="Garamond"/>
+              </a:rPr>
+              <a:t>Not employed in March</a:t>
+            </a:r>
+          </a:p>
+        </p:txBody>
+      </p:sp>
+      <p:sp>
+        <p:nvSpPr>
+          <p:cNvPr id="35" name="TextBox 34"/>
+          <p:cNvSpPr txBox="1"/>
+          <p:nvPr/>
+        </p:nvSpPr>
+        <p:spPr>
+          <a:xfrm>
+            <a:off x="10195560" y="4828031"/>
+            <a:ext cx="1143000" cy="384048"/>
+          </a:xfrm>
+          <a:prstGeom prst="rect">
+            <a:avLst/>
+          </a:prstGeom>
+          <a:noFill/>
+        </p:spPr>
+        <p:txBody>
+          <a:bodyPr wrap="square" lIns="0" rIns="0" tIns="0" bIns="0">
+            <a:spAutoFit/>
+          </a:bodyPr>
+          <a:lstStyle/>
+          <a:p>
+            <a:pPr algn="l">
+              <a:lnSpc>
+                <a:spcPts val="1875"/>
+              </a:lnSpc>
+              <a:spcAft>
+                <a:spcPts val="0"/>
+              </a:spcAft>
+            </a:pPr>
+            <a:r>
+              <a:rPr sz="1250" b="1" i="0">
+                <a:solidFill>
+                  <a:srgbClr val="7B2530"/>
+                </a:solidFill>
+                <a:latin typeface="Garamond"/>
+              </a:rPr>
+              <a:t>leaver</a:t>
+            </a:r>
+          </a:p>
+        </p:txBody>
+      </p:sp>
+      <p:cxnSp>
+        <p:nvCxnSpPr>
+          <p:cNvPr id="36" name="Connector 35"/>
+          <p:cNvCxnSpPr/>
+          <p:nvPr/>
+        </p:nvCxnSpPr>
+        <p:spPr>
+          <a:xfrm>
+            <a:off x="822960" y="5321807"/>
+            <a:ext cx="10543032" cy="0"/>
+          </a:xfrm>
+          <a:prstGeom prst="line">
+            <a:avLst/>
+          </a:prstGeom>
+          <a:ln w="12700">
+            <a:solidFill>
+              <a:srgbClr val="1A2430"/>
+            </a:solidFill>
+          </a:ln>
+        </p:spPr>
+        <p:style>
+          <a:lnRef idx="2">
+            <a:schemeClr val="accent1"/>
+          </a:lnRef>
+          <a:fillRef idx="0">
+            <a:schemeClr val="accent1"/>
+          </a:fillRef>
+          <a:effectRef idx="1">
+            <a:schemeClr val="accent1"/>
+          </a:effectRef>
+          <a:fontRef idx="minor">
+            <a:schemeClr val="tx1"/>
+          </a:fontRef>
+        </p:style>
+      </p:cxnSp>
+      <p:sp>
+        <p:nvSpPr>
+          <p:cNvPr id="37" name="TextBox 36"/>
+          <p:cNvSpPr txBox="1"/>
+          <p:nvPr/>
+        </p:nvSpPr>
+        <p:spPr>
+          <a:xfrm>
+            <a:off x="822960" y="5522975"/>
+            <a:ext cx="10543032" cy="365760"/>
+          </a:xfrm>
+          <a:prstGeom prst="rect">
+            <a:avLst/>
+          </a:prstGeom>
+          <a:noFill/>
+        </p:spPr>
+        <p:txBody>
+          <a:bodyPr wrap="square" lIns="0" rIns="0" tIns="0" bIns="0">
+            <a:spAutoFit/>
+          </a:bodyPr>
+          <a:lstStyle/>
+          <a:p>
+            <a:pPr algn="l">
+              <a:lnSpc>
+                <a:spcPts val="1800"/>
+              </a:lnSpc>
+              <a:spcAft>
+                <a:spcPts val="0"/>
+              </a:spcAft>
+            </a:pPr>
+            <a:r>
+              <a:rPr sz="1200" b="0" i="1">
+                <a:solidFill>
+                  <a:srgbClr val="6B7480"/>
+                </a:solidFill>
+                <a:latin typeface="Garamond"/>
+              </a:rPr>
+              <a:t>Four records from the March 2025 supplement, as they enter the dataset.</a:t>
             </a:r>
           </a:p>
         </p:txBody>
@@ -8080,7 +8997,7 @@
         <p:spPr>
           <a:xfrm>
             <a:off x="777240" y="1691640"/>
-            <a:ext cx="10698480" cy="4754880"/>
+            <a:ext cx="10698480" cy="3657600"/>
           </a:xfrm>
           <a:prstGeom prst="rect">
             <a:avLst/>
@@ -8098,7 +9015,7 @@
                 <a:spcPts val="2550"/>
               </a:lnSpc>
               <a:spcAft>
-                <a:spcPts val="1400"/>
+                <a:spcPts val="1600"/>
               </a:spcAft>
             </a:pPr>
             <a:r>
@@ -8108,7 +9025,7 @@
                 </a:solidFill>
                 <a:latin typeface="Garamond"/>
               </a:rPr>
-              <a:t>The basic monthly interview measures current activity only: labor force status in the reference week and the occupation of the current job. It asks nothing about the past.</a:t>
+              <a:t>The basic monthly interview measures current activity only. Most months add a supplement on a rotating topic.</a:t>
             </a:r>
           </a:p>
           <a:p>
@@ -8117,7 +9034,7 @@
                 <a:spcPts val="2550"/>
               </a:lnSpc>
               <a:spcAft>
-                <a:spcPts val="1400"/>
+                <a:spcPts val="1600"/>
               </a:spcAft>
             </a:pPr>
             <a:r>
@@ -8127,26 +9044,7 @@
                 </a:solidFill>
                 <a:latin typeface="Garamond"/>
               </a:rPr>
-              <a:t>In most months a supplement is appended to the basic interview, a module on a rotating topic: school enrollment in October, voting in November, fertility, tobacco use.</a:t>
-            </a:r>
-          </a:p>
-          <a:p>
-            <a:pPr algn="just">
-              <a:lnSpc>
-                <a:spcPts val="2550"/>
-              </a:lnSpc>
-              <a:spcAft>
-                <a:spcPts val="1400"/>
-              </a:spcAft>
-            </a:pPr>
-            <a:r>
-              <a:rPr sz="1700" b="0" i="0">
-                <a:solidFill>
-                  <a:srgbClr val="1A2430"/>
-                </a:solidFill>
-                <a:latin typeface="Garamond"/>
-              </a:rPr>
-              <a:t>The March supplement, the Annual Social and Economic Supplement, is the largest and oldest. The sample is expanded to roughly 90,000 households, and every adult is asked about the entire previous calendar year: the longest job held, weeks worked, earnings, income, and benefits.</a:t>
+              <a:t>The March supplement expands the sample to roughly 90,000 households and asks every adult about the entire previous calendar year: longest job held, weeks worked, earnings.</a:t>
             </a:r>
           </a:p>
           <a:p>
@@ -8165,7 +9063,7 @@
                 </a:solidFill>
                 <a:latin typeface="Garamond"/>
               </a:rPr>
-              <a:t>The basic interview sees one month; only the March interview sees the whole preceding year. An annual leaving rate can therefore be measured in March, and in no other month.</a:t>
+              <a:t>An annual leaving rate can therefore be measured in March, and in no other month.</a:t>
             </a:r>
           </a:p>
         </p:txBody>
@@ -8274,7 +9172,7 @@
         <p:spPr>
           <a:xfrm>
             <a:off x="777240" y="1691640"/>
-            <a:ext cx="10698480" cy="4389120"/>
+            <a:ext cx="10698480" cy="2926080"/>
           </a:xfrm>
           <a:prstGeom prst="rect">
             <a:avLst/>
@@ -8292,7 +9190,7 @@
                 <a:spcPts val="2550"/>
               </a:lnSpc>
               <a:spcAft>
-                <a:spcPts val="1400"/>
+                <a:spcPts val="1600"/>
               </a:spcAft>
             </a:pPr>
             <a:r>
@@ -8302,26 +9200,7 @@
                 </a:solidFill>
                 <a:latin typeface="Garamond"/>
               </a:rPr>
-              <a:t>I pool every March supplement from 1998 to 2025 into a single file: five million individual records, 104,545 of them teachers, around 3,700 per year.</a:t>
-            </a:r>
-          </a:p>
-          <a:p>
-            <a:pPr algn="just">
-              <a:lnSpc>
-                <a:spcPts val="2550"/>
-              </a:lnSpc>
-              <a:spcAft>
-                <a:spcPts val="1400"/>
-              </a:spcAft>
-            </a:pPr>
-            <a:r>
-              <a:rPr sz="1700" b="0" i="0">
-                <a:solidFill>
-                  <a:srgbClr val="1A2430"/>
-                </a:solidFill>
-                <a:latin typeface="Garamond"/>
-              </a:rPr>
-              <a:t>Whoever taught as last year’s longest job, and no longer teaches at the March interview, has left the profession within the year.</a:t>
+              <a:t>I pool every March supplement from 1998 to 2025: five million records, 104,545 of them teachers.</a:t>
             </a:r>
           </a:p>
           <a:p>
@@ -8340,7 +9219,7 @@
                 </a:solidFill>
                 <a:latin typeface="Garamond"/>
               </a:rPr>
-              <a:t>Each record carries age, family structure, earnings, school sector, state, and pension coverage, so leaving can be related to what we observe about the teacher.</a:t>
+              <a:t>Whoever taught as last year’s longest job, and no longer teaches at the March interview, has left the profession within the year.</a:t>
             </a:r>
           </a:p>
         </p:txBody>
@@ -8449,7 +9328,7 @@
         <p:spPr>
           <a:xfrm>
             <a:off x="777240" y="1691640"/>
-            <a:ext cx="10698480" cy="1463040"/>
+            <a:ext cx="10698480" cy="731520"/>
           </a:xfrm>
           <a:prstGeom prst="rect">
             <a:avLst/>
@@ -8477,7 +9356,7 @@
                 </a:solidFill>
                 <a:latin typeface="Garamond"/>
               </a:rPr>
-              <a:t>The CPS carries no individual identifier across interviews: sampling follows addresses, not persons. Records are therefore linked across waves on household-level identifiers, and each candidate link is validated on demographic consistency, following Madrian and Lefgren (1999).</a:t>
+              <a:t>The CPS carries no individual identifier: records are linked on household identifiers and validated on demographics (Madrian and Lefgren, 1999).</a:t>
             </a:r>
           </a:p>
         </p:txBody>
@@ -8490,7 +9369,7 @@
         </p:nvCxnSpPr>
         <p:spPr>
           <a:xfrm>
-            <a:off x="822960" y="3063240"/>
+            <a:off x="822960" y="2788920"/>
             <a:ext cx="10543032" cy="0"/>
           </a:xfrm>
           <a:prstGeom prst="line">
@@ -8525,7 +9404,7 @@
         </p:nvSpPr>
         <p:spPr>
           <a:xfrm>
-            <a:off x="1005840" y="3246120"/>
+            <a:off x="1005840" y="2971800"/>
             <a:ext cx="4206240" cy="365760"/>
           </a:xfrm>
           <a:prstGeom prst="rect">
@@ -8567,7 +9446,7 @@
         </p:nvSpPr>
         <p:spPr>
           <a:xfrm>
-            <a:off x="6035040" y="3246120"/>
+            <a:off x="6035040" y="2971800"/>
             <a:ext cx="4937760" cy="365760"/>
           </a:xfrm>
           <a:prstGeom prst="rect">
@@ -8596,7 +9475,7 @@
                 </a:solidFill>
                 <a:latin typeface="Garamond"/>
               </a:rPr>
-              <a:t>Validation (demographic consistency)</a:t>
+              <a:t>Validation</a:t>
             </a:r>
           </a:p>
         </p:txBody>
@@ -8609,7 +9488,7 @@
         </p:nvSpPr>
         <p:spPr>
           <a:xfrm>
-            <a:off x="1005840" y="3730752"/>
+            <a:off x="1005840" y="3456432"/>
             <a:ext cx="4206240" cy="1463040"/>
           </a:xfrm>
           <a:prstGeom prst="rect">
@@ -8676,7 +9555,7 @@
                 </a:solidFill>
                 <a:latin typeface="Garamond"/>
               </a:rPr>
-              <a:t>Person line number within the household</a:t>
+              <a:t>Person line number</a:t>
             </a:r>
           </a:p>
         </p:txBody>
@@ -8689,7 +9568,7 @@
         </p:nvSpPr>
         <p:spPr>
           <a:xfrm>
-            <a:off x="6035040" y="3730752"/>
+            <a:off x="6035040" y="3456432"/>
             <a:ext cx="4937760" cy="1463040"/>
           </a:xfrm>
           <a:prstGeom prst="rect">
@@ -8718,7 +9597,7 @@
                 </a:solidFill>
                 <a:latin typeface="Garamond"/>
               </a:rPr>
-              <a:t>Sex, identical across interviews</a:t>
+              <a:t>Sex, identical</a:t>
             </a:r>
           </a:p>
           <a:p>
@@ -8737,7 +9616,7 @@
                 </a:solidFill>
                 <a:latin typeface="Garamond"/>
               </a:rPr>
-              <a:t>Race, identical across interviews</a:t>
+              <a:t>Race, identical</a:t>
             </a:r>
           </a:p>
           <a:p>
@@ -8769,7 +9648,7 @@
         </p:nvCxnSpPr>
         <p:spPr>
           <a:xfrm>
-            <a:off x="822960" y="5303520"/>
+            <a:off x="822960" y="5029200"/>
             <a:ext cx="10543032" cy="0"/>
           </a:xfrm>
           <a:prstGeom prst="line">
@@ -8804,8 +9683,8 @@
         </p:nvSpPr>
         <p:spPr>
           <a:xfrm>
-            <a:off x="777240" y="5577840"/>
-            <a:ext cx="10698480" cy="1097280"/>
+            <a:off x="777240" y="5303520"/>
+            <a:ext cx="10698480" cy="548640"/>
           </a:xfrm>
           <a:prstGeom prst="rect">
             <a:avLst/>
@@ -8833,7 +9712,7 @@
                 </a:solidFill>
                 <a:latin typeface="Garamond"/>
               </a:rPr>
-              <a:t>Validated links are obtained for 78 percent of teacher observations (74 percent of other college graduates). The loss is concentrated among movers, whose exit propensity exceeds that of non-movers; panel-based estimates are therefore lower bounds on mobility-related exit.</a:t>
+              <a:t>Validated links: 78 percent of teacher observations.</a:t>
             </a:r>
           </a:p>
         </p:txBody>
@@ -9160,10 +10039,12 @@
             <a:avLst/>
           </a:prstGeom>
           <a:solidFill>
-            <a:srgbClr val="7B2530"/>
+            <a:srgbClr val="FFFFFF"/>
           </a:solidFill>
-          <a:ln>
-            <a:noFill/>
+          <a:ln w="9525">
+            <a:solidFill>
+              <a:srgbClr val="C9CFD6"/>
+            </a:solidFill>
           </a:ln>
           <a:effectLst/>
         </p:spPr>
@@ -9182,19 +10063,10 @@
           </a:fontRef>
         </p:style>
         <p:txBody>
-          <a:bodyPr rtlCol="0" anchor="ctr" wrap="none"/>
+          <a:bodyPr rtlCol="0" anchor="ctr"/>
           <a:lstStyle/>
           <a:p>
             <a:pPr algn="ctr"/>
-            <a:r>
-              <a:rPr sz="1200" b="1">
-                <a:solidFill>
-                  <a:srgbClr val="FFFFFF"/>
-                </a:solidFill>
-                <a:latin typeface="Garamond"/>
-              </a:rPr>
-              <a:t>T</a:t>
-            </a:r>
           </a:p>
         </p:txBody>
       </p:sp>
@@ -9207,419 +10079,6 @@
         <p:spPr>
           <a:xfrm>
             <a:off x="4617720" y="1874519"/>
-            <a:ext cx="548640" cy="548640"/>
-          </a:xfrm>
-          <a:prstGeom prst="rect">
-            <a:avLst/>
-          </a:prstGeom>
-          <a:solidFill>
-            <a:srgbClr val="7B2530"/>
-          </a:solidFill>
-          <a:ln>
-            <a:noFill/>
-          </a:ln>
-          <a:effectLst/>
-        </p:spPr>
-        <p:style>
-          <a:lnRef idx="1">
-            <a:schemeClr val="accent1"/>
-          </a:lnRef>
-          <a:fillRef idx="3">
-            <a:schemeClr val="accent1"/>
-          </a:fillRef>
-          <a:effectRef idx="2">
-            <a:schemeClr val="accent1"/>
-          </a:effectRef>
-          <a:fontRef idx="minor">
-            <a:schemeClr val="lt1"/>
-          </a:fontRef>
-        </p:style>
-        <p:txBody>
-          <a:bodyPr rtlCol="0" anchor="ctr" wrap="none"/>
-          <a:lstStyle/>
-          <a:p>
-            <a:pPr algn="ctr"/>
-            <a:r>
-              <a:rPr sz="1200" b="1">
-                <a:solidFill>
-                  <a:srgbClr val="FFFFFF"/>
-                </a:solidFill>
-                <a:latin typeface="Garamond"/>
-              </a:rPr>
-              <a:t>T</a:t>
-            </a:r>
-          </a:p>
-        </p:txBody>
-      </p:sp>
-      <p:sp>
-        <p:nvSpPr>
-          <p:cNvPr id="10" name="Rectangle 9"/>
-          <p:cNvSpPr/>
-          <p:nvPr/>
-        </p:nvSpPr>
-        <p:spPr>
-          <a:xfrm>
-            <a:off x="5221224" y="1874519"/>
-            <a:ext cx="548640" cy="548640"/>
-          </a:xfrm>
-          <a:prstGeom prst="rect">
-            <a:avLst/>
-          </a:prstGeom>
-          <a:solidFill>
-            <a:srgbClr val="7B2530"/>
-          </a:solidFill>
-          <a:ln>
-            <a:noFill/>
-          </a:ln>
-          <a:effectLst/>
-        </p:spPr>
-        <p:style>
-          <a:lnRef idx="1">
-            <a:schemeClr val="accent1"/>
-          </a:lnRef>
-          <a:fillRef idx="3">
-            <a:schemeClr val="accent1"/>
-          </a:fillRef>
-          <a:effectRef idx="2">
-            <a:schemeClr val="accent1"/>
-          </a:effectRef>
-          <a:fontRef idx="minor">
-            <a:schemeClr val="lt1"/>
-          </a:fontRef>
-        </p:style>
-        <p:txBody>
-          <a:bodyPr rtlCol="0" anchor="ctr" wrap="none"/>
-          <a:lstStyle/>
-          <a:p>
-            <a:pPr algn="ctr"/>
-            <a:r>
-              <a:rPr sz="1200" b="1">
-                <a:solidFill>
-                  <a:srgbClr val="FFFFFF"/>
-                </a:solidFill>
-                <a:latin typeface="Garamond"/>
-              </a:rPr>
-              <a:t>T</a:t>
-            </a:r>
-          </a:p>
-        </p:txBody>
-      </p:sp>
-      <p:sp>
-        <p:nvSpPr>
-          <p:cNvPr id="11" name="Rectangle 10"/>
-          <p:cNvSpPr/>
-          <p:nvPr/>
-        </p:nvSpPr>
-        <p:spPr>
-          <a:xfrm>
-            <a:off x="5824728" y="1874519"/>
-            <a:ext cx="548640" cy="548640"/>
-          </a:xfrm>
-          <a:prstGeom prst="rect">
-            <a:avLst/>
-          </a:prstGeom>
-          <a:solidFill>
-            <a:srgbClr val="7B2530"/>
-          </a:solidFill>
-          <a:ln>
-            <a:noFill/>
-          </a:ln>
-          <a:effectLst/>
-        </p:spPr>
-        <p:style>
-          <a:lnRef idx="1">
-            <a:schemeClr val="accent1"/>
-          </a:lnRef>
-          <a:fillRef idx="3">
-            <a:schemeClr val="accent1"/>
-          </a:fillRef>
-          <a:effectRef idx="2">
-            <a:schemeClr val="accent1"/>
-          </a:effectRef>
-          <a:fontRef idx="minor">
-            <a:schemeClr val="lt1"/>
-          </a:fontRef>
-        </p:style>
-        <p:txBody>
-          <a:bodyPr rtlCol="0" anchor="ctr" wrap="none"/>
-          <a:lstStyle/>
-          <a:p>
-            <a:pPr algn="ctr"/>
-            <a:r>
-              <a:rPr sz="1200" b="1">
-                <a:solidFill>
-                  <a:srgbClr val="FFFFFF"/>
-                </a:solidFill>
-                <a:latin typeface="Garamond"/>
-              </a:rPr>
-              <a:t>T</a:t>
-            </a:r>
-          </a:p>
-        </p:txBody>
-      </p:sp>
-      <p:sp>
-        <p:nvSpPr>
-          <p:cNvPr id="12" name="TextBox 11"/>
-          <p:cNvSpPr txBox="1"/>
-          <p:nvPr/>
-        </p:nvSpPr>
-        <p:spPr>
-          <a:xfrm>
-            <a:off x="6748272" y="1984248"/>
-            <a:ext cx="4572000" cy="411480"/>
-          </a:xfrm>
-          <a:prstGeom prst="rect">
-            <a:avLst/>
-          </a:prstGeom>
-          <a:noFill/>
-        </p:spPr>
-        <p:txBody>
-          <a:bodyPr wrap="square" lIns="0" rIns="0" tIns="0" bIns="0">
-            <a:spAutoFit/>
-          </a:bodyPr>
-          <a:lstStyle/>
-          <a:p>
-            <a:pPr algn="l">
-              <a:lnSpc>
-                <a:spcPts val="2100"/>
-              </a:lnSpc>
-              <a:spcAft>
-                <a:spcPts val="0"/>
-              </a:spcAft>
-            </a:pPr>
-            <a:r>
-              <a:rPr sz="1400" b="1" i="0">
-                <a:solidFill>
-                  <a:srgbClr val="1F3864"/>
-                </a:solidFill>
-                <a:latin typeface="Garamond"/>
-              </a:rPr>
-              <a:t>stayer</a:t>
-            </a:r>
-          </a:p>
-        </p:txBody>
-      </p:sp>
-      <p:sp>
-        <p:nvSpPr>
-          <p:cNvPr id="13" name="Rectangle 12"/>
-          <p:cNvSpPr/>
-          <p:nvPr/>
-        </p:nvSpPr>
-        <p:spPr>
-          <a:xfrm>
-            <a:off x="822960" y="2807208"/>
-            <a:ext cx="548640" cy="548640"/>
-          </a:xfrm>
-          <a:prstGeom prst="rect">
-            <a:avLst/>
-          </a:prstGeom>
-          <a:solidFill>
-            <a:srgbClr val="1F3864"/>
-          </a:solidFill>
-          <a:ln>
-            <a:noFill/>
-          </a:ln>
-          <a:effectLst/>
-        </p:spPr>
-        <p:style>
-          <a:lnRef idx="1">
-            <a:schemeClr val="accent1"/>
-          </a:lnRef>
-          <a:fillRef idx="3">
-            <a:schemeClr val="accent1"/>
-          </a:fillRef>
-          <a:effectRef idx="2">
-            <a:schemeClr val="accent1"/>
-          </a:effectRef>
-          <a:fontRef idx="minor">
-            <a:schemeClr val="lt1"/>
-          </a:fontRef>
-        </p:style>
-        <p:txBody>
-          <a:bodyPr rtlCol="0" anchor="ctr" wrap="none"/>
-          <a:lstStyle/>
-          <a:p>
-            <a:pPr algn="ctr"/>
-            <a:r>
-              <a:rPr sz="1200" b="1">
-                <a:solidFill>
-                  <a:srgbClr val="FFFFFF"/>
-                </a:solidFill>
-                <a:latin typeface="Garamond"/>
-              </a:rPr>
-              <a:t>T</a:t>
-            </a:r>
-          </a:p>
-        </p:txBody>
-      </p:sp>
-      <p:sp>
-        <p:nvSpPr>
-          <p:cNvPr id="14" name="Rectangle 13"/>
-          <p:cNvSpPr/>
-          <p:nvPr/>
-        </p:nvSpPr>
-        <p:spPr>
-          <a:xfrm>
-            <a:off x="1426464" y="2807208"/>
-            <a:ext cx="548640" cy="548640"/>
-          </a:xfrm>
-          <a:prstGeom prst="rect">
-            <a:avLst/>
-          </a:prstGeom>
-          <a:solidFill>
-            <a:srgbClr val="1F3864"/>
-          </a:solidFill>
-          <a:ln>
-            <a:noFill/>
-          </a:ln>
-          <a:effectLst/>
-        </p:spPr>
-        <p:style>
-          <a:lnRef idx="1">
-            <a:schemeClr val="accent1"/>
-          </a:lnRef>
-          <a:fillRef idx="3">
-            <a:schemeClr val="accent1"/>
-          </a:fillRef>
-          <a:effectRef idx="2">
-            <a:schemeClr val="accent1"/>
-          </a:effectRef>
-          <a:fontRef idx="minor">
-            <a:schemeClr val="lt1"/>
-          </a:fontRef>
-        </p:style>
-        <p:txBody>
-          <a:bodyPr rtlCol="0" anchor="ctr" wrap="none"/>
-          <a:lstStyle/>
-          <a:p>
-            <a:pPr algn="ctr"/>
-            <a:r>
-              <a:rPr sz="1200" b="1">
-                <a:solidFill>
-                  <a:srgbClr val="FFFFFF"/>
-                </a:solidFill>
-                <a:latin typeface="Garamond"/>
-              </a:rPr>
-              <a:t>T</a:t>
-            </a:r>
-          </a:p>
-        </p:txBody>
-      </p:sp>
-      <p:sp>
-        <p:nvSpPr>
-          <p:cNvPr id="15" name="Rectangle 14"/>
-          <p:cNvSpPr/>
-          <p:nvPr/>
-        </p:nvSpPr>
-        <p:spPr>
-          <a:xfrm>
-            <a:off x="2029967" y="2807208"/>
-            <a:ext cx="548640" cy="548640"/>
-          </a:xfrm>
-          <a:prstGeom prst="rect">
-            <a:avLst/>
-          </a:prstGeom>
-          <a:solidFill>
-            <a:srgbClr val="1F3864"/>
-          </a:solidFill>
-          <a:ln>
-            <a:noFill/>
-          </a:ln>
-          <a:effectLst/>
-        </p:spPr>
-        <p:style>
-          <a:lnRef idx="1">
-            <a:schemeClr val="accent1"/>
-          </a:lnRef>
-          <a:fillRef idx="3">
-            <a:schemeClr val="accent1"/>
-          </a:fillRef>
-          <a:effectRef idx="2">
-            <a:schemeClr val="accent1"/>
-          </a:effectRef>
-          <a:fontRef idx="minor">
-            <a:schemeClr val="lt1"/>
-          </a:fontRef>
-        </p:style>
-        <p:txBody>
-          <a:bodyPr rtlCol="0" anchor="ctr" wrap="none"/>
-          <a:lstStyle/>
-          <a:p>
-            <a:pPr algn="ctr"/>
-            <a:r>
-              <a:rPr sz="1200" b="1">
-                <a:solidFill>
-                  <a:srgbClr val="FFFFFF"/>
-                </a:solidFill>
-                <a:latin typeface="Garamond"/>
-              </a:rPr>
-              <a:t>T</a:t>
-            </a:r>
-          </a:p>
-        </p:txBody>
-      </p:sp>
-      <p:sp>
-        <p:nvSpPr>
-          <p:cNvPr id="16" name="Rectangle 15"/>
-          <p:cNvSpPr/>
-          <p:nvPr/>
-        </p:nvSpPr>
-        <p:spPr>
-          <a:xfrm>
-            <a:off x="2633472" y="2807208"/>
-            <a:ext cx="548640" cy="548640"/>
-          </a:xfrm>
-          <a:prstGeom prst="rect">
-            <a:avLst/>
-          </a:prstGeom>
-          <a:solidFill>
-            <a:srgbClr val="1F3864"/>
-          </a:solidFill>
-          <a:ln>
-            <a:noFill/>
-          </a:ln>
-          <a:effectLst/>
-        </p:spPr>
-        <p:style>
-          <a:lnRef idx="1">
-            <a:schemeClr val="accent1"/>
-          </a:lnRef>
-          <a:fillRef idx="3">
-            <a:schemeClr val="accent1"/>
-          </a:fillRef>
-          <a:effectRef idx="2">
-            <a:schemeClr val="accent1"/>
-          </a:effectRef>
-          <a:fontRef idx="minor">
-            <a:schemeClr val="lt1"/>
-          </a:fontRef>
-        </p:style>
-        <p:txBody>
-          <a:bodyPr rtlCol="0" anchor="ctr" wrap="none"/>
-          <a:lstStyle/>
-          <a:p>
-            <a:pPr algn="ctr"/>
-            <a:r>
-              <a:rPr sz="1200" b="1">
-                <a:solidFill>
-                  <a:srgbClr val="FFFFFF"/>
-                </a:solidFill>
-                <a:latin typeface="Garamond"/>
-              </a:rPr>
-              <a:t>T</a:t>
-            </a:r>
-          </a:p>
-        </p:txBody>
-      </p:sp>
-      <p:sp>
-        <p:nvSpPr>
-          <p:cNvPr id="17" name="Rectangle 16"/>
-          <p:cNvSpPr/>
-          <p:nvPr/>
-        </p:nvSpPr>
-        <p:spPr>
-          <a:xfrm>
-            <a:off x="4014215" y="2807208"/>
             <a:ext cx="548640" cy="548640"/>
           </a:xfrm>
           <a:prstGeom prst="rect">
@@ -9659,13 +10118,13 @@
       </p:sp>
       <p:sp>
         <p:nvSpPr>
-          <p:cNvPr id="18" name="Rectangle 17"/>
+          <p:cNvPr id="10" name="Rectangle 9"/>
           <p:cNvSpPr/>
           <p:nvPr/>
         </p:nvSpPr>
         <p:spPr>
           <a:xfrm>
-            <a:off x="4617720" y="2807208"/>
+            <a:off x="5221224" y="1874519"/>
             <a:ext cx="548640" cy="548640"/>
           </a:xfrm>
           <a:prstGeom prst="rect">
@@ -9705,13 +10164,214 @@
       </p:sp>
       <p:sp>
         <p:nvSpPr>
-          <p:cNvPr id="19" name="Rectangle 18"/>
+          <p:cNvPr id="11" name="Rectangle 10"/>
           <p:cNvSpPr/>
           <p:nvPr/>
         </p:nvSpPr>
         <p:spPr>
           <a:xfrm>
-            <a:off x="5221224" y="2807208"/>
+            <a:off x="5824728" y="1874519"/>
+            <a:ext cx="548640" cy="548640"/>
+          </a:xfrm>
+          <a:prstGeom prst="rect">
+            <a:avLst/>
+          </a:prstGeom>
+          <a:solidFill>
+            <a:srgbClr val="7B2530"/>
+          </a:solidFill>
+          <a:ln>
+            <a:noFill/>
+          </a:ln>
+          <a:effectLst/>
+        </p:spPr>
+        <p:style>
+          <a:lnRef idx="1">
+            <a:schemeClr val="accent1"/>
+          </a:lnRef>
+          <a:fillRef idx="3">
+            <a:schemeClr val="accent1"/>
+          </a:fillRef>
+          <a:effectRef idx="2">
+            <a:schemeClr val="accent1"/>
+          </a:effectRef>
+          <a:fontRef idx="minor">
+            <a:schemeClr val="lt1"/>
+          </a:fontRef>
+        </p:style>
+        <p:txBody>
+          <a:bodyPr rtlCol="0" anchor="ctr" wrap="none"/>
+          <a:lstStyle/>
+          <a:p>
+            <a:pPr algn="ctr"/>
+            <a:r>
+              <a:rPr sz="1200" b="1">
+                <a:solidFill>
+                  <a:srgbClr val="FFFFFF"/>
+                </a:solidFill>
+                <a:latin typeface="Garamond"/>
+              </a:rPr>
+              <a:t>T</a:t>
+            </a:r>
+          </a:p>
+        </p:txBody>
+      </p:sp>
+      <p:sp>
+        <p:nvSpPr>
+          <p:cNvPr id="12" name="TextBox 11"/>
+          <p:cNvSpPr txBox="1"/>
+          <p:nvPr/>
+        </p:nvSpPr>
+        <p:spPr>
+          <a:xfrm>
+            <a:off x="6748272" y="1984248"/>
+            <a:ext cx="4572000" cy="411480"/>
+          </a:xfrm>
+          <a:prstGeom prst="rect">
+            <a:avLst/>
+          </a:prstGeom>
+          <a:noFill/>
+        </p:spPr>
+        <p:txBody>
+          <a:bodyPr wrap="square" lIns="0" rIns="0" tIns="0" bIns="0">
+            <a:spAutoFit/>
+          </a:bodyPr>
+          <a:lstStyle/>
+          <a:p>
+            <a:pPr algn="l">
+              <a:lnSpc>
+                <a:spcPts val="2100"/>
+              </a:lnSpc>
+              <a:spcAft>
+                <a:spcPts val="0"/>
+              </a:spcAft>
+            </a:pPr>
+            <a:r>
+              <a:rPr sz="1400" b="1" i="0">
+                <a:solidFill>
+                  <a:srgbClr val="1F3864"/>
+                </a:solidFill>
+                <a:latin typeface="Garamond"/>
+              </a:rPr>
+              <a:t>stayer</a:t>
+            </a:r>
+          </a:p>
+        </p:txBody>
+      </p:sp>
+      <p:sp>
+        <p:nvSpPr>
+          <p:cNvPr id="13" name="Rectangle 12"/>
+          <p:cNvSpPr/>
+          <p:nvPr/>
+        </p:nvSpPr>
+        <p:spPr>
+          <a:xfrm>
+            <a:off x="822960" y="2807208"/>
+            <a:ext cx="548640" cy="548640"/>
+          </a:xfrm>
+          <a:prstGeom prst="rect">
+            <a:avLst/>
+          </a:prstGeom>
+          <a:solidFill>
+            <a:srgbClr val="1F3864"/>
+          </a:solidFill>
+          <a:ln>
+            <a:noFill/>
+          </a:ln>
+          <a:effectLst/>
+        </p:spPr>
+        <p:style>
+          <a:lnRef idx="1">
+            <a:schemeClr val="accent1"/>
+          </a:lnRef>
+          <a:fillRef idx="3">
+            <a:schemeClr val="accent1"/>
+          </a:fillRef>
+          <a:effectRef idx="2">
+            <a:schemeClr val="accent1"/>
+          </a:effectRef>
+          <a:fontRef idx="minor">
+            <a:schemeClr val="lt1"/>
+          </a:fontRef>
+        </p:style>
+        <p:txBody>
+          <a:bodyPr rtlCol="0" anchor="ctr" wrap="none"/>
+          <a:lstStyle/>
+          <a:p>
+            <a:pPr algn="ctr"/>
+            <a:r>
+              <a:rPr sz="1200" b="1">
+                <a:solidFill>
+                  <a:srgbClr val="FFFFFF"/>
+                </a:solidFill>
+                <a:latin typeface="Garamond"/>
+              </a:rPr>
+              <a:t>T</a:t>
+            </a:r>
+          </a:p>
+        </p:txBody>
+      </p:sp>
+      <p:sp>
+        <p:nvSpPr>
+          <p:cNvPr id="14" name="Rectangle 13"/>
+          <p:cNvSpPr/>
+          <p:nvPr/>
+        </p:nvSpPr>
+        <p:spPr>
+          <a:xfrm>
+            <a:off x="1426464" y="2807208"/>
+            <a:ext cx="548640" cy="548640"/>
+          </a:xfrm>
+          <a:prstGeom prst="rect">
+            <a:avLst/>
+          </a:prstGeom>
+          <a:solidFill>
+            <a:srgbClr val="1F3864"/>
+          </a:solidFill>
+          <a:ln>
+            <a:noFill/>
+          </a:ln>
+          <a:effectLst/>
+        </p:spPr>
+        <p:style>
+          <a:lnRef idx="1">
+            <a:schemeClr val="accent1"/>
+          </a:lnRef>
+          <a:fillRef idx="3">
+            <a:schemeClr val="accent1"/>
+          </a:fillRef>
+          <a:effectRef idx="2">
+            <a:schemeClr val="accent1"/>
+          </a:effectRef>
+          <a:fontRef idx="minor">
+            <a:schemeClr val="lt1"/>
+          </a:fontRef>
+        </p:style>
+        <p:txBody>
+          <a:bodyPr rtlCol="0" anchor="ctr" wrap="none"/>
+          <a:lstStyle/>
+          <a:p>
+            <a:pPr algn="ctr"/>
+            <a:r>
+              <a:rPr sz="1200" b="1">
+                <a:solidFill>
+                  <a:srgbClr val="FFFFFF"/>
+                </a:solidFill>
+                <a:latin typeface="Garamond"/>
+              </a:rPr>
+              <a:t>T</a:t>
+            </a:r>
+          </a:p>
+        </p:txBody>
+      </p:sp>
+      <p:sp>
+        <p:nvSpPr>
+          <p:cNvPr id="15" name="Rectangle 14"/>
+          <p:cNvSpPr/>
+          <p:nvPr/>
+        </p:nvSpPr>
+        <p:spPr>
+          <a:xfrm>
+            <a:off x="2029967" y="2807208"/>
             <a:ext cx="548640" cy="548640"/>
           </a:xfrm>
           <a:prstGeom prst="rect">
@@ -9751,214 +10411,13 @@
       </p:sp>
       <p:sp>
         <p:nvSpPr>
-          <p:cNvPr id="20" name="Rectangle 19"/>
+          <p:cNvPr id="16" name="Rectangle 15"/>
           <p:cNvSpPr/>
           <p:nvPr/>
         </p:nvSpPr>
         <p:spPr>
           <a:xfrm>
-            <a:off x="5824728" y="2807208"/>
-            <a:ext cx="548640" cy="548640"/>
-          </a:xfrm>
-          <a:prstGeom prst="rect">
-            <a:avLst/>
-          </a:prstGeom>
-          <a:solidFill>
-            <a:srgbClr val="7B2530"/>
-          </a:solidFill>
-          <a:ln>
-            <a:noFill/>
-          </a:ln>
-          <a:effectLst/>
-        </p:spPr>
-        <p:style>
-          <a:lnRef idx="1">
-            <a:schemeClr val="accent1"/>
-          </a:lnRef>
-          <a:fillRef idx="3">
-            <a:schemeClr val="accent1"/>
-          </a:fillRef>
-          <a:effectRef idx="2">
-            <a:schemeClr val="accent1"/>
-          </a:effectRef>
-          <a:fontRef idx="minor">
-            <a:schemeClr val="lt1"/>
-          </a:fontRef>
-        </p:style>
-        <p:txBody>
-          <a:bodyPr rtlCol="0" anchor="ctr" wrap="none"/>
-          <a:lstStyle/>
-          <a:p>
-            <a:pPr algn="ctr"/>
-            <a:r>
-              <a:rPr sz="1200" b="1">
-                <a:solidFill>
-                  <a:srgbClr val="FFFFFF"/>
-                </a:solidFill>
-                <a:latin typeface="Garamond"/>
-              </a:rPr>
-              <a:t>T</a:t>
-            </a:r>
-          </a:p>
-        </p:txBody>
-      </p:sp>
-      <p:sp>
-        <p:nvSpPr>
-          <p:cNvPr id="21" name="TextBox 20"/>
-          <p:cNvSpPr txBox="1"/>
-          <p:nvPr/>
-        </p:nvSpPr>
-        <p:spPr>
-          <a:xfrm>
-            <a:off x="6748272" y="2916936"/>
-            <a:ext cx="4572000" cy="411480"/>
-          </a:xfrm>
-          <a:prstGeom prst="rect">
-            <a:avLst/>
-          </a:prstGeom>
-          <a:noFill/>
-        </p:spPr>
-        <p:txBody>
-          <a:bodyPr wrap="square" lIns="0" rIns="0" tIns="0" bIns="0">
-            <a:spAutoFit/>
-          </a:bodyPr>
-          <a:lstStyle/>
-          <a:p>
-            <a:pPr algn="l">
-              <a:lnSpc>
-                <a:spcPts val="2100"/>
-              </a:lnSpc>
-              <a:spcAft>
-                <a:spcPts val="0"/>
-              </a:spcAft>
-            </a:pPr>
-            <a:r>
-              <a:rPr sz="1400" b="1" i="0">
-                <a:solidFill>
-                  <a:srgbClr val="1F3864"/>
-                </a:solidFill>
-                <a:latin typeface="Garamond"/>
-              </a:rPr>
-              <a:t>stayer</a:t>
-            </a:r>
-          </a:p>
-        </p:txBody>
-      </p:sp>
-      <p:sp>
-        <p:nvSpPr>
-          <p:cNvPr id="22" name="Rectangle 21"/>
-          <p:cNvSpPr/>
-          <p:nvPr/>
-        </p:nvSpPr>
-        <p:spPr>
-          <a:xfrm>
-            <a:off x="822960" y="3739896"/>
-            <a:ext cx="548640" cy="548640"/>
-          </a:xfrm>
-          <a:prstGeom prst="rect">
-            <a:avLst/>
-          </a:prstGeom>
-          <a:solidFill>
-            <a:srgbClr val="1F3864"/>
-          </a:solidFill>
-          <a:ln>
-            <a:noFill/>
-          </a:ln>
-          <a:effectLst/>
-        </p:spPr>
-        <p:style>
-          <a:lnRef idx="1">
-            <a:schemeClr val="accent1"/>
-          </a:lnRef>
-          <a:fillRef idx="3">
-            <a:schemeClr val="accent1"/>
-          </a:fillRef>
-          <a:effectRef idx="2">
-            <a:schemeClr val="accent1"/>
-          </a:effectRef>
-          <a:fontRef idx="minor">
-            <a:schemeClr val="lt1"/>
-          </a:fontRef>
-        </p:style>
-        <p:txBody>
-          <a:bodyPr rtlCol="0" anchor="ctr" wrap="none"/>
-          <a:lstStyle/>
-          <a:p>
-            <a:pPr algn="ctr"/>
-            <a:r>
-              <a:rPr sz="1200" b="1">
-                <a:solidFill>
-                  <a:srgbClr val="FFFFFF"/>
-                </a:solidFill>
-                <a:latin typeface="Garamond"/>
-              </a:rPr>
-              <a:t>T</a:t>
-            </a:r>
-          </a:p>
-        </p:txBody>
-      </p:sp>
-      <p:sp>
-        <p:nvSpPr>
-          <p:cNvPr id="23" name="Rectangle 22"/>
-          <p:cNvSpPr/>
-          <p:nvPr/>
-        </p:nvSpPr>
-        <p:spPr>
-          <a:xfrm>
-            <a:off x="1426464" y="3739896"/>
-            <a:ext cx="548640" cy="548640"/>
-          </a:xfrm>
-          <a:prstGeom prst="rect">
-            <a:avLst/>
-          </a:prstGeom>
-          <a:solidFill>
-            <a:srgbClr val="1F3864"/>
-          </a:solidFill>
-          <a:ln>
-            <a:noFill/>
-          </a:ln>
-          <a:effectLst/>
-        </p:spPr>
-        <p:style>
-          <a:lnRef idx="1">
-            <a:schemeClr val="accent1"/>
-          </a:lnRef>
-          <a:fillRef idx="3">
-            <a:schemeClr val="accent1"/>
-          </a:fillRef>
-          <a:effectRef idx="2">
-            <a:schemeClr val="accent1"/>
-          </a:effectRef>
-          <a:fontRef idx="minor">
-            <a:schemeClr val="lt1"/>
-          </a:fontRef>
-        </p:style>
-        <p:txBody>
-          <a:bodyPr rtlCol="0" anchor="ctr" wrap="none"/>
-          <a:lstStyle/>
-          <a:p>
-            <a:pPr algn="ctr"/>
-            <a:r>
-              <a:rPr sz="1200" b="1">
-                <a:solidFill>
-                  <a:srgbClr val="FFFFFF"/>
-                </a:solidFill>
-                <a:latin typeface="Garamond"/>
-              </a:rPr>
-              <a:t>T</a:t>
-            </a:r>
-          </a:p>
-        </p:txBody>
-      </p:sp>
-      <p:sp>
-        <p:nvSpPr>
-          <p:cNvPr id="24" name="Rectangle 23"/>
-          <p:cNvSpPr/>
-          <p:nvPr/>
-        </p:nvSpPr>
-        <p:spPr>
-          <a:xfrm>
-            <a:off x="2029967" y="3739896"/>
+            <a:off x="2633472" y="2807208"/>
             <a:ext cx="548640" cy="548640"/>
           </a:xfrm>
           <a:prstGeom prst="rect">
@@ -9998,13 +10457,13 @@
       </p:sp>
       <p:sp>
         <p:nvSpPr>
-          <p:cNvPr id="25" name="Rectangle 24"/>
+          <p:cNvPr id="17" name="Rectangle 16"/>
           <p:cNvSpPr/>
           <p:nvPr/>
         </p:nvSpPr>
         <p:spPr>
           <a:xfrm>
-            <a:off x="2633472" y="3739896"/>
+            <a:off x="4014215" y="2807208"/>
             <a:ext cx="548640" cy="548640"/>
           </a:xfrm>
           <a:prstGeom prst="rect">
@@ -10044,13 +10503,13 @@
       </p:sp>
       <p:sp>
         <p:nvSpPr>
-          <p:cNvPr id="26" name="Rectangle 25"/>
+          <p:cNvPr id="18" name="Rectangle 17"/>
           <p:cNvSpPr/>
           <p:nvPr/>
         </p:nvSpPr>
         <p:spPr>
           <a:xfrm>
-            <a:off x="4014215" y="3739896"/>
+            <a:off x="4617720" y="2807208"/>
             <a:ext cx="548640" cy="548640"/>
           </a:xfrm>
           <a:prstGeom prst="rect">
@@ -10090,13 +10549,13 @@
       </p:sp>
       <p:sp>
         <p:nvSpPr>
-          <p:cNvPr id="27" name="Rectangle 26"/>
+          <p:cNvPr id="19" name="Rectangle 18"/>
           <p:cNvSpPr/>
           <p:nvPr/>
         </p:nvSpPr>
         <p:spPr>
           <a:xfrm>
-            <a:off x="4617720" y="3739896"/>
+            <a:off x="5221224" y="2807208"/>
             <a:ext cx="548640" cy="548640"/>
           </a:xfrm>
           <a:prstGeom prst="rect">
@@ -10136,13 +10595,13 @@
       </p:sp>
       <p:sp>
         <p:nvSpPr>
-          <p:cNvPr id="28" name="Rectangle 27"/>
+          <p:cNvPr id="20" name="Rectangle 19"/>
           <p:cNvSpPr/>
           <p:nvPr/>
         </p:nvSpPr>
         <p:spPr>
           <a:xfrm>
-            <a:off x="5221224" y="3739896"/>
+            <a:off x="5824728" y="2807208"/>
             <a:ext cx="548640" cy="548640"/>
           </a:xfrm>
           <a:prstGeom prst="rect">
@@ -10182,13 +10641,108 @@
       </p:sp>
       <p:sp>
         <p:nvSpPr>
-          <p:cNvPr id="29" name="Rectangle 28"/>
+          <p:cNvPr id="21" name="TextBox 20"/>
+          <p:cNvSpPr txBox="1"/>
+          <p:nvPr/>
+        </p:nvSpPr>
+        <p:spPr>
+          <a:xfrm>
+            <a:off x="6748272" y="2916936"/>
+            <a:ext cx="4572000" cy="411480"/>
+          </a:xfrm>
+          <a:prstGeom prst="rect">
+            <a:avLst/>
+          </a:prstGeom>
+          <a:noFill/>
+        </p:spPr>
+        <p:txBody>
+          <a:bodyPr wrap="square" lIns="0" rIns="0" tIns="0" bIns="0">
+            <a:spAutoFit/>
+          </a:bodyPr>
+          <a:lstStyle/>
+          <a:p>
+            <a:pPr algn="l">
+              <a:lnSpc>
+                <a:spcPts val="2100"/>
+              </a:lnSpc>
+              <a:spcAft>
+                <a:spcPts val="0"/>
+              </a:spcAft>
+            </a:pPr>
+            <a:r>
+              <a:rPr sz="1400" b="1" i="0">
+                <a:solidFill>
+                  <a:srgbClr val="7B2530"/>
+                </a:solidFill>
+                <a:latin typeface="Garamond"/>
+              </a:rPr>
+              <a:t>leaver</a:t>
+            </a:r>
+          </a:p>
+        </p:txBody>
+      </p:sp>
+      <p:sp>
+        <p:nvSpPr>
+          <p:cNvPr id="22" name="Rectangle 21"/>
           <p:cNvSpPr/>
           <p:nvPr/>
         </p:nvSpPr>
         <p:spPr>
           <a:xfrm>
-            <a:off x="5824728" y="3739896"/>
+            <a:off x="822960" y="3739896"/>
+            <a:ext cx="548640" cy="548640"/>
+          </a:xfrm>
+          <a:prstGeom prst="rect">
+            <a:avLst/>
+          </a:prstGeom>
+          <a:solidFill>
+            <a:srgbClr val="1F3864"/>
+          </a:solidFill>
+          <a:ln>
+            <a:noFill/>
+          </a:ln>
+          <a:effectLst/>
+        </p:spPr>
+        <p:style>
+          <a:lnRef idx="1">
+            <a:schemeClr val="accent1"/>
+          </a:lnRef>
+          <a:fillRef idx="3">
+            <a:schemeClr val="accent1"/>
+          </a:fillRef>
+          <a:effectRef idx="2">
+            <a:schemeClr val="accent1"/>
+          </a:effectRef>
+          <a:fontRef idx="minor">
+            <a:schemeClr val="lt1"/>
+          </a:fontRef>
+        </p:style>
+        <p:txBody>
+          <a:bodyPr rtlCol="0" anchor="ctr" wrap="none"/>
+          <a:lstStyle/>
+          <a:p>
+            <a:pPr algn="ctr"/>
+            <a:r>
+              <a:rPr sz="1200" b="1">
+                <a:solidFill>
+                  <a:srgbClr val="FFFFFF"/>
+                </a:solidFill>
+                <a:latin typeface="Garamond"/>
+              </a:rPr>
+              <a:t>T</a:t>
+            </a:r>
+          </a:p>
+        </p:txBody>
+      </p:sp>
+      <p:sp>
+        <p:nvSpPr>
+          <p:cNvPr id="23" name="Rectangle 22"/>
+          <p:cNvSpPr/>
+          <p:nvPr/>
+        </p:nvSpPr>
+        <p:spPr>
+          <a:xfrm>
+            <a:off x="1426464" y="3739896"/>
             <a:ext cx="548640" cy="548640"/>
           </a:xfrm>
           <a:prstGeom prst="rect">
@@ -10228,108 +10782,13 @@
       </p:sp>
       <p:sp>
         <p:nvSpPr>
-          <p:cNvPr id="30" name="TextBox 29"/>
-          <p:cNvSpPr txBox="1"/>
-          <p:nvPr/>
-        </p:nvSpPr>
-        <p:spPr>
-          <a:xfrm>
-            <a:off x="6748272" y="3849624"/>
-            <a:ext cx="4572000" cy="411480"/>
-          </a:xfrm>
-          <a:prstGeom prst="rect">
-            <a:avLst/>
-          </a:prstGeom>
-          <a:noFill/>
-        </p:spPr>
-        <p:txBody>
-          <a:bodyPr wrap="square" lIns="0" rIns="0" tIns="0" bIns="0">
-            <a:spAutoFit/>
-          </a:bodyPr>
-          <a:lstStyle/>
-          <a:p>
-            <a:pPr algn="l">
-              <a:lnSpc>
-                <a:spcPts val="2100"/>
-              </a:lnSpc>
-              <a:spcAft>
-                <a:spcPts val="0"/>
-              </a:spcAft>
-            </a:pPr>
-            <a:r>
-              <a:rPr sz="1400" b="1" i="0">
-                <a:solidFill>
-                  <a:srgbClr val="7B2530"/>
-                </a:solidFill>
-                <a:latin typeface="Garamond"/>
-              </a:rPr>
-              <a:t>leaver</a:t>
-            </a:r>
-          </a:p>
-        </p:txBody>
-      </p:sp>
-      <p:sp>
-        <p:nvSpPr>
-          <p:cNvPr id="31" name="Rectangle 30"/>
+          <p:cNvPr id="24" name="Rectangle 23"/>
           <p:cNvSpPr/>
           <p:nvPr/>
         </p:nvSpPr>
         <p:spPr>
           <a:xfrm>
-            <a:off x="822960" y="4672583"/>
-            <a:ext cx="548640" cy="548640"/>
-          </a:xfrm>
-          <a:prstGeom prst="rect">
-            <a:avLst/>
-          </a:prstGeom>
-          <a:solidFill>
-            <a:srgbClr val="1F3864"/>
-          </a:solidFill>
-          <a:ln>
-            <a:noFill/>
-          </a:ln>
-          <a:effectLst/>
-        </p:spPr>
-        <p:style>
-          <a:lnRef idx="1">
-            <a:schemeClr val="accent1"/>
-          </a:lnRef>
-          <a:fillRef idx="3">
-            <a:schemeClr val="accent1"/>
-          </a:fillRef>
-          <a:effectRef idx="2">
-            <a:schemeClr val="accent1"/>
-          </a:effectRef>
-          <a:fontRef idx="minor">
-            <a:schemeClr val="lt1"/>
-          </a:fontRef>
-        </p:style>
-        <p:txBody>
-          <a:bodyPr rtlCol="0" anchor="ctr" wrap="none"/>
-          <a:lstStyle/>
-          <a:p>
-            <a:pPr algn="ctr"/>
-            <a:r>
-              <a:rPr sz="1200" b="1">
-                <a:solidFill>
-                  <a:srgbClr val="FFFFFF"/>
-                </a:solidFill>
-                <a:latin typeface="Garamond"/>
-              </a:rPr>
-              <a:t>T</a:t>
-            </a:r>
-          </a:p>
-        </p:txBody>
-      </p:sp>
-      <p:sp>
-        <p:nvSpPr>
-          <p:cNvPr id="32" name="Rectangle 31"/>
-          <p:cNvSpPr/>
-          <p:nvPr/>
-        </p:nvSpPr>
-        <p:spPr>
-          <a:xfrm>
-            <a:off x="1426464" y="4672583"/>
+            <a:off x="2029967" y="3739896"/>
             <a:ext cx="548640" cy="548640"/>
           </a:xfrm>
           <a:prstGeom prst="rect">
@@ -10369,13 +10828,13 @@
       </p:sp>
       <p:sp>
         <p:nvSpPr>
-          <p:cNvPr id="33" name="Rectangle 32"/>
+          <p:cNvPr id="25" name="Rectangle 24"/>
           <p:cNvSpPr/>
           <p:nvPr/>
         </p:nvSpPr>
         <p:spPr>
           <a:xfrm>
-            <a:off x="2029967" y="4672583"/>
+            <a:off x="2633472" y="3739896"/>
             <a:ext cx="548640" cy="548640"/>
           </a:xfrm>
           <a:prstGeom prst="rect">
@@ -10415,13 +10874,13 @@
       </p:sp>
       <p:sp>
         <p:nvSpPr>
-          <p:cNvPr id="34" name="Rectangle 33"/>
+          <p:cNvPr id="26" name="Rectangle 25"/>
           <p:cNvSpPr/>
           <p:nvPr/>
         </p:nvSpPr>
         <p:spPr>
           <a:xfrm>
-            <a:off x="2633472" y="4672583"/>
+            <a:off x="4014215" y="3739896"/>
             <a:ext cx="548640" cy="548640"/>
           </a:xfrm>
           <a:prstGeom prst="rect">
@@ -10461,13 +10920,13 @@
       </p:sp>
       <p:sp>
         <p:nvSpPr>
-          <p:cNvPr id="35" name="Rectangle 34"/>
+          <p:cNvPr id="27" name="Rectangle 26"/>
           <p:cNvSpPr/>
           <p:nvPr/>
         </p:nvSpPr>
         <p:spPr>
           <a:xfrm>
-            <a:off x="4014215" y="4672583"/>
+            <a:off x="4617720" y="3739896"/>
             <a:ext cx="548640" cy="548640"/>
           </a:xfrm>
           <a:prstGeom prst="rect">
@@ -10507,13 +10966,13 @@
       </p:sp>
       <p:sp>
         <p:nvSpPr>
-          <p:cNvPr id="36" name="Rectangle 35"/>
+          <p:cNvPr id="28" name="Rectangle 27"/>
           <p:cNvSpPr/>
           <p:nvPr/>
         </p:nvSpPr>
         <p:spPr>
           <a:xfrm>
-            <a:off x="4617720" y="4672583"/>
+            <a:off x="5221224" y="3739896"/>
             <a:ext cx="548640" cy="548640"/>
           </a:xfrm>
           <a:prstGeom prst="rect">
@@ -10553,13 +11012,13 @@
       </p:sp>
       <p:sp>
         <p:nvSpPr>
-          <p:cNvPr id="37" name="Rectangle 36"/>
+          <p:cNvPr id="29" name="Rectangle 28"/>
           <p:cNvSpPr/>
           <p:nvPr/>
         </p:nvSpPr>
         <p:spPr>
           <a:xfrm>
-            <a:off x="5221224" y="4672583"/>
+            <a:off x="5824728" y="3739896"/>
             <a:ext cx="548640" cy="548640"/>
           </a:xfrm>
           <a:prstGeom prst="rect">
@@ -10599,59 +11058,13 @@
       </p:sp>
       <p:sp>
         <p:nvSpPr>
-          <p:cNvPr id="38" name="Rectangle 37"/>
-          <p:cNvSpPr/>
-          <p:nvPr/>
-        </p:nvSpPr>
-        <p:spPr>
-          <a:xfrm>
-            <a:off x="5824728" y="4672583"/>
-            <a:ext cx="548640" cy="548640"/>
-          </a:xfrm>
-          <a:prstGeom prst="rect">
-            <a:avLst/>
-          </a:prstGeom>
-          <a:solidFill>
-            <a:srgbClr val="FFFFFF"/>
-          </a:solidFill>
-          <a:ln w="9525">
-            <a:solidFill>
-              <a:srgbClr val="C9CFD6"/>
-            </a:solidFill>
-          </a:ln>
-          <a:effectLst/>
-        </p:spPr>
-        <p:style>
-          <a:lnRef idx="1">
-            <a:schemeClr val="accent1"/>
-          </a:lnRef>
-          <a:fillRef idx="3">
-            <a:schemeClr val="accent1"/>
-          </a:fillRef>
-          <a:effectRef idx="2">
-            <a:schemeClr val="accent1"/>
-          </a:effectRef>
-          <a:fontRef idx="minor">
-            <a:schemeClr val="lt1"/>
-          </a:fontRef>
-        </p:style>
-        <p:txBody>
-          <a:bodyPr rtlCol="0" anchor="ctr"/>
-          <a:lstStyle/>
-          <a:p>
-            <a:pPr algn="ctr"/>
-          </a:p>
-        </p:txBody>
-      </p:sp>
-      <p:sp>
-        <p:nvSpPr>
-          <p:cNvPr id="39" name="TextBox 38"/>
+          <p:cNvPr id="30" name="TextBox 29"/>
           <p:cNvSpPr txBox="1"/>
           <p:nvPr/>
         </p:nvSpPr>
         <p:spPr>
           <a:xfrm>
-            <a:off x="6748272" y="4782312"/>
+            <a:off x="6748272" y="3849624"/>
             <a:ext cx="4572000" cy="411480"/>
           </a:xfrm>
           <a:prstGeom prst="rect">
@@ -10680,20 +11093,20 @@
                 </a:solidFill>
                 <a:latin typeface="Garamond"/>
               </a:rPr>
-              <a:t>excluded: a single year-1 observation</a:t>
-            </a:r>
-          </a:p>
-        </p:txBody>
-      </p:sp>
-      <p:sp>
-        <p:nvSpPr>
-          <p:cNvPr id="40" name="TextBox 39"/>
+              <a:t>excluded</a:t>
+            </a:r>
+          </a:p>
+        </p:txBody>
+      </p:sp>
+      <p:sp>
+        <p:nvSpPr>
+          <p:cNvPr id="31" name="TextBox 30"/>
           <p:cNvSpPr txBox="1"/>
           <p:nvPr/>
         </p:nvSpPr>
         <p:spPr>
           <a:xfrm>
-            <a:off x="822960" y="5678423"/>
+            <a:off x="822960" y="4745736"/>
             <a:ext cx="4572000" cy="320040"/>
           </a:xfrm>
           <a:prstGeom prst="rect">
@@ -10729,13 +11142,13 @@
       </p:sp>
       <p:sp>
         <p:nvSpPr>
-          <p:cNvPr id="41" name="TextBox 40"/>
+          <p:cNvPr id="32" name="TextBox 31"/>
           <p:cNvSpPr txBox="1"/>
           <p:nvPr/>
         </p:nvSpPr>
         <p:spPr>
           <a:xfrm>
-            <a:off x="5806440" y="5678423"/>
+            <a:off x="5806440" y="4745736"/>
             <a:ext cx="4572000" cy="320040"/>
           </a:xfrm>
           <a:prstGeom prst="rect">
@@ -10771,13 +11184,13 @@
       </p:sp>
       <p:sp>
         <p:nvSpPr>
-          <p:cNvPr id="42" name="TextBox 41"/>
+          <p:cNvPr id="33" name="TextBox 32"/>
           <p:cNvSpPr txBox="1"/>
           <p:nvPr/>
         </p:nvSpPr>
         <p:spPr>
           <a:xfrm>
-            <a:off x="822960" y="6080759"/>
+            <a:off x="822960" y="5148071"/>
             <a:ext cx="10515600" cy="365760"/>
           </a:xfrm>
           <a:prstGeom prst="rect">
@@ -10806,7 +11219,7 @@
                 </a:solidFill>
                 <a:latin typeface="Garamond"/>
               </a:rPr>
-              <a:t>Filled cells denote interviews in which the individual is observed teaching; bordered cells, interviews without teaching.</a:t>
+              <a:t>Filled cells: observed teaching.</a:t>
             </a:r>
           </a:p>
         </p:txBody>
@@ -12052,7 +12465,7 @@
                 </a:solidFill>
                 <a:latin typeface="Garamond"/>
               </a:rPr>
-              <a:t>employed with a teaching occupation, holding a bachelor’s degree, in at least two year-1 interviews</a:t>
+              <a:t>teaching, with a bachelor’s degree, in at least two year-1 interviews</a:t>
             </a:r>
           </a:p>
         </p:txBody>
@@ -12136,7 +12549,7 @@
                 </a:solidFill>
                 <a:latin typeface="Garamond"/>
               </a:rPr>
-              <a:t>observed teaching in at least one year-2 interview</a:t>
+              <a:t>teaching in at least one year-2 interview</a:t>
             </a:r>
           </a:p>
         </p:txBody>
@@ -12220,7 +12633,7 @@
                 </a:solidFill>
                 <a:latin typeface="Garamond"/>
               </a:rPr>
-              <a:t>never observed teaching in year 2, given two or more year-2 interviews, one outside June–August</a:t>
+              <a:t>never teaching in year 2, given two or more interviews, one outside the summer</a:t>
             </a:r>
           </a:p>
         </p:txBody>
@@ -12388,7 +12801,7 @@
         <p:spPr>
           <a:xfrm>
             <a:off x="1005840" y="4663440"/>
-            <a:ext cx="2834640" cy="329184"/>
+            <a:ext cx="5486400" cy="329184"/>
           </a:xfrm>
           <a:prstGeom prst="rect">
             <a:avLst/>
@@ -12403,14 +12816,14 @@
           <a:p>
             <a:pPr algn="l">
               <a:lnSpc>
-                <a:spcPts val="1725"/>
+                <a:spcPts val="1800"/>
               </a:lnSpc>
               <a:spcAft>
                 <a:spcPts val="0"/>
               </a:spcAft>
             </a:pPr>
             <a:r>
-              <a:rPr sz="1150" b="1" i="0">
+              <a:rPr sz="1200" b="0" i="0">
                 <a:solidFill>
                   <a:srgbClr val="1A2430"/>
                 </a:solidFill>
@@ -12429,8 +12842,8 @@
         </p:nvSpPr>
         <p:spPr>
           <a:xfrm>
-            <a:off x="3977639" y="4663440"/>
-            <a:ext cx="5852160" cy="329184"/>
+            <a:off x="10058400" y="4663440"/>
+            <a:ext cx="1097280" cy="329184"/>
           </a:xfrm>
           <a:prstGeom prst="rect">
             <a:avLst/>
@@ -12445,20 +12858,20 @@
           <a:p>
             <a:pPr algn="l">
               <a:lnSpc>
-                <a:spcPts val="1725"/>
+                <a:spcPts val="1800"/>
               </a:lnSpc>
               <a:spcAft>
                 <a:spcPts val="0"/>
               </a:spcAft>
             </a:pPr>
             <a:r>
-              <a:rPr sz="1150" b="0" i="0">
+              <a:rPr sz="1200" b="1" i="0">
                 <a:solidFill>
                   <a:srgbClr val="1A2430"/>
                 </a:solidFill>
                 <a:latin typeface="Garamond"/>
               </a:rPr>
-              <a:t>one classification per individual</a:t>
+              <a:t>12.9</a:t>
             </a:r>
           </a:p>
         </p:txBody>
@@ -12471,8 +12884,8 @@
         </p:nvSpPr>
         <p:spPr>
           <a:xfrm>
-            <a:off x="10058400" y="4663440"/>
-            <a:ext cx="1097280" cy="329184"/>
+            <a:off x="1005840" y="4992624"/>
+            <a:ext cx="5486400" cy="329184"/>
           </a:xfrm>
           <a:prstGeom prst="rect">
             <a:avLst/>
@@ -12487,20 +12900,20 @@
           <a:p>
             <a:pPr algn="l">
               <a:lnSpc>
-                <a:spcPts val="1725"/>
+                <a:spcPts val="1800"/>
               </a:lnSpc>
               <a:spcAft>
                 <a:spcPts val="0"/>
               </a:spcAft>
             </a:pPr>
             <a:r>
-              <a:rPr sz="1150" b="1" i="0">
+              <a:rPr sz="1200" b="0" i="0">
                 <a:solidFill>
                   <a:srgbClr val="1A2430"/>
                 </a:solidFill>
                 <a:latin typeface="Garamond"/>
               </a:rPr>
-              <a:t>12.9</a:t>
+              <a:t>Retrospective annual measure</a:t>
             </a:r>
           </a:p>
         </p:txBody>
@@ -12513,8 +12926,8 @@
         </p:nvSpPr>
         <p:spPr>
           <a:xfrm>
-            <a:off x="1005840" y="4992624"/>
-            <a:ext cx="2834640" cy="329184"/>
+            <a:off x="10058400" y="4992624"/>
+            <a:ext cx="1097280" cy="329184"/>
           </a:xfrm>
           <a:prstGeom prst="rect">
             <a:avLst/>
@@ -12529,20 +12942,20 @@
           <a:p>
             <a:pPr algn="l">
               <a:lnSpc>
-                <a:spcPts val="1725"/>
+                <a:spcPts val="1800"/>
               </a:lnSpc>
               <a:spcAft>
                 <a:spcPts val="0"/>
               </a:spcAft>
             </a:pPr>
             <a:r>
-              <a:rPr sz="1150" b="1" i="0">
+              <a:rPr sz="1200" b="1" i="0">
                 <a:solidFill>
                   <a:srgbClr val="1A2430"/>
                 </a:solidFill>
                 <a:latin typeface="Garamond"/>
               </a:rPr>
-              <a:t>Retrospective annual measure</a:t>
+              <a:t>7.1</a:t>
             </a:r>
           </a:p>
         </p:txBody>
@@ -12555,8 +12968,8 @@
         </p:nvSpPr>
         <p:spPr>
           <a:xfrm>
-            <a:off x="3977639" y="4992624"/>
-            <a:ext cx="5852160" cy="329184"/>
+            <a:off x="1005840" y="5321808"/>
+            <a:ext cx="5486400" cy="329184"/>
           </a:xfrm>
           <a:prstGeom prst="rect">
             <a:avLst/>
@@ -12571,20 +12984,20 @@
           <a:p>
             <a:pPr algn="l">
               <a:lnSpc>
-                <a:spcPts val="1725"/>
+                <a:spcPts val="1800"/>
               </a:lnSpc>
               <a:spcAft>
                 <a:spcPts val="0"/>
               </a:spcAft>
             </a:pPr>
             <a:r>
-              <a:rPr sz="1150" b="0" i="0">
+              <a:rPr sz="1200" b="0" i="0">
                 <a:solidFill>
                   <a:srgbClr val="1A2430"/>
                 </a:solidFill>
                 <a:latin typeface="Garamond"/>
               </a:rPr>
-              <a:t>longest job of the previous year no longer held at the March interview</a:t>
+              <a:t>Occupation-pair measure</a:t>
             </a:r>
           </a:p>
         </p:txBody>
@@ -12597,7 +13010,7 @@
         </p:nvSpPr>
         <p:spPr>
           <a:xfrm>
-            <a:off x="10058400" y="4992624"/>
+            <a:off x="10058400" y="5321808"/>
             <a:ext cx="1097280" cy="329184"/>
           </a:xfrm>
           <a:prstGeom prst="rect">
@@ -12613,20 +13026,20 @@
           <a:p>
             <a:pPr algn="l">
               <a:lnSpc>
-                <a:spcPts val="1725"/>
+                <a:spcPts val="1800"/>
               </a:lnSpc>
               <a:spcAft>
                 <a:spcPts val="0"/>
               </a:spcAft>
             </a:pPr>
             <a:r>
-              <a:rPr sz="1150" b="1" i="0">
+              <a:rPr sz="1200" b="1" i="0">
                 <a:solidFill>
                   <a:srgbClr val="1A2430"/>
                 </a:solidFill>
                 <a:latin typeface="Garamond"/>
               </a:rPr>
-              <a:t>7.1</a:t>
+              <a:t>5.0</a:t>
             </a:r>
           </a:p>
         </p:txBody>
@@ -12639,8 +13052,8 @@
         </p:nvSpPr>
         <p:spPr>
           <a:xfrm>
-            <a:off x="1005840" y="5321808"/>
-            <a:ext cx="2834640" cy="329184"/>
+            <a:off x="1005840" y="5650992"/>
+            <a:ext cx="5486400" cy="329184"/>
           </a:xfrm>
           <a:prstGeom prst="rect">
             <a:avLst/>
@@ -12655,20 +13068,20 @@
           <a:p>
             <a:pPr algn="l">
               <a:lnSpc>
-                <a:spcPts val="1725"/>
+                <a:spcPts val="1800"/>
               </a:lnSpc>
               <a:spcAft>
                 <a:spcPts val="0"/>
               </a:spcAft>
             </a:pPr>
             <a:r>
-              <a:rPr sz="1150" b="1" i="0">
+              <a:rPr sz="1200" b="0" i="0">
                 <a:solidFill>
                   <a:srgbClr val="1A2430"/>
                 </a:solidFill>
                 <a:latin typeface="Garamond"/>
               </a:rPr>
-              <a:t>Occupation-pair measure</a:t>
+              <a:t>Month-pair measure</a:t>
             </a:r>
           </a:p>
         </p:txBody>
@@ -12681,8 +13094,8 @@
         </p:nvSpPr>
         <p:spPr>
           <a:xfrm>
-            <a:off x="3977639" y="5321808"/>
-            <a:ext cx="5852160" cy="329184"/>
+            <a:off x="10058400" y="5650992"/>
+            <a:ext cx="1097280" cy="329184"/>
           </a:xfrm>
           <a:prstGeom prst="rect">
             <a:avLst/>
@@ -12697,20 +13110,20 @@
           <a:p>
             <a:pPr algn="l">
               <a:lnSpc>
-                <a:spcPts val="1725"/>
+                <a:spcPts val="1800"/>
               </a:lnSpc>
               <a:spcAft>
                 <a:spcPts val="0"/>
               </a:spcAft>
             </a:pPr>
             <a:r>
-              <a:rPr sz="1150" b="0" i="0">
+              <a:rPr sz="1200" b="1" i="0">
                 <a:solidFill>
                   <a:srgbClr val="1A2430"/>
                 </a:solidFill>
                 <a:latin typeface="Garamond"/>
               </a:rPr>
-              <a:t>previous-year and current occupation codes compared directly</a:t>
+              <a:t>16.0</a:t>
             </a:r>
           </a:p>
         </p:txBody>
@@ -12723,8 +13136,8 @@
         </p:nvSpPr>
         <p:spPr>
           <a:xfrm>
-            <a:off x="10058400" y="5321808"/>
-            <a:ext cx="1097280" cy="329184"/>
+            <a:off x="1005840" y="5980176"/>
+            <a:ext cx="5486400" cy="329184"/>
           </a:xfrm>
           <a:prstGeom prst="rect">
             <a:avLst/>
@@ -12739,20 +13152,20 @@
           <a:p>
             <a:pPr algn="l">
               <a:lnSpc>
-                <a:spcPts val="1725"/>
+                <a:spcPts val="1800"/>
               </a:lnSpc>
               <a:spcAft>
                 <a:spcPts val="0"/>
               </a:spcAft>
             </a:pPr>
             <a:r>
-              <a:rPr sz="1150" b="1" i="0">
+              <a:rPr sz="1200" b="0" i="0">
                 <a:solidFill>
                   <a:srgbClr val="1A2430"/>
                 </a:solidFill>
                 <a:latin typeface="Garamond"/>
               </a:rPr>
-              <a:t>5.0</a:t>
+              <a:t>Any-sighting measure</a:t>
             </a:r>
           </a:p>
         </p:txBody>
@@ -12765,8 +13178,8 @@
         </p:nvSpPr>
         <p:spPr>
           <a:xfrm>
-            <a:off x="1005840" y="5650992"/>
-            <a:ext cx="2834640" cy="329184"/>
+            <a:off x="10058400" y="5980176"/>
+            <a:ext cx="1097280" cy="329184"/>
           </a:xfrm>
           <a:prstGeom prst="rect">
             <a:avLst/>
@@ -12781,20 +13194,20 @@
           <a:p>
             <a:pPr algn="l">
               <a:lnSpc>
-                <a:spcPts val="1725"/>
+                <a:spcPts val="1800"/>
               </a:lnSpc>
               <a:spcAft>
                 <a:spcPts val="0"/>
               </a:spcAft>
             </a:pPr>
             <a:r>
-              <a:rPr sz="1150" b="1" i="0">
+              <a:rPr sz="1200" b="1" i="0">
                 <a:solidFill>
                   <a:srgbClr val="1A2430"/>
                 </a:solidFill>
                 <a:latin typeface="Garamond"/>
               </a:rPr>
-              <a:t>Month-pair measure</a:t>
+              <a:t>19.4</a:t>
             </a:r>
           </a:p>
         </p:txBody>
@@ -12807,8 +13220,8 @@
         </p:nvSpPr>
         <p:spPr>
           <a:xfrm>
-            <a:off x="3977639" y="5650992"/>
-            <a:ext cx="5852160" cy="329184"/>
+            <a:off x="1005840" y="6309360"/>
+            <a:ext cx="5486400" cy="329184"/>
           </a:xfrm>
           <a:prstGeom prst="rect">
             <a:avLst/>
@@ -12823,20 +13236,20 @@
           <a:p>
             <a:pPr algn="l">
               <a:lnSpc>
-                <a:spcPts val="1725"/>
+                <a:spcPts val="1800"/>
               </a:lnSpc>
               <a:spcAft>
                 <a:spcPts val="0"/>
               </a:spcAft>
             </a:pPr>
             <a:r>
-              <a:rPr sz="1150" b="0" i="0">
+              <a:rPr sz="1200" b="0" i="0">
                 <a:solidFill>
                   <a:srgbClr val="1A2430"/>
                 </a:solidFill>
                 <a:latin typeface="Garamond"/>
               </a:rPr>
-              <a:t>each teaching month matched to its interview twelve months ahead</a:t>
+              <a:t>NCES Teacher Follow-up Survey</a:t>
             </a:r>
           </a:p>
         </p:txBody>
@@ -12849,7 +13262,7 @@
         </p:nvSpPr>
         <p:spPr>
           <a:xfrm>
-            <a:off x="10058400" y="5650992"/>
+            <a:off x="10058400" y="6309360"/>
             <a:ext cx="1097280" cy="329184"/>
           </a:xfrm>
           <a:prstGeom prst="rect">
@@ -12865,266 +13278,14 @@
           <a:p>
             <a:pPr algn="l">
               <a:lnSpc>
-                <a:spcPts val="1725"/>
+                <a:spcPts val="1800"/>
               </a:lnSpc>
               <a:spcAft>
                 <a:spcPts val="0"/>
               </a:spcAft>
             </a:pPr>
             <a:r>
-              <a:rPr sz="1150" b="1" i="0">
-                <a:solidFill>
-                  <a:srgbClr val="1A2430"/>
-                </a:solidFill>
-                <a:latin typeface="Garamond"/>
-              </a:rPr>
-              <a:t>16.0</a:t>
-            </a:r>
-          </a:p>
-        </p:txBody>
-      </p:sp>
-      <p:sp>
-        <p:nvSpPr>
-          <p:cNvPr id="47" name="TextBox 46"/>
-          <p:cNvSpPr txBox="1"/>
-          <p:nvPr/>
-        </p:nvSpPr>
-        <p:spPr>
-          <a:xfrm>
-            <a:off x="1005840" y="5980176"/>
-            <a:ext cx="2834640" cy="329184"/>
-          </a:xfrm>
-          <a:prstGeom prst="rect">
-            <a:avLst/>
-          </a:prstGeom>
-          <a:noFill/>
-        </p:spPr>
-        <p:txBody>
-          <a:bodyPr wrap="square" lIns="0" rIns="0" tIns="0" bIns="0">
-            <a:spAutoFit/>
-          </a:bodyPr>
-          <a:lstStyle/>
-          <a:p>
-            <a:pPr algn="l">
-              <a:lnSpc>
-                <a:spcPts val="1725"/>
-              </a:lnSpc>
-              <a:spcAft>
-                <a:spcPts val="0"/>
-              </a:spcAft>
-            </a:pPr>
-            <a:r>
-              <a:rPr sz="1150" b="1" i="0">
-                <a:solidFill>
-                  <a:srgbClr val="1A2430"/>
-                </a:solidFill>
-                <a:latin typeface="Garamond"/>
-              </a:rPr>
-              <a:t>Any-sighting measure</a:t>
-            </a:r>
-          </a:p>
-        </p:txBody>
-      </p:sp>
-      <p:sp>
-        <p:nvSpPr>
-          <p:cNvPr id="48" name="TextBox 47"/>
-          <p:cNvSpPr txBox="1"/>
-          <p:nvPr/>
-        </p:nvSpPr>
-        <p:spPr>
-          <a:xfrm>
-            <a:off x="3977639" y="5980176"/>
-            <a:ext cx="5852160" cy="329184"/>
-          </a:xfrm>
-          <a:prstGeom prst="rect">
-            <a:avLst/>
-          </a:prstGeom>
-          <a:noFill/>
-        </p:spPr>
-        <p:txBody>
-          <a:bodyPr wrap="square" lIns="0" rIns="0" tIns="0" bIns="0">
-            <a:spAutoFit/>
-          </a:bodyPr>
-          <a:lstStyle/>
-          <a:p>
-            <a:pPr algn="l">
-              <a:lnSpc>
-                <a:spcPts val="1725"/>
-              </a:lnSpc>
-              <a:spcAft>
-                <a:spcPts val="0"/>
-              </a:spcAft>
-            </a:pPr>
-            <a:r>
-              <a:rPr sz="1150" b="0" i="0">
-                <a:solidFill>
-                  <a:srgbClr val="1A2430"/>
-                </a:solidFill>
-                <a:latin typeface="Garamond"/>
-              </a:rPr>
-              <a:t>any individual observed teaching once in year 1 enters the denominator</a:t>
-            </a:r>
-          </a:p>
-        </p:txBody>
-      </p:sp>
-      <p:sp>
-        <p:nvSpPr>
-          <p:cNvPr id="49" name="TextBox 48"/>
-          <p:cNvSpPr txBox="1"/>
-          <p:nvPr/>
-        </p:nvSpPr>
-        <p:spPr>
-          <a:xfrm>
-            <a:off x="10058400" y="5980176"/>
-            <a:ext cx="1097280" cy="329184"/>
-          </a:xfrm>
-          <a:prstGeom prst="rect">
-            <a:avLst/>
-          </a:prstGeom>
-          <a:noFill/>
-        </p:spPr>
-        <p:txBody>
-          <a:bodyPr wrap="square" lIns="0" rIns="0" tIns="0" bIns="0">
-            <a:spAutoFit/>
-          </a:bodyPr>
-          <a:lstStyle/>
-          <a:p>
-            <a:pPr algn="l">
-              <a:lnSpc>
-                <a:spcPts val="1725"/>
-              </a:lnSpc>
-              <a:spcAft>
-                <a:spcPts val="0"/>
-              </a:spcAft>
-            </a:pPr>
-            <a:r>
-              <a:rPr sz="1150" b="1" i="0">
-                <a:solidFill>
-                  <a:srgbClr val="1A2430"/>
-                </a:solidFill>
-                <a:latin typeface="Garamond"/>
-              </a:rPr>
-              <a:t>19.4</a:t>
-            </a:r>
-          </a:p>
-        </p:txBody>
-      </p:sp>
-      <p:sp>
-        <p:nvSpPr>
-          <p:cNvPr id="50" name="TextBox 49"/>
-          <p:cNvSpPr txBox="1"/>
-          <p:nvPr/>
-        </p:nvSpPr>
-        <p:spPr>
-          <a:xfrm>
-            <a:off x="1005840" y="6309360"/>
-            <a:ext cx="2834640" cy="329184"/>
-          </a:xfrm>
-          <a:prstGeom prst="rect">
-            <a:avLst/>
-          </a:prstGeom>
-          <a:noFill/>
-        </p:spPr>
-        <p:txBody>
-          <a:bodyPr wrap="square" lIns="0" rIns="0" tIns="0" bIns="0">
-            <a:spAutoFit/>
-          </a:bodyPr>
-          <a:lstStyle/>
-          <a:p>
-            <a:pPr algn="l">
-              <a:lnSpc>
-                <a:spcPts val="1725"/>
-              </a:lnSpc>
-              <a:spcAft>
-                <a:spcPts val="0"/>
-              </a:spcAft>
-            </a:pPr>
-            <a:r>
-              <a:rPr sz="1150" b="1" i="0">
-                <a:solidFill>
-                  <a:srgbClr val="1A2430"/>
-                </a:solidFill>
-                <a:latin typeface="Garamond"/>
-              </a:rPr>
-              <a:t>NCES Teacher Follow-up Survey</a:t>
-            </a:r>
-          </a:p>
-        </p:txBody>
-      </p:sp>
-      <p:sp>
-        <p:nvSpPr>
-          <p:cNvPr id="51" name="TextBox 50"/>
-          <p:cNvSpPr txBox="1"/>
-          <p:nvPr/>
-        </p:nvSpPr>
-        <p:spPr>
-          <a:xfrm>
-            <a:off x="3977639" y="6309360"/>
-            <a:ext cx="5852160" cy="329184"/>
-          </a:xfrm>
-          <a:prstGeom prst="rect">
-            <a:avLst/>
-          </a:prstGeom>
-          <a:noFill/>
-        </p:spPr>
-        <p:txBody>
-          <a:bodyPr wrap="square" lIns="0" rIns="0" tIns="0" bIns="0">
-            <a:spAutoFit/>
-          </a:bodyPr>
-          <a:lstStyle/>
-          <a:p>
-            <a:pPr algn="l">
-              <a:lnSpc>
-                <a:spcPts val="1725"/>
-              </a:lnSpc>
-              <a:spcAft>
-                <a:spcPts val="0"/>
-              </a:spcAft>
-            </a:pPr>
-            <a:r>
-              <a:rPr sz="1150" b="0" i="0">
-                <a:solidFill>
-                  <a:srgbClr val="1A2430"/>
-                </a:solidFill>
-                <a:latin typeface="Garamond"/>
-              </a:rPr>
-              <a:t>roster-based re-survey of a teacher sample; wave 2021–22</a:t>
-            </a:r>
-          </a:p>
-        </p:txBody>
-      </p:sp>
-      <p:sp>
-        <p:nvSpPr>
-          <p:cNvPr id="52" name="TextBox 51"/>
-          <p:cNvSpPr txBox="1"/>
-          <p:nvPr/>
-        </p:nvSpPr>
-        <p:spPr>
-          <a:xfrm>
-            <a:off x="10058400" y="6309360"/>
-            <a:ext cx="1097280" cy="329184"/>
-          </a:xfrm>
-          <a:prstGeom prst="rect">
-            <a:avLst/>
-          </a:prstGeom>
-          <a:noFill/>
-        </p:spPr>
-        <p:txBody>
-          <a:bodyPr wrap="square" lIns="0" rIns="0" tIns="0" bIns="0">
-            <a:spAutoFit/>
-          </a:bodyPr>
-          <a:lstStyle/>
-          <a:p>
-            <a:pPr algn="l">
-              <a:lnSpc>
-                <a:spcPts val="1725"/>
-              </a:lnSpc>
-              <a:spcAft>
-                <a:spcPts val="0"/>
-              </a:spcAft>
-            </a:pPr>
-            <a:r>
-              <a:rPr sz="1150" b="1" i="0">
+              <a:rPr sz="1200" b="1" i="0">
                 <a:solidFill>
                   <a:srgbClr val="1A2430"/>
                 </a:solidFill>
@@ -13137,7 +13298,7 @@
       </p:sp>
       <p:cxnSp>
         <p:nvCxnSpPr>
-          <p:cNvPr id="53" name="Connector 52"/>
+          <p:cNvPr id="47" name="Connector 46"/>
           <p:cNvCxnSpPr/>
           <p:nvPr/>
         </p:nvCxnSpPr>

--- a/report/Proyect_US_v4.pptx
+++ b/report/Proyect_US_v4.pptx
@@ -16,9 +16,8 @@
     <p:sldId id="298" r:id="rId44"/>
     <p:sldId id="256" r:id="rId5"/>
     <p:sldId id="299" r:id="rId45"/>
+    <p:sldId id="300" r:id="rId46"/>
     <p:sldId id="301" r:id="rId47"/>
-    <p:sldId id="300" r:id="rId46"/>
-    <p:sldId id="302" r:id="rId48"/>
     <p:sldId id="291" r:id="rId37"/>
     <p:sldId id="258" r:id="rId6"/>
     <p:sldId id="259" r:id="rId7"/>
@@ -47,7 +46,7 @@
     <p:sldId id="285" r:id="rId26"/>
     <p:sldId id="267" r:id="rId27"/>
     <p:sldId id="287" r:id="rId28"/>
-    <p:sldId id="303" r:id="rId49"/>
+    <p:sldId id="302" r:id="rId48"/>
   </p:sldIdLst>
   <p:sldSz cx="12192000" cy="6858000"/>
   <p:notesSz cx="6858000" cy="12192000"/>
@@ -7536,7 +7535,7 @@
         </p:nvCxnSpPr>
         <p:spPr>
           <a:xfrm>
-            <a:off x="822960" y="2743200"/>
+            <a:off x="822960" y="2697480"/>
             <a:ext cx="10543032" cy="0"/>
           </a:xfrm>
           <a:prstGeom prst="line">
@@ -7571,8 +7570,8 @@
         </p:nvSpPr>
         <p:spPr>
           <a:xfrm>
-            <a:off x="960120" y="2871216"/>
-            <a:ext cx="640080" cy="365760"/>
+            <a:off x="6492240" y="2816352"/>
+            <a:ext cx="1828800" cy="365760"/>
           </a:xfrm>
           <a:prstGeom prst="rect">
             <a:avLst/>
@@ -7585,7 +7584,7 @@
           </a:bodyPr>
           <a:lstStyle/>
           <a:p>
-            <a:pPr algn="l">
+            <a:pPr algn="r">
               <a:lnSpc>
                 <a:spcPts val="1950"/>
               </a:lnSpc>
@@ -7600,7 +7599,7 @@
                 </a:solidFill>
                 <a:latin typeface="Garamond"/>
               </a:rPr>
-              <a:t>Age</a:t>
+              <a:t>Teachers</a:t>
             </a:r>
           </a:p>
         </p:txBody>
@@ -7613,8 +7612,8 @@
         </p:nvSpPr>
         <p:spPr>
           <a:xfrm>
-            <a:off x="1737360" y="2871216"/>
-            <a:ext cx="3017520" cy="365760"/>
+            <a:off x="8732520" y="2816352"/>
+            <a:ext cx="2331720" cy="365760"/>
           </a:xfrm>
           <a:prstGeom prst="rect">
             <a:avLst/>
@@ -7627,7 +7626,7 @@
           </a:bodyPr>
           <a:lstStyle/>
           <a:p>
-            <a:pPr algn="l">
+            <a:pPr algn="r">
               <a:lnSpc>
                 <a:spcPts val="1950"/>
               </a:lnSpc>
@@ -7642,146 +7641,20 @@
                 </a:solidFill>
                 <a:latin typeface="Garamond"/>
               </a:rPr>
-              <a:t>Longest job last year</a:t>
-            </a:r>
-          </a:p>
-        </p:txBody>
-      </p:sp>
-      <p:sp>
-        <p:nvSpPr>
-          <p:cNvPr id="8" name="TextBox 7"/>
-          <p:cNvSpPr txBox="1"/>
-          <p:nvPr/>
-        </p:nvSpPr>
-        <p:spPr>
-          <a:xfrm>
-            <a:off x="4892040" y="2871216"/>
-            <a:ext cx="777240" cy="365760"/>
-          </a:xfrm>
-          <a:prstGeom prst="rect">
-            <a:avLst/>
-          </a:prstGeom>
-          <a:noFill/>
-        </p:spPr>
-        <p:txBody>
-          <a:bodyPr wrap="square" lIns="0" rIns="0" tIns="0" bIns="0">
-            <a:spAutoFit/>
-          </a:bodyPr>
-          <a:lstStyle/>
-          <a:p>
-            <a:pPr algn="l">
-              <a:lnSpc>
-                <a:spcPts val="1950"/>
-              </a:lnSpc>
-              <a:spcAft>
-                <a:spcPts val="0"/>
-              </a:spcAft>
-            </a:pPr>
-            <a:r>
-              <a:rPr sz="1300" b="1" i="0">
-                <a:solidFill>
-                  <a:srgbClr val="26456E"/>
-                </a:solidFill>
-                <a:latin typeface="Garamond"/>
-              </a:rPr>
-              <a:t>Weeks</a:t>
-            </a:r>
-          </a:p>
-        </p:txBody>
-      </p:sp>
-      <p:sp>
-        <p:nvSpPr>
-          <p:cNvPr id="9" name="TextBox 8"/>
-          <p:cNvSpPr txBox="1"/>
-          <p:nvPr/>
-        </p:nvSpPr>
-        <p:spPr>
-          <a:xfrm>
-            <a:off x="5806440" y="2871216"/>
-            <a:ext cx="1097280" cy="365760"/>
-          </a:xfrm>
-          <a:prstGeom prst="rect">
-            <a:avLst/>
-          </a:prstGeom>
-          <a:noFill/>
-        </p:spPr>
-        <p:txBody>
-          <a:bodyPr wrap="square" lIns="0" rIns="0" tIns="0" bIns="0">
-            <a:spAutoFit/>
-          </a:bodyPr>
-          <a:lstStyle/>
-          <a:p>
-            <a:pPr algn="l">
-              <a:lnSpc>
-                <a:spcPts val="1950"/>
-              </a:lnSpc>
-              <a:spcAft>
-                <a:spcPts val="0"/>
-              </a:spcAft>
-            </a:pPr>
-            <a:r>
-              <a:rPr sz="1300" b="1" i="0">
-                <a:solidFill>
-                  <a:srgbClr val="26456E"/>
-                </a:solidFill>
-                <a:latin typeface="Garamond"/>
-              </a:rPr>
-              <a:t>Wage</a:t>
-            </a:r>
-          </a:p>
-        </p:txBody>
-      </p:sp>
-      <p:sp>
-        <p:nvSpPr>
-          <p:cNvPr id="10" name="TextBox 9"/>
-          <p:cNvSpPr txBox="1"/>
-          <p:nvPr/>
-        </p:nvSpPr>
-        <p:spPr>
-          <a:xfrm>
-            <a:off x="7040880" y="2871216"/>
-            <a:ext cx="3017520" cy="365760"/>
-          </a:xfrm>
-          <a:prstGeom prst="rect">
-            <a:avLst/>
-          </a:prstGeom>
-          <a:noFill/>
-        </p:spPr>
-        <p:txBody>
-          <a:bodyPr wrap="square" lIns="0" rIns="0" tIns="0" bIns="0">
-            <a:spAutoFit/>
-          </a:bodyPr>
-          <a:lstStyle/>
-          <a:p>
-            <a:pPr algn="l">
-              <a:lnSpc>
-                <a:spcPts val="1950"/>
-              </a:lnSpc>
-              <a:spcAft>
-                <a:spcPts val="0"/>
-              </a:spcAft>
-            </a:pPr>
-            <a:r>
-              <a:rPr sz="1300" b="1" i="0">
-                <a:solidFill>
-                  <a:srgbClr val="26456E"/>
-                </a:solidFill>
-                <a:latin typeface="Garamond"/>
-              </a:rPr>
-              <a:t>Occupation this March</a:t>
+              <a:t>Other graduates</a:t>
             </a:r>
           </a:p>
         </p:txBody>
       </p:sp>
       <p:cxnSp>
         <p:nvCxnSpPr>
-          <p:cNvPr id="11" name="Connector 10"/>
+          <p:cNvPr id="8" name="Connector 7"/>
           <p:cNvCxnSpPr/>
           <p:nvPr/>
         </p:nvCxnSpPr>
         <p:spPr>
           <a:xfrm>
-            <a:off x="822960" y="3255264"/>
+            <a:off x="822960" y="3200400"/>
             <a:ext cx="10543032" cy="0"/>
           </a:xfrm>
           <a:prstGeom prst="line">
@@ -7810,14 +7683,14 @@
       </p:cxnSp>
       <p:sp>
         <p:nvSpPr>
-          <p:cNvPr id="12" name="TextBox 11"/>
+          <p:cNvPr id="9" name="TextBox 8"/>
           <p:cNvSpPr txBox="1"/>
           <p:nvPr/>
         </p:nvSpPr>
         <p:spPr>
           <a:xfrm>
-            <a:off x="960120" y="3401568"/>
-            <a:ext cx="640080" cy="384048"/>
+            <a:off x="960120" y="3328416"/>
+            <a:ext cx="5120640" cy="365760"/>
           </a:xfrm>
           <a:prstGeom prst="rect">
             <a:avLst/>
@@ -7832,34 +7705,34 @@
           <a:p>
             <a:pPr algn="l">
               <a:lnSpc>
-                <a:spcPts val="1875"/>
+                <a:spcPts val="1950"/>
               </a:lnSpc>
               <a:spcAft>
                 <a:spcPts val="0"/>
               </a:spcAft>
             </a:pPr>
             <a:r>
-              <a:rPr sz="1250" b="0" i="0">
+              <a:rPr sz="1300" b="0" i="0">
                 <a:solidFill>
                   <a:srgbClr val="1A2430"/>
                 </a:solidFill>
                 <a:latin typeface="Garamond"/>
               </a:rPr>
-              <a:t>58</a:t>
-            </a:r>
-          </a:p>
-        </p:txBody>
-      </p:sp>
-      <p:sp>
-        <p:nvSpPr>
-          <p:cNvPr id="13" name="TextBox 12"/>
+              <a:t>Observations, 1998–2025</a:t>
+            </a:r>
+          </a:p>
+        </p:txBody>
+      </p:sp>
+      <p:sp>
+        <p:nvSpPr>
+          <p:cNvPr id="10" name="TextBox 9"/>
           <p:cNvSpPr txBox="1"/>
           <p:nvPr/>
         </p:nvSpPr>
         <p:spPr>
           <a:xfrm>
-            <a:off x="1737360" y="3401568"/>
-            <a:ext cx="3017520" cy="384048"/>
+            <a:off x="6492240" y="3328416"/>
+            <a:ext cx="1828800" cy="365760"/>
           </a:xfrm>
           <a:prstGeom prst="rect">
             <a:avLst/>
@@ -7872,36 +7745,36 @@
           </a:bodyPr>
           <a:lstStyle/>
           <a:p>
-            <a:pPr algn="l">
+            <a:pPr algn="r">
               <a:lnSpc>
-                <a:spcPts val="1875"/>
+                <a:spcPts val="1950"/>
               </a:lnSpc>
               <a:spcAft>
                 <a:spcPts val="0"/>
               </a:spcAft>
             </a:pPr>
             <a:r>
-              <a:rPr sz="1250" b="0" i="0">
+              <a:rPr sz="1300" b="0" i="0">
                 <a:solidFill>
                   <a:srgbClr val="1A2430"/>
                 </a:solidFill>
                 <a:latin typeface="Garamond"/>
               </a:rPr>
-              <a:t>Elementary and middle school teachers</a:t>
-            </a:r>
-          </a:p>
-        </p:txBody>
-      </p:sp>
-      <p:sp>
-        <p:nvSpPr>
-          <p:cNvPr id="14" name="TextBox 13"/>
+              <a:t>85,497</a:t>
+            </a:r>
+          </a:p>
+        </p:txBody>
+      </p:sp>
+      <p:sp>
+        <p:nvSpPr>
+          <p:cNvPr id="11" name="TextBox 10"/>
           <p:cNvSpPr txBox="1"/>
           <p:nvPr/>
         </p:nvSpPr>
         <p:spPr>
           <a:xfrm>
-            <a:off x="4892040" y="3401568"/>
-            <a:ext cx="777240" cy="384048"/>
+            <a:off x="8732520" y="3328416"/>
+            <a:ext cx="2331720" cy="365760"/>
           </a:xfrm>
           <a:prstGeom prst="rect">
             <a:avLst/>
@@ -7914,36 +7787,36 @@
           </a:bodyPr>
           <a:lstStyle/>
           <a:p>
-            <a:pPr algn="l">
+            <a:pPr algn="r">
               <a:lnSpc>
-                <a:spcPts val="1875"/>
+                <a:spcPts val="1950"/>
               </a:lnSpc>
               <a:spcAft>
                 <a:spcPts val="0"/>
               </a:spcAft>
             </a:pPr>
             <a:r>
-              <a:rPr sz="1250" b="0" i="0">
+              <a:rPr sz="1300" b="0" i="0">
                 <a:solidFill>
                   <a:srgbClr val="1A2430"/>
                 </a:solidFill>
                 <a:latin typeface="Garamond"/>
               </a:rPr>
-              <a:t>52</a:t>
-            </a:r>
-          </a:p>
-        </p:txBody>
-      </p:sp>
-      <p:sp>
-        <p:nvSpPr>
-          <p:cNvPr id="15" name="TextBox 14"/>
+              <a:t>726,618</a:t>
+            </a:r>
+          </a:p>
+        </p:txBody>
+      </p:sp>
+      <p:sp>
+        <p:nvSpPr>
+          <p:cNvPr id="12" name="TextBox 11"/>
           <p:cNvSpPr txBox="1"/>
           <p:nvPr/>
         </p:nvSpPr>
         <p:spPr>
           <a:xfrm>
-            <a:off x="5806440" y="3401568"/>
-            <a:ext cx="1097280" cy="384048"/>
+            <a:off x="960120" y="3694176"/>
+            <a:ext cx="5120640" cy="365760"/>
           </a:xfrm>
           <a:prstGeom prst="rect">
             <a:avLst/>
@@ -7958,34 +7831,34 @@
           <a:p>
             <a:pPr algn="l">
               <a:lnSpc>
-                <a:spcPts val="1875"/>
+                <a:spcPts val="1950"/>
               </a:lnSpc>
               <a:spcAft>
                 <a:spcPts val="0"/>
               </a:spcAft>
             </a:pPr>
             <a:r>
-              <a:rPr sz="1250" b="0" i="0">
+              <a:rPr sz="1300" b="0" i="0">
                 <a:solidFill>
                   <a:srgbClr val="1A2430"/>
                 </a:solidFill>
                 <a:latin typeface="Garamond"/>
               </a:rPr>
-              <a:t>$76,375</a:t>
-            </a:r>
-          </a:p>
-        </p:txBody>
-      </p:sp>
-      <p:sp>
-        <p:nvSpPr>
-          <p:cNvPr id="16" name="TextBox 15"/>
+              <a:t>Age</a:t>
+            </a:r>
+          </a:p>
+        </p:txBody>
+      </p:sp>
+      <p:sp>
+        <p:nvSpPr>
+          <p:cNvPr id="13" name="TextBox 12"/>
           <p:cNvSpPr txBox="1"/>
           <p:nvPr/>
         </p:nvSpPr>
         <p:spPr>
           <a:xfrm>
-            <a:off x="7040880" y="3401568"/>
-            <a:ext cx="3017520" cy="384048"/>
+            <a:off x="6492240" y="3694176"/>
+            <a:ext cx="1828800" cy="365760"/>
           </a:xfrm>
           <a:prstGeom prst="rect">
             <a:avLst/>
@@ -7998,36 +7871,36 @@
           </a:bodyPr>
           <a:lstStyle/>
           <a:p>
-            <a:pPr algn="l">
+            <a:pPr algn="r">
               <a:lnSpc>
-                <a:spcPts val="1875"/>
+                <a:spcPts val="1950"/>
               </a:lnSpc>
               <a:spcAft>
                 <a:spcPts val="0"/>
               </a:spcAft>
             </a:pPr>
             <a:r>
-              <a:rPr sz="1250" b="0" i="0">
+              <a:rPr sz="1300" b="0" i="0">
                 <a:solidFill>
                   <a:srgbClr val="1A2430"/>
                 </a:solidFill>
                 <a:latin typeface="Garamond"/>
               </a:rPr>
-              <a:t>Elementary and middle school teachers</a:t>
-            </a:r>
-          </a:p>
-        </p:txBody>
-      </p:sp>
-      <p:sp>
-        <p:nvSpPr>
-          <p:cNvPr id="17" name="TextBox 16"/>
+              <a:t>43.7</a:t>
+            </a:r>
+          </a:p>
+        </p:txBody>
+      </p:sp>
+      <p:sp>
+        <p:nvSpPr>
+          <p:cNvPr id="14" name="TextBox 13"/>
           <p:cNvSpPr txBox="1"/>
           <p:nvPr/>
         </p:nvSpPr>
         <p:spPr>
           <a:xfrm>
-            <a:off x="10195560" y="3401568"/>
-            <a:ext cx="1143000" cy="384048"/>
+            <a:off x="8732520" y="3694176"/>
+            <a:ext cx="2331720" cy="365760"/>
           </a:xfrm>
           <a:prstGeom prst="rect">
             <a:avLst/>
@@ -8040,36 +7913,36 @@
           </a:bodyPr>
           <a:lstStyle/>
           <a:p>
-            <a:pPr algn="l">
+            <a:pPr algn="r">
               <a:lnSpc>
-                <a:spcPts val="1875"/>
+                <a:spcPts val="1950"/>
               </a:lnSpc>
               <a:spcAft>
                 <a:spcPts val="0"/>
               </a:spcAft>
             </a:pPr>
             <a:r>
-              <a:rPr sz="1250" b="1" i="0">
-                <a:solidFill>
-                  <a:srgbClr val="1F3864"/>
+              <a:rPr sz="1300" b="0" i="0">
+                <a:solidFill>
+                  <a:srgbClr val="1A2430"/>
                 </a:solidFill>
                 <a:latin typeface="Garamond"/>
               </a:rPr>
-              <a:t>stayer</a:t>
-            </a:r>
-          </a:p>
-        </p:txBody>
-      </p:sp>
-      <p:sp>
-        <p:nvSpPr>
-          <p:cNvPr id="18" name="TextBox 17"/>
+              <a:t>43.6</a:t>
+            </a:r>
+          </a:p>
+        </p:txBody>
+      </p:sp>
+      <p:sp>
+        <p:nvSpPr>
+          <p:cNvPr id="15" name="TextBox 14"/>
           <p:cNvSpPr txBox="1"/>
           <p:nvPr/>
         </p:nvSpPr>
         <p:spPr>
           <a:xfrm>
-            <a:off x="960120" y="3877056"/>
-            <a:ext cx="640080" cy="384048"/>
+            <a:off x="960120" y="4059936"/>
+            <a:ext cx="5120640" cy="365760"/>
           </a:xfrm>
           <a:prstGeom prst="rect">
             <a:avLst/>
@@ -8084,34 +7957,34 @@
           <a:p>
             <a:pPr algn="l">
               <a:lnSpc>
-                <a:spcPts val="1875"/>
+                <a:spcPts val="1950"/>
               </a:lnSpc>
               <a:spcAft>
                 <a:spcPts val="0"/>
               </a:spcAft>
             </a:pPr>
             <a:r>
-              <a:rPr sz="1250" b="0" i="0">
+              <a:rPr sz="1300" b="0" i="0">
                 <a:solidFill>
                   <a:srgbClr val="1A2430"/>
                 </a:solidFill>
                 <a:latin typeface="Garamond"/>
               </a:rPr>
-              <a:t>28</a:t>
-            </a:r>
-          </a:p>
-        </p:txBody>
-      </p:sp>
-      <p:sp>
-        <p:nvSpPr>
-          <p:cNvPr id="19" name="TextBox 18"/>
+              <a:t>Female, percent</a:t>
+            </a:r>
+          </a:p>
+        </p:txBody>
+      </p:sp>
+      <p:sp>
+        <p:nvSpPr>
+          <p:cNvPr id="16" name="TextBox 15"/>
           <p:cNvSpPr txBox="1"/>
           <p:nvPr/>
         </p:nvSpPr>
         <p:spPr>
           <a:xfrm>
-            <a:off x="1737360" y="3877056"/>
-            <a:ext cx="3017520" cy="384048"/>
+            <a:off x="6492240" y="4059936"/>
+            <a:ext cx="1828800" cy="365760"/>
           </a:xfrm>
           <a:prstGeom prst="rect">
             <a:avLst/>
@@ -8124,36 +7997,36 @@
           </a:bodyPr>
           <a:lstStyle/>
           <a:p>
-            <a:pPr algn="l">
+            <a:pPr algn="r">
               <a:lnSpc>
-                <a:spcPts val="1875"/>
+                <a:spcPts val="1950"/>
               </a:lnSpc>
               <a:spcAft>
                 <a:spcPts val="0"/>
               </a:spcAft>
             </a:pPr>
             <a:r>
-              <a:rPr sz="1250" b="0" i="0">
+              <a:rPr sz="1300" b="0" i="0">
                 <a:solidFill>
                   <a:srgbClr val="1A2430"/>
                 </a:solidFill>
                 <a:latin typeface="Garamond"/>
               </a:rPr>
-              <a:t>Elementary and middle school teachers</a:t>
-            </a:r>
-          </a:p>
-        </p:txBody>
-      </p:sp>
-      <p:sp>
-        <p:nvSpPr>
-          <p:cNvPr id="20" name="TextBox 19"/>
+              <a:t>75.9</a:t>
+            </a:r>
+          </a:p>
+        </p:txBody>
+      </p:sp>
+      <p:sp>
+        <p:nvSpPr>
+          <p:cNvPr id="17" name="TextBox 16"/>
           <p:cNvSpPr txBox="1"/>
           <p:nvPr/>
         </p:nvSpPr>
         <p:spPr>
           <a:xfrm>
-            <a:off x="4892040" y="3877056"/>
-            <a:ext cx="777240" cy="384048"/>
+            <a:off x="8732520" y="4059936"/>
+            <a:ext cx="2331720" cy="365760"/>
           </a:xfrm>
           <a:prstGeom prst="rect">
             <a:avLst/>
@@ -8166,36 +8039,36 @@
           </a:bodyPr>
           <a:lstStyle/>
           <a:p>
-            <a:pPr algn="l">
+            <a:pPr algn="r">
               <a:lnSpc>
-                <a:spcPts val="1875"/>
+                <a:spcPts val="1950"/>
               </a:lnSpc>
               <a:spcAft>
                 <a:spcPts val="0"/>
               </a:spcAft>
             </a:pPr>
             <a:r>
-              <a:rPr sz="1250" b="0" i="0">
+              <a:rPr sz="1300" b="0" i="0">
                 <a:solidFill>
                   <a:srgbClr val="1A2430"/>
                 </a:solidFill>
                 <a:latin typeface="Garamond"/>
               </a:rPr>
-              <a:t>52</a:t>
-            </a:r>
-          </a:p>
-        </p:txBody>
-      </p:sp>
-      <p:sp>
-        <p:nvSpPr>
-          <p:cNvPr id="21" name="TextBox 20"/>
+              <a:t>46.5</a:t>
+            </a:r>
+          </a:p>
+        </p:txBody>
+      </p:sp>
+      <p:sp>
+        <p:nvSpPr>
+          <p:cNvPr id="18" name="TextBox 17"/>
           <p:cNvSpPr txBox="1"/>
           <p:nvPr/>
         </p:nvSpPr>
         <p:spPr>
           <a:xfrm>
-            <a:off x="5806440" y="3877056"/>
-            <a:ext cx="1097280" cy="384048"/>
+            <a:off x="960120" y="4425696"/>
+            <a:ext cx="5120640" cy="365760"/>
           </a:xfrm>
           <a:prstGeom prst="rect">
             <a:avLst/>
@@ -8210,34 +8083,34 @@
           <a:p>
             <a:pPr algn="l">
               <a:lnSpc>
-                <a:spcPts val="1875"/>
+                <a:spcPts val="1950"/>
               </a:lnSpc>
               <a:spcAft>
                 <a:spcPts val="0"/>
               </a:spcAft>
             </a:pPr>
             <a:r>
-              <a:rPr sz="1250" b="0" i="0">
+              <a:rPr sz="1300" b="0" i="0">
                 <a:solidFill>
                   <a:srgbClr val="1A2430"/>
                 </a:solidFill>
                 <a:latin typeface="Garamond"/>
               </a:rPr>
-              <a:t>$57,000</a:t>
-            </a:r>
-          </a:p>
-        </p:txBody>
-      </p:sp>
-      <p:sp>
-        <p:nvSpPr>
-          <p:cNvPr id="22" name="TextBox 21"/>
+              <a:t>Master’s degree or higher, percent</a:t>
+            </a:r>
+          </a:p>
+        </p:txBody>
+      </p:sp>
+      <p:sp>
+        <p:nvSpPr>
+          <p:cNvPr id="19" name="TextBox 18"/>
           <p:cNvSpPr txBox="1"/>
           <p:nvPr/>
         </p:nvSpPr>
         <p:spPr>
           <a:xfrm>
-            <a:off x="7040880" y="3877056"/>
-            <a:ext cx="3017520" cy="384048"/>
+            <a:off x="6492240" y="4425696"/>
+            <a:ext cx="1828800" cy="365760"/>
           </a:xfrm>
           <a:prstGeom prst="rect">
             <a:avLst/>
@@ -8250,36 +8123,36 @@
           </a:bodyPr>
           <a:lstStyle/>
           <a:p>
-            <a:pPr algn="l">
+            <a:pPr algn="r">
               <a:lnSpc>
-                <a:spcPts val="1875"/>
+                <a:spcPts val="1950"/>
               </a:lnSpc>
               <a:spcAft>
                 <a:spcPts val="0"/>
               </a:spcAft>
             </a:pPr>
             <a:r>
-              <a:rPr sz="1250" b="0" i="0">
+              <a:rPr sz="1300" b="0" i="0">
                 <a:solidFill>
                   <a:srgbClr val="1A2430"/>
                 </a:solidFill>
                 <a:latin typeface="Garamond"/>
               </a:rPr>
-              <a:t>Secretary and administrative assistant</a:t>
-            </a:r>
-          </a:p>
-        </p:txBody>
-      </p:sp>
-      <p:sp>
-        <p:nvSpPr>
-          <p:cNvPr id="23" name="TextBox 22"/>
+              <a:t>48.3</a:t>
+            </a:r>
+          </a:p>
+        </p:txBody>
+      </p:sp>
+      <p:sp>
+        <p:nvSpPr>
+          <p:cNvPr id="20" name="TextBox 19"/>
           <p:cNvSpPr txBox="1"/>
           <p:nvPr/>
         </p:nvSpPr>
         <p:spPr>
           <a:xfrm>
-            <a:off x="10195560" y="3877056"/>
-            <a:ext cx="1143000" cy="384048"/>
+            <a:off x="8732520" y="4425696"/>
+            <a:ext cx="2331720" cy="365760"/>
           </a:xfrm>
           <a:prstGeom prst="rect">
             <a:avLst/>
@@ -8292,36 +8165,36 @@
           </a:bodyPr>
           <a:lstStyle/>
           <a:p>
-            <a:pPr algn="l">
+            <a:pPr algn="r">
               <a:lnSpc>
-                <a:spcPts val="1875"/>
+                <a:spcPts val="1950"/>
               </a:lnSpc>
               <a:spcAft>
                 <a:spcPts val="0"/>
               </a:spcAft>
             </a:pPr>
             <a:r>
-              <a:rPr sz="1250" b="1" i="0">
-                <a:solidFill>
-                  <a:srgbClr val="7B2530"/>
+              <a:rPr sz="1300" b="0" i="0">
+                <a:solidFill>
+                  <a:srgbClr val="1A2430"/>
                 </a:solidFill>
                 <a:latin typeface="Garamond"/>
               </a:rPr>
-              <a:t>leaver</a:t>
-            </a:r>
-          </a:p>
-        </p:txBody>
-      </p:sp>
-      <p:sp>
-        <p:nvSpPr>
-          <p:cNvPr id="24" name="TextBox 23"/>
+              <a:t>33.8</a:t>
+            </a:r>
+          </a:p>
+        </p:txBody>
+      </p:sp>
+      <p:sp>
+        <p:nvSpPr>
+          <p:cNvPr id="21" name="TextBox 20"/>
           <p:cNvSpPr txBox="1"/>
           <p:nvPr/>
         </p:nvSpPr>
         <p:spPr>
           <a:xfrm>
-            <a:off x="960120" y="4352544"/>
-            <a:ext cx="640080" cy="384048"/>
+            <a:off x="960120" y="4791456"/>
+            <a:ext cx="5120640" cy="365760"/>
           </a:xfrm>
           <a:prstGeom prst="rect">
             <a:avLst/>
@@ -8336,34 +8209,34 @@
           <a:p>
             <a:pPr algn="l">
               <a:lnSpc>
-                <a:spcPts val="1875"/>
+                <a:spcPts val="1950"/>
               </a:lnSpc>
               <a:spcAft>
                 <a:spcPts val="0"/>
               </a:spcAft>
             </a:pPr>
             <a:r>
-              <a:rPr sz="1250" b="0" i="0">
+              <a:rPr sz="1300" b="0" i="0">
                 <a:solidFill>
                   <a:srgbClr val="1A2430"/>
                 </a:solidFill>
                 <a:latin typeface="Garamond"/>
               </a:rPr>
-              <a:t>24</a:t>
-            </a:r>
-          </a:p>
-        </p:txBody>
-      </p:sp>
-      <p:sp>
-        <p:nvSpPr>
-          <p:cNvPr id="25" name="TextBox 24"/>
+              <a:t>Public sector, percent</a:t>
+            </a:r>
+          </a:p>
+        </p:txBody>
+      </p:sp>
+      <p:sp>
+        <p:nvSpPr>
+          <p:cNvPr id="22" name="TextBox 21"/>
           <p:cNvSpPr txBox="1"/>
           <p:nvPr/>
         </p:nvSpPr>
         <p:spPr>
           <a:xfrm>
-            <a:off x="1737360" y="4352544"/>
-            <a:ext cx="3017520" cy="384048"/>
+            <a:off x="6492240" y="4791456"/>
+            <a:ext cx="1828800" cy="365760"/>
           </a:xfrm>
           <a:prstGeom prst="rect">
             <a:avLst/>
@@ -8376,36 +8249,36 @@
           </a:bodyPr>
           <a:lstStyle/>
           <a:p>
-            <a:pPr algn="l">
+            <a:pPr algn="r">
               <a:lnSpc>
-                <a:spcPts val="1875"/>
+                <a:spcPts val="1950"/>
               </a:lnSpc>
               <a:spcAft>
                 <a:spcPts val="0"/>
               </a:spcAft>
             </a:pPr>
             <a:r>
-              <a:rPr sz="1250" b="0" i="0">
+              <a:rPr sz="1300" b="0" i="0">
                 <a:solidFill>
                   <a:srgbClr val="1A2430"/>
                 </a:solidFill>
                 <a:latin typeface="Garamond"/>
               </a:rPr>
-              <a:t>Elementary and middle school teachers</a:t>
-            </a:r>
-          </a:p>
-        </p:txBody>
-      </p:sp>
-      <p:sp>
-        <p:nvSpPr>
-          <p:cNvPr id="26" name="TextBox 25"/>
+              <a:t>72.9</a:t>
+            </a:r>
+          </a:p>
+        </p:txBody>
+      </p:sp>
+      <p:sp>
+        <p:nvSpPr>
+          <p:cNvPr id="23" name="TextBox 22"/>
           <p:cNvSpPr txBox="1"/>
           <p:nvPr/>
         </p:nvSpPr>
         <p:spPr>
           <a:xfrm>
-            <a:off x="4892040" y="4352544"/>
-            <a:ext cx="777240" cy="384048"/>
+            <a:off x="8732520" y="4791456"/>
+            <a:ext cx="2331720" cy="365760"/>
           </a:xfrm>
           <a:prstGeom prst="rect">
             <a:avLst/>
@@ -8418,36 +8291,36 @@
           </a:bodyPr>
           <a:lstStyle/>
           <a:p>
-            <a:pPr algn="l">
+            <a:pPr algn="r">
               <a:lnSpc>
-                <a:spcPts val="1875"/>
+                <a:spcPts val="1950"/>
               </a:lnSpc>
               <a:spcAft>
                 <a:spcPts val="0"/>
               </a:spcAft>
             </a:pPr>
             <a:r>
-              <a:rPr sz="1250" b="0" i="0">
+              <a:rPr sz="1300" b="0" i="0">
                 <a:solidFill>
                   <a:srgbClr val="1A2430"/>
                 </a:solidFill>
                 <a:latin typeface="Garamond"/>
               </a:rPr>
-              <a:t>40</a:t>
-            </a:r>
-          </a:p>
-        </p:txBody>
-      </p:sp>
-      <p:sp>
-        <p:nvSpPr>
-          <p:cNvPr id="27" name="TextBox 26"/>
+              <a:t>16.2</a:t>
+            </a:r>
+          </a:p>
+        </p:txBody>
+      </p:sp>
+      <p:sp>
+        <p:nvSpPr>
+          <p:cNvPr id="24" name="TextBox 23"/>
           <p:cNvSpPr txBox="1"/>
           <p:nvPr/>
         </p:nvSpPr>
         <p:spPr>
           <a:xfrm>
-            <a:off x="5806440" y="4352544"/>
-            <a:ext cx="1097280" cy="384048"/>
+            <a:off x="960120" y="5157216"/>
+            <a:ext cx="5120640" cy="365760"/>
           </a:xfrm>
           <a:prstGeom prst="rect">
             <a:avLst/>
@@ -8462,34 +8335,34 @@
           <a:p>
             <a:pPr algn="l">
               <a:lnSpc>
-                <a:spcPts val="1875"/>
+                <a:spcPts val="1950"/>
               </a:lnSpc>
               <a:spcAft>
                 <a:spcPts val="0"/>
               </a:spcAft>
             </a:pPr>
             <a:r>
-              <a:rPr sz="1250" b="0" i="0">
+              <a:rPr sz="1300" b="0" i="0">
                 <a:solidFill>
                   <a:srgbClr val="1A2430"/>
                 </a:solidFill>
                 <a:latin typeface="Garamond"/>
               </a:rPr>
-              <a:t>$81,500</a:t>
-            </a:r>
-          </a:p>
-        </p:txBody>
-      </p:sp>
-      <p:sp>
-        <p:nvSpPr>
-          <p:cNvPr id="28" name="TextBox 27"/>
+              <a:t>Weeks worked in the year</a:t>
+            </a:r>
+          </a:p>
+        </p:txBody>
+      </p:sp>
+      <p:sp>
+        <p:nvSpPr>
+          <p:cNvPr id="25" name="TextBox 24"/>
           <p:cNvSpPr txBox="1"/>
           <p:nvPr/>
         </p:nvSpPr>
         <p:spPr>
           <a:xfrm>
-            <a:off x="7040880" y="4352544"/>
-            <a:ext cx="3017520" cy="384048"/>
+            <a:off x="6492240" y="5157216"/>
+            <a:ext cx="1828800" cy="365760"/>
           </a:xfrm>
           <a:prstGeom prst="rect">
             <a:avLst/>
@@ -8502,36 +8375,36 @@
           </a:bodyPr>
           <a:lstStyle/>
           <a:p>
-            <a:pPr algn="l">
+            <a:pPr algn="r">
               <a:lnSpc>
-                <a:spcPts val="1875"/>
+                <a:spcPts val="1950"/>
               </a:lnSpc>
               <a:spcAft>
                 <a:spcPts val="0"/>
               </a:spcAft>
             </a:pPr>
             <a:r>
-              <a:rPr sz="1250" b="0" i="0">
+              <a:rPr sz="1300" b="0" i="0">
                 <a:solidFill>
                   <a:srgbClr val="1A2430"/>
                 </a:solidFill>
                 <a:latin typeface="Garamond"/>
               </a:rPr>
-              <a:t>Teaching assistant</a:t>
-            </a:r>
-          </a:p>
-        </p:txBody>
-      </p:sp>
-      <p:sp>
-        <p:nvSpPr>
-          <p:cNvPr id="29" name="TextBox 28"/>
+              <a:t>46.1</a:t>
+            </a:r>
+          </a:p>
+        </p:txBody>
+      </p:sp>
+      <p:sp>
+        <p:nvSpPr>
+          <p:cNvPr id="26" name="TextBox 25"/>
           <p:cNvSpPr txBox="1"/>
           <p:nvPr/>
         </p:nvSpPr>
         <p:spPr>
           <a:xfrm>
-            <a:off x="10195560" y="4352544"/>
-            <a:ext cx="1143000" cy="384048"/>
+            <a:off x="8732520" y="5157216"/>
+            <a:ext cx="2331720" cy="365760"/>
           </a:xfrm>
           <a:prstGeom prst="rect">
             <a:avLst/>
@@ -8544,36 +8417,36 @@
           </a:bodyPr>
           <a:lstStyle/>
           <a:p>
-            <a:pPr algn="l">
+            <a:pPr algn="r">
               <a:lnSpc>
-                <a:spcPts val="1875"/>
+                <a:spcPts val="1950"/>
               </a:lnSpc>
               <a:spcAft>
                 <a:spcPts val="0"/>
               </a:spcAft>
             </a:pPr>
             <a:r>
-              <a:rPr sz="1250" b="1" i="0">
-                <a:solidFill>
-                  <a:srgbClr val="7B2530"/>
+              <a:rPr sz="1300" b="0" i="0">
+                <a:solidFill>
+                  <a:srgbClr val="1A2430"/>
                 </a:solidFill>
                 <a:latin typeface="Garamond"/>
               </a:rPr>
-              <a:t>leaver</a:t>
-            </a:r>
-          </a:p>
-        </p:txBody>
-      </p:sp>
-      <p:sp>
-        <p:nvSpPr>
-          <p:cNvPr id="30" name="TextBox 29"/>
+              <a:t>48.6</a:t>
+            </a:r>
+          </a:p>
+        </p:txBody>
+      </p:sp>
+      <p:sp>
+        <p:nvSpPr>
+          <p:cNvPr id="27" name="TextBox 26"/>
           <p:cNvSpPr txBox="1"/>
           <p:nvPr/>
         </p:nvSpPr>
         <p:spPr>
           <a:xfrm>
-            <a:off x="960120" y="4828031"/>
-            <a:ext cx="640080" cy="384048"/>
+            <a:off x="960120" y="5522976"/>
+            <a:ext cx="5120640" cy="365760"/>
           </a:xfrm>
           <a:prstGeom prst="rect">
             <a:avLst/>
@@ -8588,34 +8461,34 @@
           <a:p>
             <a:pPr algn="l">
               <a:lnSpc>
-                <a:spcPts val="1875"/>
+                <a:spcPts val="1950"/>
               </a:lnSpc>
               <a:spcAft>
                 <a:spcPts val="0"/>
               </a:spcAft>
             </a:pPr>
             <a:r>
-              <a:rPr sz="1250" b="0" i="0">
+              <a:rPr sz="1300" b="0" i="0">
                 <a:solidFill>
                   <a:srgbClr val="1A2430"/>
                 </a:solidFill>
                 <a:latin typeface="Garamond"/>
               </a:rPr>
-              <a:t>62</a:t>
-            </a:r>
-          </a:p>
-        </p:txBody>
-      </p:sp>
-      <p:sp>
-        <p:nvSpPr>
-          <p:cNvPr id="31" name="TextBox 30"/>
+              <a:t>Median annual wage, 2021–2025</a:t>
+            </a:r>
+          </a:p>
+        </p:txBody>
+      </p:sp>
+      <p:sp>
+        <p:nvSpPr>
+          <p:cNvPr id="28" name="TextBox 27"/>
           <p:cNvSpPr txBox="1"/>
           <p:nvPr/>
         </p:nvSpPr>
         <p:spPr>
           <a:xfrm>
-            <a:off x="1737360" y="4828031"/>
-            <a:ext cx="3017520" cy="384048"/>
+            <a:off x="6492240" y="5522976"/>
+            <a:ext cx="1828800" cy="365760"/>
           </a:xfrm>
           <a:prstGeom prst="rect">
             <a:avLst/>
@@ -8628,36 +8501,36 @@
           </a:bodyPr>
           <a:lstStyle/>
           <a:p>
-            <a:pPr algn="l">
+            <a:pPr algn="r">
               <a:lnSpc>
-                <a:spcPts val="1875"/>
+                <a:spcPts val="1950"/>
               </a:lnSpc>
               <a:spcAft>
                 <a:spcPts val="0"/>
               </a:spcAft>
             </a:pPr>
             <a:r>
-              <a:rPr sz="1250" b="0" i="0">
+              <a:rPr sz="1300" b="0" i="0">
                 <a:solidFill>
                   <a:srgbClr val="1A2430"/>
                 </a:solidFill>
                 <a:latin typeface="Garamond"/>
               </a:rPr>
-              <a:t>Elementary and middle school teachers</a:t>
-            </a:r>
-          </a:p>
-        </p:txBody>
-      </p:sp>
-      <p:sp>
-        <p:nvSpPr>
-          <p:cNvPr id="32" name="TextBox 31"/>
+              <a:t>$56,000</a:t>
+            </a:r>
+          </a:p>
+        </p:txBody>
+      </p:sp>
+      <p:sp>
+        <p:nvSpPr>
+          <p:cNvPr id="29" name="TextBox 28"/>
           <p:cNvSpPr txBox="1"/>
           <p:nvPr/>
         </p:nvSpPr>
         <p:spPr>
           <a:xfrm>
-            <a:off x="4892040" y="4828031"/>
-            <a:ext cx="777240" cy="384048"/>
+            <a:off x="8732520" y="5522976"/>
+            <a:ext cx="2331720" cy="365760"/>
           </a:xfrm>
           <a:prstGeom prst="rect">
             <a:avLst/>
@@ -8670,36 +8543,36 @@
           </a:bodyPr>
           <a:lstStyle/>
           <a:p>
-            <a:pPr algn="l">
+            <a:pPr algn="r">
               <a:lnSpc>
-                <a:spcPts val="1875"/>
+                <a:spcPts val="1950"/>
               </a:lnSpc>
               <a:spcAft>
                 <a:spcPts val="0"/>
               </a:spcAft>
             </a:pPr>
             <a:r>
-              <a:rPr sz="1250" b="0" i="0">
+              <a:rPr sz="1300" b="0" i="0">
                 <a:solidFill>
                   <a:srgbClr val="1A2430"/>
                 </a:solidFill>
                 <a:latin typeface="Garamond"/>
               </a:rPr>
-              <a:t>26</a:t>
-            </a:r>
-          </a:p>
-        </p:txBody>
-      </p:sp>
-      <p:sp>
-        <p:nvSpPr>
-          <p:cNvPr id="33" name="TextBox 32"/>
+              <a:t>$75,000</a:t>
+            </a:r>
+          </a:p>
+        </p:txBody>
+      </p:sp>
+      <p:sp>
+        <p:nvSpPr>
+          <p:cNvPr id="30" name="TextBox 29"/>
           <p:cNvSpPr txBox="1"/>
           <p:nvPr/>
         </p:nvSpPr>
         <p:spPr>
           <a:xfrm>
-            <a:off x="5806440" y="4828031"/>
-            <a:ext cx="1097280" cy="384048"/>
+            <a:off x="960120" y="5888736"/>
+            <a:ext cx="5120640" cy="365760"/>
           </a:xfrm>
           <a:prstGeom prst="rect">
             <a:avLst/>
@@ -8714,34 +8587,34 @@
           <a:p>
             <a:pPr algn="l">
               <a:lnSpc>
-                <a:spcPts val="1875"/>
+                <a:spcPts val="1950"/>
               </a:lnSpc>
               <a:spcAft>
                 <a:spcPts val="0"/>
               </a:spcAft>
             </a:pPr>
             <a:r>
-              <a:rPr sz="1250" b="0" i="0">
+              <a:rPr sz="1300" b="0" i="0">
                 <a:solidFill>
                   <a:srgbClr val="1A2430"/>
                 </a:solidFill>
                 <a:latin typeface="Garamond"/>
               </a:rPr>
-              <a:t>$62,000</a:t>
-            </a:r>
-          </a:p>
-        </p:txBody>
-      </p:sp>
-      <p:sp>
-        <p:nvSpPr>
-          <p:cNvPr id="34" name="TextBox 33"/>
+              <a:t>Left teaching within the year, percent</a:t>
+            </a:r>
+          </a:p>
+        </p:txBody>
+      </p:sp>
+      <p:sp>
+        <p:nvSpPr>
+          <p:cNvPr id="31" name="TextBox 30"/>
           <p:cNvSpPr txBox="1"/>
           <p:nvPr/>
         </p:nvSpPr>
         <p:spPr>
           <a:xfrm>
-            <a:off x="7040880" y="4828031"/>
-            <a:ext cx="3017520" cy="384048"/>
+            <a:off x="6492240" y="5888736"/>
+            <a:ext cx="1828800" cy="365760"/>
           </a:xfrm>
           <a:prstGeom prst="rect">
             <a:avLst/>
@@ -8754,36 +8627,36 @@
           </a:bodyPr>
           <a:lstStyle/>
           <a:p>
-            <a:pPr algn="l">
+            <a:pPr algn="r">
               <a:lnSpc>
-                <a:spcPts val="1875"/>
+                <a:spcPts val="1950"/>
               </a:lnSpc>
               <a:spcAft>
                 <a:spcPts val="0"/>
               </a:spcAft>
             </a:pPr>
             <a:r>
-              <a:rPr sz="1250" b="0" i="0">
+              <a:rPr sz="1300" b="0" i="0">
                 <a:solidFill>
                   <a:srgbClr val="1A2430"/>
                 </a:solidFill>
                 <a:latin typeface="Garamond"/>
               </a:rPr>
-              <a:t>Not employed in March</a:t>
-            </a:r>
-          </a:p>
-        </p:txBody>
-      </p:sp>
-      <p:sp>
-        <p:nvSpPr>
-          <p:cNvPr id="35" name="TextBox 34"/>
+              <a:t>8.6</a:t>
+            </a:r>
+          </a:p>
+        </p:txBody>
+      </p:sp>
+      <p:sp>
+        <p:nvSpPr>
+          <p:cNvPr id="32" name="TextBox 31"/>
           <p:cNvSpPr txBox="1"/>
           <p:nvPr/>
         </p:nvSpPr>
         <p:spPr>
           <a:xfrm>
-            <a:off x="10195560" y="4828031"/>
-            <a:ext cx="1143000" cy="384048"/>
+            <a:off x="8732520" y="5888736"/>
+            <a:ext cx="2331720" cy="365760"/>
           </a:xfrm>
           <a:prstGeom prst="rect">
             <a:avLst/>
@@ -8796,35 +8669,35 @@
           </a:bodyPr>
           <a:lstStyle/>
           <a:p>
-            <a:pPr algn="l">
+            <a:pPr algn="r">
               <a:lnSpc>
-                <a:spcPts val="1875"/>
+                <a:spcPts val="1950"/>
               </a:lnSpc>
               <a:spcAft>
                 <a:spcPts val="0"/>
               </a:spcAft>
             </a:pPr>
             <a:r>
-              <a:rPr sz="1250" b="1" i="0">
-                <a:solidFill>
-                  <a:srgbClr val="7B2530"/>
+              <a:rPr sz="1300" b="0" i="0">
+                <a:solidFill>
+                  <a:srgbClr val="1A2430"/>
                 </a:solidFill>
                 <a:latin typeface="Garamond"/>
               </a:rPr>
-              <a:t>leaver</a:t>
+              <a:t>—</a:t>
             </a:r>
           </a:p>
         </p:txBody>
       </p:sp>
       <p:cxnSp>
         <p:nvCxnSpPr>
-          <p:cNvPr id="36" name="Connector 35"/>
+          <p:cNvPr id="33" name="Connector 32"/>
           <p:cNvCxnSpPr/>
           <p:nvPr/>
         </p:nvCxnSpPr>
         <p:spPr>
           <a:xfrm>
-            <a:off x="822960" y="5321807"/>
+            <a:off x="822960" y="6272784"/>
             <a:ext cx="10543032" cy="0"/>
           </a:xfrm>
           <a:prstGeom prst="line">
@@ -8853,13 +8726,13 @@
       </p:cxnSp>
       <p:sp>
         <p:nvSpPr>
-          <p:cNvPr id="37" name="TextBox 36"/>
+          <p:cNvPr id="34" name="TextBox 33"/>
           <p:cNvSpPr txBox="1"/>
           <p:nvPr/>
         </p:nvSpPr>
         <p:spPr>
           <a:xfrm>
-            <a:off x="822960" y="5522975"/>
+            <a:off x="822960" y="6437376"/>
             <a:ext cx="10543032" cy="365760"/>
           </a:xfrm>
           <a:prstGeom prst="rect">
@@ -8888,7 +8761,7 @@
                 </a:solidFill>
                 <a:latin typeface="Garamond"/>
               </a:rPr>
-              <a:t>Four records from the March 2025 supplement, as they enter the dataset.</a:t>
+              <a:t>March supplements 1998–2025, weighted; individuals holding a bachelor’s degree or more.</a:t>
             </a:r>
           </a:p>
         </p:txBody>
@@ -9807,21 +9680,147 @@
                 </a:solidFill>
                 <a:latin typeface="Garamond"/>
               </a:rPr>
-              <a:t>Definition 1: illustrative cases</a:t>
-            </a:r>
-          </a:p>
-        </p:txBody>
-      </p:sp>
-      <p:sp>
-        <p:nvSpPr>
-          <p:cNvPr id="4" name="Rectangle 3"/>
+              <a:t>Measuring attrition: definitions</a:t>
+            </a:r>
+          </a:p>
+        </p:txBody>
+      </p:sp>
+      <p:sp>
+        <p:nvSpPr>
+          <p:cNvPr id="4" name="TextBox 3"/>
+          <p:cNvSpPr txBox="1"/>
+          <p:nvPr/>
+        </p:nvSpPr>
+        <p:spPr>
+          <a:xfrm>
+            <a:off x="822960" y="1417320"/>
+            <a:ext cx="3200400" cy="320040"/>
+          </a:xfrm>
+          <a:prstGeom prst="rect">
+            <a:avLst/>
+          </a:prstGeom>
+          <a:noFill/>
+        </p:spPr>
+        <p:txBody>
+          <a:bodyPr wrap="square" lIns="0" rIns="0" tIns="0" bIns="0">
+            <a:spAutoFit/>
+          </a:bodyPr>
+          <a:lstStyle/>
+          <a:p>
+            <a:pPr algn="l">
+              <a:lnSpc>
+                <a:spcPts val="1950"/>
+              </a:lnSpc>
+              <a:spcAft>
+                <a:spcPts val="0"/>
+              </a:spcAft>
+            </a:pPr>
+            <a:r>
+              <a:rPr sz="1300" b="1" i="0">
+                <a:solidFill>
+                  <a:srgbClr val="1F3864"/>
+                </a:solidFill>
+                <a:latin typeface="Garamond"/>
+              </a:rPr>
+              <a:t>Year 1: interviews 1–4</a:t>
+            </a:r>
+          </a:p>
+        </p:txBody>
+      </p:sp>
+      <p:sp>
+        <p:nvSpPr>
+          <p:cNvPr id="5" name="TextBox 4"/>
+          <p:cNvSpPr txBox="1"/>
+          <p:nvPr/>
+        </p:nvSpPr>
+        <p:spPr>
+          <a:xfrm>
+            <a:off x="4480560" y="1417320"/>
+            <a:ext cx="3291840" cy="320040"/>
+          </a:xfrm>
+          <a:prstGeom prst="rect">
+            <a:avLst/>
+          </a:prstGeom>
+          <a:noFill/>
+        </p:spPr>
+        <p:txBody>
+          <a:bodyPr wrap="square" lIns="0" rIns="0" tIns="0" bIns="0">
+            <a:spAutoFit/>
+          </a:bodyPr>
+          <a:lstStyle/>
+          <a:p>
+            <a:pPr algn="ctr">
+              <a:lnSpc>
+                <a:spcPts val="1875"/>
+              </a:lnSpc>
+              <a:spcAft>
+                <a:spcPts val="0"/>
+              </a:spcAft>
+            </a:pPr>
+            <a:r>
+              <a:rPr sz="1250" b="0" i="1">
+                <a:solidFill>
+                  <a:srgbClr val="6B7480"/>
+                </a:solidFill>
+                <a:latin typeface="Garamond"/>
+              </a:rPr>
+              <a:t>8 months out of the sample</a:t>
+            </a:r>
+          </a:p>
+        </p:txBody>
+      </p:sp>
+      <p:sp>
+        <p:nvSpPr>
+          <p:cNvPr id="6" name="TextBox 5"/>
+          <p:cNvSpPr txBox="1"/>
+          <p:nvPr/>
+        </p:nvSpPr>
+        <p:spPr>
+          <a:xfrm>
+            <a:off x="8229600" y="1417320"/>
+            <a:ext cx="3200400" cy="320040"/>
+          </a:xfrm>
+          <a:prstGeom prst="rect">
+            <a:avLst/>
+          </a:prstGeom>
+          <a:noFill/>
+        </p:spPr>
+        <p:txBody>
+          <a:bodyPr wrap="square" lIns="0" rIns="0" tIns="0" bIns="0">
+            <a:spAutoFit/>
+          </a:bodyPr>
+          <a:lstStyle/>
+          <a:p>
+            <a:pPr algn="r">
+              <a:lnSpc>
+                <a:spcPts val="1950"/>
+              </a:lnSpc>
+              <a:spcAft>
+                <a:spcPts val="0"/>
+              </a:spcAft>
+            </a:pPr>
+            <a:r>
+              <a:rPr sz="1300" b="1" i="0">
+                <a:solidFill>
+                  <a:srgbClr val="7B2530"/>
+                </a:solidFill>
+                <a:latin typeface="Garamond"/>
+              </a:rPr>
+              <a:t>Year 2: interviews 5–8</a:t>
+            </a:r>
+          </a:p>
+        </p:txBody>
+      </p:sp>
+      <p:sp>
+        <p:nvSpPr>
+          <p:cNvPr id="7" name="Rectangle 6"/>
           <p:cNvSpPr/>
           <p:nvPr/>
         </p:nvSpPr>
         <p:spPr>
           <a:xfrm>
-            <a:off x="822960" y="1874519"/>
-            <a:ext cx="548640" cy="548640"/>
+            <a:off x="822960" y="1755648"/>
+            <a:ext cx="658939" cy="457200"/>
           </a:xfrm>
           <a:prstGeom prst="rect">
             <a:avLst/>
@@ -9860,21 +9859,21 @@
                 </a:solidFill>
                 <a:latin typeface="Garamond"/>
               </a:rPr>
-              <a:t>T</a:t>
-            </a:r>
-          </a:p>
-        </p:txBody>
-      </p:sp>
-      <p:sp>
-        <p:nvSpPr>
-          <p:cNvPr id="5" name="Rectangle 4"/>
+              <a:t>1</a:t>
+            </a:r>
+          </a:p>
+        </p:txBody>
+      </p:sp>
+      <p:sp>
+        <p:nvSpPr>
+          <p:cNvPr id="8" name="Rectangle 7"/>
           <p:cNvSpPr/>
           <p:nvPr/>
         </p:nvSpPr>
         <p:spPr>
           <a:xfrm>
-            <a:off x="1426464" y="1874519"/>
-            <a:ext cx="548640" cy="548640"/>
+            <a:off x="1481899" y="1755648"/>
+            <a:ext cx="658939" cy="457200"/>
           </a:xfrm>
           <a:prstGeom prst="rect">
             <a:avLst/>
@@ -9913,21 +9912,21 @@
                 </a:solidFill>
                 <a:latin typeface="Garamond"/>
               </a:rPr>
-              <a:t>T</a:t>
-            </a:r>
-          </a:p>
-        </p:txBody>
-      </p:sp>
-      <p:sp>
-        <p:nvSpPr>
-          <p:cNvPr id="6" name="Rectangle 5"/>
+              <a:t>2</a:t>
+            </a:r>
+          </a:p>
+        </p:txBody>
+      </p:sp>
+      <p:sp>
+        <p:nvSpPr>
+          <p:cNvPr id="9" name="Rectangle 8"/>
           <p:cNvSpPr/>
           <p:nvPr/>
         </p:nvSpPr>
         <p:spPr>
           <a:xfrm>
-            <a:off x="2029967" y="1874519"/>
-            <a:ext cx="548640" cy="548640"/>
+            <a:off x="2140839" y="1755648"/>
+            <a:ext cx="658939" cy="457200"/>
           </a:xfrm>
           <a:prstGeom prst="rect">
             <a:avLst/>
@@ -9966,21 +9965,21 @@
                 </a:solidFill>
                 <a:latin typeface="Garamond"/>
               </a:rPr>
-              <a:t>T</a:t>
-            </a:r>
-          </a:p>
-        </p:txBody>
-      </p:sp>
-      <p:sp>
-        <p:nvSpPr>
-          <p:cNvPr id="7" name="Rectangle 6"/>
+              <a:t>3</a:t>
+            </a:r>
+          </a:p>
+        </p:txBody>
+      </p:sp>
+      <p:sp>
+        <p:nvSpPr>
+          <p:cNvPr id="10" name="Rectangle 9"/>
           <p:cNvSpPr/>
           <p:nvPr/>
         </p:nvSpPr>
         <p:spPr>
           <a:xfrm>
-            <a:off x="2633472" y="1874519"/>
-            <a:ext cx="548640" cy="548640"/>
+            <a:off x="2799778" y="1755648"/>
+            <a:ext cx="658939" cy="457200"/>
           </a:xfrm>
           <a:prstGeom prst="rect">
             <a:avLst/>
@@ -10019,21 +10018,21 @@
                 </a:solidFill>
                 <a:latin typeface="Garamond"/>
               </a:rPr>
-              <a:t>T</a:t>
-            </a:r>
-          </a:p>
-        </p:txBody>
-      </p:sp>
-      <p:sp>
-        <p:nvSpPr>
-          <p:cNvPr id="8" name="Rectangle 7"/>
+              <a:t>4</a:t>
+            </a:r>
+          </a:p>
+        </p:txBody>
+      </p:sp>
+      <p:sp>
+        <p:nvSpPr>
+          <p:cNvPr id="11" name="Rectangle 10"/>
           <p:cNvSpPr/>
           <p:nvPr/>
         </p:nvSpPr>
         <p:spPr>
           <a:xfrm>
-            <a:off x="4014215" y="1874519"/>
-            <a:ext cx="548640" cy="548640"/>
+            <a:off x="3458718" y="1755648"/>
+            <a:ext cx="658939" cy="457200"/>
           </a:xfrm>
           <a:prstGeom prst="rect">
             <a:avLst/>
@@ -10063,23 +10062,32 @@
           </a:fontRef>
         </p:style>
         <p:txBody>
-          <a:bodyPr rtlCol="0" anchor="ctr"/>
+          <a:bodyPr rtlCol="0" anchor="ctr" wrap="none"/>
           <a:lstStyle/>
           <a:p>
             <a:pPr algn="ctr"/>
-          </a:p>
-        </p:txBody>
-      </p:sp>
-      <p:sp>
-        <p:nvSpPr>
-          <p:cNvPr id="9" name="Rectangle 8"/>
+            <a:r>
+              <a:rPr sz="1200" b="1">
+                <a:solidFill>
+                  <a:srgbClr val="6B7480"/>
+                </a:solidFill>
+                <a:latin typeface="Garamond"/>
+              </a:rPr>
+              <a:t>5</a:t>
+            </a:r>
+          </a:p>
+        </p:txBody>
+      </p:sp>
+      <p:sp>
+        <p:nvSpPr>
+          <p:cNvPr id="12" name="Rectangle 11"/>
           <p:cNvSpPr/>
           <p:nvPr/>
         </p:nvSpPr>
         <p:spPr>
           <a:xfrm>
-            <a:off x="4617720" y="1874519"/>
-            <a:ext cx="548640" cy="548640"/>
+            <a:off x="4117657" y="1755648"/>
+            <a:ext cx="658939" cy="457200"/>
           </a:xfrm>
           <a:prstGeom prst="rect">
             <a:avLst/>
@@ -10109,23 +10117,32 @@
           </a:fontRef>
         </p:style>
         <p:txBody>
-          <a:bodyPr rtlCol="0" anchor="ctr"/>
+          <a:bodyPr rtlCol="0" anchor="ctr" wrap="none"/>
           <a:lstStyle/>
           <a:p>
             <a:pPr algn="ctr"/>
-          </a:p>
-        </p:txBody>
-      </p:sp>
-      <p:sp>
-        <p:nvSpPr>
-          <p:cNvPr id="10" name="Rectangle 9"/>
+            <a:r>
+              <a:rPr sz="1200" b="1">
+                <a:solidFill>
+                  <a:srgbClr val="6B7480"/>
+                </a:solidFill>
+                <a:latin typeface="Garamond"/>
+              </a:rPr>
+              <a:t>6</a:t>
+            </a:r>
+          </a:p>
+        </p:txBody>
+      </p:sp>
+      <p:sp>
+        <p:nvSpPr>
+          <p:cNvPr id="13" name="Rectangle 12"/>
           <p:cNvSpPr/>
           <p:nvPr/>
         </p:nvSpPr>
         <p:spPr>
           <a:xfrm>
-            <a:off x="5221224" y="1874519"/>
-            <a:ext cx="548640" cy="548640"/>
+            <a:off x="4776597" y="1755648"/>
+            <a:ext cx="658939" cy="457200"/>
           </a:xfrm>
           <a:prstGeom prst="rect">
             <a:avLst/>
@@ -10155,32 +10172,43 @@
           </a:fontRef>
         </p:style>
         <p:txBody>
-          <a:bodyPr rtlCol="0" anchor="ctr"/>
+          <a:bodyPr rtlCol="0" anchor="ctr" wrap="none"/>
           <a:lstStyle/>
           <a:p>
             <a:pPr algn="ctr"/>
-          </a:p>
-        </p:txBody>
-      </p:sp>
-      <p:sp>
-        <p:nvSpPr>
-          <p:cNvPr id="11" name="Rectangle 10"/>
+            <a:r>
+              <a:rPr sz="1200" b="1">
+                <a:solidFill>
+                  <a:srgbClr val="6B7480"/>
+                </a:solidFill>
+                <a:latin typeface="Garamond"/>
+              </a:rPr>
+              <a:t>7</a:t>
+            </a:r>
+          </a:p>
+        </p:txBody>
+      </p:sp>
+      <p:sp>
+        <p:nvSpPr>
+          <p:cNvPr id="14" name="Rectangle 13"/>
           <p:cNvSpPr/>
           <p:nvPr/>
         </p:nvSpPr>
         <p:spPr>
           <a:xfrm>
-            <a:off x="5824728" y="1874519"/>
-            <a:ext cx="548640" cy="548640"/>
+            <a:off x="5435536" y="1755648"/>
+            <a:ext cx="658939" cy="457200"/>
           </a:xfrm>
           <a:prstGeom prst="rect">
             <a:avLst/>
           </a:prstGeom>
           <a:solidFill>
-            <a:srgbClr val="7B2530"/>
+            <a:srgbClr val="FFFFFF"/>
           </a:solidFill>
-          <a:ln>
-            <a:noFill/>
+          <a:ln w="9525">
+            <a:solidFill>
+              <a:srgbClr val="C9CFD6"/>
+            </a:solidFill>
           </a:ln>
           <a:effectLst/>
         </p:spPr>
@@ -10206,76 +10234,36 @@
             <a:r>
               <a:rPr sz="1200" b="1">
                 <a:solidFill>
-                  <a:srgbClr val="FFFFFF"/>
+                  <a:srgbClr val="6B7480"/>
                 </a:solidFill>
                 <a:latin typeface="Garamond"/>
               </a:rPr>
-              <a:t>T</a:t>
-            </a:r>
-          </a:p>
-        </p:txBody>
-      </p:sp>
-      <p:sp>
-        <p:nvSpPr>
-          <p:cNvPr id="12" name="TextBox 11"/>
-          <p:cNvSpPr txBox="1"/>
-          <p:nvPr/>
-        </p:nvSpPr>
-        <p:spPr>
-          <a:xfrm>
-            <a:off x="6748272" y="1984248"/>
-            <a:ext cx="4572000" cy="411480"/>
-          </a:xfrm>
-          <a:prstGeom prst="rect">
-            <a:avLst/>
-          </a:prstGeom>
-          <a:noFill/>
-        </p:spPr>
-        <p:txBody>
-          <a:bodyPr wrap="square" lIns="0" rIns="0" tIns="0" bIns="0">
-            <a:spAutoFit/>
-          </a:bodyPr>
-          <a:lstStyle/>
-          <a:p>
-            <a:pPr algn="l">
-              <a:lnSpc>
-                <a:spcPts val="2100"/>
-              </a:lnSpc>
-              <a:spcAft>
-                <a:spcPts val="0"/>
-              </a:spcAft>
-            </a:pPr>
-            <a:r>
-              <a:rPr sz="1400" b="1" i="0">
-                <a:solidFill>
-                  <a:srgbClr val="1F3864"/>
-                </a:solidFill>
-                <a:latin typeface="Garamond"/>
-              </a:rPr>
-              <a:t>stayer</a:t>
-            </a:r>
-          </a:p>
-        </p:txBody>
-      </p:sp>
-      <p:sp>
-        <p:nvSpPr>
-          <p:cNvPr id="13" name="Rectangle 12"/>
+              <a:t>8</a:t>
+            </a:r>
+          </a:p>
+        </p:txBody>
+      </p:sp>
+      <p:sp>
+        <p:nvSpPr>
+          <p:cNvPr id="15" name="Rectangle 14"/>
           <p:cNvSpPr/>
           <p:nvPr/>
         </p:nvSpPr>
         <p:spPr>
           <a:xfrm>
-            <a:off x="822960" y="2807208"/>
-            <a:ext cx="548640" cy="548640"/>
+            <a:off x="6094476" y="1755648"/>
+            <a:ext cx="658939" cy="457200"/>
           </a:xfrm>
           <a:prstGeom prst="rect">
             <a:avLst/>
           </a:prstGeom>
           <a:solidFill>
-            <a:srgbClr val="1F3864"/>
+            <a:srgbClr val="FFFFFF"/>
           </a:solidFill>
-          <a:ln>
-            <a:noFill/>
+          <a:ln w="9525">
+            <a:solidFill>
+              <a:srgbClr val="C9CFD6"/>
+            </a:solidFill>
           </a:ln>
           <a:effectLst/>
         </p:spPr>
@@ -10301,34 +10289,36 @@
             <a:r>
               <a:rPr sz="1200" b="1">
                 <a:solidFill>
-                  <a:srgbClr val="FFFFFF"/>
+                  <a:srgbClr val="6B7480"/>
                 </a:solidFill>
                 <a:latin typeface="Garamond"/>
               </a:rPr>
-              <a:t>T</a:t>
-            </a:r>
-          </a:p>
-        </p:txBody>
-      </p:sp>
-      <p:sp>
-        <p:nvSpPr>
-          <p:cNvPr id="14" name="Rectangle 13"/>
+              <a:t>9</a:t>
+            </a:r>
+          </a:p>
+        </p:txBody>
+      </p:sp>
+      <p:sp>
+        <p:nvSpPr>
+          <p:cNvPr id="16" name="Rectangle 15"/>
           <p:cNvSpPr/>
           <p:nvPr/>
         </p:nvSpPr>
         <p:spPr>
           <a:xfrm>
-            <a:off x="1426464" y="2807208"/>
-            <a:ext cx="548640" cy="548640"/>
+            <a:off x="6753415" y="1755648"/>
+            <a:ext cx="658939" cy="457200"/>
           </a:xfrm>
           <a:prstGeom prst="rect">
             <a:avLst/>
           </a:prstGeom>
           <a:solidFill>
-            <a:srgbClr val="1F3864"/>
+            <a:srgbClr val="FFFFFF"/>
           </a:solidFill>
-          <a:ln>
-            <a:noFill/>
+          <a:ln w="9525">
+            <a:solidFill>
+              <a:srgbClr val="C9CFD6"/>
+            </a:solidFill>
           </a:ln>
           <a:effectLst/>
         </p:spPr>
@@ -10354,25 +10344,25 @@
             <a:r>
               <a:rPr sz="1200" b="1">
                 <a:solidFill>
-                  <a:srgbClr val="FFFFFF"/>
+                  <a:srgbClr val="6B7480"/>
                 </a:solidFill>
                 <a:latin typeface="Garamond"/>
               </a:rPr>
-              <a:t>T</a:t>
-            </a:r>
-          </a:p>
-        </p:txBody>
-      </p:sp>
-      <p:sp>
-        <p:nvSpPr>
-          <p:cNvPr id="15" name="Rectangle 14"/>
+              <a:t>10</a:t>
+            </a:r>
+          </a:p>
+        </p:txBody>
+      </p:sp>
+      <p:sp>
+        <p:nvSpPr>
+          <p:cNvPr id="17" name="Rectangle 16"/>
           <p:cNvSpPr/>
           <p:nvPr/>
         </p:nvSpPr>
         <p:spPr>
           <a:xfrm>
-            <a:off x="2029967" y="2807208"/>
-            <a:ext cx="548640" cy="548640"/>
+            <a:off x="7412354" y="1755648"/>
+            <a:ext cx="658939" cy="457200"/>
           </a:xfrm>
           <a:prstGeom prst="rect">
             <a:avLst/>
@@ -10402,23 +10392,32 @@
           </a:fontRef>
         </p:style>
         <p:txBody>
-          <a:bodyPr rtlCol="0" anchor="ctr"/>
+          <a:bodyPr rtlCol="0" anchor="ctr" wrap="none"/>
           <a:lstStyle/>
           <a:p>
             <a:pPr algn="ctr"/>
-          </a:p>
-        </p:txBody>
-      </p:sp>
-      <p:sp>
-        <p:nvSpPr>
-          <p:cNvPr id="16" name="Rectangle 15"/>
+            <a:r>
+              <a:rPr sz="1200" b="1">
+                <a:solidFill>
+                  <a:srgbClr val="6B7480"/>
+                </a:solidFill>
+                <a:latin typeface="Garamond"/>
+              </a:rPr>
+              <a:t>11</a:t>
+            </a:r>
+          </a:p>
+        </p:txBody>
+      </p:sp>
+      <p:sp>
+        <p:nvSpPr>
+          <p:cNvPr id="18" name="Rectangle 17"/>
           <p:cNvSpPr/>
           <p:nvPr/>
         </p:nvSpPr>
         <p:spPr>
           <a:xfrm>
-            <a:off x="2633472" y="2807208"/>
-            <a:ext cx="548640" cy="548640"/>
+            <a:off x="8071294" y="1755648"/>
+            <a:ext cx="658939" cy="457200"/>
           </a:xfrm>
           <a:prstGeom prst="rect">
             <a:avLst/>
@@ -10448,34 +10447,41 @@
           </a:fontRef>
         </p:style>
         <p:txBody>
-          <a:bodyPr rtlCol="0" anchor="ctr"/>
+          <a:bodyPr rtlCol="0" anchor="ctr" wrap="none"/>
           <a:lstStyle/>
           <a:p>
             <a:pPr algn="ctr"/>
-          </a:p>
-        </p:txBody>
-      </p:sp>
-      <p:sp>
-        <p:nvSpPr>
-          <p:cNvPr id="17" name="Rectangle 16"/>
+            <a:r>
+              <a:rPr sz="1200" b="1">
+                <a:solidFill>
+                  <a:srgbClr val="6B7480"/>
+                </a:solidFill>
+                <a:latin typeface="Garamond"/>
+              </a:rPr>
+              <a:t>12</a:t>
+            </a:r>
+          </a:p>
+        </p:txBody>
+      </p:sp>
+      <p:sp>
+        <p:nvSpPr>
+          <p:cNvPr id="19" name="Rectangle 18"/>
           <p:cNvSpPr/>
           <p:nvPr/>
         </p:nvSpPr>
         <p:spPr>
           <a:xfrm>
-            <a:off x="4014215" y="2807208"/>
-            <a:ext cx="548640" cy="548640"/>
+            <a:off x="8730234" y="1755648"/>
+            <a:ext cx="658939" cy="457200"/>
           </a:xfrm>
           <a:prstGeom prst="rect">
             <a:avLst/>
           </a:prstGeom>
           <a:solidFill>
-            <a:srgbClr val="FFFFFF"/>
+            <a:srgbClr val="7B2530"/>
           </a:solidFill>
-          <a:ln w="9525">
-            <a:solidFill>
-              <a:srgbClr val="C9CFD6"/>
-            </a:solidFill>
+          <a:ln>
+            <a:noFill/>
           </a:ln>
           <a:effectLst/>
         </p:spPr>
@@ -10494,34 +10500,41 @@
           </a:fontRef>
         </p:style>
         <p:txBody>
-          <a:bodyPr rtlCol="0" anchor="ctr"/>
+          <a:bodyPr rtlCol="0" anchor="ctr" wrap="none"/>
           <a:lstStyle/>
           <a:p>
             <a:pPr algn="ctr"/>
-          </a:p>
-        </p:txBody>
-      </p:sp>
-      <p:sp>
-        <p:nvSpPr>
-          <p:cNvPr id="18" name="Rectangle 17"/>
+            <a:r>
+              <a:rPr sz="1200" b="1">
+                <a:solidFill>
+                  <a:srgbClr val="FFFFFF"/>
+                </a:solidFill>
+                <a:latin typeface="Garamond"/>
+              </a:rPr>
+              <a:t>13</a:t>
+            </a:r>
+          </a:p>
+        </p:txBody>
+      </p:sp>
+      <p:sp>
+        <p:nvSpPr>
+          <p:cNvPr id="20" name="Rectangle 19"/>
           <p:cNvSpPr/>
           <p:nvPr/>
         </p:nvSpPr>
         <p:spPr>
           <a:xfrm>
-            <a:off x="4617720" y="2807208"/>
-            <a:ext cx="548640" cy="548640"/>
+            <a:off x="9389173" y="1755648"/>
+            <a:ext cx="658939" cy="457200"/>
           </a:xfrm>
           <a:prstGeom prst="rect">
             <a:avLst/>
           </a:prstGeom>
           <a:solidFill>
-            <a:srgbClr val="FFFFFF"/>
+            <a:srgbClr val="7B2530"/>
           </a:solidFill>
-          <a:ln w="9525">
-            <a:solidFill>
-              <a:srgbClr val="C9CFD6"/>
-            </a:solidFill>
+          <a:ln>
+            <a:noFill/>
           </a:ln>
           <a:effectLst/>
         </p:spPr>
@@ -10540,34 +10553,41 @@
           </a:fontRef>
         </p:style>
         <p:txBody>
-          <a:bodyPr rtlCol="0" anchor="ctr"/>
+          <a:bodyPr rtlCol="0" anchor="ctr" wrap="none"/>
           <a:lstStyle/>
           <a:p>
             <a:pPr algn="ctr"/>
-          </a:p>
-        </p:txBody>
-      </p:sp>
-      <p:sp>
-        <p:nvSpPr>
-          <p:cNvPr id="19" name="Rectangle 18"/>
+            <a:r>
+              <a:rPr sz="1200" b="1">
+                <a:solidFill>
+                  <a:srgbClr val="FFFFFF"/>
+                </a:solidFill>
+                <a:latin typeface="Garamond"/>
+              </a:rPr>
+              <a:t>14</a:t>
+            </a:r>
+          </a:p>
+        </p:txBody>
+      </p:sp>
+      <p:sp>
+        <p:nvSpPr>
+          <p:cNvPr id="21" name="Rectangle 20"/>
           <p:cNvSpPr/>
           <p:nvPr/>
         </p:nvSpPr>
         <p:spPr>
           <a:xfrm>
-            <a:off x="5221224" y="2807208"/>
-            <a:ext cx="548640" cy="548640"/>
+            <a:off x="10048113" y="1755648"/>
+            <a:ext cx="658939" cy="457200"/>
           </a:xfrm>
           <a:prstGeom prst="rect">
             <a:avLst/>
           </a:prstGeom>
           <a:solidFill>
-            <a:srgbClr val="FFFFFF"/>
+            <a:srgbClr val="7B2530"/>
           </a:solidFill>
-          <a:ln w="9525">
-            <a:solidFill>
-              <a:srgbClr val="C9CFD6"/>
-            </a:solidFill>
+          <a:ln>
+            <a:noFill/>
           </a:ln>
           <a:effectLst/>
         </p:spPr>
@@ -10586,34 +10606,41 @@
           </a:fontRef>
         </p:style>
         <p:txBody>
-          <a:bodyPr rtlCol="0" anchor="ctr"/>
+          <a:bodyPr rtlCol="0" anchor="ctr" wrap="none"/>
           <a:lstStyle/>
           <a:p>
             <a:pPr algn="ctr"/>
-          </a:p>
-        </p:txBody>
-      </p:sp>
-      <p:sp>
-        <p:nvSpPr>
-          <p:cNvPr id="20" name="Rectangle 19"/>
+            <a:r>
+              <a:rPr sz="1200" b="1">
+                <a:solidFill>
+                  <a:srgbClr val="FFFFFF"/>
+                </a:solidFill>
+                <a:latin typeface="Garamond"/>
+              </a:rPr>
+              <a:t>15</a:t>
+            </a:r>
+          </a:p>
+        </p:txBody>
+      </p:sp>
+      <p:sp>
+        <p:nvSpPr>
+          <p:cNvPr id="22" name="Rectangle 21"/>
           <p:cNvSpPr/>
           <p:nvPr/>
         </p:nvSpPr>
         <p:spPr>
           <a:xfrm>
-            <a:off x="5824728" y="2807208"/>
-            <a:ext cx="548640" cy="548640"/>
+            <a:off x="10707052" y="1755648"/>
+            <a:ext cx="658939" cy="457200"/>
           </a:xfrm>
           <a:prstGeom prst="rect">
             <a:avLst/>
           </a:prstGeom>
           <a:solidFill>
-            <a:srgbClr val="FFFFFF"/>
+            <a:srgbClr val="7B2530"/>
           </a:solidFill>
-          <a:ln w="9525">
-            <a:solidFill>
-              <a:srgbClr val="C9CFD6"/>
-            </a:solidFill>
+          <a:ln>
+            <a:noFill/>
           </a:ln>
           <a:effectLst/>
         </p:spPr>
@@ -10632,65 +10659,32 @@
           </a:fontRef>
         </p:style>
         <p:txBody>
-          <a:bodyPr rtlCol="0" anchor="ctr"/>
+          <a:bodyPr rtlCol="0" anchor="ctr" wrap="none"/>
           <a:lstStyle/>
           <a:p>
             <a:pPr algn="ctr"/>
-          </a:p>
-        </p:txBody>
-      </p:sp>
-      <p:sp>
-        <p:nvSpPr>
-          <p:cNvPr id="21" name="TextBox 20"/>
-          <p:cNvSpPr txBox="1"/>
-          <p:nvPr/>
-        </p:nvSpPr>
-        <p:spPr>
-          <a:xfrm>
-            <a:off x="6748272" y="2916936"/>
-            <a:ext cx="4572000" cy="411480"/>
-          </a:xfrm>
-          <a:prstGeom prst="rect">
-            <a:avLst/>
-          </a:prstGeom>
-          <a:noFill/>
-        </p:spPr>
-        <p:txBody>
-          <a:bodyPr wrap="square" lIns="0" rIns="0" tIns="0" bIns="0">
-            <a:spAutoFit/>
-          </a:bodyPr>
-          <a:lstStyle/>
-          <a:p>
-            <a:pPr algn="l">
-              <a:lnSpc>
-                <a:spcPts val="2100"/>
-              </a:lnSpc>
-              <a:spcAft>
-                <a:spcPts val="0"/>
-              </a:spcAft>
-            </a:pPr>
-            <a:r>
-              <a:rPr sz="1400" b="1" i="0">
-                <a:solidFill>
-                  <a:srgbClr val="7B2530"/>
+            <a:r>
+              <a:rPr sz="1200" b="1">
+                <a:solidFill>
+                  <a:srgbClr val="FFFFFF"/>
                 </a:solidFill>
                 <a:latin typeface="Garamond"/>
               </a:rPr>
-              <a:t>leaver</a:t>
-            </a:r>
-          </a:p>
-        </p:txBody>
-      </p:sp>
-      <p:sp>
-        <p:nvSpPr>
-          <p:cNvPr id="22" name="Rectangle 21"/>
+              <a:t>16</a:t>
+            </a:r>
+          </a:p>
+        </p:txBody>
+      </p:sp>
+      <p:sp>
+        <p:nvSpPr>
+          <p:cNvPr id="23" name="Rectangle 22"/>
           <p:cNvSpPr/>
           <p:nvPr/>
         </p:nvSpPr>
         <p:spPr>
           <a:xfrm>
-            <a:off x="822960" y="3739896"/>
-            <a:ext cx="548640" cy="548640"/>
+            <a:off x="822960" y="1755648"/>
+            <a:ext cx="658939" cy="457200"/>
           </a:xfrm>
           <a:prstGeom prst="rect">
             <a:avLst/>
@@ -10736,25 +10730,23 @@
       </p:sp>
       <p:sp>
         <p:nvSpPr>
-          <p:cNvPr id="23" name="Rectangle 22"/>
+          <p:cNvPr id="24" name="Rectangle 23"/>
           <p:cNvSpPr/>
           <p:nvPr/>
         </p:nvSpPr>
         <p:spPr>
           <a:xfrm>
-            <a:off x="1426464" y="3739896"/>
-            <a:ext cx="548640" cy="548640"/>
+            <a:off x="1481899" y="1755648"/>
+            <a:ext cx="658939" cy="457200"/>
           </a:xfrm>
           <a:prstGeom prst="rect">
             <a:avLst/>
           </a:prstGeom>
           <a:solidFill>
-            <a:srgbClr val="FFFFFF"/>
+            <a:srgbClr val="1F3864"/>
           </a:solidFill>
-          <a:ln w="9525">
-            <a:solidFill>
-              <a:srgbClr val="C9CFD6"/>
-            </a:solidFill>
+          <a:ln>
+            <a:noFill/>
           </a:ln>
           <a:effectLst/>
         </p:spPr>
@@ -10773,34 +10765,41 @@
           </a:fontRef>
         </p:style>
         <p:txBody>
-          <a:bodyPr rtlCol="0" anchor="ctr"/>
+          <a:bodyPr rtlCol="0" anchor="ctr" wrap="none"/>
           <a:lstStyle/>
           <a:p>
             <a:pPr algn="ctr"/>
-          </a:p>
-        </p:txBody>
-      </p:sp>
-      <p:sp>
-        <p:nvSpPr>
-          <p:cNvPr id="24" name="Rectangle 23"/>
+            <a:r>
+              <a:rPr sz="1200" b="1">
+                <a:solidFill>
+                  <a:srgbClr val="FFFFFF"/>
+                </a:solidFill>
+                <a:latin typeface="Garamond"/>
+              </a:rPr>
+              <a:t>T</a:t>
+            </a:r>
+          </a:p>
+        </p:txBody>
+      </p:sp>
+      <p:sp>
+        <p:nvSpPr>
+          <p:cNvPr id="25" name="Rectangle 24"/>
           <p:cNvSpPr/>
           <p:nvPr/>
         </p:nvSpPr>
         <p:spPr>
           <a:xfrm>
-            <a:off x="2029967" y="3739896"/>
-            <a:ext cx="548640" cy="548640"/>
+            <a:off x="2140839" y="1755648"/>
+            <a:ext cx="658939" cy="457200"/>
           </a:xfrm>
           <a:prstGeom prst="rect">
             <a:avLst/>
           </a:prstGeom>
           <a:solidFill>
-            <a:srgbClr val="FFFFFF"/>
+            <a:srgbClr val="1F3864"/>
           </a:solidFill>
-          <a:ln w="9525">
-            <a:solidFill>
-              <a:srgbClr val="C9CFD6"/>
-            </a:solidFill>
+          <a:ln>
+            <a:noFill/>
           </a:ln>
           <a:effectLst/>
         </p:spPr>
@@ -10819,34 +10818,41 @@
           </a:fontRef>
         </p:style>
         <p:txBody>
-          <a:bodyPr rtlCol="0" anchor="ctr"/>
+          <a:bodyPr rtlCol="0" anchor="ctr" wrap="none"/>
           <a:lstStyle/>
           <a:p>
             <a:pPr algn="ctr"/>
-          </a:p>
-        </p:txBody>
-      </p:sp>
-      <p:sp>
-        <p:nvSpPr>
-          <p:cNvPr id="25" name="Rectangle 24"/>
+            <a:r>
+              <a:rPr sz="1200" b="1">
+                <a:solidFill>
+                  <a:srgbClr val="FFFFFF"/>
+                </a:solidFill>
+                <a:latin typeface="Garamond"/>
+              </a:rPr>
+              <a:t>T</a:t>
+            </a:r>
+          </a:p>
+        </p:txBody>
+      </p:sp>
+      <p:sp>
+        <p:nvSpPr>
+          <p:cNvPr id="26" name="Rectangle 25"/>
           <p:cNvSpPr/>
           <p:nvPr/>
         </p:nvSpPr>
         <p:spPr>
           <a:xfrm>
-            <a:off x="2633472" y="3739896"/>
-            <a:ext cx="548640" cy="548640"/>
+            <a:off x="2799778" y="1755648"/>
+            <a:ext cx="658939" cy="457200"/>
           </a:xfrm>
           <a:prstGeom prst="rect">
             <a:avLst/>
           </a:prstGeom>
           <a:solidFill>
-            <a:srgbClr val="FFFFFF"/>
+            <a:srgbClr val="1F3864"/>
           </a:solidFill>
-          <a:ln w="9525">
-            <a:solidFill>
-              <a:srgbClr val="C9CFD6"/>
-            </a:solidFill>
+          <a:ln>
+            <a:noFill/>
           </a:ln>
           <a:effectLst/>
         </p:spPr>
@@ -10865,34 +10871,41 @@
           </a:fontRef>
         </p:style>
         <p:txBody>
-          <a:bodyPr rtlCol="0" anchor="ctr"/>
+          <a:bodyPr rtlCol="0" anchor="ctr" wrap="none"/>
           <a:lstStyle/>
           <a:p>
             <a:pPr algn="ctr"/>
-          </a:p>
-        </p:txBody>
-      </p:sp>
-      <p:sp>
-        <p:nvSpPr>
-          <p:cNvPr id="26" name="Rectangle 25"/>
+            <a:r>
+              <a:rPr sz="1200" b="1">
+                <a:solidFill>
+                  <a:srgbClr val="FFFFFF"/>
+                </a:solidFill>
+                <a:latin typeface="Garamond"/>
+              </a:rPr>
+              <a:t>T</a:t>
+            </a:r>
+          </a:p>
+        </p:txBody>
+      </p:sp>
+      <p:sp>
+        <p:nvSpPr>
+          <p:cNvPr id="27" name="Rectangle 26"/>
           <p:cNvSpPr/>
           <p:nvPr/>
         </p:nvSpPr>
         <p:spPr>
           <a:xfrm>
-            <a:off x="4014215" y="3739896"/>
-            <a:ext cx="548640" cy="548640"/>
+            <a:off x="10707052" y="1755648"/>
+            <a:ext cx="658939" cy="457200"/>
           </a:xfrm>
           <a:prstGeom prst="rect">
             <a:avLst/>
           </a:prstGeom>
           <a:solidFill>
-            <a:srgbClr val="FFFFFF"/>
+            <a:srgbClr val="7B2530"/>
           </a:solidFill>
-          <a:ln w="9525">
-            <a:solidFill>
-              <a:srgbClr val="C9CFD6"/>
-            </a:solidFill>
+          <a:ln>
+            <a:noFill/>
           </a:ln>
           <a:effectLst/>
         </p:spPr>
@@ -10911,34 +10924,83 @@
           </a:fontRef>
         </p:style>
         <p:txBody>
-          <a:bodyPr rtlCol="0" anchor="ctr"/>
+          <a:bodyPr rtlCol="0" anchor="ctr" wrap="none"/>
           <a:lstStyle/>
           <a:p>
             <a:pPr algn="ctr"/>
-          </a:p>
-        </p:txBody>
-      </p:sp>
-      <p:sp>
-        <p:nvSpPr>
-          <p:cNvPr id="27" name="Rectangle 26"/>
+            <a:r>
+              <a:rPr sz="1200" b="1">
+                <a:solidFill>
+                  <a:srgbClr val="FFFFFF"/>
+                </a:solidFill>
+                <a:latin typeface="Garamond"/>
+              </a:rPr>
+              <a:t>T</a:t>
+            </a:r>
+          </a:p>
+        </p:txBody>
+      </p:sp>
+      <p:sp>
+        <p:nvSpPr>
+          <p:cNvPr id="28" name="TextBox 27"/>
+          <p:cNvSpPr txBox="1"/>
+          <p:nvPr/>
+        </p:nvSpPr>
+        <p:spPr>
+          <a:xfrm>
+            <a:off x="3733037" y="1773936"/>
+            <a:ext cx="4722876" cy="420624"/>
+          </a:xfrm>
+          <a:prstGeom prst="rect">
+            <a:avLst/>
+          </a:prstGeom>
+          <a:noFill/>
+        </p:spPr>
+        <p:txBody>
+          <a:bodyPr wrap="square" lIns="0" rIns="0" tIns="0" bIns="0" anchor="ctr">
+            <a:spAutoFit/>
+          </a:bodyPr>
+          <a:lstStyle/>
+          <a:p>
+            <a:pPr algn="ctr">
+              <a:lnSpc>
+                <a:spcPts val="2250"/>
+              </a:lnSpc>
+              <a:spcAft>
+                <a:spcPts val="0"/>
+              </a:spcAft>
+            </a:pPr>
+            <a:r>
+              <a:rPr sz="1500" b="1" i="0">
+                <a:solidFill>
+                  <a:srgbClr val="1F3864"/>
+                </a:solidFill>
+                <a:latin typeface="Garamond"/>
+              </a:rPr>
+              <a:t>stayer</a:t>
+            </a:r>
+          </a:p>
+        </p:txBody>
+      </p:sp>
+      <p:sp>
+        <p:nvSpPr>
+          <p:cNvPr id="29" name="Rectangle 28"/>
           <p:cNvSpPr/>
           <p:nvPr/>
         </p:nvSpPr>
         <p:spPr>
           <a:xfrm>
-            <a:off x="4617720" y="3739896"/>
-            <a:ext cx="548640" cy="548640"/>
+            <a:off x="822960" y="1755648"/>
+            <a:ext cx="658939" cy="457200"/>
           </a:xfrm>
           <a:prstGeom prst="rect">
             <a:avLst/>
           </a:prstGeom>
           <a:solidFill>
-            <a:srgbClr val="FFFFFF"/>
+            <a:srgbClr val="1F3864"/>
           </a:solidFill>
-          <a:ln w="9525">
-            <a:solidFill>
-              <a:srgbClr val="C9CFD6"/>
-            </a:solidFill>
+          <a:ln>
+            <a:noFill/>
           </a:ln>
           <a:effectLst/>
         </p:spPr>
@@ -10957,34 +11019,41 @@
           </a:fontRef>
         </p:style>
         <p:txBody>
-          <a:bodyPr rtlCol="0" anchor="ctr"/>
+          <a:bodyPr rtlCol="0" anchor="ctr" wrap="none"/>
           <a:lstStyle/>
           <a:p>
             <a:pPr algn="ctr"/>
-          </a:p>
-        </p:txBody>
-      </p:sp>
-      <p:sp>
-        <p:nvSpPr>
-          <p:cNvPr id="28" name="Rectangle 27"/>
+            <a:r>
+              <a:rPr sz="1200" b="1">
+                <a:solidFill>
+                  <a:srgbClr val="FFFFFF"/>
+                </a:solidFill>
+                <a:latin typeface="Garamond"/>
+              </a:rPr>
+              <a:t>T</a:t>
+            </a:r>
+          </a:p>
+        </p:txBody>
+      </p:sp>
+      <p:sp>
+        <p:nvSpPr>
+          <p:cNvPr id="30" name="Rectangle 29"/>
           <p:cNvSpPr/>
           <p:nvPr/>
         </p:nvSpPr>
         <p:spPr>
           <a:xfrm>
-            <a:off x="5221224" y="3739896"/>
-            <a:ext cx="548640" cy="548640"/>
+            <a:off x="1481899" y="1755648"/>
+            <a:ext cx="658939" cy="457200"/>
           </a:xfrm>
           <a:prstGeom prst="rect">
             <a:avLst/>
           </a:prstGeom>
           <a:solidFill>
-            <a:srgbClr val="FFFFFF"/>
+            <a:srgbClr val="1F3864"/>
           </a:solidFill>
-          <a:ln w="9525">
-            <a:solidFill>
-              <a:srgbClr val="C9CFD6"/>
-            </a:solidFill>
+          <a:ln>
+            <a:noFill/>
           </a:ln>
           <a:effectLst/>
         </p:spPr>
@@ -11003,34 +11072,83 @@
           </a:fontRef>
         </p:style>
         <p:txBody>
-          <a:bodyPr rtlCol="0" anchor="ctr"/>
+          <a:bodyPr rtlCol="0" anchor="ctr" wrap="none"/>
           <a:lstStyle/>
           <a:p>
             <a:pPr algn="ctr"/>
-          </a:p>
-        </p:txBody>
-      </p:sp>
-      <p:sp>
-        <p:nvSpPr>
-          <p:cNvPr id="29" name="Rectangle 28"/>
+            <a:r>
+              <a:rPr sz="1200" b="1">
+                <a:solidFill>
+                  <a:srgbClr val="FFFFFF"/>
+                </a:solidFill>
+                <a:latin typeface="Garamond"/>
+              </a:rPr>
+              <a:t>T</a:t>
+            </a:r>
+          </a:p>
+        </p:txBody>
+      </p:sp>
+      <p:sp>
+        <p:nvSpPr>
+          <p:cNvPr id="31" name="TextBox 30"/>
+          <p:cNvSpPr txBox="1"/>
+          <p:nvPr/>
+        </p:nvSpPr>
+        <p:spPr>
+          <a:xfrm>
+            <a:off x="3733037" y="1773936"/>
+            <a:ext cx="4722876" cy="420624"/>
+          </a:xfrm>
+          <a:prstGeom prst="rect">
+            <a:avLst/>
+          </a:prstGeom>
+          <a:noFill/>
+        </p:spPr>
+        <p:txBody>
+          <a:bodyPr wrap="square" lIns="0" rIns="0" tIns="0" bIns="0" anchor="ctr">
+            <a:spAutoFit/>
+          </a:bodyPr>
+          <a:lstStyle/>
+          <a:p>
+            <a:pPr algn="ctr">
+              <a:lnSpc>
+                <a:spcPts val="2250"/>
+              </a:lnSpc>
+              <a:spcAft>
+                <a:spcPts val="0"/>
+              </a:spcAft>
+            </a:pPr>
+            <a:r>
+              <a:rPr sz="1500" b="1" i="0">
+                <a:solidFill>
+                  <a:srgbClr val="7B2530"/>
+                </a:solidFill>
+                <a:latin typeface="Garamond"/>
+              </a:rPr>
+              <a:t>leaver</a:t>
+            </a:r>
+          </a:p>
+        </p:txBody>
+      </p:sp>
+      <p:sp>
+        <p:nvSpPr>
+          <p:cNvPr id="32" name="Rectangle 31"/>
           <p:cNvSpPr/>
           <p:nvPr/>
         </p:nvSpPr>
         <p:spPr>
           <a:xfrm>
-            <a:off x="5824728" y="3739896"/>
-            <a:ext cx="548640" cy="548640"/>
+            <a:off x="822960" y="1755648"/>
+            <a:ext cx="658939" cy="457200"/>
           </a:xfrm>
           <a:prstGeom prst="rect">
             <a:avLst/>
           </a:prstGeom>
           <a:solidFill>
-            <a:srgbClr val="FFFFFF"/>
+            <a:srgbClr val="1F3864"/>
           </a:solidFill>
-          <a:ln w="9525">
-            <a:solidFill>
-              <a:srgbClr val="C9CFD6"/>
-            </a:solidFill>
+          <a:ln>
+            <a:noFill/>
           </a:ln>
           <a:effectLst/>
         </p:spPr>
@@ -11049,23 +11167,32 @@
           </a:fontRef>
         </p:style>
         <p:txBody>
-          <a:bodyPr rtlCol="0" anchor="ctr"/>
+          <a:bodyPr rtlCol="0" anchor="ctr" wrap="none"/>
           <a:lstStyle/>
           <a:p>
             <a:pPr algn="ctr"/>
-          </a:p>
-        </p:txBody>
-      </p:sp>
-      <p:sp>
-        <p:nvSpPr>
-          <p:cNvPr id="30" name="TextBox 29"/>
+            <a:r>
+              <a:rPr sz="1200" b="1">
+                <a:solidFill>
+                  <a:srgbClr val="FFFFFF"/>
+                </a:solidFill>
+                <a:latin typeface="Garamond"/>
+              </a:rPr>
+              <a:t>T</a:t>
+            </a:r>
+          </a:p>
+        </p:txBody>
+      </p:sp>
+      <p:sp>
+        <p:nvSpPr>
+          <p:cNvPr id="33" name="TextBox 32"/>
           <p:cNvSpPr txBox="1"/>
           <p:nvPr/>
         </p:nvSpPr>
         <p:spPr>
           <a:xfrm>
-            <a:off x="6748272" y="3849624"/>
-            <a:ext cx="4572000" cy="411480"/>
+            <a:off x="3733037" y="1773936"/>
+            <a:ext cx="4722876" cy="420624"/>
           </a:xfrm>
           <a:prstGeom prst="rect">
             <a:avLst/>
@@ -11073,1245 +11200,34 @@
           <a:noFill/>
         </p:spPr>
         <p:txBody>
-          <a:bodyPr wrap="square" lIns="0" rIns="0" tIns="0" bIns="0">
+          <a:bodyPr wrap="square" lIns="0" rIns="0" tIns="0" bIns="0" anchor="ctr">
             <a:spAutoFit/>
           </a:bodyPr>
           <a:lstStyle/>
           <a:p>
-            <a:pPr algn="l">
+            <a:pPr algn="ctr">
               <a:lnSpc>
-                <a:spcPts val="2100"/>
+                <a:spcPts val="2250"/>
               </a:lnSpc>
               <a:spcAft>
                 <a:spcPts val="0"/>
               </a:spcAft>
             </a:pPr>
             <a:r>
-              <a:rPr sz="1400" b="1" i="0">
+              <a:rPr sz="1500" b="1" i="0">
                 <a:solidFill>
                   <a:srgbClr val="6B7480"/>
                 </a:solidFill>
                 <a:latin typeface="Garamond"/>
               </a:rPr>
-              <a:t>excluded</a:t>
-            </a:r>
-          </a:p>
-        </p:txBody>
-      </p:sp>
-      <p:sp>
-        <p:nvSpPr>
-          <p:cNvPr id="31" name="TextBox 30"/>
-          <p:cNvSpPr txBox="1"/>
-          <p:nvPr/>
-        </p:nvSpPr>
-        <p:spPr>
-          <a:xfrm>
-            <a:off x="822960" y="4745736"/>
-            <a:ext cx="4572000" cy="320040"/>
-          </a:xfrm>
-          <a:prstGeom prst="rect">
-            <a:avLst/>
-          </a:prstGeom>
-          <a:noFill/>
-        </p:spPr>
-        <p:txBody>
-          <a:bodyPr wrap="square" lIns="0" rIns="0" tIns="0" bIns="0">
-            <a:spAutoFit/>
-          </a:bodyPr>
-          <a:lstStyle/>
-          <a:p>
-            <a:pPr algn="l">
-              <a:lnSpc>
-                <a:spcPts val="1800"/>
-              </a:lnSpc>
-              <a:spcAft>
-                <a:spcPts val="0"/>
-              </a:spcAft>
-            </a:pPr>
-            <a:r>
-              <a:rPr sz="1200" b="0" i="1">
-                <a:solidFill>
-                  <a:srgbClr val="6B7480"/>
-                </a:solidFill>
-                <a:latin typeface="Garamond"/>
-              </a:rPr>
-              <a:t>Year 1</a:t>
-            </a:r>
-          </a:p>
-        </p:txBody>
-      </p:sp>
-      <p:sp>
-        <p:nvSpPr>
-          <p:cNvPr id="32" name="TextBox 31"/>
-          <p:cNvSpPr txBox="1"/>
-          <p:nvPr/>
-        </p:nvSpPr>
-        <p:spPr>
-          <a:xfrm>
-            <a:off x="5806440" y="4745736"/>
-            <a:ext cx="4572000" cy="320040"/>
-          </a:xfrm>
-          <a:prstGeom prst="rect">
-            <a:avLst/>
-          </a:prstGeom>
-          <a:noFill/>
-        </p:spPr>
-        <p:txBody>
-          <a:bodyPr wrap="square" lIns="0" rIns="0" tIns="0" bIns="0">
-            <a:spAutoFit/>
-          </a:bodyPr>
-          <a:lstStyle/>
-          <a:p>
-            <a:pPr algn="l">
-              <a:lnSpc>
-                <a:spcPts val="1800"/>
-              </a:lnSpc>
-              <a:spcAft>
-                <a:spcPts val="0"/>
-              </a:spcAft>
-            </a:pPr>
-            <a:r>
-              <a:rPr sz="1200" b="0" i="1">
-                <a:solidFill>
-                  <a:srgbClr val="6B7480"/>
-                </a:solidFill>
-                <a:latin typeface="Garamond"/>
-              </a:rPr>
-              <a:t>Year 2</a:t>
-            </a:r>
-          </a:p>
-        </p:txBody>
-      </p:sp>
-      <p:sp>
-        <p:nvSpPr>
-          <p:cNvPr id="33" name="TextBox 32"/>
-          <p:cNvSpPr txBox="1"/>
-          <p:nvPr/>
-        </p:nvSpPr>
-        <p:spPr>
-          <a:xfrm>
-            <a:off x="822960" y="5148071"/>
-            <a:ext cx="10515600" cy="365760"/>
-          </a:xfrm>
-          <a:prstGeom prst="rect">
-            <a:avLst/>
-          </a:prstGeom>
-          <a:noFill/>
-        </p:spPr>
-        <p:txBody>
-          <a:bodyPr wrap="square" lIns="0" rIns="0" tIns="0" bIns="0">
-            <a:spAutoFit/>
-          </a:bodyPr>
-          <a:lstStyle/>
-          <a:p>
-            <a:pPr algn="l">
-              <a:lnSpc>
-                <a:spcPts val="1800"/>
-              </a:lnSpc>
-              <a:spcAft>
-                <a:spcPts val="0"/>
-              </a:spcAft>
-            </a:pPr>
-            <a:r>
-              <a:rPr sz="1200" b="0" i="1">
-                <a:solidFill>
-                  <a:srgbClr val="6B7480"/>
-                </a:solidFill>
-                <a:latin typeface="Garamond"/>
-              </a:rPr>
-              <a:t>Filled cells: observed teaching.</a:t>
-            </a:r>
-          </a:p>
-        </p:txBody>
-      </p:sp>
-    </p:spTree>
-  </p:cSld>
-  <p:clrMapOvr>
-    <a:masterClrMapping/>
-  </p:clrMapOvr>
-</p:sld>
-</file>
-
-<file path=ppt/slides/slide39.xml><?xml version="1.0" encoding="utf-8"?>
-<p:sld xmlns:a="http://schemas.openxmlformats.org/drawingml/2006/main" xmlns:p="http://schemas.openxmlformats.org/presentationml/2006/main" xmlns:r="http://schemas.openxmlformats.org/officeDocument/2006/relationships">
-  <p:cSld>
-    <p:spTree>
-      <p:nvGrpSpPr>
-        <p:cNvPr id="1" name=""/>
-        <p:cNvGrpSpPr/>
-        <p:nvPr/>
-      </p:nvGrpSpPr>
-      <p:grpSpPr/>
-      <p:sp>
-        <p:nvSpPr>
-          <p:cNvPr id="2" name="Rectangle 1"/>
-          <p:cNvSpPr/>
-          <p:nvPr/>
-        </p:nvSpPr>
-        <p:spPr>
-          <a:xfrm>
-            <a:off x="0" y="-27432"/>
-            <a:ext cx="12198096" cy="594360"/>
-          </a:xfrm>
-          <a:prstGeom prst="rect">
-            <a:avLst/>
-          </a:prstGeom>
-          <a:solidFill>
-            <a:srgbClr val="00549F"/>
-          </a:solidFill>
-          <a:ln>
-            <a:noFill/>
-          </a:ln>
-          <a:effectLst/>
-        </p:spPr>
-        <p:style>
-          <a:lnRef idx="1">
-            <a:schemeClr val="accent1"/>
-          </a:lnRef>
-          <a:fillRef idx="3">
-            <a:schemeClr val="accent1"/>
-          </a:fillRef>
-          <a:effectRef idx="2">
-            <a:schemeClr val="accent1"/>
-          </a:effectRef>
-          <a:fontRef idx="minor">
-            <a:schemeClr val="lt1"/>
-          </a:fontRef>
-        </p:style>
-        <p:txBody>
-          <a:bodyPr rtlCol="0" anchor="ctr"/>
-          <a:lstStyle/>
-          <a:p>
-            <a:pPr algn="ctr"/>
-          </a:p>
-        </p:txBody>
-      </p:sp>
-      <p:sp>
-        <p:nvSpPr>
-          <p:cNvPr id="3" name="TextBox 2"/>
-          <p:cNvSpPr txBox="1"/>
-          <p:nvPr/>
-        </p:nvSpPr>
-        <p:spPr>
-          <a:xfrm>
-            <a:off x="685800" y="868680"/>
-            <a:ext cx="9875520" cy="548640"/>
-          </a:xfrm>
-          <a:prstGeom prst="rect">
-            <a:avLst/>
-          </a:prstGeom>
-          <a:noFill/>
-        </p:spPr>
-        <p:txBody>
-          <a:bodyPr wrap="square" lIns="0" rIns="0" tIns="0" bIns="0"/>
-          <a:lstStyle/>
-          <a:p>
-            <a:pPr algn="l"/>
-            <a:r>
-              <a:rPr sz="2800" b="1">
-                <a:solidFill>
-                  <a:srgbClr val="26456E"/>
-                </a:solidFill>
-                <a:latin typeface="Garamond"/>
-              </a:rPr>
-              <a:t>Measuring attrition: definitions</a:t>
-            </a:r>
-          </a:p>
-        </p:txBody>
-      </p:sp>
-      <p:sp>
-        <p:nvSpPr>
-          <p:cNvPr id="4" name="TextBox 3"/>
-          <p:cNvSpPr txBox="1"/>
-          <p:nvPr/>
-        </p:nvSpPr>
-        <p:spPr>
-          <a:xfrm>
-            <a:off x="822960" y="1417320"/>
-            <a:ext cx="3200400" cy="320040"/>
-          </a:xfrm>
-          <a:prstGeom prst="rect">
-            <a:avLst/>
-          </a:prstGeom>
-          <a:noFill/>
-        </p:spPr>
-        <p:txBody>
-          <a:bodyPr wrap="square" lIns="0" rIns="0" tIns="0" bIns="0">
-            <a:spAutoFit/>
-          </a:bodyPr>
-          <a:lstStyle/>
-          <a:p>
-            <a:pPr algn="l">
-              <a:lnSpc>
-                <a:spcPts val="1950"/>
-              </a:lnSpc>
-              <a:spcAft>
-                <a:spcPts val="0"/>
-              </a:spcAft>
-            </a:pPr>
-            <a:r>
-              <a:rPr sz="1300" b="1" i="0">
-                <a:solidFill>
-                  <a:srgbClr val="1F3864"/>
-                </a:solidFill>
-                <a:latin typeface="Garamond"/>
-              </a:rPr>
-              <a:t>Year 1: interviews 1–4</a:t>
-            </a:r>
-          </a:p>
-        </p:txBody>
-      </p:sp>
-      <p:sp>
-        <p:nvSpPr>
-          <p:cNvPr id="5" name="TextBox 4"/>
-          <p:cNvSpPr txBox="1"/>
-          <p:nvPr/>
-        </p:nvSpPr>
-        <p:spPr>
-          <a:xfrm>
-            <a:off x="4480560" y="1417320"/>
-            <a:ext cx="3291840" cy="320040"/>
-          </a:xfrm>
-          <a:prstGeom prst="rect">
-            <a:avLst/>
-          </a:prstGeom>
-          <a:noFill/>
-        </p:spPr>
-        <p:txBody>
-          <a:bodyPr wrap="square" lIns="0" rIns="0" tIns="0" bIns="0">
-            <a:spAutoFit/>
-          </a:bodyPr>
-          <a:lstStyle/>
-          <a:p>
-            <a:pPr algn="ctr">
-              <a:lnSpc>
-                <a:spcPts val="1875"/>
-              </a:lnSpc>
-              <a:spcAft>
-                <a:spcPts val="0"/>
-              </a:spcAft>
-            </a:pPr>
-            <a:r>
-              <a:rPr sz="1250" b="0" i="1">
-                <a:solidFill>
-                  <a:srgbClr val="6B7480"/>
-                </a:solidFill>
-                <a:latin typeface="Garamond"/>
-              </a:rPr>
-              <a:t>8 months out of the sample</a:t>
-            </a:r>
-          </a:p>
-        </p:txBody>
-      </p:sp>
-      <p:sp>
-        <p:nvSpPr>
-          <p:cNvPr id="6" name="TextBox 5"/>
-          <p:cNvSpPr txBox="1"/>
-          <p:nvPr/>
-        </p:nvSpPr>
-        <p:spPr>
-          <a:xfrm>
-            <a:off x="8229600" y="1417320"/>
-            <a:ext cx="3200400" cy="320040"/>
-          </a:xfrm>
-          <a:prstGeom prst="rect">
-            <a:avLst/>
-          </a:prstGeom>
-          <a:noFill/>
-        </p:spPr>
-        <p:txBody>
-          <a:bodyPr wrap="square" lIns="0" rIns="0" tIns="0" bIns="0">
-            <a:spAutoFit/>
-          </a:bodyPr>
-          <a:lstStyle/>
-          <a:p>
-            <a:pPr algn="r">
-              <a:lnSpc>
-                <a:spcPts val="1950"/>
-              </a:lnSpc>
-              <a:spcAft>
-                <a:spcPts val="0"/>
-              </a:spcAft>
-            </a:pPr>
-            <a:r>
-              <a:rPr sz="1300" b="1" i="0">
-                <a:solidFill>
-                  <a:srgbClr val="7B2530"/>
-                </a:solidFill>
-                <a:latin typeface="Garamond"/>
-              </a:rPr>
-              <a:t>Year 2: interviews 5–8</a:t>
-            </a:r>
-          </a:p>
-        </p:txBody>
-      </p:sp>
-      <p:sp>
-        <p:nvSpPr>
-          <p:cNvPr id="7" name="Rectangle 6"/>
-          <p:cNvSpPr/>
-          <p:nvPr/>
-        </p:nvSpPr>
-        <p:spPr>
-          <a:xfrm>
-            <a:off x="822960" y="1755648"/>
-            <a:ext cx="658939" cy="457200"/>
-          </a:xfrm>
-          <a:prstGeom prst="rect">
-            <a:avLst/>
-          </a:prstGeom>
-          <a:solidFill>
-            <a:srgbClr val="1F3864"/>
-          </a:solidFill>
-          <a:ln>
-            <a:noFill/>
-          </a:ln>
-          <a:effectLst/>
-        </p:spPr>
-        <p:style>
-          <a:lnRef idx="1">
-            <a:schemeClr val="accent1"/>
-          </a:lnRef>
-          <a:fillRef idx="3">
-            <a:schemeClr val="accent1"/>
-          </a:fillRef>
-          <a:effectRef idx="2">
-            <a:schemeClr val="accent1"/>
-          </a:effectRef>
-          <a:fontRef idx="minor">
-            <a:schemeClr val="lt1"/>
-          </a:fontRef>
-        </p:style>
-        <p:txBody>
-          <a:bodyPr rtlCol="0" anchor="ctr" wrap="none"/>
-          <a:lstStyle/>
-          <a:p>
-            <a:pPr algn="ctr"/>
-            <a:r>
-              <a:rPr sz="1200" b="1">
-                <a:solidFill>
-                  <a:srgbClr val="FFFFFF"/>
-                </a:solidFill>
-                <a:latin typeface="Garamond"/>
-              </a:rPr>
-              <a:t>1</a:t>
-            </a:r>
-          </a:p>
-        </p:txBody>
-      </p:sp>
-      <p:sp>
-        <p:nvSpPr>
-          <p:cNvPr id="8" name="Rectangle 7"/>
-          <p:cNvSpPr/>
-          <p:nvPr/>
-        </p:nvSpPr>
-        <p:spPr>
-          <a:xfrm>
-            <a:off x="1481899" y="1755648"/>
-            <a:ext cx="658939" cy="457200"/>
-          </a:xfrm>
-          <a:prstGeom prst="rect">
-            <a:avLst/>
-          </a:prstGeom>
-          <a:solidFill>
-            <a:srgbClr val="1F3864"/>
-          </a:solidFill>
-          <a:ln>
-            <a:noFill/>
-          </a:ln>
-          <a:effectLst/>
-        </p:spPr>
-        <p:style>
-          <a:lnRef idx="1">
-            <a:schemeClr val="accent1"/>
-          </a:lnRef>
-          <a:fillRef idx="3">
-            <a:schemeClr val="accent1"/>
-          </a:fillRef>
-          <a:effectRef idx="2">
-            <a:schemeClr val="accent1"/>
-          </a:effectRef>
-          <a:fontRef idx="minor">
-            <a:schemeClr val="lt1"/>
-          </a:fontRef>
-        </p:style>
-        <p:txBody>
-          <a:bodyPr rtlCol="0" anchor="ctr" wrap="none"/>
-          <a:lstStyle/>
-          <a:p>
-            <a:pPr algn="ctr"/>
-            <a:r>
-              <a:rPr sz="1200" b="1">
-                <a:solidFill>
-                  <a:srgbClr val="FFFFFF"/>
-                </a:solidFill>
-                <a:latin typeface="Garamond"/>
-              </a:rPr>
-              <a:t>2</a:t>
-            </a:r>
-          </a:p>
-        </p:txBody>
-      </p:sp>
-      <p:sp>
-        <p:nvSpPr>
-          <p:cNvPr id="9" name="Rectangle 8"/>
-          <p:cNvSpPr/>
-          <p:nvPr/>
-        </p:nvSpPr>
-        <p:spPr>
-          <a:xfrm>
-            <a:off x="2140839" y="1755648"/>
-            <a:ext cx="658939" cy="457200"/>
-          </a:xfrm>
-          <a:prstGeom prst="rect">
-            <a:avLst/>
-          </a:prstGeom>
-          <a:solidFill>
-            <a:srgbClr val="1F3864"/>
-          </a:solidFill>
-          <a:ln>
-            <a:noFill/>
-          </a:ln>
-          <a:effectLst/>
-        </p:spPr>
-        <p:style>
-          <a:lnRef idx="1">
-            <a:schemeClr val="accent1"/>
-          </a:lnRef>
-          <a:fillRef idx="3">
-            <a:schemeClr val="accent1"/>
-          </a:fillRef>
-          <a:effectRef idx="2">
-            <a:schemeClr val="accent1"/>
-          </a:effectRef>
-          <a:fontRef idx="minor">
-            <a:schemeClr val="lt1"/>
-          </a:fontRef>
-        </p:style>
-        <p:txBody>
-          <a:bodyPr rtlCol="0" anchor="ctr" wrap="none"/>
-          <a:lstStyle/>
-          <a:p>
-            <a:pPr algn="ctr"/>
-            <a:r>
-              <a:rPr sz="1200" b="1">
-                <a:solidFill>
-                  <a:srgbClr val="FFFFFF"/>
-                </a:solidFill>
-                <a:latin typeface="Garamond"/>
-              </a:rPr>
-              <a:t>3</a:t>
-            </a:r>
-          </a:p>
-        </p:txBody>
-      </p:sp>
-      <p:sp>
-        <p:nvSpPr>
-          <p:cNvPr id="10" name="Rectangle 9"/>
-          <p:cNvSpPr/>
-          <p:nvPr/>
-        </p:nvSpPr>
-        <p:spPr>
-          <a:xfrm>
-            <a:off x="2799778" y="1755648"/>
-            <a:ext cx="658939" cy="457200"/>
-          </a:xfrm>
-          <a:prstGeom prst="rect">
-            <a:avLst/>
-          </a:prstGeom>
-          <a:solidFill>
-            <a:srgbClr val="1F3864"/>
-          </a:solidFill>
-          <a:ln>
-            <a:noFill/>
-          </a:ln>
-          <a:effectLst/>
-        </p:spPr>
-        <p:style>
-          <a:lnRef idx="1">
-            <a:schemeClr val="accent1"/>
-          </a:lnRef>
-          <a:fillRef idx="3">
-            <a:schemeClr val="accent1"/>
-          </a:fillRef>
-          <a:effectRef idx="2">
-            <a:schemeClr val="accent1"/>
-          </a:effectRef>
-          <a:fontRef idx="minor">
-            <a:schemeClr val="lt1"/>
-          </a:fontRef>
-        </p:style>
-        <p:txBody>
-          <a:bodyPr rtlCol="0" anchor="ctr" wrap="none"/>
-          <a:lstStyle/>
-          <a:p>
-            <a:pPr algn="ctr"/>
-            <a:r>
-              <a:rPr sz="1200" b="1">
-                <a:solidFill>
-                  <a:srgbClr val="FFFFFF"/>
-                </a:solidFill>
-                <a:latin typeface="Garamond"/>
-              </a:rPr>
-              <a:t>4</a:t>
-            </a:r>
-          </a:p>
-        </p:txBody>
-      </p:sp>
-      <p:sp>
-        <p:nvSpPr>
-          <p:cNvPr id="11" name="Rectangle 10"/>
-          <p:cNvSpPr/>
-          <p:nvPr/>
-        </p:nvSpPr>
-        <p:spPr>
-          <a:xfrm>
-            <a:off x="3458718" y="1755648"/>
-            <a:ext cx="658939" cy="457200"/>
-          </a:xfrm>
-          <a:prstGeom prst="rect">
-            <a:avLst/>
-          </a:prstGeom>
-          <a:solidFill>
-            <a:srgbClr val="FFFFFF"/>
-          </a:solidFill>
-          <a:ln w="9525">
-            <a:solidFill>
-              <a:srgbClr val="C9CFD6"/>
-            </a:solidFill>
-          </a:ln>
-          <a:effectLst/>
-        </p:spPr>
-        <p:style>
-          <a:lnRef idx="1">
-            <a:schemeClr val="accent1"/>
-          </a:lnRef>
-          <a:fillRef idx="3">
-            <a:schemeClr val="accent1"/>
-          </a:fillRef>
-          <a:effectRef idx="2">
-            <a:schemeClr val="accent1"/>
-          </a:effectRef>
-          <a:fontRef idx="minor">
-            <a:schemeClr val="lt1"/>
-          </a:fontRef>
-        </p:style>
-        <p:txBody>
-          <a:bodyPr rtlCol="0" anchor="ctr" wrap="none"/>
-          <a:lstStyle/>
-          <a:p>
-            <a:pPr algn="ctr"/>
-            <a:r>
-              <a:rPr sz="1200" b="1">
-                <a:solidFill>
-                  <a:srgbClr val="6B7480"/>
-                </a:solidFill>
-                <a:latin typeface="Garamond"/>
-              </a:rPr>
-              <a:t>5</a:t>
-            </a:r>
-          </a:p>
-        </p:txBody>
-      </p:sp>
-      <p:sp>
-        <p:nvSpPr>
-          <p:cNvPr id="12" name="Rectangle 11"/>
-          <p:cNvSpPr/>
-          <p:nvPr/>
-        </p:nvSpPr>
-        <p:spPr>
-          <a:xfrm>
-            <a:off x="4117657" y="1755648"/>
-            <a:ext cx="658939" cy="457200"/>
-          </a:xfrm>
-          <a:prstGeom prst="rect">
-            <a:avLst/>
-          </a:prstGeom>
-          <a:solidFill>
-            <a:srgbClr val="FFFFFF"/>
-          </a:solidFill>
-          <a:ln w="9525">
-            <a:solidFill>
-              <a:srgbClr val="C9CFD6"/>
-            </a:solidFill>
-          </a:ln>
-          <a:effectLst/>
-        </p:spPr>
-        <p:style>
-          <a:lnRef idx="1">
-            <a:schemeClr val="accent1"/>
-          </a:lnRef>
-          <a:fillRef idx="3">
-            <a:schemeClr val="accent1"/>
-          </a:fillRef>
-          <a:effectRef idx="2">
-            <a:schemeClr val="accent1"/>
-          </a:effectRef>
-          <a:fontRef idx="minor">
-            <a:schemeClr val="lt1"/>
-          </a:fontRef>
-        </p:style>
-        <p:txBody>
-          <a:bodyPr rtlCol="0" anchor="ctr" wrap="none"/>
-          <a:lstStyle/>
-          <a:p>
-            <a:pPr algn="ctr"/>
-            <a:r>
-              <a:rPr sz="1200" b="1">
-                <a:solidFill>
-                  <a:srgbClr val="6B7480"/>
-                </a:solidFill>
-                <a:latin typeface="Garamond"/>
-              </a:rPr>
-              <a:t>6</a:t>
-            </a:r>
-          </a:p>
-        </p:txBody>
-      </p:sp>
-      <p:sp>
-        <p:nvSpPr>
-          <p:cNvPr id="13" name="Rectangle 12"/>
-          <p:cNvSpPr/>
-          <p:nvPr/>
-        </p:nvSpPr>
-        <p:spPr>
-          <a:xfrm>
-            <a:off x="4776597" y="1755648"/>
-            <a:ext cx="658939" cy="457200"/>
-          </a:xfrm>
-          <a:prstGeom prst="rect">
-            <a:avLst/>
-          </a:prstGeom>
-          <a:solidFill>
-            <a:srgbClr val="FFFFFF"/>
-          </a:solidFill>
-          <a:ln w="9525">
-            <a:solidFill>
-              <a:srgbClr val="C9CFD6"/>
-            </a:solidFill>
-          </a:ln>
-          <a:effectLst/>
-        </p:spPr>
-        <p:style>
-          <a:lnRef idx="1">
-            <a:schemeClr val="accent1"/>
-          </a:lnRef>
-          <a:fillRef idx="3">
-            <a:schemeClr val="accent1"/>
-          </a:fillRef>
-          <a:effectRef idx="2">
-            <a:schemeClr val="accent1"/>
-          </a:effectRef>
-          <a:fontRef idx="minor">
-            <a:schemeClr val="lt1"/>
-          </a:fontRef>
-        </p:style>
-        <p:txBody>
-          <a:bodyPr rtlCol="0" anchor="ctr" wrap="none"/>
-          <a:lstStyle/>
-          <a:p>
-            <a:pPr algn="ctr"/>
-            <a:r>
-              <a:rPr sz="1200" b="1">
-                <a:solidFill>
-                  <a:srgbClr val="6B7480"/>
-                </a:solidFill>
-                <a:latin typeface="Garamond"/>
-              </a:rPr>
-              <a:t>7</a:t>
-            </a:r>
-          </a:p>
-        </p:txBody>
-      </p:sp>
-      <p:sp>
-        <p:nvSpPr>
-          <p:cNvPr id="14" name="Rectangle 13"/>
-          <p:cNvSpPr/>
-          <p:nvPr/>
-        </p:nvSpPr>
-        <p:spPr>
-          <a:xfrm>
-            <a:off x="5435536" y="1755648"/>
-            <a:ext cx="658939" cy="457200"/>
-          </a:xfrm>
-          <a:prstGeom prst="rect">
-            <a:avLst/>
-          </a:prstGeom>
-          <a:solidFill>
-            <a:srgbClr val="FFFFFF"/>
-          </a:solidFill>
-          <a:ln w="9525">
-            <a:solidFill>
-              <a:srgbClr val="C9CFD6"/>
-            </a:solidFill>
-          </a:ln>
-          <a:effectLst/>
-        </p:spPr>
-        <p:style>
-          <a:lnRef idx="1">
-            <a:schemeClr val="accent1"/>
-          </a:lnRef>
-          <a:fillRef idx="3">
-            <a:schemeClr val="accent1"/>
-          </a:fillRef>
-          <a:effectRef idx="2">
-            <a:schemeClr val="accent1"/>
-          </a:effectRef>
-          <a:fontRef idx="minor">
-            <a:schemeClr val="lt1"/>
-          </a:fontRef>
-        </p:style>
-        <p:txBody>
-          <a:bodyPr rtlCol="0" anchor="ctr" wrap="none"/>
-          <a:lstStyle/>
-          <a:p>
-            <a:pPr algn="ctr"/>
-            <a:r>
-              <a:rPr sz="1200" b="1">
-                <a:solidFill>
-                  <a:srgbClr val="6B7480"/>
-                </a:solidFill>
-                <a:latin typeface="Garamond"/>
-              </a:rPr>
-              <a:t>8</a:t>
-            </a:r>
-          </a:p>
-        </p:txBody>
-      </p:sp>
-      <p:sp>
-        <p:nvSpPr>
-          <p:cNvPr id="15" name="Rectangle 14"/>
-          <p:cNvSpPr/>
-          <p:nvPr/>
-        </p:nvSpPr>
-        <p:spPr>
-          <a:xfrm>
-            <a:off x="6094476" y="1755648"/>
-            <a:ext cx="658939" cy="457200"/>
-          </a:xfrm>
-          <a:prstGeom prst="rect">
-            <a:avLst/>
-          </a:prstGeom>
-          <a:solidFill>
-            <a:srgbClr val="FFFFFF"/>
-          </a:solidFill>
-          <a:ln w="9525">
-            <a:solidFill>
-              <a:srgbClr val="C9CFD6"/>
-            </a:solidFill>
-          </a:ln>
-          <a:effectLst/>
-        </p:spPr>
-        <p:style>
-          <a:lnRef idx="1">
-            <a:schemeClr val="accent1"/>
-          </a:lnRef>
-          <a:fillRef idx="3">
-            <a:schemeClr val="accent1"/>
-          </a:fillRef>
-          <a:effectRef idx="2">
-            <a:schemeClr val="accent1"/>
-          </a:effectRef>
-          <a:fontRef idx="minor">
-            <a:schemeClr val="lt1"/>
-          </a:fontRef>
-        </p:style>
-        <p:txBody>
-          <a:bodyPr rtlCol="0" anchor="ctr" wrap="none"/>
-          <a:lstStyle/>
-          <a:p>
-            <a:pPr algn="ctr"/>
-            <a:r>
-              <a:rPr sz="1200" b="1">
-                <a:solidFill>
-                  <a:srgbClr val="6B7480"/>
-                </a:solidFill>
-                <a:latin typeface="Garamond"/>
-              </a:rPr>
-              <a:t>9</a:t>
-            </a:r>
-          </a:p>
-        </p:txBody>
-      </p:sp>
-      <p:sp>
-        <p:nvSpPr>
-          <p:cNvPr id="16" name="Rectangle 15"/>
-          <p:cNvSpPr/>
-          <p:nvPr/>
-        </p:nvSpPr>
-        <p:spPr>
-          <a:xfrm>
-            <a:off x="6753415" y="1755648"/>
-            <a:ext cx="658939" cy="457200"/>
-          </a:xfrm>
-          <a:prstGeom prst="rect">
-            <a:avLst/>
-          </a:prstGeom>
-          <a:solidFill>
-            <a:srgbClr val="FFFFFF"/>
-          </a:solidFill>
-          <a:ln w="9525">
-            <a:solidFill>
-              <a:srgbClr val="C9CFD6"/>
-            </a:solidFill>
-          </a:ln>
-          <a:effectLst/>
-        </p:spPr>
-        <p:style>
-          <a:lnRef idx="1">
-            <a:schemeClr val="accent1"/>
-          </a:lnRef>
-          <a:fillRef idx="3">
-            <a:schemeClr val="accent1"/>
-          </a:fillRef>
-          <a:effectRef idx="2">
-            <a:schemeClr val="accent1"/>
-          </a:effectRef>
-          <a:fontRef idx="minor">
-            <a:schemeClr val="lt1"/>
-          </a:fontRef>
-        </p:style>
-        <p:txBody>
-          <a:bodyPr rtlCol="0" anchor="ctr" wrap="none"/>
-          <a:lstStyle/>
-          <a:p>
-            <a:pPr algn="ctr"/>
-            <a:r>
-              <a:rPr sz="1200" b="1">
-                <a:solidFill>
-                  <a:srgbClr val="6B7480"/>
-                </a:solidFill>
-                <a:latin typeface="Garamond"/>
-              </a:rPr>
-              <a:t>10</a:t>
-            </a:r>
-          </a:p>
-        </p:txBody>
-      </p:sp>
-      <p:sp>
-        <p:nvSpPr>
-          <p:cNvPr id="17" name="Rectangle 16"/>
-          <p:cNvSpPr/>
-          <p:nvPr/>
-        </p:nvSpPr>
-        <p:spPr>
-          <a:xfrm>
-            <a:off x="7412354" y="1755648"/>
-            <a:ext cx="658939" cy="457200"/>
-          </a:xfrm>
-          <a:prstGeom prst="rect">
-            <a:avLst/>
-          </a:prstGeom>
-          <a:solidFill>
-            <a:srgbClr val="FFFFFF"/>
-          </a:solidFill>
-          <a:ln w="9525">
-            <a:solidFill>
-              <a:srgbClr val="C9CFD6"/>
-            </a:solidFill>
-          </a:ln>
-          <a:effectLst/>
-        </p:spPr>
-        <p:style>
-          <a:lnRef idx="1">
-            <a:schemeClr val="accent1"/>
-          </a:lnRef>
-          <a:fillRef idx="3">
-            <a:schemeClr val="accent1"/>
-          </a:fillRef>
-          <a:effectRef idx="2">
-            <a:schemeClr val="accent1"/>
-          </a:effectRef>
-          <a:fontRef idx="minor">
-            <a:schemeClr val="lt1"/>
-          </a:fontRef>
-        </p:style>
-        <p:txBody>
-          <a:bodyPr rtlCol="0" anchor="ctr" wrap="none"/>
-          <a:lstStyle/>
-          <a:p>
-            <a:pPr algn="ctr"/>
-            <a:r>
-              <a:rPr sz="1200" b="1">
-                <a:solidFill>
-                  <a:srgbClr val="6B7480"/>
-                </a:solidFill>
-                <a:latin typeface="Garamond"/>
-              </a:rPr>
-              <a:t>11</a:t>
-            </a:r>
-          </a:p>
-        </p:txBody>
-      </p:sp>
-      <p:sp>
-        <p:nvSpPr>
-          <p:cNvPr id="18" name="Rectangle 17"/>
-          <p:cNvSpPr/>
-          <p:nvPr/>
-        </p:nvSpPr>
-        <p:spPr>
-          <a:xfrm>
-            <a:off x="8071294" y="1755648"/>
-            <a:ext cx="658939" cy="457200"/>
-          </a:xfrm>
-          <a:prstGeom prst="rect">
-            <a:avLst/>
-          </a:prstGeom>
-          <a:solidFill>
-            <a:srgbClr val="FFFFFF"/>
-          </a:solidFill>
-          <a:ln w="9525">
-            <a:solidFill>
-              <a:srgbClr val="C9CFD6"/>
-            </a:solidFill>
-          </a:ln>
-          <a:effectLst/>
-        </p:spPr>
-        <p:style>
-          <a:lnRef idx="1">
-            <a:schemeClr val="accent1"/>
-          </a:lnRef>
-          <a:fillRef idx="3">
-            <a:schemeClr val="accent1"/>
-          </a:fillRef>
-          <a:effectRef idx="2">
-            <a:schemeClr val="accent1"/>
-          </a:effectRef>
-          <a:fontRef idx="minor">
-            <a:schemeClr val="lt1"/>
-          </a:fontRef>
-        </p:style>
-        <p:txBody>
-          <a:bodyPr rtlCol="0" anchor="ctr" wrap="none"/>
-          <a:lstStyle/>
-          <a:p>
-            <a:pPr algn="ctr"/>
-            <a:r>
-              <a:rPr sz="1200" b="1">
-                <a:solidFill>
-                  <a:srgbClr val="6B7480"/>
-                </a:solidFill>
-                <a:latin typeface="Garamond"/>
-              </a:rPr>
-              <a:t>12</a:t>
-            </a:r>
-          </a:p>
-        </p:txBody>
-      </p:sp>
-      <p:sp>
-        <p:nvSpPr>
-          <p:cNvPr id="19" name="Rectangle 18"/>
-          <p:cNvSpPr/>
-          <p:nvPr/>
-        </p:nvSpPr>
-        <p:spPr>
-          <a:xfrm>
-            <a:off x="8730234" y="1755648"/>
-            <a:ext cx="658939" cy="457200"/>
-          </a:xfrm>
-          <a:prstGeom prst="rect">
-            <a:avLst/>
-          </a:prstGeom>
-          <a:solidFill>
-            <a:srgbClr val="7B2530"/>
-          </a:solidFill>
-          <a:ln>
-            <a:noFill/>
-          </a:ln>
-          <a:effectLst/>
-        </p:spPr>
-        <p:style>
-          <a:lnRef idx="1">
-            <a:schemeClr val="accent1"/>
-          </a:lnRef>
-          <a:fillRef idx="3">
-            <a:schemeClr val="accent1"/>
-          </a:fillRef>
-          <a:effectRef idx="2">
-            <a:schemeClr val="accent1"/>
-          </a:effectRef>
-          <a:fontRef idx="minor">
-            <a:schemeClr val="lt1"/>
-          </a:fontRef>
-        </p:style>
-        <p:txBody>
-          <a:bodyPr rtlCol="0" anchor="ctr" wrap="none"/>
-          <a:lstStyle/>
-          <a:p>
-            <a:pPr algn="ctr"/>
-            <a:r>
-              <a:rPr sz="1200" b="1">
-                <a:solidFill>
-                  <a:srgbClr val="FFFFFF"/>
-                </a:solidFill>
-                <a:latin typeface="Garamond"/>
-              </a:rPr>
-              <a:t>13</a:t>
-            </a:r>
-          </a:p>
-        </p:txBody>
-      </p:sp>
-      <p:sp>
-        <p:nvSpPr>
-          <p:cNvPr id="20" name="Rectangle 19"/>
-          <p:cNvSpPr/>
-          <p:nvPr/>
-        </p:nvSpPr>
-        <p:spPr>
-          <a:xfrm>
-            <a:off x="9389173" y="1755648"/>
-            <a:ext cx="658939" cy="457200"/>
-          </a:xfrm>
-          <a:prstGeom prst="rect">
-            <a:avLst/>
-          </a:prstGeom>
-          <a:solidFill>
-            <a:srgbClr val="7B2530"/>
-          </a:solidFill>
-          <a:ln>
-            <a:noFill/>
-          </a:ln>
-          <a:effectLst/>
-        </p:spPr>
-        <p:style>
-          <a:lnRef idx="1">
-            <a:schemeClr val="accent1"/>
-          </a:lnRef>
-          <a:fillRef idx="3">
-            <a:schemeClr val="accent1"/>
-          </a:fillRef>
-          <a:effectRef idx="2">
-            <a:schemeClr val="accent1"/>
-          </a:effectRef>
-          <a:fontRef idx="minor">
-            <a:schemeClr val="lt1"/>
-          </a:fontRef>
-        </p:style>
-        <p:txBody>
-          <a:bodyPr rtlCol="0" anchor="ctr" wrap="none"/>
-          <a:lstStyle/>
-          <a:p>
-            <a:pPr algn="ctr"/>
-            <a:r>
-              <a:rPr sz="1200" b="1">
-                <a:solidFill>
-                  <a:srgbClr val="FFFFFF"/>
-                </a:solidFill>
-                <a:latin typeface="Garamond"/>
-              </a:rPr>
-              <a:t>14</a:t>
-            </a:r>
-          </a:p>
-        </p:txBody>
-      </p:sp>
-      <p:sp>
-        <p:nvSpPr>
-          <p:cNvPr id="21" name="Rectangle 20"/>
-          <p:cNvSpPr/>
-          <p:nvPr/>
-        </p:nvSpPr>
-        <p:spPr>
-          <a:xfrm>
-            <a:off x="10048113" y="1755648"/>
-            <a:ext cx="658939" cy="457200"/>
-          </a:xfrm>
-          <a:prstGeom prst="rect">
-            <a:avLst/>
-          </a:prstGeom>
-          <a:solidFill>
-            <a:srgbClr val="7B2530"/>
-          </a:solidFill>
-          <a:ln>
-            <a:noFill/>
-          </a:ln>
-          <a:effectLst/>
-        </p:spPr>
-        <p:style>
-          <a:lnRef idx="1">
-            <a:schemeClr val="accent1"/>
-          </a:lnRef>
-          <a:fillRef idx="3">
-            <a:schemeClr val="accent1"/>
-          </a:fillRef>
-          <a:effectRef idx="2">
-            <a:schemeClr val="accent1"/>
-          </a:effectRef>
-          <a:fontRef idx="minor">
-            <a:schemeClr val="lt1"/>
-          </a:fontRef>
-        </p:style>
-        <p:txBody>
-          <a:bodyPr rtlCol="0" anchor="ctr" wrap="none"/>
-          <a:lstStyle/>
-          <a:p>
-            <a:pPr algn="ctr"/>
-            <a:r>
-              <a:rPr sz="1200" b="1">
-                <a:solidFill>
-                  <a:srgbClr val="FFFFFF"/>
-                </a:solidFill>
-                <a:latin typeface="Garamond"/>
-              </a:rPr>
-              <a:t>15</a:t>
-            </a:r>
-          </a:p>
-        </p:txBody>
-      </p:sp>
-      <p:sp>
-        <p:nvSpPr>
-          <p:cNvPr id="22" name="Rectangle 21"/>
-          <p:cNvSpPr/>
-          <p:nvPr/>
-        </p:nvSpPr>
-        <p:spPr>
-          <a:xfrm>
-            <a:off x="10707052" y="1755648"/>
-            <a:ext cx="658939" cy="457200"/>
-          </a:xfrm>
-          <a:prstGeom prst="rect">
-            <a:avLst/>
-          </a:prstGeom>
-          <a:solidFill>
-            <a:srgbClr val="7B2530"/>
-          </a:solidFill>
-          <a:ln>
-            <a:noFill/>
-          </a:ln>
-          <a:effectLst/>
-        </p:spPr>
-        <p:style>
-          <a:lnRef idx="1">
-            <a:schemeClr val="accent1"/>
-          </a:lnRef>
-          <a:fillRef idx="3">
-            <a:schemeClr val="accent1"/>
-          </a:fillRef>
-          <a:effectRef idx="2">
-            <a:schemeClr val="accent1"/>
-          </a:effectRef>
-          <a:fontRef idx="minor">
-            <a:schemeClr val="lt1"/>
-          </a:fontRef>
-        </p:style>
-        <p:txBody>
-          <a:bodyPr rtlCol="0" anchor="ctr" wrap="none"/>
-          <a:lstStyle/>
-          <a:p>
-            <a:pPr algn="ctr"/>
-            <a:r>
-              <a:rPr sz="1200" b="1">
-                <a:solidFill>
-                  <a:srgbClr val="FFFFFF"/>
-                </a:solidFill>
-                <a:latin typeface="Garamond"/>
-              </a:rPr>
-              <a:t>16</a:t>
-            </a:r>
-          </a:p>
-        </p:txBody>
-      </p:sp>
-      <p:sp>
-        <p:nvSpPr>
-          <p:cNvPr id="23" name="TextBox 22"/>
+              <a:t>not a teacher</a:t>
+            </a:r>
+          </a:p>
+        </p:txBody>
+      </p:sp>
+      <p:sp>
+        <p:nvSpPr>
+          <p:cNvPr id="49" name="TextBox 48"/>
           <p:cNvSpPr txBox="1"/>
           <p:nvPr/>
         </p:nvSpPr>
@@ -12353,7 +11269,7 @@
       </p:sp>
       <p:cxnSp>
         <p:nvCxnSpPr>
-          <p:cNvPr id="24" name="Connector 23"/>
+          <p:cNvPr id="50" name="Connector 49"/>
           <p:cNvCxnSpPr/>
           <p:nvPr/>
         </p:nvCxnSpPr>
@@ -12388,7 +11304,7 @@
       </p:cxnSp>
       <p:sp>
         <p:nvSpPr>
-          <p:cNvPr id="25" name="TextBox 24"/>
+          <p:cNvPr id="51" name="TextBox 50"/>
           <p:cNvSpPr txBox="1"/>
           <p:nvPr/>
         </p:nvSpPr>
@@ -12430,7 +11346,7 @@
       </p:sp>
       <p:sp>
         <p:nvSpPr>
-          <p:cNvPr id="26" name="TextBox 25"/>
+          <p:cNvPr id="52" name="TextBox 51"/>
           <p:cNvSpPr txBox="1"/>
           <p:nvPr/>
         </p:nvSpPr>
@@ -12472,7 +11388,7 @@
       </p:sp>
       <p:sp>
         <p:nvSpPr>
-          <p:cNvPr id="27" name="TextBox 26"/>
+          <p:cNvPr id="53" name="TextBox 52"/>
           <p:cNvSpPr txBox="1"/>
           <p:nvPr/>
         </p:nvSpPr>
@@ -12514,7 +11430,7 @@
       </p:sp>
       <p:sp>
         <p:nvSpPr>
-          <p:cNvPr id="28" name="TextBox 27"/>
+          <p:cNvPr id="54" name="TextBox 53"/>
           <p:cNvSpPr txBox="1"/>
           <p:nvPr/>
         </p:nvSpPr>
@@ -12556,7 +11472,7 @@
       </p:sp>
       <p:sp>
         <p:nvSpPr>
-          <p:cNvPr id="29" name="TextBox 28"/>
+          <p:cNvPr id="55" name="TextBox 54"/>
           <p:cNvSpPr txBox="1"/>
           <p:nvPr/>
         </p:nvSpPr>
@@ -12598,7 +11514,7 @@
       </p:sp>
       <p:sp>
         <p:nvSpPr>
-          <p:cNvPr id="30" name="TextBox 29"/>
+          <p:cNvPr id="56" name="TextBox 55"/>
           <p:cNvSpPr txBox="1"/>
           <p:nvPr/>
         </p:nvSpPr>
@@ -12640,7 +11556,7 @@
       </p:sp>
       <p:cxnSp>
         <p:nvCxnSpPr>
-          <p:cNvPr id="31" name="Connector 30"/>
+          <p:cNvPr id="57" name="Connector 56"/>
           <p:cNvCxnSpPr/>
           <p:nvPr/>
         </p:nvCxnSpPr>
@@ -12675,7 +11591,7 @@
       </p:cxnSp>
       <p:sp>
         <p:nvSpPr>
-          <p:cNvPr id="32" name="TextBox 31"/>
+          <p:cNvPr id="58" name="TextBox 57"/>
           <p:cNvSpPr txBox="1"/>
           <p:nvPr/>
         </p:nvSpPr>
@@ -12717,7 +11633,7 @@
       </p:sp>
       <p:sp>
         <p:nvSpPr>
-          <p:cNvPr id="33" name="TextBox 32"/>
+          <p:cNvPr id="59" name="TextBox 58"/>
           <p:cNvSpPr txBox="1"/>
           <p:nvPr/>
         </p:nvSpPr>
@@ -12759,7 +11675,7 @@
       </p:sp>
       <p:cxnSp>
         <p:nvCxnSpPr>
-          <p:cNvPr id="34" name="Connector 33"/>
+          <p:cNvPr id="60" name="Connector 59"/>
           <p:cNvCxnSpPr/>
           <p:nvPr/>
         </p:nvCxnSpPr>
@@ -12794,7 +11710,7 @@
       </p:cxnSp>
       <p:sp>
         <p:nvSpPr>
-          <p:cNvPr id="35" name="TextBox 34"/>
+          <p:cNvPr id="61" name="TextBox 60"/>
           <p:cNvSpPr txBox="1"/>
           <p:nvPr/>
         </p:nvSpPr>
@@ -12836,7 +11752,7 @@
       </p:sp>
       <p:sp>
         <p:nvSpPr>
-          <p:cNvPr id="36" name="TextBox 35"/>
+          <p:cNvPr id="62" name="TextBox 61"/>
           <p:cNvSpPr txBox="1"/>
           <p:nvPr/>
         </p:nvSpPr>
@@ -12878,7 +11794,7 @@
       </p:sp>
       <p:sp>
         <p:nvSpPr>
-          <p:cNvPr id="37" name="TextBox 36"/>
+          <p:cNvPr id="63" name="TextBox 62"/>
           <p:cNvSpPr txBox="1"/>
           <p:nvPr/>
         </p:nvSpPr>
@@ -12920,7 +11836,7 @@
       </p:sp>
       <p:sp>
         <p:nvSpPr>
-          <p:cNvPr id="38" name="TextBox 37"/>
+          <p:cNvPr id="64" name="TextBox 63"/>
           <p:cNvSpPr txBox="1"/>
           <p:nvPr/>
         </p:nvSpPr>
@@ -12962,7 +11878,7 @@
       </p:sp>
       <p:sp>
         <p:nvSpPr>
-          <p:cNvPr id="39" name="TextBox 38"/>
+          <p:cNvPr id="65" name="TextBox 64"/>
           <p:cNvSpPr txBox="1"/>
           <p:nvPr/>
         </p:nvSpPr>
@@ -13004,7 +11920,7 @@
       </p:sp>
       <p:sp>
         <p:nvSpPr>
-          <p:cNvPr id="40" name="TextBox 39"/>
+          <p:cNvPr id="66" name="TextBox 65"/>
           <p:cNvSpPr txBox="1"/>
           <p:nvPr/>
         </p:nvSpPr>
@@ -13046,7 +11962,7 @@
       </p:sp>
       <p:sp>
         <p:nvSpPr>
-          <p:cNvPr id="41" name="TextBox 40"/>
+          <p:cNvPr id="67" name="TextBox 66"/>
           <p:cNvSpPr txBox="1"/>
           <p:nvPr/>
         </p:nvSpPr>
@@ -13088,7 +12004,7 @@
       </p:sp>
       <p:sp>
         <p:nvSpPr>
-          <p:cNvPr id="42" name="TextBox 41"/>
+          <p:cNvPr id="68" name="TextBox 67"/>
           <p:cNvSpPr txBox="1"/>
           <p:nvPr/>
         </p:nvSpPr>
@@ -13130,7 +12046,7 @@
       </p:sp>
       <p:sp>
         <p:nvSpPr>
-          <p:cNvPr id="43" name="TextBox 42"/>
+          <p:cNvPr id="69" name="TextBox 68"/>
           <p:cNvSpPr txBox="1"/>
           <p:nvPr/>
         </p:nvSpPr>
@@ -13172,7 +12088,7 @@
       </p:sp>
       <p:sp>
         <p:nvSpPr>
-          <p:cNvPr id="44" name="TextBox 43"/>
+          <p:cNvPr id="70" name="TextBox 69"/>
           <p:cNvSpPr txBox="1"/>
           <p:nvPr/>
         </p:nvSpPr>
@@ -13214,7 +12130,7 @@
       </p:sp>
       <p:sp>
         <p:nvSpPr>
-          <p:cNvPr id="45" name="TextBox 44"/>
+          <p:cNvPr id="71" name="TextBox 70"/>
           <p:cNvSpPr txBox="1"/>
           <p:nvPr/>
         </p:nvSpPr>
@@ -13256,7 +12172,7 @@
       </p:sp>
       <p:sp>
         <p:nvSpPr>
-          <p:cNvPr id="46" name="TextBox 45"/>
+          <p:cNvPr id="72" name="TextBox 71"/>
           <p:cNvSpPr txBox="1"/>
           <p:nvPr/>
         </p:nvSpPr>
@@ -13298,7 +12214,7 @@
       </p:sp>
       <p:cxnSp>
         <p:nvCxnSpPr>
-          <p:cNvPr id="47" name="Connector 46"/>
+          <p:cNvPr id="73" name="Connector 72"/>
           <p:cNvCxnSpPr/>
           <p:nvPr/>
         </p:nvCxnSpPr>
@@ -13331,6 +12247,762 @@
           </a:fontRef>
         </p:style>
       </p:cxnSp>
+    </p:spTree>
+  </p:cSld>
+  <p:clrMapOvr>
+    <a:masterClrMapping/>
+  </p:clrMapOvr>
+  <p:timing>
+    <p:tnLst>
+      <p:par>
+        <p:cTn id="1" dur="indefinite" restart="never" nodeType="tmRoot">
+          <p:childTnLst>
+            <p:seq concurrent="1" nextAc="seek">
+              <p:cTn id="2" dur="indefinite" nodeType="mainSeq">
+                <p:childTnLst>
+                  <p:par>
+                    <p:cTn id="15" fill="hold">
+                      <p:stCondLst>
+                        <p:cond delay="indefinite"/>
+                      </p:stCondLst>
+                      <p:childTnLst>
+                        <p:par>
+                          <p:cTn id="16" fill="hold">
+                            <p:stCondLst>
+                              <p:cond delay="0"/>
+                            </p:stCondLst>
+                            <p:childTnLst>
+                              <p:par>
+                                <p:cTn id="3" presetID="1" presetClass="entr" presetSubtype="0" fill="hold" grpId="0" nodeType="clickEffect">
+                                  <p:stCondLst>
+                                    <p:cond delay="0"/>
+                                  </p:stCondLst>
+                                  <p:childTnLst>
+                                    <p:set>
+                                      <p:cBhvr>
+                                        <p:cTn id="4" dur="1" fill="hold">
+                                          <p:stCondLst>
+                                            <p:cond delay="0"/>
+                                          </p:stCondLst>
+                                        </p:cTn>
+                                        <p:tgtEl>
+                                          <p:spTgt spid="23"/>
+                                        </p:tgtEl>
+                                        <p:attrNameLst>
+                                          <p:attrName>style.visibility</p:attrName>
+                                        </p:attrNameLst>
+                                      </p:cBhvr>
+                                      <p:to>
+                                        <p:strVal val="visible"/>
+                                      </p:to>
+                                    </p:set>
+                                  </p:childTnLst>
+                                </p:cTn>
+                              </p:par>
+                              <p:par>
+                                <p:cTn id="5" presetID="1" presetClass="entr" presetSubtype="0" fill="hold" grpId="0" nodeType="withEffect">
+                                  <p:stCondLst>
+                                    <p:cond delay="0"/>
+                                  </p:stCondLst>
+                                  <p:childTnLst>
+                                    <p:set>
+                                      <p:cBhvr>
+                                        <p:cTn id="6" dur="1" fill="hold">
+                                          <p:stCondLst>
+                                            <p:cond delay="0"/>
+                                          </p:stCondLst>
+                                        </p:cTn>
+                                        <p:tgtEl>
+                                          <p:spTgt spid="24"/>
+                                        </p:tgtEl>
+                                        <p:attrNameLst>
+                                          <p:attrName>style.visibility</p:attrName>
+                                        </p:attrNameLst>
+                                      </p:cBhvr>
+                                      <p:to>
+                                        <p:strVal val="visible"/>
+                                      </p:to>
+                                    </p:set>
+                                  </p:childTnLst>
+                                </p:cTn>
+                              </p:par>
+                              <p:par>
+                                <p:cTn id="7" presetID="1" presetClass="entr" presetSubtype="0" fill="hold" grpId="0" nodeType="withEffect">
+                                  <p:stCondLst>
+                                    <p:cond delay="0"/>
+                                  </p:stCondLst>
+                                  <p:childTnLst>
+                                    <p:set>
+                                      <p:cBhvr>
+                                        <p:cTn id="8" dur="1" fill="hold">
+                                          <p:stCondLst>
+                                            <p:cond delay="0"/>
+                                          </p:stCondLst>
+                                        </p:cTn>
+                                        <p:tgtEl>
+                                          <p:spTgt spid="25"/>
+                                        </p:tgtEl>
+                                        <p:attrNameLst>
+                                          <p:attrName>style.visibility</p:attrName>
+                                        </p:attrNameLst>
+                                      </p:cBhvr>
+                                      <p:to>
+                                        <p:strVal val="visible"/>
+                                      </p:to>
+                                    </p:set>
+                                  </p:childTnLst>
+                                </p:cTn>
+                              </p:par>
+                              <p:par>
+                                <p:cTn id="9" presetID="1" presetClass="entr" presetSubtype="0" fill="hold" grpId="0" nodeType="withEffect">
+                                  <p:stCondLst>
+                                    <p:cond delay="0"/>
+                                  </p:stCondLst>
+                                  <p:childTnLst>
+                                    <p:set>
+                                      <p:cBhvr>
+                                        <p:cTn id="10" dur="1" fill="hold">
+                                          <p:stCondLst>
+                                            <p:cond delay="0"/>
+                                          </p:stCondLst>
+                                        </p:cTn>
+                                        <p:tgtEl>
+                                          <p:spTgt spid="26"/>
+                                        </p:tgtEl>
+                                        <p:attrNameLst>
+                                          <p:attrName>style.visibility</p:attrName>
+                                        </p:attrNameLst>
+                                      </p:cBhvr>
+                                      <p:to>
+                                        <p:strVal val="visible"/>
+                                      </p:to>
+                                    </p:set>
+                                  </p:childTnLst>
+                                </p:cTn>
+                              </p:par>
+                              <p:par>
+                                <p:cTn id="11" presetID="1" presetClass="entr" presetSubtype="0" fill="hold" grpId="0" nodeType="withEffect">
+                                  <p:stCondLst>
+                                    <p:cond delay="0"/>
+                                  </p:stCondLst>
+                                  <p:childTnLst>
+                                    <p:set>
+                                      <p:cBhvr>
+                                        <p:cTn id="12" dur="1" fill="hold">
+                                          <p:stCondLst>
+                                            <p:cond delay="0"/>
+                                          </p:stCondLst>
+                                        </p:cTn>
+                                        <p:tgtEl>
+                                          <p:spTgt spid="27"/>
+                                        </p:tgtEl>
+                                        <p:attrNameLst>
+                                          <p:attrName>style.visibility</p:attrName>
+                                        </p:attrNameLst>
+                                      </p:cBhvr>
+                                      <p:to>
+                                        <p:strVal val="visible"/>
+                                      </p:to>
+                                    </p:set>
+                                  </p:childTnLst>
+                                </p:cTn>
+                              </p:par>
+                              <p:par>
+                                <p:cTn id="13" presetID="1" presetClass="entr" presetSubtype="0" fill="hold" grpId="0" nodeType="withEffect">
+                                  <p:stCondLst>
+                                    <p:cond delay="0"/>
+                                  </p:stCondLst>
+                                  <p:childTnLst>
+                                    <p:set>
+                                      <p:cBhvr>
+                                        <p:cTn id="14" dur="1" fill="hold">
+                                          <p:stCondLst>
+                                            <p:cond delay="0"/>
+                                          </p:stCondLst>
+                                        </p:cTn>
+                                        <p:tgtEl>
+                                          <p:spTgt spid="28"/>
+                                        </p:tgtEl>
+                                        <p:attrNameLst>
+                                          <p:attrName>style.visibility</p:attrName>
+                                        </p:attrNameLst>
+                                      </p:cBhvr>
+                                      <p:to>
+                                        <p:strVal val="visible"/>
+                                      </p:to>
+                                    </p:set>
+                                  </p:childTnLst>
+                                </p:cTn>
+                              </p:par>
+                            </p:childTnLst>
+                          </p:cTn>
+                        </p:par>
+                      </p:childTnLst>
+                    </p:cTn>
+                  </p:par>
+                  <p:par>
+                    <p:cTn id="35" fill="hold">
+                      <p:stCondLst>
+                        <p:cond delay="indefinite"/>
+                      </p:stCondLst>
+                      <p:childTnLst>
+                        <p:par>
+                          <p:cTn id="36" fill="hold">
+                            <p:stCondLst>
+                              <p:cond delay="0"/>
+                            </p:stCondLst>
+                            <p:childTnLst>
+                              <p:par>
+                                <p:cTn id="17" presetID="1" presetClass="exit" presetSubtype="0" fill="hold" grpId="0" nodeType="clickEffect">
+                                  <p:stCondLst>
+                                    <p:cond delay="0"/>
+                                  </p:stCondLst>
+                                  <p:childTnLst>
+                                    <p:set>
+                                      <p:cBhvr>
+                                        <p:cTn id="18" dur="1" fill="hold">
+                                          <p:stCondLst>
+                                            <p:cond delay="0"/>
+                                          </p:stCondLst>
+                                        </p:cTn>
+                                        <p:tgtEl>
+                                          <p:spTgt spid="23"/>
+                                        </p:tgtEl>
+                                        <p:attrNameLst>
+                                          <p:attrName>style.visibility</p:attrName>
+                                        </p:attrNameLst>
+                                      </p:cBhvr>
+                                      <p:to>
+                                        <p:strVal val="hidden"/>
+                                      </p:to>
+                                    </p:set>
+                                  </p:childTnLst>
+                                </p:cTn>
+                              </p:par>
+                              <p:par>
+                                <p:cTn id="19" presetID="1" presetClass="exit" presetSubtype="0" fill="hold" grpId="0" nodeType="withEffect">
+                                  <p:stCondLst>
+                                    <p:cond delay="0"/>
+                                  </p:stCondLst>
+                                  <p:childTnLst>
+                                    <p:set>
+                                      <p:cBhvr>
+                                        <p:cTn id="20" dur="1" fill="hold">
+                                          <p:stCondLst>
+                                            <p:cond delay="0"/>
+                                          </p:stCondLst>
+                                        </p:cTn>
+                                        <p:tgtEl>
+                                          <p:spTgt spid="24"/>
+                                        </p:tgtEl>
+                                        <p:attrNameLst>
+                                          <p:attrName>style.visibility</p:attrName>
+                                        </p:attrNameLst>
+                                      </p:cBhvr>
+                                      <p:to>
+                                        <p:strVal val="hidden"/>
+                                      </p:to>
+                                    </p:set>
+                                  </p:childTnLst>
+                                </p:cTn>
+                              </p:par>
+                              <p:par>
+                                <p:cTn id="21" presetID="1" presetClass="exit" presetSubtype="0" fill="hold" grpId="0" nodeType="withEffect">
+                                  <p:stCondLst>
+                                    <p:cond delay="0"/>
+                                  </p:stCondLst>
+                                  <p:childTnLst>
+                                    <p:set>
+                                      <p:cBhvr>
+                                        <p:cTn id="22" dur="1" fill="hold">
+                                          <p:stCondLst>
+                                            <p:cond delay="0"/>
+                                          </p:stCondLst>
+                                        </p:cTn>
+                                        <p:tgtEl>
+                                          <p:spTgt spid="25"/>
+                                        </p:tgtEl>
+                                        <p:attrNameLst>
+                                          <p:attrName>style.visibility</p:attrName>
+                                        </p:attrNameLst>
+                                      </p:cBhvr>
+                                      <p:to>
+                                        <p:strVal val="hidden"/>
+                                      </p:to>
+                                    </p:set>
+                                  </p:childTnLst>
+                                </p:cTn>
+                              </p:par>
+                              <p:par>
+                                <p:cTn id="23" presetID="1" presetClass="exit" presetSubtype="0" fill="hold" grpId="0" nodeType="withEffect">
+                                  <p:stCondLst>
+                                    <p:cond delay="0"/>
+                                  </p:stCondLst>
+                                  <p:childTnLst>
+                                    <p:set>
+                                      <p:cBhvr>
+                                        <p:cTn id="24" dur="1" fill="hold">
+                                          <p:stCondLst>
+                                            <p:cond delay="0"/>
+                                          </p:stCondLst>
+                                        </p:cTn>
+                                        <p:tgtEl>
+                                          <p:spTgt spid="26"/>
+                                        </p:tgtEl>
+                                        <p:attrNameLst>
+                                          <p:attrName>style.visibility</p:attrName>
+                                        </p:attrNameLst>
+                                      </p:cBhvr>
+                                      <p:to>
+                                        <p:strVal val="hidden"/>
+                                      </p:to>
+                                    </p:set>
+                                  </p:childTnLst>
+                                </p:cTn>
+                              </p:par>
+                              <p:par>
+                                <p:cTn id="25" presetID="1" presetClass="exit" presetSubtype="0" fill="hold" grpId="0" nodeType="withEffect">
+                                  <p:stCondLst>
+                                    <p:cond delay="0"/>
+                                  </p:stCondLst>
+                                  <p:childTnLst>
+                                    <p:set>
+                                      <p:cBhvr>
+                                        <p:cTn id="26" dur="1" fill="hold">
+                                          <p:stCondLst>
+                                            <p:cond delay="0"/>
+                                          </p:stCondLst>
+                                        </p:cTn>
+                                        <p:tgtEl>
+                                          <p:spTgt spid="27"/>
+                                        </p:tgtEl>
+                                        <p:attrNameLst>
+                                          <p:attrName>style.visibility</p:attrName>
+                                        </p:attrNameLst>
+                                      </p:cBhvr>
+                                      <p:to>
+                                        <p:strVal val="hidden"/>
+                                      </p:to>
+                                    </p:set>
+                                  </p:childTnLst>
+                                </p:cTn>
+                              </p:par>
+                              <p:par>
+                                <p:cTn id="27" presetID="1" presetClass="exit" presetSubtype="0" fill="hold" grpId="0" nodeType="withEffect">
+                                  <p:stCondLst>
+                                    <p:cond delay="0"/>
+                                  </p:stCondLst>
+                                  <p:childTnLst>
+                                    <p:set>
+                                      <p:cBhvr>
+                                        <p:cTn id="28" dur="1" fill="hold">
+                                          <p:stCondLst>
+                                            <p:cond delay="0"/>
+                                          </p:stCondLst>
+                                        </p:cTn>
+                                        <p:tgtEl>
+                                          <p:spTgt spid="28"/>
+                                        </p:tgtEl>
+                                        <p:attrNameLst>
+                                          <p:attrName>style.visibility</p:attrName>
+                                        </p:attrNameLst>
+                                      </p:cBhvr>
+                                      <p:to>
+                                        <p:strVal val="hidden"/>
+                                      </p:to>
+                                    </p:set>
+                                  </p:childTnLst>
+                                </p:cTn>
+                              </p:par>
+                              <p:par>
+                                <p:cTn id="29" presetID="1" presetClass="entr" presetSubtype="0" fill="hold" grpId="0" nodeType="withEffect">
+                                  <p:stCondLst>
+                                    <p:cond delay="0"/>
+                                  </p:stCondLst>
+                                  <p:childTnLst>
+                                    <p:set>
+                                      <p:cBhvr>
+                                        <p:cTn id="30" dur="1" fill="hold">
+                                          <p:stCondLst>
+                                            <p:cond delay="0"/>
+                                          </p:stCondLst>
+                                        </p:cTn>
+                                        <p:tgtEl>
+                                          <p:spTgt spid="29"/>
+                                        </p:tgtEl>
+                                        <p:attrNameLst>
+                                          <p:attrName>style.visibility</p:attrName>
+                                        </p:attrNameLst>
+                                      </p:cBhvr>
+                                      <p:to>
+                                        <p:strVal val="visible"/>
+                                      </p:to>
+                                    </p:set>
+                                  </p:childTnLst>
+                                </p:cTn>
+                              </p:par>
+                              <p:par>
+                                <p:cTn id="31" presetID="1" presetClass="entr" presetSubtype="0" fill="hold" grpId="0" nodeType="withEffect">
+                                  <p:stCondLst>
+                                    <p:cond delay="0"/>
+                                  </p:stCondLst>
+                                  <p:childTnLst>
+                                    <p:set>
+                                      <p:cBhvr>
+                                        <p:cTn id="32" dur="1" fill="hold">
+                                          <p:stCondLst>
+                                            <p:cond delay="0"/>
+                                          </p:stCondLst>
+                                        </p:cTn>
+                                        <p:tgtEl>
+                                          <p:spTgt spid="30"/>
+                                        </p:tgtEl>
+                                        <p:attrNameLst>
+                                          <p:attrName>style.visibility</p:attrName>
+                                        </p:attrNameLst>
+                                      </p:cBhvr>
+                                      <p:to>
+                                        <p:strVal val="visible"/>
+                                      </p:to>
+                                    </p:set>
+                                  </p:childTnLst>
+                                </p:cTn>
+                              </p:par>
+                              <p:par>
+                                <p:cTn id="33" presetID="1" presetClass="entr" presetSubtype="0" fill="hold" grpId="0" nodeType="withEffect">
+                                  <p:stCondLst>
+                                    <p:cond delay="0"/>
+                                  </p:stCondLst>
+                                  <p:childTnLst>
+                                    <p:set>
+                                      <p:cBhvr>
+                                        <p:cTn id="34" dur="1" fill="hold">
+                                          <p:stCondLst>
+                                            <p:cond delay="0"/>
+                                          </p:stCondLst>
+                                        </p:cTn>
+                                        <p:tgtEl>
+                                          <p:spTgt spid="31"/>
+                                        </p:tgtEl>
+                                        <p:attrNameLst>
+                                          <p:attrName>style.visibility</p:attrName>
+                                        </p:attrNameLst>
+                                      </p:cBhvr>
+                                      <p:to>
+                                        <p:strVal val="visible"/>
+                                      </p:to>
+                                    </p:set>
+                                  </p:childTnLst>
+                                </p:cTn>
+                              </p:par>
+                            </p:childTnLst>
+                          </p:cTn>
+                        </p:par>
+                      </p:childTnLst>
+                    </p:cTn>
+                  </p:par>
+                  <p:par>
+                    <p:cTn id="47" fill="hold">
+                      <p:stCondLst>
+                        <p:cond delay="indefinite"/>
+                      </p:stCondLst>
+                      <p:childTnLst>
+                        <p:par>
+                          <p:cTn id="48" fill="hold">
+                            <p:stCondLst>
+                              <p:cond delay="0"/>
+                            </p:stCondLst>
+                            <p:childTnLst>
+                              <p:par>
+                                <p:cTn id="37" presetID="1" presetClass="exit" presetSubtype="0" fill="hold" grpId="0" nodeType="clickEffect">
+                                  <p:stCondLst>
+                                    <p:cond delay="0"/>
+                                  </p:stCondLst>
+                                  <p:childTnLst>
+                                    <p:set>
+                                      <p:cBhvr>
+                                        <p:cTn id="38" dur="1" fill="hold">
+                                          <p:stCondLst>
+                                            <p:cond delay="0"/>
+                                          </p:stCondLst>
+                                        </p:cTn>
+                                        <p:tgtEl>
+                                          <p:spTgt spid="29"/>
+                                        </p:tgtEl>
+                                        <p:attrNameLst>
+                                          <p:attrName>style.visibility</p:attrName>
+                                        </p:attrNameLst>
+                                      </p:cBhvr>
+                                      <p:to>
+                                        <p:strVal val="hidden"/>
+                                      </p:to>
+                                    </p:set>
+                                  </p:childTnLst>
+                                </p:cTn>
+                              </p:par>
+                              <p:par>
+                                <p:cTn id="39" presetID="1" presetClass="exit" presetSubtype="0" fill="hold" grpId="0" nodeType="withEffect">
+                                  <p:stCondLst>
+                                    <p:cond delay="0"/>
+                                  </p:stCondLst>
+                                  <p:childTnLst>
+                                    <p:set>
+                                      <p:cBhvr>
+                                        <p:cTn id="40" dur="1" fill="hold">
+                                          <p:stCondLst>
+                                            <p:cond delay="0"/>
+                                          </p:stCondLst>
+                                        </p:cTn>
+                                        <p:tgtEl>
+                                          <p:spTgt spid="30"/>
+                                        </p:tgtEl>
+                                        <p:attrNameLst>
+                                          <p:attrName>style.visibility</p:attrName>
+                                        </p:attrNameLst>
+                                      </p:cBhvr>
+                                      <p:to>
+                                        <p:strVal val="hidden"/>
+                                      </p:to>
+                                    </p:set>
+                                  </p:childTnLst>
+                                </p:cTn>
+                              </p:par>
+                              <p:par>
+                                <p:cTn id="41" presetID="1" presetClass="exit" presetSubtype="0" fill="hold" grpId="0" nodeType="withEffect">
+                                  <p:stCondLst>
+                                    <p:cond delay="0"/>
+                                  </p:stCondLst>
+                                  <p:childTnLst>
+                                    <p:set>
+                                      <p:cBhvr>
+                                        <p:cTn id="42" dur="1" fill="hold">
+                                          <p:stCondLst>
+                                            <p:cond delay="0"/>
+                                          </p:stCondLst>
+                                        </p:cTn>
+                                        <p:tgtEl>
+                                          <p:spTgt spid="31"/>
+                                        </p:tgtEl>
+                                        <p:attrNameLst>
+                                          <p:attrName>style.visibility</p:attrName>
+                                        </p:attrNameLst>
+                                      </p:cBhvr>
+                                      <p:to>
+                                        <p:strVal val="hidden"/>
+                                      </p:to>
+                                    </p:set>
+                                  </p:childTnLst>
+                                </p:cTn>
+                              </p:par>
+                              <p:par>
+                                <p:cTn id="43" presetID="1" presetClass="entr" presetSubtype="0" fill="hold" grpId="0" nodeType="withEffect">
+                                  <p:stCondLst>
+                                    <p:cond delay="0"/>
+                                  </p:stCondLst>
+                                  <p:childTnLst>
+                                    <p:set>
+                                      <p:cBhvr>
+                                        <p:cTn id="44" dur="1" fill="hold">
+                                          <p:stCondLst>
+                                            <p:cond delay="0"/>
+                                          </p:stCondLst>
+                                        </p:cTn>
+                                        <p:tgtEl>
+                                          <p:spTgt spid="32"/>
+                                        </p:tgtEl>
+                                        <p:attrNameLst>
+                                          <p:attrName>style.visibility</p:attrName>
+                                        </p:attrNameLst>
+                                      </p:cBhvr>
+                                      <p:to>
+                                        <p:strVal val="visible"/>
+                                      </p:to>
+                                    </p:set>
+                                  </p:childTnLst>
+                                </p:cTn>
+                              </p:par>
+                              <p:par>
+                                <p:cTn id="45" presetID="1" presetClass="entr" presetSubtype="0" fill="hold" grpId="0" nodeType="withEffect">
+                                  <p:stCondLst>
+                                    <p:cond delay="0"/>
+                                  </p:stCondLst>
+                                  <p:childTnLst>
+                                    <p:set>
+                                      <p:cBhvr>
+                                        <p:cTn id="46" dur="1" fill="hold">
+                                          <p:stCondLst>
+                                            <p:cond delay="0"/>
+                                          </p:stCondLst>
+                                        </p:cTn>
+                                        <p:tgtEl>
+                                          <p:spTgt spid="33"/>
+                                        </p:tgtEl>
+                                        <p:attrNameLst>
+                                          <p:attrName>style.visibility</p:attrName>
+                                        </p:attrNameLst>
+                                      </p:cBhvr>
+                                      <p:to>
+                                        <p:strVal val="visible"/>
+                                      </p:to>
+                                    </p:set>
+                                  </p:childTnLst>
+                                </p:cTn>
+                              </p:par>
+                            </p:childTnLst>
+                          </p:cTn>
+                        </p:par>
+                      </p:childTnLst>
+                    </p:cTn>
+                  </p:par>
+                </p:childTnLst>
+              </p:cTn>
+              <p:prevCondLst>
+                <p:cond evt="onPrev" delay="0">
+                  <p:tgtEl>
+                    <p:sldTgt/>
+                  </p:tgtEl>
+                </p:cond>
+              </p:prevCondLst>
+              <p:nextCondLst>
+                <p:cond evt="onNext" delay="0">
+                  <p:tgtEl>
+                    <p:sldTgt/>
+                  </p:tgtEl>
+                </p:cond>
+              </p:nextCondLst>
+            </p:seq>
+          </p:childTnLst>
+        </p:cTn>
+      </p:par>
+    </p:tnLst>
+    <p:bldLst>
+      <p:bldP spid="23" grpId="0"/>
+      <p:bldP spid="24" grpId="0"/>
+      <p:bldP spid="25" grpId="0"/>
+      <p:bldP spid="26" grpId="0"/>
+      <p:bldP spid="27" grpId="0"/>
+      <p:bldP spid="28" grpId="0"/>
+      <p:bldP spid="29" grpId="0"/>
+      <p:bldP spid="30" grpId="0"/>
+      <p:bldP spid="31" grpId="0"/>
+      <p:bldP spid="32" grpId="0"/>
+      <p:bldP spid="33" grpId="0"/>
+    </p:bldLst>
+  </p:timing>
+</p:sld>
+</file>
+
+<file path=ppt/slides/slide39.xml><?xml version="1.0" encoding="utf-8"?>
+<p:sld xmlns:a="http://schemas.openxmlformats.org/drawingml/2006/main" xmlns:p="http://schemas.openxmlformats.org/presentationml/2006/main" xmlns:r="http://schemas.openxmlformats.org/officeDocument/2006/relationships">
+  <p:cSld>
+    <p:spTree>
+      <p:nvGrpSpPr>
+        <p:cNvPr id="1" name=""/>
+        <p:cNvGrpSpPr/>
+        <p:nvPr/>
+      </p:nvGrpSpPr>
+      <p:grpSpPr/>
+      <p:sp>
+        <p:nvSpPr>
+          <p:cNvPr id="2" name="Rectangle 1"/>
+          <p:cNvSpPr/>
+          <p:nvPr/>
+        </p:nvSpPr>
+        <p:spPr>
+          <a:xfrm>
+            <a:off x="0" y="-27432"/>
+            <a:ext cx="12198096" cy="594360"/>
+          </a:xfrm>
+          <a:prstGeom prst="rect">
+            <a:avLst/>
+          </a:prstGeom>
+          <a:solidFill>
+            <a:srgbClr val="00549F"/>
+          </a:solidFill>
+          <a:ln>
+            <a:noFill/>
+          </a:ln>
+          <a:effectLst/>
+        </p:spPr>
+        <p:style>
+          <a:lnRef idx="1">
+            <a:schemeClr val="accent1"/>
+          </a:lnRef>
+          <a:fillRef idx="3">
+            <a:schemeClr val="accent1"/>
+          </a:fillRef>
+          <a:effectRef idx="2">
+            <a:schemeClr val="accent1"/>
+          </a:effectRef>
+          <a:fontRef idx="minor">
+            <a:schemeClr val="lt1"/>
+          </a:fontRef>
+        </p:style>
+        <p:txBody>
+          <a:bodyPr rtlCol="0" anchor="ctr"/>
+          <a:lstStyle/>
+          <a:p>
+            <a:pPr algn="ctr"/>
+          </a:p>
+        </p:txBody>
+      </p:sp>
+      <p:sp>
+        <p:nvSpPr>
+          <p:cNvPr id="3" name="TextBox 2"/>
+          <p:cNvSpPr txBox="1"/>
+          <p:nvPr/>
+        </p:nvSpPr>
+        <p:spPr>
+          <a:xfrm>
+            <a:off x="685800" y="868680"/>
+            <a:ext cx="9875520" cy="548640"/>
+          </a:xfrm>
+          <a:prstGeom prst="rect">
+            <a:avLst/>
+          </a:prstGeom>
+          <a:noFill/>
+        </p:spPr>
+        <p:txBody>
+          <a:bodyPr wrap="square" lIns="0" rIns="0" tIns="0" bIns="0"/>
+          <a:lstStyle/>
+          <a:p>
+            <a:pPr algn="l"/>
+            <a:r>
+              <a:rPr sz="2800" b="1">
+                <a:solidFill>
+                  <a:srgbClr val="26456E"/>
+                </a:solidFill>
+                <a:latin typeface="Garamond"/>
+              </a:rPr>
+              <a:t>All the series, one axis</a:t>
+            </a:r>
+          </a:p>
+        </p:txBody>
+      </p:sp>
+      <p:pic>
+        <p:nvPicPr>
+          <p:cNvPr id="4" name="Picture 3" descr="v_allseries.png"/>
+          <p:cNvPicPr>
+            <a:picLocks noChangeAspect="1"/>
+          </p:cNvPicPr>
+          <p:nvPr/>
+        </p:nvPicPr>
+        <p:blipFill>
+          <a:blip r:embed="rId2"/>
+          <a:stretch>
+            <a:fillRect/>
+          </a:stretch>
+        </p:blipFill>
+        <p:spPr>
+          <a:xfrm>
+            <a:off x="594360" y="1481328"/>
+            <a:ext cx="11018520" cy="5418944"/>
+          </a:xfrm>
+          <a:prstGeom prst="rect">
+            <a:avLst/>
+          </a:prstGeom>
+        </p:spPr>
+      </p:pic>
     </p:spTree>
   </p:cSld>
   <p:clrMapOvr>
@@ -18528,125 +18200,6 @@
 </file>
 
 <file path=ppt/slides/slide40.xml><?xml version="1.0" encoding="utf-8"?>
-<p:sld xmlns:a="http://schemas.openxmlformats.org/drawingml/2006/main" xmlns:p="http://schemas.openxmlformats.org/presentationml/2006/main" xmlns:r="http://schemas.openxmlformats.org/officeDocument/2006/relationships">
-  <p:cSld>
-    <p:spTree>
-      <p:nvGrpSpPr>
-        <p:cNvPr id="1" name=""/>
-        <p:cNvGrpSpPr/>
-        <p:nvPr/>
-      </p:nvGrpSpPr>
-      <p:grpSpPr/>
-      <p:sp>
-        <p:nvSpPr>
-          <p:cNvPr id="2" name="Rectangle 1"/>
-          <p:cNvSpPr/>
-          <p:nvPr/>
-        </p:nvSpPr>
-        <p:spPr>
-          <a:xfrm>
-            <a:off x="0" y="-27432"/>
-            <a:ext cx="12198096" cy="594360"/>
-          </a:xfrm>
-          <a:prstGeom prst="rect">
-            <a:avLst/>
-          </a:prstGeom>
-          <a:solidFill>
-            <a:srgbClr val="00549F"/>
-          </a:solidFill>
-          <a:ln>
-            <a:noFill/>
-          </a:ln>
-          <a:effectLst/>
-        </p:spPr>
-        <p:style>
-          <a:lnRef idx="1">
-            <a:schemeClr val="accent1"/>
-          </a:lnRef>
-          <a:fillRef idx="3">
-            <a:schemeClr val="accent1"/>
-          </a:fillRef>
-          <a:effectRef idx="2">
-            <a:schemeClr val="accent1"/>
-          </a:effectRef>
-          <a:fontRef idx="minor">
-            <a:schemeClr val="lt1"/>
-          </a:fontRef>
-        </p:style>
-        <p:txBody>
-          <a:bodyPr rtlCol="0" anchor="ctr"/>
-          <a:lstStyle/>
-          <a:p>
-            <a:pPr algn="ctr"/>
-          </a:p>
-        </p:txBody>
-      </p:sp>
-      <p:sp>
-        <p:nvSpPr>
-          <p:cNvPr id="3" name="TextBox 2"/>
-          <p:cNvSpPr txBox="1"/>
-          <p:nvPr/>
-        </p:nvSpPr>
-        <p:spPr>
-          <a:xfrm>
-            <a:off x="685800" y="868680"/>
-            <a:ext cx="9875520" cy="548640"/>
-          </a:xfrm>
-          <a:prstGeom prst="rect">
-            <a:avLst/>
-          </a:prstGeom>
-          <a:noFill/>
-        </p:spPr>
-        <p:txBody>
-          <a:bodyPr wrap="square" lIns="0" rIns="0" tIns="0" bIns="0"/>
-          <a:lstStyle/>
-          <a:p>
-            <a:pPr algn="l"/>
-            <a:r>
-              <a:rPr sz="2800" b="1">
-                <a:solidFill>
-                  <a:srgbClr val="26456E"/>
-                </a:solidFill>
-                <a:latin typeface="Garamond"/>
-              </a:rPr>
-              <a:t>All the series, one axis</a:t>
-            </a:r>
-          </a:p>
-        </p:txBody>
-      </p:sp>
-      <p:pic>
-        <p:nvPicPr>
-          <p:cNvPr id="4" name="Picture 3" descr="v_allseries.png"/>
-          <p:cNvPicPr>
-            <a:picLocks noChangeAspect="1"/>
-          </p:cNvPicPr>
-          <p:nvPr/>
-        </p:nvPicPr>
-        <p:blipFill>
-          <a:blip r:embed="rId2"/>
-          <a:stretch>
-            <a:fillRect/>
-          </a:stretch>
-        </p:blipFill>
-        <p:spPr>
-          <a:xfrm>
-            <a:off x="594360" y="1481328"/>
-            <a:ext cx="11018520" cy="5418944"/>
-          </a:xfrm>
-          <a:prstGeom prst="rect">
-            <a:avLst/>
-          </a:prstGeom>
-        </p:spPr>
-      </p:pic>
-    </p:spTree>
-  </p:cSld>
-  <p:clrMapOvr>
-    <a:masterClrMapping/>
-  </p:clrMapOvr>
-</p:sld>
-</file>
-
-<file path=ppt/slides/slide41.xml><?xml version="1.0" encoding="utf-8"?>
 <p:sld xmlns:a="http://schemas.openxmlformats.org/drawingml/2006/main" xmlns:p="http://schemas.openxmlformats.org/presentationml/2006/main" xmlns:r="http://schemas.openxmlformats.org/officeDocument/2006/relationships">
   <p:cSld>
     <p:spTree>

--- a/report/Proyect_US_v4.pptx
+++ b/report/Proyect_US_v4.pptx
@@ -11745,7 +11745,7 @@
                 </a:solidFill>
                 <a:latin typeface="Garamond"/>
               </a:rPr>
-              <a:t>Definition 1, as above</a:t>
+              <a:t>Definition 1</a:t>
             </a:r>
           </a:p>
         </p:txBody>
@@ -11829,7 +11829,7 @@
                 </a:solidFill>
                 <a:latin typeface="Garamond"/>
               </a:rPr>
-              <a:t>Retrospective annual measure</a:t>
+              <a:t>Annual recall</a:t>
             </a:r>
           </a:p>
         </p:txBody>
@@ -11913,7 +11913,7 @@
                 </a:solidFill>
                 <a:latin typeface="Garamond"/>
               </a:rPr>
-              <a:t>Occupation-pair measure</a:t>
+              <a:t>Occupation pair</a:t>
             </a:r>
           </a:p>
         </p:txBody>
@@ -11997,7 +11997,7 @@
                 </a:solidFill>
                 <a:latin typeface="Garamond"/>
               </a:rPr>
-              <a:t>Month-pair measure</a:t>
+              <a:t>Month pairs</a:t>
             </a:r>
           </a:p>
         </p:txBody>
@@ -12081,7 +12081,7 @@
                 </a:solidFill>
                 <a:latin typeface="Garamond"/>
               </a:rPr>
-              <a:t>Any-sighting measure</a:t>
+              <a:t>Any sighting</a:t>
             </a:r>
           </a:p>
         </p:txBody>
@@ -12165,7 +12165,7 @@
                 </a:solidFill>
                 <a:latin typeface="Garamond"/>
               </a:rPr>
-              <a:t>NCES Teacher Follow-up Survey</a:t>
+              <a:t>NCES follow-up survey</a:t>
             </a:r>
           </a:p>
         </p:txBody>

--- a/report/Proyect_US_v4.pptx
+++ b/report/Proyect_US_v4.pptx
@@ -13,11 +13,13 @@
     <p:sldId id="290" r:id="rId36"/>
     <p:sldId id="296" r:id="rId42"/>
     <p:sldId id="297" r:id="rId43"/>
+    <p:sldId id="256" r:id="rId5"/>
     <p:sldId id="298" r:id="rId44"/>
-    <p:sldId id="256" r:id="rId5"/>
     <p:sldId id="299" r:id="rId45"/>
     <p:sldId id="300" r:id="rId46"/>
     <p:sldId id="301" r:id="rId47"/>
+    <p:sldId id="302" r:id="rId48"/>
+    <p:sldId id="303" r:id="rId49"/>
     <p:sldId id="291" r:id="rId37"/>
     <p:sldId id="258" r:id="rId6"/>
     <p:sldId id="259" r:id="rId7"/>
@@ -46,7 +48,7 @@
     <p:sldId id="285" r:id="rId26"/>
     <p:sldId id="267" r:id="rId27"/>
     <p:sldId id="287" r:id="rId28"/>
-    <p:sldId id="302" r:id="rId48"/>
+    <p:sldId id="304" r:id="rId50"/>
   </p:sldIdLst>
   <p:sldSz cx="12192000" cy="6858000"/>
   <p:notesSz cx="6858000" cy="12192000"/>
@@ -7541,7 +7543,7 @@
           <a:prstGeom prst="line">
             <a:avLst/>
           </a:prstGeom>
-          <a:ln w="12700">
+          <a:ln w="20320">
             <a:solidFill>
               <a:srgbClr val="1A2430"/>
             </a:solidFill>
@@ -7595,7 +7597,7 @@
             <a:r>
               <a:rPr sz="1300" b="1" i="0">
                 <a:solidFill>
-                  <a:srgbClr val="26456E"/>
+                  <a:srgbClr val="1A2430"/>
                 </a:solidFill>
                 <a:latin typeface="Garamond"/>
               </a:rPr>
@@ -7637,7 +7639,7 @@
             <a:r>
               <a:rPr sz="1300" b="1" i="0">
                 <a:solidFill>
-                  <a:srgbClr val="26456E"/>
+                  <a:srgbClr val="1A2430"/>
                 </a:solidFill>
                 <a:latin typeface="Garamond"/>
               </a:rPr>
@@ -7660,7 +7662,7 @@
           <a:prstGeom prst="line">
             <a:avLst/>
           </a:prstGeom>
-          <a:ln w="7620">
+          <a:ln w="10160">
             <a:solidFill>
               <a:srgbClr val="1A2430"/>
             </a:solidFill>
@@ -7689,7 +7691,7 @@
         </p:nvSpPr>
         <p:spPr>
           <a:xfrm>
-            <a:off x="960120" y="3328416"/>
+            <a:off x="960120" y="3310128"/>
             <a:ext cx="5120640" cy="365760"/>
           </a:xfrm>
           <a:prstGeom prst="rect">
@@ -7718,7 +7720,7 @@
                 </a:solidFill>
                 <a:latin typeface="Garamond"/>
               </a:rPr>
-              <a:t>Observations, 1998–2025</a:t>
+              <a:t>Age (years)</a:t>
             </a:r>
           </a:p>
         </p:txBody>
@@ -7731,7 +7733,7 @@
         </p:nvSpPr>
         <p:spPr>
           <a:xfrm>
-            <a:off x="6492240" y="3328416"/>
+            <a:off x="6492240" y="3310128"/>
             <a:ext cx="1828800" cy="365760"/>
           </a:xfrm>
           <a:prstGeom prst="rect">
@@ -7760,7 +7762,7 @@
                 </a:solidFill>
                 <a:latin typeface="Garamond"/>
               </a:rPr>
-              <a:t>85,497</a:t>
+              <a:t>43.7</a:t>
             </a:r>
           </a:p>
         </p:txBody>
@@ -7773,7 +7775,7 @@
         </p:nvSpPr>
         <p:spPr>
           <a:xfrm>
-            <a:off x="8732520" y="3328416"/>
+            <a:off x="8732520" y="3310128"/>
             <a:ext cx="2331720" cy="365760"/>
           </a:xfrm>
           <a:prstGeom prst="rect">
@@ -7802,7 +7804,7 @@
                 </a:solidFill>
                 <a:latin typeface="Garamond"/>
               </a:rPr>
-              <a:t>726,618</a:t>
+              <a:t>43.6</a:t>
             </a:r>
           </a:p>
         </p:txBody>
@@ -7815,7 +7817,7 @@
         </p:nvSpPr>
         <p:spPr>
           <a:xfrm>
-            <a:off x="960120" y="3694176"/>
+            <a:off x="960120" y="3675888"/>
             <a:ext cx="5120640" cy="365760"/>
           </a:xfrm>
           <a:prstGeom prst="rect">
@@ -7844,7 +7846,7 @@
                 </a:solidFill>
                 <a:latin typeface="Garamond"/>
               </a:rPr>
-              <a:t>Age</a:t>
+              <a:t>Female (%)</a:t>
             </a:r>
           </a:p>
         </p:txBody>
@@ -7857,7 +7859,7 @@
         </p:nvSpPr>
         <p:spPr>
           <a:xfrm>
-            <a:off x="6492240" y="3694176"/>
+            <a:off x="6492240" y="3675888"/>
             <a:ext cx="1828800" cy="365760"/>
           </a:xfrm>
           <a:prstGeom prst="rect">
@@ -7886,7 +7888,7 @@
                 </a:solidFill>
                 <a:latin typeface="Garamond"/>
               </a:rPr>
-              <a:t>43.7</a:t>
+              <a:t>75.9</a:t>
             </a:r>
           </a:p>
         </p:txBody>
@@ -7899,7 +7901,7 @@
         </p:nvSpPr>
         <p:spPr>
           <a:xfrm>
-            <a:off x="8732520" y="3694176"/>
+            <a:off x="8732520" y="3675888"/>
             <a:ext cx="2331720" cy="365760"/>
           </a:xfrm>
           <a:prstGeom prst="rect">
@@ -7928,7 +7930,7 @@
                 </a:solidFill>
                 <a:latin typeface="Garamond"/>
               </a:rPr>
-              <a:t>43.6</a:t>
+              <a:t>46.5</a:t>
             </a:r>
           </a:p>
         </p:txBody>
@@ -7941,7 +7943,7 @@
         </p:nvSpPr>
         <p:spPr>
           <a:xfrm>
-            <a:off x="960120" y="4059936"/>
+            <a:off x="960120" y="4041648"/>
             <a:ext cx="5120640" cy="365760"/>
           </a:xfrm>
           <a:prstGeom prst="rect">
@@ -7970,7 +7972,7 @@
                 </a:solidFill>
                 <a:latin typeface="Garamond"/>
               </a:rPr>
-              <a:t>Female, percent</a:t>
+              <a:t>Master’s degree or higher (%)</a:t>
             </a:r>
           </a:p>
         </p:txBody>
@@ -7983,7 +7985,7 @@
         </p:nvSpPr>
         <p:spPr>
           <a:xfrm>
-            <a:off x="6492240" y="4059936"/>
+            <a:off x="6492240" y="4041648"/>
             <a:ext cx="1828800" cy="365760"/>
           </a:xfrm>
           <a:prstGeom prst="rect">
@@ -8012,7 +8014,7 @@
                 </a:solidFill>
                 <a:latin typeface="Garamond"/>
               </a:rPr>
-              <a:t>75.9</a:t>
+              <a:t>48.3</a:t>
             </a:r>
           </a:p>
         </p:txBody>
@@ -8025,7 +8027,7 @@
         </p:nvSpPr>
         <p:spPr>
           <a:xfrm>
-            <a:off x="8732520" y="4059936"/>
+            <a:off x="8732520" y="4041648"/>
             <a:ext cx="2331720" cy="365760"/>
           </a:xfrm>
           <a:prstGeom prst="rect">
@@ -8054,7 +8056,7 @@
                 </a:solidFill>
                 <a:latin typeface="Garamond"/>
               </a:rPr>
-              <a:t>46.5</a:t>
+              <a:t>33.8</a:t>
             </a:r>
           </a:p>
         </p:txBody>
@@ -8067,7 +8069,7 @@
         </p:nvSpPr>
         <p:spPr>
           <a:xfrm>
-            <a:off x="960120" y="4425696"/>
+            <a:off x="960120" y="4407408"/>
             <a:ext cx="5120640" cy="365760"/>
           </a:xfrm>
           <a:prstGeom prst="rect">
@@ -8096,7 +8098,7 @@
                 </a:solidFill>
                 <a:latin typeface="Garamond"/>
               </a:rPr>
-              <a:t>Master’s degree or higher, percent</a:t>
+              <a:t>Public sector (%)</a:t>
             </a:r>
           </a:p>
         </p:txBody>
@@ -8109,7 +8111,7 @@
         </p:nvSpPr>
         <p:spPr>
           <a:xfrm>
-            <a:off x="6492240" y="4425696"/>
+            <a:off x="6492240" y="4407408"/>
             <a:ext cx="1828800" cy="365760"/>
           </a:xfrm>
           <a:prstGeom prst="rect">
@@ -8138,7 +8140,7 @@
                 </a:solidFill>
                 <a:latin typeface="Garamond"/>
               </a:rPr>
-              <a:t>48.3</a:t>
+              <a:t>72.9</a:t>
             </a:r>
           </a:p>
         </p:txBody>
@@ -8151,7 +8153,7 @@
         </p:nvSpPr>
         <p:spPr>
           <a:xfrm>
-            <a:off x="8732520" y="4425696"/>
+            <a:off x="8732520" y="4407408"/>
             <a:ext cx="2331720" cy="365760"/>
           </a:xfrm>
           <a:prstGeom prst="rect">
@@ -8180,7 +8182,7 @@
                 </a:solidFill>
                 <a:latin typeface="Garamond"/>
               </a:rPr>
-              <a:t>33.8</a:t>
+              <a:t>16.2</a:t>
             </a:r>
           </a:p>
         </p:txBody>
@@ -8193,7 +8195,7 @@
         </p:nvSpPr>
         <p:spPr>
           <a:xfrm>
-            <a:off x="960120" y="4791456"/>
+            <a:off x="960120" y="4773168"/>
             <a:ext cx="5120640" cy="365760"/>
           </a:xfrm>
           <a:prstGeom prst="rect">
@@ -8222,7 +8224,7 @@
                 </a:solidFill>
                 <a:latin typeface="Garamond"/>
               </a:rPr>
-              <a:t>Public sector, percent</a:t>
+              <a:t>Weeks worked</a:t>
             </a:r>
           </a:p>
         </p:txBody>
@@ -8235,7 +8237,7 @@
         </p:nvSpPr>
         <p:spPr>
           <a:xfrm>
-            <a:off x="6492240" y="4791456"/>
+            <a:off x="6492240" y="4773168"/>
             <a:ext cx="1828800" cy="365760"/>
           </a:xfrm>
           <a:prstGeom prst="rect">
@@ -8264,7 +8266,7 @@
                 </a:solidFill>
                 <a:latin typeface="Garamond"/>
               </a:rPr>
-              <a:t>72.9</a:t>
+              <a:t>46.1</a:t>
             </a:r>
           </a:p>
         </p:txBody>
@@ -8277,7 +8279,7 @@
         </p:nvSpPr>
         <p:spPr>
           <a:xfrm>
-            <a:off x="8732520" y="4791456"/>
+            <a:off x="8732520" y="4773168"/>
             <a:ext cx="2331720" cy="365760"/>
           </a:xfrm>
           <a:prstGeom prst="rect">
@@ -8306,7 +8308,7 @@
                 </a:solidFill>
                 <a:latin typeface="Garamond"/>
               </a:rPr>
-              <a:t>16.2</a:t>
+              <a:t>48.6</a:t>
             </a:r>
           </a:p>
         </p:txBody>
@@ -8319,7 +8321,7 @@
         </p:nvSpPr>
         <p:spPr>
           <a:xfrm>
-            <a:off x="960120" y="5157216"/>
+            <a:off x="960120" y="5138928"/>
             <a:ext cx="5120640" cy="365760"/>
           </a:xfrm>
           <a:prstGeom prst="rect">
@@ -8348,7 +8350,7 @@
                 </a:solidFill>
                 <a:latin typeface="Garamond"/>
               </a:rPr>
-              <a:t>Weeks worked in the year</a:t>
+              <a:t>Median annual wage ($)</a:t>
             </a:r>
           </a:p>
         </p:txBody>
@@ -8361,7 +8363,7 @@
         </p:nvSpPr>
         <p:spPr>
           <a:xfrm>
-            <a:off x="6492240" y="5157216"/>
+            <a:off x="6492240" y="5138928"/>
             <a:ext cx="1828800" cy="365760"/>
           </a:xfrm>
           <a:prstGeom prst="rect">
@@ -8390,7 +8392,7 @@
                 </a:solidFill>
                 <a:latin typeface="Garamond"/>
               </a:rPr>
-              <a:t>46.1</a:t>
+              <a:t>56,000</a:t>
             </a:r>
           </a:p>
         </p:txBody>
@@ -8403,7 +8405,7 @@
         </p:nvSpPr>
         <p:spPr>
           <a:xfrm>
-            <a:off x="8732520" y="5157216"/>
+            <a:off x="8732520" y="5138928"/>
             <a:ext cx="2331720" cy="365760"/>
           </a:xfrm>
           <a:prstGeom prst="rect">
@@ -8432,7 +8434,7 @@
                 </a:solidFill>
                 <a:latin typeface="Garamond"/>
               </a:rPr>
-              <a:t>48.6</a:t>
+              <a:t>75,000</a:t>
             </a:r>
           </a:p>
         </p:txBody>
@@ -8445,7 +8447,7 @@
         </p:nvSpPr>
         <p:spPr>
           <a:xfrm>
-            <a:off x="960120" y="5522976"/>
+            <a:off x="960120" y="5504688"/>
             <a:ext cx="5120640" cy="365760"/>
           </a:xfrm>
           <a:prstGeom prst="rect">
@@ -8474,7 +8476,7 @@
                 </a:solidFill>
                 <a:latin typeface="Garamond"/>
               </a:rPr>
-              <a:t>Median annual wage, 2021–2025</a:t>
+              <a:t>Annual leaving rate (%)</a:t>
             </a:r>
           </a:p>
         </p:txBody>
@@ -8487,7 +8489,7 @@
         </p:nvSpPr>
         <p:spPr>
           <a:xfrm>
-            <a:off x="6492240" y="5522976"/>
+            <a:off x="6492240" y="5504688"/>
             <a:ext cx="1828800" cy="365760"/>
           </a:xfrm>
           <a:prstGeom prst="rect">
@@ -8516,7 +8518,7 @@
                 </a:solidFill>
                 <a:latin typeface="Garamond"/>
               </a:rPr>
-              <a:t>$56,000</a:t>
+              <a:t>8.6</a:t>
             </a:r>
           </a:p>
         </p:txBody>
@@ -8529,7 +8531,7 @@
         </p:nvSpPr>
         <p:spPr>
           <a:xfrm>
-            <a:off x="8732520" y="5522976"/>
+            <a:off x="8732520" y="5504688"/>
             <a:ext cx="2331720" cy="365760"/>
           </a:xfrm>
           <a:prstGeom prst="rect">
@@ -8558,20 +8560,55 @@
                 </a:solidFill>
                 <a:latin typeface="Garamond"/>
               </a:rPr>
-              <a:t>$75,000</a:t>
-            </a:r>
-          </a:p>
-        </p:txBody>
-      </p:sp>
-      <p:sp>
-        <p:nvSpPr>
-          <p:cNvPr id="30" name="TextBox 29"/>
+              <a:t>—</a:t>
+            </a:r>
+          </a:p>
+        </p:txBody>
+      </p:sp>
+      <p:cxnSp>
+        <p:nvCxnSpPr>
+          <p:cNvPr id="30" name="Connector 29"/>
+          <p:cNvCxnSpPr/>
+          <p:nvPr/>
+        </p:nvCxnSpPr>
+        <p:spPr>
+          <a:xfrm>
+            <a:off x="822960" y="5888736"/>
+            <a:ext cx="10543032" cy="0"/>
+          </a:xfrm>
+          <a:prstGeom prst="line">
+            <a:avLst/>
+          </a:prstGeom>
+          <a:ln w="10160">
+            <a:solidFill>
+              <a:srgbClr val="1A2430"/>
+            </a:solidFill>
+          </a:ln>
+        </p:spPr>
+        <p:style>
+          <a:lnRef idx="2">
+            <a:schemeClr val="accent1"/>
+          </a:lnRef>
+          <a:fillRef idx="0">
+            <a:schemeClr val="accent1"/>
+          </a:fillRef>
+          <a:effectRef idx="1">
+            <a:schemeClr val="accent1"/>
+          </a:effectRef>
+          <a:fontRef idx="minor">
+            <a:schemeClr val="tx1"/>
+          </a:fontRef>
+        </p:style>
+      </p:cxnSp>
+      <p:sp>
+        <p:nvSpPr>
+          <p:cNvPr id="31" name="TextBox 30"/>
           <p:cNvSpPr txBox="1"/>
           <p:nvPr/>
         </p:nvSpPr>
         <p:spPr>
           <a:xfrm>
-            <a:off x="960120" y="5888736"/>
+            <a:off x="960120" y="5980176"/>
             <a:ext cx="5120640" cy="365760"/>
           </a:xfrm>
           <a:prstGeom prst="rect">
@@ -8600,20 +8637,20 @@
                 </a:solidFill>
                 <a:latin typeface="Garamond"/>
               </a:rPr>
-              <a:t>Left teaching within the year, percent</a:t>
-            </a:r>
-          </a:p>
-        </p:txBody>
-      </p:sp>
-      <p:sp>
-        <p:nvSpPr>
-          <p:cNvPr id="31" name="TextBox 30"/>
+              <a:t>Observations</a:t>
+            </a:r>
+          </a:p>
+        </p:txBody>
+      </p:sp>
+      <p:sp>
+        <p:nvSpPr>
+          <p:cNvPr id="32" name="TextBox 31"/>
           <p:cNvSpPr txBox="1"/>
           <p:nvPr/>
         </p:nvSpPr>
         <p:spPr>
           <a:xfrm>
-            <a:off x="6492240" y="5888736"/>
+            <a:off x="6492240" y="5980176"/>
             <a:ext cx="1828800" cy="365760"/>
           </a:xfrm>
           <a:prstGeom prst="rect">
@@ -8642,20 +8679,20 @@
                 </a:solidFill>
                 <a:latin typeface="Garamond"/>
               </a:rPr>
-              <a:t>8.6</a:t>
-            </a:r>
-          </a:p>
-        </p:txBody>
-      </p:sp>
-      <p:sp>
-        <p:nvSpPr>
-          <p:cNvPr id="32" name="TextBox 31"/>
+              <a:t>85,497</a:t>
+            </a:r>
+          </a:p>
+        </p:txBody>
+      </p:sp>
+      <p:sp>
+        <p:nvSpPr>
+          <p:cNvPr id="33" name="TextBox 32"/>
           <p:cNvSpPr txBox="1"/>
           <p:nvPr/>
         </p:nvSpPr>
         <p:spPr>
           <a:xfrm>
-            <a:off x="8732520" y="5888736"/>
+            <a:off x="8732520" y="5980176"/>
             <a:ext cx="2331720" cy="365760"/>
           </a:xfrm>
           <a:prstGeom prst="rect">
@@ -8684,26 +8721,26 @@
                 </a:solidFill>
                 <a:latin typeface="Garamond"/>
               </a:rPr>
-              <a:t>—</a:t>
+              <a:t>726,618</a:t>
             </a:r>
           </a:p>
         </p:txBody>
       </p:sp>
       <p:cxnSp>
         <p:nvCxnSpPr>
-          <p:cNvPr id="33" name="Connector 32"/>
+          <p:cNvPr id="34" name="Connector 33"/>
           <p:cNvCxnSpPr/>
           <p:nvPr/>
         </p:nvCxnSpPr>
         <p:spPr>
           <a:xfrm>
-            <a:off x="822960" y="6272784"/>
+            <a:off x="822960" y="6382512"/>
             <a:ext cx="10543032" cy="0"/>
           </a:xfrm>
           <a:prstGeom prst="line">
             <a:avLst/>
           </a:prstGeom>
-          <a:ln w="12700">
+          <a:ln w="20320">
             <a:solidFill>
               <a:srgbClr val="1A2430"/>
             </a:solidFill>
@@ -8726,14 +8763,14 @@
       </p:cxnSp>
       <p:sp>
         <p:nvSpPr>
-          <p:cNvPr id="34" name="TextBox 33"/>
+          <p:cNvPr id="35" name="TextBox 34"/>
           <p:cNvSpPr txBox="1"/>
           <p:nvPr/>
         </p:nvSpPr>
         <p:spPr>
           <a:xfrm>
-            <a:off x="822960" y="6437376"/>
-            <a:ext cx="10543032" cy="365760"/>
+            <a:off x="822960" y="6473952"/>
+            <a:ext cx="10543032" cy="320040"/>
           </a:xfrm>
           <a:prstGeom prst="rect">
             <a:avLst/>
@@ -8748,20 +8785,20 @@
           <a:p>
             <a:pPr algn="l">
               <a:lnSpc>
-                <a:spcPts val="1800"/>
+                <a:spcPts val="1650"/>
               </a:lnSpc>
               <a:spcAft>
                 <a:spcPts val="0"/>
               </a:spcAft>
             </a:pPr>
             <a:r>
-              <a:rPr sz="1200" b="0" i="1">
+              <a:rPr sz="1100" b="0" i="1">
                 <a:solidFill>
                   <a:srgbClr val="6B7480"/>
                 </a:solidFill>
                 <a:latin typeface="Garamond"/>
               </a:rPr>
-              <a:t>March supplements 1998–2025, weighted; individuals holding a bachelor’s degree or more.</a:t>
+              <a:t>March supplements 1998–2025, weighted; bachelor’s degree or higher. Wages from the 2021–2025 supplements.</a:t>
             </a:r>
           </a:p>
         </p:txBody>
@@ -8856,7 +8893,7 @@
                 </a:solidFill>
                 <a:latin typeface="Garamond"/>
               </a:rPr>
-              <a:t>Supplements, and why March</a:t>
+              <a:t>The March supplement</a:t>
             </a:r>
           </a:p>
         </p:txBody>
@@ -8870,7 +8907,7 @@
         <p:spPr>
           <a:xfrm>
             <a:off x="777240" y="1691640"/>
-            <a:ext cx="10698480" cy="3657600"/>
+            <a:ext cx="10698480" cy="4572000"/>
           </a:xfrm>
           <a:prstGeom prst="rect">
             <a:avLst/>
@@ -8926,6 +8963,25 @@
                 <a:spcPts val="2550"/>
               </a:lnSpc>
               <a:spcAft>
+                <a:spcPts val="1600"/>
+              </a:spcAft>
+            </a:pPr>
+            <a:r>
+              <a:rPr sz="1700" b="0" i="0">
+                <a:solidFill>
+                  <a:srgbClr val="1A2430"/>
+                </a:solidFill>
+                <a:latin typeface="Garamond"/>
+              </a:rPr>
+              <a:t>I pool every March supplement from 1998 to 2025: five million records, 104,545 of them teachers.</a:t>
+            </a:r>
+          </a:p>
+          <a:p>
+            <a:pPr algn="just">
+              <a:lnSpc>
+                <a:spcPts val="2550"/>
+              </a:lnSpc>
+              <a:spcAft>
                 <a:spcPts val="0"/>
               </a:spcAft>
             </a:pPr>
@@ -8936,7 +8992,7 @@
                 </a:solidFill>
                 <a:latin typeface="Garamond"/>
               </a:rPr>
-              <a:t>An annual leaving rate can therefore be measured in March, and in no other month.</a:t>
+              <a:t>Whoever taught as last year’s longest job, and no longer teaches at the March interview, has left the profession within the year.</a:t>
             </a:r>
           </a:p>
         </p:txBody>
@@ -9031,7 +9087,7 @@
                 </a:solidFill>
                 <a:latin typeface="Garamond"/>
               </a:rPr>
-              <a:t>From the CPS to a teacher dataset</a:t>
+              <a:t>Linking individuals across waves</a:t>
             </a:r>
           </a:p>
         </p:txBody>
@@ -9045,7 +9101,7 @@
         <p:spPr>
           <a:xfrm>
             <a:off x="777240" y="1691640"/>
-            <a:ext cx="10698480" cy="2926080"/>
+            <a:ext cx="10698480" cy="731520"/>
           </a:xfrm>
           <a:prstGeom prst="rect">
             <a:avLst/>
@@ -9057,25 +9113,6 @@
             <a:spAutoFit/>
           </a:bodyPr>
           <a:lstStyle/>
-          <a:p>
-            <a:pPr algn="just">
-              <a:lnSpc>
-                <a:spcPts val="2550"/>
-              </a:lnSpc>
-              <a:spcAft>
-                <a:spcPts val="1600"/>
-              </a:spcAft>
-            </a:pPr>
-            <a:r>
-              <a:rPr sz="1700" b="0" i="0">
-                <a:solidFill>
-                  <a:srgbClr val="1A2430"/>
-                </a:solidFill>
-                <a:latin typeface="Garamond"/>
-              </a:rPr>
-              <a:t>I pool every March supplement from 1998 to 2025: five million records, 104,545 of them teachers.</a:t>
-            </a:r>
-          </a:p>
           <a:p>
             <a:pPr algn="just">
               <a:lnSpc>
@@ -9092,7 +9129,363 @@
                 </a:solidFill>
                 <a:latin typeface="Garamond"/>
               </a:rPr>
-              <a:t>Whoever taught as last year’s longest job, and no longer teaches at the March interview, has left the profession within the year.</a:t>
+              <a:t>The CPS carries no individual identifier: records are linked on household identifiers and validated on demographics (Madrian and Lefgren, 1999).</a:t>
+            </a:r>
+          </a:p>
+        </p:txBody>
+      </p:sp>
+      <p:cxnSp>
+        <p:nvCxnSpPr>
+          <p:cNvPr id="5" name="Connector 4"/>
+          <p:cNvCxnSpPr/>
+          <p:nvPr/>
+        </p:nvCxnSpPr>
+        <p:spPr>
+          <a:xfrm>
+            <a:off x="822960" y="2788920"/>
+            <a:ext cx="10543032" cy="0"/>
+          </a:xfrm>
+          <a:prstGeom prst="line">
+            <a:avLst/>
+          </a:prstGeom>
+          <a:ln w="12700">
+            <a:solidFill>
+              <a:srgbClr val="1A2430"/>
+            </a:solidFill>
+          </a:ln>
+        </p:spPr>
+        <p:style>
+          <a:lnRef idx="2">
+            <a:schemeClr val="accent1"/>
+          </a:lnRef>
+          <a:fillRef idx="0">
+            <a:schemeClr val="accent1"/>
+          </a:fillRef>
+          <a:effectRef idx="1">
+            <a:schemeClr val="accent1"/>
+          </a:effectRef>
+          <a:fontRef idx="minor">
+            <a:schemeClr val="tx1"/>
+          </a:fontRef>
+        </p:style>
+      </p:cxnSp>
+      <p:sp>
+        <p:nvSpPr>
+          <p:cNvPr id="6" name="TextBox 5"/>
+          <p:cNvSpPr txBox="1"/>
+          <p:nvPr/>
+        </p:nvSpPr>
+        <p:spPr>
+          <a:xfrm>
+            <a:off x="1005840" y="2971800"/>
+            <a:ext cx="4206240" cy="365760"/>
+          </a:xfrm>
+          <a:prstGeom prst="rect">
+            <a:avLst/>
+          </a:prstGeom>
+          <a:noFill/>
+        </p:spPr>
+        <p:txBody>
+          <a:bodyPr wrap="square" lIns="0" rIns="0" tIns="0" bIns="0">
+            <a:spAutoFit/>
+          </a:bodyPr>
+          <a:lstStyle/>
+          <a:p>
+            <a:pPr algn="l">
+              <a:lnSpc>
+                <a:spcPts val="2100"/>
+              </a:lnSpc>
+              <a:spcAft>
+                <a:spcPts val="0"/>
+              </a:spcAft>
+            </a:pPr>
+            <a:r>
+              <a:rPr sz="1400" b="1" i="0">
+                <a:solidFill>
+                  <a:srgbClr val="26456E"/>
+                </a:solidFill>
+                <a:latin typeface="Garamond"/>
+              </a:rPr>
+              <a:t>Linkage keys (exact match)</a:t>
+            </a:r>
+          </a:p>
+        </p:txBody>
+      </p:sp>
+      <p:sp>
+        <p:nvSpPr>
+          <p:cNvPr id="7" name="TextBox 6"/>
+          <p:cNvSpPr txBox="1"/>
+          <p:nvPr/>
+        </p:nvSpPr>
+        <p:spPr>
+          <a:xfrm>
+            <a:off x="6035040" y="2971800"/>
+            <a:ext cx="4937760" cy="365760"/>
+          </a:xfrm>
+          <a:prstGeom prst="rect">
+            <a:avLst/>
+          </a:prstGeom>
+          <a:noFill/>
+        </p:spPr>
+        <p:txBody>
+          <a:bodyPr wrap="square" lIns="0" rIns="0" tIns="0" bIns="0">
+            <a:spAutoFit/>
+          </a:bodyPr>
+          <a:lstStyle/>
+          <a:p>
+            <a:pPr algn="l">
+              <a:lnSpc>
+                <a:spcPts val="2100"/>
+              </a:lnSpc>
+              <a:spcAft>
+                <a:spcPts val="0"/>
+              </a:spcAft>
+            </a:pPr>
+            <a:r>
+              <a:rPr sz="1400" b="1" i="0">
+                <a:solidFill>
+                  <a:srgbClr val="26456E"/>
+                </a:solidFill>
+                <a:latin typeface="Garamond"/>
+              </a:rPr>
+              <a:t>Validation</a:t>
+            </a:r>
+          </a:p>
+        </p:txBody>
+      </p:sp>
+      <p:sp>
+        <p:nvSpPr>
+          <p:cNvPr id="8" name="TextBox 7"/>
+          <p:cNvSpPr txBox="1"/>
+          <p:nvPr/>
+        </p:nvSpPr>
+        <p:spPr>
+          <a:xfrm>
+            <a:off x="1005840" y="3456432"/>
+            <a:ext cx="4206240" cy="1463040"/>
+          </a:xfrm>
+          <a:prstGeom prst="rect">
+            <a:avLst/>
+          </a:prstGeom>
+          <a:noFill/>
+        </p:spPr>
+        <p:txBody>
+          <a:bodyPr wrap="square" lIns="0" rIns="0" tIns="0" bIns="0">
+            <a:spAutoFit/>
+          </a:bodyPr>
+          <a:lstStyle/>
+          <a:p>
+            <a:pPr algn="l">
+              <a:lnSpc>
+                <a:spcPts val="1950"/>
+              </a:lnSpc>
+              <a:spcAft>
+                <a:spcPts val="800"/>
+              </a:spcAft>
+            </a:pPr>
+            <a:r>
+              <a:rPr sz="1300" b="0" i="0">
+                <a:solidFill>
+                  <a:srgbClr val="1A2430"/>
+                </a:solidFill>
+                <a:latin typeface="Garamond"/>
+              </a:rPr>
+              <a:t>Household identifier</a:t>
+            </a:r>
+          </a:p>
+          <a:p>
+            <a:pPr algn="l">
+              <a:lnSpc>
+                <a:spcPts val="1950"/>
+              </a:lnSpc>
+              <a:spcAft>
+                <a:spcPts val="800"/>
+              </a:spcAft>
+            </a:pPr>
+            <a:r>
+              <a:rPr sz="1300" b="0" i="0">
+                <a:solidFill>
+                  <a:srgbClr val="1A2430"/>
+                </a:solidFill>
+                <a:latin typeface="Garamond"/>
+              </a:rPr>
+              <a:t>Dwelling identifier</a:t>
+            </a:r>
+          </a:p>
+          <a:p>
+            <a:pPr algn="l">
+              <a:lnSpc>
+                <a:spcPts val="1950"/>
+              </a:lnSpc>
+              <a:spcAft>
+                <a:spcPts val="0"/>
+              </a:spcAft>
+            </a:pPr>
+            <a:r>
+              <a:rPr sz="1300" b="0" i="0">
+                <a:solidFill>
+                  <a:srgbClr val="1A2430"/>
+                </a:solidFill>
+                <a:latin typeface="Garamond"/>
+              </a:rPr>
+              <a:t>Person line number</a:t>
+            </a:r>
+          </a:p>
+        </p:txBody>
+      </p:sp>
+      <p:sp>
+        <p:nvSpPr>
+          <p:cNvPr id="9" name="TextBox 8"/>
+          <p:cNvSpPr txBox="1"/>
+          <p:nvPr/>
+        </p:nvSpPr>
+        <p:spPr>
+          <a:xfrm>
+            <a:off x="6035040" y="3456432"/>
+            <a:ext cx="4937760" cy="1463040"/>
+          </a:xfrm>
+          <a:prstGeom prst="rect">
+            <a:avLst/>
+          </a:prstGeom>
+          <a:noFill/>
+        </p:spPr>
+        <p:txBody>
+          <a:bodyPr wrap="square" lIns="0" rIns="0" tIns="0" bIns="0">
+            <a:spAutoFit/>
+          </a:bodyPr>
+          <a:lstStyle/>
+          <a:p>
+            <a:pPr algn="l">
+              <a:lnSpc>
+                <a:spcPts val="1950"/>
+              </a:lnSpc>
+              <a:spcAft>
+                <a:spcPts val="800"/>
+              </a:spcAft>
+            </a:pPr>
+            <a:r>
+              <a:rPr sz="1300" b="0" i="0">
+                <a:solidFill>
+                  <a:srgbClr val="1A2430"/>
+                </a:solidFill>
+                <a:latin typeface="Garamond"/>
+              </a:rPr>
+              <a:t>Sex, identical</a:t>
+            </a:r>
+          </a:p>
+          <a:p>
+            <a:pPr algn="l">
+              <a:lnSpc>
+                <a:spcPts val="1950"/>
+              </a:lnSpc>
+              <a:spcAft>
+                <a:spcPts val="800"/>
+              </a:spcAft>
+            </a:pPr>
+            <a:r>
+              <a:rPr sz="1300" b="0" i="0">
+                <a:solidFill>
+                  <a:srgbClr val="1A2430"/>
+                </a:solidFill>
+                <a:latin typeface="Garamond"/>
+              </a:rPr>
+              <a:t>Race, identical</a:t>
+            </a:r>
+          </a:p>
+          <a:p>
+            <a:pPr algn="l">
+              <a:lnSpc>
+                <a:spcPts val="1950"/>
+              </a:lnSpc>
+              <a:spcAft>
+                <a:spcPts val="0"/>
+              </a:spcAft>
+            </a:pPr>
+            <a:r>
+              <a:rPr sz="1300" b="0" i="0">
+                <a:solidFill>
+                  <a:srgbClr val="1A2430"/>
+                </a:solidFill>
+                <a:latin typeface="Garamond"/>
+              </a:rPr>
+              <a:t>Age, increasing by zero to two years</a:t>
+            </a:r>
+          </a:p>
+        </p:txBody>
+      </p:sp>
+      <p:cxnSp>
+        <p:nvCxnSpPr>
+          <p:cNvPr id="10" name="Connector 9"/>
+          <p:cNvCxnSpPr/>
+          <p:nvPr/>
+        </p:nvCxnSpPr>
+        <p:spPr>
+          <a:xfrm>
+            <a:off x="822960" y="5029200"/>
+            <a:ext cx="10543032" cy="0"/>
+          </a:xfrm>
+          <a:prstGeom prst="line">
+            <a:avLst/>
+          </a:prstGeom>
+          <a:ln w="12700">
+            <a:solidFill>
+              <a:srgbClr val="1A2430"/>
+            </a:solidFill>
+          </a:ln>
+        </p:spPr>
+        <p:style>
+          <a:lnRef idx="2">
+            <a:schemeClr val="accent1"/>
+          </a:lnRef>
+          <a:fillRef idx="0">
+            <a:schemeClr val="accent1"/>
+          </a:fillRef>
+          <a:effectRef idx="1">
+            <a:schemeClr val="accent1"/>
+          </a:effectRef>
+          <a:fontRef idx="minor">
+            <a:schemeClr val="tx1"/>
+          </a:fontRef>
+        </p:style>
+      </p:cxnSp>
+      <p:sp>
+        <p:nvSpPr>
+          <p:cNvPr id="11" name="TextBox 10"/>
+          <p:cNvSpPr txBox="1"/>
+          <p:nvPr/>
+        </p:nvSpPr>
+        <p:spPr>
+          <a:xfrm>
+            <a:off x="777240" y="5303520"/>
+            <a:ext cx="10698480" cy="548640"/>
+          </a:xfrm>
+          <a:prstGeom prst="rect">
+            <a:avLst/>
+          </a:prstGeom>
+          <a:noFill/>
+        </p:spPr>
+        <p:txBody>
+          <a:bodyPr wrap="square" lIns="0" rIns="0" tIns="0" bIns="0">
+            <a:spAutoFit/>
+          </a:bodyPr>
+          <a:lstStyle/>
+          <a:p>
+            <a:pPr algn="just">
+              <a:lnSpc>
+                <a:spcPts val="2025"/>
+              </a:lnSpc>
+              <a:spcAft>
+                <a:spcPts val="0"/>
+              </a:spcAft>
+            </a:pPr>
+            <a:r>
+              <a:rPr sz="1350" b="0" i="0">
+                <a:solidFill>
+                  <a:srgbClr val="1A2430"/>
+                </a:solidFill>
+                <a:latin typeface="Garamond"/>
+              </a:rPr>
+              <a:t>Validated links: 78 percent of teacher observations.</a:t>
             </a:r>
           </a:p>
         </p:txBody>
@@ -9187,7 +9580,7 @@
                 </a:solidFill>
                 <a:latin typeface="Garamond"/>
               </a:rPr>
-              <a:t>Linking individuals across waves</a:t>
+              <a:t>Measuring attrition: definitions</a:t>
             </a:r>
           </a:p>
         </p:txBody>
@@ -9200,8 +9593,8 @@
         </p:nvSpPr>
         <p:spPr>
           <a:xfrm>
-            <a:off x="777240" y="1691640"/>
-            <a:ext cx="10698480" cy="731520"/>
+            <a:off x="822960" y="1417320"/>
+            <a:ext cx="3200400" cy="320040"/>
           </a:xfrm>
           <a:prstGeom prst="rect">
             <a:avLst/>
@@ -9213,205 +9606,6 @@
             <a:spAutoFit/>
           </a:bodyPr>
           <a:lstStyle/>
-          <a:p>
-            <a:pPr algn="just">
-              <a:lnSpc>
-                <a:spcPts val="2550"/>
-              </a:lnSpc>
-              <a:spcAft>
-                <a:spcPts val="0"/>
-              </a:spcAft>
-            </a:pPr>
-            <a:r>
-              <a:rPr sz="1700" b="0" i="0">
-                <a:solidFill>
-                  <a:srgbClr val="1A2430"/>
-                </a:solidFill>
-                <a:latin typeface="Garamond"/>
-              </a:rPr>
-              <a:t>The CPS carries no individual identifier: records are linked on household identifiers and validated on demographics (Madrian and Lefgren, 1999).</a:t>
-            </a:r>
-          </a:p>
-        </p:txBody>
-      </p:sp>
-      <p:cxnSp>
-        <p:nvCxnSpPr>
-          <p:cNvPr id="5" name="Connector 4"/>
-          <p:cNvCxnSpPr/>
-          <p:nvPr/>
-        </p:nvCxnSpPr>
-        <p:spPr>
-          <a:xfrm>
-            <a:off x="822960" y="2788920"/>
-            <a:ext cx="10543032" cy="0"/>
-          </a:xfrm>
-          <a:prstGeom prst="line">
-            <a:avLst/>
-          </a:prstGeom>
-          <a:ln w="12700">
-            <a:solidFill>
-              <a:srgbClr val="1A2430"/>
-            </a:solidFill>
-          </a:ln>
-        </p:spPr>
-        <p:style>
-          <a:lnRef idx="2">
-            <a:schemeClr val="accent1"/>
-          </a:lnRef>
-          <a:fillRef idx="0">
-            <a:schemeClr val="accent1"/>
-          </a:fillRef>
-          <a:effectRef idx="1">
-            <a:schemeClr val="accent1"/>
-          </a:effectRef>
-          <a:fontRef idx="minor">
-            <a:schemeClr val="tx1"/>
-          </a:fontRef>
-        </p:style>
-      </p:cxnSp>
-      <p:sp>
-        <p:nvSpPr>
-          <p:cNvPr id="6" name="TextBox 5"/>
-          <p:cNvSpPr txBox="1"/>
-          <p:nvPr/>
-        </p:nvSpPr>
-        <p:spPr>
-          <a:xfrm>
-            <a:off x="1005840" y="2971800"/>
-            <a:ext cx="4206240" cy="365760"/>
-          </a:xfrm>
-          <a:prstGeom prst="rect">
-            <a:avLst/>
-          </a:prstGeom>
-          <a:noFill/>
-        </p:spPr>
-        <p:txBody>
-          <a:bodyPr wrap="square" lIns="0" rIns="0" tIns="0" bIns="0">
-            <a:spAutoFit/>
-          </a:bodyPr>
-          <a:lstStyle/>
-          <a:p>
-            <a:pPr algn="l">
-              <a:lnSpc>
-                <a:spcPts val="2100"/>
-              </a:lnSpc>
-              <a:spcAft>
-                <a:spcPts val="0"/>
-              </a:spcAft>
-            </a:pPr>
-            <a:r>
-              <a:rPr sz="1400" b="1" i="0">
-                <a:solidFill>
-                  <a:srgbClr val="26456E"/>
-                </a:solidFill>
-                <a:latin typeface="Garamond"/>
-              </a:rPr>
-              <a:t>Linkage keys (exact match)</a:t>
-            </a:r>
-          </a:p>
-        </p:txBody>
-      </p:sp>
-      <p:sp>
-        <p:nvSpPr>
-          <p:cNvPr id="7" name="TextBox 6"/>
-          <p:cNvSpPr txBox="1"/>
-          <p:nvPr/>
-        </p:nvSpPr>
-        <p:spPr>
-          <a:xfrm>
-            <a:off x="6035040" y="2971800"/>
-            <a:ext cx="4937760" cy="365760"/>
-          </a:xfrm>
-          <a:prstGeom prst="rect">
-            <a:avLst/>
-          </a:prstGeom>
-          <a:noFill/>
-        </p:spPr>
-        <p:txBody>
-          <a:bodyPr wrap="square" lIns="0" rIns="0" tIns="0" bIns="0">
-            <a:spAutoFit/>
-          </a:bodyPr>
-          <a:lstStyle/>
-          <a:p>
-            <a:pPr algn="l">
-              <a:lnSpc>
-                <a:spcPts val="2100"/>
-              </a:lnSpc>
-              <a:spcAft>
-                <a:spcPts val="0"/>
-              </a:spcAft>
-            </a:pPr>
-            <a:r>
-              <a:rPr sz="1400" b="1" i="0">
-                <a:solidFill>
-                  <a:srgbClr val="26456E"/>
-                </a:solidFill>
-                <a:latin typeface="Garamond"/>
-              </a:rPr>
-              <a:t>Validation</a:t>
-            </a:r>
-          </a:p>
-        </p:txBody>
-      </p:sp>
-      <p:sp>
-        <p:nvSpPr>
-          <p:cNvPr id="8" name="TextBox 7"/>
-          <p:cNvSpPr txBox="1"/>
-          <p:nvPr/>
-        </p:nvSpPr>
-        <p:spPr>
-          <a:xfrm>
-            <a:off x="1005840" y="3456432"/>
-            <a:ext cx="4206240" cy="1463040"/>
-          </a:xfrm>
-          <a:prstGeom prst="rect">
-            <a:avLst/>
-          </a:prstGeom>
-          <a:noFill/>
-        </p:spPr>
-        <p:txBody>
-          <a:bodyPr wrap="square" lIns="0" rIns="0" tIns="0" bIns="0">
-            <a:spAutoFit/>
-          </a:bodyPr>
-          <a:lstStyle/>
-          <a:p>
-            <a:pPr algn="l">
-              <a:lnSpc>
-                <a:spcPts val="1950"/>
-              </a:lnSpc>
-              <a:spcAft>
-                <a:spcPts val="800"/>
-              </a:spcAft>
-            </a:pPr>
-            <a:r>
-              <a:rPr sz="1300" b="0" i="0">
-                <a:solidFill>
-                  <a:srgbClr val="1A2430"/>
-                </a:solidFill>
-                <a:latin typeface="Garamond"/>
-              </a:rPr>
-              <a:t>Household identifier</a:t>
-            </a:r>
-          </a:p>
-          <a:p>
-            <a:pPr algn="l">
-              <a:lnSpc>
-                <a:spcPts val="1950"/>
-              </a:lnSpc>
-              <a:spcAft>
-                <a:spcPts val="800"/>
-              </a:spcAft>
-            </a:pPr>
-            <a:r>
-              <a:rPr sz="1300" b="0" i="0">
-                <a:solidFill>
-                  <a:srgbClr val="1A2430"/>
-                </a:solidFill>
-                <a:latin typeface="Garamond"/>
-              </a:rPr>
-              <a:t>Dwelling identifier</a:t>
-            </a:r>
-          </a:p>
           <a:p>
             <a:pPr algn="l">
               <a:lnSpc>
@@ -9422,27 +9616,27 @@
               </a:spcAft>
             </a:pPr>
             <a:r>
-              <a:rPr sz="1300" b="0" i="0">
-                <a:solidFill>
-                  <a:srgbClr val="1A2430"/>
+              <a:rPr sz="1300" b="1" i="0">
+                <a:solidFill>
+                  <a:srgbClr val="1F3864"/>
                 </a:solidFill>
                 <a:latin typeface="Garamond"/>
               </a:rPr>
-              <a:t>Person line number</a:t>
-            </a:r>
-          </a:p>
-        </p:txBody>
-      </p:sp>
-      <p:sp>
-        <p:nvSpPr>
-          <p:cNvPr id="9" name="TextBox 8"/>
+              <a:t>Year 1: interviews 1–4</a:t>
+            </a:r>
+          </a:p>
+        </p:txBody>
+      </p:sp>
+      <p:sp>
+        <p:nvSpPr>
+          <p:cNvPr id="5" name="TextBox 4"/>
           <p:cNvSpPr txBox="1"/>
           <p:nvPr/>
         </p:nvSpPr>
         <p:spPr>
           <a:xfrm>
-            <a:off x="6035040" y="3456432"/>
-            <a:ext cx="4937760" cy="1463040"/>
+            <a:off x="4480560" y="1417320"/>
+            <a:ext cx="3291840" cy="320040"/>
           </a:xfrm>
           <a:prstGeom prst="rect">
             <a:avLst/>
@@ -9455,43 +9649,1030 @@
           </a:bodyPr>
           <a:lstStyle/>
           <a:p>
-            <a:pPr algn="l">
+            <a:pPr algn="ctr">
+              <a:lnSpc>
+                <a:spcPts val="1875"/>
+              </a:lnSpc>
+              <a:spcAft>
+                <a:spcPts val="0"/>
+              </a:spcAft>
+            </a:pPr>
+            <a:r>
+              <a:rPr sz="1250" b="0" i="1">
+                <a:solidFill>
+                  <a:srgbClr val="6B7480"/>
+                </a:solidFill>
+                <a:latin typeface="Garamond"/>
+              </a:rPr>
+              <a:t>8 months out of the sample</a:t>
+            </a:r>
+          </a:p>
+        </p:txBody>
+      </p:sp>
+      <p:sp>
+        <p:nvSpPr>
+          <p:cNvPr id="6" name="TextBox 5"/>
+          <p:cNvSpPr txBox="1"/>
+          <p:nvPr/>
+        </p:nvSpPr>
+        <p:spPr>
+          <a:xfrm>
+            <a:off x="8229600" y="1417320"/>
+            <a:ext cx="3200400" cy="320040"/>
+          </a:xfrm>
+          <a:prstGeom prst="rect">
+            <a:avLst/>
+          </a:prstGeom>
+          <a:noFill/>
+        </p:spPr>
+        <p:txBody>
+          <a:bodyPr wrap="square" lIns="0" rIns="0" tIns="0" bIns="0">
+            <a:spAutoFit/>
+          </a:bodyPr>
+          <a:lstStyle/>
+          <a:p>
+            <a:pPr algn="r">
               <a:lnSpc>
                 <a:spcPts val="1950"/>
               </a:lnSpc>
               <a:spcAft>
-                <a:spcPts val="800"/>
+                <a:spcPts val="0"/>
               </a:spcAft>
             </a:pPr>
             <a:r>
-              <a:rPr sz="1300" b="0" i="0">
-                <a:solidFill>
-                  <a:srgbClr val="1A2430"/>
+              <a:rPr sz="1300" b="1" i="0">
+                <a:solidFill>
+                  <a:srgbClr val="7B2530"/>
                 </a:solidFill>
                 <a:latin typeface="Garamond"/>
               </a:rPr>
-              <a:t>Sex, identical</a:t>
-            </a:r>
-          </a:p>
+              <a:t>Year 2: interviews 5–8</a:t>
+            </a:r>
+          </a:p>
+        </p:txBody>
+      </p:sp>
+      <p:sp>
+        <p:nvSpPr>
+          <p:cNvPr id="7" name="Rectangle 6"/>
+          <p:cNvSpPr/>
+          <p:nvPr/>
+        </p:nvSpPr>
+        <p:spPr>
+          <a:xfrm>
+            <a:off x="822960" y="1755648"/>
+            <a:ext cx="658939" cy="457200"/>
+          </a:xfrm>
+          <a:prstGeom prst="rect">
+            <a:avLst/>
+          </a:prstGeom>
+          <a:solidFill>
+            <a:srgbClr val="1F3864"/>
+          </a:solidFill>
+          <a:ln>
+            <a:noFill/>
+          </a:ln>
+          <a:effectLst/>
+        </p:spPr>
+        <p:style>
+          <a:lnRef idx="1">
+            <a:schemeClr val="accent1"/>
+          </a:lnRef>
+          <a:fillRef idx="3">
+            <a:schemeClr val="accent1"/>
+          </a:fillRef>
+          <a:effectRef idx="2">
+            <a:schemeClr val="accent1"/>
+          </a:effectRef>
+          <a:fontRef idx="minor">
+            <a:schemeClr val="lt1"/>
+          </a:fontRef>
+        </p:style>
+        <p:txBody>
+          <a:bodyPr rtlCol="0" anchor="ctr" wrap="none"/>
+          <a:lstStyle/>
+          <a:p>
+            <a:pPr algn="ctr"/>
+            <a:r>
+              <a:rPr sz="1200" b="1">
+                <a:solidFill>
+                  <a:srgbClr val="FFFFFF"/>
+                </a:solidFill>
+                <a:latin typeface="Garamond"/>
+              </a:rPr>
+              <a:t>1</a:t>
+            </a:r>
+          </a:p>
+        </p:txBody>
+      </p:sp>
+      <p:sp>
+        <p:nvSpPr>
+          <p:cNvPr id="8" name="Rectangle 7"/>
+          <p:cNvSpPr/>
+          <p:nvPr/>
+        </p:nvSpPr>
+        <p:spPr>
+          <a:xfrm>
+            <a:off x="1481899" y="1755648"/>
+            <a:ext cx="658939" cy="457200"/>
+          </a:xfrm>
+          <a:prstGeom prst="rect">
+            <a:avLst/>
+          </a:prstGeom>
+          <a:solidFill>
+            <a:srgbClr val="1F3864"/>
+          </a:solidFill>
+          <a:ln>
+            <a:noFill/>
+          </a:ln>
+          <a:effectLst/>
+        </p:spPr>
+        <p:style>
+          <a:lnRef idx="1">
+            <a:schemeClr val="accent1"/>
+          </a:lnRef>
+          <a:fillRef idx="3">
+            <a:schemeClr val="accent1"/>
+          </a:fillRef>
+          <a:effectRef idx="2">
+            <a:schemeClr val="accent1"/>
+          </a:effectRef>
+          <a:fontRef idx="minor">
+            <a:schemeClr val="lt1"/>
+          </a:fontRef>
+        </p:style>
+        <p:txBody>
+          <a:bodyPr rtlCol="0" anchor="ctr" wrap="none"/>
+          <a:lstStyle/>
+          <a:p>
+            <a:pPr algn="ctr"/>
+            <a:r>
+              <a:rPr sz="1200" b="1">
+                <a:solidFill>
+                  <a:srgbClr val="FFFFFF"/>
+                </a:solidFill>
+                <a:latin typeface="Garamond"/>
+              </a:rPr>
+              <a:t>2</a:t>
+            </a:r>
+          </a:p>
+        </p:txBody>
+      </p:sp>
+      <p:sp>
+        <p:nvSpPr>
+          <p:cNvPr id="9" name="Rectangle 8"/>
+          <p:cNvSpPr/>
+          <p:nvPr/>
+        </p:nvSpPr>
+        <p:spPr>
+          <a:xfrm>
+            <a:off x="2140839" y="1755648"/>
+            <a:ext cx="658939" cy="457200"/>
+          </a:xfrm>
+          <a:prstGeom prst="rect">
+            <a:avLst/>
+          </a:prstGeom>
+          <a:solidFill>
+            <a:srgbClr val="1F3864"/>
+          </a:solidFill>
+          <a:ln>
+            <a:noFill/>
+          </a:ln>
+          <a:effectLst/>
+        </p:spPr>
+        <p:style>
+          <a:lnRef idx="1">
+            <a:schemeClr val="accent1"/>
+          </a:lnRef>
+          <a:fillRef idx="3">
+            <a:schemeClr val="accent1"/>
+          </a:fillRef>
+          <a:effectRef idx="2">
+            <a:schemeClr val="accent1"/>
+          </a:effectRef>
+          <a:fontRef idx="minor">
+            <a:schemeClr val="lt1"/>
+          </a:fontRef>
+        </p:style>
+        <p:txBody>
+          <a:bodyPr rtlCol="0" anchor="ctr" wrap="none"/>
+          <a:lstStyle/>
+          <a:p>
+            <a:pPr algn="ctr"/>
+            <a:r>
+              <a:rPr sz="1200" b="1">
+                <a:solidFill>
+                  <a:srgbClr val="FFFFFF"/>
+                </a:solidFill>
+                <a:latin typeface="Garamond"/>
+              </a:rPr>
+              <a:t>3</a:t>
+            </a:r>
+          </a:p>
+        </p:txBody>
+      </p:sp>
+      <p:sp>
+        <p:nvSpPr>
+          <p:cNvPr id="10" name="Rectangle 9"/>
+          <p:cNvSpPr/>
+          <p:nvPr/>
+        </p:nvSpPr>
+        <p:spPr>
+          <a:xfrm>
+            <a:off x="2799778" y="1755648"/>
+            <a:ext cx="658939" cy="457200"/>
+          </a:xfrm>
+          <a:prstGeom prst="rect">
+            <a:avLst/>
+          </a:prstGeom>
+          <a:solidFill>
+            <a:srgbClr val="1F3864"/>
+          </a:solidFill>
+          <a:ln>
+            <a:noFill/>
+          </a:ln>
+          <a:effectLst/>
+        </p:spPr>
+        <p:style>
+          <a:lnRef idx="1">
+            <a:schemeClr val="accent1"/>
+          </a:lnRef>
+          <a:fillRef idx="3">
+            <a:schemeClr val="accent1"/>
+          </a:fillRef>
+          <a:effectRef idx="2">
+            <a:schemeClr val="accent1"/>
+          </a:effectRef>
+          <a:fontRef idx="minor">
+            <a:schemeClr val="lt1"/>
+          </a:fontRef>
+        </p:style>
+        <p:txBody>
+          <a:bodyPr rtlCol="0" anchor="ctr" wrap="none"/>
+          <a:lstStyle/>
+          <a:p>
+            <a:pPr algn="ctr"/>
+            <a:r>
+              <a:rPr sz="1200" b="1">
+                <a:solidFill>
+                  <a:srgbClr val="FFFFFF"/>
+                </a:solidFill>
+                <a:latin typeface="Garamond"/>
+              </a:rPr>
+              <a:t>4</a:t>
+            </a:r>
+          </a:p>
+        </p:txBody>
+      </p:sp>
+      <p:sp>
+        <p:nvSpPr>
+          <p:cNvPr id="11" name="Rectangle 10"/>
+          <p:cNvSpPr/>
+          <p:nvPr/>
+        </p:nvSpPr>
+        <p:spPr>
+          <a:xfrm>
+            <a:off x="3458718" y="1755648"/>
+            <a:ext cx="658939" cy="457200"/>
+          </a:xfrm>
+          <a:prstGeom prst="rect">
+            <a:avLst/>
+          </a:prstGeom>
+          <a:solidFill>
+            <a:srgbClr val="FFFFFF"/>
+          </a:solidFill>
+          <a:ln w="9525">
+            <a:solidFill>
+              <a:srgbClr val="C9CFD6"/>
+            </a:solidFill>
+          </a:ln>
+          <a:effectLst/>
+        </p:spPr>
+        <p:style>
+          <a:lnRef idx="1">
+            <a:schemeClr val="accent1"/>
+          </a:lnRef>
+          <a:fillRef idx="3">
+            <a:schemeClr val="accent1"/>
+          </a:fillRef>
+          <a:effectRef idx="2">
+            <a:schemeClr val="accent1"/>
+          </a:effectRef>
+          <a:fontRef idx="minor">
+            <a:schemeClr val="lt1"/>
+          </a:fontRef>
+        </p:style>
+        <p:txBody>
+          <a:bodyPr rtlCol="0" anchor="ctr" wrap="none"/>
+          <a:lstStyle/>
+          <a:p>
+            <a:pPr algn="ctr"/>
+            <a:r>
+              <a:rPr sz="1200" b="1">
+                <a:solidFill>
+                  <a:srgbClr val="6B7480"/>
+                </a:solidFill>
+                <a:latin typeface="Garamond"/>
+              </a:rPr>
+              <a:t>5</a:t>
+            </a:r>
+          </a:p>
+        </p:txBody>
+      </p:sp>
+      <p:sp>
+        <p:nvSpPr>
+          <p:cNvPr id="12" name="Rectangle 11"/>
+          <p:cNvSpPr/>
+          <p:nvPr/>
+        </p:nvSpPr>
+        <p:spPr>
+          <a:xfrm>
+            <a:off x="4117657" y="1755648"/>
+            <a:ext cx="658939" cy="457200"/>
+          </a:xfrm>
+          <a:prstGeom prst="rect">
+            <a:avLst/>
+          </a:prstGeom>
+          <a:solidFill>
+            <a:srgbClr val="FFFFFF"/>
+          </a:solidFill>
+          <a:ln w="9525">
+            <a:solidFill>
+              <a:srgbClr val="C9CFD6"/>
+            </a:solidFill>
+          </a:ln>
+          <a:effectLst/>
+        </p:spPr>
+        <p:style>
+          <a:lnRef idx="1">
+            <a:schemeClr val="accent1"/>
+          </a:lnRef>
+          <a:fillRef idx="3">
+            <a:schemeClr val="accent1"/>
+          </a:fillRef>
+          <a:effectRef idx="2">
+            <a:schemeClr val="accent1"/>
+          </a:effectRef>
+          <a:fontRef idx="minor">
+            <a:schemeClr val="lt1"/>
+          </a:fontRef>
+        </p:style>
+        <p:txBody>
+          <a:bodyPr rtlCol="0" anchor="ctr" wrap="none"/>
+          <a:lstStyle/>
+          <a:p>
+            <a:pPr algn="ctr"/>
+            <a:r>
+              <a:rPr sz="1200" b="1">
+                <a:solidFill>
+                  <a:srgbClr val="6B7480"/>
+                </a:solidFill>
+                <a:latin typeface="Garamond"/>
+              </a:rPr>
+              <a:t>6</a:t>
+            </a:r>
+          </a:p>
+        </p:txBody>
+      </p:sp>
+      <p:sp>
+        <p:nvSpPr>
+          <p:cNvPr id="13" name="Rectangle 12"/>
+          <p:cNvSpPr/>
+          <p:nvPr/>
+        </p:nvSpPr>
+        <p:spPr>
+          <a:xfrm>
+            <a:off x="4776597" y="1755648"/>
+            <a:ext cx="658939" cy="457200"/>
+          </a:xfrm>
+          <a:prstGeom prst="rect">
+            <a:avLst/>
+          </a:prstGeom>
+          <a:solidFill>
+            <a:srgbClr val="FFFFFF"/>
+          </a:solidFill>
+          <a:ln w="9525">
+            <a:solidFill>
+              <a:srgbClr val="C9CFD6"/>
+            </a:solidFill>
+          </a:ln>
+          <a:effectLst/>
+        </p:spPr>
+        <p:style>
+          <a:lnRef idx="1">
+            <a:schemeClr val="accent1"/>
+          </a:lnRef>
+          <a:fillRef idx="3">
+            <a:schemeClr val="accent1"/>
+          </a:fillRef>
+          <a:effectRef idx="2">
+            <a:schemeClr val="accent1"/>
+          </a:effectRef>
+          <a:fontRef idx="minor">
+            <a:schemeClr val="lt1"/>
+          </a:fontRef>
+        </p:style>
+        <p:txBody>
+          <a:bodyPr rtlCol="0" anchor="ctr" wrap="none"/>
+          <a:lstStyle/>
+          <a:p>
+            <a:pPr algn="ctr"/>
+            <a:r>
+              <a:rPr sz="1200" b="1">
+                <a:solidFill>
+                  <a:srgbClr val="6B7480"/>
+                </a:solidFill>
+                <a:latin typeface="Garamond"/>
+              </a:rPr>
+              <a:t>7</a:t>
+            </a:r>
+          </a:p>
+        </p:txBody>
+      </p:sp>
+      <p:sp>
+        <p:nvSpPr>
+          <p:cNvPr id="14" name="Rectangle 13"/>
+          <p:cNvSpPr/>
+          <p:nvPr/>
+        </p:nvSpPr>
+        <p:spPr>
+          <a:xfrm>
+            <a:off x="5435536" y="1755648"/>
+            <a:ext cx="658939" cy="457200"/>
+          </a:xfrm>
+          <a:prstGeom prst="rect">
+            <a:avLst/>
+          </a:prstGeom>
+          <a:solidFill>
+            <a:srgbClr val="FFFFFF"/>
+          </a:solidFill>
+          <a:ln w="9525">
+            <a:solidFill>
+              <a:srgbClr val="C9CFD6"/>
+            </a:solidFill>
+          </a:ln>
+          <a:effectLst/>
+        </p:spPr>
+        <p:style>
+          <a:lnRef idx="1">
+            <a:schemeClr val="accent1"/>
+          </a:lnRef>
+          <a:fillRef idx="3">
+            <a:schemeClr val="accent1"/>
+          </a:fillRef>
+          <a:effectRef idx="2">
+            <a:schemeClr val="accent1"/>
+          </a:effectRef>
+          <a:fontRef idx="minor">
+            <a:schemeClr val="lt1"/>
+          </a:fontRef>
+        </p:style>
+        <p:txBody>
+          <a:bodyPr rtlCol="0" anchor="ctr" wrap="none"/>
+          <a:lstStyle/>
+          <a:p>
+            <a:pPr algn="ctr"/>
+            <a:r>
+              <a:rPr sz="1200" b="1">
+                <a:solidFill>
+                  <a:srgbClr val="6B7480"/>
+                </a:solidFill>
+                <a:latin typeface="Garamond"/>
+              </a:rPr>
+              <a:t>8</a:t>
+            </a:r>
+          </a:p>
+        </p:txBody>
+      </p:sp>
+      <p:sp>
+        <p:nvSpPr>
+          <p:cNvPr id="15" name="Rectangle 14"/>
+          <p:cNvSpPr/>
+          <p:nvPr/>
+        </p:nvSpPr>
+        <p:spPr>
+          <a:xfrm>
+            <a:off x="6094476" y="1755648"/>
+            <a:ext cx="658939" cy="457200"/>
+          </a:xfrm>
+          <a:prstGeom prst="rect">
+            <a:avLst/>
+          </a:prstGeom>
+          <a:solidFill>
+            <a:srgbClr val="FFFFFF"/>
+          </a:solidFill>
+          <a:ln w="9525">
+            <a:solidFill>
+              <a:srgbClr val="C9CFD6"/>
+            </a:solidFill>
+          </a:ln>
+          <a:effectLst/>
+        </p:spPr>
+        <p:style>
+          <a:lnRef idx="1">
+            <a:schemeClr val="accent1"/>
+          </a:lnRef>
+          <a:fillRef idx="3">
+            <a:schemeClr val="accent1"/>
+          </a:fillRef>
+          <a:effectRef idx="2">
+            <a:schemeClr val="accent1"/>
+          </a:effectRef>
+          <a:fontRef idx="minor">
+            <a:schemeClr val="lt1"/>
+          </a:fontRef>
+        </p:style>
+        <p:txBody>
+          <a:bodyPr rtlCol="0" anchor="ctr" wrap="none"/>
+          <a:lstStyle/>
+          <a:p>
+            <a:pPr algn="ctr"/>
+            <a:r>
+              <a:rPr sz="1200" b="1">
+                <a:solidFill>
+                  <a:srgbClr val="6B7480"/>
+                </a:solidFill>
+                <a:latin typeface="Garamond"/>
+              </a:rPr>
+              <a:t>9</a:t>
+            </a:r>
+          </a:p>
+        </p:txBody>
+      </p:sp>
+      <p:sp>
+        <p:nvSpPr>
+          <p:cNvPr id="16" name="Rectangle 15"/>
+          <p:cNvSpPr/>
+          <p:nvPr/>
+        </p:nvSpPr>
+        <p:spPr>
+          <a:xfrm>
+            <a:off x="6753415" y="1755648"/>
+            <a:ext cx="658939" cy="457200"/>
+          </a:xfrm>
+          <a:prstGeom prst="rect">
+            <a:avLst/>
+          </a:prstGeom>
+          <a:solidFill>
+            <a:srgbClr val="FFFFFF"/>
+          </a:solidFill>
+          <a:ln w="9525">
+            <a:solidFill>
+              <a:srgbClr val="C9CFD6"/>
+            </a:solidFill>
+          </a:ln>
+          <a:effectLst/>
+        </p:spPr>
+        <p:style>
+          <a:lnRef idx="1">
+            <a:schemeClr val="accent1"/>
+          </a:lnRef>
+          <a:fillRef idx="3">
+            <a:schemeClr val="accent1"/>
+          </a:fillRef>
+          <a:effectRef idx="2">
+            <a:schemeClr val="accent1"/>
+          </a:effectRef>
+          <a:fontRef idx="minor">
+            <a:schemeClr val="lt1"/>
+          </a:fontRef>
+        </p:style>
+        <p:txBody>
+          <a:bodyPr rtlCol="0" anchor="ctr" wrap="none"/>
+          <a:lstStyle/>
+          <a:p>
+            <a:pPr algn="ctr"/>
+            <a:r>
+              <a:rPr sz="1200" b="1">
+                <a:solidFill>
+                  <a:srgbClr val="6B7480"/>
+                </a:solidFill>
+                <a:latin typeface="Garamond"/>
+              </a:rPr>
+              <a:t>10</a:t>
+            </a:r>
+          </a:p>
+        </p:txBody>
+      </p:sp>
+      <p:sp>
+        <p:nvSpPr>
+          <p:cNvPr id="17" name="Rectangle 16"/>
+          <p:cNvSpPr/>
+          <p:nvPr/>
+        </p:nvSpPr>
+        <p:spPr>
+          <a:xfrm>
+            <a:off x="7412354" y="1755648"/>
+            <a:ext cx="658939" cy="457200"/>
+          </a:xfrm>
+          <a:prstGeom prst="rect">
+            <a:avLst/>
+          </a:prstGeom>
+          <a:solidFill>
+            <a:srgbClr val="FFFFFF"/>
+          </a:solidFill>
+          <a:ln w="9525">
+            <a:solidFill>
+              <a:srgbClr val="C9CFD6"/>
+            </a:solidFill>
+          </a:ln>
+          <a:effectLst/>
+        </p:spPr>
+        <p:style>
+          <a:lnRef idx="1">
+            <a:schemeClr val="accent1"/>
+          </a:lnRef>
+          <a:fillRef idx="3">
+            <a:schemeClr val="accent1"/>
+          </a:fillRef>
+          <a:effectRef idx="2">
+            <a:schemeClr val="accent1"/>
+          </a:effectRef>
+          <a:fontRef idx="minor">
+            <a:schemeClr val="lt1"/>
+          </a:fontRef>
+        </p:style>
+        <p:txBody>
+          <a:bodyPr rtlCol="0" anchor="ctr" wrap="none"/>
+          <a:lstStyle/>
+          <a:p>
+            <a:pPr algn="ctr"/>
+            <a:r>
+              <a:rPr sz="1200" b="1">
+                <a:solidFill>
+                  <a:srgbClr val="6B7480"/>
+                </a:solidFill>
+                <a:latin typeface="Garamond"/>
+              </a:rPr>
+              <a:t>11</a:t>
+            </a:r>
+          </a:p>
+        </p:txBody>
+      </p:sp>
+      <p:sp>
+        <p:nvSpPr>
+          <p:cNvPr id="18" name="Rectangle 17"/>
+          <p:cNvSpPr/>
+          <p:nvPr/>
+        </p:nvSpPr>
+        <p:spPr>
+          <a:xfrm>
+            <a:off x="8071294" y="1755648"/>
+            <a:ext cx="658939" cy="457200"/>
+          </a:xfrm>
+          <a:prstGeom prst="rect">
+            <a:avLst/>
+          </a:prstGeom>
+          <a:solidFill>
+            <a:srgbClr val="FFFFFF"/>
+          </a:solidFill>
+          <a:ln w="9525">
+            <a:solidFill>
+              <a:srgbClr val="C9CFD6"/>
+            </a:solidFill>
+          </a:ln>
+          <a:effectLst/>
+        </p:spPr>
+        <p:style>
+          <a:lnRef idx="1">
+            <a:schemeClr val="accent1"/>
+          </a:lnRef>
+          <a:fillRef idx="3">
+            <a:schemeClr val="accent1"/>
+          </a:fillRef>
+          <a:effectRef idx="2">
+            <a:schemeClr val="accent1"/>
+          </a:effectRef>
+          <a:fontRef idx="minor">
+            <a:schemeClr val="lt1"/>
+          </a:fontRef>
+        </p:style>
+        <p:txBody>
+          <a:bodyPr rtlCol="0" anchor="ctr" wrap="none"/>
+          <a:lstStyle/>
+          <a:p>
+            <a:pPr algn="ctr"/>
+            <a:r>
+              <a:rPr sz="1200" b="1">
+                <a:solidFill>
+                  <a:srgbClr val="6B7480"/>
+                </a:solidFill>
+                <a:latin typeface="Garamond"/>
+              </a:rPr>
+              <a:t>12</a:t>
+            </a:r>
+          </a:p>
+        </p:txBody>
+      </p:sp>
+      <p:sp>
+        <p:nvSpPr>
+          <p:cNvPr id="19" name="Rectangle 18"/>
+          <p:cNvSpPr/>
+          <p:nvPr/>
+        </p:nvSpPr>
+        <p:spPr>
+          <a:xfrm>
+            <a:off x="8730234" y="1755648"/>
+            <a:ext cx="658939" cy="457200"/>
+          </a:xfrm>
+          <a:prstGeom prst="rect">
+            <a:avLst/>
+          </a:prstGeom>
+          <a:solidFill>
+            <a:srgbClr val="7B2530"/>
+          </a:solidFill>
+          <a:ln>
+            <a:noFill/>
+          </a:ln>
+          <a:effectLst/>
+        </p:spPr>
+        <p:style>
+          <a:lnRef idx="1">
+            <a:schemeClr val="accent1"/>
+          </a:lnRef>
+          <a:fillRef idx="3">
+            <a:schemeClr val="accent1"/>
+          </a:fillRef>
+          <a:effectRef idx="2">
+            <a:schemeClr val="accent1"/>
+          </a:effectRef>
+          <a:fontRef idx="minor">
+            <a:schemeClr val="lt1"/>
+          </a:fontRef>
+        </p:style>
+        <p:txBody>
+          <a:bodyPr rtlCol="0" anchor="ctr" wrap="none"/>
+          <a:lstStyle/>
+          <a:p>
+            <a:pPr algn="ctr"/>
+            <a:r>
+              <a:rPr sz="1200" b="1">
+                <a:solidFill>
+                  <a:srgbClr val="FFFFFF"/>
+                </a:solidFill>
+                <a:latin typeface="Garamond"/>
+              </a:rPr>
+              <a:t>13</a:t>
+            </a:r>
+          </a:p>
+        </p:txBody>
+      </p:sp>
+      <p:sp>
+        <p:nvSpPr>
+          <p:cNvPr id="20" name="Rectangle 19"/>
+          <p:cNvSpPr/>
+          <p:nvPr/>
+        </p:nvSpPr>
+        <p:spPr>
+          <a:xfrm>
+            <a:off x="9389173" y="1755648"/>
+            <a:ext cx="658939" cy="457200"/>
+          </a:xfrm>
+          <a:prstGeom prst="rect">
+            <a:avLst/>
+          </a:prstGeom>
+          <a:solidFill>
+            <a:srgbClr val="7B2530"/>
+          </a:solidFill>
+          <a:ln>
+            <a:noFill/>
+          </a:ln>
+          <a:effectLst/>
+        </p:spPr>
+        <p:style>
+          <a:lnRef idx="1">
+            <a:schemeClr val="accent1"/>
+          </a:lnRef>
+          <a:fillRef idx="3">
+            <a:schemeClr val="accent1"/>
+          </a:fillRef>
+          <a:effectRef idx="2">
+            <a:schemeClr val="accent1"/>
+          </a:effectRef>
+          <a:fontRef idx="minor">
+            <a:schemeClr val="lt1"/>
+          </a:fontRef>
+        </p:style>
+        <p:txBody>
+          <a:bodyPr rtlCol="0" anchor="ctr" wrap="none"/>
+          <a:lstStyle/>
+          <a:p>
+            <a:pPr algn="ctr"/>
+            <a:r>
+              <a:rPr sz="1200" b="1">
+                <a:solidFill>
+                  <a:srgbClr val="FFFFFF"/>
+                </a:solidFill>
+                <a:latin typeface="Garamond"/>
+              </a:rPr>
+              <a:t>14</a:t>
+            </a:r>
+          </a:p>
+        </p:txBody>
+      </p:sp>
+      <p:sp>
+        <p:nvSpPr>
+          <p:cNvPr id="21" name="Rectangle 20"/>
+          <p:cNvSpPr/>
+          <p:nvPr/>
+        </p:nvSpPr>
+        <p:spPr>
+          <a:xfrm>
+            <a:off x="10048113" y="1755648"/>
+            <a:ext cx="658939" cy="457200"/>
+          </a:xfrm>
+          <a:prstGeom prst="rect">
+            <a:avLst/>
+          </a:prstGeom>
+          <a:solidFill>
+            <a:srgbClr val="7B2530"/>
+          </a:solidFill>
+          <a:ln>
+            <a:noFill/>
+          </a:ln>
+          <a:effectLst/>
+        </p:spPr>
+        <p:style>
+          <a:lnRef idx="1">
+            <a:schemeClr val="accent1"/>
+          </a:lnRef>
+          <a:fillRef idx="3">
+            <a:schemeClr val="accent1"/>
+          </a:fillRef>
+          <a:effectRef idx="2">
+            <a:schemeClr val="accent1"/>
+          </a:effectRef>
+          <a:fontRef idx="minor">
+            <a:schemeClr val="lt1"/>
+          </a:fontRef>
+        </p:style>
+        <p:txBody>
+          <a:bodyPr rtlCol="0" anchor="ctr" wrap="none"/>
+          <a:lstStyle/>
+          <a:p>
+            <a:pPr algn="ctr"/>
+            <a:r>
+              <a:rPr sz="1200" b="1">
+                <a:solidFill>
+                  <a:srgbClr val="FFFFFF"/>
+                </a:solidFill>
+                <a:latin typeface="Garamond"/>
+              </a:rPr>
+              <a:t>15</a:t>
+            </a:r>
+          </a:p>
+        </p:txBody>
+      </p:sp>
+      <p:sp>
+        <p:nvSpPr>
+          <p:cNvPr id="22" name="Rectangle 21"/>
+          <p:cNvSpPr/>
+          <p:nvPr/>
+        </p:nvSpPr>
+        <p:spPr>
+          <a:xfrm>
+            <a:off x="10707052" y="1755648"/>
+            <a:ext cx="658939" cy="457200"/>
+          </a:xfrm>
+          <a:prstGeom prst="rect">
+            <a:avLst/>
+          </a:prstGeom>
+          <a:solidFill>
+            <a:srgbClr val="7B2530"/>
+          </a:solidFill>
+          <a:ln>
+            <a:noFill/>
+          </a:ln>
+          <a:effectLst/>
+        </p:spPr>
+        <p:style>
+          <a:lnRef idx="1">
+            <a:schemeClr val="accent1"/>
+          </a:lnRef>
+          <a:fillRef idx="3">
+            <a:schemeClr val="accent1"/>
+          </a:fillRef>
+          <a:effectRef idx="2">
+            <a:schemeClr val="accent1"/>
+          </a:effectRef>
+          <a:fontRef idx="minor">
+            <a:schemeClr val="lt1"/>
+          </a:fontRef>
+        </p:style>
+        <p:txBody>
+          <a:bodyPr rtlCol="0" anchor="ctr" wrap="none"/>
+          <a:lstStyle/>
+          <a:p>
+            <a:pPr algn="ctr"/>
+            <a:r>
+              <a:rPr sz="1200" b="1">
+                <a:solidFill>
+                  <a:srgbClr val="FFFFFF"/>
+                </a:solidFill>
+                <a:latin typeface="Garamond"/>
+              </a:rPr>
+              <a:t>16</a:t>
+            </a:r>
+          </a:p>
+        </p:txBody>
+      </p:sp>
+      <p:sp>
+        <p:nvSpPr>
+          <p:cNvPr id="23" name="TextBox 22"/>
+          <p:cNvSpPr txBox="1"/>
+          <p:nvPr/>
+        </p:nvSpPr>
+        <p:spPr>
+          <a:xfrm>
+            <a:off x="822960" y="2340864"/>
+            <a:ext cx="3657600" cy="365760"/>
+          </a:xfrm>
+          <a:prstGeom prst="rect">
+            <a:avLst/>
+          </a:prstGeom>
+          <a:noFill/>
+        </p:spPr>
+        <p:txBody>
+          <a:bodyPr wrap="square" lIns="0" rIns="0" tIns="0" bIns="0">
+            <a:spAutoFit/>
+          </a:bodyPr>
+          <a:lstStyle/>
           <a:p>
             <a:pPr algn="l">
               <a:lnSpc>
-                <a:spcPts val="1950"/>
+                <a:spcPts val="2250"/>
               </a:lnSpc>
               <a:spcAft>
-                <a:spcPts val="800"/>
+                <a:spcPts val="0"/>
               </a:spcAft>
             </a:pPr>
             <a:r>
-              <a:rPr sz="1300" b="0" i="0">
-                <a:solidFill>
-                  <a:srgbClr val="1A2430"/>
+              <a:rPr sz="1500" b="1" i="0">
+                <a:solidFill>
+                  <a:srgbClr val="26456E"/>
                 </a:solidFill>
                 <a:latin typeface="Garamond"/>
               </a:rPr>
-              <a:t>Race, identical</a:t>
-            </a:r>
-          </a:p>
+              <a:t>Definition 1  (benchmark)</a:t>
+            </a:r>
+          </a:p>
+        </p:txBody>
+      </p:sp>
+      <p:cxnSp>
+        <p:nvCxnSpPr>
+          <p:cNvPr id="24" name="Connector 23"/>
+          <p:cNvCxnSpPr/>
+          <p:nvPr/>
+        </p:nvCxnSpPr>
+        <p:spPr>
+          <a:xfrm>
+            <a:off x="822960" y="2743200"/>
+            <a:ext cx="10543032" cy="0"/>
+          </a:xfrm>
+          <a:prstGeom prst="line">
+            <a:avLst/>
+          </a:prstGeom>
+          <a:ln w="12700">
+            <a:solidFill>
+              <a:srgbClr val="1A2430"/>
+            </a:solidFill>
+          </a:ln>
+        </p:spPr>
+        <p:style>
+          <a:lnRef idx="2">
+            <a:schemeClr val="accent1"/>
+          </a:lnRef>
+          <a:fillRef idx="0">
+            <a:schemeClr val="accent1"/>
+          </a:fillRef>
+          <a:effectRef idx="1">
+            <a:schemeClr val="accent1"/>
+          </a:effectRef>
+          <a:fontRef idx="minor">
+            <a:schemeClr val="tx1"/>
+          </a:fontRef>
+        </p:style>
+      </p:cxnSp>
+      <p:sp>
+        <p:nvSpPr>
+          <p:cNvPr id="25" name="TextBox 24"/>
+          <p:cNvSpPr txBox="1"/>
+          <p:nvPr/>
+        </p:nvSpPr>
+        <p:spPr>
+          <a:xfrm>
+            <a:off x="1005840" y="2871216"/>
+            <a:ext cx="1463040" cy="384048"/>
+          </a:xfrm>
+          <a:prstGeom prst="rect">
+            <a:avLst/>
+          </a:prstGeom>
+          <a:noFill/>
+        </p:spPr>
+        <p:txBody>
+          <a:bodyPr wrap="square" lIns="0" rIns="0" tIns="0" bIns="0">
+            <a:spAutoFit/>
+          </a:bodyPr>
+          <a:lstStyle/>
           <a:p>
             <a:pPr algn="l">
               <a:lnSpc>
@@ -9502,26 +10683,236 @@
               </a:spcAft>
             </a:pPr>
             <a:r>
+              <a:rPr sz="1300" b="1" i="0">
+                <a:solidFill>
+                  <a:srgbClr val="1F3864"/>
+                </a:solidFill>
+                <a:latin typeface="Garamond"/>
+              </a:rPr>
+              <a:t>Teacher</a:t>
+            </a:r>
+          </a:p>
+        </p:txBody>
+      </p:sp>
+      <p:sp>
+        <p:nvSpPr>
+          <p:cNvPr id="26" name="TextBox 25"/>
+          <p:cNvSpPr txBox="1"/>
+          <p:nvPr/>
+        </p:nvSpPr>
+        <p:spPr>
+          <a:xfrm>
+            <a:off x="2651760" y="2871216"/>
+            <a:ext cx="8503920" cy="384048"/>
+          </a:xfrm>
+          <a:prstGeom prst="rect">
+            <a:avLst/>
+          </a:prstGeom>
+          <a:noFill/>
+        </p:spPr>
+        <p:txBody>
+          <a:bodyPr wrap="square" lIns="0" rIns="0" tIns="0" bIns="0">
+            <a:spAutoFit/>
+          </a:bodyPr>
+          <a:lstStyle/>
+          <a:p>
+            <a:pPr algn="l">
+              <a:lnSpc>
+                <a:spcPts val="1950"/>
+              </a:lnSpc>
+              <a:spcAft>
+                <a:spcPts val="0"/>
+              </a:spcAft>
+            </a:pPr>
+            <a:r>
               <a:rPr sz="1300" b="0" i="0">
                 <a:solidFill>
                   <a:srgbClr val="1A2430"/>
                 </a:solidFill>
                 <a:latin typeface="Garamond"/>
               </a:rPr>
-              <a:t>Age, increasing by zero to two years</a:t>
+              <a:t>teaching, with a bachelor’s degree, in at least two year-1 interviews</a:t>
+            </a:r>
+          </a:p>
+        </p:txBody>
+      </p:sp>
+      <p:sp>
+        <p:nvSpPr>
+          <p:cNvPr id="27" name="TextBox 26"/>
+          <p:cNvSpPr txBox="1"/>
+          <p:nvPr/>
+        </p:nvSpPr>
+        <p:spPr>
+          <a:xfrm>
+            <a:off x="1005840" y="3273552"/>
+            <a:ext cx="1463040" cy="384048"/>
+          </a:xfrm>
+          <a:prstGeom prst="rect">
+            <a:avLst/>
+          </a:prstGeom>
+          <a:noFill/>
+        </p:spPr>
+        <p:txBody>
+          <a:bodyPr wrap="square" lIns="0" rIns="0" tIns="0" bIns="0">
+            <a:spAutoFit/>
+          </a:bodyPr>
+          <a:lstStyle/>
+          <a:p>
+            <a:pPr algn="l">
+              <a:lnSpc>
+                <a:spcPts val="1950"/>
+              </a:lnSpc>
+              <a:spcAft>
+                <a:spcPts val="0"/>
+              </a:spcAft>
+            </a:pPr>
+            <a:r>
+              <a:rPr sz="1300" b="1" i="0">
+                <a:solidFill>
+                  <a:srgbClr val="1F3864"/>
+                </a:solidFill>
+                <a:latin typeface="Garamond"/>
+              </a:rPr>
+              <a:t>Stayer</a:t>
+            </a:r>
+          </a:p>
+        </p:txBody>
+      </p:sp>
+      <p:sp>
+        <p:nvSpPr>
+          <p:cNvPr id="28" name="TextBox 27"/>
+          <p:cNvSpPr txBox="1"/>
+          <p:nvPr/>
+        </p:nvSpPr>
+        <p:spPr>
+          <a:xfrm>
+            <a:off x="2651760" y="3273552"/>
+            <a:ext cx="8503920" cy="384048"/>
+          </a:xfrm>
+          <a:prstGeom prst="rect">
+            <a:avLst/>
+          </a:prstGeom>
+          <a:noFill/>
+        </p:spPr>
+        <p:txBody>
+          <a:bodyPr wrap="square" lIns="0" rIns="0" tIns="0" bIns="0">
+            <a:spAutoFit/>
+          </a:bodyPr>
+          <a:lstStyle/>
+          <a:p>
+            <a:pPr algn="l">
+              <a:lnSpc>
+                <a:spcPts val="1950"/>
+              </a:lnSpc>
+              <a:spcAft>
+                <a:spcPts val="0"/>
+              </a:spcAft>
+            </a:pPr>
+            <a:r>
+              <a:rPr sz="1300" b="0" i="0">
+                <a:solidFill>
+                  <a:srgbClr val="1A2430"/>
+                </a:solidFill>
+                <a:latin typeface="Garamond"/>
+              </a:rPr>
+              <a:t>teaching in at least one year-2 interview</a:t>
+            </a:r>
+          </a:p>
+        </p:txBody>
+      </p:sp>
+      <p:sp>
+        <p:nvSpPr>
+          <p:cNvPr id="29" name="TextBox 28"/>
+          <p:cNvSpPr txBox="1"/>
+          <p:nvPr/>
+        </p:nvSpPr>
+        <p:spPr>
+          <a:xfrm>
+            <a:off x="1005840" y="3675888"/>
+            <a:ext cx="1463040" cy="384048"/>
+          </a:xfrm>
+          <a:prstGeom prst="rect">
+            <a:avLst/>
+          </a:prstGeom>
+          <a:noFill/>
+        </p:spPr>
+        <p:txBody>
+          <a:bodyPr wrap="square" lIns="0" rIns="0" tIns="0" bIns="0">
+            <a:spAutoFit/>
+          </a:bodyPr>
+          <a:lstStyle/>
+          <a:p>
+            <a:pPr algn="l">
+              <a:lnSpc>
+                <a:spcPts val="1950"/>
+              </a:lnSpc>
+              <a:spcAft>
+                <a:spcPts val="0"/>
+              </a:spcAft>
+            </a:pPr>
+            <a:r>
+              <a:rPr sz="1300" b="1" i="0">
+                <a:solidFill>
+                  <a:srgbClr val="7B2530"/>
+                </a:solidFill>
+                <a:latin typeface="Garamond"/>
+              </a:rPr>
+              <a:t>Leaver</a:t>
+            </a:r>
+          </a:p>
+        </p:txBody>
+      </p:sp>
+      <p:sp>
+        <p:nvSpPr>
+          <p:cNvPr id="30" name="TextBox 29"/>
+          <p:cNvSpPr txBox="1"/>
+          <p:nvPr/>
+        </p:nvSpPr>
+        <p:spPr>
+          <a:xfrm>
+            <a:off x="2651760" y="3675888"/>
+            <a:ext cx="8503920" cy="384048"/>
+          </a:xfrm>
+          <a:prstGeom prst="rect">
+            <a:avLst/>
+          </a:prstGeom>
+          <a:noFill/>
+        </p:spPr>
+        <p:txBody>
+          <a:bodyPr wrap="square" lIns="0" rIns="0" tIns="0" bIns="0">
+            <a:spAutoFit/>
+          </a:bodyPr>
+          <a:lstStyle/>
+          <a:p>
+            <a:pPr algn="l">
+              <a:lnSpc>
+                <a:spcPts val="1950"/>
+              </a:lnSpc>
+              <a:spcAft>
+                <a:spcPts val="0"/>
+              </a:spcAft>
+            </a:pPr>
+            <a:r>
+              <a:rPr sz="1300" b="0" i="0">
+                <a:solidFill>
+                  <a:srgbClr val="1A2430"/>
+                </a:solidFill>
+                <a:latin typeface="Garamond"/>
+              </a:rPr>
+              <a:t>never teaching in year 2, given two or more interviews, one outside the summer</a:t>
             </a:r>
           </a:p>
         </p:txBody>
       </p:sp>
       <p:cxnSp>
         <p:nvCxnSpPr>
-          <p:cNvPr id="10" name="Connector 9"/>
+          <p:cNvPr id="31" name="Connector 30"/>
           <p:cNvCxnSpPr/>
           <p:nvPr/>
         </p:nvCxnSpPr>
         <p:spPr>
           <a:xfrm>
-            <a:off x="822960" y="5029200"/>
+            <a:off x="822960" y="4123944"/>
             <a:ext cx="10543032" cy="0"/>
           </a:xfrm>
           <a:prstGeom prst="line">
@@ -9550,14 +10941,14 @@
       </p:cxnSp>
       <p:sp>
         <p:nvSpPr>
-          <p:cNvPr id="11" name="TextBox 10"/>
+          <p:cNvPr id="32" name="TextBox 31"/>
           <p:cNvSpPr txBox="1"/>
           <p:nvPr/>
         </p:nvSpPr>
         <p:spPr>
           <a:xfrm>
-            <a:off x="777240" y="5303520"/>
-            <a:ext cx="10698480" cy="548640"/>
+            <a:off x="822960" y="4169664"/>
+            <a:ext cx="5486400" cy="365760"/>
           </a:xfrm>
           <a:prstGeom prst="rect">
             <a:avLst/>
@@ -9570,26 +10961,642 @@
           </a:bodyPr>
           <a:lstStyle/>
           <a:p>
-            <a:pPr algn="just">
+            <a:pPr algn="l">
               <a:lnSpc>
-                <a:spcPts val="2025"/>
+                <a:spcPts val="2250"/>
               </a:lnSpc>
               <a:spcAft>
                 <a:spcPts val="0"/>
               </a:spcAft>
             </a:pPr>
             <a:r>
-              <a:rPr sz="1350" b="0" i="0">
+              <a:rPr sz="1500" b="1" i="0">
+                <a:solidFill>
+                  <a:srgbClr val="26456E"/>
+                </a:solidFill>
+                <a:latin typeface="Garamond"/>
+              </a:rPr>
+              <a:t>Alternative measures</a:t>
+            </a:r>
+          </a:p>
+        </p:txBody>
+      </p:sp>
+      <p:sp>
+        <p:nvSpPr>
+          <p:cNvPr id="33" name="TextBox 32"/>
+          <p:cNvSpPr txBox="1"/>
+          <p:nvPr/>
+        </p:nvSpPr>
+        <p:spPr>
+          <a:xfrm>
+            <a:off x="10058400" y="4169664"/>
+            <a:ext cx="1280160" cy="365760"/>
+          </a:xfrm>
+          <a:prstGeom prst="rect">
+            <a:avLst/>
+          </a:prstGeom>
+          <a:noFill/>
+        </p:spPr>
+        <p:txBody>
+          <a:bodyPr wrap="square" lIns="0" rIns="0" tIns="0" bIns="0">
+            <a:spAutoFit/>
+          </a:bodyPr>
+          <a:lstStyle/>
+          <a:p>
+            <a:pPr algn="l">
+              <a:lnSpc>
+                <a:spcPts val="1950"/>
+              </a:lnSpc>
+              <a:spcAft>
+                <a:spcPts val="0"/>
+              </a:spcAft>
+            </a:pPr>
+            <a:r>
+              <a:rPr sz="1300" b="1" i="0">
                 <a:solidFill>
                   <a:srgbClr val="1A2430"/>
                 </a:solidFill>
                 <a:latin typeface="Garamond"/>
               </a:rPr>
-              <a:t>Validated links: 78 percent of teacher observations.</a:t>
-            </a:r>
-          </a:p>
-        </p:txBody>
-      </p:sp>
+              <a:t>2021</a:t>
+            </a:r>
+          </a:p>
+        </p:txBody>
+      </p:sp>
+      <p:cxnSp>
+        <p:nvCxnSpPr>
+          <p:cNvPr id="34" name="Connector 33"/>
+          <p:cNvCxnSpPr/>
+          <p:nvPr/>
+        </p:nvCxnSpPr>
+        <p:spPr>
+          <a:xfrm>
+            <a:off x="822960" y="4553712"/>
+            <a:ext cx="10543032" cy="0"/>
+          </a:xfrm>
+          <a:prstGeom prst="line">
+            <a:avLst/>
+          </a:prstGeom>
+          <a:ln w="7620">
+            <a:solidFill>
+              <a:srgbClr val="1A2430"/>
+            </a:solidFill>
+          </a:ln>
+        </p:spPr>
+        <p:style>
+          <a:lnRef idx="2">
+            <a:schemeClr val="accent1"/>
+          </a:lnRef>
+          <a:fillRef idx="0">
+            <a:schemeClr val="accent1"/>
+          </a:fillRef>
+          <a:effectRef idx="1">
+            <a:schemeClr val="accent1"/>
+          </a:effectRef>
+          <a:fontRef idx="minor">
+            <a:schemeClr val="tx1"/>
+          </a:fontRef>
+        </p:style>
+      </p:cxnSp>
+      <p:sp>
+        <p:nvSpPr>
+          <p:cNvPr id="35" name="TextBox 34"/>
+          <p:cNvSpPr txBox="1"/>
+          <p:nvPr/>
+        </p:nvSpPr>
+        <p:spPr>
+          <a:xfrm>
+            <a:off x="1005840" y="4663440"/>
+            <a:ext cx="5486400" cy="329184"/>
+          </a:xfrm>
+          <a:prstGeom prst="rect">
+            <a:avLst/>
+          </a:prstGeom>
+          <a:noFill/>
+        </p:spPr>
+        <p:txBody>
+          <a:bodyPr wrap="square" lIns="0" rIns="0" tIns="0" bIns="0">
+            <a:spAutoFit/>
+          </a:bodyPr>
+          <a:lstStyle/>
+          <a:p>
+            <a:pPr algn="l">
+              <a:lnSpc>
+                <a:spcPts val="1800"/>
+              </a:lnSpc>
+              <a:spcAft>
+                <a:spcPts val="0"/>
+              </a:spcAft>
+            </a:pPr>
+            <a:r>
+              <a:rPr sz="1200" b="0" i="0">
+                <a:solidFill>
+                  <a:srgbClr val="1A2430"/>
+                </a:solidFill>
+                <a:latin typeface="Garamond"/>
+              </a:rPr>
+              <a:t>Definition 1</a:t>
+            </a:r>
+          </a:p>
+        </p:txBody>
+      </p:sp>
+      <p:sp>
+        <p:nvSpPr>
+          <p:cNvPr id="36" name="TextBox 35"/>
+          <p:cNvSpPr txBox="1"/>
+          <p:nvPr/>
+        </p:nvSpPr>
+        <p:spPr>
+          <a:xfrm>
+            <a:off x="10058400" y="4663440"/>
+            <a:ext cx="1097280" cy="329184"/>
+          </a:xfrm>
+          <a:prstGeom prst="rect">
+            <a:avLst/>
+          </a:prstGeom>
+          <a:noFill/>
+        </p:spPr>
+        <p:txBody>
+          <a:bodyPr wrap="square" lIns="0" rIns="0" tIns="0" bIns="0">
+            <a:spAutoFit/>
+          </a:bodyPr>
+          <a:lstStyle/>
+          <a:p>
+            <a:pPr algn="l">
+              <a:lnSpc>
+                <a:spcPts val="1800"/>
+              </a:lnSpc>
+              <a:spcAft>
+                <a:spcPts val="0"/>
+              </a:spcAft>
+            </a:pPr>
+            <a:r>
+              <a:rPr sz="1200" b="1" i="0">
+                <a:solidFill>
+                  <a:srgbClr val="1A2430"/>
+                </a:solidFill>
+                <a:latin typeface="Garamond"/>
+              </a:rPr>
+              <a:t>12.9</a:t>
+            </a:r>
+          </a:p>
+        </p:txBody>
+      </p:sp>
+      <p:sp>
+        <p:nvSpPr>
+          <p:cNvPr id="37" name="TextBox 36"/>
+          <p:cNvSpPr txBox="1"/>
+          <p:nvPr/>
+        </p:nvSpPr>
+        <p:spPr>
+          <a:xfrm>
+            <a:off x="1005840" y="4992624"/>
+            <a:ext cx="5486400" cy="329184"/>
+          </a:xfrm>
+          <a:prstGeom prst="rect">
+            <a:avLst/>
+          </a:prstGeom>
+          <a:noFill/>
+        </p:spPr>
+        <p:txBody>
+          <a:bodyPr wrap="square" lIns="0" rIns="0" tIns="0" bIns="0">
+            <a:spAutoFit/>
+          </a:bodyPr>
+          <a:lstStyle/>
+          <a:p>
+            <a:pPr algn="l">
+              <a:lnSpc>
+                <a:spcPts val="1800"/>
+              </a:lnSpc>
+              <a:spcAft>
+                <a:spcPts val="0"/>
+              </a:spcAft>
+            </a:pPr>
+            <a:r>
+              <a:rPr sz="1200" b="0" i="0">
+                <a:solidFill>
+                  <a:srgbClr val="1A2430"/>
+                </a:solidFill>
+                <a:latin typeface="Garamond"/>
+              </a:rPr>
+              <a:t>Annual recall</a:t>
+            </a:r>
+          </a:p>
+        </p:txBody>
+      </p:sp>
+      <p:sp>
+        <p:nvSpPr>
+          <p:cNvPr id="38" name="TextBox 37"/>
+          <p:cNvSpPr txBox="1"/>
+          <p:nvPr/>
+        </p:nvSpPr>
+        <p:spPr>
+          <a:xfrm>
+            <a:off x="10058400" y="4992624"/>
+            <a:ext cx="1097280" cy="329184"/>
+          </a:xfrm>
+          <a:prstGeom prst="rect">
+            <a:avLst/>
+          </a:prstGeom>
+          <a:noFill/>
+        </p:spPr>
+        <p:txBody>
+          <a:bodyPr wrap="square" lIns="0" rIns="0" tIns="0" bIns="0">
+            <a:spAutoFit/>
+          </a:bodyPr>
+          <a:lstStyle/>
+          <a:p>
+            <a:pPr algn="l">
+              <a:lnSpc>
+                <a:spcPts val="1800"/>
+              </a:lnSpc>
+              <a:spcAft>
+                <a:spcPts val="0"/>
+              </a:spcAft>
+            </a:pPr>
+            <a:r>
+              <a:rPr sz="1200" b="1" i="0">
+                <a:solidFill>
+                  <a:srgbClr val="1A2430"/>
+                </a:solidFill>
+                <a:latin typeface="Garamond"/>
+              </a:rPr>
+              <a:t>7.1</a:t>
+            </a:r>
+          </a:p>
+        </p:txBody>
+      </p:sp>
+      <p:sp>
+        <p:nvSpPr>
+          <p:cNvPr id="39" name="TextBox 38"/>
+          <p:cNvSpPr txBox="1"/>
+          <p:nvPr/>
+        </p:nvSpPr>
+        <p:spPr>
+          <a:xfrm>
+            <a:off x="1005840" y="5321808"/>
+            <a:ext cx="5486400" cy="329184"/>
+          </a:xfrm>
+          <a:prstGeom prst="rect">
+            <a:avLst/>
+          </a:prstGeom>
+          <a:noFill/>
+        </p:spPr>
+        <p:txBody>
+          <a:bodyPr wrap="square" lIns="0" rIns="0" tIns="0" bIns="0">
+            <a:spAutoFit/>
+          </a:bodyPr>
+          <a:lstStyle/>
+          <a:p>
+            <a:pPr algn="l">
+              <a:lnSpc>
+                <a:spcPts val="1800"/>
+              </a:lnSpc>
+              <a:spcAft>
+                <a:spcPts val="0"/>
+              </a:spcAft>
+            </a:pPr>
+            <a:r>
+              <a:rPr sz="1200" b="0" i="0">
+                <a:solidFill>
+                  <a:srgbClr val="1A2430"/>
+                </a:solidFill>
+                <a:latin typeface="Garamond"/>
+              </a:rPr>
+              <a:t>Occupation pair</a:t>
+            </a:r>
+          </a:p>
+        </p:txBody>
+      </p:sp>
+      <p:sp>
+        <p:nvSpPr>
+          <p:cNvPr id="40" name="TextBox 39"/>
+          <p:cNvSpPr txBox="1"/>
+          <p:nvPr/>
+        </p:nvSpPr>
+        <p:spPr>
+          <a:xfrm>
+            <a:off x="10058400" y="5321808"/>
+            <a:ext cx="1097280" cy="329184"/>
+          </a:xfrm>
+          <a:prstGeom prst="rect">
+            <a:avLst/>
+          </a:prstGeom>
+          <a:noFill/>
+        </p:spPr>
+        <p:txBody>
+          <a:bodyPr wrap="square" lIns="0" rIns="0" tIns="0" bIns="0">
+            <a:spAutoFit/>
+          </a:bodyPr>
+          <a:lstStyle/>
+          <a:p>
+            <a:pPr algn="l">
+              <a:lnSpc>
+                <a:spcPts val="1800"/>
+              </a:lnSpc>
+              <a:spcAft>
+                <a:spcPts val="0"/>
+              </a:spcAft>
+            </a:pPr>
+            <a:r>
+              <a:rPr sz="1200" b="1" i="0">
+                <a:solidFill>
+                  <a:srgbClr val="1A2430"/>
+                </a:solidFill>
+                <a:latin typeface="Garamond"/>
+              </a:rPr>
+              <a:t>5.0</a:t>
+            </a:r>
+          </a:p>
+        </p:txBody>
+      </p:sp>
+      <p:sp>
+        <p:nvSpPr>
+          <p:cNvPr id="41" name="TextBox 40"/>
+          <p:cNvSpPr txBox="1"/>
+          <p:nvPr/>
+        </p:nvSpPr>
+        <p:spPr>
+          <a:xfrm>
+            <a:off x="1005840" y="5650992"/>
+            <a:ext cx="5486400" cy="329184"/>
+          </a:xfrm>
+          <a:prstGeom prst="rect">
+            <a:avLst/>
+          </a:prstGeom>
+          <a:noFill/>
+        </p:spPr>
+        <p:txBody>
+          <a:bodyPr wrap="square" lIns="0" rIns="0" tIns="0" bIns="0">
+            <a:spAutoFit/>
+          </a:bodyPr>
+          <a:lstStyle/>
+          <a:p>
+            <a:pPr algn="l">
+              <a:lnSpc>
+                <a:spcPts val="1800"/>
+              </a:lnSpc>
+              <a:spcAft>
+                <a:spcPts val="0"/>
+              </a:spcAft>
+            </a:pPr>
+            <a:r>
+              <a:rPr sz="1200" b="0" i="0">
+                <a:solidFill>
+                  <a:srgbClr val="1A2430"/>
+                </a:solidFill>
+                <a:latin typeface="Garamond"/>
+              </a:rPr>
+              <a:t>Month pairs</a:t>
+            </a:r>
+          </a:p>
+        </p:txBody>
+      </p:sp>
+      <p:sp>
+        <p:nvSpPr>
+          <p:cNvPr id="42" name="TextBox 41"/>
+          <p:cNvSpPr txBox="1"/>
+          <p:nvPr/>
+        </p:nvSpPr>
+        <p:spPr>
+          <a:xfrm>
+            <a:off x="10058400" y="5650992"/>
+            <a:ext cx="1097280" cy="329184"/>
+          </a:xfrm>
+          <a:prstGeom prst="rect">
+            <a:avLst/>
+          </a:prstGeom>
+          <a:noFill/>
+        </p:spPr>
+        <p:txBody>
+          <a:bodyPr wrap="square" lIns="0" rIns="0" tIns="0" bIns="0">
+            <a:spAutoFit/>
+          </a:bodyPr>
+          <a:lstStyle/>
+          <a:p>
+            <a:pPr algn="l">
+              <a:lnSpc>
+                <a:spcPts val="1800"/>
+              </a:lnSpc>
+              <a:spcAft>
+                <a:spcPts val="0"/>
+              </a:spcAft>
+            </a:pPr>
+            <a:r>
+              <a:rPr sz="1200" b="1" i="0">
+                <a:solidFill>
+                  <a:srgbClr val="1A2430"/>
+                </a:solidFill>
+                <a:latin typeface="Garamond"/>
+              </a:rPr>
+              <a:t>16.0</a:t>
+            </a:r>
+          </a:p>
+        </p:txBody>
+      </p:sp>
+      <p:sp>
+        <p:nvSpPr>
+          <p:cNvPr id="43" name="TextBox 42"/>
+          <p:cNvSpPr txBox="1"/>
+          <p:nvPr/>
+        </p:nvSpPr>
+        <p:spPr>
+          <a:xfrm>
+            <a:off x="1005840" y="5980176"/>
+            <a:ext cx="5486400" cy="329184"/>
+          </a:xfrm>
+          <a:prstGeom prst="rect">
+            <a:avLst/>
+          </a:prstGeom>
+          <a:noFill/>
+        </p:spPr>
+        <p:txBody>
+          <a:bodyPr wrap="square" lIns="0" rIns="0" tIns="0" bIns="0">
+            <a:spAutoFit/>
+          </a:bodyPr>
+          <a:lstStyle/>
+          <a:p>
+            <a:pPr algn="l">
+              <a:lnSpc>
+                <a:spcPts val="1800"/>
+              </a:lnSpc>
+              <a:spcAft>
+                <a:spcPts val="0"/>
+              </a:spcAft>
+            </a:pPr>
+            <a:r>
+              <a:rPr sz="1200" b="0" i="0">
+                <a:solidFill>
+                  <a:srgbClr val="1A2430"/>
+                </a:solidFill>
+                <a:latin typeface="Garamond"/>
+              </a:rPr>
+              <a:t>Any sighting</a:t>
+            </a:r>
+          </a:p>
+        </p:txBody>
+      </p:sp>
+      <p:sp>
+        <p:nvSpPr>
+          <p:cNvPr id="44" name="TextBox 43"/>
+          <p:cNvSpPr txBox="1"/>
+          <p:nvPr/>
+        </p:nvSpPr>
+        <p:spPr>
+          <a:xfrm>
+            <a:off x="10058400" y="5980176"/>
+            <a:ext cx="1097280" cy="329184"/>
+          </a:xfrm>
+          <a:prstGeom prst="rect">
+            <a:avLst/>
+          </a:prstGeom>
+          <a:noFill/>
+        </p:spPr>
+        <p:txBody>
+          <a:bodyPr wrap="square" lIns="0" rIns="0" tIns="0" bIns="0">
+            <a:spAutoFit/>
+          </a:bodyPr>
+          <a:lstStyle/>
+          <a:p>
+            <a:pPr algn="l">
+              <a:lnSpc>
+                <a:spcPts val="1800"/>
+              </a:lnSpc>
+              <a:spcAft>
+                <a:spcPts val="0"/>
+              </a:spcAft>
+            </a:pPr>
+            <a:r>
+              <a:rPr sz="1200" b="1" i="0">
+                <a:solidFill>
+                  <a:srgbClr val="1A2430"/>
+                </a:solidFill>
+                <a:latin typeface="Garamond"/>
+              </a:rPr>
+              <a:t>19.4</a:t>
+            </a:r>
+          </a:p>
+        </p:txBody>
+      </p:sp>
+      <p:sp>
+        <p:nvSpPr>
+          <p:cNvPr id="45" name="TextBox 44"/>
+          <p:cNvSpPr txBox="1"/>
+          <p:nvPr/>
+        </p:nvSpPr>
+        <p:spPr>
+          <a:xfrm>
+            <a:off x="1005840" y="6309360"/>
+            <a:ext cx="5486400" cy="329184"/>
+          </a:xfrm>
+          <a:prstGeom prst="rect">
+            <a:avLst/>
+          </a:prstGeom>
+          <a:noFill/>
+        </p:spPr>
+        <p:txBody>
+          <a:bodyPr wrap="square" lIns="0" rIns="0" tIns="0" bIns="0">
+            <a:spAutoFit/>
+          </a:bodyPr>
+          <a:lstStyle/>
+          <a:p>
+            <a:pPr algn="l">
+              <a:lnSpc>
+                <a:spcPts val="1800"/>
+              </a:lnSpc>
+              <a:spcAft>
+                <a:spcPts val="0"/>
+              </a:spcAft>
+            </a:pPr>
+            <a:r>
+              <a:rPr sz="1200" b="0" i="0">
+                <a:solidFill>
+                  <a:srgbClr val="1A2430"/>
+                </a:solidFill>
+                <a:latin typeface="Garamond"/>
+              </a:rPr>
+              <a:t>NCES follow-up survey</a:t>
+            </a:r>
+          </a:p>
+        </p:txBody>
+      </p:sp>
+      <p:sp>
+        <p:nvSpPr>
+          <p:cNvPr id="46" name="TextBox 45"/>
+          <p:cNvSpPr txBox="1"/>
+          <p:nvPr/>
+        </p:nvSpPr>
+        <p:spPr>
+          <a:xfrm>
+            <a:off x="10058400" y="6309360"/>
+            <a:ext cx="1097280" cy="329184"/>
+          </a:xfrm>
+          <a:prstGeom prst="rect">
+            <a:avLst/>
+          </a:prstGeom>
+          <a:noFill/>
+        </p:spPr>
+        <p:txBody>
+          <a:bodyPr wrap="square" lIns="0" rIns="0" tIns="0" bIns="0">
+            <a:spAutoFit/>
+          </a:bodyPr>
+          <a:lstStyle/>
+          <a:p>
+            <a:pPr algn="l">
+              <a:lnSpc>
+                <a:spcPts val="1800"/>
+              </a:lnSpc>
+              <a:spcAft>
+                <a:spcPts val="0"/>
+              </a:spcAft>
+            </a:pPr>
+            <a:r>
+              <a:rPr sz="1200" b="1" i="0">
+                <a:solidFill>
+                  <a:srgbClr val="1A2430"/>
+                </a:solidFill>
+                <a:latin typeface="Garamond"/>
+              </a:rPr>
+              <a:t>8.0</a:t>
+            </a:r>
+          </a:p>
+        </p:txBody>
+      </p:sp>
+      <p:cxnSp>
+        <p:nvCxnSpPr>
+          <p:cNvPr id="47" name="Connector 46"/>
+          <p:cNvCxnSpPr/>
+          <p:nvPr/>
+        </p:nvCxnSpPr>
+        <p:spPr>
+          <a:xfrm>
+            <a:off x="822960" y="6656832"/>
+            <a:ext cx="10543032" cy="0"/>
+          </a:xfrm>
+          <a:prstGeom prst="line">
+            <a:avLst/>
+          </a:prstGeom>
+          <a:ln w="12700">
+            <a:solidFill>
+              <a:srgbClr val="1A2430"/>
+            </a:solidFill>
+          </a:ln>
+        </p:spPr>
+        <p:style>
+          <a:lnRef idx="2">
+            <a:schemeClr val="accent1"/>
+          </a:lnRef>
+          <a:fillRef idx="0">
+            <a:schemeClr val="accent1"/>
+          </a:fillRef>
+          <a:effectRef idx="1">
+            <a:schemeClr val="accent1"/>
+          </a:effectRef>
+          <a:fontRef idx="minor">
+            <a:schemeClr val="tx1"/>
+          </a:fontRef>
+        </p:style>
+      </p:cxnSp>
     </p:spTree>
   </p:cSld>
   <p:clrMapOvr>
@@ -9751,20 +11758,20 @@
           <a:p>
             <a:pPr algn="ctr">
               <a:lnSpc>
-                <a:spcPts val="1875"/>
+                <a:spcPts val="2100"/>
               </a:lnSpc>
               <a:spcAft>
                 <a:spcPts val="0"/>
               </a:spcAft>
             </a:pPr>
             <a:r>
-              <a:rPr sz="1250" b="0" i="1">
-                <a:solidFill>
-                  <a:srgbClr val="6B7480"/>
+              <a:rPr sz="1400" b="1" i="0">
+                <a:solidFill>
+                  <a:srgbClr val="1F3864"/>
                 </a:solidFill>
                 <a:latin typeface="Garamond"/>
               </a:rPr>
-              <a:t>8 months out of the sample</a:t>
+              <a:t>stayer</a:t>
             </a:r>
           </a:p>
         </p:txBody>
@@ -9859,7 +11866,7 @@
                 </a:solidFill>
                 <a:latin typeface="Garamond"/>
               </a:rPr>
-              <a:t>1</a:t>
+              <a:t>T</a:t>
             </a:r>
           </a:p>
         </p:txBody>
@@ -9912,7 +11919,7 @@
                 </a:solidFill>
                 <a:latin typeface="Garamond"/>
               </a:rPr>
-              <a:t>2</a:t>
+              <a:t>T</a:t>
             </a:r>
           </a:p>
         </p:txBody>
@@ -9965,7 +11972,7 @@
                 </a:solidFill>
                 <a:latin typeface="Garamond"/>
               </a:rPr>
-              <a:t>3</a:t>
+              <a:t>T</a:t>
             </a:r>
           </a:p>
         </p:txBody>
@@ -10018,7 +12025,7 @@
                 </a:solidFill>
                 <a:latin typeface="Garamond"/>
               </a:rPr>
-              <a:t>4</a:t>
+              <a:t>T</a:t>
             </a:r>
           </a:p>
         </p:txBody>
@@ -10670,59 +12677,6 @@
                 </a:solidFill>
                 <a:latin typeface="Garamond"/>
               </a:rPr>
-              <a:t>16</a:t>
-            </a:r>
-          </a:p>
-        </p:txBody>
-      </p:sp>
-      <p:sp>
-        <p:nvSpPr>
-          <p:cNvPr id="23" name="Rectangle 22"/>
-          <p:cNvSpPr/>
-          <p:nvPr/>
-        </p:nvSpPr>
-        <p:spPr>
-          <a:xfrm>
-            <a:off x="822960" y="1755648"/>
-            <a:ext cx="658939" cy="457200"/>
-          </a:xfrm>
-          <a:prstGeom prst="rect">
-            <a:avLst/>
-          </a:prstGeom>
-          <a:solidFill>
-            <a:srgbClr val="1F3864"/>
-          </a:solidFill>
-          <a:ln>
-            <a:noFill/>
-          </a:ln>
-          <a:effectLst/>
-        </p:spPr>
-        <p:style>
-          <a:lnRef idx="1">
-            <a:schemeClr val="accent1"/>
-          </a:lnRef>
-          <a:fillRef idx="3">
-            <a:schemeClr val="accent1"/>
-          </a:fillRef>
-          <a:effectRef idx="2">
-            <a:schemeClr val="accent1"/>
-          </a:effectRef>
-          <a:fontRef idx="minor">
-            <a:schemeClr val="lt1"/>
-          </a:fontRef>
-        </p:style>
-        <p:txBody>
-          <a:bodyPr rtlCol="0" anchor="ctr" wrap="none"/>
-          <a:lstStyle/>
-          <a:p>
-            <a:pPr algn="ctr"/>
-            <a:r>
-              <a:rPr sz="1200" b="1">
-                <a:solidFill>
-                  <a:srgbClr val="FFFFFF"/>
-                </a:solidFill>
-                <a:latin typeface="Garamond"/>
-              </a:rPr>
               <a:t>T</a:t>
             </a:r>
           </a:p>
@@ -10730,504 +12684,7 @@
       </p:sp>
       <p:sp>
         <p:nvSpPr>
-          <p:cNvPr id="24" name="Rectangle 23"/>
-          <p:cNvSpPr/>
-          <p:nvPr/>
-        </p:nvSpPr>
-        <p:spPr>
-          <a:xfrm>
-            <a:off x="1481899" y="1755648"/>
-            <a:ext cx="658939" cy="457200"/>
-          </a:xfrm>
-          <a:prstGeom prst="rect">
-            <a:avLst/>
-          </a:prstGeom>
-          <a:solidFill>
-            <a:srgbClr val="1F3864"/>
-          </a:solidFill>
-          <a:ln>
-            <a:noFill/>
-          </a:ln>
-          <a:effectLst/>
-        </p:spPr>
-        <p:style>
-          <a:lnRef idx="1">
-            <a:schemeClr val="accent1"/>
-          </a:lnRef>
-          <a:fillRef idx="3">
-            <a:schemeClr val="accent1"/>
-          </a:fillRef>
-          <a:effectRef idx="2">
-            <a:schemeClr val="accent1"/>
-          </a:effectRef>
-          <a:fontRef idx="minor">
-            <a:schemeClr val="lt1"/>
-          </a:fontRef>
-        </p:style>
-        <p:txBody>
-          <a:bodyPr rtlCol="0" anchor="ctr" wrap="none"/>
-          <a:lstStyle/>
-          <a:p>
-            <a:pPr algn="ctr"/>
-            <a:r>
-              <a:rPr sz="1200" b="1">
-                <a:solidFill>
-                  <a:srgbClr val="FFFFFF"/>
-                </a:solidFill>
-                <a:latin typeface="Garamond"/>
-              </a:rPr>
-              <a:t>T</a:t>
-            </a:r>
-          </a:p>
-        </p:txBody>
-      </p:sp>
-      <p:sp>
-        <p:nvSpPr>
-          <p:cNvPr id="25" name="Rectangle 24"/>
-          <p:cNvSpPr/>
-          <p:nvPr/>
-        </p:nvSpPr>
-        <p:spPr>
-          <a:xfrm>
-            <a:off x="2140839" y="1755648"/>
-            <a:ext cx="658939" cy="457200"/>
-          </a:xfrm>
-          <a:prstGeom prst="rect">
-            <a:avLst/>
-          </a:prstGeom>
-          <a:solidFill>
-            <a:srgbClr val="1F3864"/>
-          </a:solidFill>
-          <a:ln>
-            <a:noFill/>
-          </a:ln>
-          <a:effectLst/>
-        </p:spPr>
-        <p:style>
-          <a:lnRef idx="1">
-            <a:schemeClr val="accent1"/>
-          </a:lnRef>
-          <a:fillRef idx="3">
-            <a:schemeClr val="accent1"/>
-          </a:fillRef>
-          <a:effectRef idx="2">
-            <a:schemeClr val="accent1"/>
-          </a:effectRef>
-          <a:fontRef idx="minor">
-            <a:schemeClr val="lt1"/>
-          </a:fontRef>
-        </p:style>
-        <p:txBody>
-          <a:bodyPr rtlCol="0" anchor="ctr" wrap="none"/>
-          <a:lstStyle/>
-          <a:p>
-            <a:pPr algn="ctr"/>
-            <a:r>
-              <a:rPr sz="1200" b="1">
-                <a:solidFill>
-                  <a:srgbClr val="FFFFFF"/>
-                </a:solidFill>
-                <a:latin typeface="Garamond"/>
-              </a:rPr>
-              <a:t>T</a:t>
-            </a:r>
-          </a:p>
-        </p:txBody>
-      </p:sp>
-      <p:sp>
-        <p:nvSpPr>
-          <p:cNvPr id="26" name="Rectangle 25"/>
-          <p:cNvSpPr/>
-          <p:nvPr/>
-        </p:nvSpPr>
-        <p:spPr>
-          <a:xfrm>
-            <a:off x="2799778" y="1755648"/>
-            <a:ext cx="658939" cy="457200"/>
-          </a:xfrm>
-          <a:prstGeom prst="rect">
-            <a:avLst/>
-          </a:prstGeom>
-          <a:solidFill>
-            <a:srgbClr val="1F3864"/>
-          </a:solidFill>
-          <a:ln>
-            <a:noFill/>
-          </a:ln>
-          <a:effectLst/>
-        </p:spPr>
-        <p:style>
-          <a:lnRef idx="1">
-            <a:schemeClr val="accent1"/>
-          </a:lnRef>
-          <a:fillRef idx="3">
-            <a:schemeClr val="accent1"/>
-          </a:fillRef>
-          <a:effectRef idx="2">
-            <a:schemeClr val="accent1"/>
-          </a:effectRef>
-          <a:fontRef idx="minor">
-            <a:schemeClr val="lt1"/>
-          </a:fontRef>
-        </p:style>
-        <p:txBody>
-          <a:bodyPr rtlCol="0" anchor="ctr" wrap="none"/>
-          <a:lstStyle/>
-          <a:p>
-            <a:pPr algn="ctr"/>
-            <a:r>
-              <a:rPr sz="1200" b="1">
-                <a:solidFill>
-                  <a:srgbClr val="FFFFFF"/>
-                </a:solidFill>
-                <a:latin typeface="Garamond"/>
-              </a:rPr>
-              <a:t>T</a:t>
-            </a:r>
-          </a:p>
-        </p:txBody>
-      </p:sp>
-      <p:sp>
-        <p:nvSpPr>
-          <p:cNvPr id="27" name="Rectangle 26"/>
-          <p:cNvSpPr/>
-          <p:nvPr/>
-        </p:nvSpPr>
-        <p:spPr>
-          <a:xfrm>
-            <a:off x="10707052" y="1755648"/>
-            <a:ext cx="658939" cy="457200"/>
-          </a:xfrm>
-          <a:prstGeom prst="rect">
-            <a:avLst/>
-          </a:prstGeom>
-          <a:solidFill>
-            <a:srgbClr val="7B2530"/>
-          </a:solidFill>
-          <a:ln>
-            <a:noFill/>
-          </a:ln>
-          <a:effectLst/>
-        </p:spPr>
-        <p:style>
-          <a:lnRef idx="1">
-            <a:schemeClr val="accent1"/>
-          </a:lnRef>
-          <a:fillRef idx="3">
-            <a:schemeClr val="accent1"/>
-          </a:fillRef>
-          <a:effectRef idx="2">
-            <a:schemeClr val="accent1"/>
-          </a:effectRef>
-          <a:fontRef idx="minor">
-            <a:schemeClr val="lt1"/>
-          </a:fontRef>
-        </p:style>
-        <p:txBody>
-          <a:bodyPr rtlCol="0" anchor="ctr" wrap="none"/>
-          <a:lstStyle/>
-          <a:p>
-            <a:pPr algn="ctr"/>
-            <a:r>
-              <a:rPr sz="1200" b="1">
-                <a:solidFill>
-                  <a:srgbClr val="FFFFFF"/>
-                </a:solidFill>
-                <a:latin typeface="Garamond"/>
-              </a:rPr>
-              <a:t>T</a:t>
-            </a:r>
-          </a:p>
-        </p:txBody>
-      </p:sp>
-      <p:sp>
-        <p:nvSpPr>
-          <p:cNvPr id="28" name="TextBox 27"/>
-          <p:cNvSpPr txBox="1"/>
-          <p:nvPr/>
-        </p:nvSpPr>
-        <p:spPr>
-          <a:xfrm>
-            <a:off x="3733037" y="1773936"/>
-            <a:ext cx="4722876" cy="420624"/>
-          </a:xfrm>
-          <a:prstGeom prst="rect">
-            <a:avLst/>
-          </a:prstGeom>
-          <a:noFill/>
-        </p:spPr>
-        <p:txBody>
-          <a:bodyPr wrap="square" lIns="0" rIns="0" tIns="0" bIns="0" anchor="ctr">
-            <a:spAutoFit/>
-          </a:bodyPr>
-          <a:lstStyle/>
-          <a:p>
-            <a:pPr algn="ctr">
-              <a:lnSpc>
-                <a:spcPts val="2250"/>
-              </a:lnSpc>
-              <a:spcAft>
-                <a:spcPts val="0"/>
-              </a:spcAft>
-            </a:pPr>
-            <a:r>
-              <a:rPr sz="1500" b="1" i="0">
-                <a:solidFill>
-                  <a:srgbClr val="1F3864"/>
-                </a:solidFill>
-                <a:latin typeface="Garamond"/>
-              </a:rPr>
-              <a:t>stayer</a:t>
-            </a:r>
-          </a:p>
-        </p:txBody>
-      </p:sp>
-      <p:sp>
-        <p:nvSpPr>
-          <p:cNvPr id="29" name="Rectangle 28"/>
-          <p:cNvSpPr/>
-          <p:nvPr/>
-        </p:nvSpPr>
-        <p:spPr>
-          <a:xfrm>
-            <a:off x="822960" y="1755648"/>
-            <a:ext cx="658939" cy="457200"/>
-          </a:xfrm>
-          <a:prstGeom prst="rect">
-            <a:avLst/>
-          </a:prstGeom>
-          <a:solidFill>
-            <a:srgbClr val="1F3864"/>
-          </a:solidFill>
-          <a:ln>
-            <a:noFill/>
-          </a:ln>
-          <a:effectLst/>
-        </p:spPr>
-        <p:style>
-          <a:lnRef idx="1">
-            <a:schemeClr val="accent1"/>
-          </a:lnRef>
-          <a:fillRef idx="3">
-            <a:schemeClr val="accent1"/>
-          </a:fillRef>
-          <a:effectRef idx="2">
-            <a:schemeClr val="accent1"/>
-          </a:effectRef>
-          <a:fontRef idx="minor">
-            <a:schemeClr val="lt1"/>
-          </a:fontRef>
-        </p:style>
-        <p:txBody>
-          <a:bodyPr rtlCol="0" anchor="ctr" wrap="none"/>
-          <a:lstStyle/>
-          <a:p>
-            <a:pPr algn="ctr"/>
-            <a:r>
-              <a:rPr sz="1200" b="1">
-                <a:solidFill>
-                  <a:srgbClr val="FFFFFF"/>
-                </a:solidFill>
-                <a:latin typeface="Garamond"/>
-              </a:rPr>
-              <a:t>T</a:t>
-            </a:r>
-          </a:p>
-        </p:txBody>
-      </p:sp>
-      <p:sp>
-        <p:nvSpPr>
-          <p:cNvPr id="30" name="Rectangle 29"/>
-          <p:cNvSpPr/>
-          <p:nvPr/>
-        </p:nvSpPr>
-        <p:spPr>
-          <a:xfrm>
-            <a:off x="1481899" y="1755648"/>
-            <a:ext cx="658939" cy="457200"/>
-          </a:xfrm>
-          <a:prstGeom prst="rect">
-            <a:avLst/>
-          </a:prstGeom>
-          <a:solidFill>
-            <a:srgbClr val="1F3864"/>
-          </a:solidFill>
-          <a:ln>
-            <a:noFill/>
-          </a:ln>
-          <a:effectLst/>
-        </p:spPr>
-        <p:style>
-          <a:lnRef idx="1">
-            <a:schemeClr val="accent1"/>
-          </a:lnRef>
-          <a:fillRef idx="3">
-            <a:schemeClr val="accent1"/>
-          </a:fillRef>
-          <a:effectRef idx="2">
-            <a:schemeClr val="accent1"/>
-          </a:effectRef>
-          <a:fontRef idx="minor">
-            <a:schemeClr val="lt1"/>
-          </a:fontRef>
-        </p:style>
-        <p:txBody>
-          <a:bodyPr rtlCol="0" anchor="ctr" wrap="none"/>
-          <a:lstStyle/>
-          <a:p>
-            <a:pPr algn="ctr"/>
-            <a:r>
-              <a:rPr sz="1200" b="1">
-                <a:solidFill>
-                  <a:srgbClr val="FFFFFF"/>
-                </a:solidFill>
-                <a:latin typeface="Garamond"/>
-              </a:rPr>
-              <a:t>T</a:t>
-            </a:r>
-          </a:p>
-        </p:txBody>
-      </p:sp>
-      <p:sp>
-        <p:nvSpPr>
-          <p:cNvPr id="31" name="TextBox 30"/>
-          <p:cNvSpPr txBox="1"/>
-          <p:nvPr/>
-        </p:nvSpPr>
-        <p:spPr>
-          <a:xfrm>
-            <a:off x="3733037" y="1773936"/>
-            <a:ext cx="4722876" cy="420624"/>
-          </a:xfrm>
-          <a:prstGeom prst="rect">
-            <a:avLst/>
-          </a:prstGeom>
-          <a:noFill/>
-        </p:spPr>
-        <p:txBody>
-          <a:bodyPr wrap="square" lIns="0" rIns="0" tIns="0" bIns="0" anchor="ctr">
-            <a:spAutoFit/>
-          </a:bodyPr>
-          <a:lstStyle/>
-          <a:p>
-            <a:pPr algn="ctr">
-              <a:lnSpc>
-                <a:spcPts val="2250"/>
-              </a:lnSpc>
-              <a:spcAft>
-                <a:spcPts val="0"/>
-              </a:spcAft>
-            </a:pPr>
-            <a:r>
-              <a:rPr sz="1500" b="1" i="0">
-                <a:solidFill>
-                  <a:srgbClr val="7B2530"/>
-                </a:solidFill>
-                <a:latin typeface="Garamond"/>
-              </a:rPr>
-              <a:t>leaver</a:t>
-            </a:r>
-          </a:p>
-        </p:txBody>
-      </p:sp>
-      <p:sp>
-        <p:nvSpPr>
-          <p:cNvPr id="32" name="Rectangle 31"/>
-          <p:cNvSpPr/>
-          <p:nvPr/>
-        </p:nvSpPr>
-        <p:spPr>
-          <a:xfrm>
-            <a:off x="822960" y="1755648"/>
-            <a:ext cx="658939" cy="457200"/>
-          </a:xfrm>
-          <a:prstGeom prst="rect">
-            <a:avLst/>
-          </a:prstGeom>
-          <a:solidFill>
-            <a:srgbClr val="1F3864"/>
-          </a:solidFill>
-          <a:ln>
-            <a:noFill/>
-          </a:ln>
-          <a:effectLst/>
-        </p:spPr>
-        <p:style>
-          <a:lnRef idx="1">
-            <a:schemeClr val="accent1"/>
-          </a:lnRef>
-          <a:fillRef idx="3">
-            <a:schemeClr val="accent1"/>
-          </a:fillRef>
-          <a:effectRef idx="2">
-            <a:schemeClr val="accent1"/>
-          </a:effectRef>
-          <a:fontRef idx="minor">
-            <a:schemeClr val="lt1"/>
-          </a:fontRef>
-        </p:style>
-        <p:txBody>
-          <a:bodyPr rtlCol="0" anchor="ctr" wrap="none"/>
-          <a:lstStyle/>
-          <a:p>
-            <a:pPr algn="ctr"/>
-            <a:r>
-              <a:rPr sz="1200" b="1">
-                <a:solidFill>
-                  <a:srgbClr val="FFFFFF"/>
-                </a:solidFill>
-                <a:latin typeface="Garamond"/>
-              </a:rPr>
-              <a:t>T</a:t>
-            </a:r>
-          </a:p>
-        </p:txBody>
-      </p:sp>
-      <p:sp>
-        <p:nvSpPr>
-          <p:cNvPr id="33" name="TextBox 32"/>
-          <p:cNvSpPr txBox="1"/>
-          <p:nvPr/>
-        </p:nvSpPr>
-        <p:spPr>
-          <a:xfrm>
-            <a:off x="3733037" y="1773936"/>
-            <a:ext cx="4722876" cy="420624"/>
-          </a:xfrm>
-          <a:prstGeom prst="rect">
-            <a:avLst/>
-          </a:prstGeom>
-          <a:noFill/>
-        </p:spPr>
-        <p:txBody>
-          <a:bodyPr wrap="square" lIns="0" rIns="0" tIns="0" bIns="0" anchor="ctr">
-            <a:spAutoFit/>
-          </a:bodyPr>
-          <a:lstStyle/>
-          <a:p>
-            <a:pPr algn="ctr">
-              <a:lnSpc>
-                <a:spcPts val="2250"/>
-              </a:lnSpc>
-              <a:spcAft>
-                <a:spcPts val="0"/>
-              </a:spcAft>
-            </a:pPr>
-            <a:r>
-              <a:rPr sz="1500" b="1" i="0">
-                <a:solidFill>
-                  <a:srgbClr val="6B7480"/>
-                </a:solidFill>
-                <a:latin typeface="Garamond"/>
-              </a:rPr>
-              <a:t>not a teacher</a:t>
-            </a:r>
-          </a:p>
-        </p:txBody>
-      </p:sp>
-      <p:sp>
-        <p:nvSpPr>
-          <p:cNvPr id="49" name="TextBox 48"/>
+          <p:cNvPr id="23" name="TextBox 22"/>
           <p:cNvSpPr txBox="1"/>
           <p:nvPr/>
         </p:nvSpPr>
@@ -11269,7 +12726,7 @@
       </p:sp>
       <p:cxnSp>
         <p:nvCxnSpPr>
-          <p:cNvPr id="50" name="Connector 49"/>
+          <p:cNvPr id="24" name="Connector 23"/>
           <p:cNvCxnSpPr/>
           <p:nvPr/>
         </p:nvCxnSpPr>
@@ -11304,7 +12761,7 @@
       </p:cxnSp>
       <p:sp>
         <p:nvSpPr>
-          <p:cNvPr id="51" name="TextBox 50"/>
+          <p:cNvPr id="25" name="TextBox 24"/>
           <p:cNvSpPr txBox="1"/>
           <p:nvPr/>
         </p:nvSpPr>
@@ -11346,7 +12803,7 @@
       </p:sp>
       <p:sp>
         <p:nvSpPr>
-          <p:cNvPr id="52" name="TextBox 51"/>
+          <p:cNvPr id="26" name="TextBox 25"/>
           <p:cNvSpPr txBox="1"/>
           <p:nvPr/>
         </p:nvSpPr>
@@ -11388,7 +12845,7 @@
       </p:sp>
       <p:sp>
         <p:nvSpPr>
-          <p:cNvPr id="53" name="TextBox 52"/>
+          <p:cNvPr id="27" name="TextBox 26"/>
           <p:cNvSpPr txBox="1"/>
           <p:nvPr/>
         </p:nvSpPr>
@@ -11430,7 +12887,7 @@
       </p:sp>
       <p:sp>
         <p:nvSpPr>
-          <p:cNvPr id="54" name="TextBox 53"/>
+          <p:cNvPr id="28" name="TextBox 27"/>
           <p:cNvSpPr txBox="1"/>
           <p:nvPr/>
         </p:nvSpPr>
@@ -11472,7 +12929,7 @@
       </p:sp>
       <p:sp>
         <p:nvSpPr>
-          <p:cNvPr id="55" name="TextBox 54"/>
+          <p:cNvPr id="29" name="TextBox 28"/>
           <p:cNvSpPr txBox="1"/>
           <p:nvPr/>
         </p:nvSpPr>
@@ -11514,7 +12971,7 @@
       </p:sp>
       <p:sp>
         <p:nvSpPr>
-          <p:cNvPr id="56" name="TextBox 55"/>
+          <p:cNvPr id="30" name="TextBox 29"/>
           <p:cNvSpPr txBox="1"/>
           <p:nvPr/>
         </p:nvSpPr>
@@ -11556,7 +13013,7 @@
       </p:sp>
       <p:cxnSp>
         <p:nvCxnSpPr>
-          <p:cNvPr id="57" name="Connector 56"/>
+          <p:cNvPr id="31" name="Connector 30"/>
           <p:cNvCxnSpPr/>
           <p:nvPr/>
         </p:nvCxnSpPr>
@@ -11591,7 +13048,7 @@
       </p:cxnSp>
       <p:sp>
         <p:nvSpPr>
-          <p:cNvPr id="58" name="TextBox 57"/>
+          <p:cNvPr id="32" name="TextBox 31"/>
           <p:cNvSpPr txBox="1"/>
           <p:nvPr/>
         </p:nvSpPr>
@@ -11633,7 +13090,7 @@
       </p:sp>
       <p:sp>
         <p:nvSpPr>
-          <p:cNvPr id="59" name="TextBox 58"/>
+          <p:cNvPr id="33" name="TextBox 32"/>
           <p:cNvSpPr txBox="1"/>
           <p:nvPr/>
         </p:nvSpPr>
@@ -11675,7 +13132,7 @@
       </p:sp>
       <p:cxnSp>
         <p:nvCxnSpPr>
-          <p:cNvPr id="60" name="Connector 59"/>
+          <p:cNvPr id="34" name="Connector 33"/>
           <p:cNvCxnSpPr/>
           <p:nvPr/>
         </p:nvCxnSpPr>
@@ -11710,7 +13167,7 @@
       </p:cxnSp>
       <p:sp>
         <p:nvSpPr>
-          <p:cNvPr id="61" name="TextBox 60"/>
+          <p:cNvPr id="35" name="TextBox 34"/>
           <p:cNvSpPr txBox="1"/>
           <p:nvPr/>
         </p:nvSpPr>
@@ -11752,7 +13209,7 @@
       </p:sp>
       <p:sp>
         <p:nvSpPr>
-          <p:cNvPr id="62" name="TextBox 61"/>
+          <p:cNvPr id="36" name="TextBox 35"/>
           <p:cNvSpPr txBox="1"/>
           <p:nvPr/>
         </p:nvSpPr>
@@ -11794,7 +13251,7 @@
       </p:sp>
       <p:sp>
         <p:nvSpPr>
-          <p:cNvPr id="63" name="TextBox 62"/>
+          <p:cNvPr id="37" name="TextBox 36"/>
           <p:cNvSpPr txBox="1"/>
           <p:nvPr/>
         </p:nvSpPr>
@@ -11836,7 +13293,7 @@
       </p:sp>
       <p:sp>
         <p:nvSpPr>
-          <p:cNvPr id="64" name="TextBox 63"/>
+          <p:cNvPr id="38" name="TextBox 37"/>
           <p:cNvSpPr txBox="1"/>
           <p:nvPr/>
         </p:nvSpPr>
@@ -11878,7 +13335,7 @@
       </p:sp>
       <p:sp>
         <p:nvSpPr>
-          <p:cNvPr id="65" name="TextBox 64"/>
+          <p:cNvPr id="39" name="TextBox 38"/>
           <p:cNvSpPr txBox="1"/>
           <p:nvPr/>
         </p:nvSpPr>
@@ -11920,7 +13377,7 @@
       </p:sp>
       <p:sp>
         <p:nvSpPr>
-          <p:cNvPr id="66" name="TextBox 65"/>
+          <p:cNvPr id="40" name="TextBox 39"/>
           <p:cNvSpPr txBox="1"/>
           <p:nvPr/>
         </p:nvSpPr>
@@ -11962,7 +13419,7 @@
       </p:sp>
       <p:sp>
         <p:nvSpPr>
-          <p:cNvPr id="67" name="TextBox 66"/>
+          <p:cNvPr id="41" name="TextBox 40"/>
           <p:cNvSpPr txBox="1"/>
           <p:nvPr/>
         </p:nvSpPr>
@@ -12004,7 +13461,7 @@
       </p:sp>
       <p:sp>
         <p:nvSpPr>
-          <p:cNvPr id="68" name="TextBox 67"/>
+          <p:cNvPr id="42" name="TextBox 41"/>
           <p:cNvSpPr txBox="1"/>
           <p:nvPr/>
         </p:nvSpPr>
@@ -12046,7 +13503,7 @@
       </p:sp>
       <p:sp>
         <p:nvSpPr>
-          <p:cNvPr id="69" name="TextBox 68"/>
+          <p:cNvPr id="43" name="TextBox 42"/>
           <p:cNvSpPr txBox="1"/>
           <p:nvPr/>
         </p:nvSpPr>
@@ -12088,7 +13545,7 @@
       </p:sp>
       <p:sp>
         <p:nvSpPr>
-          <p:cNvPr id="70" name="TextBox 69"/>
+          <p:cNvPr id="44" name="TextBox 43"/>
           <p:cNvSpPr txBox="1"/>
           <p:nvPr/>
         </p:nvSpPr>
@@ -12130,7 +13587,7 @@
       </p:sp>
       <p:sp>
         <p:nvSpPr>
-          <p:cNvPr id="71" name="TextBox 70"/>
+          <p:cNvPr id="45" name="TextBox 44"/>
           <p:cNvSpPr txBox="1"/>
           <p:nvPr/>
         </p:nvSpPr>
@@ -12172,7 +13629,7 @@
       </p:sp>
       <p:sp>
         <p:nvSpPr>
-          <p:cNvPr id="72" name="TextBox 71"/>
+          <p:cNvPr id="46" name="TextBox 45"/>
           <p:cNvSpPr txBox="1"/>
           <p:nvPr/>
         </p:nvSpPr>
@@ -12214,7 +13671,7 @@
       </p:sp>
       <p:cxnSp>
         <p:nvCxnSpPr>
-          <p:cNvPr id="73" name="Connector 72"/>
+          <p:cNvPr id="47" name="Connector 46"/>
           <p:cNvCxnSpPr/>
           <p:nvPr/>
         </p:nvCxnSpPr>
@@ -12252,643 +13709,6 @@
   <p:clrMapOvr>
     <a:masterClrMapping/>
   </p:clrMapOvr>
-  <p:timing>
-    <p:tnLst>
-      <p:par>
-        <p:cTn id="1" dur="indefinite" restart="never" nodeType="tmRoot">
-          <p:childTnLst>
-            <p:seq concurrent="1" nextAc="seek">
-              <p:cTn id="2" dur="indefinite" nodeType="mainSeq">
-                <p:childTnLst>
-                  <p:par>
-                    <p:cTn id="15" fill="hold">
-                      <p:stCondLst>
-                        <p:cond delay="indefinite"/>
-                      </p:stCondLst>
-                      <p:childTnLst>
-                        <p:par>
-                          <p:cTn id="16" fill="hold">
-                            <p:stCondLst>
-                              <p:cond delay="0"/>
-                            </p:stCondLst>
-                            <p:childTnLst>
-                              <p:par>
-                                <p:cTn id="3" presetID="1" presetClass="entr" presetSubtype="0" fill="hold" grpId="0" nodeType="clickEffect">
-                                  <p:stCondLst>
-                                    <p:cond delay="0"/>
-                                  </p:stCondLst>
-                                  <p:childTnLst>
-                                    <p:set>
-                                      <p:cBhvr>
-                                        <p:cTn id="4" dur="1" fill="hold">
-                                          <p:stCondLst>
-                                            <p:cond delay="0"/>
-                                          </p:stCondLst>
-                                        </p:cTn>
-                                        <p:tgtEl>
-                                          <p:spTgt spid="23"/>
-                                        </p:tgtEl>
-                                        <p:attrNameLst>
-                                          <p:attrName>style.visibility</p:attrName>
-                                        </p:attrNameLst>
-                                      </p:cBhvr>
-                                      <p:to>
-                                        <p:strVal val="visible"/>
-                                      </p:to>
-                                    </p:set>
-                                  </p:childTnLst>
-                                </p:cTn>
-                              </p:par>
-                              <p:par>
-                                <p:cTn id="5" presetID="1" presetClass="entr" presetSubtype="0" fill="hold" grpId="0" nodeType="withEffect">
-                                  <p:stCondLst>
-                                    <p:cond delay="0"/>
-                                  </p:stCondLst>
-                                  <p:childTnLst>
-                                    <p:set>
-                                      <p:cBhvr>
-                                        <p:cTn id="6" dur="1" fill="hold">
-                                          <p:stCondLst>
-                                            <p:cond delay="0"/>
-                                          </p:stCondLst>
-                                        </p:cTn>
-                                        <p:tgtEl>
-                                          <p:spTgt spid="24"/>
-                                        </p:tgtEl>
-                                        <p:attrNameLst>
-                                          <p:attrName>style.visibility</p:attrName>
-                                        </p:attrNameLst>
-                                      </p:cBhvr>
-                                      <p:to>
-                                        <p:strVal val="visible"/>
-                                      </p:to>
-                                    </p:set>
-                                  </p:childTnLst>
-                                </p:cTn>
-                              </p:par>
-                              <p:par>
-                                <p:cTn id="7" presetID="1" presetClass="entr" presetSubtype="0" fill="hold" grpId="0" nodeType="withEffect">
-                                  <p:stCondLst>
-                                    <p:cond delay="0"/>
-                                  </p:stCondLst>
-                                  <p:childTnLst>
-                                    <p:set>
-                                      <p:cBhvr>
-                                        <p:cTn id="8" dur="1" fill="hold">
-                                          <p:stCondLst>
-                                            <p:cond delay="0"/>
-                                          </p:stCondLst>
-                                        </p:cTn>
-                                        <p:tgtEl>
-                                          <p:spTgt spid="25"/>
-                                        </p:tgtEl>
-                                        <p:attrNameLst>
-                                          <p:attrName>style.visibility</p:attrName>
-                                        </p:attrNameLst>
-                                      </p:cBhvr>
-                                      <p:to>
-                                        <p:strVal val="visible"/>
-                                      </p:to>
-                                    </p:set>
-                                  </p:childTnLst>
-                                </p:cTn>
-                              </p:par>
-                              <p:par>
-                                <p:cTn id="9" presetID="1" presetClass="entr" presetSubtype="0" fill="hold" grpId="0" nodeType="withEffect">
-                                  <p:stCondLst>
-                                    <p:cond delay="0"/>
-                                  </p:stCondLst>
-                                  <p:childTnLst>
-                                    <p:set>
-                                      <p:cBhvr>
-                                        <p:cTn id="10" dur="1" fill="hold">
-                                          <p:stCondLst>
-                                            <p:cond delay="0"/>
-                                          </p:stCondLst>
-                                        </p:cTn>
-                                        <p:tgtEl>
-                                          <p:spTgt spid="26"/>
-                                        </p:tgtEl>
-                                        <p:attrNameLst>
-                                          <p:attrName>style.visibility</p:attrName>
-                                        </p:attrNameLst>
-                                      </p:cBhvr>
-                                      <p:to>
-                                        <p:strVal val="visible"/>
-                                      </p:to>
-                                    </p:set>
-                                  </p:childTnLst>
-                                </p:cTn>
-                              </p:par>
-                              <p:par>
-                                <p:cTn id="11" presetID="1" presetClass="entr" presetSubtype="0" fill="hold" grpId="0" nodeType="withEffect">
-                                  <p:stCondLst>
-                                    <p:cond delay="0"/>
-                                  </p:stCondLst>
-                                  <p:childTnLst>
-                                    <p:set>
-                                      <p:cBhvr>
-                                        <p:cTn id="12" dur="1" fill="hold">
-                                          <p:stCondLst>
-                                            <p:cond delay="0"/>
-                                          </p:stCondLst>
-                                        </p:cTn>
-                                        <p:tgtEl>
-                                          <p:spTgt spid="27"/>
-                                        </p:tgtEl>
-                                        <p:attrNameLst>
-                                          <p:attrName>style.visibility</p:attrName>
-                                        </p:attrNameLst>
-                                      </p:cBhvr>
-                                      <p:to>
-                                        <p:strVal val="visible"/>
-                                      </p:to>
-                                    </p:set>
-                                  </p:childTnLst>
-                                </p:cTn>
-                              </p:par>
-                              <p:par>
-                                <p:cTn id="13" presetID="1" presetClass="entr" presetSubtype="0" fill="hold" grpId="0" nodeType="withEffect">
-                                  <p:stCondLst>
-                                    <p:cond delay="0"/>
-                                  </p:stCondLst>
-                                  <p:childTnLst>
-                                    <p:set>
-                                      <p:cBhvr>
-                                        <p:cTn id="14" dur="1" fill="hold">
-                                          <p:stCondLst>
-                                            <p:cond delay="0"/>
-                                          </p:stCondLst>
-                                        </p:cTn>
-                                        <p:tgtEl>
-                                          <p:spTgt spid="28"/>
-                                        </p:tgtEl>
-                                        <p:attrNameLst>
-                                          <p:attrName>style.visibility</p:attrName>
-                                        </p:attrNameLst>
-                                      </p:cBhvr>
-                                      <p:to>
-                                        <p:strVal val="visible"/>
-                                      </p:to>
-                                    </p:set>
-                                  </p:childTnLst>
-                                </p:cTn>
-                              </p:par>
-                            </p:childTnLst>
-                          </p:cTn>
-                        </p:par>
-                      </p:childTnLst>
-                    </p:cTn>
-                  </p:par>
-                  <p:par>
-                    <p:cTn id="35" fill="hold">
-                      <p:stCondLst>
-                        <p:cond delay="indefinite"/>
-                      </p:stCondLst>
-                      <p:childTnLst>
-                        <p:par>
-                          <p:cTn id="36" fill="hold">
-                            <p:stCondLst>
-                              <p:cond delay="0"/>
-                            </p:stCondLst>
-                            <p:childTnLst>
-                              <p:par>
-                                <p:cTn id="17" presetID="1" presetClass="exit" presetSubtype="0" fill="hold" grpId="0" nodeType="clickEffect">
-                                  <p:stCondLst>
-                                    <p:cond delay="0"/>
-                                  </p:stCondLst>
-                                  <p:childTnLst>
-                                    <p:set>
-                                      <p:cBhvr>
-                                        <p:cTn id="18" dur="1" fill="hold">
-                                          <p:stCondLst>
-                                            <p:cond delay="0"/>
-                                          </p:stCondLst>
-                                        </p:cTn>
-                                        <p:tgtEl>
-                                          <p:spTgt spid="23"/>
-                                        </p:tgtEl>
-                                        <p:attrNameLst>
-                                          <p:attrName>style.visibility</p:attrName>
-                                        </p:attrNameLst>
-                                      </p:cBhvr>
-                                      <p:to>
-                                        <p:strVal val="hidden"/>
-                                      </p:to>
-                                    </p:set>
-                                  </p:childTnLst>
-                                </p:cTn>
-                              </p:par>
-                              <p:par>
-                                <p:cTn id="19" presetID="1" presetClass="exit" presetSubtype="0" fill="hold" grpId="0" nodeType="withEffect">
-                                  <p:stCondLst>
-                                    <p:cond delay="0"/>
-                                  </p:stCondLst>
-                                  <p:childTnLst>
-                                    <p:set>
-                                      <p:cBhvr>
-                                        <p:cTn id="20" dur="1" fill="hold">
-                                          <p:stCondLst>
-                                            <p:cond delay="0"/>
-                                          </p:stCondLst>
-                                        </p:cTn>
-                                        <p:tgtEl>
-                                          <p:spTgt spid="24"/>
-                                        </p:tgtEl>
-                                        <p:attrNameLst>
-                                          <p:attrName>style.visibility</p:attrName>
-                                        </p:attrNameLst>
-                                      </p:cBhvr>
-                                      <p:to>
-                                        <p:strVal val="hidden"/>
-                                      </p:to>
-                                    </p:set>
-                                  </p:childTnLst>
-                                </p:cTn>
-                              </p:par>
-                              <p:par>
-                                <p:cTn id="21" presetID="1" presetClass="exit" presetSubtype="0" fill="hold" grpId="0" nodeType="withEffect">
-                                  <p:stCondLst>
-                                    <p:cond delay="0"/>
-                                  </p:stCondLst>
-                                  <p:childTnLst>
-                                    <p:set>
-                                      <p:cBhvr>
-                                        <p:cTn id="22" dur="1" fill="hold">
-                                          <p:stCondLst>
-                                            <p:cond delay="0"/>
-                                          </p:stCondLst>
-                                        </p:cTn>
-                                        <p:tgtEl>
-                                          <p:spTgt spid="25"/>
-                                        </p:tgtEl>
-                                        <p:attrNameLst>
-                                          <p:attrName>style.visibility</p:attrName>
-                                        </p:attrNameLst>
-                                      </p:cBhvr>
-                                      <p:to>
-                                        <p:strVal val="hidden"/>
-                                      </p:to>
-                                    </p:set>
-                                  </p:childTnLst>
-                                </p:cTn>
-                              </p:par>
-                              <p:par>
-                                <p:cTn id="23" presetID="1" presetClass="exit" presetSubtype="0" fill="hold" grpId="0" nodeType="withEffect">
-                                  <p:stCondLst>
-                                    <p:cond delay="0"/>
-                                  </p:stCondLst>
-                                  <p:childTnLst>
-                                    <p:set>
-                                      <p:cBhvr>
-                                        <p:cTn id="24" dur="1" fill="hold">
-                                          <p:stCondLst>
-                                            <p:cond delay="0"/>
-                                          </p:stCondLst>
-                                        </p:cTn>
-                                        <p:tgtEl>
-                                          <p:spTgt spid="26"/>
-                                        </p:tgtEl>
-                                        <p:attrNameLst>
-                                          <p:attrName>style.visibility</p:attrName>
-                                        </p:attrNameLst>
-                                      </p:cBhvr>
-                                      <p:to>
-                                        <p:strVal val="hidden"/>
-                                      </p:to>
-                                    </p:set>
-                                  </p:childTnLst>
-                                </p:cTn>
-                              </p:par>
-                              <p:par>
-                                <p:cTn id="25" presetID="1" presetClass="exit" presetSubtype="0" fill="hold" grpId="0" nodeType="withEffect">
-                                  <p:stCondLst>
-                                    <p:cond delay="0"/>
-                                  </p:stCondLst>
-                                  <p:childTnLst>
-                                    <p:set>
-                                      <p:cBhvr>
-                                        <p:cTn id="26" dur="1" fill="hold">
-                                          <p:stCondLst>
-                                            <p:cond delay="0"/>
-                                          </p:stCondLst>
-                                        </p:cTn>
-                                        <p:tgtEl>
-                                          <p:spTgt spid="27"/>
-                                        </p:tgtEl>
-                                        <p:attrNameLst>
-                                          <p:attrName>style.visibility</p:attrName>
-                                        </p:attrNameLst>
-                                      </p:cBhvr>
-                                      <p:to>
-                                        <p:strVal val="hidden"/>
-                                      </p:to>
-                                    </p:set>
-                                  </p:childTnLst>
-                                </p:cTn>
-                              </p:par>
-                              <p:par>
-                                <p:cTn id="27" presetID="1" presetClass="exit" presetSubtype="0" fill="hold" grpId="0" nodeType="withEffect">
-                                  <p:stCondLst>
-                                    <p:cond delay="0"/>
-                                  </p:stCondLst>
-                                  <p:childTnLst>
-                                    <p:set>
-                                      <p:cBhvr>
-                                        <p:cTn id="28" dur="1" fill="hold">
-                                          <p:stCondLst>
-                                            <p:cond delay="0"/>
-                                          </p:stCondLst>
-                                        </p:cTn>
-                                        <p:tgtEl>
-                                          <p:spTgt spid="28"/>
-                                        </p:tgtEl>
-                                        <p:attrNameLst>
-                                          <p:attrName>style.visibility</p:attrName>
-                                        </p:attrNameLst>
-                                      </p:cBhvr>
-                                      <p:to>
-                                        <p:strVal val="hidden"/>
-                                      </p:to>
-                                    </p:set>
-                                  </p:childTnLst>
-                                </p:cTn>
-                              </p:par>
-                              <p:par>
-                                <p:cTn id="29" presetID="1" presetClass="entr" presetSubtype="0" fill="hold" grpId="0" nodeType="withEffect">
-                                  <p:stCondLst>
-                                    <p:cond delay="0"/>
-                                  </p:stCondLst>
-                                  <p:childTnLst>
-                                    <p:set>
-                                      <p:cBhvr>
-                                        <p:cTn id="30" dur="1" fill="hold">
-                                          <p:stCondLst>
-                                            <p:cond delay="0"/>
-                                          </p:stCondLst>
-                                        </p:cTn>
-                                        <p:tgtEl>
-                                          <p:spTgt spid="29"/>
-                                        </p:tgtEl>
-                                        <p:attrNameLst>
-                                          <p:attrName>style.visibility</p:attrName>
-                                        </p:attrNameLst>
-                                      </p:cBhvr>
-                                      <p:to>
-                                        <p:strVal val="visible"/>
-                                      </p:to>
-                                    </p:set>
-                                  </p:childTnLst>
-                                </p:cTn>
-                              </p:par>
-                              <p:par>
-                                <p:cTn id="31" presetID="1" presetClass="entr" presetSubtype="0" fill="hold" grpId="0" nodeType="withEffect">
-                                  <p:stCondLst>
-                                    <p:cond delay="0"/>
-                                  </p:stCondLst>
-                                  <p:childTnLst>
-                                    <p:set>
-                                      <p:cBhvr>
-                                        <p:cTn id="32" dur="1" fill="hold">
-                                          <p:stCondLst>
-                                            <p:cond delay="0"/>
-                                          </p:stCondLst>
-                                        </p:cTn>
-                                        <p:tgtEl>
-                                          <p:spTgt spid="30"/>
-                                        </p:tgtEl>
-                                        <p:attrNameLst>
-                                          <p:attrName>style.visibility</p:attrName>
-                                        </p:attrNameLst>
-                                      </p:cBhvr>
-                                      <p:to>
-                                        <p:strVal val="visible"/>
-                                      </p:to>
-                                    </p:set>
-                                  </p:childTnLst>
-                                </p:cTn>
-                              </p:par>
-                              <p:par>
-                                <p:cTn id="33" presetID="1" presetClass="entr" presetSubtype="0" fill="hold" grpId="0" nodeType="withEffect">
-                                  <p:stCondLst>
-                                    <p:cond delay="0"/>
-                                  </p:stCondLst>
-                                  <p:childTnLst>
-                                    <p:set>
-                                      <p:cBhvr>
-                                        <p:cTn id="34" dur="1" fill="hold">
-                                          <p:stCondLst>
-                                            <p:cond delay="0"/>
-                                          </p:stCondLst>
-                                        </p:cTn>
-                                        <p:tgtEl>
-                                          <p:spTgt spid="31"/>
-                                        </p:tgtEl>
-                                        <p:attrNameLst>
-                                          <p:attrName>style.visibility</p:attrName>
-                                        </p:attrNameLst>
-                                      </p:cBhvr>
-                                      <p:to>
-                                        <p:strVal val="visible"/>
-                                      </p:to>
-                                    </p:set>
-                                  </p:childTnLst>
-                                </p:cTn>
-                              </p:par>
-                            </p:childTnLst>
-                          </p:cTn>
-                        </p:par>
-                      </p:childTnLst>
-                    </p:cTn>
-                  </p:par>
-                  <p:par>
-                    <p:cTn id="47" fill="hold">
-                      <p:stCondLst>
-                        <p:cond delay="indefinite"/>
-                      </p:stCondLst>
-                      <p:childTnLst>
-                        <p:par>
-                          <p:cTn id="48" fill="hold">
-                            <p:stCondLst>
-                              <p:cond delay="0"/>
-                            </p:stCondLst>
-                            <p:childTnLst>
-                              <p:par>
-                                <p:cTn id="37" presetID="1" presetClass="exit" presetSubtype="0" fill="hold" grpId="0" nodeType="clickEffect">
-                                  <p:stCondLst>
-                                    <p:cond delay="0"/>
-                                  </p:stCondLst>
-                                  <p:childTnLst>
-                                    <p:set>
-                                      <p:cBhvr>
-                                        <p:cTn id="38" dur="1" fill="hold">
-                                          <p:stCondLst>
-                                            <p:cond delay="0"/>
-                                          </p:stCondLst>
-                                        </p:cTn>
-                                        <p:tgtEl>
-                                          <p:spTgt spid="29"/>
-                                        </p:tgtEl>
-                                        <p:attrNameLst>
-                                          <p:attrName>style.visibility</p:attrName>
-                                        </p:attrNameLst>
-                                      </p:cBhvr>
-                                      <p:to>
-                                        <p:strVal val="hidden"/>
-                                      </p:to>
-                                    </p:set>
-                                  </p:childTnLst>
-                                </p:cTn>
-                              </p:par>
-                              <p:par>
-                                <p:cTn id="39" presetID="1" presetClass="exit" presetSubtype="0" fill="hold" grpId="0" nodeType="withEffect">
-                                  <p:stCondLst>
-                                    <p:cond delay="0"/>
-                                  </p:stCondLst>
-                                  <p:childTnLst>
-                                    <p:set>
-                                      <p:cBhvr>
-                                        <p:cTn id="40" dur="1" fill="hold">
-                                          <p:stCondLst>
-                                            <p:cond delay="0"/>
-                                          </p:stCondLst>
-                                        </p:cTn>
-                                        <p:tgtEl>
-                                          <p:spTgt spid="30"/>
-                                        </p:tgtEl>
-                                        <p:attrNameLst>
-                                          <p:attrName>style.visibility</p:attrName>
-                                        </p:attrNameLst>
-                                      </p:cBhvr>
-                                      <p:to>
-                                        <p:strVal val="hidden"/>
-                                      </p:to>
-                                    </p:set>
-                                  </p:childTnLst>
-                                </p:cTn>
-                              </p:par>
-                              <p:par>
-                                <p:cTn id="41" presetID="1" presetClass="exit" presetSubtype="0" fill="hold" grpId="0" nodeType="withEffect">
-                                  <p:stCondLst>
-                                    <p:cond delay="0"/>
-                                  </p:stCondLst>
-                                  <p:childTnLst>
-                                    <p:set>
-                                      <p:cBhvr>
-                                        <p:cTn id="42" dur="1" fill="hold">
-                                          <p:stCondLst>
-                                            <p:cond delay="0"/>
-                                          </p:stCondLst>
-                                        </p:cTn>
-                                        <p:tgtEl>
-                                          <p:spTgt spid="31"/>
-                                        </p:tgtEl>
-                                        <p:attrNameLst>
-                                          <p:attrName>style.visibility</p:attrName>
-                                        </p:attrNameLst>
-                                      </p:cBhvr>
-                                      <p:to>
-                                        <p:strVal val="hidden"/>
-                                      </p:to>
-                                    </p:set>
-                                  </p:childTnLst>
-                                </p:cTn>
-                              </p:par>
-                              <p:par>
-                                <p:cTn id="43" presetID="1" presetClass="entr" presetSubtype="0" fill="hold" grpId="0" nodeType="withEffect">
-                                  <p:stCondLst>
-                                    <p:cond delay="0"/>
-                                  </p:stCondLst>
-                                  <p:childTnLst>
-                                    <p:set>
-                                      <p:cBhvr>
-                                        <p:cTn id="44" dur="1" fill="hold">
-                                          <p:stCondLst>
-                                            <p:cond delay="0"/>
-                                          </p:stCondLst>
-                                        </p:cTn>
-                                        <p:tgtEl>
-                                          <p:spTgt spid="32"/>
-                                        </p:tgtEl>
-                                        <p:attrNameLst>
-                                          <p:attrName>style.visibility</p:attrName>
-                                        </p:attrNameLst>
-                                      </p:cBhvr>
-                                      <p:to>
-                                        <p:strVal val="visible"/>
-                                      </p:to>
-                                    </p:set>
-                                  </p:childTnLst>
-                                </p:cTn>
-                              </p:par>
-                              <p:par>
-                                <p:cTn id="45" presetID="1" presetClass="entr" presetSubtype="0" fill="hold" grpId="0" nodeType="withEffect">
-                                  <p:stCondLst>
-                                    <p:cond delay="0"/>
-                                  </p:stCondLst>
-                                  <p:childTnLst>
-                                    <p:set>
-                                      <p:cBhvr>
-                                        <p:cTn id="46" dur="1" fill="hold">
-                                          <p:stCondLst>
-                                            <p:cond delay="0"/>
-                                          </p:stCondLst>
-                                        </p:cTn>
-                                        <p:tgtEl>
-                                          <p:spTgt spid="33"/>
-                                        </p:tgtEl>
-                                        <p:attrNameLst>
-                                          <p:attrName>style.visibility</p:attrName>
-                                        </p:attrNameLst>
-                                      </p:cBhvr>
-                                      <p:to>
-                                        <p:strVal val="visible"/>
-                                      </p:to>
-                                    </p:set>
-                                  </p:childTnLst>
-                                </p:cTn>
-                              </p:par>
-                            </p:childTnLst>
-                          </p:cTn>
-                        </p:par>
-                      </p:childTnLst>
-                    </p:cTn>
-                  </p:par>
-                </p:childTnLst>
-              </p:cTn>
-              <p:prevCondLst>
-                <p:cond evt="onPrev" delay="0">
-                  <p:tgtEl>
-                    <p:sldTgt/>
-                  </p:tgtEl>
-                </p:cond>
-              </p:prevCondLst>
-              <p:nextCondLst>
-                <p:cond evt="onNext" delay="0">
-                  <p:tgtEl>
-                    <p:sldTgt/>
-                  </p:tgtEl>
-                </p:cond>
-              </p:nextCondLst>
-            </p:seq>
-          </p:childTnLst>
-        </p:cTn>
-      </p:par>
-    </p:tnLst>
-    <p:bldLst>
-      <p:bldP spid="23" grpId="0"/>
-      <p:bldP spid="24" grpId="0"/>
-      <p:bldP spid="25" grpId="0"/>
-      <p:bldP spid="26" grpId="0"/>
-      <p:bldP spid="27" grpId="0"/>
-      <p:bldP spid="28" grpId="0"/>
-      <p:bldP spid="29" grpId="0"/>
-      <p:bldP spid="30" grpId="0"/>
-      <p:bldP spid="31" grpId="0"/>
-      <p:bldP spid="32" grpId="0"/>
-      <p:bldP spid="33" grpId="0"/>
-    </p:bldLst>
-  </p:timing>
 </p:sld>
 </file>
 
@@ -12974,35 +13794,2023 @@
                 </a:solidFill>
                 <a:latin typeface="Garamond"/>
               </a:rPr>
-              <a:t>All the series, one axis</a:t>
-            </a:r>
-          </a:p>
-        </p:txBody>
-      </p:sp>
-      <p:pic>
-        <p:nvPicPr>
-          <p:cNvPr id="4" name="Picture 3" descr="v_allseries.png"/>
-          <p:cNvPicPr>
-            <a:picLocks noChangeAspect="1"/>
-          </p:cNvPicPr>
-          <p:nvPr/>
-        </p:nvPicPr>
-        <p:blipFill>
-          <a:blip r:embed="rId2"/>
-          <a:stretch>
-            <a:fillRect/>
-          </a:stretch>
-        </p:blipFill>
-        <p:spPr>
-          <a:xfrm>
-            <a:off x="594360" y="1481328"/>
-            <a:ext cx="11018520" cy="5418944"/>
-          </a:xfrm>
-          <a:prstGeom prst="rect">
-            <a:avLst/>
-          </a:prstGeom>
-        </p:spPr>
-      </p:pic>
+              <a:t>Measuring attrition: definitions</a:t>
+            </a:r>
+          </a:p>
+        </p:txBody>
+      </p:sp>
+      <p:sp>
+        <p:nvSpPr>
+          <p:cNvPr id="4" name="TextBox 3"/>
+          <p:cNvSpPr txBox="1"/>
+          <p:nvPr/>
+        </p:nvSpPr>
+        <p:spPr>
+          <a:xfrm>
+            <a:off x="822960" y="1417320"/>
+            <a:ext cx="3200400" cy="320040"/>
+          </a:xfrm>
+          <a:prstGeom prst="rect">
+            <a:avLst/>
+          </a:prstGeom>
+          <a:noFill/>
+        </p:spPr>
+        <p:txBody>
+          <a:bodyPr wrap="square" lIns="0" rIns="0" tIns="0" bIns="0">
+            <a:spAutoFit/>
+          </a:bodyPr>
+          <a:lstStyle/>
+          <a:p>
+            <a:pPr algn="l">
+              <a:lnSpc>
+                <a:spcPts val="1950"/>
+              </a:lnSpc>
+              <a:spcAft>
+                <a:spcPts val="0"/>
+              </a:spcAft>
+            </a:pPr>
+            <a:r>
+              <a:rPr sz="1300" b="1" i="0">
+                <a:solidFill>
+                  <a:srgbClr val="1F3864"/>
+                </a:solidFill>
+                <a:latin typeface="Garamond"/>
+              </a:rPr>
+              <a:t>Year 1: interviews 1–4</a:t>
+            </a:r>
+          </a:p>
+        </p:txBody>
+      </p:sp>
+      <p:sp>
+        <p:nvSpPr>
+          <p:cNvPr id="5" name="TextBox 4"/>
+          <p:cNvSpPr txBox="1"/>
+          <p:nvPr/>
+        </p:nvSpPr>
+        <p:spPr>
+          <a:xfrm>
+            <a:off x="4480560" y="1417320"/>
+            <a:ext cx="3291840" cy="320040"/>
+          </a:xfrm>
+          <a:prstGeom prst="rect">
+            <a:avLst/>
+          </a:prstGeom>
+          <a:noFill/>
+        </p:spPr>
+        <p:txBody>
+          <a:bodyPr wrap="square" lIns="0" rIns="0" tIns="0" bIns="0">
+            <a:spAutoFit/>
+          </a:bodyPr>
+          <a:lstStyle/>
+          <a:p>
+            <a:pPr algn="ctr">
+              <a:lnSpc>
+                <a:spcPts val="2100"/>
+              </a:lnSpc>
+              <a:spcAft>
+                <a:spcPts val="0"/>
+              </a:spcAft>
+            </a:pPr>
+            <a:r>
+              <a:rPr sz="1400" b="1" i="0">
+                <a:solidFill>
+                  <a:srgbClr val="7B2530"/>
+                </a:solidFill>
+                <a:latin typeface="Garamond"/>
+              </a:rPr>
+              <a:t>leaver</a:t>
+            </a:r>
+          </a:p>
+        </p:txBody>
+      </p:sp>
+      <p:sp>
+        <p:nvSpPr>
+          <p:cNvPr id="6" name="TextBox 5"/>
+          <p:cNvSpPr txBox="1"/>
+          <p:nvPr/>
+        </p:nvSpPr>
+        <p:spPr>
+          <a:xfrm>
+            <a:off x="8229600" y="1417320"/>
+            <a:ext cx="3200400" cy="320040"/>
+          </a:xfrm>
+          <a:prstGeom prst="rect">
+            <a:avLst/>
+          </a:prstGeom>
+          <a:noFill/>
+        </p:spPr>
+        <p:txBody>
+          <a:bodyPr wrap="square" lIns="0" rIns="0" tIns="0" bIns="0">
+            <a:spAutoFit/>
+          </a:bodyPr>
+          <a:lstStyle/>
+          <a:p>
+            <a:pPr algn="r">
+              <a:lnSpc>
+                <a:spcPts val="1950"/>
+              </a:lnSpc>
+              <a:spcAft>
+                <a:spcPts val="0"/>
+              </a:spcAft>
+            </a:pPr>
+            <a:r>
+              <a:rPr sz="1300" b="1" i="0">
+                <a:solidFill>
+                  <a:srgbClr val="7B2530"/>
+                </a:solidFill>
+                <a:latin typeface="Garamond"/>
+              </a:rPr>
+              <a:t>Year 2: interviews 5–8</a:t>
+            </a:r>
+          </a:p>
+        </p:txBody>
+      </p:sp>
+      <p:sp>
+        <p:nvSpPr>
+          <p:cNvPr id="7" name="Rectangle 6"/>
+          <p:cNvSpPr/>
+          <p:nvPr/>
+        </p:nvSpPr>
+        <p:spPr>
+          <a:xfrm>
+            <a:off x="822960" y="1755648"/>
+            <a:ext cx="658939" cy="457200"/>
+          </a:xfrm>
+          <a:prstGeom prst="rect">
+            <a:avLst/>
+          </a:prstGeom>
+          <a:solidFill>
+            <a:srgbClr val="1F3864"/>
+          </a:solidFill>
+          <a:ln>
+            <a:noFill/>
+          </a:ln>
+          <a:effectLst/>
+        </p:spPr>
+        <p:style>
+          <a:lnRef idx="1">
+            <a:schemeClr val="accent1"/>
+          </a:lnRef>
+          <a:fillRef idx="3">
+            <a:schemeClr val="accent1"/>
+          </a:fillRef>
+          <a:effectRef idx="2">
+            <a:schemeClr val="accent1"/>
+          </a:effectRef>
+          <a:fontRef idx="minor">
+            <a:schemeClr val="lt1"/>
+          </a:fontRef>
+        </p:style>
+        <p:txBody>
+          <a:bodyPr rtlCol="0" anchor="ctr" wrap="none"/>
+          <a:lstStyle/>
+          <a:p>
+            <a:pPr algn="ctr"/>
+            <a:r>
+              <a:rPr sz="1200" b="1">
+                <a:solidFill>
+                  <a:srgbClr val="FFFFFF"/>
+                </a:solidFill>
+                <a:latin typeface="Garamond"/>
+              </a:rPr>
+              <a:t>T</a:t>
+            </a:r>
+          </a:p>
+        </p:txBody>
+      </p:sp>
+      <p:sp>
+        <p:nvSpPr>
+          <p:cNvPr id="8" name="Rectangle 7"/>
+          <p:cNvSpPr/>
+          <p:nvPr/>
+        </p:nvSpPr>
+        <p:spPr>
+          <a:xfrm>
+            <a:off x="1481899" y="1755648"/>
+            <a:ext cx="658939" cy="457200"/>
+          </a:xfrm>
+          <a:prstGeom prst="rect">
+            <a:avLst/>
+          </a:prstGeom>
+          <a:solidFill>
+            <a:srgbClr val="1F3864"/>
+          </a:solidFill>
+          <a:ln>
+            <a:noFill/>
+          </a:ln>
+          <a:effectLst/>
+        </p:spPr>
+        <p:style>
+          <a:lnRef idx="1">
+            <a:schemeClr val="accent1"/>
+          </a:lnRef>
+          <a:fillRef idx="3">
+            <a:schemeClr val="accent1"/>
+          </a:fillRef>
+          <a:effectRef idx="2">
+            <a:schemeClr val="accent1"/>
+          </a:effectRef>
+          <a:fontRef idx="minor">
+            <a:schemeClr val="lt1"/>
+          </a:fontRef>
+        </p:style>
+        <p:txBody>
+          <a:bodyPr rtlCol="0" anchor="ctr" wrap="none"/>
+          <a:lstStyle/>
+          <a:p>
+            <a:pPr algn="ctr"/>
+            <a:r>
+              <a:rPr sz="1200" b="1">
+                <a:solidFill>
+                  <a:srgbClr val="FFFFFF"/>
+                </a:solidFill>
+                <a:latin typeface="Garamond"/>
+              </a:rPr>
+              <a:t>T</a:t>
+            </a:r>
+          </a:p>
+        </p:txBody>
+      </p:sp>
+      <p:sp>
+        <p:nvSpPr>
+          <p:cNvPr id="9" name="Rectangle 8"/>
+          <p:cNvSpPr/>
+          <p:nvPr/>
+        </p:nvSpPr>
+        <p:spPr>
+          <a:xfrm>
+            <a:off x="2140839" y="1755648"/>
+            <a:ext cx="658939" cy="457200"/>
+          </a:xfrm>
+          <a:prstGeom prst="rect">
+            <a:avLst/>
+          </a:prstGeom>
+          <a:solidFill>
+            <a:srgbClr val="1F3864"/>
+          </a:solidFill>
+          <a:ln>
+            <a:noFill/>
+          </a:ln>
+          <a:effectLst/>
+        </p:spPr>
+        <p:style>
+          <a:lnRef idx="1">
+            <a:schemeClr val="accent1"/>
+          </a:lnRef>
+          <a:fillRef idx="3">
+            <a:schemeClr val="accent1"/>
+          </a:fillRef>
+          <a:effectRef idx="2">
+            <a:schemeClr val="accent1"/>
+          </a:effectRef>
+          <a:fontRef idx="minor">
+            <a:schemeClr val="lt1"/>
+          </a:fontRef>
+        </p:style>
+        <p:txBody>
+          <a:bodyPr rtlCol="0" anchor="ctr" wrap="none"/>
+          <a:lstStyle/>
+          <a:p>
+            <a:pPr algn="ctr"/>
+            <a:r>
+              <a:rPr sz="1200" b="1">
+                <a:solidFill>
+                  <a:srgbClr val="FFFFFF"/>
+                </a:solidFill>
+                <a:latin typeface="Garamond"/>
+              </a:rPr>
+              <a:t>3</a:t>
+            </a:r>
+          </a:p>
+        </p:txBody>
+      </p:sp>
+      <p:sp>
+        <p:nvSpPr>
+          <p:cNvPr id="10" name="Rectangle 9"/>
+          <p:cNvSpPr/>
+          <p:nvPr/>
+        </p:nvSpPr>
+        <p:spPr>
+          <a:xfrm>
+            <a:off x="2799778" y="1755648"/>
+            <a:ext cx="658939" cy="457200"/>
+          </a:xfrm>
+          <a:prstGeom prst="rect">
+            <a:avLst/>
+          </a:prstGeom>
+          <a:solidFill>
+            <a:srgbClr val="1F3864"/>
+          </a:solidFill>
+          <a:ln>
+            <a:noFill/>
+          </a:ln>
+          <a:effectLst/>
+        </p:spPr>
+        <p:style>
+          <a:lnRef idx="1">
+            <a:schemeClr val="accent1"/>
+          </a:lnRef>
+          <a:fillRef idx="3">
+            <a:schemeClr val="accent1"/>
+          </a:fillRef>
+          <a:effectRef idx="2">
+            <a:schemeClr val="accent1"/>
+          </a:effectRef>
+          <a:fontRef idx="minor">
+            <a:schemeClr val="lt1"/>
+          </a:fontRef>
+        </p:style>
+        <p:txBody>
+          <a:bodyPr rtlCol="0" anchor="ctr" wrap="none"/>
+          <a:lstStyle/>
+          <a:p>
+            <a:pPr algn="ctr"/>
+            <a:r>
+              <a:rPr sz="1200" b="1">
+                <a:solidFill>
+                  <a:srgbClr val="FFFFFF"/>
+                </a:solidFill>
+                <a:latin typeface="Garamond"/>
+              </a:rPr>
+              <a:t>4</a:t>
+            </a:r>
+          </a:p>
+        </p:txBody>
+      </p:sp>
+      <p:sp>
+        <p:nvSpPr>
+          <p:cNvPr id="11" name="Rectangle 10"/>
+          <p:cNvSpPr/>
+          <p:nvPr/>
+        </p:nvSpPr>
+        <p:spPr>
+          <a:xfrm>
+            <a:off x="3458718" y="1755648"/>
+            <a:ext cx="658939" cy="457200"/>
+          </a:xfrm>
+          <a:prstGeom prst="rect">
+            <a:avLst/>
+          </a:prstGeom>
+          <a:solidFill>
+            <a:srgbClr val="FFFFFF"/>
+          </a:solidFill>
+          <a:ln w="9525">
+            <a:solidFill>
+              <a:srgbClr val="C9CFD6"/>
+            </a:solidFill>
+          </a:ln>
+          <a:effectLst/>
+        </p:spPr>
+        <p:style>
+          <a:lnRef idx="1">
+            <a:schemeClr val="accent1"/>
+          </a:lnRef>
+          <a:fillRef idx="3">
+            <a:schemeClr val="accent1"/>
+          </a:fillRef>
+          <a:effectRef idx="2">
+            <a:schemeClr val="accent1"/>
+          </a:effectRef>
+          <a:fontRef idx="minor">
+            <a:schemeClr val="lt1"/>
+          </a:fontRef>
+        </p:style>
+        <p:txBody>
+          <a:bodyPr rtlCol="0" anchor="ctr" wrap="none"/>
+          <a:lstStyle/>
+          <a:p>
+            <a:pPr algn="ctr"/>
+            <a:r>
+              <a:rPr sz="1200" b="1">
+                <a:solidFill>
+                  <a:srgbClr val="6B7480"/>
+                </a:solidFill>
+                <a:latin typeface="Garamond"/>
+              </a:rPr>
+              <a:t>5</a:t>
+            </a:r>
+          </a:p>
+        </p:txBody>
+      </p:sp>
+      <p:sp>
+        <p:nvSpPr>
+          <p:cNvPr id="12" name="Rectangle 11"/>
+          <p:cNvSpPr/>
+          <p:nvPr/>
+        </p:nvSpPr>
+        <p:spPr>
+          <a:xfrm>
+            <a:off x="4117657" y="1755648"/>
+            <a:ext cx="658939" cy="457200"/>
+          </a:xfrm>
+          <a:prstGeom prst="rect">
+            <a:avLst/>
+          </a:prstGeom>
+          <a:solidFill>
+            <a:srgbClr val="FFFFFF"/>
+          </a:solidFill>
+          <a:ln w="9525">
+            <a:solidFill>
+              <a:srgbClr val="C9CFD6"/>
+            </a:solidFill>
+          </a:ln>
+          <a:effectLst/>
+        </p:spPr>
+        <p:style>
+          <a:lnRef idx="1">
+            <a:schemeClr val="accent1"/>
+          </a:lnRef>
+          <a:fillRef idx="3">
+            <a:schemeClr val="accent1"/>
+          </a:fillRef>
+          <a:effectRef idx="2">
+            <a:schemeClr val="accent1"/>
+          </a:effectRef>
+          <a:fontRef idx="minor">
+            <a:schemeClr val="lt1"/>
+          </a:fontRef>
+        </p:style>
+        <p:txBody>
+          <a:bodyPr rtlCol="0" anchor="ctr" wrap="none"/>
+          <a:lstStyle/>
+          <a:p>
+            <a:pPr algn="ctr"/>
+            <a:r>
+              <a:rPr sz="1200" b="1">
+                <a:solidFill>
+                  <a:srgbClr val="6B7480"/>
+                </a:solidFill>
+                <a:latin typeface="Garamond"/>
+              </a:rPr>
+              <a:t>6</a:t>
+            </a:r>
+          </a:p>
+        </p:txBody>
+      </p:sp>
+      <p:sp>
+        <p:nvSpPr>
+          <p:cNvPr id="13" name="Rectangle 12"/>
+          <p:cNvSpPr/>
+          <p:nvPr/>
+        </p:nvSpPr>
+        <p:spPr>
+          <a:xfrm>
+            <a:off x="4776597" y="1755648"/>
+            <a:ext cx="658939" cy="457200"/>
+          </a:xfrm>
+          <a:prstGeom prst="rect">
+            <a:avLst/>
+          </a:prstGeom>
+          <a:solidFill>
+            <a:srgbClr val="FFFFFF"/>
+          </a:solidFill>
+          <a:ln w="9525">
+            <a:solidFill>
+              <a:srgbClr val="C9CFD6"/>
+            </a:solidFill>
+          </a:ln>
+          <a:effectLst/>
+        </p:spPr>
+        <p:style>
+          <a:lnRef idx="1">
+            <a:schemeClr val="accent1"/>
+          </a:lnRef>
+          <a:fillRef idx="3">
+            <a:schemeClr val="accent1"/>
+          </a:fillRef>
+          <a:effectRef idx="2">
+            <a:schemeClr val="accent1"/>
+          </a:effectRef>
+          <a:fontRef idx="minor">
+            <a:schemeClr val="lt1"/>
+          </a:fontRef>
+        </p:style>
+        <p:txBody>
+          <a:bodyPr rtlCol="0" anchor="ctr" wrap="none"/>
+          <a:lstStyle/>
+          <a:p>
+            <a:pPr algn="ctr"/>
+            <a:r>
+              <a:rPr sz="1200" b="1">
+                <a:solidFill>
+                  <a:srgbClr val="6B7480"/>
+                </a:solidFill>
+                <a:latin typeface="Garamond"/>
+              </a:rPr>
+              <a:t>7</a:t>
+            </a:r>
+          </a:p>
+        </p:txBody>
+      </p:sp>
+      <p:sp>
+        <p:nvSpPr>
+          <p:cNvPr id="14" name="Rectangle 13"/>
+          <p:cNvSpPr/>
+          <p:nvPr/>
+        </p:nvSpPr>
+        <p:spPr>
+          <a:xfrm>
+            <a:off x="5435536" y="1755648"/>
+            <a:ext cx="658939" cy="457200"/>
+          </a:xfrm>
+          <a:prstGeom prst="rect">
+            <a:avLst/>
+          </a:prstGeom>
+          <a:solidFill>
+            <a:srgbClr val="FFFFFF"/>
+          </a:solidFill>
+          <a:ln w="9525">
+            <a:solidFill>
+              <a:srgbClr val="C9CFD6"/>
+            </a:solidFill>
+          </a:ln>
+          <a:effectLst/>
+        </p:spPr>
+        <p:style>
+          <a:lnRef idx="1">
+            <a:schemeClr val="accent1"/>
+          </a:lnRef>
+          <a:fillRef idx="3">
+            <a:schemeClr val="accent1"/>
+          </a:fillRef>
+          <a:effectRef idx="2">
+            <a:schemeClr val="accent1"/>
+          </a:effectRef>
+          <a:fontRef idx="minor">
+            <a:schemeClr val="lt1"/>
+          </a:fontRef>
+        </p:style>
+        <p:txBody>
+          <a:bodyPr rtlCol="0" anchor="ctr" wrap="none"/>
+          <a:lstStyle/>
+          <a:p>
+            <a:pPr algn="ctr"/>
+            <a:r>
+              <a:rPr sz="1200" b="1">
+                <a:solidFill>
+                  <a:srgbClr val="6B7480"/>
+                </a:solidFill>
+                <a:latin typeface="Garamond"/>
+              </a:rPr>
+              <a:t>8</a:t>
+            </a:r>
+          </a:p>
+        </p:txBody>
+      </p:sp>
+      <p:sp>
+        <p:nvSpPr>
+          <p:cNvPr id="15" name="Rectangle 14"/>
+          <p:cNvSpPr/>
+          <p:nvPr/>
+        </p:nvSpPr>
+        <p:spPr>
+          <a:xfrm>
+            <a:off x="6094476" y="1755648"/>
+            <a:ext cx="658939" cy="457200"/>
+          </a:xfrm>
+          <a:prstGeom prst="rect">
+            <a:avLst/>
+          </a:prstGeom>
+          <a:solidFill>
+            <a:srgbClr val="FFFFFF"/>
+          </a:solidFill>
+          <a:ln w="9525">
+            <a:solidFill>
+              <a:srgbClr val="C9CFD6"/>
+            </a:solidFill>
+          </a:ln>
+          <a:effectLst/>
+        </p:spPr>
+        <p:style>
+          <a:lnRef idx="1">
+            <a:schemeClr val="accent1"/>
+          </a:lnRef>
+          <a:fillRef idx="3">
+            <a:schemeClr val="accent1"/>
+          </a:fillRef>
+          <a:effectRef idx="2">
+            <a:schemeClr val="accent1"/>
+          </a:effectRef>
+          <a:fontRef idx="minor">
+            <a:schemeClr val="lt1"/>
+          </a:fontRef>
+        </p:style>
+        <p:txBody>
+          <a:bodyPr rtlCol="0" anchor="ctr" wrap="none"/>
+          <a:lstStyle/>
+          <a:p>
+            <a:pPr algn="ctr"/>
+            <a:r>
+              <a:rPr sz="1200" b="1">
+                <a:solidFill>
+                  <a:srgbClr val="6B7480"/>
+                </a:solidFill>
+                <a:latin typeface="Garamond"/>
+              </a:rPr>
+              <a:t>9</a:t>
+            </a:r>
+          </a:p>
+        </p:txBody>
+      </p:sp>
+      <p:sp>
+        <p:nvSpPr>
+          <p:cNvPr id="16" name="Rectangle 15"/>
+          <p:cNvSpPr/>
+          <p:nvPr/>
+        </p:nvSpPr>
+        <p:spPr>
+          <a:xfrm>
+            <a:off x="6753415" y="1755648"/>
+            <a:ext cx="658939" cy="457200"/>
+          </a:xfrm>
+          <a:prstGeom prst="rect">
+            <a:avLst/>
+          </a:prstGeom>
+          <a:solidFill>
+            <a:srgbClr val="FFFFFF"/>
+          </a:solidFill>
+          <a:ln w="9525">
+            <a:solidFill>
+              <a:srgbClr val="C9CFD6"/>
+            </a:solidFill>
+          </a:ln>
+          <a:effectLst/>
+        </p:spPr>
+        <p:style>
+          <a:lnRef idx="1">
+            <a:schemeClr val="accent1"/>
+          </a:lnRef>
+          <a:fillRef idx="3">
+            <a:schemeClr val="accent1"/>
+          </a:fillRef>
+          <a:effectRef idx="2">
+            <a:schemeClr val="accent1"/>
+          </a:effectRef>
+          <a:fontRef idx="minor">
+            <a:schemeClr val="lt1"/>
+          </a:fontRef>
+        </p:style>
+        <p:txBody>
+          <a:bodyPr rtlCol="0" anchor="ctr" wrap="none"/>
+          <a:lstStyle/>
+          <a:p>
+            <a:pPr algn="ctr"/>
+            <a:r>
+              <a:rPr sz="1200" b="1">
+                <a:solidFill>
+                  <a:srgbClr val="6B7480"/>
+                </a:solidFill>
+                <a:latin typeface="Garamond"/>
+              </a:rPr>
+              <a:t>10</a:t>
+            </a:r>
+          </a:p>
+        </p:txBody>
+      </p:sp>
+      <p:sp>
+        <p:nvSpPr>
+          <p:cNvPr id="17" name="Rectangle 16"/>
+          <p:cNvSpPr/>
+          <p:nvPr/>
+        </p:nvSpPr>
+        <p:spPr>
+          <a:xfrm>
+            <a:off x="7412354" y="1755648"/>
+            <a:ext cx="658939" cy="457200"/>
+          </a:xfrm>
+          <a:prstGeom prst="rect">
+            <a:avLst/>
+          </a:prstGeom>
+          <a:solidFill>
+            <a:srgbClr val="FFFFFF"/>
+          </a:solidFill>
+          <a:ln w="9525">
+            <a:solidFill>
+              <a:srgbClr val="C9CFD6"/>
+            </a:solidFill>
+          </a:ln>
+          <a:effectLst/>
+        </p:spPr>
+        <p:style>
+          <a:lnRef idx="1">
+            <a:schemeClr val="accent1"/>
+          </a:lnRef>
+          <a:fillRef idx="3">
+            <a:schemeClr val="accent1"/>
+          </a:fillRef>
+          <a:effectRef idx="2">
+            <a:schemeClr val="accent1"/>
+          </a:effectRef>
+          <a:fontRef idx="minor">
+            <a:schemeClr val="lt1"/>
+          </a:fontRef>
+        </p:style>
+        <p:txBody>
+          <a:bodyPr rtlCol="0" anchor="ctr" wrap="none"/>
+          <a:lstStyle/>
+          <a:p>
+            <a:pPr algn="ctr"/>
+            <a:r>
+              <a:rPr sz="1200" b="1">
+                <a:solidFill>
+                  <a:srgbClr val="6B7480"/>
+                </a:solidFill>
+                <a:latin typeface="Garamond"/>
+              </a:rPr>
+              <a:t>11</a:t>
+            </a:r>
+          </a:p>
+        </p:txBody>
+      </p:sp>
+      <p:sp>
+        <p:nvSpPr>
+          <p:cNvPr id="18" name="Rectangle 17"/>
+          <p:cNvSpPr/>
+          <p:nvPr/>
+        </p:nvSpPr>
+        <p:spPr>
+          <a:xfrm>
+            <a:off x="8071294" y="1755648"/>
+            <a:ext cx="658939" cy="457200"/>
+          </a:xfrm>
+          <a:prstGeom prst="rect">
+            <a:avLst/>
+          </a:prstGeom>
+          <a:solidFill>
+            <a:srgbClr val="FFFFFF"/>
+          </a:solidFill>
+          <a:ln w="9525">
+            <a:solidFill>
+              <a:srgbClr val="C9CFD6"/>
+            </a:solidFill>
+          </a:ln>
+          <a:effectLst/>
+        </p:spPr>
+        <p:style>
+          <a:lnRef idx="1">
+            <a:schemeClr val="accent1"/>
+          </a:lnRef>
+          <a:fillRef idx="3">
+            <a:schemeClr val="accent1"/>
+          </a:fillRef>
+          <a:effectRef idx="2">
+            <a:schemeClr val="accent1"/>
+          </a:effectRef>
+          <a:fontRef idx="minor">
+            <a:schemeClr val="lt1"/>
+          </a:fontRef>
+        </p:style>
+        <p:txBody>
+          <a:bodyPr rtlCol="0" anchor="ctr" wrap="none"/>
+          <a:lstStyle/>
+          <a:p>
+            <a:pPr algn="ctr"/>
+            <a:r>
+              <a:rPr sz="1200" b="1">
+                <a:solidFill>
+                  <a:srgbClr val="6B7480"/>
+                </a:solidFill>
+                <a:latin typeface="Garamond"/>
+              </a:rPr>
+              <a:t>12</a:t>
+            </a:r>
+          </a:p>
+        </p:txBody>
+      </p:sp>
+      <p:sp>
+        <p:nvSpPr>
+          <p:cNvPr id="19" name="Rectangle 18"/>
+          <p:cNvSpPr/>
+          <p:nvPr/>
+        </p:nvSpPr>
+        <p:spPr>
+          <a:xfrm>
+            <a:off x="8730234" y="1755648"/>
+            <a:ext cx="658939" cy="457200"/>
+          </a:xfrm>
+          <a:prstGeom prst="rect">
+            <a:avLst/>
+          </a:prstGeom>
+          <a:solidFill>
+            <a:srgbClr val="7B2530"/>
+          </a:solidFill>
+          <a:ln>
+            <a:noFill/>
+          </a:ln>
+          <a:effectLst/>
+        </p:spPr>
+        <p:style>
+          <a:lnRef idx="1">
+            <a:schemeClr val="accent1"/>
+          </a:lnRef>
+          <a:fillRef idx="3">
+            <a:schemeClr val="accent1"/>
+          </a:fillRef>
+          <a:effectRef idx="2">
+            <a:schemeClr val="accent1"/>
+          </a:effectRef>
+          <a:fontRef idx="minor">
+            <a:schemeClr val="lt1"/>
+          </a:fontRef>
+        </p:style>
+        <p:txBody>
+          <a:bodyPr rtlCol="0" anchor="ctr" wrap="none"/>
+          <a:lstStyle/>
+          <a:p>
+            <a:pPr algn="ctr"/>
+            <a:r>
+              <a:rPr sz="1200" b="1">
+                <a:solidFill>
+                  <a:srgbClr val="FFFFFF"/>
+                </a:solidFill>
+                <a:latin typeface="Garamond"/>
+              </a:rPr>
+              <a:t>13</a:t>
+            </a:r>
+          </a:p>
+        </p:txBody>
+      </p:sp>
+      <p:sp>
+        <p:nvSpPr>
+          <p:cNvPr id="20" name="Rectangle 19"/>
+          <p:cNvSpPr/>
+          <p:nvPr/>
+        </p:nvSpPr>
+        <p:spPr>
+          <a:xfrm>
+            <a:off x="9389173" y="1755648"/>
+            <a:ext cx="658939" cy="457200"/>
+          </a:xfrm>
+          <a:prstGeom prst="rect">
+            <a:avLst/>
+          </a:prstGeom>
+          <a:solidFill>
+            <a:srgbClr val="7B2530"/>
+          </a:solidFill>
+          <a:ln>
+            <a:noFill/>
+          </a:ln>
+          <a:effectLst/>
+        </p:spPr>
+        <p:style>
+          <a:lnRef idx="1">
+            <a:schemeClr val="accent1"/>
+          </a:lnRef>
+          <a:fillRef idx="3">
+            <a:schemeClr val="accent1"/>
+          </a:fillRef>
+          <a:effectRef idx="2">
+            <a:schemeClr val="accent1"/>
+          </a:effectRef>
+          <a:fontRef idx="minor">
+            <a:schemeClr val="lt1"/>
+          </a:fontRef>
+        </p:style>
+        <p:txBody>
+          <a:bodyPr rtlCol="0" anchor="ctr" wrap="none"/>
+          <a:lstStyle/>
+          <a:p>
+            <a:pPr algn="ctr"/>
+            <a:r>
+              <a:rPr sz="1200" b="1">
+                <a:solidFill>
+                  <a:srgbClr val="FFFFFF"/>
+                </a:solidFill>
+                <a:latin typeface="Garamond"/>
+              </a:rPr>
+              <a:t>14</a:t>
+            </a:r>
+          </a:p>
+        </p:txBody>
+      </p:sp>
+      <p:sp>
+        <p:nvSpPr>
+          <p:cNvPr id="21" name="Rectangle 20"/>
+          <p:cNvSpPr/>
+          <p:nvPr/>
+        </p:nvSpPr>
+        <p:spPr>
+          <a:xfrm>
+            <a:off x="10048113" y="1755648"/>
+            <a:ext cx="658939" cy="457200"/>
+          </a:xfrm>
+          <a:prstGeom prst="rect">
+            <a:avLst/>
+          </a:prstGeom>
+          <a:solidFill>
+            <a:srgbClr val="7B2530"/>
+          </a:solidFill>
+          <a:ln>
+            <a:noFill/>
+          </a:ln>
+          <a:effectLst/>
+        </p:spPr>
+        <p:style>
+          <a:lnRef idx="1">
+            <a:schemeClr val="accent1"/>
+          </a:lnRef>
+          <a:fillRef idx="3">
+            <a:schemeClr val="accent1"/>
+          </a:fillRef>
+          <a:effectRef idx="2">
+            <a:schemeClr val="accent1"/>
+          </a:effectRef>
+          <a:fontRef idx="minor">
+            <a:schemeClr val="lt1"/>
+          </a:fontRef>
+        </p:style>
+        <p:txBody>
+          <a:bodyPr rtlCol="0" anchor="ctr" wrap="none"/>
+          <a:lstStyle/>
+          <a:p>
+            <a:pPr algn="ctr"/>
+            <a:r>
+              <a:rPr sz="1200" b="1">
+                <a:solidFill>
+                  <a:srgbClr val="FFFFFF"/>
+                </a:solidFill>
+                <a:latin typeface="Garamond"/>
+              </a:rPr>
+              <a:t>15</a:t>
+            </a:r>
+          </a:p>
+        </p:txBody>
+      </p:sp>
+      <p:sp>
+        <p:nvSpPr>
+          <p:cNvPr id="22" name="Rectangle 21"/>
+          <p:cNvSpPr/>
+          <p:nvPr/>
+        </p:nvSpPr>
+        <p:spPr>
+          <a:xfrm>
+            <a:off x="10707052" y="1755648"/>
+            <a:ext cx="658939" cy="457200"/>
+          </a:xfrm>
+          <a:prstGeom prst="rect">
+            <a:avLst/>
+          </a:prstGeom>
+          <a:solidFill>
+            <a:srgbClr val="7B2530"/>
+          </a:solidFill>
+          <a:ln>
+            <a:noFill/>
+          </a:ln>
+          <a:effectLst/>
+        </p:spPr>
+        <p:style>
+          <a:lnRef idx="1">
+            <a:schemeClr val="accent1"/>
+          </a:lnRef>
+          <a:fillRef idx="3">
+            <a:schemeClr val="accent1"/>
+          </a:fillRef>
+          <a:effectRef idx="2">
+            <a:schemeClr val="accent1"/>
+          </a:effectRef>
+          <a:fontRef idx="minor">
+            <a:schemeClr val="lt1"/>
+          </a:fontRef>
+        </p:style>
+        <p:txBody>
+          <a:bodyPr rtlCol="0" anchor="ctr" wrap="none"/>
+          <a:lstStyle/>
+          <a:p>
+            <a:pPr algn="ctr"/>
+            <a:r>
+              <a:rPr sz="1200" b="1">
+                <a:solidFill>
+                  <a:srgbClr val="FFFFFF"/>
+                </a:solidFill>
+                <a:latin typeface="Garamond"/>
+              </a:rPr>
+              <a:t>16</a:t>
+            </a:r>
+          </a:p>
+        </p:txBody>
+      </p:sp>
+      <p:sp>
+        <p:nvSpPr>
+          <p:cNvPr id="23" name="TextBox 22"/>
+          <p:cNvSpPr txBox="1"/>
+          <p:nvPr/>
+        </p:nvSpPr>
+        <p:spPr>
+          <a:xfrm>
+            <a:off x="822960" y="2340864"/>
+            <a:ext cx="3657600" cy="365760"/>
+          </a:xfrm>
+          <a:prstGeom prst="rect">
+            <a:avLst/>
+          </a:prstGeom>
+          <a:noFill/>
+        </p:spPr>
+        <p:txBody>
+          <a:bodyPr wrap="square" lIns="0" rIns="0" tIns="0" bIns="0">
+            <a:spAutoFit/>
+          </a:bodyPr>
+          <a:lstStyle/>
+          <a:p>
+            <a:pPr algn="l">
+              <a:lnSpc>
+                <a:spcPts val="2250"/>
+              </a:lnSpc>
+              <a:spcAft>
+                <a:spcPts val="0"/>
+              </a:spcAft>
+            </a:pPr>
+            <a:r>
+              <a:rPr sz="1500" b="1" i="0">
+                <a:solidFill>
+                  <a:srgbClr val="26456E"/>
+                </a:solidFill>
+                <a:latin typeface="Garamond"/>
+              </a:rPr>
+              <a:t>Definition 1  (benchmark)</a:t>
+            </a:r>
+          </a:p>
+        </p:txBody>
+      </p:sp>
+      <p:cxnSp>
+        <p:nvCxnSpPr>
+          <p:cNvPr id="24" name="Connector 23"/>
+          <p:cNvCxnSpPr/>
+          <p:nvPr/>
+        </p:nvCxnSpPr>
+        <p:spPr>
+          <a:xfrm>
+            <a:off x="822960" y="2743200"/>
+            <a:ext cx="10543032" cy="0"/>
+          </a:xfrm>
+          <a:prstGeom prst="line">
+            <a:avLst/>
+          </a:prstGeom>
+          <a:ln w="12700">
+            <a:solidFill>
+              <a:srgbClr val="1A2430"/>
+            </a:solidFill>
+          </a:ln>
+        </p:spPr>
+        <p:style>
+          <a:lnRef idx="2">
+            <a:schemeClr val="accent1"/>
+          </a:lnRef>
+          <a:fillRef idx="0">
+            <a:schemeClr val="accent1"/>
+          </a:fillRef>
+          <a:effectRef idx="1">
+            <a:schemeClr val="accent1"/>
+          </a:effectRef>
+          <a:fontRef idx="minor">
+            <a:schemeClr val="tx1"/>
+          </a:fontRef>
+        </p:style>
+      </p:cxnSp>
+      <p:sp>
+        <p:nvSpPr>
+          <p:cNvPr id="25" name="TextBox 24"/>
+          <p:cNvSpPr txBox="1"/>
+          <p:nvPr/>
+        </p:nvSpPr>
+        <p:spPr>
+          <a:xfrm>
+            <a:off x="1005840" y="2871216"/>
+            <a:ext cx="1463040" cy="384048"/>
+          </a:xfrm>
+          <a:prstGeom prst="rect">
+            <a:avLst/>
+          </a:prstGeom>
+          <a:noFill/>
+        </p:spPr>
+        <p:txBody>
+          <a:bodyPr wrap="square" lIns="0" rIns="0" tIns="0" bIns="0">
+            <a:spAutoFit/>
+          </a:bodyPr>
+          <a:lstStyle/>
+          <a:p>
+            <a:pPr algn="l">
+              <a:lnSpc>
+                <a:spcPts val="1950"/>
+              </a:lnSpc>
+              <a:spcAft>
+                <a:spcPts val="0"/>
+              </a:spcAft>
+            </a:pPr>
+            <a:r>
+              <a:rPr sz="1300" b="1" i="0">
+                <a:solidFill>
+                  <a:srgbClr val="1F3864"/>
+                </a:solidFill>
+                <a:latin typeface="Garamond"/>
+              </a:rPr>
+              <a:t>Teacher</a:t>
+            </a:r>
+          </a:p>
+        </p:txBody>
+      </p:sp>
+      <p:sp>
+        <p:nvSpPr>
+          <p:cNvPr id="26" name="TextBox 25"/>
+          <p:cNvSpPr txBox="1"/>
+          <p:nvPr/>
+        </p:nvSpPr>
+        <p:spPr>
+          <a:xfrm>
+            <a:off x="2651760" y="2871216"/>
+            <a:ext cx="8503920" cy="384048"/>
+          </a:xfrm>
+          <a:prstGeom prst="rect">
+            <a:avLst/>
+          </a:prstGeom>
+          <a:noFill/>
+        </p:spPr>
+        <p:txBody>
+          <a:bodyPr wrap="square" lIns="0" rIns="0" tIns="0" bIns="0">
+            <a:spAutoFit/>
+          </a:bodyPr>
+          <a:lstStyle/>
+          <a:p>
+            <a:pPr algn="l">
+              <a:lnSpc>
+                <a:spcPts val="1950"/>
+              </a:lnSpc>
+              <a:spcAft>
+                <a:spcPts val="0"/>
+              </a:spcAft>
+            </a:pPr>
+            <a:r>
+              <a:rPr sz="1300" b="0" i="0">
+                <a:solidFill>
+                  <a:srgbClr val="1A2430"/>
+                </a:solidFill>
+                <a:latin typeface="Garamond"/>
+              </a:rPr>
+              <a:t>teaching, with a bachelor’s degree, in at least two year-1 interviews</a:t>
+            </a:r>
+          </a:p>
+        </p:txBody>
+      </p:sp>
+      <p:sp>
+        <p:nvSpPr>
+          <p:cNvPr id="27" name="TextBox 26"/>
+          <p:cNvSpPr txBox="1"/>
+          <p:nvPr/>
+        </p:nvSpPr>
+        <p:spPr>
+          <a:xfrm>
+            <a:off x="1005840" y="3273552"/>
+            <a:ext cx="1463040" cy="384048"/>
+          </a:xfrm>
+          <a:prstGeom prst="rect">
+            <a:avLst/>
+          </a:prstGeom>
+          <a:noFill/>
+        </p:spPr>
+        <p:txBody>
+          <a:bodyPr wrap="square" lIns="0" rIns="0" tIns="0" bIns="0">
+            <a:spAutoFit/>
+          </a:bodyPr>
+          <a:lstStyle/>
+          <a:p>
+            <a:pPr algn="l">
+              <a:lnSpc>
+                <a:spcPts val="1950"/>
+              </a:lnSpc>
+              <a:spcAft>
+                <a:spcPts val="0"/>
+              </a:spcAft>
+            </a:pPr>
+            <a:r>
+              <a:rPr sz="1300" b="1" i="0">
+                <a:solidFill>
+                  <a:srgbClr val="1F3864"/>
+                </a:solidFill>
+                <a:latin typeface="Garamond"/>
+              </a:rPr>
+              <a:t>Stayer</a:t>
+            </a:r>
+          </a:p>
+        </p:txBody>
+      </p:sp>
+      <p:sp>
+        <p:nvSpPr>
+          <p:cNvPr id="28" name="TextBox 27"/>
+          <p:cNvSpPr txBox="1"/>
+          <p:nvPr/>
+        </p:nvSpPr>
+        <p:spPr>
+          <a:xfrm>
+            <a:off x="2651760" y="3273552"/>
+            <a:ext cx="8503920" cy="384048"/>
+          </a:xfrm>
+          <a:prstGeom prst="rect">
+            <a:avLst/>
+          </a:prstGeom>
+          <a:noFill/>
+        </p:spPr>
+        <p:txBody>
+          <a:bodyPr wrap="square" lIns="0" rIns="0" tIns="0" bIns="0">
+            <a:spAutoFit/>
+          </a:bodyPr>
+          <a:lstStyle/>
+          <a:p>
+            <a:pPr algn="l">
+              <a:lnSpc>
+                <a:spcPts val="1950"/>
+              </a:lnSpc>
+              <a:spcAft>
+                <a:spcPts val="0"/>
+              </a:spcAft>
+            </a:pPr>
+            <a:r>
+              <a:rPr sz="1300" b="0" i="0">
+                <a:solidFill>
+                  <a:srgbClr val="1A2430"/>
+                </a:solidFill>
+                <a:latin typeface="Garamond"/>
+              </a:rPr>
+              <a:t>teaching in at least one year-2 interview</a:t>
+            </a:r>
+          </a:p>
+        </p:txBody>
+      </p:sp>
+      <p:sp>
+        <p:nvSpPr>
+          <p:cNvPr id="29" name="TextBox 28"/>
+          <p:cNvSpPr txBox="1"/>
+          <p:nvPr/>
+        </p:nvSpPr>
+        <p:spPr>
+          <a:xfrm>
+            <a:off x="1005840" y="3675888"/>
+            <a:ext cx="1463040" cy="384048"/>
+          </a:xfrm>
+          <a:prstGeom prst="rect">
+            <a:avLst/>
+          </a:prstGeom>
+          <a:noFill/>
+        </p:spPr>
+        <p:txBody>
+          <a:bodyPr wrap="square" lIns="0" rIns="0" tIns="0" bIns="0">
+            <a:spAutoFit/>
+          </a:bodyPr>
+          <a:lstStyle/>
+          <a:p>
+            <a:pPr algn="l">
+              <a:lnSpc>
+                <a:spcPts val="1950"/>
+              </a:lnSpc>
+              <a:spcAft>
+                <a:spcPts val="0"/>
+              </a:spcAft>
+            </a:pPr>
+            <a:r>
+              <a:rPr sz="1300" b="1" i="0">
+                <a:solidFill>
+                  <a:srgbClr val="7B2530"/>
+                </a:solidFill>
+                <a:latin typeface="Garamond"/>
+              </a:rPr>
+              <a:t>Leaver</a:t>
+            </a:r>
+          </a:p>
+        </p:txBody>
+      </p:sp>
+      <p:sp>
+        <p:nvSpPr>
+          <p:cNvPr id="30" name="TextBox 29"/>
+          <p:cNvSpPr txBox="1"/>
+          <p:nvPr/>
+        </p:nvSpPr>
+        <p:spPr>
+          <a:xfrm>
+            <a:off x="2651760" y="3675888"/>
+            <a:ext cx="8503920" cy="384048"/>
+          </a:xfrm>
+          <a:prstGeom prst="rect">
+            <a:avLst/>
+          </a:prstGeom>
+          <a:noFill/>
+        </p:spPr>
+        <p:txBody>
+          <a:bodyPr wrap="square" lIns="0" rIns="0" tIns="0" bIns="0">
+            <a:spAutoFit/>
+          </a:bodyPr>
+          <a:lstStyle/>
+          <a:p>
+            <a:pPr algn="l">
+              <a:lnSpc>
+                <a:spcPts val="1950"/>
+              </a:lnSpc>
+              <a:spcAft>
+                <a:spcPts val="0"/>
+              </a:spcAft>
+            </a:pPr>
+            <a:r>
+              <a:rPr sz="1300" b="0" i="0">
+                <a:solidFill>
+                  <a:srgbClr val="1A2430"/>
+                </a:solidFill>
+                <a:latin typeface="Garamond"/>
+              </a:rPr>
+              <a:t>never teaching in year 2, given two or more interviews, one outside the summer</a:t>
+            </a:r>
+          </a:p>
+        </p:txBody>
+      </p:sp>
+      <p:cxnSp>
+        <p:nvCxnSpPr>
+          <p:cNvPr id="31" name="Connector 30"/>
+          <p:cNvCxnSpPr/>
+          <p:nvPr/>
+        </p:nvCxnSpPr>
+        <p:spPr>
+          <a:xfrm>
+            <a:off x="822960" y="4123944"/>
+            <a:ext cx="10543032" cy="0"/>
+          </a:xfrm>
+          <a:prstGeom prst="line">
+            <a:avLst/>
+          </a:prstGeom>
+          <a:ln w="12700">
+            <a:solidFill>
+              <a:srgbClr val="1A2430"/>
+            </a:solidFill>
+          </a:ln>
+        </p:spPr>
+        <p:style>
+          <a:lnRef idx="2">
+            <a:schemeClr val="accent1"/>
+          </a:lnRef>
+          <a:fillRef idx="0">
+            <a:schemeClr val="accent1"/>
+          </a:fillRef>
+          <a:effectRef idx="1">
+            <a:schemeClr val="accent1"/>
+          </a:effectRef>
+          <a:fontRef idx="minor">
+            <a:schemeClr val="tx1"/>
+          </a:fontRef>
+        </p:style>
+      </p:cxnSp>
+      <p:sp>
+        <p:nvSpPr>
+          <p:cNvPr id="32" name="TextBox 31"/>
+          <p:cNvSpPr txBox="1"/>
+          <p:nvPr/>
+        </p:nvSpPr>
+        <p:spPr>
+          <a:xfrm>
+            <a:off x="822960" y="4169664"/>
+            <a:ext cx="5486400" cy="365760"/>
+          </a:xfrm>
+          <a:prstGeom prst="rect">
+            <a:avLst/>
+          </a:prstGeom>
+          <a:noFill/>
+        </p:spPr>
+        <p:txBody>
+          <a:bodyPr wrap="square" lIns="0" rIns="0" tIns="0" bIns="0">
+            <a:spAutoFit/>
+          </a:bodyPr>
+          <a:lstStyle/>
+          <a:p>
+            <a:pPr algn="l">
+              <a:lnSpc>
+                <a:spcPts val="2250"/>
+              </a:lnSpc>
+              <a:spcAft>
+                <a:spcPts val="0"/>
+              </a:spcAft>
+            </a:pPr>
+            <a:r>
+              <a:rPr sz="1500" b="1" i="0">
+                <a:solidFill>
+                  <a:srgbClr val="26456E"/>
+                </a:solidFill>
+                <a:latin typeface="Garamond"/>
+              </a:rPr>
+              <a:t>Alternative measures</a:t>
+            </a:r>
+          </a:p>
+        </p:txBody>
+      </p:sp>
+      <p:sp>
+        <p:nvSpPr>
+          <p:cNvPr id="33" name="TextBox 32"/>
+          <p:cNvSpPr txBox="1"/>
+          <p:nvPr/>
+        </p:nvSpPr>
+        <p:spPr>
+          <a:xfrm>
+            <a:off x="10058400" y="4169664"/>
+            <a:ext cx="1280160" cy="365760"/>
+          </a:xfrm>
+          <a:prstGeom prst="rect">
+            <a:avLst/>
+          </a:prstGeom>
+          <a:noFill/>
+        </p:spPr>
+        <p:txBody>
+          <a:bodyPr wrap="square" lIns="0" rIns="0" tIns="0" bIns="0">
+            <a:spAutoFit/>
+          </a:bodyPr>
+          <a:lstStyle/>
+          <a:p>
+            <a:pPr algn="l">
+              <a:lnSpc>
+                <a:spcPts val="1950"/>
+              </a:lnSpc>
+              <a:spcAft>
+                <a:spcPts val="0"/>
+              </a:spcAft>
+            </a:pPr>
+            <a:r>
+              <a:rPr sz="1300" b="1" i="0">
+                <a:solidFill>
+                  <a:srgbClr val="1A2430"/>
+                </a:solidFill>
+                <a:latin typeface="Garamond"/>
+              </a:rPr>
+              <a:t>2021</a:t>
+            </a:r>
+          </a:p>
+        </p:txBody>
+      </p:sp>
+      <p:cxnSp>
+        <p:nvCxnSpPr>
+          <p:cNvPr id="34" name="Connector 33"/>
+          <p:cNvCxnSpPr/>
+          <p:nvPr/>
+        </p:nvCxnSpPr>
+        <p:spPr>
+          <a:xfrm>
+            <a:off x="822960" y="4553712"/>
+            <a:ext cx="10543032" cy="0"/>
+          </a:xfrm>
+          <a:prstGeom prst="line">
+            <a:avLst/>
+          </a:prstGeom>
+          <a:ln w="7620">
+            <a:solidFill>
+              <a:srgbClr val="1A2430"/>
+            </a:solidFill>
+          </a:ln>
+        </p:spPr>
+        <p:style>
+          <a:lnRef idx="2">
+            <a:schemeClr val="accent1"/>
+          </a:lnRef>
+          <a:fillRef idx="0">
+            <a:schemeClr val="accent1"/>
+          </a:fillRef>
+          <a:effectRef idx="1">
+            <a:schemeClr val="accent1"/>
+          </a:effectRef>
+          <a:fontRef idx="minor">
+            <a:schemeClr val="tx1"/>
+          </a:fontRef>
+        </p:style>
+      </p:cxnSp>
+      <p:sp>
+        <p:nvSpPr>
+          <p:cNvPr id="35" name="TextBox 34"/>
+          <p:cNvSpPr txBox="1"/>
+          <p:nvPr/>
+        </p:nvSpPr>
+        <p:spPr>
+          <a:xfrm>
+            <a:off x="1005840" y="4663440"/>
+            <a:ext cx="5486400" cy="329184"/>
+          </a:xfrm>
+          <a:prstGeom prst="rect">
+            <a:avLst/>
+          </a:prstGeom>
+          <a:noFill/>
+        </p:spPr>
+        <p:txBody>
+          <a:bodyPr wrap="square" lIns="0" rIns="0" tIns="0" bIns="0">
+            <a:spAutoFit/>
+          </a:bodyPr>
+          <a:lstStyle/>
+          <a:p>
+            <a:pPr algn="l">
+              <a:lnSpc>
+                <a:spcPts val="1800"/>
+              </a:lnSpc>
+              <a:spcAft>
+                <a:spcPts val="0"/>
+              </a:spcAft>
+            </a:pPr>
+            <a:r>
+              <a:rPr sz="1200" b="0" i="0">
+                <a:solidFill>
+                  <a:srgbClr val="1A2430"/>
+                </a:solidFill>
+                <a:latin typeface="Garamond"/>
+              </a:rPr>
+              <a:t>Definition 1</a:t>
+            </a:r>
+          </a:p>
+        </p:txBody>
+      </p:sp>
+      <p:sp>
+        <p:nvSpPr>
+          <p:cNvPr id="36" name="TextBox 35"/>
+          <p:cNvSpPr txBox="1"/>
+          <p:nvPr/>
+        </p:nvSpPr>
+        <p:spPr>
+          <a:xfrm>
+            <a:off x="10058400" y="4663440"/>
+            <a:ext cx="1097280" cy="329184"/>
+          </a:xfrm>
+          <a:prstGeom prst="rect">
+            <a:avLst/>
+          </a:prstGeom>
+          <a:noFill/>
+        </p:spPr>
+        <p:txBody>
+          <a:bodyPr wrap="square" lIns="0" rIns="0" tIns="0" bIns="0">
+            <a:spAutoFit/>
+          </a:bodyPr>
+          <a:lstStyle/>
+          <a:p>
+            <a:pPr algn="l">
+              <a:lnSpc>
+                <a:spcPts val="1800"/>
+              </a:lnSpc>
+              <a:spcAft>
+                <a:spcPts val="0"/>
+              </a:spcAft>
+            </a:pPr>
+            <a:r>
+              <a:rPr sz="1200" b="1" i="0">
+                <a:solidFill>
+                  <a:srgbClr val="1A2430"/>
+                </a:solidFill>
+                <a:latin typeface="Garamond"/>
+              </a:rPr>
+              <a:t>12.9</a:t>
+            </a:r>
+          </a:p>
+        </p:txBody>
+      </p:sp>
+      <p:sp>
+        <p:nvSpPr>
+          <p:cNvPr id="37" name="TextBox 36"/>
+          <p:cNvSpPr txBox="1"/>
+          <p:nvPr/>
+        </p:nvSpPr>
+        <p:spPr>
+          <a:xfrm>
+            <a:off x="1005840" y="4992624"/>
+            <a:ext cx="5486400" cy="329184"/>
+          </a:xfrm>
+          <a:prstGeom prst="rect">
+            <a:avLst/>
+          </a:prstGeom>
+          <a:noFill/>
+        </p:spPr>
+        <p:txBody>
+          <a:bodyPr wrap="square" lIns="0" rIns="0" tIns="0" bIns="0">
+            <a:spAutoFit/>
+          </a:bodyPr>
+          <a:lstStyle/>
+          <a:p>
+            <a:pPr algn="l">
+              <a:lnSpc>
+                <a:spcPts val="1800"/>
+              </a:lnSpc>
+              <a:spcAft>
+                <a:spcPts val="0"/>
+              </a:spcAft>
+            </a:pPr>
+            <a:r>
+              <a:rPr sz="1200" b="0" i="0">
+                <a:solidFill>
+                  <a:srgbClr val="1A2430"/>
+                </a:solidFill>
+                <a:latin typeface="Garamond"/>
+              </a:rPr>
+              <a:t>Annual recall</a:t>
+            </a:r>
+          </a:p>
+        </p:txBody>
+      </p:sp>
+      <p:sp>
+        <p:nvSpPr>
+          <p:cNvPr id="38" name="TextBox 37"/>
+          <p:cNvSpPr txBox="1"/>
+          <p:nvPr/>
+        </p:nvSpPr>
+        <p:spPr>
+          <a:xfrm>
+            <a:off x="10058400" y="4992624"/>
+            <a:ext cx="1097280" cy="329184"/>
+          </a:xfrm>
+          <a:prstGeom prst="rect">
+            <a:avLst/>
+          </a:prstGeom>
+          <a:noFill/>
+        </p:spPr>
+        <p:txBody>
+          <a:bodyPr wrap="square" lIns="0" rIns="0" tIns="0" bIns="0">
+            <a:spAutoFit/>
+          </a:bodyPr>
+          <a:lstStyle/>
+          <a:p>
+            <a:pPr algn="l">
+              <a:lnSpc>
+                <a:spcPts val="1800"/>
+              </a:lnSpc>
+              <a:spcAft>
+                <a:spcPts val="0"/>
+              </a:spcAft>
+            </a:pPr>
+            <a:r>
+              <a:rPr sz="1200" b="1" i="0">
+                <a:solidFill>
+                  <a:srgbClr val="1A2430"/>
+                </a:solidFill>
+                <a:latin typeface="Garamond"/>
+              </a:rPr>
+              <a:t>7.1</a:t>
+            </a:r>
+          </a:p>
+        </p:txBody>
+      </p:sp>
+      <p:sp>
+        <p:nvSpPr>
+          <p:cNvPr id="39" name="TextBox 38"/>
+          <p:cNvSpPr txBox="1"/>
+          <p:nvPr/>
+        </p:nvSpPr>
+        <p:spPr>
+          <a:xfrm>
+            <a:off x="1005840" y="5321808"/>
+            <a:ext cx="5486400" cy="329184"/>
+          </a:xfrm>
+          <a:prstGeom prst="rect">
+            <a:avLst/>
+          </a:prstGeom>
+          <a:noFill/>
+        </p:spPr>
+        <p:txBody>
+          <a:bodyPr wrap="square" lIns="0" rIns="0" tIns="0" bIns="0">
+            <a:spAutoFit/>
+          </a:bodyPr>
+          <a:lstStyle/>
+          <a:p>
+            <a:pPr algn="l">
+              <a:lnSpc>
+                <a:spcPts val="1800"/>
+              </a:lnSpc>
+              <a:spcAft>
+                <a:spcPts val="0"/>
+              </a:spcAft>
+            </a:pPr>
+            <a:r>
+              <a:rPr sz="1200" b="0" i="0">
+                <a:solidFill>
+                  <a:srgbClr val="1A2430"/>
+                </a:solidFill>
+                <a:latin typeface="Garamond"/>
+              </a:rPr>
+              <a:t>Occupation pair</a:t>
+            </a:r>
+          </a:p>
+        </p:txBody>
+      </p:sp>
+      <p:sp>
+        <p:nvSpPr>
+          <p:cNvPr id="40" name="TextBox 39"/>
+          <p:cNvSpPr txBox="1"/>
+          <p:nvPr/>
+        </p:nvSpPr>
+        <p:spPr>
+          <a:xfrm>
+            <a:off x="10058400" y="5321808"/>
+            <a:ext cx="1097280" cy="329184"/>
+          </a:xfrm>
+          <a:prstGeom prst="rect">
+            <a:avLst/>
+          </a:prstGeom>
+          <a:noFill/>
+        </p:spPr>
+        <p:txBody>
+          <a:bodyPr wrap="square" lIns="0" rIns="0" tIns="0" bIns="0">
+            <a:spAutoFit/>
+          </a:bodyPr>
+          <a:lstStyle/>
+          <a:p>
+            <a:pPr algn="l">
+              <a:lnSpc>
+                <a:spcPts val="1800"/>
+              </a:lnSpc>
+              <a:spcAft>
+                <a:spcPts val="0"/>
+              </a:spcAft>
+            </a:pPr>
+            <a:r>
+              <a:rPr sz="1200" b="1" i="0">
+                <a:solidFill>
+                  <a:srgbClr val="1A2430"/>
+                </a:solidFill>
+                <a:latin typeface="Garamond"/>
+              </a:rPr>
+              <a:t>5.0</a:t>
+            </a:r>
+          </a:p>
+        </p:txBody>
+      </p:sp>
+      <p:sp>
+        <p:nvSpPr>
+          <p:cNvPr id="41" name="TextBox 40"/>
+          <p:cNvSpPr txBox="1"/>
+          <p:nvPr/>
+        </p:nvSpPr>
+        <p:spPr>
+          <a:xfrm>
+            <a:off x="1005840" y="5650992"/>
+            <a:ext cx="5486400" cy="329184"/>
+          </a:xfrm>
+          <a:prstGeom prst="rect">
+            <a:avLst/>
+          </a:prstGeom>
+          <a:noFill/>
+        </p:spPr>
+        <p:txBody>
+          <a:bodyPr wrap="square" lIns="0" rIns="0" tIns="0" bIns="0">
+            <a:spAutoFit/>
+          </a:bodyPr>
+          <a:lstStyle/>
+          <a:p>
+            <a:pPr algn="l">
+              <a:lnSpc>
+                <a:spcPts val="1800"/>
+              </a:lnSpc>
+              <a:spcAft>
+                <a:spcPts val="0"/>
+              </a:spcAft>
+            </a:pPr>
+            <a:r>
+              <a:rPr sz="1200" b="0" i="0">
+                <a:solidFill>
+                  <a:srgbClr val="1A2430"/>
+                </a:solidFill>
+                <a:latin typeface="Garamond"/>
+              </a:rPr>
+              <a:t>Month pairs</a:t>
+            </a:r>
+          </a:p>
+        </p:txBody>
+      </p:sp>
+      <p:sp>
+        <p:nvSpPr>
+          <p:cNvPr id="42" name="TextBox 41"/>
+          <p:cNvSpPr txBox="1"/>
+          <p:nvPr/>
+        </p:nvSpPr>
+        <p:spPr>
+          <a:xfrm>
+            <a:off x="10058400" y="5650992"/>
+            <a:ext cx="1097280" cy="329184"/>
+          </a:xfrm>
+          <a:prstGeom prst="rect">
+            <a:avLst/>
+          </a:prstGeom>
+          <a:noFill/>
+        </p:spPr>
+        <p:txBody>
+          <a:bodyPr wrap="square" lIns="0" rIns="0" tIns="0" bIns="0">
+            <a:spAutoFit/>
+          </a:bodyPr>
+          <a:lstStyle/>
+          <a:p>
+            <a:pPr algn="l">
+              <a:lnSpc>
+                <a:spcPts val="1800"/>
+              </a:lnSpc>
+              <a:spcAft>
+                <a:spcPts val="0"/>
+              </a:spcAft>
+            </a:pPr>
+            <a:r>
+              <a:rPr sz="1200" b="1" i="0">
+                <a:solidFill>
+                  <a:srgbClr val="1A2430"/>
+                </a:solidFill>
+                <a:latin typeface="Garamond"/>
+              </a:rPr>
+              <a:t>16.0</a:t>
+            </a:r>
+          </a:p>
+        </p:txBody>
+      </p:sp>
+      <p:sp>
+        <p:nvSpPr>
+          <p:cNvPr id="43" name="TextBox 42"/>
+          <p:cNvSpPr txBox="1"/>
+          <p:nvPr/>
+        </p:nvSpPr>
+        <p:spPr>
+          <a:xfrm>
+            <a:off x="1005840" y="5980176"/>
+            <a:ext cx="5486400" cy="329184"/>
+          </a:xfrm>
+          <a:prstGeom prst="rect">
+            <a:avLst/>
+          </a:prstGeom>
+          <a:noFill/>
+        </p:spPr>
+        <p:txBody>
+          <a:bodyPr wrap="square" lIns="0" rIns="0" tIns="0" bIns="0">
+            <a:spAutoFit/>
+          </a:bodyPr>
+          <a:lstStyle/>
+          <a:p>
+            <a:pPr algn="l">
+              <a:lnSpc>
+                <a:spcPts val="1800"/>
+              </a:lnSpc>
+              <a:spcAft>
+                <a:spcPts val="0"/>
+              </a:spcAft>
+            </a:pPr>
+            <a:r>
+              <a:rPr sz="1200" b="0" i="0">
+                <a:solidFill>
+                  <a:srgbClr val="1A2430"/>
+                </a:solidFill>
+                <a:latin typeface="Garamond"/>
+              </a:rPr>
+              <a:t>Any sighting</a:t>
+            </a:r>
+          </a:p>
+        </p:txBody>
+      </p:sp>
+      <p:sp>
+        <p:nvSpPr>
+          <p:cNvPr id="44" name="TextBox 43"/>
+          <p:cNvSpPr txBox="1"/>
+          <p:nvPr/>
+        </p:nvSpPr>
+        <p:spPr>
+          <a:xfrm>
+            <a:off x="10058400" y="5980176"/>
+            <a:ext cx="1097280" cy="329184"/>
+          </a:xfrm>
+          <a:prstGeom prst="rect">
+            <a:avLst/>
+          </a:prstGeom>
+          <a:noFill/>
+        </p:spPr>
+        <p:txBody>
+          <a:bodyPr wrap="square" lIns="0" rIns="0" tIns="0" bIns="0">
+            <a:spAutoFit/>
+          </a:bodyPr>
+          <a:lstStyle/>
+          <a:p>
+            <a:pPr algn="l">
+              <a:lnSpc>
+                <a:spcPts val="1800"/>
+              </a:lnSpc>
+              <a:spcAft>
+                <a:spcPts val="0"/>
+              </a:spcAft>
+            </a:pPr>
+            <a:r>
+              <a:rPr sz="1200" b="1" i="0">
+                <a:solidFill>
+                  <a:srgbClr val="1A2430"/>
+                </a:solidFill>
+                <a:latin typeface="Garamond"/>
+              </a:rPr>
+              <a:t>19.4</a:t>
+            </a:r>
+          </a:p>
+        </p:txBody>
+      </p:sp>
+      <p:sp>
+        <p:nvSpPr>
+          <p:cNvPr id="45" name="TextBox 44"/>
+          <p:cNvSpPr txBox="1"/>
+          <p:nvPr/>
+        </p:nvSpPr>
+        <p:spPr>
+          <a:xfrm>
+            <a:off x="1005840" y="6309360"/>
+            <a:ext cx="5486400" cy="329184"/>
+          </a:xfrm>
+          <a:prstGeom prst="rect">
+            <a:avLst/>
+          </a:prstGeom>
+          <a:noFill/>
+        </p:spPr>
+        <p:txBody>
+          <a:bodyPr wrap="square" lIns="0" rIns="0" tIns="0" bIns="0">
+            <a:spAutoFit/>
+          </a:bodyPr>
+          <a:lstStyle/>
+          <a:p>
+            <a:pPr algn="l">
+              <a:lnSpc>
+                <a:spcPts val="1800"/>
+              </a:lnSpc>
+              <a:spcAft>
+                <a:spcPts val="0"/>
+              </a:spcAft>
+            </a:pPr>
+            <a:r>
+              <a:rPr sz="1200" b="0" i="0">
+                <a:solidFill>
+                  <a:srgbClr val="1A2430"/>
+                </a:solidFill>
+                <a:latin typeface="Garamond"/>
+              </a:rPr>
+              <a:t>NCES follow-up survey</a:t>
+            </a:r>
+          </a:p>
+        </p:txBody>
+      </p:sp>
+      <p:sp>
+        <p:nvSpPr>
+          <p:cNvPr id="46" name="TextBox 45"/>
+          <p:cNvSpPr txBox="1"/>
+          <p:nvPr/>
+        </p:nvSpPr>
+        <p:spPr>
+          <a:xfrm>
+            <a:off x="10058400" y="6309360"/>
+            <a:ext cx="1097280" cy="329184"/>
+          </a:xfrm>
+          <a:prstGeom prst="rect">
+            <a:avLst/>
+          </a:prstGeom>
+          <a:noFill/>
+        </p:spPr>
+        <p:txBody>
+          <a:bodyPr wrap="square" lIns="0" rIns="0" tIns="0" bIns="0">
+            <a:spAutoFit/>
+          </a:bodyPr>
+          <a:lstStyle/>
+          <a:p>
+            <a:pPr algn="l">
+              <a:lnSpc>
+                <a:spcPts val="1800"/>
+              </a:lnSpc>
+              <a:spcAft>
+                <a:spcPts val="0"/>
+              </a:spcAft>
+            </a:pPr>
+            <a:r>
+              <a:rPr sz="1200" b="1" i="0">
+                <a:solidFill>
+                  <a:srgbClr val="1A2430"/>
+                </a:solidFill>
+                <a:latin typeface="Garamond"/>
+              </a:rPr>
+              <a:t>8.0</a:t>
+            </a:r>
+          </a:p>
+        </p:txBody>
+      </p:sp>
+      <p:cxnSp>
+        <p:nvCxnSpPr>
+          <p:cNvPr id="47" name="Connector 46"/>
+          <p:cNvCxnSpPr/>
+          <p:nvPr/>
+        </p:nvCxnSpPr>
+        <p:spPr>
+          <a:xfrm>
+            <a:off x="822960" y="6656832"/>
+            <a:ext cx="10543032" cy="0"/>
+          </a:xfrm>
+          <a:prstGeom prst="line">
+            <a:avLst/>
+          </a:prstGeom>
+          <a:ln w="12700">
+            <a:solidFill>
+              <a:srgbClr val="1A2430"/>
+            </a:solidFill>
+          </a:ln>
+        </p:spPr>
+        <p:style>
+          <a:lnRef idx="2">
+            <a:schemeClr val="accent1"/>
+          </a:lnRef>
+          <a:fillRef idx="0">
+            <a:schemeClr val="accent1"/>
+          </a:fillRef>
+          <a:effectRef idx="1">
+            <a:schemeClr val="accent1"/>
+          </a:effectRef>
+          <a:fontRef idx="minor">
+            <a:schemeClr val="tx1"/>
+          </a:fontRef>
+        </p:style>
+      </p:cxnSp>
     </p:spTree>
   </p:cSld>
   <p:clrMapOvr>
@@ -18200,6 +21008,2232 @@
 </file>
 
 <file path=ppt/slides/slide40.xml><?xml version="1.0" encoding="utf-8"?>
+<p:sld xmlns:a="http://schemas.openxmlformats.org/drawingml/2006/main" xmlns:p="http://schemas.openxmlformats.org/presentationml/2006/main" xmlns:r="http://schemas.openxmlformats.org/officeDocument/2006/relationships">
+  <p:cSld>
+    <p:spTree>
+      <p:nvGrpSpPr>
+        <p:cNvPr id="1" name=""/>
+        <p:cNvGrpSpPr/>
+        <p:nvPr/>
+      </p:nvGrpSpPr>
+      <p:grpSpPr/>
+      <p:sp>
+        <p:nvSpPr>
+          <p:cNvPr id="2" name="Rectangle 1"/>
+          <p:cNvSpPr/>
+          <p:nvPr/>
+        </p:nvSpPr>
+        <p:spPr>
+          <a:xfrm>
+            <a:off x="0" y="-27432"/>
+            <a:ext cx="12198096" cy="594360"/>
+          </a:xfrm>
+          <a:prstGeom prst="rect">
+            <a:avLst/>
+          </a:prstGeom>
+          <a:solidFill>
+            <a:srgbClr val="00549F"/>
+          </a:solidFill>
+          <a:ln>
+            <a:noFill/>
+          </a:ln>
+          <a:effectLst/>
+        </p:spPr>
+        <p:style>
+          <a:lnRef idx="1">
+            <a:schemeClr val="accent1"/>
+          </a:lnRef>
+          <a:fillRef idx="3">
+            <a:schemeClr val="accent1"/>
+          </a:fillRef>
+          <a:effectRef idx="2">
+            <a:schemeClr val="accent1"/>
+          </a:effectRef>
+          <a:fontRef idx="minor">
+            <a:schemeClr val="lt1"/>
+          </a:fontRef>
+        </p:style>
+        <p:txBody>
+          <a:bodyPr rtlCol="0" anchor="ctr"/>
+          <a:lstStyle/>
+          <a:p>
+            <a:pPr algn="ctr"/>
+          </a:p>
+        </p:txBody>
+      </p:sp>
+      <p:sp>
+        <p:nvSpPr>
+          <p:cNvPr id="3" name="TextBox 2"/>
+          <p:cNvSpPr txBox="1"/>
+          <p:nvPr/>
+        </p:nvSpPr>
+        <p:spPr>
+          <a:xfrm>
+            <a:off x="685800" y="868680"/>
+            <a:ext cx="9875520" cy="548640"/>
+          </a:xfrm>
+          <a:prstGeom prst="rect">
+            <a:avLst/>
+          </a:prstGeom>
+          <a:noFill/>
+        </p:spPr>
+        <p:txBody>
+          <a:bodyPr wrap="square" lIns="0" rIns="0" tIns="0" bIns="0"/>
+          <a:lstStyle/>
+          <a:p>
+            <a:pPr algn="l"/>
+            <a:r>
+              <a:rPr sz="2800" b="1">
+                <a:solidFill>
+                  <a:srgbClr val="26456E"/>
+                </a:solidFill>
+                <a:latin typeface="Garamond"/>
+              </a:rPr>
+              <a:t>Measuring attrition: definitions</a:t>
+            </a:r>
+          </a:p>
+        </p:txBody>
+      </p:sp>
+      <p:sp>
+        <p:nvSpPr>
+          <p:cNvPr id="4" name="TextBox 3"/>
+          <p:cNvSpPr txBox="1"/>
+          <p:nvPr/>
+        </p:nvSpPr>
+        <p:spPr>
+          <a:xfrm>
+            <a:off x="822960" y="1417320"/>
+            <a:ext cx="3200400" cy="320040"/>
+          </a:xfrm>
+          <a:prstGeom prst="rect">
+            <a:avLst/>
+          </a:prstGeom>
+          <a:noFill/>
+        </p:spPr>
+        <p:txBody>
+          <a:bodyPr wrap="square" lIns="0" rIns="0" tIns="0" bIns="0">
+            <a:spAutoFit/>
+          </a:bodyPr>
+          <a:lstStyle/>
+          <a:p>
+            <a:pPr algn="l">
+              <a:lnSpc>
+                <a:spcPts val="1950"/>
+              </a:lnSpc>
+              <a:spcAft>
+                <a:spcPts val="0"/>
+              </a:spcAft>
+            </a:pPr>
+            <a:r>
+              <a:rPr sz="1300" b="1" i="0">
+                <a:solidFill>
+                  <a:srgbClr val="1F3864"/>
+                </a:solidFill>
+                <a:latin typeface="Garamond"/>
+              </a:rPr>
+              <a:t>Year 1: interviews 1–4</a:t>
+            </a:r>
+          </a:p>
+        </p:txBody>
+      </p:sp>
+      <p:sp>
+        <p:nvSpPr>
+          <p:cNvPr id="5" name="TextBox 4"/>
+          <p:cNvSpPr txBox="1"/>
+          <p:nvPr/>
+        </p:nvSpPr>
+        <p:spPr>
+          <a:xfrm>
+            <a:off x="4480560" y="1417320"/>
+            <a:ext cx="3291840" cy="320040"/>
+          </a:xfrm>
+          <a:prstGeom prst="rect">
+            <a:avLst/>
+          </a:prstGeom>
+          <a:noFill/>
+        </p:spPr>
+        <p:txBody>
+          <a:bodyPr wrap="square" lIns="0" rIns="0" tIns="0" bIns="0">
+            <a:spAutoFit/>
+          </a:bodyPr>
+          <a:lstStyle/>
+          <a:p>
+            <a:pPr algn="ctr">
+              <a:lnSpc>
+                <a:spcPts val="2100"/>
+              </a:lnSpc>
+              <a:spcAft>
+                <a:spcPts val="0"/>
+              </a:spcAft>
+            </a:pPr>
+            <a:r>
+              <a:rPr sz="1400" b="1" i="0">
+                <a:solidFill>
+                  <a:srgbClr val="6B7480"/>
+                </a:solidFill>
+                <a:latin typeface="Garamond"/>
+              </a:rPr>
+              <a:t>not a teacher</a:t>
+            </a:r>
+          </a:p>
+        </p:txBody>
+      </p:sp>
+      <p:sp>
+        <p:nvSpPr>
+          <p:cNvPr id="6" name="TextBox 5"/>
+          <p:cNvSpPr txBox="1"/>
+          <p:nvPr/>
+        </p:nvSpPr>
+        <p:spPr>
+          <a:xfrm>
+            <a:off x="8229600" y="1417320"/>
+            <a:ext cx="3200400" cy="320040"/>
+          </a:xfrm>
+          <a:prstGeom prst="rect">
+            <a:avLst/>
+          </a:prstGeom>
+          <a:noFill/>
+        </p:spPr>
+        <p:txBody>
+          <a:bodyPr wrap="square" lIns="0" rIns="0" tIns="0" bIns="0">
+            <a:spAutoFit/>
+          </a:bodyPr>
+          <a:lstStyle/>
+          <a:p>
+            <a:pPr algn="r">
+              <a:lnSpc>
+                <a:spcPts val="1950"/>
+              </a:lnSpc>
+              <a:spcAft>
+                <a:spcPts val="0"/>
+              </a:spcAft>
+            </a:pPr>
+            <a:r>
+              <a:rPr sz="1300" b="1" i="0">
+                <a:solidFill>
+                  <a:srgbClr val="7B2530"/>
+                </a:solidFill>
+                <a:latin typeface="Garamond"/>
+              </a:rPr>
+              <a:t>Year 2: interviews 5–8</a:t>
+            </a:r>
+          </a:p>
+        </p:txBody>
+      </p:sp>
+      <p:sp>
+        <p:nvSpPr>
+          <p:cNvPr id="7" name="Rectangle 6"/>
+          <p:cNvSpPr/>
+          <p:nvPr/>
+        </p:nvSpPr>
+        <p:spPr>
+          <a:xfrm>
+            <a:off x="822960" y="1755648"/>
+            <a:ext cx="658939" cy="457200"/>
+          </a:xfrm>
+          <a:prstGeom prst="rect">
+            <a:avLst/>
+          </a:prstGeom>
+          <a:solidFill>
+            <a:srgbClr val="1F3864"/>
+          </a:solidFill>
+          <a:ln>
+            <a:noFill/>
+          </a:ln>
+          <a:effectLst/>
+        </p:spPr>
+        <p:style>
+          <a:lnRef idx="1">
+            <a:schemeClr val="accent1"/>
+          </a:lnRef>
+          <a:fillRef idx="3">
+            <a:schemeClr val="accent1"/>
+          </a:fillRef>
+          <a:effectRef idx="2">
+            <a:schemeClr val="accent1"/>
+          </a:effectRef>
+          <a:fontRef idx="minor">
+            <a:schemeClr val="lt1"/>
+          </a:fontRef>
+        </p:style>
+        <p:txBody>
+          <a:bodyPr rtlCol="0" anchor="ctr" wrap="none"/>
+          <a:lstStyle/>
+          <a:p>
+            <a:pPr algn="ctr"/>
+            <a:r>
+              <a:rPr sz="1200" b="1">
+                <a:solidFill>
+                  <a:srgbClr val="FFFFFF"/>
+                </a:solidFill>
+                <a:latin typeface="Garamond"/>
+              </a:rPr>
+              <a:t>T</a:t>
+            </a:r>
+          </a:p>
+        </p:txBody>
+      </p:sp>
+      <p:sp>
+        <p:nvSpPr>
+          <p:cNvPr id="8" name="Rectangle 7"/>
+          <p:cNvSpPr/>
+          <p:nvPr/>
+        </p:nvSpPr>
+        <p:spPr>
+          <a:xfrm>
+            <a:off x="1481899" y="1755648"/>
+            <a:ext cx="658939" cy="457200"/>
+          </a:xfrm>
+          <a:prstGeom prst="rect">
+            <a:avLst/>
+          </a:prstGeom>
+          <a:solidFill>
+            <a:srgbClr val="1F3864"/>
+          </a:solidFill>
+          <a:ln>
+            <a:noFill/>
+          </a:ln>
+          <a:effectLst/>
+        </p:spPr>
+        <p:style>
+          <a:lnRef idx="1">
+            <a:schemeClr val="accent1"/>
+          </a:lnRef>
+          <a:fillRef idx="3">
+            <a:schemeClr val="accent1"/>
+          </a:fillRef>
+          <a:effectRef idx="2">
+            <a:schemeClr val="accent1"/>
+          </a:effectRef>
+          <a:fontRef idx="minor">
+            <a:schemeClr val="lt1"/>
+          </a:fontRef>
+        </p:style>
+        <p:txBody>
+          <a:bodyPr rtlCol="0" anchor="ctr" wrap="none"/>
+          <a:lstStyle/>
+          <a:p>
+            <a:pPr algn="ctr"/>
+            <a:r>
+              <a:rPr sz="1200" b="1">
+                <a:solidFill>
+                  <a:srgbClr val="FFFFFF"/>
+                </a:solidFill>
+                <a:latin typeface="Garamond"/>
+              </a:rPr>
+              <a:t>2</a:t>
+            </a:r>
+          </a:p>
+        </p:txBody>
+      </p:sp>
+      <p:sp>
+        <p:nvSpPr>
+          <p:cNvPr id="9" name="Rectangle 8"/>
+          <p:cNvSpPr/>
+          <p:nvPr/>
+        </p:nvSpPr>
+        <p:spPr>
+          <a:xfrm>
+            <a:off x="2140839" y="1755648"/>
+            <a:ext cx="658939" cy="457200"/>
+          </a:xfrm>
+          <a:prstGeom prst="rect">
+            <a:avLst/>
+          </a:prstGeom>
+          <a:solidFill>
+            <a:srgbClr val="1F3864"/>
+          </a:solidFill>
+          <a:ln>
+            <a:noFill/>
+          </a:ln>
+          <a:effectLst/>
+        </p:spPr>
+        <p:style>
+          <a:lnRef idx="1">
+            <a:schemeClr val="accent1"/>
+          </a:lnRef>
+          <a:fillRef idx="3">
+            <a:schemeClr val="accent1"/>
+          </a:fillRef>
+          <a:effectRef idx="2">
+            <a:schemeClr val="accent1"/>
+          </a:effectRef>
+          <a:fontRef idx="minor">
+            <a:schemeClr val="lt1"/>
+          </a:fontRef>
+        </p:style>
+        <p:txBody>
+          <a:bodyPr rtlCol="0" anchor="ctr" wrap="none"/>
+          <a:lstStyle/>
+          <a:p>
+            <a:pPr algn="ctr"/>
+            <a:r>
+              <a:rPr sz="1200" b="1">
+                <a:solidFill>
+                  <a:srgbClr val="FFFFFF"/>
+                </a:solidFill>
+                <a:latin typeface="Garamond"/>
+              </a:rPr>
+              <a:t>3</a:t>
+            </a:r>
+          </a:p>
+        </p:txBody>
+      </p:sp>
+      <p:sp>
+        <p:nvSpPr>
+          <p:cNvPr id="10" name="Rectangle 9"/>
+          <p:cNvSpPr/>
+          <p:nvPr/>
+        </p:nvSpPr>
+        <p:spPr>
+          <a:xfrm>
+            <a:off x="2799778" y="1755648"/>
+            <a:ext cx="658939" cy="457200"/>
+          </a:xfrm>
+          <a:prstGeom prst="rect">
+            <a:avLst/>
+          </a:prstGeom>
+          <a:solidFill>
+            <a:srgbClr val="1F3864"/>
+          </a:solidFill>
+          <a:ln>
+            <a:noFill/>
+          </a:ln>
+          <a:effectLst/>
+        </p:spPr>
+        <p:style>
+          <a:lnRef idx="1">
+            <a:schemeClr val="accent1"/>
+          </a:lnRef>
+          <a:fillRef idx="3">
+            <a:schemeClr val="accent1"/>
+          </a:fillRef>
+          <a:effectRef idx="2">
+            <a:schemeClr val="accent1"/>
+          </a:effectRef>
+          <a:fontRef idx="minor">
+            <a:schemeClr val="lt1"/>
+          </a:fontRef>
+        </p:style>
+        <p:txBody>
+          <a:bodyPr rtlCol="0" anchor="ctr" wrap="none"/>
+          <a:lstStyle/>
+          <a:p>
+            <a:pPr algn="ctr"/>
+            <a:r>
+              <a:rPr sz="1200" b="1">
+                <a:solidFill>
+                  <a:srgbClr val="FFFFFF"/>
+                </a:solidFill>
+                <a:latin typeface="Garamond"/>
+              </a:rPr>
+              <a:t>4</a:t>
+            </a:r>
+          </a:p>
+        </p:txBody>
+      </p:sp>
+      <p:sp>
+        <p:nvSpPr>
+          <p:cNvPr id="11" name="Rectangle 10"/>
+          <p:cNvSpPr/>
+          <p:nvPr/>
+        </p:nvSpPr>
+        <p:spPr>
+          <a:xfrm>
+            <a:off x="3458718" y="1755648"/>
+            <a:ext cx="658939" cy="457200"/>
+          </a:xfrm>
+          <a:prstGeom prst="rect">
+            <a:avLst/>
+          </a:prstGeom>
+          <a:solidFill>
+            <a:srgbClr val="FFFFFF"/>
+          </a:solidFill>
+          <a:ln w="9525">
+            <a:solidFill>
+              <a:srgbClr val="C9CFD6"/>
+            </a:solidFill>
+          </a:ln>
+          <a:effectLst/>
+        </p:spPr>
+        <p:style>
+          <a:lnRef idx="1">
+            <a:schemeClr val="accent1"/>
+          </a:lnRef>
+          <a:fillRef idx="3">
+            <a:schemeClr val="accent1"/>
+          </a:fillRef>
+          <a:effectRef idx="2">
+            <a:schemeClr val="accent1"/>
+          </a:effectRef>
+          <a:fontRef idx="minor">
+            <a:schemeClr val="lt1"/>
+          </a:fontRef>
+        </p:style>
+        <p:txBody>
+          <a:bodyPr rtlCol="0" anchor="ctr" wrap="none"/>
+          <a:lstStyle/>
+          <a:p>
+            <a:pPr algn="ctr"/>
+            <a:r>
+              <a:rPr sz="1200" b="1">
+                <a:solidFill>
+                  <a:srgbClr val="6B7480"/>
+                </a:solidFill>
+                <a:latin typeface="Garamond"/>
+              </a:rPr>
+              <a:t>5</a:t>
+            </a:r>
+          </a:p>
+        </p:txBody>
+      </p:sp>
+      <p:sp>
+        <p:nvSpPr>
+          <p:cNvPr id="12" name="Rectangle 11"/>
+          <p:cNvSpPr/>
+          <p:nvPr/>
+        </p:nvSpPr>
+        <p:spPr>
+          <a:xfrm>
+            <a:off x="4117657" y="1755648"/>
+            <a:ext cx="658939" cy="457200"/>
+          </a:xfrm>
+          <a:prstGeom prst="rect">
+            <a:avLst/>
+          </a:prstGeom>
+          <a:solidFill>
+            <a:srgbClr val="FFFFFF"/>
+          </a:solidFill>
+          <a:ln w="9525">
+            <a:solidFill>
+              <a:srgbClr val="C9CFD6"/>
+            </a:solidFill>
+          </a:ln>
+          <a:effectLst/>
+        </p:spPr>
+        <p:style>
+          <a:lnRef idx="1">
+            <a:schemeClr val="accent1"/>
+          </a:lnRef>
+          <a:fillRef idx="3">
+            <a:schemeClr val="accent1"/>
+          </a:fillRef>
+          <a:effectRef idx="2">
+            <a:schemeClr val="accent1"/>
+          </a:effectRef>
+          <a:fontRef idx="minor">
+            <a:schemeClr val="lt1"/>
+          </a:fontRef>
+        </p:style>
+        <p:txBody>
+          <a:bodyPr rtlCol="0" anchor="ctr" wrap="none"/>
+          <a:lstStyle/>
+          <a:p>
+            <a:pPr algn="ctr"/>
+            <a:r>
+              <a:rPr sz="1200" b="1">
+                <a:solidFill>
+                  <a:srgbClr val="6B7480"/>
+                </a:solidFill>
+                <a:latin typeface="Garamond"/>
+              </a:rPr>
+              <a:t>6</a:t>
+            </a:r>
+          </a:p>
+        </p:txBody>
+      </p:sp>
+      <p:sp>
+        <p:nvSpPr>
+          <p:cNvPr id="13" name="Rectangle 12"/>
+          <p:cNvSpPr/>
+          <p:nvPr/>
+        </p:nvSpPr>
+        <p:spPr>
+          <a:xfrm>
+            <a:off x="4776597" y="1755648"/>
+            <a:ext cx="658939" cy="457200"/>
+          </a:xfrm>
+          <a:prstGeom prst="rect">
+            <a:avLst/>
+          </a:prstGeom>
+          <a:solidFill>
+            <a:srgbClr val="FFFFFF"/>
+          </a:solidFill>
+          <a:ln w="9525">
+            <a:solidFill>
+              <a:srgbClr val="C9CFD6"/>
+            </a:solidFill>
+          </a:ln>
+          <a:effectLst/>
+        </p:spPr>
+        <p:style>
+          <a:lnRef idx="1">
+            <a:schemeClr val="accent1"/>
+          </a:lnRef>
+          <a:fillRef idx="3">
+            <a:schemeClr val="accent1"/>
+          </a:fillRef>
+          <a:effectRef idx="2">
+            <a:schemeClr val="accent1"/>
+          </a:effectRef>
+          <a:fontRef idx="minor">
+            <a:schemeClr val="lt1"/>
+          </a:fontRef>
+        </p:style>
+        <p:txBody>
+          <a:bodyPr rtlCol="0" anchor="ctr" wrap="none"/>
+          <a:lstStyle/>
+          <a:p>
+            <a:pPr algn="ctr"/>
+            <a:r>
+              <a:rPr sz="1200" b="1">
+                <a:solidFill>
+                  <a:srgbClr val="6B7480"/>
+                </a:solidFill>
+                <a:latin typeface="Garamond"/>
+              </a:rPr>
+              <a:t>7</a:t>
+            </a:r>
+          </a:p>
+        </p:txBody>
+      </p:sp>
+      <p:sp>
+        <p:nvSpPr>
+          <p:cNvPr id="14" name="Rectangle 13"/>
+          <p:cNvSpPr/>
+          <p:nvPr/>
+        </p:nvSpPr>
+        <p:spPr>
+          <a:xfrm>
+            <a:off x="5435536" y="1755648"/>
+            <a:ext cx="658939" cy="457200"/>
+          </a:xfrm>
+          <a:prstGeom prst="rect">
+            <a:avLst/>
+          </a:prstGeom>
+          <a:solidFill>
+            <a:srgbClr val="FFFFFF"/>
+          </a:solidFill>
+          <a:ln w="9525">
+            <a:solidFill>
+              <a:srgbClr val="C9CFD6"/>
+            </a:solidFill>
+          </a:ln>
+          <a:effectLst/>
+        </p:spPr>
+        <p:style>
+          <a:lnRef idx="1">
+            <a:schemeClr val="accent1"/>
+          </a:lnRef>
+          <a:fillRef idx="3">
+            <a:schemeClr val="accent1"/>
+          </a:fillRef>
+          <a:effectRef idx="2">
+            <a:schemeClr val="accent1"/>
+          </a:effectRef>
+          <a:fontRef idx="minor">
+            <a:schemeClr val="lt1"/>
+          </a:fontRef>
+        </p:style>
+        <p:txBody>
+          <a:bodyPr rtlCol="0" anchor="ctr" wrap="none"/>
+          <a:lstStyle/>
+          <a:p>
+            <a:pPr algn="ctr"/>
+            <a:r>
+              <a:rPr sz="1200" b="1">
+                <a:solidFill>
+                  <a:srgbClr val="6B7480"/>
+                </a:solidFill>
+                <a:latin typeface="Garamond"/>
+              </a:rPr>
+              <a:t>8</a:t>
+            </a:r>
+          </a:p>
+        </p:txBody>
+      </p:sp>
+      <p:sp>
+        <p:nvSpPr>
+          <p:cNvPr id="15" name="Rectangle 14"/>
+          <p:cNvSpPr/>
+          <p:nvPr/>
+        </p:nvSpPr>
+        <p:spPr>
+          <a:xfrm>
+            <a:off x="6094476" y="1755648"/>
+            <a:ext cx="658939" cy="457200"/>
+          </a:xfrm>
+          <a:prstGeom prst="rect">
+            <a:avLst/>
+          </a:prstGeom>
+          <a:solidFill>
+            <a:srgbClr val="FFFFFF"/>
+          </a:solidFill>
+          <a:ln w="9525">
+            <a:solidFill>
+              <a:srgbClr val="C9CFD6"/>
+            </a:solidFill>
+          </a:ln>
+          <a:effectLst/>
+        </p:spPr>
+        <p:style>
+          <a:lnRef idx="1">
+            <a:schemeClr val="accent1"/>
+          </a:lnRef>
+          <a:fillRef idx="3">
+            <a:schemeClr val="accent1"/>
+          </a:fillRef>
+          <a:effectRef idx="2">
+            <a:schemeClr val="accent1"/>
+          </a:effectRef>
+          <a:fontRef idx="minor">
+            <a:schemeClr val="lt1"/>
+          </a:fontRef>
+        </p:style>
+        <p:txBody>
+          <a:bodyPr rtlCol="0" anchor="ctr" wrap="none"/>
+          <a:lstStyle/>
+          <a:p>
+            <a:pPr algn="ctr"/>
+            <a:r>
+              <a:rPr sz="1200" b="1">
+                <a:solidFill>
+                  <a:srgbClr val="6B7480"/>
+                </a:solidFill>
+                <a:latin typeface="Garamond"/>
+              </a:rPr>
+              <a:t>9</a:t>
+            </a:r>
+          </a:p>
+        </p:txBody>
+      </p:sp>
+      <p:sp>
+        <p:nvSpPr>
+          <p:cNvPr id="16" name="Rectangle 15"/>
+          <p:cNvSpPr/>
+          <p:nvPr/>
+        </p:nvSpPr>
+        <p:spPr>
+          <a:xfrm>
+            <a:off x="6753415" y="1755648"/>
+            <a:ext cx="658939" cy="457200"/>
+          </a:xfrm>
+          <a:prstGeom prst="rect">
+            <a:avLst/>
+          </a:prstGeom>
+          <a:solidFill>
+            <a:srgbClr val="FFFFFF"/>
+          </a:solidFill>
+          <a:ln w="9525">
+            <a:solidFill>
+              <a:srgbClr val="C9CFD6"/>
+            </a:solidFill>
+          </a:ln>
+          <a:effectLst/>
+        </p:spPr>
+        <p:style>
+          <a:lnRef idx="1">
+            <a:schemeClr val="accent1"/>
+          </a:lnRef>
+          <a:fillRef idx="3">
+            <a:schemeClr val="accent1"/>
+          </a:fillRef>
+          <a:effectRef idx="2">
+            <a:schemeClr val="accent1"/>
+          </a:effectRef>
+          <a:fontRef idx="minor">
+            <a:schemeClr val="lt1"/>
+          </a:fontRef>
+        </p:style>
+        <p:txBody>
+          <a:bodyPr rtlCol="0" anchor="ctr" wrap="none"/>
+          <a:lstStyle/>
+          <a:p>
+            <a:pPr algn="ctr"/>
+            <a:r>
+              <a:rPr sz="1200" b="1">
+                <a:solidFill>
+                  <a:srgbClr val="6B7480"/>
+                </a:solidFill>
+                <a:latin typeface="Garamond"/>
+              </a:rPr>
+              <a:t>10</a:t>
+            </a:r>
+          </a:p>
+        </p:txBody>
+      </p:sp>
+      <p:sp>
+        <p:nvSpPr>
+          <p:cNvPr id="17" name="Rectangle 16"/>
+          <p:cNvSpPr/>
+          <p:nvPr/>
+        </p:nvSpPr>
+        <p:spPr>
+          <a:xfrm>
+            <a:off x="7412354" y="1755648"/>
+            <a:ext cx="658939" cy="457200"/>
+          </a:xfrm>
+          <a:prstGeom prst="rect">
+            <a:avLst/>
+          </a:prstGeom>
+          <a:solidFill>
+            <a:srgbClr val="FFFFFF"/>
+          </a:solidFill>
+          <a:ln w="9525">
+            <a:solidFill>
+              <a:srgbClr val="C9CFD6"/>
+            </a:solidFill>
+          </a:ln>
+          <a:effectLst/>
+        </p:spPr>
+        <p:style>
+          <a:lnRef idx="1">
+            <a:schemeClr val="accent1"/>
+          </a:lnRef>
+          <a:fillRef idx="3">
+            <a:schemeClr val="accent1"/>
+          </a:fillRef>
+          <a:effectRef idx="2">
+            <a:schemeClr val="accent1"/>
+          </a:effectRef>
+          <a:fontRef idx="minor">
+            <a:schemeClr val="lt1"/>
+          </a:fontRef>
+        </p:style>
+        <p:txBody>
+          <a:bodyPr rtlCol="0" anchor="ctr" wrap="none"/>
+          <a:lstStyle/>
+          <a:p>
+            <a:pPr algn="ctr"/>
+            <a:r>
+              <a:rPr sz="1200" b="1">
+                <a:solidFill>
+                  <a:srgbClr val="6B7480"/>
+                </a:solidFill>
+                <a:latin typeface="Garamond"/>
+              </a:rPr>
+              <a:t>11</a:t>
+            </a:r>
+          </a:p>
+        </p:txBody>
+      </p:sp>
+      <p:sp>
+        <p:nvSpPr>
+          <p:cNvPr id="18" name="Rectangle 17"/>
+          <p:cNvSpPr/>
+          <p:nvPr/>
+        </p:nvSpPr>
+        <p:spPr>
+          <a:xfrm>
+            <a:off x="8071294" y="1755648"/>
+            <a:ext cx="658939" cy="457200"/>
+          </a:xfrm>
+          <a:prstGeom prst="rect">
+            <a:avLst/>
+          </a:prstGeom>
+          <a:solidFill>
+            <a:srgbClr val="FFFFFF"/>
+          </a:solidFill>
+          <a:ln w="9525">
+            <a:solidFill>
+              <a:srgbClr val="C9CFD6"/>
+            </a:solidFill>
+          </a:ln>
+          <a:effectLst/>
+        </p:spPr>
+        <p:style>
+          <a:lnRef idx="1">
+            <a:schemeClr val="accent1"/>
+          </a:lnRef>
+          <a:fillRef idx="3">
+            <a:schemeClr val="accent1"/>
+          </a:fillRef>
+          <a:effectRef idx="2">
+            <a:schemeClr val="accent1"/>
+          </a:effectRef>
+          <a:fontRef idx="minor">
+            <a:schemeClr val="lt1"/>
+          </a:fontRef>
+        </p:style>
+        <p:txBody>
+          <a:bodyPr rtlCol="0" anchor="ctr" wrap="none"/>
+          <a:lstStyle/>
+          <a:p>
+            <a:pPr algn="ctr"/>
+            <a:r>
+              <a:rPr sz="1200" b="1">
+                <a:solidFill>
+                  <a:srgbClr val="6B7480"/>
+                </a:solidFill>
+                <a:latin typeface="Garamond"/>
+              </a:rPr>
+              <a:t>12</a:t>
+            </a:r>
+          </a:p>
+        </p:txBody>
+      </p:sp>
+      <p:sp>
+        <p:nvSpPr>
+          <p:cNvPr id="19" name="Rectangle 18"/>
+          <p:cNvSpPr/>
+          <p:nvPr/>
+        </p:nvSpPr>
+        <p:spPr>
+          <a:xfrm>
+            <a:off x="8730234" y="1755648"/>
+            <a:ext cx="658939" cy="457200"/>
+          </a:xfrm>
+          <a:prstGeom prst="rect">
+            <a:avLst/>
+          </a:prstGeom>
+          <a:solidFill>
+            <a:srgbClr val="7B2530"/>
+          </a:solidFill>
+          <a:ln>
+            <a:noFill/>
+          </a:ln>
+          <a:effectLst/>
+        </p:spPr>
+        <p:style>
+          <a:lnRef idx="1">
+            <a:schemeClr val="accent1"/>
+          </a:lnRef>
+          <a:fillRef idx="3">
+            <a:schemeClr val="accent1"/>
+          </a:fillRef>
+          <a:effectRef idx="2">
+            <a:schemeClr val="accent1"/>
+          </a:effectRef>
+          <a:fontRef idx="minor">
+            <a:schemeClr val="lt1"/>
+          </a:fontRef>
+        </p:style>
+        <p:txBody>
+          <a:bodyPr rtlCol="0" anchor="ctr" wrap="none"/>
+          <a:lstStyle/>
+          <a:p>
+            <a:pPr algn="ctr"/>
+            <a:r>
+              <a:rPr sz="1200" b="1">
+                <a:solidFill>
+                  <a:srgbClr val="FFFFFF"/>
+                </a:solidFill>
+                <a:latin typeface="Garamond"/>
+              </a:rPr>
+              <a:t>13</a:t>
+            </a:r>
+          </a:p>
+        </p:txBody>
+      </p:sp>
+      <p:sp>
+        <p:nvSpPr>
+          <p:cNvPr id="20" name="Rectangle 19"/>
+          <p:cNvSpPr/>
+          <p:nvPr/>
+        </p:nvSpPr>
+        <p:spPr>
+          <a:xfrm>
+            <a:off x="9389173" y="1755648"/>
+            <a:ext cx="658939" cy="457200"/>
+          </a:xfrm>
+          <a:prstGeom prst="rect">
+            <a:avLst/>
+          </a:prstGeom>
+          <a:solidFill>
+            <a:srgbClr val="7B2530"/>
+          </a:solidFill>
+          <a:ln>
+            <a:noFill/>
+          </a:ln>
+          <a:effectLst/>
+        </p:spPr>
+        <p:style>
+          <a:lnRef idx="1">
+            <a:schemeClr val="accent1"/>
+          </a:lnRef>
+          <a:fillRef idx="3">
+            <a:schemeClr val="accent1"/>
+          </a:fillRef>
+          <a:effectRef idx="2">
+            <a:schemeClr val="accent1"/>
+          </a:effectRef>
+          <a:fontRef idx="minor">
+            <a:schemeClr val="lt1"/>
+          </a:fontRef>
+        </p:style>
+        <p:txBody>
+          <a:bodyPr rtlCol="0" anchor="ctr" wrap="none"/>
+          <a:lstStyle/>
+          <a:p>
+            <a:pPr algn="ctr"/>
+            <a:r>
+              <a:rPr sz="1200" b="1">
+                <a:solidFill>
+                  <a:srgbClr val="FFFFFF"/>
+                </a:solidFill>
+                <a:latin typeface="Garamond"/>
+              </a:rPr>
+              <a:t>14</a:t>
+            </a:r>
+          </a:p>
+        </p:txBody>
+      </p:sp>
+      <p:sp>
+        <p:nvSpPr>
+          <p:cNvPr id="21" name="Rectangle 20"/>
+          <p:cNvSpPr/>
+          <p:nvPr/>
+        </p:nvSpPr>
+        <p:spPr>
+          <a:xfrm>
+            <a:off x="10048113" y="1755648"/>
+            <a:ext cx="658939" cy="457200"/>
+          </a:xfrm>
+          <a:prstGeom prst="rect">
+            <a:avLst/>
+          </a:prstGeom>
+          <a:solidFill>
+            <a:srgbClr val="7B2530"/>
+          </a:solidFill>
+          <a:ln>
+            <a:noFill/>
+          </a:ln>
+          <a:effectLst/>
+        </p:spPr>
+        <p:style>
+          <a:lnRef idx="1">
+            <a:schemeClr val="accent1"/>
+          </a:lnRef>
+          <a:fillRef idx="3">
+            <a:schemeClr val="accent1"/>
+          </a:fillRef>
+          <a:effectRef idx="2">
+            <a:schemeClr val="accent1"/>
+          </a:effectRef>
+          <a:fontRef idx="minor">
+            <a:schemeClr val="lt1"/>
+          </a:fontRef>
+        </p:style>
+        <p:txBody>
+          <a:bodyPr rtlCol="0" anchor="ctr" wrap="none"/>
+          <a:lstStyle/>
+          <a:p>
+            <a:pPr algn="ctr"/>
+            <a:r>
+              <a:rPr sz="1200" b="1">
+                <a:solidFill>
+                  <a:srgbClr val="FFFFFF"/>
+                </a:solidFill>
+                <a:latin typeface="Garamond"/>
+              </a:rPr>
+              <a:t>15</a:t>
+            </a:r>
+          </a:p>
+        </p:txBody>
+      </p:sp>
+      <p:sp>
+        <p:nvSpPr>
+          <p:cNvPr id="22" name="Rectangle 21"/>
+          <p:cNvSpPr/>
+          <p:nvPr/>
+        </p:nvSpPr>
+        <p:spPr>
+          <a:xfrm>
+            <a:off x="10707052" y="1755648"/>
+            <a:ext cx="658939" cy="457200"/>
+          </a:xfrm>
+          <a:prstGeom prst="rect">
+            <a:avLst/>
+          </a:prstGeom>
+          <a:solidFill>
+            <a:srgbClr val="7B2530"/>
+          </a:solidFill>
+          <a:ln>
+            <a:noFill/>
+          </a:ln>
+          <a:effectLst/>
+        </p:spPr>
+        <p:style>
+          <a:lnRef idx="1">
+            <a:schemeClr val="accent1"/>
+          </a:lnRef>
+          <a:fillRef idx="3">
+            <a:schemeClr val="accent1"/>
+          </a:fillRef>
+          <a:effectRef idx="2">
+            <a:schemeClr val="accent1"/>
+          </a:effectRef>
+          <a:fontRef idx="minor">
+            <a:schemeClr val="lt1"/>
+          </a:fontRef>
+        </p:style>
+        <p:txBody>
+          <a:bodyPr rtlCol="0" anchor="ctr" wrap="none"/>
+          <a:lstStyle/>
+          <a:p>
+            <a:pPr algn="ctr"/>
+            <a:r>
+              <a:rPr sz="1200" b="1">
+                <a:solidFill>
+                  <a:srgbClr val="FFFFFF"/>
+                </a:solidFill>
+                <a:latin typeface="Garamond"/>
+              </a:rPr>
+              <a:t>16</a:t>
+            </a:r>
+          </a:p>
+        </p:txBody>
+      </p:sp>
+      <p:sp>
+        <p:nvSpPr>
+          <p:cNvPr id="23" name="TextBox 22"/>
+          <p:cNvSpPr txBox="1"/>
+          <p:nvPr/>
+        </p:nvSpPr>
+        <p:spPr>
+          <a:xfrm>
+            <a:off x="822960" y="2340864"/>
+            <a:ext cx="3657600" cy="365760"/>
+          </a:xfrm>
+          <a:prstGeom prst="rect">
+            <a:avLst/>
+          </a:prstGeom>
+          <a:noFill/>
+        </p:spPr>
+        <p:txBody>
+          <a:bodyPr wrap="square" lIns="0" rIns="0" tIns="0" bIns="0">
+            <a:spAutoFit/>
+          </a:bodyPr>
+          <a:lstStyle/>
+          <a:p>
+            <a:pPr algn="l">
+              <a:lnSpc>
+                <a:spcPts val="2250"/>
+              </a:lnSpc>
+              <a:spcAft>
+                <a:spcPts val="0"/>
+              </a:spcAft>
+            </a:pPr>
+            <a:r>
+              <a:rPr sz="1500" b="1" i="0">
+                <a:solidFill>
+                  <a:srgbClr val="26456E"/>
+                </a:solidFill>
+                <a:latin typeface="Garamond"/>
+              </a:rPr>
+              <a:t>Definition 1  (benchmark)</a:t>
+            </a:r>
+          </a:p>
+        </p:txBody>
+      </p:sp>
+      <p:cxnSp>
+        <p:nvCxnSpPr>
+          <p:cNvPr id="24" name="Connector 23"/>
+          <p:cNvCxnSpPr/>
+          <p:nvPr/>
+        </p:nvCxnSpPr>
+        <p:spPr>
+          <a:xfrm>
+            <a:off x="822960" y="2743200"/>
+            <a:ext cx="10543032" cy="0"/>
+          </a:xfrm>
+          <a:prstGeom prst="line">
+            <a:avLst/>
+          </a:prstGeom>
+          <a:ln w="12700">
+            <a:solidFill>
+              <a:srgbClr val="1A2430"/>
+            </a:solidFill>
+          </a:ln>
+        </p:spPr>
+        <p:style>
+          <a:lnRef idx="2">
+            <a:schemeClr val="accent1"/>
+          </a:lnRef>
+          <a:fillRef idx="0">
+            <a:schemeClr val="accent1"/>
+          </a:fillRef>
+          <a:effectRef idx="1">
+            <a:schemeClr val="accent1"/>
+          </a:effectRef>
+          <a:fontRef idx="minor">
+            <a:schemeClr val="tx1"/>
+          </a:fontRef>
+        </p:style>
+      </p:cxnSp>
+      <p:sp>
+        <p:nvSpPr>
+          <p:cNvPr id="25" name="TextBox 24"/>
+          <p:cNvSpPr txBox="1"/>
+          <p:nvPr/>
+        </p:nvSpPr>
+        <p:spPr>
+          <a:xfrm>
+            <a:off x="1005840" y="2871216"/>
+            <a:ext cx="1463040" cy="384048"/>
+          </a:xfrm>
+          <a:prstGeom prst="rect">
+            <a:avLst/>
+          </a:prstGeom>
+          <a:noFill/>
+        </p:spPr>
+        <p:txBody>
+          <a:bodyPr wrap="square" lIns="0" rIns="0" tIns="0" bIns="0">
+            <a:spAutoFit/>
+          </a:bodyPr>
+          <a:lstStyle/>
+          <a:p>
+            <a:pPr algn="l">
+              <a:lnSpc>
+                <a:spcPts val="1950"/>
+              </a:lnSpc>
+              <a:spcAft>
+                <a:spcPts val="0"/>
+              </a:spcAft>
+            </a:pPr>
+            <a:r>
+              <a:rPr sz="1300" b="1" i="0">
+                <a:solidFill>
+                  <a:srgbClr val="1F3864"/>
+                </a:solidFill>
+                <a:latin typeface="Garamond"/>
+              </a:rPr>
+              <a:t>Teacher</a:t>
+            </a:r>
+          </a:p>
+        </p:txBody>
+      </p:sp>
+      <p:sp>
+        <p:nvSpPr>
+          <p:cNvPr id="26" name="TextBox 25"/>
+          <p:cNvSpPr txBox="1"/>
+          <p:nvPr/>
+        </p:nvSpPr>
+        <p:spPr>
+          <a:xfrm>
+            <a:off x="2651760" y="2871216"/>
+            <a:ext cx="8503920" cy="384048"/>
+          </a:xfrm>
+          <a:prstGeom prst="rect">
+            <a:avLst/>
+          </a:prstGeom>
+          <a:noFill/>
+        </p:spPr>
+        <p:txBody>
+          <a:bodyPr wrap="square" lIns="0" rIns="0" tIns="0" bIns="0">
+            <a:spAutoFit/>
+          </a:bodyPr>
+          <a:lstStyle/>
+          <a:p>
+            <a:pPr algn="l">
+              <a:lnSpc>
+                <a:spcPts val="1950"/>
+              </a:lnSpc>
+              <a:spcAft>
+                <a:spcPts val="0"/>
+              </a:spcAft>
+            </a:pPr>
+            <a:r>
+              <a:rPr sz="1300" b="0" i="0">
+                <a:solidFill>
+                  <a:srgbClr val="1A2430"/>
+                </a:solidFill>
+                <a:latin typeface="Garamond"/>
+              </a:rPr>
+              <a:t>teaching, with a bachelor’s degree, in at least two year-1 interviews</a:t>
+            </a:r>
+          </a:p>
+        </p:txBody>
+      </p:sp>
+      <p:sp>
+        <p:nvSpPr>
+          <p:cNvPr id="27" name="TextBox 26"/>
+          <p:cNvSpPr txBox="1"/>
+          <p:nvPr/>
+        </p:nvSpPr>
+        <p:spPr>
+          <a:xfrm>
+            <a:off x="1005840" y="3273552"/>
+            <a:ext cx="1463040" cy="384048"/>
+          </a:xfrm>
+          <a:prstGeom prst="rect">
+            <a:avLst/>
+          </a:prstGeom>
+          <a:noFill/>
+        </p:spPr>
+        <p:txBody>
+          <a:bodyPr wrap="square" lIns="0" rIns="0" tIns="0" bIns="0">
+            <a:spAutoFit/>
+          </a:bodyPr>
+          <a:lstStyle/>
+          <a:p>
+            <a:pPr algn="l">
+              <a:lnSpc>
+                <a:spcPts val="1950"/>
+              </a:lnSpc>
+              <a:spcAft>
+                <a:spcPts val="0"/>
+              </a:spcAft>
+            </a:pPr>
+            <a:r>
+              <a:rPr sz="1300" b="1" i="0">
+                <a:solidFill>
+                  <a:srgbClr val="1F3864"/>
+                </a:solidFill>
+                <a:latin typeface="Garamond"/>
+              </a:rPr>
+              <a:t>Stayer</a:t>
+            </a:r>
+          </a:p>
+        </p:txBody>
+      </p:sp>
+      <p:sp>
+        <p:nvSpPr>
+          <p:cNvPr id="28" name="TextBox 27"/>
+          <p:cNvSpPr txBox="1"/>
+          <p:nvPr/>
+        </p:nvSpPr>
+        <p:spPr>
+          <a:xfrm>
+            <a:off x="2651760" y="3273552"/>
+            <a:ext cx="8503920" cy="384048"/>
+          </a:xfrm>
+          <a:prstGeom prst="rect">
+            <a:avLst/>
+          </a:prstGeom>
+          <a:noFill/>
+        </p:spPr>
+        <p:txBody>
+          <a:bodyPr wrap="square" lIns="0" rIns="0" tIns="0" bIns="0">
+            <a:spAutoFit/>
+          </a:bodyPr>
+          <a:lstStyle/>
+          <a:p>
+            <a:pPr algn="l">
+              <a:lnSpc>
+                <a:spcPts val="1950"/>
+              </a:lnSpc>
+              <a:spcAft>
+                <a:spcPts val="0"/>
+              </a:spcAft>
+            </a:pPr>
+            <a:r>
+              <a:rPr sz="1300" b="0" i="0">
+                <a:solidFill>
+                  <a:srgbClr val="1A2430"/>
+                </a:solidFill>
+                <a:latin typeface="Garamond"/>
+              </a:rPr>
+              <a:t>teaching in at least one year-2 interview</a:t>
+            </a:r>
+          </a:p>
+        </p:txBody>
+      </p:sp>
+      <p:sp>
+        <p:nvSpPr>
+          <p:cNvPr id="29" name="TextBox 28"/>
+          <p:cNvSpPr txBox="1"/>
+          <p:nvPr/>
+        </p:nvSpPr>
+        <p:spPr>
+          <a:xfrm>
+            <a:off x="1005840" y="3675888"/>
+            <a:ext cx="1463040" cy="384048"/>
+          </a:xfrm>
+          <a:prstGeom prst="rect">
+            <a:avLst/>
+          </a:prstGeom>
+          <a:noFill/>
+        </p:spPr>
+        <p:txBody>
+          <a:bodyPr wrap="square" lIns="0" rIns="0" tIns="0" bIns="0">
+            <a:spAutoFit/>
+          </a:bodyPr>
+          <a:lstStyle/>
+          <a:p>
+            <a:pPr algn="l">
+              <a:lnSpc>
+                <a:spcPts val="1950"/>
+              </a:lnSpc>
+              <a:spcAft>
+                <a:spcPts val="0"/>
+              </a:spcAft>
+            </a:pPr>
+            <a:r>
+              <a:rPr sz="1300" b="1" i="0">
+                <a:solidFill>
+                  <a:srgbClr val="7B2530"/>
+                </a:solidFill>
+                <a:latin typeface="Garamond"/>
+              </a:rPr>
+              <a:t>Leaver</a:t>
+            </a:r>
+          </a:p>
+        </p:txBody>
+      </p:sp>
+      <p:sp>
+        <p:nvSpPr>
+          <p:cNvPr id="30" name="TextBox 29"/>
+          <p:cNvSpPr txBox="1"/>
+          <p:nvPr/>
+        </p:nvSpPr>
+        <p:spPr>
+          <a:xfrm>
+            <a:off x="2651760" y="3675888"/>
+            <a:ext cx="8503920" cy="384048"/>
+          </a:xfrm>
+          <a:prstGeom prst="rect">
+            <a:avLst/>
+          </a:prstGeom>
+          <a:noFill/>
+        </p:spPr>
+        <p:txBody>
+          <a:bodyPr wrap="square" lIns="0" rIns="0" tIns="0" bIns="0">
+            <a:spAutoFit/>
+          </a:bodyPr>
+          <a:lstStyle/>
+          <a:p>
+            <a:pPr algn="l">
+              <a:lnSpc>
+                <a:spcPts val="1950"/>
+              </a:lnSpc>
+              <a:spcAft>
+                <a:spcPts val="0"/>
+              </a:spcAft>
+            </a:pPr>
+            <a:r>
+              <a:rPr sz="1300" b="0" i="0">
+                <a:solidFill>
+                  <a:srgbClr val="1A2430"/>
+                </a:solidFill>
+                <a:latin typeface="Garamond"/>
+              </a:rPr>
+              <a:t>never teaching in year 2, given two or more interviews, one outside the summer</a:t>
+            </a:r>
+          </a:p>
+        </p:txBody>
+      </p:sp>
+      <p:cxnSp>
+        <p:nvCxnSpPr>
+          <p:cNvPr id="31" name="Connector 30"/>
+          <p:cNvCxnSpPr/>
+          <p:nvPr/>
+        </p:nvCxnSpPr>
+        <p:spPr>
+          <a:xfrm>
+            <a:off x="822960" y="4123944"/>
+            <a:ext cx="10543032" cy="0"/>
+          </a:xfrm>
+          <a:prstGeom prst="line">
+            <a:avLst/>
+          </a:prstGeom>
+          <a:ln w="12700">
+            <a:solidFill>
+              <a:srgbClr val="1A2430"/>
+            </a:solidFill>
+          </a:ln>
+        </p:spPr>
+        <p:style>
+          <a:lnRef idx="2">
+            <a:schemeClr val="accent1"/>
+          </a:lnRef>
+          <a:fillRef idx="0">
+            <a:schemeClr val="accent1"/>
+          </a:fillRef>
+          <a:effectRef idx="1">
+            <a:schemeClr val="accent1"/>
+          </a:effectRef>
+          <a:fontRef idx="minor">
+            <a:schemeClr val="tx1"/>
+          </a:fontRef>
+        </p:style>
+      </p:cxnSp>
+      <p:sp>
+        <p:nvSpPr>
+          <p:cNvPr id="32" name="TextBox 31"/>
+          <p:cNvSpPr txBox="1"/>
+          <p:nvPr/>
+        </p:nvSpPr>
+        <p:spPr>
+          <a:xfrm>
+            <a:off x="822960" y="4169664"/>
+            <a:ext cx="5486400" cy="365760"/>
+          </a:xfrm>
+          <a:prstGeom prst="rect">
+            <a:avLst/>
+          </a:prstGeom>
+          <a:noFill/>
+        </p:spPr>
+        <p:txBody>
+          <a:bodyPr wrap="square" lIns="0" rIns="0" tIns="0" bIns="0">
+            <a:spAutoFit/>
+          </a:bodyPr>
+          <a:lstStyle/>
+          <a:p>
+            <a:pPr algn="l">
+              <a:lnSpc>
+                <a:spcPts val="2250"/>
+              </a:lnSpc>
+              <a:spcAft>
+                <a:spcPts val="0"/>
+              </a:spcAft>
+            </a:pPr>
+            <a:r>
+              <a:rPr sz="1500" b="1" i="0">
+                <a:solidFill>
+                  <a:srgbClr val="26456E"/>
+                </a:solidFill>
+                <a:latin typeface="Garamond"/>
+              </a:rPr>
+              <a:t>Alternative measures</a:t>
+            </a:r>
+          </a:p>
+        </p:txBody>
+      </p:sp>
+      <p:sp>
+        <p:nvSpPr>
+          <p:cNvPr id="33" name="TextBox 32"/>
+          <p:cNvSpPr txBox="1"/>
+          <p:nvPr/>
+        </p:nvSpPr>
+        <p:spPr>
+          <a:xfrm>
+            <a:off x="10058400" y="4169664"/>
+            <a:ext cx="1280160" cy="365760"/>
+          </a:xfrm>
+          <a:prstGeom prst="rect">
+            <a:avLst/>
+          </a:prstGeom>
+          <a:noFill/>
+        </p:spPr>
+        <p:txBody>
+          <a:bodyPr wrap="square" lIns="0" rIns="0" tIns="0" bIns="0">
+            <a:spAutoFit/>
+          </a:bodyPr>
+          <a:lstStyle/>
+          <a:p>
+            <a:pPr algn="l">
+              <a:lnSpc>
+                <a:spcPts val="1950"/>
+              </a:lnSpc>
+              <a:spcAft>
+                <a:spcPts val="0"/>
+              </a:spcAft>
+            </a:pPr>
+            <a:r>
+              <a:rPr sz="1300" b="1" i="0">
+                <a:solidFill>
+                  <a:srgbClr val="1A2430"/>
+                </a:solidFill>
+                <a:latin typeface="Garamond"/>
+              </a:rPr>
+              <a:t>2021</a:t>
+            </a:r>
+          </a:p>
+        </p:txBody>
+      </p:sp>
+      <p:cxnSp>
+        <p:nvCxnSpPr>
+          <p:cNvPr id="34" name="Connector 33"/>
+          <p:cNvCxnSpPr/>
+          <p:nvPr/>
+        </p:nvCxnSpPr>
+        <p:spPr>
+          <a:xfrm>
+            <a:off x="822960" y="4553712"/>
+            <a:ext cx="10543032" cy="0"/>
+          </a:xfrm>
+          <a:prstGeom prst="line">
+            <a:avLst/>
+          </a:prstGeom>
+          <a:ln w="7620">
+            <a:solidFill>
+              <a:srgbClr val="1A2430"/>
+            </a:solidFill>
+          </a:ln>
+        </p:spPr>
+        <p:style>
+          <a:lnRef idx="2">
+            <a:schemeClr val="accent1"/>
+          </a:lnRef>
+          <a:fillRef idx="0">
+            <a:schemeClr val="accent1"/>
+          </a:fillRef>
+          <a:effectRef idx="1">
+            <a:schemeClr val="accent1"/>
+          </a:effectRef>
+          <a:fontRef idx="minor">
+            <a:schemeClr val="tx1"/>
+          </a:fontRef>
+        </p:style>
+      </p:cxnSp>
+      <p:sp>
+        <p:nvSpPr>
+          <p:cNvPr id="35" name="TextBox 34"/>
+          <p:cNvSpPr txBox="1"/>
+          <p:nvPr/>
+        </p:nvSpPr>
+        <p:spPr>
+          <a:xfrm>
+            <a:off x="1005840" y="4663440"/>
+            <a:ext cx="5486400" cy="329184"/>
+          </a:xfrm>
+          <a:prstGeom prst="rect">
+            <a:avLst/>
+          </a:prstGeom>
+          <a:noFill/>
+        </p:spPr>
+        <p:txBody>
+          <a:bodyPr wrap="square" lIns="0" rIns="0" tIns="0" bIns="0">
+            <a:spAutoFit/>
+          </a:bodyPr>
+          <a:lstStyle/>
+          <a:p>
+            <a:pPr algn="l">
+              <a:lnSpc>
+                <a:spcPts val="1800"/>
+              </a:lnSpc>
+              <a:spcAft>
+                <a:spcPts val="0"/>
+              </a:spcAft>
+            </a:pPr>
+            <a:r>
+              <a:rPr sz="1200" b="0" i="0">
+                <a:solidFill>
+                  <a:srgbClr val="1A2430"/>
+                </a:solidFill>
+                <a:latin typeface="Garamond"/>
+              </a:rPr>
+              <a:t>Definition 1</a:t>
+            </a:r>
+          </a:p>
+        </p:txBody>
+      </p:sp>
+      <p:sp>
+        <p:nvSpPr>
+          <p:cNvPr id="36" name="TextBox 35"/>
+          <p:cNvSpPr txBox="1"/>
+          <p:nvPr/>
+        </p:nvSpPr>
+        <p:spPr>
+          <a:xfrm>
+            <a:off x="10058400" y="4663440"/>
+            <a:ext cx="1097280" cy="329184"/>
+          </a:xfrm>
+          <a:prstGeom prst="rect">
+            <a:avLst/>
+          </a:prstGeom>
+          <a:noFill/>
+        </p:spPr>
+        <p:txBody>
+          <a:bodyPr wrap="square" lIns="0" rIns="0" tIns="0" bIns="0">
+            <a:spAutoFit/>
+          </a:bodyPr>
+          <a:lstStyle/>
+          <a:p>
+            <a:pPr algn="l">
+              <a:lnSpc>
+                <a:spcPts val="1800"/>
+              </a:lnSpc>
+              <a:spcAft>
+                <a:spcPts val="0"/>
+              </a:spcAft>
+            </a:pPr>
+            <a:r>
+              <a:rPr sz="1200" b="1" i="0">
+                <a:solidFill>
+                  <a:srgbClr val="1A2430"/>
+                </a:solidFill>
+                <a:latin typeface="Garamond"/>
+              </a:rPr>
+              <a:t>12.9</a:t>
+            </a:r>
+          </a:p>
+        </p:txBody>
+      </p:sp>
+      <p:sp>
+        <p:nvSpPr>
+          <p:cNvPr id="37" name="TextBox 36"/>
+          <p:cNvSpPr txBox="1"/>
+          <p:nvPr/>
+        </p:nvSpPr>
+        <p:spPr>
+          <a:xfrm>
+            <a:off x="1005840" y="4992624"/>
+            <a:ext cx="5486400" cy="329184"/>
+          </a:xfrm>
+          <a:prstGeom prst="rect">
+            <a:avLst/>
+          </a:prstGeom>
+          <a:noFill/>
+        </p:spPr>
+        <p:txBody>
+          <a:bodyPr wrap="square" lIns="0" rIns="0" tIns="0" bIns="0">
+            <a:spAutoFit/>
+          </a:bodyPr>
+          <a:lstStyle/>
+          <a:p>
+            <a:pPr algn="l">
+              <a:lnSpc>
+                <a:spcPts val="1800"/>
+              </a:lnSpc>
+              <a:spcAft>
+                <a:spcPts val="0"/>
+              </a:spcAft>
+            </a:pPr>
+            <a:r>
+              <a:rPr sz="1200" b="0" i="0">
+                <a:solidFill>
+                  <a:srgbClr val="1A2430"/>
+                </a:solidFill>
+                <a:latin typeface="Garamond"/>
+              </a:rPr>
+              <a:t>Annual recall</a:t>
+            </a:r>
+          </a:p>
+        </p:txBody>
+      </p:sp>
+      <p:sp>
+        <p:nvSpPr>
+          <p:cNvPr id="38" name="TextBox 37"/>
+          <p:cNvSpPr txBox="1"/>
+          <p:nvPr/>
+        </p:nvSpPr>
+        <p:spPr>
+          <a:xfrm>
+            <a:off x="10058400" y="4992624"/>
+            <a:ext cx="1097280" cy="329184"/>
+          </a:xfrm>
+          <a:prstGeom prst="rect">
+            <a:avLst/>
+          </a:prstGeom>
+          <a:noFill/>
+        </p:spPr>
+        <p:txBody>
+          <a:bodyPr wrap="square" lIns="0" rIns="0" tIns="0" bIns="0">
+            <a:spAutoFit/>
+          </a:bodyPr>
+          <a:lstStyle/>
+          <a:p>
+            <a:pPr algn="l">
+              <a:lnSpc>
+                <a:spcPts val="1800"/>
+              </a:lnSpc>
+              <a:spcAft>
+                <a:spcPts val="0"/>
+              </a:spcAft>
+            </a:pPr>
+            <a:r>
+              <a:rPr sz="1200" b="1" i="0">
+                <a:solidFill>
+                  <a:srgbClr val="1A2430"/>
+                </a:solidFill>
+                <a:latin typeface="Garamond"/>
+              </a:rPr>
+              <a:t>7.1</a:t>
+            </a:r>
+          </a:p>
+        </p:txBody>
+      </p:sp>
+      <p:sp>
+        <p:nvSpPr>
+          <p:cNvPr id="39" name="TextBox 38"/>
+          <p:cNvSpPr txBox="1"/>
+          <p:nvPr/>
+        </p:nvSpPr>
+        <p:spPr>
+          <a:xfrm>
+            <a:off x="1005840" y="5321808"/>
+            <a:ext cx="5486400" cy="329184"/>
+          </a:xfrm>
+          <a:prstGeom prst="rect">
+            <a:avLst/>
+          </a:prstGeom>
+          <a:noFill/>
+        </p:spPr>
+        <p:txBody>
+          <a:bodyPr wrap="square" lIns="0" rIns="0" tIns="0" bIns="0">
+            <a:spAutoFit/>
+          </a:bodyPr>
+          <a:lstStyle/>
+          <a:p>
+            <a:pPr algn="l">
+              <a:lnSpc>
+                <a:spcPts val="1800"/>
+              </a:lnSpc>
+              <a:spcAft>
+                <a:spcPts val="0"/>
+              </a:spcAft>
+            </a:pPr>
+            <a:r>
+              <a:rPr sz="1200" b="0" i="0">
+                <a:solidFill>
+                  <a:srgbClr val="1A2430"/>
+                </a:solidFill>
+                <a:latin typeface="Garamond"/>
+              </a:rPr>
+              <a:t>Occupation pair</a:t>
+            </a:r>
+          </a:p>
+        </p:txBody>
+      </p:sp>
+      <p:sp>
+        <p:nvSpPr>
+          <p:cNvPr id="40" name="TextBox 39"/>
+          <p:cNvSpPr txBox="1"/>
+          <p:nvPr/>
+        </p:nvSpPr>
+        <p:spPr>
+          <a:xfrm>
+            <a:off x="10058400" y="5321808"/>
+            <a:ext cx="1097280" cy="329184"/>
+          </a:xfrm>
+          <a:prstGeom prst="rect">
+            <a:avLst/>
+          </a:prstGeom>
+          <a:noFill/>
+        </p:spPr>
+        <p:txBody>
+          <a:bodyPr wrap="square" lIns="0" rIns="0" tIns="0" bIns="0">
+            <a:spAutoFit/>
+          </a:bodyPr>
+          <a:lstStyle/>
+          <a:p>
+            <a:pPr algn="l">
+              <a:lnSpc>
+                <a:spcPts val="1800"/>
+              </a:lnSpc>
+              <a:spcAft>
+                <a:spcPts val="0"/>
+              </a:spcAft>
+            </a:pPr>
+            <a:r>
+              <a:rPr sz="1200" b="1" i="0">
+                <a:solidFill>
+                  <a:srgbClr val="1A2430"/>
+                </a:solidFill>
+                <a:latin typeface="Garamond"/>
+              </a:rPr>
+              <a:t>5.0</a:t>
+            </a:r>
+          </a:p>
+        </p:txBody>
+      </p:sp>
+      <p:sp>
+        <p:nvSpPr>
+          <p:cNvPr id="41" name="TextBox 40"/>
+          <p:cNvSpPr txBox="1"/>
+          <p:nvPr/>
+        </p:nvSpPr>
+        <p:spPr>
+          <a:xfrm>
+            <a:off x="1005840" y="5650992"/>
+            <a:ext cx="5486400" cy="329184"/>
+          </a:xfrm>
+          <a:prstGeom prst="rect">
+            <a:avLst/>
+          </a:prstGeom>
+          <a:noFill/>
+        </p:spPr>
+        <p:txBody>
+          <a:bodyPr wrap="square" lIns="0" rIns="0" tIns="0" bIns="0">
+            <a:spAutoFit/>
+          </a:bodyPr>
+          <a:lstStyle/>
+          <a:p>
+            <a:pPr algn="l">
+              <a:lnSpc>
+                <a:spcPts val="1800"/>
+              </a:lnSpc>
+              <a:spcAft>
+                <a:spcPts val="0"/>
+              </a:spcAft>
+            </a:pPr>
+            <a:r>
+              <a:rPr sz="1200" b="0" i="0">
+                <a:solidFill>
+                  <a:srgbClr val="1A2430"/>
+                </a:solidFill>
+                <a:latin typeface="Garamond"/>
+              </a:rPr>
+              <a:t>Month pairs</a:t>
+            </a:r>
+          </a:p>
+        </p:txBody>
+      </p:sp>
+      <p:sp>
+        <p:nvSpPr>
+          <p:cNvPr id="42" name="TextBox 41"/>
+          <p:cNvSpPr txBox="1"/>
+          <p:nvPr/>
+        </p:nvSpPr>
+        <p:spPr>
+          <a:xfrm>
+            <a:off x="10058400" y="5650992"/>
+            <a:ext cx="1097280" cy="329184"/>
+          </a:xfrm>
+          <a:prstGeom prst="rect">
+            <a:avLst/>
+          </a:prstGeom>
+          <a:noFill/>
+        </p:spPr>
+        <p:txBody>
+          <a:bodyPr wrap="square" lIns="0" rIns="0" tIns="0" bIns="0">
+            <a:spAutoFit/>
+          </a:bodyPr>
+          <a:lstStyle/>
+          <a:p>
+            <a:pPr algn="l">
+              <a:lnSpc>
+                <a:spcPts val="1800"/>
+              </a:lnSpc>
+              <a:spcAft>
+                <a:spcPts val="0"/>
+              </a:spcAft>
+            </a:pPr>
+            <a:r>
+              <a:rPr sz="1200" b="1" i="0">
+                <a:solidFill>
+                  <a:srgbClr val="1A2430"/>
+                </a:solidFill>
+                <a:latin typeface="Garamond"/>
+              </a:rPr>
+              <a:t>16.0</a:t>
+            </a:r>
+          </a:p>
+        </p:txBody>
+      </p:sp>
+      <p:sp>
+        <p:nvSpPr>
+          <p:cNvPr id="43" name="TextBox 42"/>
+          <p:cNvSpPr txBox="1"/>
+          <p:nvPr/>
+        </p:nvSpPr>
+        <p:spPr>
+          <a:xfrm>
+            <a:off x="1005840" y="5980176"/>
+            <a:ext cx="5486400" cy="329184"/>
+          </a:xfrm>
+          <a:prstGeom prst="rect">
+            <a:avLst/>
+          </a:prstGeom>
+          <a:noFill/>
+        </p:spPr>
+        <p:txBody>
+          <a:bodyPr wrap="square" lIns="0" rIns="0" tIns="0" bIns="0">
+            <a:spAutoFit/>
+          </a:bodyPr>
+          <a:lstStyle/>
+          <a:p>
+            <a:pPr algn="l">
+              <a:lnSpc>
+                <a:spcPts val="1800"/>
+              </a:lnSpc>
+              <a:spcAft>
+                <a:spcPts val="0"/>
+              </a:spcAft>
+            </a:pPr>
+            <a:r>
+              <a:rPr sz="1200" b="0" i="0">
+                <a:solidFill>
+                  <a:srgbClr val="1A2430"/>
+                </a:solidFill>
+                <a:latin typeface="Garamond"/>
+              </a:rPr>
+              <a:t>Any sighting</a:t>
+            </a:r>
+          </a:p>
+        </p:txBody>
+      </p:sp>
+      <p:sp>
+        <p:nvSpPr>
+          <p:cNvPr id="44" name="TextBox 43"/>
+          <p:cNvSpPr txBox="1"/>
+          <p:nvPr/>
+        </p:nvSpPr>
+        <p:spPr>
+          <a:xfrm>
+            <a:off x="10058400" y="5980176"/>
+            <a:ext cx="1097280" cy="329184"/>
+          </a:xfrm>
+          <a:prstGeom prst="rect">
+            <a:avLst/>
+          </a:prstGeom>
+          <a:noFill/>
+        </p:spPr>
+        <p:txBody>
+          <a:bodyPr wrap="square" lIns="0" rIns="0" tIns="0" bIns="0">
+            <a:spAutoFit/>
+          </a:bodyPr>
+          <a:lstStyle/>
+          <a:p>
+            <a:pPr algn="l">
+              <a:lnSpc>
+                <a:spcPts val="1800"/>
+              </a:lnSpc>
+              <a:spcAft>
+                <a:spcPts val="0"/>
+              </a:spcAft>
+            </a:pPr>
+            <a:r>
+              <a:rPr sz="1200" b="1" i="0">
+                <a:solidFill>
+                  <a:srgbClr val="1A2430"/>
+                </a:solidFill>
+                <a:latin typeface="Garamond"/>
+              </a:rPr>
+              <a:t>19.4</a:t>
+            </a:r>
+          </a:p>
+        </p:txBody>
+      </p:sp>
+      <p:sp>
+        <p:nvSpPr>
+          <p:cNvPr id="45" name="TextBox 44"/>
+          <p:cNvSpPr txBox="1"/>
+          <p:nvPr/>
+        </p:nvSpPr>
+        <p:spPr>
+          <a:xfrm>
+            <a:off x="1005840" y="6309360"/>
+            <a:ext cx="5486400" cy="329184"/>
+          </a:xfrm>
+          <a:prstGeom prst="rect">
+            <a:avLst/>
+          </a:prstGeom>
+          <a:noFill/>
+        </p:spPr>
+        <p:txBody>
+          <a:bodyPr wrap="square" lIns="0" rIns="0" tIns="0" bIns="0">
+            <a:spAutoFit/>
+          </a:bodyPr>
+          <a:lstStyle/>
+          <a:p>
+            <a:pPr algn="l">
+              <a:lnSpc>
+                <a:spcPts val="1800"/>
+              </a:lnSpc>
+              <a:spcAft>
+                <a:spcPts val="0"/>
+              </a:spcAft>
+            </a:pPr>
+            <a:r>
+              <a:rPr sz="1200" b="0" i="0">
+                <a:solidFill>
+                  <a:srgbClr val="1A2430"/>
+                </a:solidFill>
+                <a:latin typeface="Garamond"/>
+              </a:rPr>
+              <a:t>NCES follow-up survey</a:t>
+            </a:r>
+          </a:p>
+        </p:txBody>
+      </p:sp>
+      <p:sp>
+        <p:nvSpPr>
+          <p:cNvPr id="46" name="TextBox 45"/>
+          <p:cNvSpPr txBox="1"/>
+          <p:nvPr/>
+        </p:nvSpPr>
+        <p:spPr>
+          <a:xfrm>
+            <a:off x="10058400" y="6309360"/>
+            <a:ext cx="1097280" cy="329184"/>
+          </a:xfrm>
+          <a:prstGeom prst="rect">
+            <a:avLst/>
+          </a:prstGeom>
+          <a:noFill/>
+        </p:spPr>
+        <p:txBody>
+          <a:bodyPr wrap="square" lIns="0" rIns="0" tIns="0" bIns="0">
+            <a:spAutoFit/>
+          </a:bodyPr>
+          <a:lstStyle/>
+          <a:p>
+            <a:pPr algn="l">
+              <a:lnSpc>
+                <a:spcPts val="1800"/>
+              </a:lnSpc>
+              <a:spcAft>
+                <a:spcPts val="0"/>
+              </a:spcAft>
+            </a:pPr>
+            <a:r>
+              <a:rPr sz="1200" b="1" i="0">
+                <a:solidFill>
+                  <a:srgbClr val="1A2430"/>
+                </a:solidFill>
+                <a:latin typeface="Garamond"/>
+              </a:rPr>
+              <a:t>8.0</a:t>
+            </a:r>
+          </a:p>
+        </p:txBody>
+      </p:sp>
+      <p:cxnSp>
+        <p:nvCxnSpPr>
+          <p:cNvPr id="47" name="Connector 46"/>
+          <p:cNvCxnSpPr/>
+          <p:nvPr/>
+        </p:nvCxnSpPr>
+        <p:spPr>
+          <a:xfrm>
+            <a:off x="822960" y="6656832"/>
+            <a:ext cx="10543032" cy="0"/>
+          </a:xfrm>
+          <a:prstGeom prst="line">
+            <a:avLst/>
+          </a:prstGeom>
+          <a:ln w="12700">
+            <a:solidFill>
+              <a:srgbClr val="1A2430"/>
+            </a:solidFill>
+          </a:ln>
+        </p:spPr>
+        <p:style>
+          <a:lnRef idx="2">
+            <a:schemeClr val="accent1"/>
+          </a:lnRef>
+          <a:fillRef idx="0">
+            <a:schemeClr val="accent1"/>
+          </a:fillRef>
+          <a:effectRef idx="1">
+            <a:schemeClr val="accent1"/>
+          </a:effectRef>
+          <a:fontRef idx="minor">
+            <a:schemeClr val="tx1"/>
+          </a:fontRef>
+        </p:style>
+      </p:cxnSp>
+    </p:spTree>
+  </p:cSld>
+  <p:clrMapOvr>
+    <a:masterClrMapping/>
+  </p:clrMapOvr>
+</p:sld>
+</file>
+
+<file path=ppt/slides/slide41.xml><?xml version="1.0" encoding="utf-8"?>
+<p:sld xmlns:a="http://schemas.openxmlformats.org/drawingml/2006/main" xmlns:p="http://schemas.openxmlformats.org/presentationml/2006/main" xmlns:r="http://schemas.openxmlformats.org/officeDocument/2006/relationships">
+  <p:cSld>
+    <p:spTree>
+      <p:nvGrpSpPr>
+        <p:cNvPr id="1" name=""/>
+        <p:cNvGrpSpPr/>
+        <p:nvPr/>
+      </p:nvGrpSpPr>
+      <p:grpSpPr/>
+      <p:sp>
+        <p:nvSpPr>
+          <p:cNvPr id="2" name="Rectangle 1"/>
+          <p:cNvSpPr/>
+          <p:nvPr/>
+        </p:nvSpPr>
+        <p:spPr>
+          <a:xfrm>
+            <a:off x="0" y="-27432"/>
+            <a:ext cx="12198096" cy="594360"/>
+          </a:xfrm>
+          <a:prstGeom prst="rect">
+            <a:avLst/>
+          </a:prstGeom>
+          <a:solidFill>
+            <a:srgbClr val="00549F"/>
+          </a:solidFill>
+          <a:ln>
+            <a:noFill/>
+          </a:ln>
+          <a:effectLst/>
+        </p:spPr>
+        <p:style>
+          <a:lnRef idx="1">
+            <a:schemeClr val="accent1"/>
+          </a:lnRef>
+          <a:fillRef idx="3">
+            <a:schemeClr val="accent1"/>
+          </a:fillRef>
+          <a:effectRef idx="2">
+            <a:schemeClr val="accent1"/>
+          </a:effectRef>
+          <a:fontRef idx="minor">
+            <a:schemeClr val="lt1"/>
+          </a:fontRef>
+        </p:style>
+        <p:txBody>
+          <a:bodyPr rtlCol="0" anchor="ctr"/>
+          <a:lstStyle/>
+          <a:p>
+            <a:pPr algn="ctr"/>
+          </a:p>
+        </p:txBody>
+      </p:sp>
+      <p:sp>
+        <p:nvSpPr>
+          <p:cNvPr id="3" name="TextBox 2"/>
+          <p:cNvSpPr txBox="1"/>
+          <p:nvPr/>
+        </p:nvSpPr>
+        <p:spPr>
+          <a:xfrm>
+            <a:off x="685800" y="868680"/>
+            <a:ext cx="9875520" cy="548640"/>
+          </a:xfrm>
+          <a:prstGeom prst="rect">
+            <a:avLst/>
+          </a:prstGeom>
+          <a:noFill/>
+        </p:spPr>
+        <p:txBody>
+          <a:bodyPr wrap="square" lIns="0" rIns="0" tIns="0" bIns="0"/>
+          <a:lstStyle/>
+          <a:p>
+            <a:pPr algn="l"/>
+            <a:r>
+              <a:rPr sz="2800" b="1">
+                <a:solidFill>
+                  <a:srgbClr val="26456E"/>
+                </a:solidFill>
+                <a:latin typeface="Garamond"/>
+              </a:rPr>
+              <a:t>All the series, one axis</a:t>
+            </a:r>
+          </a:p>
+        </p:txBody>
+      </p:sp>
+      <p:pic>
+        <p:nvPicPr>
+          <p:cNvPr id="4" name="Picture 3" descr="v_allseries.png"/>
+          <p:cNvPicPr>
+            <a:picLocks noChangeAspect="1"/>
+          </p:cNvPicPr>
+          <p:nvPr/>
+        </p:nvPicPr>
+        <p:blipFill>
+          <a:blip r:embed="rId2"/>
+          <a:stretch>
+            <a:fillRect/>
+          </a:stretch>
+        </p:blipFill>
+        <p:spPr>
+          <a:xfrm>
+            <a:off x="594360" y="1481328"/>
+            <a:ext cx="11018520" cy="5418944"/>
+          </a:xfrm>
+          <a:prstGeom prst="rect">
+            <a:avLst/>
+          </a:prstGeom>
+        </p:spPr>
+      </p:pic>
+    </p:spTree>
+  </p:cSld>
+  <p:clrMapOvr>
+    <a:masterClrMapping/>
+  </p:clrMapOvr>
+</p:sld>
+</file>
+
+<file path=ppt/slides/slide42.xml><?xml version="1.0" encoding="utf-8"?>
 <p:sld xmlns:a="http://schemas.openxmlformats.org/drawingml/2006/main" xmlns:p="http://schemas.openxmlformats.org/presentationml/2006/main" xmlns:r="http://schemas.openxmlformats.org/officeDocument/2006/relationships">
   <p:cSld>
     <p:spTree>

--- a/report/Proyect_US_v4.pptx
+++ b/report/Proyect_US_v4.pptx
@@ -12,14 +12,15 @@
     <p:sldId id="272" r:id="rId3"/>
     <p:sldId id="290" r:id="rId36"/>
     <p:sldId id="296" r:id="rId42"/>
+    <p:sldId id="299" r:id="rId45"/>
     <p:sldId id="297" r:id="rId43"/>
     <p:sldId id="256" r:id="rId5"/>
     <p:sldId id="298" r:id="rId44"/>
-    <p:sldId id="299" r:id="rId45"/>
     <p:sldId id="300" r:id="rId46"/>
     <p:sldId id="301" r:id="rId47"/>
     <p:sldId id="302" r:id="rId48"/>
     <p:sldId id="303" r:id="rId49"/>
+    <p:sldId id="304" r:id="rId50"/>
     <p:sldId id="291" r:id="rId37"/>
     <p:sldId id="258" r:id="rId6"/>
     <p:sldId id="259" r:id="rId7"/>
@@ -48,7 +49,7 @@
     <p:sldId id="285" r:id="rId26"/>
     <p:sldId id="267" r:id="rId27"/>
     <p:sldId id="287" r:id="rId28"/>
-    <p:sldId id="304" r:id="rId50"/>
+    <p:sldId id="305" r:id="rId51"/>
   </p:sldIdLst>
   <p:sldSz cx="12192000" cy="6858000"/>
   <p:notesSz cx="6858000" cy="12192000"/>
@@ -7511,20 +7512,20 @@
           <a:p>
             <a:pPr algn="just">
               <a:lnSpc>
-                <a:spcPts val="2550"/>
+                <a:spcPts val="2400"/>
               </a:lnSpc>
               <a:spcAft>
                 <a:spcPts val="0"/>
               </a:spcAft>
             </a:pPr>
             <a:r>
-              <a:rPr sz="1700" b="0" i="0">
+              <a:rPr sz="1600" b="0" i="0">
                 <a:solidFill>
                   <a:srgbClr val="1A2430"/>
                 </a:solidFill>
                 <a:latin typeface="Garamond"/>
               </a:rPr>
-              <a:t>The monthly household survey behind the official employment statistics: about 60,000 households, the civilian non-institutional population.</a:t>
+              <a:t>The monthly household survey behind the official employment statistics: some 110,000 persons each month. Every March, a supplement asks about the previous calendar year.</a:t>
             </a:r>
           </a:p>
         </p:txBody>
@@ -7537,7 +7538,7 @@
         </p:nvCxnSpPr>
         <p:spPr>
           <a:xfrm>
-            <a:off x="822960" y="2697480"/>
+            <a:off x="822960" y="2395728"/>
             <a:ext cx="10543032" cy="0"/>
           </a:xfrm>
           <a:prstGeom prst="line">
@@ -7572,8 +7573,8 @@
         </p:nvSpPr>
         <p:spPr>
           <a:xfrm>
-            <a:off x="6492240" y="2816352"/>
-            <a:ext cx="1828800" cy="365760"/>
+            <a:off x="960120" y="2487168"/>
+            <a:ext cx="1645920" cy="274320"/>
           </a:xfrm>
           <a:prstGeom prst="rect">
             <a:avLst/>
@@ -7586,22 +7587,22 @@
           </a:bodyPr>
           <a:lstStyle/>
           <a:p>
-            <a:pPr algn="r">
+            <a:pPr algn="l">
               <a:lnSpc>
-                <a:spcPts val="1950"/>
+                <a:spcPts val="1800"/>
               </a:lnSpc>
               <a:spcAft>
                 <a:spcPts val="0"/>
               </a:spcAft>
             </a:pPr>
             <a:r>
-              <a:rPr sz="1300" b="1" i="0">
+              <a:rPr sz="1200" b="1" i="0">
                 <a:solidFill>
                   <a:srgbClr val="1A2430"/>
                 </a:solidFill>
                 <a:latin typeface="Garamond"/>
               </a:rPr>
-              <a:t>Teachers</a:t>
+              <a:t>Supplement</a:t>
             </a:r>
           </a:p>
         </p:txBody>
@@ -7614,8 +7615,8 @@
         </p:nvSpPr>
         <p:spPr>
           <a:xfrm>
-            <a:off x="8732520" y="2816352"/>
-            <a:ext cx="2331720" cy="365760"/>
+            <a:off x="1783080" y="2487168"/>
+            <a:ext cx="1600200" cy="274320"/>
           </a:xfrm>
           <a:prstGeom prst="rect">
             <a:avLst/>
@@ -7630,33 +7631,201 @@
           <a:p>
             <a:pPr algn="r">
               <a:lnSpc>
-                <a:spcPts val="1950"/>
+                <a:spcPts val="1800"/>
               </a:lnSpc>
               <a:spcAft>
                 <a:spcPts val="0"/>
               </a:spcAft>
             </a:pPr>
             <a:r>
-              <a:rPr sz="1300" b="1" i="0">
+              <a:rPr sz="1200" b="1" i="0">
                 <a:solidFill>
                   <a:srgbClr val="1A2430"/>
                 </a:solidFill>
                 <a:latin typeface="Garamond"/>
               </a:rPr>
-              <a:t>Other graduates</a:t>
+              <a:t>Persons</a:t>
+            </a:r>
+          </a:p>
+        </p:txBody>
+      </p:sp>
+      <p:sp>
+        <p:nvSpPr>
+          <p:cNvPr id="8" name="TextBox 7"/>
+          <p:cNvSpPr txBox="1"/>
+          <p:nvPr/>
+        </p:nvSpPr>
+        <p:spPr>
+          <a:xfrm>
+            <a:off x="3474720" y="2487168"/>
+            <a:ext cx="1463040" cy="274320"/>
+          </a:xfrm>
+          <a:prstGeom prst="rect">
+            <a:avLst/>
+          </a:prstGeom>
+          <a:noFill/>
+        </p:spPr>
+        <p:txBody>
+          <a:bodyPr wrap="square" lIns="0" rIns="0" tIns="0" bIns="0">
+            <a:spAutoFit/>
+          </a:bodyPr>
+          <a:lstStyle/>
+          <a:p>
+            <a:pPr algn="r">
+              <a:lnSpc>
+                <a:spcPts val="1800"/>
+              </a:lnSpc>
+              <a:spcAft>
+                <a:spcPts val="0"/>
+              </a:spcAft>
+            </a:pPr>
+            <a:r>
+              <a:rPr sz="1200" b="1" i="0">
+                <a:solidFill>
+                  <a:srgbClr val="1A2430"/>
+                </a:solidFill>
+                <a:latin typeface="Garamond"/>
+              </a:rPr>
+              <a:t>Teachers</a:t>
+            </a:r>
+          </a:p>
+        </p:txBody>
+      </p:sp>
+      <p:sp>
+        <p:nvSpPr>
+          <p:cNvPr id="9" name="TextBox 8"/>
+          <p:cNvSpPr txBox="1"/>
+          <p:nvPr/>
+        </p:nvSpPr>
+        <p:spPr>
+          <a:xfrm>
+            <a:off x="6400800" y="2487168"/>
+            <a:ext cx="1645920" cy="274320"/>
+          </a:xfrm>
+          <a:prstGeom prst="rect">
+            <a:avLst/>
+          </a:prstGeom>
+          <a:noFill/>
+        </p:spPr>
+        <p:txBody>
+          <a:bodyPr wrap="square" lIns="0" rIns="0" tIns="0" bIns="0">
+            <a:spAutoFit/>
+          </a:bodyPr>
+          <a:lstStyle/>
+          <a:p>
+            <a:pPr algn="l">
+              <a:lnSpc>
+                <a:spcPts val="1800"/>
+              </a:lnSpc>
+              <a:spcAft>
+                <a:spcPts val="0"/>
+              </a:spcAft>
+            </a:pPr>
+            <a:r>
+              <a:rPr sz="1200" b="1" i="0">
+                <a:solidFill>
+                  <a:srgbClr val="1A2430"/>
+                </a:solidFill>
+                <a:latin typeface="Garamond"/>
+              </a:rPr>
+              <a:t>Supplement</a:t>
+            </a:r>
+          </a:p>
+        </p:txBody>
+      </p:sp>
+      <p:sp>
+        <p:nvSpPr>
+          <p:cNvPr id="10" name="TextBox 9"/>
+          <p:cNvSpPr txBox="1"/>
+          <p:nvPr/>
+        </p:nvSpPr>
+        <p:spPr>
+          <a:xfrm>
+            <a:off x="7223760" y="2487168"/>
+            <a:ext cx="1600200" cy="274320"/>
+          </a:xfrm>
+          <a:prstGeom prst="rect">
+            <a:avLst/>
+          </a:prstGeom>
+          <a:noFill/>
+        </p:spPr>
+        <p:txBody>
+          <a:bodyPr wrap="square" lIns="0" rIns="0" tIns="0" bIns="0">
+            <a:spAutoFit/>
+          </a:bodyPr>
+          <a:lstStyle/>
+          <a:p>
+            <a:pPr algn="r">
+              <a:lnSpc>
+                <a:spcPts val="1800"/>
+              </a:lnSpc>
+              <a:spcAft>
+                <a:spcPts val="0"/>
+              </a:spcAft>
+            </a:pPr>
+            <a:r>
+              <a:rPr sz="1200" b="1" i="0">
+                <a:solidFill>
+                  <a:srgbClr val="1A2430"/>
+                </a:solidFill>
+                <a:latin typeface="Garamond"/>
+              </a:rPr>
+              <a:t>Persons</a:t>
+            </a:r>
+          </a:p>
+        </p:txBody>
+      </p:sp>
+      <p:sp>
+        <p:nvSpPr>
+          <p:cNvPr id="11" name="TextBox 10"/>
+          <p:cNvSpPr txBox="1"/>
+          <p:nvPr/>
+        </p:nvSpPr>
+        <p:spPr>
+          <a:xfrm>
+            <a:off x="8915400" y="2487168"/>
+            <a:ext cx="1463040" cy="274320"/>
+          </a:xfrm>
+          <a:prstGeom prst="rect">
+            <a:avLst/>
+          </a:prstGeom>
+          <a:noFill/>
+        </p:spPr>
+        <p:txBody>
+          <a:bodyPr wrap="square" lIns="0" rIns="0" tIns="0" bIns="0">
+            <a:spAutoFit/>
+          </a:bodyPr>
+          <a:lstStyle/>
+          <a:p>
+            <a:pPr algn="r">
+              <a:lnSpc>
+                <a:spcPts val="1800"/>
+              </a:lnSpc>
+              <a:spcAft>
+                <a:spcPts val="0"/>
+              </a:spcAft>
+            </a:pPr>
+            <a:r>
+              <a:rPr sz="1200" b="1" i="0">
+                <a:solidFill>
+                  <a:srgbClr val="1A2430"/>
+                </a:solidFill>
+                <a:latin typeface="Garamond"/>
+              </a:rPr>
+              <a:t>Teachers</a:t>
             </a:r>
           </a:p>
         </p:txBody>
       </p:sp>
       <p:cxnSp>
         <p:nvCxnSpPr>
-          <p:cNvPr id="8" name="Connector 7"/>
+          <p:cNvPr id="12" name="Connector 11"/>
           <p:cNvCxnSpPr/>
           <p:nvPr/>
         </p:nvCxnSpPr>
         <p:spPr>
           <a:xfrm>
-            <a:off x="822960" y="3200400"/>
+            <a:off x="822960" y="2816352"/>
             <a:ext cx="10543032" cy="0"/>
           </a:xfrm>
           <a:prstGeom prst="line">
@@ -7685,14 +7854,14 @@
       </p:cxnSp>
       <p:sp>
         <p:nvSpPr>
-          <p:cNvPr id="9" name="TextBox 8"/>
+          <p:cNvPr id="13" name="TextBox 12"/>
           <p:cNvSpPr txBox="1"/>
           <p:nvPr/>
         </p:nvSpPr>
         <p:spPr>
           <a:xfrm>
-            <a:off x="960120" y="3310128"/>
-            <a:ext cx="5120640" cy="365760"/>
+            <a:off x="960120" y="2907792"/>
+            <a:ext cx="822960" cy="274320"/>
           </a:xfrm>
           <a:prstGeom prst="rect">
             <a:avLst/>
@@ -7707,34 +7876,34 @@
           <a:p>
             <a:pPr algn="l">
               <a:lnSpc>
-                <a:spcPts val="1950"/>
+                <a:spcPts val="1725"/>
               </a:lnSpc>
               <a:spcAft>
                 <a:spcPts val="0"/>
               </a:spcAft>
             </a:pPr>
             <a:r>
-              <a:rPr sz="1300" b="0" i="0">
+              <a:rPr sz="1150" b="0" i="0">
                 <a:solidFill>
                   <a:srgbClr val="1A2430"/>
                 </a:solidFill>
                 <a:latin typeface="Garamond"/>
               </a:rPr>
-              <a:t>Age (years)</a:t>
-            </a:r>
-          </a:p>
-        </p:txBody>
-      </p:sp>
-      <p:sp>
-        <p:nvSpPr>
-          <p:cNvPr id="10" name="TextBox 9"/>
+              <a:t>1998</a:t>
+            </a:r>
+          </a:p>
+        </p:txBody>
+      </p:sp>
+      <p:sp>
+        <p:nvSpPr>
+          <p:cNvPr id="14" name="TextBox 13"/>
           <p:cNvSpPr txBox="1"/>
           <p:nvPr/>
         </p:nvSpPr>
         <p:spPr>
           <a:xfrm>
-            <a:off x="6492240" y="3310128"/>
-            <a:ext cx="1828800" cy="365760"/>
+            <a:off x="1783080" y="2907792"/>
+            <a:ext cx="1600200" cy="274320"/>
           </a:xfrm>
           <a:prstGeom prst="rect">
             <a:avLst/>
@@ -7749,34 +7918,34 @@
           <a:p>
             <a:pPr algn="r">
               <a:lnSpc>
-                <a:spcPts val="1950"/>
+                <a:spcPts val="1725"/>
               </a:lnSpc>
               <a:spcAft>
                 <a:spcPts val="0"/>
               </a:spcAft>
             </a:pPr>
             <a:r>
-              <a:rPr sz="1300" b="0" i="0">
+              <a:rPr sz="1150" b="0" i="0">
                 <a:solidFill>
                   <a:srgbClr val="1A2430"/>
                 </a:solidFill>
                 <a:latin typeface="Garamond"/>
               </a:rPr>
-              <a:t>43.7</a:t>
-            </a:r>
-          </a:p>
-        </p:txBody>
-      </p:sp>
-      <p:sp>
-        <p:nvSpPr>
-          <p:cNvPr id="11" name="TextBox 10"/>
+              <a:t>131,617</a:t>
+            </a:r>
+          </a:p>
+        </p:txBody>
+      </p:sp>
+      <p:sp>
+        <p:nvSpPr>
+          <p:cNvPr id="15" name="TextBox 14"/>
           <p:cNvSpPr txBox="1"/>
           <p:nvPr/>
         </p:nvSpPr>
         <p:spPr>
           <a:xfrm>
-            <a:off x="8732520" y="3310128"/>
-            <a:ext cx="2331720" cy="365760"/>
+            <a:off x="3474720" y="2907792"/>
+            <a:ext cx="1463040" cy="274320"/>
           </a:xfrm>
           <a:prstGeom prst="rect">
             <a:avLst/>
@@ -7791,34 +7960,34 @@
           <a:p>
             <a:pPr algn="r">
               <a:lnSpc>
-                <a:spcPts val="1950"/>
+                <a:spcPts val="1725"/>
               </a:lnSpc>
               <a:spcAft>
                 <a:spcPts val="0"/>
               </a:spcAft>
             </a:pPr>
             <a:r>
-              <a:rPr sz="1300" b="0" i="0">
+              <a:rPr sz="1150" b="0" i="0">
                 <a:solidFill>
                   <a:srgbClr val="1A2430"/>
                 </a:solidFill>
                 <a:latin typeface="Garamond"/>
               </a:rPr>
-              <a:t>43.6</a:t>
-            </a:r>
-          </a:p>
-        </p:txBody>
-      </p:sp>
-      <p:sp>
-        <p:nvSpPr>
-          <p:cNvPr id="12" name="TextBox 11"/>
+              <a:t>2,620</a:t>
+            </a:r>
+          </a:p>
+        </p:txBody>
+      </p:sp>
+      <p:sp>
+        <p:nvSpPr>
+          <p:cNvPr id="16" name="TextBox 15"/>
           <p:cNvSpPr txBox="1"/>
           <p:nvPr/>
         </p:nvSpPr>
         <p:spPr>
           <a:xfrm>
-            <a:off x="960120" y="3675888"/>
-            <a:ext cx="5120640" cy="365760"/>
+            <a:off x="960120" y="3145536"/>
+            <a:ext cx="822960" cy="274320"/>
           </a:xfrm>
           <a:prstGeom prst="rect">
             <a:avLst/>
@@ -7833,34 +8002,34 @@
           <a:p>
             <a:pPr algn="l">
               <a:lnSpc>
-                <a:spcPts val="1950"/>
+                <a:spcPts val="1725"/>
               </a:lnSpc>
               <a:spcAft>
                 <a:spcPts val="0"/>
               </a:spcAft>
             </a:pPr>
             <a:r>
-              <a:rPr sz="1300" b="0" i="0">
+              <a:rPr sz="1150" b="0" i="0">
                 <a:solidFill>
                   <a:srgbClr val="1A2430"/>
                 </a:solidFill>
                 <a:latin typeface="Garamond"/>
               </a:rPr>
-              <a:t>Female (%)</a:t>
-            </a:r>
-          </a:p>
-        </p:txBody>
-      </p:sp>
-      <p:sp>
-        <p:nvSpPr>
-          <p:cNvPr id="13" name="TextBox 12"/>
+              <a:t>1999</a:t>
+            </a:r>
+          </a:p>
+        </p:txBody>
+      </p:sp>
+      <p:sp>
+        <p:nvSpPr>
+          <p:cNvPr id="17" name="TextBox 16"/>
           <p:cNvSpPr txBox="1"/>
           <p:nvPr/>
         </p:nvSpPr>
         <p:spPr>
           <a:xfrm>
-            <a:off x="6492240" y="3675888"/>
-            <a:ext cx="1828800" cy="365760"/>
+            <a:off x="1783080" y="3145536"/>
+            <a:ext cx="1600200" cy="274320"/>
           </a:xfrm>
           <a:prstGeom prst="rect">
             <a:avLst/>
@@ -7875,34 +8044,34 @@
           <a:p>
             <a:pPr algn="r">
               <a:lnSpc>
-                <a:spcPts val="1950"/>
+                <a:spcPts val="1725"/>
               </a:lnSpc>
               <a:spcAft>
                 <a:spcPts val="0"/>
               </a:spcAft>
             </a:pPr>
             <a:r>
-              <a:rPr sz="1300" b="0" i="0">
+              <a:rPr sz="1150" b="0" i="0">
                 <a:solidFill>
                   <a:srgbClr val="1A2430"/>
                 </a:solidFill>
                 <a:latin typeface="Garamond"/>
               </a:rPr>
-              <a:t>75.9</a:t>
-            </a:r>
-          </a:p>
-        </p:txBody>
-      </p:sp>
-      <p:sp>
-        <p:nvSpPr>
-          <p:cNvPr id="14" name="TextBox 13"/>
+              <a:t>132,324</a:t>
+            </a:r>
+          </a:p>
+        </p:txBody>
+      </p:sp>
+      <p:sp>
+        <p:nvSpPr>
+          <p:cNvPr id="18" name="TextBox 17"/>
           <p:cNvSpPr txBox="1"/>
           <p:nvPr/>
         </p:nvSpPr>
         <p:spPr>
           <a:xfrm>
-            <a:off x="8732520" y="3675888"/>
-            <a:ext cx="2331720" cy="365760"/>
+            <a:off x="3474720" y="3145536"/>
+            <a:ext cx="1463040" cy="274320"/>
           </a:xfrm>
           <a:prstGeom prst="rect">
             <a:avLst/>
@@ -7917,34 +8086,34 @@
           <a:p>
             <a:pPr algn="r">
               <a:lnSpc>
-                <a:spcPts val="1950"/>
+                <a:spcPts val="1725"/>
               </a:lnSpc>
               <a:spcAft>
                 <a:spcPts val="0"/>
               </a:spcAft>
             </a:pPr>
             <a:r>
-              <a:rPr sz="1300" b="0" i="0">
+              <a:rPr sz="1150" b="0" i="0">
                 <a:solidFill>
                   <a:srgbClr val="1A2430"/>
                 </a:solidFill>
                 <a:latin typeface="Garamond"/>
               </a:rPr>
-              <a:t>46.5</a:t>
-            </a:r>
-          </a:p>
-        </p:txBody>
-      </p:sp>
-      <p:sp>
-        <p:nvSpPr>
-          <p:cNvPr id="15" name="TextBox 14"/>
+              <a:t>2,719</a:t>
+            </a:r>
+          </a:p>
+        </p:txBody>
+      </p:sp>
+      <p:sp>
+        <p:nvSpPr>
+          <p:cNvPr id="19" name="TextBox 18"/>
           <p:cNvSpPr txBox="1"/>
           <p:nvPr/>
         </p:nvSpPr>
         <p:spPr>
           <a:xfrm>
-            <a:off x="960120" y="4041648"/>
-            <a:ext cx="5120640" cy="365760"/>
+            <a:off x="960120" y="3383280"/>
+            <a:ext cx="822960" cy="274320"/>
           </a:xfrm>
           <a:prstGeom prst="rect">
             <a:avLst/>
@@ -7959,34 +8128,34 @@
           <a:p>
             <a:pPr algn="l">
               <a:lnSpc>
-                <a:spcPts val="1950"/>
+                <a:spcPts val="1725"/>
               </a:lnSpc>
               <a:spcAft>
                 <a:spcPts val="0"/>
               </a:spcAft>
             </a:pPr>
             <a:r>
-              <a:rPr sz="1300" b="0" i="0">
+              <a:rPr sz="1150" b="0" i="0">
                 <a:solidFill>
                   <a:srgbClr val="1A2430"/>
                 </a:solidFill>
                 <a:latin typeface="Garamond"/>
               </a:rPr>
-              <a:t>Master’s degree or higher (%)</a:t>
-            </a:r>
-          </a:p>
-        </p:txBody>
-      </p:sp>
-      <p:sp>
-        <p:nvSpPr>
-          <p:cNvPr id="16" name="TextBox 15"/>
+              <a:t>2000</a:t>
+            </a:r>
+          </a:p>
+        </p:txBody>
+      </p:sp>
+      <p:sp>
+        <p:nvSpPr>
+          <p:cNvPr id="20" name="TextBox 19"/>
           <p:cNvSpPr txBox="1"/>
           <p:nvPr/>
         </p:nvSpPr>
         <p:spPr>
           <a:xfrm>
-            <a:off x="6492240" y="4041648"/>
-            <a:ext cx="1828800" cy="365760"/>
+            <a:off x="1783080" y="3383280"/>
+            <a:ext cx="1600200" cy="274320"/>
           </a:xfrm>
           <a:prstGeom prst="rect">
             <a:avLst/>
@@ -8001,34 +8170,34 @@
           <a:p>
             <a:pPr algn="r">
               <a:lnSpc>
-                <a:spcPts val="1950"/>
+                <a:spcPts val="1725"/>
               </a:lnSpc>
               <a:spcAft>
                 <a:spcPts val="0"/>
               </a:spcAft>
             </a:pPr>
             <a:r>
-              <a:rPr sz="1300" b="0" i="0">
+              <a:rPr sz="1150" b="0" i="0">
                 <a:solidFill>
                   <a:srgbClr val="1A2430"/>
                 </a:solidFill>
                 <a:latin typeface="Garamond"/>
               </a:rPr>
-              <a:t>48.3</a:t>
-            </a:r>
-          </a:p>
-        </p:txBody>
-      </p:sp>
-      <p:sp>
-        <p:nvSpPr>
-          <p:cNvPr id="17" name="TextBox 16"/>
+              <a:t>133,710</a:t>
+            </a:r>
+          </a:p>
+        </p:txBody>
+      </p:sp>
+      <p:sp>
+        <p:nvSpPr>
+          <p:cNvPr id="21" name="TextBox 20"/>
           <p:cNvSpPr txBox="1"/>
           <p:nvPr/>
         </p:nvSpPr>
         <p:spPr>
           <a:xfrm>
-            <a:off x="8732520" y="4041648"/>
-            <a:ext cx="2331720" cy="365760"/>
+            <a:off x="3474720" y="3383280"/>
+            <a:ext cx="1463040" cy="274320"/>
           </a:xfrm>
           <a:prstGeom prst="rect">
             <a:avLst/>
@@ -8043,34 +8212,34 @@
           <a:p>
             <a:pPr algn="r">
               <a:lnSpc>
-                <a:spcPts val="1950"/>
+                <a:spcPts val="1725"/>
               </a:lnSpc>
               <a:spcAft>
                 <a:spcPts val="0"/>
               </a:spcAft>
             </a:pPr>
             <a:r>
-              <a:rPr sz="1300" b="0" i="0">
+              <a:rPr sz="1150" b="0" i="0">
                 <a:solidFill>
                   <a:srgbClr val="1A2430"/>
                 </a:solidFill>
                 <a:latin typeface="Garamond"/>
               </a:rPr>
-              <a:t>33.8</a:t>
-            </a:r>
-          </a:p>
-        </p:txBody>
-      </p:sp>
-      <p:sp>
-        <p:nvSpPr>
-          <p:cNvPr id="18" name="TextBox 17"/>
+              <a:t>2,743</a:t>
+            </a:r>
+          </a:p>
+        </p:txBody>
+      </p:sp>
+      <p:sp>
+        <p:nvSpPr>
+          <p:cNvPr id="22" name="TextBox 21"/>
           <p:cNvSpPr txBox="1"/>
           <p:nvPr/>
         </p:nvSpPr>
         <p:spPr>
           <a:xfrm>
-            <a:off x="960120" y="4407408"/>
-            <a:ext cx="5120640" cy="365760"/>
+            <a:off x="960120" y="3621024"/>
+            <a:ext cx="822960" cy="274320"/>
           </a:xfrm>
           <a:prstGeom prst="rect">
             <a:avLst/>
@@ -8085,34 +8254,34 @@
           <a:p>
             <a:pPr algn="l">
               <a:lnSpc>
-                <a:spcPts val="1950"/>
+                <a:spcPts val="1725"/>
               </a:lnSpc>
               <a:spcAft>
                 <a:spcPts val="0"/>
               </a:spcAft>
             </a:pPr>
             <a:r>
-              <a:rPr sz="1300" b="0" i="0">
+              <a:rPr sz="1150" b="0" i="0">
                 <a:solidFill>
                   <a:srgbClr val="1A2430"/>
                 </a:solidFill>
                 <a:latin typeface="Garamond"/>
               </a:rPr>
-              <a:t>Public sector (%)</a:t>
-            </a:r>
-          </a:p>
-        </p:txBody>
-      </p:sp>
-      <p:sp>
-        <p:nvSpPr>
-          <p:cNvPr id="19" name="TextBox 18"/>
+              <a:t>2001</a:t>
+            </a:r>
+          </a:p>
+        </p:txBody>
+      </p:sp>
+      <p:sp>
+        <p:nvSpPr>
+          <p:cNvPr id="23" name="TextBox 22"/>
           <p:cNvSpPr txBox="1"/>
           <p:nvPr/>
         </p:nvSpPr>
         <p:spPr>
           <a:xfrm>
-            <a:off x="6492240" y="4407408"/>
-            <a:ext cx="1828800" cy="365760"/>
+            <a:off x="1783080" y="3621024"/>
+            <a:ext cx="1600200" cy="274320"/>
           </a:xfrm>
           <a:prstGeom prst="rect">
             <a:avLst/>
@@ -8127,34 +8296,34 @@
           <a:p>
             <a:pPr algn="r">
               <a:lnSpc>
-                <a:spcPts val="1950"/>
+                <a:spcPts val="1725"/>
               </a:lnSpc>
               <a:spcAft>
                 <a:spcPts val="0"/>
               </a:spcAft>
             </a:pPr>
             <a:r>
-              <a:rPr sz="1300" b="0" i="0">
+              <a:rPr sz="1150" b="0" i="0">
                 <a:solidFill>
                   <a:srgbClr val="1A2430"/>
                 </a:solidFill>
                 <a:latin typeface="Garamond"/>
               </a:rPr>
-              <a:t>72.9</a:t>
-            </a:r>
-          </a:p>
-        </p:txBody>
-      </p:sp>
-      <p:sp>
-        <p:nvSpPr>
-          <p:cNvPr id="20" name="TextBox 19"/>
+              <a:t>128,821</a:t>
+            </a:r>
+          </a:p>
+        </p:txBody>
+      </p:sp>
+      <p:sp>
+        <p:nvSpPr>
+          <p:cNvPr id="24" name="TextBox 23"/>
           <p:cNvSpPr txBox="1"/>
           <p:nvPr/>
         </p:nvSpPr>
         <p:spPr>
           <a:xfrm>
-            <a:off x="8732520" y="4407408"/>
-            <a:ext cx="2331720" cy="365760"/>
+            <a:off x="3474720" y="3621024"/>
+            <a:ext cx="1463040" cy="274320"/>
           </a:xfrm>
           <a:prstGeom prst="rect">
             <a:avLst/>
@@ -8169,34 +8338,34 @@
           <a:p>
             <a:pPr algn="r">
               <a:lnSpc>
-                <a:spcPts val="1950"/>
+                <a:spcPts val="1725"/>
               </a:lnSpc>
               <a:spcAft>
                 <a:spcPts val="0"/>
               </a:spcAft>
             </a:pPr>
             <a:r>
-              <a:rPr sz="1300" b="0" i="0">
+              <a:rPr sz="1150" b="0" i="0">
                 <a:solidFill>
                   <a:srgbClr val="1A2430"/>
                 </a:solidFill>
                 <a:latin typeface="Garamond"/>
               </a:rPr>
-              <a:t>16.2</a:t>
-            </a:r>
-          </a:p>
-        </p:txBody>
-      </p:sp>
-      <p:sp>
-        <p:nvSpPr>
-          <p:cNvPr id="21" name="TextBox 20"/>
+              <a:t>2,646</a:t>
+            </a:r>
+          </a:p>
+        </p:txBody>
+      </p:sp>
+      <p:sp>
+        <p:nvSpPr>
+          <p:cNvPr id="25" name="TextBox 24"/>
           <p:cNvSpPr txBox="1"/>
           <p:nvPr/>
         </p:nvSpPr>
         <p:spPr>
           <a:xfrm>
-            <a:off x="960120" y="4773168"/>
-            <a:ext cx="5120640" cy="365760"/>
+            <a:off x="960120" y="3858768"/>
+            <a:ext cx="822960" cy="274320"/>
           </a:xfrm>
           <a:prstGeom prst="rect">
             <a:avLst/>
@@ -8211,34 +8380,34 @@
           <a:p>
             <a:pPr algn="l">
               <a:lnSpc>
-                <a:spcPts val="1950"/>
+                <a:spcPts val="1725"/>
               </a:lnSpc>
               <a:spcAft>
                 <a:spcPts val="0"/>
               </a:spcAft>
             </a:pPr>
             <a:r>
-              <a:rPr sz="1300" b="0" i="0">
+              <a:rPr sz="1150" b="0" i="0">
                 <a:solidFill>
                   <a:srgbClr val="1A2430"/>
                 </a:solidFill>
                 <a:latin typeface="Garamond"/>
               </a:rPr>
-              <a:t>Weeks worked</a:t>
-            </a:r>
-          </a:p>
-        </p:txBody>
-      </p:sp>
-      <p:sp>
-        <p:nvSpPr>
-          <p:cNvPr id="22" name="TextBox 21"/>
+              <a:t>2002</a:t>
+            </a:r>
+          </a:p>
+        </p:txBody>
+      </p:sp>
+      <p:sp>
+        <p:nvSpPr>
+          <p:cNvPr id="26" name="TextBox 25"/>
           <p:cNvSpPr txBox="1"/>
           <p:nvPr/>
         </p:nvSpPr>
         <p:spPr>
           <a:xfrm>
-            <a:off x="6492240" y="4773168"/>
-            <a:ext cx="1828800" cy="365760"/>
+            <a:off x="1783080" y="3858768"/>
+            <a:ext cx="1600200" cy="274320"/>
           </a:xfrm>
           <a:prstGeom prst="rect">
             <a:avLst/>
@@ -8253,34 +8422,34 @@
           <a:p>
             <a:pPr algn="r">
               <a:lnSpc>
-                <a:spcPts val="1950"/>
+                <a:spcPts val="1725"/>
               </a:lnSpc>
               <a:spcAft>
                 <a:spcPts val="0"/>
               </a:spcAft>
             </a:pPr>
             <a:r>
-              <a:rPr sz="1300" b="0" i="0">
+              <a:rPr sz="1150" b="0" i="0">
                 <a:solidFill>
                   <a:srgbClr val="1A2430"/>
                 </a:solidFill>
                 <a:latin typeface="Garamond"/>
               </a:rPr>
-              <a:t>46.1</a:t>
-            </a:r>
-          </a:p>
-        </p:txBody>
-      </p:sp>
-      <p:sp>
-        <p:nvSpPr>
-          <p:cNvPr id="23" name="TextBox 22"/>
+              <a:t>217,219</a:t>
+            </a:r>
+          </a:p>
+        </p:txBody>
+      </p:sp>
+      <p:sp>
+        <p:nvSpPr>
+          <p:cNvPr id="27" name="TextBox 26"/>
           <p:cNvSpPr txBox="1"/>
           <p:nvPr/>
         </p:nvSpPr>
         <p:spPr>
           <a:xfrm>
-            <a:off x="8732520" y="4773168"/>
-            <a:ext cx="2331720" cy="365760"/>
+            <a:off x="3474720" y="3858768"/>
+            <a:ext cx="1463040" cy="274320"/>
           </a:xfrm>
           <a:prstGeom prst="rect">
             <a:avLst/>
@@ -8295,34 +8464,34 @@
           <a:p>
             <a:pPr algn="r">
               <a:lnSpc>
-                <a:spcPts val="1950"/>
+                <a:spcPts val="1725"/>
               </a:lnSpc>
               <a:spcAft>
                 <a:spcPts val="0"/>
               </a:spcAft>
             </a:pPr>
             <a:r>
-              <a:rPr sz="1300" b="0" i="0">
+              <a:rPr sz="1150" b="0" i="0">
                 <a:solidFill>
                   <a:srgbClr val="1A2430"/>
                 </a:solidFill>
                 <a:latin typeface="Garamond"/>
               </a:rPr>
-              <a:t>48.6</a:t>
-            </a:r>
-          </a:p>
-        </p:txBody>
-      </p:sp>
-      <p:sp>
-        <p:nvSpPr>
-          <p:cNvPr id="24" name="TextBox 23"/>
+              <a:t>4,632</a:t>
+            </a:r>
+          </a:p>
+        </p:txBody>
+      </p:sp>
+      <p:sp>
+        <p:nvSpPr>
+          <p:cNvPr id="28" name="TextBox 27"/>
           <p:cNvSpPr txBox="1"/>
           <p:nvPr/>
         </p:nvSpPr>
         <p:spPr>
           <a:xfrm>
-            <a:off x="960120" y="5138928"/>
-            <a:ext cx="5120640" cy="365760"/>
+            <a:off x="960120" y="4096512"/>
+            <a:ext cx="822960" cy="274320"/>
           </a:xfrm>
           <a:prstGeom prst="rect">
             <a:avLst/>
@@ -8337,34 +8506,34 @@
           <a:p>
             <a:pPr algn="l">
               <a:lnSpc>
-                <a:spcPts val="1950"/>
+                <a:spcPts val="1725"/>
               </a:lnSpc>
               <a:spcAft>
                 <a:spcPts val="0"/>
               </a:spcAft>
             </a:pPr>
             <a:r>
-              <a:rPr sz="1300" b="0" i="0">
+              <a:rPr sz="1150" b="0" i="0">
                 <a:solidFill>
                   <a:srgbClr val="1A2430"/>
                 </a:solidFill>
                 <a:latin typeface="Garamond"/>
               </a:rPr>
-              <a:t>Median annual wage ($)</a:t>
-            </a:r>
-          </a:p>
-        </p:txBody>
-      </p:sp>
-      <p:sp>
-        <p:nvSpPr>
-          <p:cNvPr id="25" name="TextBox 24"/>
+              <a:t>2003</a:t>
+            </a:r>
+          </a:p>
+        </p:txBody>
+      </p:sp>
+      <p:sp>
+        <p:nvSpPr>
+          <p:cNvPr id="29" name="TextBox 28"/>
           <p:cNvSpPr txBox="1"/>
           <p:nvPr/>
         </p:nvSpPr>
         <p:spPr>
           <a:xfrm>
-            <a:off x="6492240" y="5138928"/>
-            <a:ext cx="1828800" cy="365760"/>
+            <a:off x="1783080" y="4096512"/>
+            <a:ext cx="1600200" cy="274320"/>
           </a:xfrm>
           <a:prstGeom prst="rect">
             <a:avLst/>
@@ -8379,34 +8548,34 @@
           <a:p>
             <a:pPr algn="r">
               <a:lnSpc>
-                <a:spcPts val="1950"/>
+                <a:spcPts val="1725"/>
               </a:lnSpc>
               <a:spcAft>
                 <a:spcPts val="0"/>
               </a:spcAft>
             </a:pPr>
             <a:r>
-              <a:rPr sz="1300" b="0" i="0">
+              <a:rPr sz="1150" b="0" i="0">
                 <a:solidFill>
                   <a:srgbClr val="1A2430"/>
                 </a:solidFill>
                 <a:latin typeface="Garamond"/>
               </a:rPr>
-              <a:t>56,000</a:t>
-            </a:r>
-          </a:p>
-        </p:txBody>
-      </p:sp>
-      <p:sp>
-        <p:nvSpPr>
-          <p:cNvPr id="26" name="TextBox 25"/>
+              <a:t>216,424</a:t>
+            </a:r>
+          </a:p>
+        </p:txBody>
+      </p:sp>
+      <p:sp>
+        <p:nvSpPr>
+          <p:cNvPr id="30" name="TextBox 29"/>
           <p:cNvSpPr txBox="1"/>
           <p:nvPr/>
         </p:nvSpPr>
         <p:spPr>
           <a:xfrm>
-            <a:off x="8732520" y="5138928"/>
-            <a:ext cx="2331720" cy="365760"/>
+            <a:off x="3474720" y="4096512"/>
+            <a:ext cx="1463040" cy="274320"/>
           </a:xfrm>
           <a:prstGeom prst="rect">
             <a:avLst/>
@@ -8421,34 +8590,34 @@
           <a:p>
             <a:pPr algn="r">
               <a:lnSpc>
-                <a:spcPts val="1950"/>
+                <a:spcPts val="1725"/>
               </a:lnSpc>
               <a:spcAft>
                 <a:spcPts val="0"/>
               </a:spcAft>
             </a:pPr>
             <a:r>
-              <a:rPr sz="1300" b="0" i="0">
+              <a:rPr sz="1150" b="0" i="0">
                 <a:solidFill>
                   <a:srgbClr val="1A2430"/>
                 </a:solidFill>
                 <a:latin typeface="Garamond"/>
               </a:rPr>
-              <a:t>75,000</a:t>
-            </a:r>
-          </a:p>
-        </p:txBody>
-      </p:sp>
-      <p:sp>
-        <p:nvSpPr>
-          <p:cNvPr id="27" name="TextBox 26"/>
+              <a:t>4,201</a:t>
+            </a:r>
+          </a:p>
+        </p:txBody>
+      </p:sp>
+      <p:sp>
+        <p:nvSpPr>
+          <p:cNvPr id="31" name="TextBox 30"/>
           <p:cNvSpPr txBox="1"/>
           <p:nvPr/>
         </p:nvSpPr>
         <p:spPr>
           <a:xfrm>
-            <a:off x="960120" y="5504688"/>
-            <a:ext cx="5120640" cy="365760"/>
+            <a:off x="960120" y="4334256"/>
+            <a:ext cx="822960" cy="274320"/>
           </a:xfrm>
           <a:prstGeom prst="rect">
             <a:avLst/>
@@ -8463,34 +8632,34 @@
           <a:p>
             <a:pPr algn="l">
               <a:lnSpc>
-                <a:spcPts val="1950"/>
+                <a:spcPts val="1725"/>
               </a:lnSpc>
               <a:spcAft>
                 <a:spcPts val="0"/>
               </a:spcAft>
             </a:pPr>
             <a:r>
-              <a:rPr sz="1300" b="0" i="0">
+              <a:rPr sz="1150" b="0" i="0">
                 <a:solidFill>
                   <a:srgbClr val="1A2430"/>
                 </a:solidFill>
                 <a:latin typeface="Garamond"/>
               </a:rPr>
-              <a:t>Annual leaving rate (%)</a:t>
-            </a:r>
-          </a:p>
-        </p:txBody>
-      </p:sp>
-      <p:sp>
-        <p:nvSpPr>
-          <p:cNvPr id="28" name="TextBox 27"/>
+              <a:t>2004</a:t>
+            </a:r>
+          </a:p>
+        </p:txBody>
+      </p:sp>
+      <p:sp>
+        <p:nvSpPr>
+          <p:cNvPr id="32" name="TextBox 31"/>
           <p:cNvSpPr txBox="1"/>
           <p:nvPr/>
         </p:nvSpPr>
         <p:spPr>
           <a:xfrm>
-            <a:off x="6492240" y="5504688"/>
-            <a:ext cx="1828800" cy="365760"/>
+            <a:off x="1783080" y="4334256"/>
+            <a:ext cx="1600200" cy="274320"/>
           </a:xfrm>
           <a:prstGeom prst="rect">
             <a:avLst/>
@@ -8505,34 +8674,34 @@
           <a:p>
             <a:pPr algn="r">
               <a:lnSpc>
-                <a:spcPts val="1950"/>
+                <a:spcPts val="1725"/>
               </a:lnSpc>
               <a:spcAft>
                 <a:spcPts val="0"/>
               </a:spcAft>
             </a:pPr>
             <a:r>
-              <a:rPr sz="1300" b="0" i="0">
+              <a:rPr sz="1150" b="0" i="0">
                 <a:solidFill>
                   <a:srgbClr val="1A2430"/>
                 </a:solidFill>
                 <a:latin typeface="Garamond"/>
               </a:rPr>
-              <a:t>8.6</a:t>
-            </a:r>
-          </a:p>
-        </p:txBody>
-      </p:sp>
-      <p:sp>
-        <p:nvSpPr>
-          <p:cNvPr id="29" name="TextBox 28"/>
+              <a:t>213,241</a:t>
+            </a:r>
+          </a:p>
+        </p:txBody>
+      </p:sp>
+      <p:sp>
+        <p:nvSpPr>
+          <p:cNvPr id="33" name="TextBox 32"/>
           <p:cNvSpPr txBox="1"/>
           <p:nvPr/>
         </p:nvSpPr>
         <p:spPr>
           <a:xfrm>
-            <a:off x="8732520" y="5504688"/>
-            <a:ext cx="2331720" cy="365760"/>
+            <a:off x="3474720" y="4334256"/>
+            <a:ext cx="1463040" cy="274320"/>
           </a:xfrm>
           <a:prstGeom prst="rect">
             <a:avLst/>
@@ -8547,33 +8716,2679 @@
           <a:p>
             <a:pPr algn="r">
               <a:lnSpc>
-                <a:spcPts val="1950"/>
+                <a:spcPts val="1725"/>
               </a:lnSpc>
               <a:spcAft>
                 <a:spcPts val="0"/>
               </a:spcAft>
             </a:pPr>
             <a:r>
-              <a:rPr sz="1300" b="0" i="0">
+              <a:rPr sz="1150" b="0" i="0">
                 <a:solidFill>
                   <a:srgbClr val="1A2430"/>
                 </a:solidFill>
                 <a:latin typeface="Garamond"/>
               </a:rPr>
-              <a:t>—</a:t>
+              <a:t>4,344</a:t>
+            </a:r>
+          </a:p>
+        </p:txBody>
+      </p:sp>
+      <p:sp>
+        <p:nvSpPr>
+          <p:cNvPr id="34" name="TextBox 33"/>
+          <p:cNvSpPr txBox="1"/>
+          <p:nvPr/>
+        </p:nvSpPr>
+        <p:spPr>
+          <a:xfrm>
+            <a:off x="960120" y="4572000"/>
+            <a:ext cx="822960" cy="274320"/>
+          </a:xfrm>
+          <a:prstGeom prst="rect">
+            <a:avLst/>
+          </a:prstGeom>
+          <a:noFill/>
+        </p:spPr>
+        <p:txBody>
+          <a:bodyPr wrap="square" lIns="0" rIns="0" tIns="0" bIns="0">
+            <a:spAutoFit/>
+          </a:bodyPr>
+          <a:lstStyle/>
+          <a:p>
+            <a:pPr algn="l">
+              <a:lnSpc>
+                <a:spcPts val="1725"/>
+              </a:lnSpc>
+              <a:spcAft>
+                <a:spcPts val="0"/>
+              </a:spcAft>
+            </a:pPr>
+            <a:r>
+              <a:rPr sz="1150" b="0" i="0">
+                <a:solidFill>
+                  <a:srgbClr val="1A2430"/>
+                </a:solidFill>
+                <a:latin typeface="Garamond"/>
+              </a:rPr>
+              <a:t>2005</a:t>
+            </a:r>
+          </a:p>
+        </p:txBody>
+      </p:sp>
+      <p:sp>
+        <p:nvSpPr>
+          <p:cNvPr id="35" name="TextBox 34"/>
+          <p:cNvSpPr txBox="1"/>
+          <p:nvPr/>
+        </p:nvSpPr>
+        <p:spPr>
+          <a:xfrm>
+            <a:off x="1783080" y="4572000"/>
+            <a:ext cx="1600200" cy="274320"/>
+          </a:xfrm>
+          <a:prstGeom prst="rect">
+            <a:avLst/>
+          </a:prstGeom>
+          <a:noFill/>
+        </p:spPr>
+        <p:txBody>
+          <a:bodyPr wrap="square" lIns="0" rIns="0" tIns="0" bIns="0">
+            <a:spAutoFit/>
+          </a:bodyPr>
+          <a:lstStyle/>
+          <a:p>
+            <a:pPr algn="r">
+              <a:lnSpc>
+                <a:spcPts val="1725"/>
+              </a:lnSpc>
+              <a:spcAft>
+                <a:spcPts val="0"/>
+              </a:spcAft>
+            </a:pPr>
+            <a:r>
+              <a:rPr sz="1150" b="0" i="0">
+                <a:solidFill>
+                  <a:srgbClr val="1A2430"/>
+                </a:solidFill>
+                <a:latin typeface="Garamond"/>
+              </a:rPr>
+              <a:t>210,648</a:t>
+            </a:r>
+          </a:p>
+        </p:txBody>
+      </p:sp>
+      <p:sp>
+        <p:nvSpPr>
+          <p:cNvPr id="36" name="TextBox 35"/>
+          <p:cNvSpPr txBox="1"/>
+          <p:nvPr/>
+        </p:nvSpPr>
+        <p:spPr>
+          <a:xfrm>
+            <a:off x="3474720" y="4572000"/>
+            <a:ext cx="1463040" cy="274320"/>
+          </a:xfrm>
+          <a:prstGeom prst="rect">
+            <a:avLst/>
+          </a:prstGeom>
+          <a:noFill/>
+        </p:spPr>
+        <p:txBody>
+          <a:bodyPr wrap="square" lIns="0" rIns="0" tIns="0" bIns="0">
+            <a:spAutoFit/>
+          </a:bodyPr>
+          <a:lstStyle/>
+          <a:p>
+            <a:pPr algn="r">
+              <a:lnSpc>
+                <a:spcPts val="1725"/>
+              </a:lnSpc>
+              <a:spcAft>
+                <a:spcPts val="0"/>
+              </a:spcAft>
+            </a:pPr>
+            <a:r>
+              <a:rPr sz="1150" b="0" i="0">
+                <a:solidFill>
+                  <a:srgbClr val="1A2430"/>
+                </a:solidFill>
+                <a:latin typeface="Garamond"/>
+              </a:rPr>
+              <a:t>4,361</a:t>
+            </a:r>
+          </a:p>
+        </p:txBody>
+      </p:sp>
+      <p:sp>
+        <p:nvSpPr>
+          <p:cNvPr id="37" name="TextBox 36"/>
+          <p:cNvSpPr txBox="1"/>
+          <p:nvPr/>
+        </p:nvSpPr>
+        <p:spPr>
+          <a:xfrm>
+            <a:off x="960120" y="4809744"/>
+            <a:ext cx="822960" cy="274320"/>
+          </a:xfrm>
+          <a:prstGeom prst="rect">
+            <a:avLst/>
+          </a:prstGeom>
+          <a:noFill/>
+        </p:spPr>
+        <p:txBody>
+          <a:bodyPr wrap="square" lIns="0" rIns="0" tIns="0" bIns="0">
+            <a:spAutoFit/>
+          </a:bodyPr>
+          <a:lstStyle/>
+          <a:p>
+            <a:pPr algn="l">
+              <a:lnSpc>
+                <a:spcPts val="1725"/>
+              </a:lnSpc>
+              <a:spcAft>
+                <a:spcPts val="0"/>
+              </a:spcAft>
+            </a:pPr>
+            <a:r>
+              <a:rPr sz="1150" b="0" i="0">
+                <a:solidFill>
+                  <a:srgbClr val="1A2430"/>
+                </a:solidFill>
+                <a:latin typeface="Garamond"/>
+              </a:rPr>
+              <a:t>2006</a:t>
+            </a:r>
+          </a:p>
+        </p:txBody>
+      </p:sp>
+      <p:sp>
+        <p:nvSpPr>
+          <p:cNvPr id="38" name="TextBox 37"/>
+          <p:cNvSpPr txBox="1"/>
+          <p:nvPr/>
+        </p:nvSpPr>
+        <p:spPr>
+          <a:xfrm>
+            <a:off x="1783080" y="4809744"/>
+            <a:ext cx="1600200" cy="274320"/>
+          </a:xfrm>
+          <a:prstGeom prst="rect">
+            <a:avLst/>
+          </a:prstGeom>
+          <a:noFill/>
+        </p:spPr>
+        <p:txBody>
+          <a:bodyPr wrap="square" lIns="0" rIns="0" tIns="0" bIns="0">
+            <a:spAutoFit/>
+          </a:bodyPr>
+          <a:lstStyle/>
+          <a:p>
+            <a:pPr algn="r">
+              <a:lnSpc>
+                <a:spcPts val="1725"/>
+              </a:lnSpc>
+              <a:spcAft>
+                <a:spcPts val="0"/>
+              </a:spcAft>
+            </a:pPr>
+            <a:r>
+              <a:rPr sz="1150" b="0" i="0">
+                <a:solidFill>
+                  <a:srgbClr val="1A2430"/>
+                </a:solidFill>
+                <a:latin typeface="Garamond"/>
+              </a:rPr>
+              <a:t>208,562</a:t>
+            </a:r>
+          </a:p>
+        </p:txBody>
+      </p:sp>
+      <p:sp>
+        <p:nvSpPr>
+          <p:cNvPr id="39" name="TextBox 38"/>
+          <p:cNvSpPr txBox="1"/>
+          <p:nvPr/>
+        </p:nvSpPr>
+        <p:spPr>
+          <a:xfrm>
+            <a:off x="3474720" y="4809744"/>
+            <a:ext cx="1463040" cy="274320"/>
+          </a:xfrm>
+          <a:prstGeom prst="rect">
+            <a:avLst/>
+          </a:prstGeom>
+          <a:noFill/>
+        </p:spPr>
+        <p:txBody>
+          <a:bodyPr wrap="square" lIns="0" rIns="0" tIns="0" bIns="0">
+            <a:spAutoFit/>
+          </a:bodyPr>
+          <a:lstStyle/>
+          <a:p>
+            <a:pPr algn="r">
+              <a:lnSpc>
+                <a:spcPts val="1725"/>
+              </a:lnSpc>
+              <a:spcAft>
+                <a:spcPts val="0"/>
+              </a:spcAft>
+            </a:pPr>
+            <a:r>
+              <a:rPr sz="1150" b="0" i="0">
+                <a:solidFill>
+                  <a:srgbClr val="1A2430"/>
+                </a:solidFill>
+                <a:latin typeface="Garamond"/>
+              </a:rPr>
+              <a:t>4,161</a:t>
+            </a:r>
+          </a:p>
+        </p:txBody>
+      </p:sp>
+      <p:sp>
+        <p:nvSpPr>
+          <p:cNvPr id="40" name="TextBox 39"/>
+          <p:cNvSpPr txBox="1"/>
+          <p:nvPr/>
+        </p:nvSpPr>
+        <p:spPr>
+          <a:xfrm>
+            <a:off x="960120" y="5047488"/>
+            <a:ext cx="822960" cy="274320"/>
+          </a:xfrm>
+          <a:prstGeom prst="rect">
+            <a:avLst/>
+          </a:prstGeom>
+          <a:noFill/>
+        </p:spPr>
+        <p:txBody>
+          <a:bodyPr wrap="square" lIns="0" rIns="0" tIns="0" bIns="0">
+            <a:spAutoFit/>
+          </a:bodyPr>
+          <a:lstStyle/>
+          <a:p>
+            <a:pPr algn="l">
+              <a:lnSpc>
+                <a:spcPts val="1725"/>
+              </a:lnSpc>
+              <a:spcAft>
+                <a:spcPts val="0"/>
+              </a:spcAft>
+            </a:pPr>
+            <a:r>
+              <a:rPr sz="1150" b="0" i="0">
+                <a:solidFill>
+                  <a:srgbClr val="1A2430"/>
+                </a:solidFill>
+                <a:latin typeface="Garamond"/>
+              </a:rPr>
+              <a:t>2007</a:t>
+            </a:r>
+          </a:p>
+        </p:txBody>
+      </p:sp>
+      <p:sp>
+        <p:nvSpPr>
+          <p:cNvPr id="41" name="TextBox 40"/>
+          <p:cNvSpPr txBox="1"/>
+          <p:nvPr/>
+        </p:nvSpPr>
+        <p:spPr>
+          <a:xfrm>
+            <a:off x="1783080" y="5047488"/>
+            <a:ext cx="1600200" cy="274320"/>
+          </a:xfrm>
+          <a:prstGeom prst="rect">
+            <a:avLst/>
+          </a:prstGeom>
+          <a:noFill/>
+        </p:spPr>
+        <p:txBody>
+          <a:bodyPr wrap="square" lIns="0" rIns="0" tIns="0" bIns="0">
+            <a:spAutoFit/>
+          </a:bodyPr>
+          <a:lstStyle/>
+          <a:p>
+            <a:pPr algn="r">
+              <a:lnSpc>
+                <a:spcPts val="1725"/>
+              </a:lnSpc>
+              <a:spcAft>
+                <a:spcPts val="0"/>
+              </a:spcAft>
+            </a:pPr>
+            <a:r>
+              <a:rPr sz="1150" b="0" i="0">
+                <a:solidFill>
+                  <a:srgbClr val="1A2430"/>
+                </a:solidFill>
+                <a:latin typeface="Garamond"/>
+              </a:rPr>
+              <a:t>206,639</a:t>
+            </a:r>
+          </a:p>
+        </p:txBody>
+      </p:sp>
+      <p:sp>
+        <p:nvSpPr>
+          <p:cNvPr id="42" name="TextBox 41"/>
+          <p:cNvSpPr txBox="1"/>
+          <p:nvPr/>
+        </p:nvSpPr>
+        <p:spPr>
+          <a:xfrm>
+            <a:off x="3474720" y="5047488"/>
+            <a:ext cx="1463040" cy="274320"/>
+          </a:xfrm>
+          <a:prstGeom prst="rect">
+            <a:avLst/>
+          </a:prstGeom>
+          <a:noFill/>
+        </p:spPr>
+        <p:txBody>
+          <a:bodyPr wrap="square" lIns="0" rIns="0" tIns="0" bIns="0">
+            <a:spAutoFit/>
+          </a:bodyPr>
+          <a:lstStyle/>
+          <a:p>
+            <a:pPr algn="r">
+              <a:lnSpc>
+                <a:spcPts val="1725"/>
+              </a:lnSpc>
+              <a:spcAft>
+                <a:spcPts val="0"/>
+              </a:spcAft>
+            </a:pPr>
+            <a:r>
+              <a:rPr sz="1150" b="0" i="0">
+                <a:solidFill>
+                  <a:srgbClr val="1A2430"/>
+                </a:solidFill>
+                <a:latin typeface="Garamond"/>
+              </a:rPr>
+              <a:t>4,336</a:t>
+            </a:r>
+          </a:p>
+        </p:txBody>
+      </p:sp>
+      <p:sp>
+        <p:nvSpPr>
+          <p:cNvPr id="43" name="TextBox 42"/>
+          <p:cNvSpPr txBox="1"/>
+          <p:nvPr/>
+        </p:nvSpPr>
+        <p:spPr>
+          <a:xfrm>
+            <a:off x="960120" y="5285232"/>
+            <a:ext cx="822960" cy="274320"/>
+          </a:xfrm>
+          <a:prstGeom prst="rect">
+            <a:avLst/>
+          </a:prstGeom>
+          <a:noFill/>
+        </p:spPr>
+        <p:txBody>
+          <a:bodyPr wrap="square" lIns="0" rIns="0" tIns="0" bIns="0">
+            <a:spAutoFit/>
+          </a:bodyPr>
+          <a:lstStyle/>
+          <a:p>
+            <a:pPr algn="l">
+              <a:lnSpc>
+                <a:spcPts val="1725"/>
+              </a:lnSpc>
+              <a:spcAft>
+                <a:spcPts val="0"/>
+              </a:spcAft>
+            </a:pPr>
+            <a:r>
+              <a:rPr sz="1150" b="0" i="0">
+                <a:solidFill>
+                  <a:srgbClr val="1A2430"/>
+                </a:solidFill>
+                <a:latin typeface="Garamond"/>
+              </a:rPr>
+              <a:t>2008</a:t>
+            </a:r>
+          </a:p>
+        </p:txBody>
+      </p:sp>
+      <p:sp>
+        <p:nvSpPr>
+          <p:cNvPr id="44" name="TextBox 43"/>
+          <p:cNvSpPr txBox="1"/>
+          <p:nvPr/>
+        </p:nvSpPr>
+        <p:spPr>
+          <a:xfrm>
+            <a:off x="1783080" y="5285232"/>
+            <a:ext cx="1600200" cy="274320"/>
+          </a:xfrm>
+          <a:prstGeom prst="rect">
+            <a:avLst/>
+          </a:prstGeom>
+          <a:noFill/>
+        </p:spPr>
+        <p:txBody>
+          <a:bodyPr wrap="square" lIns="0" rIns="0" tIns="0" bIns="0">
+            <a:spAutoFit/>
+          </a:bodyPr>
+          <a:lstStyle/>
+          <a:p>
+            <a:pPr algn="r">
+              <a:lnSpc>
+                <a:spcPts val="1725"/>
+              </a:lnSpc>
+              <a:spcAft>
+                <a:spcPts val="0"/>
+              </a:spcAft>
+            </a:pPr>
+            <a:r>
+              <a:rPr sz="1150" b="0" i="0">
+                <a:solidFill>
+                  <a:srgbClr val="1A2430"/>
+                </a:solidFill>
+                <a:latin typeface="Garamond"/>
+              </a:rPr>
+              <a:t>206,404</a:t>
+            </a:r>
+          </a:p>
+        </p:txBody>
+      </p:sp>
+      <p:sp>
+        <p:nvSpPr>
+          <p:cNvPr id="45" name="TextBox 44"/>
+          <p:cNvSpPr txBox="1"/>
+          <p:nvPr/>
+        </p:nvSpPr>
+        <p:spPr>
+          <a:xfrm>
+            <a:off x="3474720" y="5285232"/>
+            <a:ext cx="1463040" cy="274320"/>
+          </a:xfrm>
+          <a:prstGeom prst="rect">
+            <a:avLst/>
+          </a:prstGeom>
+          <a:noFill/>
+        </p:spPr>
+        <p:txBody>
+          <a:bodyPr wrap="square" lIns="0" rIns="0" tIns="0" bIns="0">
+            <a:spAutoFit/>
+          </a:bodyPr>
+          <a:lstStyle/>
+          <a:p>
+            <a:pPr algn="r">
+              <a:lnSpc>
+                <a:spcPts val="1725"/>
+              </a:lnSpc>
+              <a:spcAft>
+                <a:spcPts val="0"/>
+              </a:spcAft>
+            </a:pPr>
+            <a:r>
+              <a:rPr sz="1150" b="0" i="0">
+                <a:solidFill>
+                  <a:srgbClr val="1A2430"/>
+                </a:solidFill>
+                <a:latin typeface="Garamond"/>
+              </a:rPr>
+              <a:t>4,357</a:t>
+            </a:r>
+          </a:p>
+        </p:txBody>
+      </p:sp>
+      <p:sp>
+        <p:nvSpPr>
+          <p:cNvPr id="46" name="TextBox 45"/>
+          <p:cNvSpPr txBox="1"/>
+          <p:nvPr/>
+        </p:nvSpPr>
+        <p:spPr>
+          <a:xfrm>
+            <a:off x="960120" y="5522976"/>
+            <a:ext cx="822960" cy="274320"/>
+          </a:xfrm>
+          <a:prstGeom prst="rect">
+            <a:avLst/>
+          </a:prstGeom>
+          <a:noFill/>
+        </p:spPr>
+        <p:txBody>
+          <a:bodyPr wrap="square" lIns="0" rIns="0" tIns="0" bIns="0">
+            <a:spAutoFit/>
+          </a:bodyPr>
+          <a:lstStyle/>
+          <a:p>
+            <a:pPr algn="l">
+              <a:lnSpc>
+                <a:spcPts val="1725"/>
+              </a:lnSpc>
+              <a:spcAft>
+                <a:spcPts val="0"/>
+              </a:spcAft>
+            </a:pPr>
+            <a:r>
+              <a:rPr sz="1150" b="0" i="0">
+                <a:solidFill>
+                  <a:srgbClr val="1A2430"/>
+                </a:solidFill>
+                <a:latin typeface="Garamond"/>
+              </a:rPr>
+              <a:t>2009</a:t>
+            </a:r>
+          </a:p>
+        </p:txBody>
+      </p:sp>
+      <p:sp>
+        <p:nvSpPr>
+          <p:cNvPr id="47" name="TextBox 46"/>
+          <p:cNvSpPr txBox="1"/>
+          <p:nvPr/>
+        </p:nvSpPr>
+        <p:spPr>
+          <a:xfrm>
+            <a:off x="1783080" y="5522976"/>
+            <a:ext cx="1600200" cy="274320"/>
+          </a:xfrm>
+          <a:prstGeom prst="rect">
+            <a:avLst/>
+          </a:prstGeom>
+          <a:noFill/>
+        </p:spPr>
+        <p:txBody>
+          <a:bodyPr wrap="square" lIns="0" rIns="0" tIns="0" bIns="0">
+            <a:spAutoFit/>
+          </a:bodyPr>
+          <a:lstStyle/>
+          <a:p>
+            <a:pPr algn="r">
+              <a:lnSpc>
+                <a:spcPts val="1725"/>
+              </a:lnSpc>
+              <a:spcAft>
+                <a:spcPts val="0"/>
+              </a:spcAft>
+            </a:pPr>
+            <a:r>
+              <a:rPr sz="1150" b="0" i="0">
+                <a:solidFill>
+                  <a:srgbClr val="1A2430"/>
+                </a:solidFill>
+                <a:latin typeface="Garamond"/>
+              </a:rPr>
+              <a:t>207,921</a:t>
+            </a:r>
+          </a:p>
+        </p:txBody>
+      </p:sp>
+      <p:sp>
+        <p:nvSpPr>
+          <p:cNvPr id="48" name="TextBox 47"/>
+          <p:cNvSpPr txBox="1"/>
+          <p:nvPr/>
+        </p:nvSpPr>
+        <p:spPr>
+          <a:xfrm>
+            <a:off x="3474720" y="5522976"/>
+            <a:ext cx="1463040" cy="274320"/>
+          </a:xfrm>
+          <a:prstGeom prst="rect">
+            <a:avLst/>
+          </a:prstGeom>
+          <a:noFill/>
+        </p:spPr>
+        <p:txBody>
+          <a:bodyPr wrap="square" lIns="0" rIns="0" tIns="0" bIns="0">
+            <a:spAutoFit/>
+          </a:bodyPr>
+          <a:lstStyle/>
+          <a:p>
+            <a:pPr algn="r">
+              <a:lnSpc>
+                <a:spcPts val="1725"/>
+              </a:lnSpc>
+              <a:spcAft>
+                <a:spcPts val="0"/>
+              </a:spcAft>
+            </a:pPr>
+            <a:r>
+              <a:rPr sz="1150" b="0" i="0">
+                <a:solidFill>
+                  <a:srgbClr val="1A2430"/>
+                </a:solidFill>
+                <a:latin typeface="Garamond"/>
+              </a:rPr>
+              <a:t>4,448</a:t>
+            </a:r>
+          </a:p>
+        </p:txBody>
+      </p:sp>
+      <p:sp>
+        <p:nvSpPr>
+          <p:cNvPr id="49" name="TextBox 48"/>
+          <p:cNvSpPr txBox="1"/>
+          <p:nvPr/>
+        </p:nvSpPr>
+        <p:spPr>
+          <a:xfrm>
+            <a:off x="960120" y="5760720"/>
+            <a:ext cx="822960" cy="274320"/>
+          </a:xfrm>
+          <a:prstGeom prst="rect">
+            <a:avLst/>
+          </a:prstGeom>
+          <a:noFill/>
+        </p:spPr>
+        <p:txBody>
+          <a:bodyPr wrap="square" lIns="0" rIns="0" tIns="0" bIns="0">
+            <a:spAutoFit/>
+          </a:bodyPr>
+          <a:lstStyle/>
+          <a:p>
+            <a:pPr algn="l">
+              <a:lnSpc>
+                <a:spcPts val="1725"/>
+              </a:lnSpc>
+              <a:spcAft>
+                <a:spcPts val="0"/>
+              </a:spcAft>
+            </a:pPr>
+            <a:r>
+              <a:rPr sz="1150" b="0" i="0">
+                <a:solidFill>
+                  <a:srgbClr val="1A2430"/>
+                </a:solidFill>
+                <a:latin typeface="Garamond"/>
+              </a:rPr>
+              <a:t>2010</a:t>
+            </a:r>
+          </a:p>
+        </p:txBody>
+      </p:sp>
+      <p:sp>
+        <p:nvSpPr>
+          <p:cNvPr id="50" name="TextBox 49"/>
+          <p:cNvSpPr txBox="1"/>
+          <p:nvPr/>
+        </p:nvSpPr>
+        <p:spPr>
+          <a:xfrm>
+            <a:off x="1783080" y="5760720"/>
+            <a:ext cx="1600200" cy="274320"/>
+          </a:xfrm>
+          <a:prstGeom prst="rect">
+            <a:avLst/>
+          </a:prstGeom>
+          <a:noFill/>
+        </p:spPr>
+        <p:txBody>
+          <a:bodyPr wrap="square" lIns="0" rIns="0" tIns="0" bIns="0">
+            <a:spAutoFit/>
+          </a:bodyPr>
+          <a:lstStyle/>
+          <a:p>
+            <a:pPr algn="r">
+              <a:lnSpc>
+                <a:spcPts val="1725"/>
+              </a:lnSpc>
+              <a:spcAft>
+                <a:spcPts val="0"/>
+              </a:spcAft>
+            </a:pPr>
+            <a:r>
+              <a:rPr sz="1150" b="0" i="0">
+                <a:solidFill>
+                  <a:srgbClr val="1A2430"/>
+                </a:solidFill>
+                <a:latin typeface="Garamond"/>
+              </a:rPr>
+              <a:t>209,802</a:t>
+            </a:r>
+          </a:p>
+        </p:txBody>
+      </p:sp>
+      <p:sp>
+        <p:nvSpPr>
+          <p:cNvPr id="51" name="TextBox 50"/>
+          <p:cNvSpPr txBox="1"/>
+          <p:nvPr/>
+        </p:nvSpPr>
+        <p:spPr>
+          <a:xfrm>
+            <a:off x="3474720" y="5760720"/>
+            <a:ext cx="1463040" cy="274320"/>
+          </a:xfrm>
+          <a:prstGeom prst="rect">
+            <a:avLst/>
+          </a:prstGeom>
+          <a:noFill/>
+        </p:spPr>
+        <p:txBody>
+          <a:bodyPr wrap="square" lIns="0" rIns="0" tIns="0" bIns="0">
+            <a:spAutoFit/>
+          </a:bodyPr>
+          <a:lstStyle/>
+          <a:p>
+            <a:pPr algn="r">
+              <a:lnSpc>
+                <a:spcPts val="1725"/>
+              </a:lnSpc>
+              <a:spcAft>
+                <a:spcPts val="0"/>
+              </a:spcAft>
+            </a:pPr>
+            <a:r>
+              <a:rPr sz="1150" b="0" i="0">
+                <a:solidFill>
+                  <a:srgbClr val="1A2430"/>
+                </a:solidFill>
+                <a:latin typeface="Garamond"/>
+              </a:rPr>
+              <a:t>4,357</a:t>
+            </a:r>
+          </a:p>
+        </p:txBody>
+      </p:sp>
+      <p:sp>
+        <p:nvSpPr>
+          <p:cNvPr id="52" name="TextBox 51"/>
+          <p:cNvSpPr txBox="1"/>
+          <p:nvPr/>
+        </p:nvSpPr>
+        <p:spPr>
+          <a:xfrm>
+            <a:off x="960120" y="5998464"/>
+            <a:ext cx="822960" cy="274320"/>
+          </a:xfrm>
+          <a:prstGeom prst="rect">
+            <a:avLst/>
+          </a:prstGeom>
+          <a:noFill/>
+        </p:spPr>
+        <p:txBody>
+          <a:bodyPr wrap="square" lIns="0" rIns="0" tIns="0" bIns="0">
+            <a:spAutoFit/>
+          </a:bodyPr>
+          <a:lstStyle/>
+          <a:p>
+            <a:pPr algn="l">
+              <a:lnSpc>
+                <a:spcPts val="1725"/>
+              </a:lnSpc>
+              <a:spcAft>
+                <a:spcPts val="0"/>
+              </a:spcAft>
+            </a:pPr>
+            <a:r>
+              <a:rPr sz="1150" b="0" i="0">
+                <a:solidFill>
+                  <a:srgbClr val="1A2430"/>
+                </a:solidFill>
+                <a:latin typeface="Garamond"/>
+              </a:rPr>
+              <a:t>2011</a:t>
+            </a:r>
+          </a:p>
+        </p:txBody>
+      </p:sp>
+      <p:sp>
+        <p:nvSpPr>
+          <p:cNvPr id="53" name="TextBox 52"/>
+          <p:cNvSpPr txBox="1"/>
+          <p:nvPr/>
+        </p:nvSpPr>
+        <p:spPr>
+          <a:xfrm>
+            <a:off x="1783080" y="5998464"/>
+            <a:ext cx="1600200" cy="274320"/>
+          </a:xfrm>
+          <a:prstGeom prst="rect">
+            <a:avLst/>
+          </a:prstGeom>
+          <a:noFill/>
+        </p:spPr>
+        <p:txBody>
+          <a:bodyPr wrap="square" lIns="0" rIns="0" tIns="0" bIns="0">
+            <a:spAutoFit/>
+          </a:bodyPr>
+          <a:lstStyle/>
+          <a:p>
+            <a:pPr algn="r">
+              <a:lnSpc>
+                <a:spcPts val="1725"/>
+              </a:lnSpc>
+              <a:spcAft>
+                <a:spcPts val="0"/>
+              </a:spcAft>
+            </a:pPr>
+            <a:r>
+              <a:rPr sz="1150" b="0" i="0">
+                <a:solidFill>
+                  <a:srgbClr val="1A2430"/>
+                </a:solidFill>
+                <a:latin typeface="Garamond"/>
+              </a:rPr>
+              <a:t>204,983</a:t>
+            </a:r>
+          </a:p>
+        </p:txBody>
+      </p:sp>
+      <p:sp>
+        <p:nvSpPr>
+          <p:cNvPr id="54" name="TextBox 53"/>
+          <p:cNvSpPr txBox="1"/>
+          <p:nvPr/>
+        </p:nvSpPr>
+        <p:spPr>
+          <a:xfrm>
+            <a:off x="3474720" y="5998464"/>
+            <a:ext cx="1463040" cy="274320"/>
+          </a:xfrm>
+          <a:prstGeom prst="rect">
+            <a:avLst/>
+          </a:prstGeom>
+          <a:noFill/>
+        </p:spPr>
+        <p:txBody>
+          <a:bodyPr wrap="square" lIns="0" rIns="0" tIns="0" bIns="0">
+            <a:spAutoFit/>
+          </a:bodyPr>
+          <a:lstStyle/>
+          <a:p>
+            <a:pPr algn="r">
+              <a:lnSpc>
+                <a:spcPts val="1725"/>
+              </a:lnSpc>
+              <a:spcAft>
+                <a:spcPts val="0"/>
+              </a:spcAft>
+            </a:pPr>
+            <a:r>
+              <a:rPr sz="1150" b="0" i="0">
+                <a:solidFill>
+                  <a:srgbClr val="1A2430"/>
+                </a:solidFill>
+                <a:latin typeface="Garamond"/>
+              </a:rPr>
+              <a:t>4,301</a:t>
+            </a:r>
+          </a:p>
+        </p:txBody>
+      </p:sp>
+      <p:sp>
+        <p:nvSpPr>
+          <p:cNvPr id="55" name="TextBox 54"/>
+          <p:cNvSpPr txBox="1"/>
+          <p:nvPr/>
+        </p:nvSpPr>
+        <p:spPr>
+          <a:xfrm>
+            <a:off x="6400800" y="2907792"/>
+            <a:ext cx="822960" cy="274320"/>
+          </a:xfrm>
+          <a:prstGeom prst="rect">
+            <a:avLst/>
+          </a:prstGeom>
+          <a:noFill/>
+        </p:spPr>
+        <p:txBody>
+          <a:bodyPr wrap="square" lIns="0" rIns="0" tIns="0" bIns="0">
+            <a:spAutoFit/>
+          </a:bodyPr>
+          <a:lstStyle/>
+          <a:p>
+            <a:pPr algn="l">
+              <a:lnSpc>
+                <a:spcPts val="1725"/>
+              </a:lnSpc>
+              <a:spcAft>
+                <a:spcPts val="0"/>
+              </a:spcAft>
+            </a:pPr>
+            <a:r>
+              <a:rPr sz="1150" b="0" i="0">
+                <a:solidFill>
+                  <a:srgbClr val="1A2430"/>
+                </a:solidFill>
+                <a:latin typeface="Garamond"/>
+              </a:rPr>
+              <a:t>2012</a:t>
+            </a:r>
+          </a:p>
+        </p:txBody>
+      </p:sp>
+      <p:sp>
+        <p:nvSpPr>
+          <p:cNvPr id="56" name="TextBox 55"/>
+          <p:cNvSpPr txBox="1"/>
+          <p:nvPr/>
+        </p:nvSpPr>
+        <p:spPr>
+          <a:xfrm>
+            <a:off x="7223760" y="2907792"/>
+            <a:ext cx="1600200" cy="274320"/>
+          </a:xfrm>
+          <a:prstGeom prst="rect">
+            <a:avLst/>
+          </a:prstGeom>
+          <a:noFill/>
+        </p:spPr>
+        <p:txBody>
+          <a:bodyPr wrap="square" lIns="0" rIns="0" tIns="0" bIns="0">
+            <a:spAutoFit/>
+          </a:bodyPr>
+          <a:lstStyle/>
+          <a:p>
+            <a:pPr algn="r">
+              <a:lnSpc>
+                <a:spcPts val="1725"/>
+              </a:lnSpc>
+              <a:spcAft>
+                <a:spcPts val="0"/>
+              </a:spcAft>
+            </a:pPr>
+            <a:r>
+              <a:rPr sz="1150" b="0" i="0">
+                <a:solidFill>
+                  <a:srgbClr val="1A2430"/>
+                </a:solidFill>
+                <a:latin typeface="Garamond"/>
+              </a:rPr>
+              <a:t>201,398</a:t>
+            </a:r>
+          </a:p>
+        </p:txBody>
+      </p:sp>
+      <p:sp>
+        <p:nvSpPr>
+          <p:cNvPr id="57" name="TextBox 56"/>
+          <p:cNvSpPr txBox="1"/>
+          <p:nvPr/>
+        </p:nvSpPr>
+        <p:spPr>
+          <a:xfrm>
+            <a:off x="8915400" y="2907792"/>
+            <a:ext cx="1463040" cy="274320"/>
+          </a:xfrm>
+          <a:prstGeom prst="rect">
+            <a:avLst/>
+          </a:prstGeom>
+          <a:noFill/>
+        </p:spPr>
+        <p:txBody>
+          <a:bodyPr wrap="square" lIns="0" rIns="0" tIns="0" bIns="0">
+            <a:spAutoFit/>
+          </a:bodyPr>
+          <a:lstStyle/>
+          <a:p>
+            <a:pPr algn="r">
+              <a:lnSpc>
+                <a:spcPts val="1725"/>
+              </a:lnSpc>
+              <a:spcAft>
+                <a:spcPts val="0"/>
+              </a:spcAft>
+            </a:pPr>
+            <a:r>
+              <a:rPr sz="1150" b="0" i="0">
+                <a:solidFill>
+                  <a:srgbClr val="1A2430"/>
+                </a:solidFill>
+                <a:latin typeface="Garamond"/>
+              </a:rPr>
+              <a:t>4,184</a:t>
+            </a:r>
+          </a:p>
+        </p:txBody>
+      </p:sp>
+      <p:sp>
+        <p:nvSpPr>
+          <p:cNvPr id="58" name="TextBox 57"/>
+          <p:cNvSpPr txBox="1"/>
+          <p:nvPr/>
+        </p:nvSpPr>
+        <p:spPr>
+          <a:xfrm>
+            <a:off x="6400800" y="3145536"/>
+            <a:ext cx="822960" cy="274320"/>
+          </a:xfrm>
+          <a:prstGeom prst="rect">
+            <a:avLst/>
+          </a:prstGeom>
+          <a:noFill/>
+        </p:spPr>
+        <p:txBody>
+          <a:bodyPr wrap="square" lIns="0" rIns="0" tIns="0" bIns="0">
+            <a:spAutoFit/>
+          </a:bodyPr>
+          <a:lstStyle/>
+          <a:p>
+            <a:pPr algn="l">
+              <a:lnSpc>
+                <a:spcPts val="1725"/>
+              </a:lnSpc>
+              <a:spcAft>
+                <a:spcPts val="0"/>
+              </a:spcAft>
+            </a:pPr>
+            <a:r>
+              <a:rPr sz="1150" b="0" i="0">
+                <a:solidFill>
+                  <a:srgbClr val="1A2430"/>
+                </a:solidFill>
+                <a:latin typeface="Garamond"/>
+              </a:rPr>
+              <a:t>2013</a:t>
+            </a:r>
+          </a:p>
+        </p:txBody>
+      </p:sp>
+      <p:sp>
+        <p:nvSpPr>
+          <p:cNvPr id="59" name="TextBox 58"/>
+          <p:cNvSpPr txBox="1"/>
+          <p:nvPr/>
+        </p:nvSpPr>
+        <p:spPr>
+          <a:xfrm>
+            <a:off x="7223760" y="3145536"/>
+            <a:ext cx="1600200" cy="274320"/>
+          </a:xfrm>
+          <a:prstGeom prst="rect">
+            <a:avLst/>
+          </a:prstGeom>
+          <a:noFill/>
+        </p:spPr>
+        <p:txBody>
+          <a:bodyPr wrap="square" lIns="0" rIns="0" tIns="0" bIns="0">
+            <a:spAutoFit/>
+          </a:bodyPr>
+          <a:lstStyle/>
+          <a:p>
+            <a:pPr algn="r">
+              <a:lnSpc>
+                <a:spcPts val="1725"/>
+              </a:lnSpc>
+              <a:spcAft>
+                <a:spcPts val="0"/>
+              </a:spcAft>
+            </a:pPr>
+            <a:r>
+              <a:rPr sz="1150" b="0" i="0">
+                <a:solidFill>
+                  <a:srgbClr val="1A2430"/>
+                </a:solidFill>
+                <a:latin typeface="Garamond"/>
+              </a:rPr>
+              <a:t>202,634</a:t>
+            </a:r>
+          </a:p>
+        </p:txBody>
+      </p:sp>
+      <p:sp>
+        <p:nvSpPr>
+          <p:cNvPr id="60" name="TextBox 59"/>
+          <p:cNvSpPr txBox="1"/>
+          <p:nvPr/>
+        </p:nvSpPr>
+        <p:spPr>
+          <a:xfrm>
+            <a:off x="8915400" y="3145536"/>
+            <a:ext cx="1463040" cy="274320"/>
+          </a:xfrm>
+          <a:prstGeom prst="rect">
+            <a:avLst/>
+          </a:prstGeom>
+          <a:noFill/>
+        </p:spPr>
+        <p:txBody>
+          <a:bodyPr wrap="square" lIns="0" rIns="0" tIns="0" bIns="0">
+            <a:spAutoFit/>
+          </a:bodyPr>
+          <a:lstStyle/>
+          <a:p>
+            <a:pPr algn="r">
+              <a:lnSpc>
+                <a:spcPts val="1725"/>
+              </a:lnSpc>
+              <a:spcAft>
+                <a:spcPts val="0"/>
+              </a:spcAft>
+            </a:pPr>
+            <a:r>
+              <a:rPr sz="1150" b="0" i="0">
+                <a:solidFill>
+                  <a:srgbClr val="1A2430"/>
+                </a:solidFill>
+                <a:latin typeface="Garamond"/>
+              </a:rPr>
+              <a:t>4,192</a:t>
+            </a:r>
+          </a:p>
+        </p:txBody>
+      </p:sp>
+      <p:sp>
+        <p:nvSpPr>
+          <p:cNvPr id="61" name="TextBox 60"/>
+          <p:cNvSpPr txBox="1"/>
+          <p:nvPr/>
+        </p:nvSpPr>
+        <p:spPr>
+          <a:xfrm>
+            <a:off x="6400800" y="3383280"/>
+            <a:ext cx="822960" cy="274320"/>
+          </a:xfrm>
+          <a:prstGeom prst="rect">
+            <a:avLst/>
+          </a:prstGeom>
+          <a:noFill/>
+        </p:spPr>
+        <p:txBody>
+          <a:bodyPr wrap="square" lIns="0" rIns="0" tIns="0" bIns="0">
+            <a:spAutoFit/>
+          </a:bodyPr>
+          <a:lstStyle/>
+          <a:p>
+            <a:pPr algn="l">
+              <a:lnSpc>
+                <a:spcPts val="1725"/>
+              </a:lnSpc>
+              <a:spcAft>
+                <a:spcPts val="0"/>
+              </a:spcAft>
+            </a:pPr>
+            <a:r>
+              <a:rPr sz="1150" b="0" i="0">
+                <a:solidFill>
+                  <a:srgbClr val="1A2430"/>
+                </a:solidFill>
+                <a:latin typeface="Garamond"/>
+              </a:rPr>
+              <a:t>2014</a:t>
+            </a:r>
+          </a:p>
+        </p:txBody>
+      </p:sp>
+      <p:sp>
+        <p:nvSpPr>
+          <p:cNvPr id="62" name="TextBox 61"/>
+          <p:cNvSpPr txBox="1"/>
+          <p:nvPr/>
+        </p:nvSpPr>
+        <p:spPr>
+          <a:xfrm>
+            <a:off x="7223760" y="3383280"/>
+            <a:ext cx="1600200" cy="274320"/>
+          </a:xfrm>
+          <a:prstGeom prst="rect">
+            <a:avLst/>
+          </a:prstGeom>
+          <a:noFill/>
+        </p:spPr>
+        <p:txBody>
+          <a:bodyPr wrap="square" lIns="0" rIns="0" tIns="0" bIns="0">
+            <a:spAutoFit/>
+          </a:bodyPr>
+          <a:lstStyle/>
+          <a:p>
+            <a:pPr algn="r">
+              <a:lnSpc>
+                <a:spcPts val="1725"/>
+              </a:lnSpc>
+              <a:spcAft>
+                <a:spcPts val="0"/>
+              </a:spcAft>
+            </a:pPr>
+            <a:r>
+              <a:rPr sz="1150" b="0" i="0">
+                <a:solidFill>
+                  <a:srgbClr val="1A2430"/>
+                </a:solidFill>
+                <a:latin typeface="Garamond"/>
+              </a:rPr>
+              <a:t>139,415</a:t>
+            </a:r>
+          </a:p>
+        </p:txBody>
+      </p:sp>
+      <p:sp>
+        <p:nvSpPr>
+          <p:cNvPr id="63" name="TextBox 62"/>
+          <p:cNvSpPr txBox="1"/>
+          <p:nvPr/>
+        </p:nvSpPr>
+        <p:spPr>
+          <a:xfrm>
+            <a:off x="8915400" y="3383280"/>
+            <a:ext cx="1463040" cy="274320"/>
+          </a:xfrm>
+          <a:prstGeom prst="rect">
+            <a:avLst/>
+          </a:prstGeom>
+          <a:noFill/>
+        </p:spPr>
+        <p:txBody>
+          <a:bodyPr wrap="square" lIns="0" rIns="0" tIns="0" bIns="0">
+            <a:spAutoFit/>
+          </a:bodyPr>
+          <a:lstStyle/>
+          <a:p>
+            <a:pPr algn="r">
+              <a:lnSpc>
+                <a:spcPts val="1725"/>
+              </a:lnSpc>
+              <a:spcAft>
+                <a:spcPts val="0"/>
+              </a:spcAft>
+            </a:pPr>
+            <a:r>
+              <a:rPr sz="1150" b="0" i="0">
+                <a:solidFill>
+                  <a:srgbClr val="1A2430"/>
+                </a:solidFill>
+                <a:latin typeface="Garamond"/>
+              </a:rPr>
+              <a:t>2,896</a:t>
+            </a:r>
+          </a:p>
+        </p:txBody>
+      </p:sp>
+      <p:sp>
+        <p:nvSpPr>
+          <p:cNvPr id="64" name="TextBox 63"/>
+          <p:cNvSpPr txBox="1"/>
+          <p:nvPr/>
+        </p:nvSpPr>
+        <p:spPr>
+          <a:xfrm>
+            <a:off x="6400800" y="3621024"/>
+            <a:ext cx="822960" cy="274320"/>
+          </a:xfrm>
+          <a:prstGeom prst="rect">
+            <a:avLst/>
+          </a:prstGeom>
+          <a:noFill/>
+        </p:spPr>
+        <p:txBody>
+          <a:bodyPr wrap="square" lIns="0" rIns="0" tIns="0" bIns="0">
+            <a:spAutoFit/>
+          </a:bodyPr>
+          <a:lstStyle/>
+          <a:p>
+            <a:pPr algn="l">
+              <a:lnSpc>
+                <a:spcPts val="1725"/>
+              </a:lnSpc>
+              <a:spcAft>
+                <a:spcPts val="0"/>
+              </a:spcAft>
+            </a:pPr>
+            <a:r>
+              <a:rPr sz="1150" b="0" i="0">
+                <a:solidFill>
+                  <a:srgbClr val="1A2430"/>
+                </a:solidFill>
+                <a:latin typeface="Garamond"/>
+              </a:rPr>
+              <a:t>2015</a:t>
+            </a:r>
+          </a:p>
+        </p:txBody>
+      </p:sp>
+      <p:sp>
+        <p:nvSpPr>
+          <p:cNvPr id="65" name="TextBox 64"/>
+          <p:cNvSpPr txBox="1"/>
+          <p:nvPr/>
+        </p:nvSpPr>
+        <p:spPr>
+          <a:xfrm>
+            <a:off x="7223760" y="3621024"/>
+            <a:ext cx="1600200" cy="274320"/>
+          </a:xfrm>
+          <a:prstGeom prst="rect">
+            <a:avLst/>
+          </a:prstGeom>
+          <a:noFill/>
+        </p:spPr>
+        <p:txBody>
+          <a:bodyPr wrap="square" lIns="0" rIns="0" tIns="0" bIns="0">
+            <a:spAutoFit/>
+          </a:bodyPr>
+          <a:lstStyle/>
+          <a:p>
+            <a:pPr algn="r">
+              <a:lnSpc>
+                <a:spcPts val="1725"/>
+              </a:lnSpc>
+              <a:spcAft>
+                <a:spcPts val="0"/>
+              </a:spcAft>
+            </a:pPr>
+            <a:r>
+              <a:rPr sz="1150" b="0" i="0">
+                <a:solidFill>
+                  <a:srgbClr val="1A2430"/>
+                </a:solidFill>
+                <a:latin typeface="Garamond"/>
+              </a:rPr>
+              <a:t>199,024</a:t>
+            </a:r>
+          </a:p>
+        </p:txBody>
+      </p:sp>
+      <p:sp>
+        <p:nvSpPr>
+          <p:cNvPr id="66" name="TextBox 65"/>
+          <p:cNvSpPr txBox="1"/>
+          <p:nvPr/>
+        </p:nvSpPr>
+        <p:spPr>
+          <a:xfrm>
+            <a:off x="8915400" y="3621024"/>
+            <a:ext cx="1463040" cy="274320"/>
+          </a:xfrm>
+          <a:prstGeom prst="rect">
+            <a:avLst/>
+          </a:prstGeom>
+          <a:noFill/>
+        </p:spPr>
+        <p:txBody>
+          <a:bodyPr wrap="square" lIns="0" rIns="0" tIns="0" bIns="0">
+            <a:spAutoFit/>
+          </a:bodyPr>
+          <a:lstStyle/>
+          <a:p>
+            <a:pPr algn="r">
+              <a:lnSpc>
+                <a:spcPts val="1725"/>
+              </a:lnSpc>
+              <a:spcAft>
+                <a:spcPts val="0"/>
+              </a:spcAft>
+            </a:pPr>
+            <a:r>
+              <a:rPr sz="1150" b="0" i="0">
+                <a:solidFill>
+                  <a:srgbClr val="1A2430"/>
+                </a:solidFill>
+                <a:latin typeface="Garamond"/>
+              </a:rPr>
+              <a:t>4,333</a:t>
+            </a:r>
+          </a:p>
+        </p:txBody>
+      </p:sp>
+      <p:sp>
+        <p:nvSpPr>
+          <p:cNvPr id="67" name="TextBox 66"/>
+          <p:cNvSpPr txBox="1"/>
+          <p:nvPr/>
+        </p:nvSpPr>
+        <p:spPr>
+          <a:xfrm>
+            <a:off x="6400800" y="3858768"/>
+            <a:ext cx="822960" cy="274320"/>
+          </a:xfrm>
+          <a:prstGeom prst="rect">
+            <a:avLst/>
+          </a:prstGeom>
+          <a:noFill/>
+        </p:spPr>
+        <p:txBody>
+          <a:bodyPr wrap="square" lIns="0" rIns="0" tIns="0" bIns="0">
+            <a:spAutoFit/>
+          </a:bodyPr>
+          <a:lstStyle/>
+          <a:p>
+            <a:pPr algn="l">
+              <a:lnSpc>
+                <a:spcPts val="1725"/>
+              </a:lnSpc>
+              <a:spcAft>
+                <a:spcPts val="0"/>
+              </a:spcAft>
+            </a:pPr>
+            <a:r>
+              <a:rPr sz="1150" b="0" i="0">
+                <a:solidFill>
+                  <a:srgbClr val="1A2430"/>
+                </a:solidFill>
+                <a:latin typeface="Garamond"/>
+              </a:rPr>
+              <a:t>2016</a:t>
+            </a:r>
+          </a:p>
+        </p:txBody>
+      </p:sp>
+      <p:sp>
+        <p:nvSpPr>
+          <p:cNvPr id="68" name="TextBox 67"/>
+          <p:cNvSpPr txBox="1"/>
+          <p:nvPr/>
+        </p:nvSpPr>
+        <p:spPr>
+          <a:xfrm>
+            <a:off x="7223760" y="3858768"/>
+            <a:ext cx="1600200" cy="274320"/>
+          </a:xfrm>
+          <a:prstGeom prst="rect">
+            <a:avLst/>
+          </a:prstGeom>
+          <a:noFill/>
+        </p:spPr>
+        <p:txBody>
+          <a:bodyPr wrap="square" lIns="0" rIns="0" tIns="0" bIns="0">
+            <a:spAutoFit/>
+          </a:bodyPr>
+          <a:lstStyle/>
+          <a:p>
+            <a:pPr algn="r">
+              <a:lnSpc>
+                <a:spcPts val="1725"/>
+              </a:lnSpc>
+              <a:spcAft>
+                <a:spcPts val="0"/>
+              </a:spcAft>
+            </a:pPr>
+            <a:r>
+              <a:rPr sz="1150" b="0" i="0">
+                <a:solidFill>
+                  <a:srgbClr val="1A2430"/>
+                </a:solidFill>
+                <a:latin typeface="Garamond"/>
+              </a:rPr>
+              <a:t>185,487</a:t>
+            </a:r>
+          </a:p>
+        </p:txBody>
+      </p:sp>
+      <p:sp>
+        <p:nvSpPr>
+          <p:cNvPr id="69" name="TextBox 68"/>
+          <p:cNvSpPr txBox="1"/>
+          <p:nvPr/>
+        </p:nvSpPr>
+        <p:spPr>
+          <a:xfrm>
+            <a:off x="8915400" y="3858768"/>
+            <a:ext cx="1463040" cy="274320"/>
+          </a:xfrm>
+          <a:prstGeom prst="rect">
+            <a:avLst/>
+          </a:prstGeom>
+          <a:noFill/>
+        </p:spPr>
+        <p:txBody>
+          <a:bodyPr wrap="square" lIns="0" rIns="0" tIns="0" bIns="0">
+            <a:spAutoFit/>
+          </a:bodyPr>
+          <a:lstStyle/>
+          <a:p>
+            <a:pPr algn="r">
+              <a:lnSpc>
+                <a:spcPts val="1725"/>
+              </a:lnSpc>
+              <a:spcAft>
+                <a:spcPts val="0"/>
+              </a:spcAft>
+            </a:pPr>
+            <a:r>
+              <a:rPr sz="1150" b="0" i="0">
+                <a:solidFill>
+                  <a:srgbClr val="1A2430"/>
+                </a:solidFill>
+                <a:latin typeface="Garamond"/>
+              </a:rPr>
+              <a:t>3,972</a:t>
+            </a:r>
+          </a:p>
+        </p:txBody>
+      </p:sp>
+      <p:sp>
+        <p:nvSpPr>
+          <p:cNvPr id="70" name="TextBox 69"/>
+          <p:cNvSpPr txBox="1"/>
+          <p:nvPr/>
+        </p:nvSpPr>
+        <p:spPr>
+          <a:xfrm>
+            <a:off x="6400800" y="4096512"/>
+            <a:ext cx="822960" cy="274320"/>
+          </a:xfrm>
+          <a:prstGeom prst="rect">
+            <a:avLst/>
+          </a:prstGeom>
+          <a:noFill/>
+        </p:spPr>
+        <p:txBody>
+          <a:bodyPr wrap="square" lIns="0" rIns="0" tIns="0" bIns="0">
+            <a:spAutoFit/>
+          </a:bodyPr>
+          <a:lstStyle/>
+          <a:p>
+            <a:pPr algn="l">
+              <a:lnSpc>
+                <a:spcPts val="1725"/>
+              </a:lnSpc>
+              <a:spcAft>
+                <a:spcPts val="0"/>
+              </a:spcAft>
+            </a:pPr>
+            <a:r>
+              <a:rPr sz="1150" b="0" i="0">
+                <a:solidFill>
+                  <a:srgbClr val="1A2430"/>
+                </a:solidFill>
+                <a:latin typeface="Garamond"/>
+              </a:rPr>
+              <a:t>2017</a:t>
+            </a:r>
+          </a:p>
+        </p:txBody>
+      </p:sp>
+      <p:sp>
+        <p:nvSpPr>
+          <p:cNvPr id="71" name="TextBox 70"/>
+          <p:cNvSpPr txBox="1"/>
+          <p:nvPr/>
+        </p:nvSpPr>
+        <p:spPr>
+          <a:xfrm>
+            <a:off x="7223760" y="4096512"/>
+            <a:ext cx="1600200" cy="274320"/>
+          </a:xfrm>
+          <a:prstGeom prst="rect">
+            <a:avLst/>
+          </a:prstGeom>
+          <a:noFill/>
+        </p:spPr>
+        <p:txBody>
+          <a:bodyPr wrap="square" lIns="0" rIns="0" tIns="0" bIns="0">
+            <a:spAutoFit/>
+          </a:bodyPr>
+          <a:lstStyle/>
+          <a:p>
+            <a:pPr algn="r">
+              <a:lnSpc>
+                <a:spcPts val="1725"/>
+              </a:lnSpc>
+              <a:spcAft>
+                <a:spcPts val="0"/>
+              </a:spcAft>
+            </a:pPr>
+            <a:r>
+              <a:rPr sz="1150" b="0" i="0">
+                <a:solidFill>
+                  <a:srgbClr val="1A2430"/>
+                </a:solidFill>
+                <a:latin typeface="Garamond"/>
+              </a:rPr>
+              <a:t>185,914</a:t>
+            </a:r>
+          </a:p>
+        </p:txBody>
+      </p:sp>
+      <p:sp>
+        <p:nvSpPr>
+          <p:cNvPr id="72" name="TextBox 71"/>
+          <p:cNvSpPr txBox="1"/>
+          <p:nvPr/>
+        </p:nvSpPr>
+        <p:spPr>
+          <a:xfrm>
+            <a:off x="8915400" y="4096512"/>
+            <a:ext cx="1463040" cy="274320"/>
+          </a:xfrm>
+          <a:prstGeom prst="rect">
+            <a:avLst/>
+          </a:prstGeom>
+          <a:noFill/>
+        </p:spPr>
+        <p:txBody>
+          <a:bodyPr wrap="square" lIns="0" rIns="0" tIns="0" bIns="0">
+            <a:spAutoFit/>
+          </a:bodyPr>
+          <a:lstStyle/>
+          <a:p>
+            <a:pPr algn="r">
+              <a:lnSpc>
+                <a:spcPts val="1725"/>
+              </a:lnSpc>
+              <a:spcAft>
+                <a:spcPts val="0"/>
+              </a:spcAft>
+            </a:pPr>
+            <a:r>
+              <a:rPr sz="1150" b="0" i="0">
+                <a:solidFill>
+                  <a:srgbClr val="1A2430"/>
+                </a:solidFill>
+                <a:latin typeface="Garamond"/>
+              </a:rPr>
+              <a:t>4,045</a:t>
+            </a:r>
+          </a:p>
+        </p:txBody>
+      </p:sp>
+      <p:sp>
+        <p:nvSpPr>
+          <p:cNvPr id="73" name="TextBox 72"/>
+          <p:cNvSpPr txBox="1"/>
+          <p:nvPr/>
+        </p:nvSpPr>
+        <p:spPr>
+          <a:xfrm>
+            <a:off x="6400800" y="4334256"/>
+            <a:ext cx="822960" cy="274320"/>
+          </a:xfrm>
+          <a:prstGeom prst="rect">
+            <a:avLst/>
+          </a:prstGeom>
+          <a:noFill/>
+        </p:spPr>
+        <p:txBody>
+          <a:bodyPr wrap="square" lIns="0" rIns="0" tIns="0" bIns="0">
+            <a:spAutoFit/>
+          </a:bodyPr>
+          <a:lstStyle/>
+          <a:p>
+            <a:pPr algn="l">
+              <a:lnSpc>
+                <a:spcPts val="1725"/>
+              </a:lnSpc>
+              <a:spcAft>
+                <a:spcPts val="0"/>
+              </a:spcAft>
+            </a:pPr>
+            <a:r>
+              <a:rPr sz="1150" b="0" i="0">
+                <a:solidFill>
+                  <a:srgbClr val="1A2430"/>
+                </a:solidFill>
+                <a:latin typeface="Garamond"/>
+              </a:rPr>
+              <a:t>2018</a:t>
+            </a:r>
+          </a:p>
+        </p:txBody>
+      </p:sp>
+      <p:sp>
+        <p:nvSpPr>
+          <p:cNvPr id="74" name="TextBox 73"/>
+          <p:cNvSpPr txBox="1"/>
+          <p:nvPr/>
+        </p:nvSpPr>
+        <p:spPr>
+          <a:xfrm>
+            <a:off x="7223760" y="4334256"/>
+            <a:ext cx="1600200" cy="274320"/>
+          </a:xfrm>
+          <a:prstGeom prst="rect">
+            <a:avLst/>
+          </a:prstGeom>
+          <a:noFill/>
+        </p:spPr>
+        <p:txBody>
+          <a:bodyPr wrap="square" lIns="0" rIns="0" tIns="0" bIns="0">
+            <a:spAutoFit/>
+          </a:bodyPr>
+          <a:lstStyle/>
+          <a:p>
+            <a:pPr algn="r">
+              <a:lnSpc>
+                <a:spcPts val="1725"/>
+              </a:lnSpc>
+              <a:spcAft>
+                <a:spcPts val="0"/>
+              </a:spcAft>
+            </a:pPr>
+            <a:r>
+              <a:rPr sz="1150" b="0" i="0">
+                <a:solidFill>
+                  <a:srgbClr val="1A2430"/>
+                </a:solidFill>
+                <a:latin typeface="Garamond"/>
+              </a:rPr>
+              <a:t>180,084</a:t>
+            </a:r>
+          </a:p>
+        </p:txBody>
+      </p:sp>
+      <p:sp>
+        <p:nvSpPr>
+          <p:cNvPr id="75" name="TextBox 74"/>
+          <p:cNvSpPr txBox="1"/>
+          <p:nvPr/>
+        </p:nvSpPr>
+        <p:spPr>
+          <a:xfrm>
+            <a:off x="8915400" y="4334256"/>
+            <a:ext cx="1463040" cy="274320"/>
+          </a:xfrm>
+          <a:prstGeom prst="rect">
+            <a:avLst/>
+          </a:prstGeom>
+          <a:noFill/>
+        </p:spPr>
+        <p:txBody>
+          <a:bodyPr wrap="square" lIns="0" rIns="0" tIns="0" bIns="0">
+            <a:spAutoFit/>
+          </a:bodyPr>
+          <a:lstStyle/>
+          <a:p>
+            <a:pPr algn="r">
+              <a:lnSpc>
+                <a:spcPts val="1725"/>
+              </a:lnSpc>
+              <a:spcAft>
+                <a:spcPts val="0"/>
+              </a:spcAft>
+            </a:pPr>
+            <a:r>
+              <a:rPr sz="1150" b="0" i="0">
+                <a:solidFill>
+                  <a:srgbClr val="1A2430"/>
+                </a:solidFill>
+                <a:latin typeface="Garamond"/>
+              </a:rPr>
+              <a:t>4,053</a:t>
+            </a:r>
+          </a:p>
+        </p:txBody>
+      </p:sp>
+      <p:sp>
+        <p:nvSpPr>
+          <p:cNvPr id="76" name="TextBox 75"/>
+          <p:cNvSpPr txBox="1"/>
+          <p:nvPr/>
+        </p:nvSpPr>
+        <p:spPr>
+          <a:xfrm>
+            <a:off x="6400800" y="4572000"/>
+            <a:ext cx="822960" cy="274320"/>
+          </a:xfrm>
+          <a:prstGeom prst="rect">
+            <a:avLst/>
+          </a:prstGeom>
+          <a:noFill/>
+        </p:spPr>
+        <p:txBody>
+          <a:bodyPr wrap="square" lIns="0" rIns="0" tIns="0" bIns="0">
+            <a:spAutoFit/>
+          </a:bodyPr>
+          <a:lstStyle/>
+          <a:p>
+            <a:pPr algn="l">
+              <a:lnSpc>
+                <a:spcPts val="1725"/>
+              </a:lnSpc>
+              <a:spcAft>
+                <a:spcPts val="0"/>
+              </a:spcAft>
+            </a:pPr>
+            <a:r>
+              <a:rPr sz="1150" b="0" i="0">
+                <a:solidFill>
+                  <a:srgbClr val="1A2430"/>
+                </a:solidFill>
+                <a:latin typeface="Garamond"/>
+              </a:rPr>
+              <a:t>2019</a:t>
+            </a:r>
+          </a:p>
+        </p:txBody>
+      </p:sp>
+      <p:sp>
+        <p:nvSpPr>
+          <p:cNvPr id="77" name="TextBox 76"/>
+          <p:cNvSpPr txBox="1"/>
+          <p:nvPr/>
+        </p:nvSpPr>
+        <p:spPr>
+          <a:xfrm>
+            <a:off x="7223760" y="4572000"/>
+            <a:ext cx="1600200" cy="274320"/>
+          </a:xfrm>
+          <a:prstGeom prst="rect">
+            <a:avLst/>
+          </a:prstGeom>
+          <a:noFill/>
+        </p:spPr>
+        <p:txBody>
+          <a:bodyPr wrap="square" lIns="0" rIns="0" tIns="0" bIns="0">
+            <a:spAutoFit/>
+          </a:bodyPr>
+          <a:lstStyle/>
+          <a:p>
+            <a:pPr algn="r">
+              <a:lnSpc>
+                <a:spcPts val="1725"/>
+              </a:lnSpc>
+              <a:spcAft>
+                <a:spcPts val="0"/>
+              </a:spcAft>
+            </a:pPr>
+            <a:r>
+              <a:rPr sz="1150" b="0" i="0">
+                <a:solidFill>
+                  <a:srgbClr val="1A2430"/>
+                </a:solidFill>
+                <a:latin typeface="Garamond"/>
+              </a:rPr>
+              <a:t>180,101</a:t>
+            </a:r>
+          </a:p>
+        </p:txBody>
+      </p:sp>
+      <p:sp>
+        <p:nvSpPr>
+          <p:cNvPr id="78" name="TextBox 77"/>
+          <p:cNvSpPr txBox="1"/>
+          <p:nvPr/>
+        </p:nvSpPr>
+        <p:spPr>
+          <a:xfrm>
+            <a:off x="8915400" y="4572000"/>
+            <a:ext cx="1463040" cy="274320"/>
+          </a:xfrm>
+          <a:prstGeom prst="rect">
+            <a:avLst/>
+          </a:prstGeom>
+          <a:noFill/>
+        </p:spPr>
+        <p:txBody>
+          <a:bodyPr wrap="square" lIns="0" rIns="0" tIns="0" bIns="0">
+            <a:spAutoFit/>
+          </a:bodyPr>
+          <a:lstStyle/>
+          <a:p>
+            <a:pPr algn="r">
+              <a:lnSpc>
+                <a:spcPts val="1725"/>
+              </a:lnSpc>
+              <a:spcAft>
+                <a:spcPts val="0"/>
+              </a:spcAft>
+            </a:pPr>
+            <a:r>
+              <a:rPr sz="1150" b="0" i="0">
+                <a:solidFill>
+                  <a:srgbClr val="1A2430"/>
+                </a:solidFill>
+                <a:latin typeface="Garamond"/>
+              </a:rPr>
+              <a:t>3,986</a:t>
+            </a:r>
+          </a:p>
+        </p:txBody>
+      </p:sp>
+      <p:sp>
+        <p:nvSpPr>
+          <p:cNvPr id="79" name="TextBox 78"/>
+          <p:cNvSpPr txBox="1"/>
+          <p:nvPr/>
+        </p:nvSpPr>
+        <p:spPr>
+          <a:xfrm>
+            <a:off x="6400800" y="4809744"/>
+            <a:ext cx="822960" cy="274320"/>
+          </a:xfrm>
+          <a:prstGeom prst="rect">
+            <a:avLst/>
+          </a:prstGeom>
+          <a:noFill/>
+        </p:spPr>
+        <p:txBody>
+          <a:bodyPr wrap="square" lIns="0" rIns="0" tIns="0" bIns="0">
+            <a:spAutoFit/>
+          </a:bodyPr>
+          <a:lstStyle/>
+          <a:p>
+            <a:pPr algn="l">
+              <a:lnSpc>
+                <a:spcPts val="1725"/>
+              </a:lnSpc>
+              <a:spcAft>
+                <a:spcPts val="0"/>
+              </a:spcAft>
+            </a:pPr>
+            <a:r>
+              <a:rPr sz="1150" b="0" i="0">
+                <a:solidFill>
+                  <a:srgbClr val="1A2430"/>
+                </a:solidFill>
+                <a:latin typeface="Garamond"/>
+              </a:rPr>
+              <a:t>2020</a:t>
+            </a:r>
+          </a:p>
+        </p:txBody>
+      </p:sp>
+      <p:sp>
+        <p:nvSpPr>
+          <p:cNvPr id="80" name="TextBox 79"/>
+          <p:cNvSpPr txBox="1"/>
+          <p:nvPr/>
+        </p:nvSpPr>
+        <p:spPr>
+          <a:xfrm>
+            <a:off x="7223760" y="4809744"/>
+            <a:ext cx="1600200" cy="274320"/>
+          </a:xfrm>
+          <a:prstGeom prst="rect">
+            <a:avLst/>
+          </a:prstGeom>
+          <a:noFill/>
+        </p:spPr>
+        <p:txBody>
+          <a:bodyPr wrap="square" lIns="0" rIns="0" tIns="0" bIns="0">
+            <a:spAutoFit/>
+          </a:bodyPr>
+          <a:lstStyle/>
+          <a:p>
+            <a:pPr algn="r">
+              <a:lnSpc>
+                <a:spcPts val="1725"/>
+              </a:lnSpc>
+              <a:spcAft>
+                <a:spcPts val="0"/>
+              </a:spcAft>
+            </a:pPr>
+            <a:r>
+              <a:rPr sz="1150" b="0" i="0">
+                <a:solidFill>
+                  <a:srgbClr val="1A2430"/>
+                </a:solidFill>
+                <a:latin typeface="Garamond"/>
+              </a:rPr>
+              <a:t>157,959</a:t>
+            </a:r>
+          </a:p>
+        </p:txBody>
+      </p:sp>
+      <p:sp>
+        <p:nvSpPr>
+          <p:cNvPr id="81" name="TextBox 80"/>
+          <p:cNvSpPr txBox="1"/>
+          <p:nvPr/>
+        </p:nvSpPr>
+        <p:spPr>
+          <a:xfrm>
+            <a:off x="8915400" y="4809744"/>
+            <a:ext cx="1463040" cy="274320"/>
+          </a:xfrm>
+          <a:prstGeom prst="rect">
+            <a:avLst/>
+          </a:prstGeom>
+          <a:noFill/>
+        </p:spPr>
+        <p:txBody>
+          <a:bodyPr wrap="square" lIns="0" rIns="0" tIns="0" bIns="0">
+            <a:spAutoFit/>
+          </a:bodyPr>
+          <a:lstStyle/>
+          <a:p>
+            <a:pPr algn="r">
+              <a:lnSpc>
+                <a:spcPts val="1725"/>
+              </a:lnSpc>
+              <a:spcAft>
+                <a:spcPts val="0"/>
+              </a:spcAft>
+            </a:pPr>
+            <a:r>
+              <a:rPr sz="1150" b="0" i="0">
+                <a:solidFill>
+                  <a:srgbClr val="1A2430"/>
+                </a:solidFill>
+                <a:latin typeface="Garamond"/>
+              </a:rPr>
+              <a:t>3,321</a:t>
+            </a:r>
+          </a:p>
+        </p:txBody>
+      </p:sp>
+      <p:sp>
+        <p:nvSpPr>
+          <p:cNvPr id="82" name="TextBox 81"/>
+          <p:cNvSpPr txBox="1"/>
+          <p:nvPr/>
+        </p:nvSpPr>
+        <p:spPr>
+          <a:xfrm>
+            <a:off x="6400800" y="5047488"/>
+            <a:ext cx="822960" cy="274320"/>
+          </a:xfrm>
+          <a:prstGeom prst="rect">
+            <a:avLst/>
+          </a:prstGeom>
+          <a:noFill/>
+        </p:spPr>
+        <p:txBody>
+          <a:bodyPr wrap="square" lIns="0" rIns="0" tIns="0" bIns="0">
+            <a:spAutoFit/>
+          </a:bodyPr>
+          <a:lstStyle/>
+          <a:p>
+            <a:pPr algn="l">
+              <a:lnSpc>
+                <a:spcPts val="1725"/>
+              </a:lnSpc>
+              <a:spcAft>
+                <a:spcPts val="0"/>
+              </a:spcAft>
+            </a:pPr>
+            <a:r>
+              <a:rPr sz="1150" b="0" i="0">
+                <a:solidFill>
+                  <a:srgbClr val="1A2430"/>
+                </a:solidFill>
+                <a:latin typeface="Garamond"/>
+              </a:rPr>
+              <a:t>2021</a:t>
+            </a:r>
+          </a:p>
+        </p:txBody>
+      </p:sp>
+      <p:sp>
+        <p:nvSpPr>
+          <p:cNvPr id="83" name="TextBox 82"/>
+          <p:cNvSpPr txBox="1"/>
+          <p:nvPr/>
+        </p:nvSpPr>
+        <p:spPr>
+          <a:xfrm>
+            <a:off x="7223760" y="5047488"/>
+            <a:ext cx="1600200" cy="274320"/>
+          </a:xfrm>
+          <a:prstGeom prst="rect">
+            <a:avLst/>
+          </a:prstGeom>
+          <a:noFill/>
+        </p:spPr>
+        <p:txBody>
+          <a:bodyPr wrap="square" lIns="0" rIns="0" tIns="0" bIns="0">
+            <a:spAutoFit/>
+          </a:bodyPr>
+          <a:lstStyle/>
+          <a:p>
+            <a:pPr algn="r">
+              <a:lnSpc>
+                <a:spcPts val="1725"/>
+              </a:lnSpc>
+              <a:spcAft>
+                <a:spcPts val="0"/>
+              </a:spcAft>
+            </a:pPr>
+            <a:r>
+              <a:rPr sz="1150" b="0" i="0">
+                <a:solidFill>
+                  <a:srgbClr val="1A2430"/>
+                </a:solidFill>
+                <a:latin typeface="Garamond"/>
+              </a:rPr>
+              <a:t>163,543</a:t>
+            </a:r>
+          </a:p>
+        </p:txBody>
+      </p:sp>
+      <p:sp>
+        <p:nvSpPr>
+          <p:cNvPr id="84" name="TextBox 83"/>
+          <p:cNvSpPr txBox="1"/>
+          <p:nvPr/>
+        </p:nvSpPr>
+        <p:spPr>
+          <a:xfrm>
+            <a:off x="8915400" y="5047488"/>
+            <a:ext cx="1463040" cy="274320"/>
+          </a:xfrm>
+          <a:prstGeom prst="rect">
+            <a:avLst/>
+          </a:prstGeom>
+          <a:noFill/>
+        </p:spPr>
+        <p:txBody>
+          <a:bodyPr wrap="square" lIns="0" rIns="0" tIns="0" bIns="0">
+            <a:spAutoFit/>
+          </a:bodyPr>
+          <a:lstStyle/>
+          <a:p>
+            <a:pPr algn="r">
+              <a:lnSpc>
+                <a:spcPts val="1725"/>
+              </a:lnSpc>
+              <a:spcAft>
+                <a:spcPts val="0"/>
+              </a:spcAft>
+            </a:pPr>
+            <a:r>
+              <a:rPr sz="1150" b="0" i="0">
+                <a:solidFill>
+                  <a:srgbClr val="1A2430"/>
+                </a:solidFill>
+                <a:latin typeface="Garamond"/>
+              </a:rPr>
+              <a:t>3,232</a:t>
+            </a:r>
+          </a:p>
+        </p:txBody>
+      </p:sp>
+      <p:sp>
+        <p:nvSpPr>
+          <p:cNvPr id="85" name="TextBox 84"/>
+          <p:cNvSpPr txBox="1"/>
+          <p:nvPr/>
+        </p:nvSpPr>
+        <p:spPr>
+          <a:xfrm>
+            <a:off x="6400800" y="5285232"/>
+            <a:ext cx="822960" cy="274320"/>
+          </a:xfrm>
+          <a:prstGeom prst="rect">
+            <a:avLst/>
+          </a:prstGeom>
+          <a:noFill/>
+        </p:spPr>
+        <p:txBody>
+          <a:bodyPr wrap="square" lIns="0" rIns="0" tIns="0" bIns="0">
+            <a:spAutoFit/>
+          </a:bodyPr>
+          <a:lstStyle/>
+          <a:p>
+            <a:pPr algn="l">
+              <a:lnSpc>
+                <a:spcPts val="1725"/>
+              </a:lnSpc>
+              <a:spcAft>
+                <a:spcPts val="0"/>
+              </a:spcAft>
+            </a:pPr>
+            <a:r>
+              <a:rPr sz="1150" b="0" i="0">
+                <a:solidFill>
+                  <a:srgbClr val="1A2430"/>
+                </a:solidFill>
+                <a:latin typeface="Garamond"/>
+              </a:rPr>
+              <a:t>2022</a:t>
+            </a:r>
+          </a:p>
+        </p:txBody>
+      </p:sp>
+      <p:sp>
+        <p:nvSpPr>
+          <p:cNvPr id="86" name="TextBox 85"/>
+          <p:cNvSpPr txBox="1"/>
+          <p:nvPr/>
+        </p:nvSpPr>
+        <p:spPr>
+          <a:xfrm>
+            <a:off x="7223760" y="5285232"/>
+            <a:ext cx="1600200" cy="274320"/>
+          </a:xfrm>
+          <a:prstGeom prst="rect">
+            <a:avLst/>
+          </a:prstGeom>
+          <a:noFill/>
+        </p:spPr>
+        <p:txBody>
+          <a:bodyPr wrap="square" lIns="0" rIns="0" tIns="0" bIns="0">
+            <a:spAutoFit/>
+          </a:bodyPr>
+          <a:lstStyle/>
+          <a:p>
+            <a:pPr algn="r">
+              <a:lnSpc>
+                <a:spcPts val="1725"/>
+              </a:lnSpc>
+              <a:spcAft>
+                <a:spcPts val="0"/>
+              </a:spcAft>
+            </a:pPr>
+            <a:r>
+              <a:rPr sz="1150" b="0" i="0">
+                <a:solidFill>
+                  <a:srgbClr val="1A2430"/>
+                </a:solidFill>
+                <a:latin typeface="Garamond"/>
+              </a:rPr>
+              <a:t>152,732</a:t>
+            </a:r>
+          </a:p>
+        </p:txBody>
+      </p:sp>
+      <p:sp>
+        <p:nvSpPr>
+          <p:cNvPr id="87" name="TextBox 86"/>
+          <p:cNvSpPr txBox="1"/>
+          <p:nvPr/>
+        </p:nvSpPr>
+        <p:spPr>
+          <a:xfrm>
+            <a:off x="8915400" y="5285232"/>
+            <a:ext cx="1463040" cy="274320"/>
+          </a:xfrm>
+          <a:prstGeom prst="rect">
+            <a:avLst/>
+          </a:prstGeom>
+          <a:noFill/>
+        </p:spPr>
+        <p:txBody>
+          <a:bodyPr wrap="square" lIns="0" rIns="0" tIns="0" bIns="0">
+            <a:spAutoFit/>
+          </a:bodyPr>
+          <a:lstStyle/>
+          <a:p>
+            <a:pPr algn="r">
+              <a:lnSpc>
+                <a:spcPts val="1725"/>
+              </a:lnSpc>
+              <a:spcAft>
+                <a:spcPts val="0"/>
+              </a:spcAft>
+            </a:pPr>
+            <a:r>
+              <a:rPr sz="1150" b="0" i="0">
+                <a:solidFill>
+                  <a:srgbClr val="1A2430"/>
+                </a:solidFill>
+                <a:latin typeface="Garamond"/>
+              </a:rPr>
+              <a:t>3,040</a:t>
+            </a:r>
+          </a:p>
+        </p:txBody>
+      </p:sp>
+      <p:sp>
+        <p:nvSpPr>
+          <p:cNvPr id="88" name="TextBox 87"/>
+          <p:cNvSpPr txBox="1"/>
+          <p:nvPr/>
+        </p:nvSpPr>
+        <p:spPr>
+          <a:xfrm>
+            <a:off x="6400800" y="5522976"/>
+            <a:ext cx="822960" cy="274320"/>
+          </a:xfrm>
+          <a:prstGeom prst="rect">
+            <a:avLst/>
+          </a:prstGeom>
+          <a:noFill/>
+        </p:spPr>
+        <p:txBody>
+          <a:bodyPr wrap="square" lIns="0" rIns="0" tIns="0" bIns="0">
+            <a:spAutoFit/>
+          </a:bodyPr>
+          <a:lstStyle/>
+          <a:p>
+            <a:pPr algn="l">
+              <a:lnSpc>
+                <a:spcPts val="1725"/>
+              </a:lnSpc>
+              <a:spcAft>
+                <a:spcPts val="0"/>
+              </a:spcAft>
+            </a:pPr>
+            <a:r>
+              <a:rPr sz="1150" b="0" i="0">
+                <a:solidFill>
+                  <a:srgbClr val="1A2430"/>
+                </a:solidFill>
+                <a:latin typeface="Garamond"/>
+              </a:rPr>
+              <a:t>2023</a:t>
+            </a:r>
+          </a:p>
+        </p:txBody>
+      </p:sp>
+      <p:sp>
+        <p:nvSpPr>
+          <p:cNvPr id="89" name="TextBox 88"/>
+          <p:cNvSpPr txBox="1"/>
+          <p:nvPr/>
+        </p:nvSpPr>
+        <p:spPr>
+          <a:xfrm>
+            <a:off x="7223760" y="5522976"/>
+            <a:ext cx="1600200" cy="274320"/>
+          </a:xfrm>
+          <a:prstGeom prst="rect">
+            <a:avLst/>
+          </a:prstGeom>
+          <a:noFill/>
+        </p:spPr>
+        <p:txBody>
+          <a:bodyPr wrap="square" lIns="0" rIns="0" tIns="0" bIns="0">
+            <a:spAutoFit/>
+          </a:bodyPr>
+          <a:lstStyle/>
+          <a:p>
+            <a:pPr algn="r">
+              <a:lnSpc>
+                <a:spcPts val="1725"/>
+              </a:lnSpc>
+              <a:spcAft>
+                <a:spcPts val="0"/>
+              </a:spcAft>
+            </a:pPr>
+            <a:r>
+              <a:rPr sz="1150" b="0" i="0">
+                <a:solidFill>
+                  <a:srgbClr val="1A2430"/>
+                </a:solidFill>
+                <a:latin typeface="Garamond"/>
+              </a:rPr>
+              <a:t>146,133</a:t>
+            </a:r>
+          </a:p>
+        </p:txBody>
+      </p:sp>
+      <p:sp>
+        <p:nvSpPr>
+          <p:cNvPr id="90" name="TextBox 89"/>
+          <p:cNvSpPr txBox="1"/>
+          <p:nvPr/>
+        </p:nvSpPr>
+        <p:spPr>
+          <a:xfrm>
+            <a:off x="8915400" y="5522976"/>
+            <a:ext cx="1463040" cy="274320"/>
+          </a:xfrm>
+          <a:prstGeom prst="rect">
+            <a:avLst/>
+          </a:prstGeom>
+          <a:noFill/>
+        </p:spPr>
+        <p:txBody>
+          <a:bodyPr wrap="square" lIns="0" rIns="0" tIns="0" bIns="0">
+            <a:spAutoFit/>
+          </a:bodyPr>
+          <a:lstStyle/>
+          <a:p>
+            <a:pPr algn="r">
+              <a:lnSpc>
+                <a:spcPts val="1725"/>
+              </a:lnSpc>
+              <a:spcAft>
+                <a:spcPts val="0"/>
+              </a:spcAft>
+            </a:pPr>
+            <a:r>
+              <a:rPr sz="1150" b="0" i="0">
+                <a:solidFill>
+                  <a:srgbClr val="1A2430"/>
+                </a:solidFill>
+                <a:latin typeface="Garamond"/>
+              </a:rPr>
+              <a:t>3,141</a:t>
+            </a:r>
+          </a:p>
+        </p:txBody>
+      </p:sp>
+      <p:sp>
+        <p:nvSpPr>
+          <p:cNvPr id="91" name="TextBox 90"/>
+          <p:cNvSpPr txBox="1"/>
+          <p:nvPr/>
+        </p:nvSpPr>
+        <p:spPr>
+          <a:xfrm>
+            <a:off x="6400800" y="5760720"/>
+            <a:ext cx="822960" cy="274320"/>
+          </a:xfrm>
+          <a:prstGeom prst="rect">
+            <a:avLst/>
+          </a:prstGeom>
+          <a:noFill/>
+        </p:spPr>
+        <p:txBody>
+          <a:bodyPr wrap="square" lIns="0" rIns="0" tIns="0" bIns="0">
+            <a:spAutoFit/>
+          </a:bodyPr>
+          <a:lstStyle/>
+          <a:p>
+            <a:pPr algn="l">
+              <a:lnSpc>
+                <a:spcPts val="1725"/>
+              </a:lnSpc>
+              <a:spcAft>
+                <a:spcPts val="0"/>
+              </a:spcAft>
+            </a:pPr>
+            <a:r>
+              <a:rPr sz="1150" b="0" i="0">
+                <a:solidFill>
+                  <a:srgbClr val="1A2430"/>
+                </a:solidFill>
+                <a:latin typeface="Garamond"/>
+              </a:rPr>
+              <a:t>2024</a:t>
+            </a:r>
+          </a:p>
+        </p:txBody>
+      </p:sp>
+      <p:sp>
+        <p:nvSpPr>
+          <p:cNvPr id="92" name="TextBox 91"/>
+          <p:cNvSpPr txBox="1"/>
+          <p:nvPr/>
+        </p:nvSpPr>
+        <p:spPr>
+          <a:xfrm>
+            <a:off x="7223760" y="5760720"/>
+            <a:ext cx="1600200" cy="274320"/>
+          </a:xfrm>
+          <a:prstGeom prst="rect">
+            <a:avLst/>
+          </a:prstGeom>
+          <a:noFill/>
+        </p:spPr>
+        <p:txBody>
+          <a:bodyPr wrap="square" lIns="0" rIns="0" tIns="0" bIns="0">
+            <a:spAutoFit/>
+          </a:bodyPr>
+          <a:lstStyle/>
+          <a:p>
+            <a:pPr algn="r">
+              <a:lnSpc>
+                <a:spcPts val="1725"/>
+              </a:lnSpc>
+              <a:spcAft>
+                <a:spcPts val="0"/>
+              </a:spcAft>
+            </a:pPr>
+            <a:r>
+              <a:rPr sz="1150" b="0" i="0">
+                <a:solidFill>
+                  <a:srgbClr val="1A2430"/>
+                </a:solidFill>
+                <a:latin typeface="Garamond"/>
+              </a:rPr>
+              <a:t>144,265</a:t>
+            </a:r>
+          </a:p>
+        </p:txBody>
+      </p:sp>
+      <p:sp>
+        <p:nvSpPr>
+          <p:cNvPr id="93" name="TextBox 92"/>
+          <p:cNvSpPr txBox="1"/>
+          <p:nvPr/>
+        </p:nvSpPr>
+        <p:spPr>
+          <a:xfrm>
+            <a:off x="8915400" y="5760720"/>
+            <a:ext cx="1463040" cy="274320"/>
+          </a:xfrm>
+          <a:prstGeom prst="rect">
+            <a:avLst/>
+          </a:prstGeom>
+          <a:noFill/>
+        </p:spPr>
+        <p:txBody>
+          <a:bodyPr wrap="square" lIns="0" rIns="0" tIns="0" bIns="0">
+            <a:spAutoFit/>
+          </a:bodyPr>
+          <a:lstStyle/>
+          <a:p>
+            <a:pPr algn="r">
+              <a:lnSpc>
+                <a:spcPts val="1725"/>
+              </a:lnSpc>
+              <a:spcAft>
+                <a:spcPts val="0"/>
+              </a:spcAft>
+            </a:pPr>
+            <a:r>
+              <a:rPr sz="1150" b="0" i="0">
+                <a:solidFill>
+                  <a:srgbClr val="1A2430"/>
+                </a:solidFill>
+                <a:latin typeface="Garamond"/>
+              </a:rPr>
+              <a:t>3,006</a:t>
+            </a:r>
+          </a:p>
+        </p:txBody>
+      </p:sp>
+      <p:sp>
+        <p:nvSpPr>
+          <p:cNvPr id="94" name="TextBox 93"/>
+          <p:cNvSpPr txBox="1"/>
+          <p:nvPr/>
+        </p:nvSpPr>
+        <p:spPr>
+          <a:xfrm>
+            <a:off x="6400800" y="5998464"/>
+            <a:ext cx="822960" cy="274320"/>
+          </a:xfrm>
+          <a:prstGeom prst="rect">
+            <a:avLst/>
+          </a:prstGeom>
+          <a:noFill/>
+        </p:spPr>
+        <p:txBody>
+          <a:bodyPr wrap="square" lIns="0" rIns="0" tIns="0" bIns="0">
+            <a:spAutoFit/>
+          </a:bodyPr>
+          <a:lstStyle/>
+          <a:p>
+            <a:pPr algn="l">
+              <a:lnSpc>
+                <a:spcPts val="1725"/>
+              </a:lnSpc>
+              <a:spcAft>
+                <a:spcPts val="0"/>
+              </a:spcAft>
+            </a:pPr>
+            <a:r>
+              <a:rPr sz="1150" b="0" i="0">
+                <a:solidFill>
+                  <a:srgbClr val="1A2430"/>
+                </a:solidFill>
+                <a:latin typeface="Garamond"/>
+              </a:rPr>
+              <a:t>2025</a:t>
+            </a:r>
+          </a:p>
+        </p:txBody>
+      </p:sp>
+      <p:sp>
+        <p:nvSpPr>
+          <p:cNvPr id="95" name="TextBox 94"/>
+          <p:cNvSpPr txBox="1"/>
+          <p:nvPr/>
+        </p:nvSpPr>
+        <p:spPr>
+          <a:xfrm>
+            <a:off x="7223760" y="5998464"/>
+            <a:ext cx="1600200" cy="274320"/>
+          </a:xfrm>
+          <a:prstGeom prst="rect">
+            <a:avLst/>
+          </a:prstGeom>
+          <a:noFill/>
+        </p:spPr>
+        <p:txBody>
+          <a:bodyPr wrap="square" lIns="0" rIns="0" tIns="0" bIns="0">
+            <a:spAutoFit/>
+          </a:bodyPr>
+          <a:lstStyle/>
+          <a:p>
+            <a:pPr algn="r">
+              <a:lnSpc>
+                <a:spcPts val="1725"/>
+              </a:lnSpc>
+              <a:spcAft>
+                <a:spcPts val="0"/>
+              </a:spcAft>
+            </a:pPr>
+            <a:r>
+              <a:rPr sz="1150" b="0" i="0">
+                <a:solidFill>
+                  <a:srgbClr val="1A2430"/>
+                </a:solidFill>
+                <a:latin typeface="Garamond"/>
+              </a:rPr>
+              <a:t>142,125</a:t>
+            </a:r>
+          </a:p>
+        </p:txBody>
+      </p:sp>
+      <p:sp>
+        <p:nvSpPr>
+          <p:cNvPr id="96" name="TextBox 95"/>
+          <p:cNvSpPr txBox="1"/>
+          <p:nvPr/>
+        </p:nvSpPr>
+        <p:spPr>
+          <a:xfrm>
+            <a:off x="8915400" y="5998464"/>
+            <a:ext cx="1463040" cy="274320"/>
+          </a:xfrm>
+          <a:prstGeom prst="rect">
+            <a:avLst/>
+          </a:prstGeom>
+          <a:noFill/>
+        </p:spPr>
+        <p:txBody>
+          <a:bodyPr wrap="square" lIns="0" rIns="0" tIns="0" bIns="0">
+            <a:spAutoFit/>
+          </a:bodyPr>
+          <a:lstStyle/>
+          <a:p>
+            <a:pPr algn="r">
+              <a:lnSpc>
+                <a:spcPts val="1725"/>
+              </a:lnSpc>
+              <a:spcAft>
+                <a:spcPts val="0"/>
+              </a:spcAft>
+            </a:pPr>
+            <a:r>
+              <a:rPr sz="1150" b="0" i="0">
+                <a:solidFill>
+                  <a:srgbClr val="1A2430"/>
+                </a:solidFill>
+                <a:latin typeface="Garamond"/>
+              </a:rPr>
+              <a:t>2,918</a:t>
             </a:r>
           </a:p>
         </p:txBody>
       </p:sp>
       <p:cxnSp>
         <p:nvCxnSpPr>
-          <p:cNvPr id="30" name="Connector 29"/>
+          <p:cNvPr id="97" name="Connector 96"/>
           <p:cNvCxnSpPr/>
           <p:nvPr/>
         </p:nvCxnSpPr>
         <p:spPr>
           <a:xfrm>
-            <a:off x="822960" y="5888736"/>
+            <a:off x="822960" y="6254496"/>
             <a:ext cx="10543032" cy="0"/>
           </a:xfrm>
           <a:prstGeom prst="line">
@@ -8602,14 +11417,14 @@
       </p:cxnSp>
       <p:sp>
         <p:nvSpPr>
-          <p:cNvPr id="31" name="TextBox 30"/>
+          <p:cNvPr id="98" name="TextBox 97"/>
           <p:cNvSpPr txBox="1"/>
           <p:nvPr/>
         </p:nvSpPr>
         <p:spPr>
           <a:xfrm>
-            <a:off x="960120" y="5980176"/>
-            <a:ext cx="5120640" cy="365760"/>
+            <a:off x="960120" y="6327648"/>
+            <a:ext cx="4114800" cy="274320"/>
           </a:xfrm>
           <a:prstGeom prst="rect">
             <a:avLst/>
@@ -8624,34 +11439,34 @@
           <a:p>
             <a:pPr algn="l">
               <a:lnSpc>
-                <a:spcPts val="1950"/>
+                <a:spcPts val="1800"/>
               </a:lnSpc>
               <a:spcAft>
                 <a:spcPts val="0"/>
               </a:spcAft>
             </a:pPr>
             <a:r>
-              <a:rPr sz="1300" b="0" i="0">
+              <a:rPr sz="1200" b="1" i="0">
                 <a:solidFill>
                   <a:srgbClr val="1A2430"/>
                 </a:solidFill>
                 <a:latin typeface="Garamond"/>
               </a:rPr>
-              <a:t>Observations</a:t>
-            </a:r>
-          </a:p>
-        </p:txBody>
-      </p:sp>
-      <p:sp>
-        <p:nvSpPr>
-          <p:cNvPr id="32" name="TextBox 31"/>
+              <a:t>All supplements, 1998–2025</a:t>
+            </a:r>
+          </a:p>
+        </p:txBody>
+      </p:sp>
+      <p:sp>
+        <p:nvSpPr>
+          <p:cNvPr id="99" name="TextBox 98"/>
           <p:cNvSpPr txBox="1"/>
           <p:nvPr/>
         </p:nvSpPr>
         <p:spPr>
           <a:xfrm>
-            <a:off x="6492240" y="5980176"/>
-            <a:ext cx="1828800" cy="365760"/>
+            <a:off x="6400800" y="6327648"/>
+            <a:ext cx="822960" cy="274320"/>
           </a:xfrm>
           <a:prstGeom prst="rect">
             <a:avLst/>
@@ -8664,36 +11479,36 @@
           </a:bodyPr>
           <a:lstStyle/>
           <a:p>
-            <a:pPr algn="r">
+            <a:pPr algn="l">
               <a:lnSpc>
-                <a:spcPts val="1950"/>
+                <a:spcPts val="1800"/>
               </a:lnSpc>
               <a:spcAft>
                 <a:spcPts val="0"/>
               </a:spcAft>
             </a:pPr>
             <a:r>
-              <a:rPr sz="1300" b="0" i="0">
+              <a:rPr sz="1200" b="1" i="0">
                 <a:solidFill>
                   <a:srgbClr val="1A2430"/>
                 </a:solidFill>
                 <a:latin typeface="Garamond"/>
               </a:rPr>
-              <a:t>85,497</a:t>
-            </a:r>
-          </a:p>
-        </p:txBody>
-      </p:sp>
-      <p:sp>
-        <p:nvSpPr>
-          <p:cNvPr id="33" name="TextBox 32"/>
+              <a:t/>
+            </a:r>
+          </a:p>
+        </p:txBody>
+      </p:sp>
+      <p:sp>
+        <p:nvSpPr>
+          <p:cNvPr id="100" name="TextBox 99"/>
           <p:cNvSpPr txBox="1"/>
           <p:nvPr/>
         </p:nvSpPr>
         <p:spPr>
           <a:xfrm>
-            <a:off x="8732520" y="5980176"/>
-            <a:ext cx="2331720" cy="365760"/>
+            <a:off x="7223760" y="6327648"/>
+            <a:ext cx="1600200" cy="274320"/>
           </a:xfrm>
           <a:prstGeom prst="rect">
             <a:avLst/>
@@ -8708,33 +11523,75 @@
           <a:p>
             <a:pPr algn="r">
               <a:lnSpc>
-                <a:spcPts val="1950"/>
+                <a:spcPts val="1800"/>
               </a:lnSpc>
               <a:spcAft>
                 <a:spcPts val="0"/>
               </a:spcAft>
             </a:pPr>
             <a:r>
-              <a:rPr sz="1300" b="0" i="0">
+              <a:rPr sz="1200" b="1" i="0">
                 <a:solidFill>
                   <a:srgbClr val="1A2430"/>
                 </a:solidFill>
                 <a:latin typeface="Garamond"/>
               </a:rPr>
-              <a:t>726,618</a:t>
+              <a:t>5,009,129</a:t>
+            </a:r>
+          </a:p>
+        </p:txBody>
+      </p:sp>
+      <p:sp>
+        <p:nvSpPr>
+          <p:cNvPr id="101" name="TextBox 100"/>
+          <p:cNvSpPr txBox="1"/>
+          <p:nvPr/>
+        </p:nvSpPr>
+        <p:spPr>
+          <a:xfrm>
+            <a:off x="8915400" y="6327648"/>
+            <a:ext cx="1463040" cy="274320"/>
+          </a:xfrm>
+          <a:prstGeom prst="rect">
+            <a:avLst/>
+          </a:prstGeom>
+          <a:noFill/>
+        </p:spPr>
+        <p:txBody>
+          <a:bodyPr wrap="square" lIns="0" rIns="0" tIns="0" bIns="0">
+            <a:spAutoFit/>
+          </a:bodyPr>
+          <a:lstStyle/>
+          <a:p>
+            <a:pPr algn="r">
+              <a:lnSpc>
+                <a:spcPts val="1800"/>
+              </a:lnSpc>
+              <a:spcAft>
+                <a:spcPts val="0"/>
+              </a:spcAft>
+            </a:pPr>
+            <a:r>
+              <a:rPr sz="1200" b="1" i="0">
+                <a:solidFill>
+                  <a:srgbClr val="1A2430"/>
+                </a:solidFill>
+                <a:latin typeface="Garamond"/>
+              </a:rPr>
+              <a:t>104,545</a:t>
             </a:r>
           </a:p>
         </p:txBody>
       </p:sp>
       <p:cxnSp>
         <p:nvCxnSpPr>
-          <p:cNvPr id="34" name="Connector 33"/>
+          <p:cNvPr id="102" name="Connector 101"/>
           <p:cNvCxnSpPr/>
           <p:nvPr/>
         </p:nvCxnSpPr>
         <p:spPr>
           <a:xfrm>
-            <a:off x="822960" y="6382512"/>
+            <a:off x="822960" y="6638544"/>
             <a:ext cx="10543032" cy="0"/>
           </a:xfrm>
           <a:prstGeom prst="line">
@@ -8761,48 +11618,6 @@
           </a:fontRef>
         </p:style>
       </p:cxnSp>
-      <p:sp>
-        <p:nvSpPr>
-          <p:cNvPr id="35" name="TextBox 34"/>
-          <p:cNvSpPr txBox="1"/>
-          <p:nvPr/>
-        </p:nvSpPr>
-        <p:spPr>
-          <a:xfrm>
-            <a:off x="822960" y="6473952"/>
-            <a:ext cx="10543032" cy="320040"/>
-          </a:xfrm>
-          <a:prstGeom prst="rect">
-            <a:avLst/>
-          </a:prstGeom>
-          <a:noFill/>
-        </p:spPr>
-        <p:txBody>
-          <a:bodyPr wrap="square" lIns="0" rIns="0" tIns="0" bIns="0">
-            <a:spAutoFit/>
-          </a:bodyPr>
-          <a:lstStyle/>
-          <a:p>
-            <a:pPr algn="l">
-              <a:lnSpc>
-                <a:spcPts val="1650"/>
-              </a:lnSpc>
-              <a:spcAft>
-                <a:spcPts val="0"/>
-              </a:spcAft>
-            </a:pPr>
-            <a:r>
-              <a:rPr sz="1100" b="0" i="1">
-                <a:solidFill>
-                  <a:srgbClr val="6B7480"/>
-                </a:solidFill>
-                <a:latin typeface="Garamond"/>
-              </a:rPr>
-              <a:t>March supplements 1998–2025, weighted; bachelor’s degree or higher. Wages from the 2021–2025 supplements.</a:t>
-            </a:r>
-          </a:p>
-        </p:txBody>
-      </p:sp>
     </p:spTree>
   </p:cSld>
   <p:clrMapOvr>
@@ -9580,7 +12395,7 @@
                 </a:solidFill>
                 <a:latin typeface="Garamond"/>
               </a:rPr>
-              <a:t>Measuring attrition: definitions</a:t>
+              <a:t>How the CPS follows a household</a:t>
             </a:r>
           </a:p>
         </p:txBody>
@@ -9593,8 +12408,8 @@
         </p:nvSpPr>
         <p:spPr>
           <a:xfrm>
-            <a:off x="822960" y="1417320"/>
-            <a:ext cx="3200400" cy="320040"/>
+            <a:off x="777240" y="1691640"/>
+            <a:ext cx="10698480" cy="1005840"/>
           </a:xfrm>
           <a:prstGeom prst="rect">
             <a:avLst/>
@@ -9607,7 +12422,91 @@
           </a:bodyPr>
           <a:lstStyle/>
           <a:p>
+            <a:pPr algn="just">
+              <a:lnSpc>
+                <a:spcPts val="2550"/>
+              </a:lnSpc>
+              <a:spcAft>
+                <a:spcPts val="0"/>
+              </a:spcAft>
+            </a:pPr>
+            <a:r>
+              <a:rPr sz="1700" b="0" i="0">
+                <a:solidFill>
+                  <a:srgbClr val="1A2430"/>
+                </a:solidFill>
+                <a:latin typeface="Garamond"/>
+              </a:rPr>
+              <a:t>Households enter the survey on a fixed rotation: interviewed in four consecutive months, out for eight, back for four more. Eight interviews over sixteen months.</a:t>
+            </a:r>
+          </a:p>
+        </p:txBody>
+      </p:sp>
+      <p:sp>
+        <p:nvSpPr>
+          <p:cNvPr id="5" name="TextBox 4"/>
+          <p:cNvSpPr txBox="1"/>
+          <p:nvPr/>
+        </p:nvSpPr>
+        <p:spPr>
+          <a:xfrm>
+            <a:off x="822960" y="3017520"/>
+            <a:ext cx="3200400" cy="320040"/>
+          </a:xfrm>
+          <a:prstGeom prst="rect">
+            <a:avLst/>
+          </a:prstGeom>
+          <a:noFill/>
+        </p:spPr>
+        <p:txBody>
+          <a:bodyPr wrap="square" lIns="0" rIns="0" tIns="0" bIns="0">
+            <a:spAutoFit/>
+          </a:bodyPr>
+          <a:lstStyle/>
+          <a:p>
             <a:pPr algn="l">
+              <a:lnSpc>
+                <a:spcPts val="2100"/>
+              </a:lnSpc>
+              <a:spcAft>
+                <a:spcPts val="0"/>
+              </a:spcAft>
+            </a:pPr>
+            <a:r>
+              <a:rPr sz="1400" b="1" i="0">
+                <a:solidFill>
+                  <a:srgbClr val="1F3864"/>
+                </a:solidFill>
+                <a:latin typeface="Garamond"/>
+              </a:rPr>
+              <a:t>Year 1: interviews 1–4</a:t>
+            </a:r>
+          </a:p>
+        </p:txBody>
+      </p:sp>
+      <p:sp>
+        <p:nvSpPr>
+          <p:cNvPr id="6" name="TextBox 5"/>
+          <p:cNvSpPr txBox="1"/>
+          <p:nvPr/>
+        </p:nvSpPr>
+        <p:spPr>
+          <a:xfrm>
+            <a:off x="4480560" y="3017520"/>
+            <a:ext cx="3291840" cy="320040"/>
+          </a:xfrm>
+          <a:prstGeom prst="rect">
+            <a:avLst/>
+          </a:prstGeom>
+          <a:noFill/>
+        </p:spPr>
+        <p:txBody>
+          <a:bodyPr wrap="square" lIns="0" rIns="0" tIns="0" bIns="0">
+            <a:spAutoFit/>
+          </a:bodyPr>
+          <a:lstStyle/>
+          <a:p>
+            <a:pPr algn="ctr">
               <a:lnSpc>
                 <a:spcPts val="1950"/>
               </a:lnSpc>
@@ -9616,27 +12515,27 @@
               </a:spcAft>
             </a:pPr>
             <a:r>
-              <a:rPr sz="1300" b="1" i="0">
-                <a:solidFill>
-                  <a:srgbClr val="1F3864"/>
-                </a:solidFill>
-                <a:latin typeface="Garamond"/>
-              </a:rPr>
-              <a:t>Year 1: interviews 1–4</a:t>
-            </a:r>
-          </a:p>
-        </p:txBody>
-      </p:sp>
-      <p:sp>
-        <p:nvSpPr>
-          <p:cNvPr id="5" name="TextBox 4"/>
+              <a:rPr sz="1300" b="0" i="1">
+                <a:solidFill>
+                  <a:srgbClr val="6B7480"/>
+                </a:solidFill>
+                <a:latin typeface="Garamond"/>
+              </a:rPr>
+              <a:t>8 months out of the sample</a:t>
+            </a:r>
+          </a:p>
+        </p:txBody>
+      </p:sp>
+      <p:sp>
+        <p:nvSpPr>
+          <p:cNvPr id="7" name="TextBox 6"/>
           <p:cNvSpPr txBox="1"/>
           <p:nvPr/>
         </p:nvSpPr>
         <p:spPr>
           <a:xfrm>
-            <a:off x="4480560" y="1417320"/>
-            <a:ext cx="3291840" cy="320040"/>
+            <a:off x="8229600" y="3017520"/>
+            <a:ext cx="3200400" cy="320040"/>
           </a:xfrm>
           <a:prstGeom prst="rect">
             <a:avLst/>
@@ -9649,58 +12548,16 @@
           </a:bodyPr>
           <a:lstStyle/>
           <a:p>
-            <a:pPr algn="ctr">
+            <a:pPr algn="r">
               <a:lnSpc>
-                <a:spcPts val="1875"/>
+                <a:spcPts val="2100"/>
               </a:lnSpc>
               <a:spcAft>
                 <a:spcPts val="0"/>
               </a:spcAft>
             </a:pPr>
             <a:r>
-              <a:rPr sz="1250" b="0" i="1">
-                <a:solidFill>
-                  <a:srgbClr val="6B7480"/>
-                </a:solidFill>
-                <a:latin typeface="Garamond"/>
-              </a:rPr>
-              <a:t>8 months out of the sample</a:t>
-            </a:r>
-          </a:p>
-        </p:txBody>
-      </p:sp>
-      <p:sp>
-        <p:nvSpPr>
-          <p:cNvPr id="6" name="TextBox 5"/>
-          <p:cNvSpPr txBox="1"/>
-          <p:nvPr/>
-        </p:nvSpPr>
-        <p:spPr>
-          <a:xfrm>
-            <a:off x="8229600" y="1417320"/>
-            <a:ext cx="3200400" cy="320040"/>
-          </a:xfrm>
-          <a:prstGeom prst="rect">
-            <a:avLst/>
-          </a:prstGeom>
-          <a:noFill/>
-        </p:spPr>
-        <p:txBody>
-          <a:bodyPr wrap="square" lIns="0" rIns="0" tIns="0" bIns="0">
-            <a:spAutoFit/>
-          </a:bodyPr>
-          <a:lstStyle/>
-          <a:p>
-            <a:pPr algn="r">
-              <a:lnSpc>
-                <a:spcPts val="1950"/>
-              </a:lnSpc>
-              <a:spcAft>
-                <a:spcPts val="0"/>
-              </a:spcAft>
-            </a:pPr>
-            <a:r>
-              <a:rPr sz="1300" b="1" i="0">
+              <a:rPr sz="1400" b="1" i="0">
                 <a:solidFill>
                   <a:srgbClr val="7B2530"/>
                 </a:solidFill>
@@ -9713,14 +12570,14 @@
       </p:sp>
       <p:sp>
         <p:nvSpPr>
-          <p:cNvPr id="7" name="Rectangle 6"/>
+          <p:cNvPr id="8" name="Rectangle 7"/>
           <p:cNvSpPr/>
           <p:nvPr/>
         </p:nvSpPr>
         <p:spPr>
           <a:xfrm>
-            <a:off x="822960" y="1755648"/>
-            <a:ext cx="658939" cy="457200"/>
+            <a:off x="822960" y="3401568"/>
+            <a:ext cx="658939" cy="566928"/>
           </a:xfrm>
           <a:prstGeom prst="rect">
             <a:avLst/>
@@ -9766,14 +12623,14 @@
       </p:sp>
       <p:sp>
         <p:nvSpPr>
-          <p:cNvPr id="8" name="Rectangle 7"/>
+          <p:cNvPr id="9" name="Rectangle 8"/>
           <p:cNvSpPr/>
           <p:nvPr/>
         </p:nvSpPr>
         <p:spPr>
           <a:xfrm>
-            <a:off x="1481899" y="1755648"/>
-            <a:ext cx="658939" cy="457200"/>
+            <a:off x="1481899" y="3401568"/>
+            <a:ext cx="658939" cy="566928"/>
           </a:xfrm>
           <a:prstGeom prst="rect">
             <a:avLst/>
@@ -9819,14 +12676,14 @@
       </p:sp>
       <p:sp>
         <p:nvSpPr>
-          <p:cNvPr id="9" name="Rectangle 8"/>
+          <p:cNvPr id="10" name="Rectangle 9"/>
           <p:cNvSpPr/>
           <p:nvPr/>
         </p:nvSpPr>
         <p:spPr>
           <a:xfrm>
-            <a:off x="2140839" y="1755648"/>
-            <a:ext cx="658939" cy="457200"/>
+            <a:off x="2140839" y="3401568"/>
+            <a:ext cx="658939" cy="566928"/>
           </a:xfrm>
           <a:prstGeom prst="rect">
             <a:avLst/>
@@ -9872,14 +12729,14 @@
       </p:sp>
       <p:sp>
         <p:nvSpPr>
-          <p:cNvPr id="10" name="Rectangle 9"/>
+          <p:cNvPr id="11" name="Rectangle 10"/>
           <p:cNvSpPr/>
           <p:nvPr/>
         </p:nvSpPr>
         <p:spPr>
           <a:xfrm>
-            <a:off x="2799778" y="1755648"/>
-            <a:ext cx="658939" cy="457200"/>
+            <a:off x="2799778" y="3401568"/>
+            <a:ext cx="658939" cy="566928"/>
           </a:xfrm>
           <a:prstGeom prst="rect">
             <a:avLst/>
@@ -9925,14 +12782,14 @@
       </p:sp>
       <p:sp>
         <p:nvSpPr>
-          <p:cNvPr id="11" name="Rectangle 10"/>
+          <p:cNvPr id="12" name="Rectangle 11"/>
           <p:cNvSpPr/>
           <p:nvPr/>
         </p:nvSpPr>
         <p:spPr>
           <a:xfrm>
-            <a:off x="3458718" y="1755648"/>
-            <a:ext cx="658939" cy="457200"/>
+            <a:off x="3458718" y="3401568"/>
+            <a:ext cx="658939" cy="566928"/>
           </a:xfrm>
           <a:prstGeom prst="rect">
             <a:avLst/>
@@ -9980,14 +12837,14 @@
       </p:sp>
       <p:sp>
         <p:nvSpPr>
-          <p:cNvPr id="12" name="Rectangle 11"/>
+          <p:cNvPr id="13" name="Rectangle 12"/>
           <p:cNvSpPr/>
           <p:nvPr/>
         </p:nvSpPr>
         <p:spPr>
           <a:xfrm>
-            <a:off x="4117657" y="1755648"/>
-            <a:ext cx="658939" cy="457200"/>
+            <a:off x="4117657" y="3401568"/>
+            <a:ext cx="658939" cy="566928"/>
           </a:xfrm>
           <a:prstGeom prst="rect">
             <a:avLst/>
@@ -10035,14 +12892,14 @@
       </p:sp>
       <p:sp>
         <p:nvSpPr>
-          <p:cNvPr id="13" name="Rectangle 12"/>
+          <p:cNvPr id="14" name="Rectangle 13"/>
           <p:cNvSpPr/>
           <p:nvPr/>
         </p:nvSpPr>
         <p:spPr>
           <a:xfrm>
-            <a:off x="4776597" y="1755648"/>
-            <a:ext cx="658939" cy="457200"/>
+            <a:off x="4776597" y="3401568"/>
+            <a:ext cx="658939" cy="566928"/>
           </a:xfrm>
           <a:prstGeom prst="rect">
             <a:avLst/>
@@ -10090,14 +12947,14 @@
       </p:sp>
       <p:sp>
         <p:nvSpPr>
-          <p:cNvPr id="14" name="Rectangle 13"/>
+          <p:cNvPr id="15" name="Rectangle 14"/>
           <p:cNvSpPr/>
           <p:nvPr/>
         </p:nvSpPr>
         <p:spPr>
           <a:xfrm>
-            <a:off x="5435536" y="1755648"/>
-            <a:ext cx="658939" cy="457200"/>
+            <a:off x="5435536" y="3401568"/>
+            <a:ext cx="658939" cy="566928"/>
           </a:xfrm>
           <a:prstGeom prst="rect">
             <a:avLst/>
@@ -10145,14 +13002,14 @@
       </p:sp>
       <p:sp>
         <p:nvSpPr>
-          <p:cNvPr id="15" name="Rectangle 14"/>
+          <p:cNvPr id="16" name="Rectangle 15"/>
           <p:cNvSpPr/>
           <p:nvPr/>
         </p:nvSpPr>
         <p:spPr>
           <a:xfrm>
-            <a:off x="6094476" y="1755648"/>
-            <a:ext cx="658939" cy="457200"/>
+            <a:off x="6094476" y="3401568"/>
+            <a:ext cx="658939" cy="566928"/>
           </a:xfrm>
           <a:prstGeom prst="rect">
             <a:avLst/>
@@ -10200,14 +13057,14 @@
       </p:sp>
       <p:sp>
         <p:nvSpPr>
-          <p:cNvPr id="16" name="Rectangle 15"/>
+          <p:cNvPr id="17" name="Rectangle 16"/>
           <p:cNvSpPr/>
           <p:nvPr/>
         </p:nvSpPr>
         <p:spPr>
           <a:xfrm>
-            <a:off x="6753415" y="1755648"/>
-            <a:ext cx="658939" cy="457200"/>
+            <a:off x="6753415" y="3401568"/>
+            <a:ext cx="658939" cy="566928"/>
           </a:xfrm>
           <a:prstGeom prst="rect">
             <a:avLst/>
@@ -10255,14 +13112,14 @@
       </p:sp>
       <p:sp>
         <p:nvSpPr>
-          <p:cNvPr id="17" name="Rectangle 16"/>
+          <p:cNvPr id="18" name="Rectangle 17"/>
           <p:cNvSpPr/>
           <p:nvPr/>
         </p:nvSpPr>
         <p:spPr>
           <a:xfrm>
-            <a:off x="7412354" y="1755648"/>
-            <a:ext cx="658939" cy="457200"/>
+            <a:off x="7412354" y="3401568"/>
+            <a:ext cx="658939" cy="566928"/>
           </a:xfrm>
           <a:prstGeom prst="rect">
             <a:avLst/>
@@ -10310,14 +13167,14 @@
       </p:sp>
       <p:sp>
         <p:nvSpPr>
-          <p:cNvPr id="18" name="Rectangle 17"/>
+          <p:cNvPr id="19" name="Rectangle 18"/>
           <p:cNvSpPr/>
           <p:nvPr/>
         </p:nvSpPr>
         <p:spPr>
           <a:xfrm>
-            <a:off x="8071294" y="1755648"/>
-            <a:ext cx="658939" cy="457200"/>
+            <a:off x="8071294" y="3401568"/>
+            <a:ext cx="658939" cy="566928"/>
           </a:xfrm>
           <a:prstGeom prst="rect">
             <a:avLst/>
@@ -10365,14 +13222,14 @@
       </p:sp>
       <p:sp>
         <p:nvSpPr>
-          <p:cNvPr id="19" name="Rectangle 18"/>
+          <p:cNvPr id="20" name="Rectangle 19"/>
           <p:cNvSpPr/>
           <p:nvPr/>
         </p:nvSpPr>
         <p:spPr>
           <a:xfrm>
-            <a:off x="8730234" y="1755648"/>
-            <a:ext cx="658939" cy="457200"/>
+            <a:off x="8730234" y="3401568"/>
+            <a:ext cx="658939" cy="566928"/>
           </a:xfrm>
           <a:prstGeom prst="rect">
             <a:avLst/>
@@ -10418,14 +13275,14 @@
       </p:sp>
       <p:sp>
         <p:nvSpPr>
-          <p:cNvPr id="20" name="Rectangle 19"/>
+          <p:cNvPr id="21" name="Rectangle 20"/>
           <p:cNvSpPr/>
           <p:nvPr/>
         </p:nvSpPr>
         <p:spPr>
           <a:xfrm>
-            <a:off x="9389173" y="1755648"/>
-            <a:ext cx="658939" cy="457200"/>
+            <a:off x="9389173" y="3401568"/>
+            <a:ext cx="658939" cy="566928"/>
           </a:xfrm>
           <a:prstGeom prst="rect">
             <a:avLst/>
@@ -10471,14 +13328,14 @@
       </p:sp>
       <p:sp>
         <p:nvSpPr>
-          <p:cNvPr id="21" name="Rectangle 20"/>
+          <p:cNvPr id="22" name="Rectangle 21"/>
           <p:cNvSpPr/>
           <p:nvPr/>
         </p:nvSpPr>
         <p:spPr>
           <a:xfrm>
-            <a:off x="10048113" y="1755648"/>
-            <a:ext cx="658939" cy="457200"/>
+            <a:off x="10048113" y="3401568"/>
+            <a:ext cx="658939" cy="566928"/>
           </a:xfrm>
           <a:prstGeom prst="rect">
             <a:avLst/>
@@ -10524,14 +13381,14 @@
       </p:sp>
       <p:sp>
         <p:nvSpPr>
-          <p:cNvPr id="22" name="Rectangle 21"/>
+          <p:cNvPr id="23" name="Rectangle 22"/>
           <p:cNvSpPr/>
           <p:nvPr/>
         </p:nvSpPr>
         <p:spPr>
           <a:xfrm>
-            <a:off x="10707052" y="1755648"/>
-            <a:ext cx="658939" cy="457200"/>
+            <a:off x="10707052" y="3401568"/>
+            <a:ext cx="658939" cy="566928"/>
           </a:xfrm>
           <a:prstGeom prst="rect">
             <a:avLst/>
@@ -10577,14 +13434,14 @@
       </p:sp>
       <p:sp>
         <p:nvSpPr>
-          <p:cNvPr id="23" name="TextBox 22"/>
+          <p:cNvPr id="24" name="TextBox 23"/>
           <p:cNvSpPr txBox="1"/>
           <p:nvPr/>
         </p:nvSpPr>
         <p:spPr>
           <a:xfrm>
-            <a:off x="822960" y="2340864"/>
-            <a:ext cx="3657600" cy="365760"/>
+            <a:off x="777240" y="4480560"/>
+            <a:ext cx="10698480" cy="1097280"/>
           </a:xfrm>
           <a:prstGeom prst="rect">
             <a:avLst/>
@@ -10597,1006 +13454,26 @@
           </a:bodyPr>
           <a:lstStyle/>
           <a:p>
-            <a:pPr algn="l">
+            <a:pPr algn="just">
               <a:lnSpc>
-                <a:spcPts val="2250"/>
+                <a:spcPts val="2550"/>
               </a:lnSpc>
               <a:spcAft>
                 <a:spcPts val="0"/>
               </a:spcAft>
             </a:pPr>
             <a:r>
-              <a:rPr sz="1500" b="1" i="0">
-                <a:solidFill>
-                  <a:srgbClr val="26456E"/>
-                </a:solidFill>
-                <a:latin typeface="Garamond"/>
-              </a:rPr>
-              <a:t>Definition 1  (benchmark)</a:t>
-            </a:r>
-          </a:p>
-        </p:txBody>
-      </p:sp>
-      <p:cxnSp>
-        <p:nvCxnSpPr>
-          <p:cNvPr id="24" name="Connector 23"/>
-          <p:cNvCxnSpPr/>
-          <p:nvPr/>
-        </p:nvCxnSpPr>
-        <p:spPr>
-          <a:xfrm>
-            <a:off x="822960" y="2743200"/>
-            <a:ext cx="10543032" cy="0"/>
-          </a:xfrm>
-          <a:prstGeom prst="line">
-            <a:avLst/>
-          </a:prstGeom>
-          <a:ln w="12700">
-            <a:solidFill>
-              <a:srgbClr val="1A2430"/>
-            </a:solidFill>
-          </a:ln>
-        </p:spPr>
-        <p:style>
-          <a:lnRef idx="2">
-            <a:schemeClr val="accent1"/>
-          </a:lnRef>
-          <a:fillRef idx="0">
-            <a:schemeClr val="accent1"/>
-          </a:fillRef>
-          <a:effectRef idx="1">
-            <a:schemeClr val="accent1"/>
-          </a:effectRef>
-          <a:fontRef idx="minor">
-            <a:schemeClr val="tx1"/>
-          </a:fontRef>
-        </p:style>
-      </p:cxnSp>
-      <p:sp>
-        <p:nvSpPr>
-          <p:cNvPr id="25" name="TextBox 24"/>
-          <p:cNvSpPr txBox="1"/>
-          <p:nvPr/>
-        </p:nvSpPr>
-        <p:spPr>
-          <a:xfrm>
-            <a:off x="1005840" y="2871216"/>
-            <a:ext cx="1463040" cy="384048"/>
-          </a:xfrm>
-          <a:prstGeom prst="rect">
-            <a:avLst/>
-          </a:prstGeom>
-          <a:noFill/>
-        </p:spPr>
-        <p:txBody>
-          <a:bodyPr wrap="square" lIns="0" rIns="0" tIns="0" bIns="0">
-            <a:spAutoFit/>
-          </a:bodyPr>
-          <a:lstStyle/>
-          <a:p>
-            <a:pPr algn="l">
-              <a:lnSpc>
-                <a:spcPts val="1950"/>
-              </a:lnSpc>
-              <a:spcAft>
-                <a:spcPts val="0"/>
-              </a:spcAft>
-            </a:pPr>
-            <a:r>
-              <a:rPr sz="1300" b="1" i="0">
-                <a:solidFill>
-                  <a:srgbClr val="1F3864"/>
-                </a:solidFill>
-                <a:latin typeface="Garamond"/>
-              </a:rPr>
-              <a:t>Teacher</a:t>
-            </a:r>
-          </a:p>
-        </p:txBody>
-      </p:sp>
-      <p:sp>
-        <p:nvSpPr>
-          <p:cNvPr id="26" name="TextBox 25"/>
-          <p:cNvSpPr txBox="1"/>
-          <p:nvPr/>
-        </p:nvSpPr>
-        <p:spPr>
-          <a:xfrm>
-            <a:off x="2651760" y="2871216"/>
-            <a:ext cx="8503920" cy="384048"/>
-          </a:xfrm>
-          <a:prstGeom prst="rect">
-            <a:avLst/>
-          </a:prstGeom>
-          <a:noFill/>
-        </p:spPr>
-        <p:txBody>
-          <a:bodyPr wrap="square" lIns="0" rIns="0" tIns="0" bIns="0">
-            <a:spAutoFit/>
-          </a:bodyPr>
-          <a:lstStyle/>
-          <a:p>
-            <a:pPr algn="l">
-              <a:lnSpc>
-                <a:spcPts val="1950"/>
-              </a:lnSpc>
-              <a:spcAft>
-                <a:spcPts val="0"/>
-              </a:spcAft>
-            </a:pPr>
-            <a:r>
-              <a:rPr sz="1300" b="0" i="0">
+              <a:rPr sz="1700" b="0" i="0">
                 <a:solidFill>
                   <a:srgbClr val="1A2430"/>
                 </a:solidFill>
                 <a:latin typeface="Garamond"/>
               </a:rPr>
-              <a:t>teaching, with a bachelor’s degree, in at least two year-1 interviews</a:t>
-            </a:r>
-          </a:p>
-        </p:txBody>
-      </p:sp>
-      <p:sp>
-        <p:nvSpPr>
-          <p:cNvPr id="27" name="TextBox 26"/>
-          <p:cNvSpPr txBox="1"/>
-          <p:nvPr/>
-        </p:nvSpPr>
-        <p:spPr>
-          <a:xfrm>
-            <a:off x="1005840" y="3273552"/>
-            <a:ext cx="1463040" cy="384048"/>
-          </a:xfrm>
-          <a:prstGeom prst="rect">
-            <a:avLst/>
-          </a:prstGeom>
-          <a:noFill/>
-        </p:spPr>
-        <p:txBody>
-          <a:bodyPr wrap="square" lIns="0" rIns="0" tIns="0" bIns="0">
-            <a:spAutoFit/>
-          </a:bodyPr>
-          <a:lstStyle/>
-          <a:p>
-            <a:pPr algn="l">
-              <a:lnSpc>
-                <a:spcPts val="1950"/>
-              </a:lnSpc>
-              <a:spcAft>
-                <a:spcPts val="0"/>
-              </a:spcAft>
-            </a:pPr>
-            <a:r>
-              <a:rPr sz="1300" b="1" i="0">
-                <a:solidFill>
-                  <a:srgbClr val="1F3864"/>
-                </a:solidFill>
-                <a:latin typeface="Garamond"/>
-              </a:rPr>
-              <a:t>Stayer</a:t>
-            </a:r>
-          </a:p>
-        </p:txBody>
-      </p:sp>
-      <p:sp>
-        <p:nvSpPr>
-          <p:cNvPr id="28" name="TextBox 27"/>
-          <p:cNvSpPr txBox="1"/>
-          <p:nvPr/>
-        </p:nvSpPr>
-        <p:spPr>
-          <a:xfrm>
-            <a:off x="2651760" y="3273552"/>
-            <a:ext cx="8503920" cy="384048"/>
-          </a:xfrm>
-          <a:prstGeom prst="rect">
-            <a:avLst/>
-          </a:prstGeom>
-          <a:noFill/>
-        </p:spPr>
-        <p:txBody>
-          <a:bodyPr wrap="square" lIns="0" rIns="0" tIns="0" bIns="0">
-            <a:spAutoFit/>
-          </a:bodyPr>
-          <a:lstStyle/>
-          <a:p>
-            <a:pPr algn="l">
-              <a:lnSpc>
-                <a:spcPts val="1950"/>
-              </a:lnSpc>
-              <a:spcAft>
-                <a:spcPts val="0"/>
-              </a:spcAft>
-            </a:pPr>
-            <a:r>
-              <a:rPr sz="1300" b="0" i="0">
-                <a:solidFill>
-                  <a:srgbClr val="1A2430"/>
-                </a:solidFill>
-                <a:latin typeface="Garamond"/>
-              </a:rPr>
-              <a:t>teaching in at least one year-2 interview</a:t>
-            </a:r>
-          </a:p>
-        </p:txBody>
-      </p:sp>
-      <p:sp>
-        <p:nvSpPr>
-          <p:cNvPr id="29" name="TextBox 28"/>
-          <p:cNvSpPr txBox="1"/>
-          <p:nvPr/>
-        </p:nvSpPr>
-        <p:spPr>
-          <a:xfrm>
-            <a:off x="1005840" y="3675888"/>
-            <a:ext cx="1463040" cy="384048"/>
-          </a:xfrm>
-          <a:prstGeom prst="rect">
-            <a:avLst/>
-          </a:prstGeom>
-          <a:noFill/>
-        </p:spPr>
-        <p:txBody>
-          <a:bodyPr wrap="square" lIns="0" rIns="0" tIns="0" bIns="0">
-            <a:spAutoFit/>
-          </a:bodyPr>
-          <a:lstStyle/>
-          <a:p>
-            <a:pPr algn="l">
-              <a:lnSpc>
-                <a:spcPts val="1950"/>
-              </a:lnSpc>
-              <a:spcAft>
-                <a:spcPts val="0"/>
-              </a:spcAft>
-            </a:pPr>
-            <a:r>
-              <a:rPr sz="1300" b="1" i="0">
-                <a:solidFill>
-                  <a:srgbClr val="7B2530"/>
-                </a:solidFill>
-                <a:latin typeface="Garamond"/>
-              </a:rPr>
-              <a:t>Leaver</a:t>
-            </a:r>
-          </a:p>
-        </p:txBody>
-      </p:sp>
-      <p:sp>
-        <p:nvSpPr>
-          <p:cNvPr id="30" name="TextBox 29"/>
-          <p:cNvSpPr txBox="1"/>
-          <p:nvPr/>
-        </p:nvSpPr>
-        <p:spPr>
-          <a:xfrm>
-            <a:off x="2651760" y="3675888"/>
-            <a:ext cx="8503920" cy="384048"/>
-          </a:xfrm>
-          <a:prstGeom prst="rect">
-            <a:avLst/>
-          </a:prstGeom>
-          <a:noFill/>
-        </p:spPr>
-        <p:txBody>
-          <a:bodyPr wrap="square" lIns="0" rIns="0" tIns="0" bIns="0">
-            <a:spAutoFit/>
-          </a:bodyPr>
-          <a:lstStyle/>
-          <a:p>
-            <a:pPr algn="l">
-              <a:lnSpc>
-                <a:spcPts val="1950"/>
-              </a:lnSpc>
-              <a:spcAft>
-                <a:spcPts val="0"/>
-              </a:spcAft>
-            </a:pPr>
-            <a:r>
-              <a:rPr sz="1300" b="0" i="0">
-                <a:solidFill>
-                  <a:srgbClr val="1A2430"/>
-                </a:solidFill>
-                <a:latin typeface="Garamond"/>
-              </a:rPr>
-              <a:t>never teaching in year 2, given two or more interviews, one outside the summer</a:t>
-            </a:r>
-          </a:p>
-        </p:txBody>
-      </p:sp>
-      <p:cxnSp>
-        <p:nvCxnSpPr>
-          <p:cNvPr id="31" name="Connector 30"/>
-          <p:cNvCxnSpPr/>
-          <p:nvPr/>
-        </p:nvCxnSpPr>
-        <p:spPr>
-          <a:xfrm>
-            <a:off x="822960" y="4123944"/>
-            <a:ext cx="10543032" cy="0"/>
-          </a:xfrm>
-          <a:prstGeom prst="line">
-            <a:avLst/>
-          </a:prstGeom>
-          <a:ln w="12700">
-            <a:solidFill>
-              <a:srgbClr val="1A2430"/>
-            </a:solidFill>
-          </a:ln>
-        </p:spPr>
-        <p:style>
-          <a:lnRef idx="2">
-            <a:schemeClr val="accent1"/>
-          </a:lnRef>
-          <a:fillRef idx="0">
-            <a:schemeClr val="accent1"/>
-          </a:fillRef>
-          <a:effectRef idx="1">
-            <a:schemeClr val="accent1"/>
-          </a:effectRef>
-          <a:fontRef idx="minor">
-            <a:schemeClr val="tx1"/>
-          </a:fontRef>
-        </p:style>
-      </p:cxnSp>
-      <p:sp>
-        <p:nvSpPr>
-          <p:cNvPr id="32" name="TextBox 31"/>
-          <p:cNvSpPr txBox="1"/>
-          <p:nvPr/>
-        </p:nvSpPr>
-        <p:spPr>
-          <a:xfrm>
-            <a:off x="822960" y="4169664"/>
-            <a:ext cx="5486400" cy="365760"/>
-          </a:xfrm>
-          <a:prstGeom prst="rect">
-            <a:avLst/>
-          </a:prstGeom>
-          <a:noFill/>
-        </p:spPr>
-        <p:txBody>
-          <a:bodyPr wrap="square" lIns="0" rIns="0" tIns="0" bIns="0">
-            <a:spAutoFit/>
-          </a:bodyPr>
-          <a:lstStyle/>
-          <a:p>
-            <a:pPr algn="l">
-              <a:lnSpc>
-                <a:spcPts val="2250"/>
-              </a:lnSpc>
-              <a:spcAft>
-                <a:spcPts val="0"/>
-              </a:spcAft>
-            </a:pPr>
-            <a:r>
-              <a:rPr sz="1500" b="1" i="0">
-                <a:solidFill>
-                  <a:srgbClr val="26456E"/>
-                </a:solidFill>
-                <a:latin typeface="Garamond"/>
-              </a:rPr>
-              <a:t>Alternative measures</a:t>
-            </a:r>
-          </a:p>
-        </p:txBody>
-      </p:sp>
-      <p:sp>
-        <p:nvSpPr>
-          <p:cNvPr id="33" name="TextBox 32"/>
-          <p:cNvSpPr txBox="1"/>
-          <p:nvPr/>
-        </p:nvSpPr>
-        <p:spPr>
-          <a:xfrm>
-            <a:off x="10058400" y="4169664"/>
-            <a:ext cx="1280160" cy="365760"/>
-          </a:xfrm>
-          <a:prstGeom prst="rect">
-            <a:avLst/>
-          </a:prstGeom>
-          <a:noFill/>
-        </p:spPr>
-        <p:txBody>
-          <a:bodyPr wrap="square" lIns="0" rIns="0" tIns="0" bIns="0">
-            <a:spAutoFit/>
-          </a:bodyPr>
-          <a:lstStyle/>
-          <a:p>
-            <a:pPr algn="l">
-              <a:lnSpc>
-                <a:spcPts val="1950"/>
-              </a:lnSpc>
-              <a:spcAft>
-                <a:spcPts val="0"/>
-              </a:spcAft>
-            </a:pPr>
-            <a:r>
-              <a:rPr sz="1300" b="1" i="0">
-                <a:solidFill>
-                  <a:srgbClr val="1A2430"/>
-                </a:solidFill>
-                <a:latin typeface="Garamond"/>
-              </a:rPr>
-              <a:t>2021</a:t>
-            </a:r>
-          </a:p>
-        </p:txBody>
-      </p:sp>
-      <p:cxnSp>
-        <p:nvCxnSpPr>
-          <p:cNvPr id="34" name="Connector 33"/>
-          <p:cNvCxnSpPr/>
-          <p:nvPr/>
-        </p:nvCxnSpPr>
-        <p:spPr>
-          <a:xfrm>
-            <a:off x="822960" y="4553712"/>
-            <a:ext cx="10543032" cy="0"/>
-          </a:xfrm>
-          <a:prstGeom prst="line">
-            <a:avLst/>
-          </a:prstGeom>
-          <a:ln w="7620">
-            <a:solidFill>
-              <a:srgbClr val="1A2430"/>
-            </a:solidFill>
-          </a:ln>
-        </p:spPr>
-        <p:style>
-          <a:lnRef idx="2">
-            <a:schemeClr val="accent1"/>
-          </a:lnRef>
-          <a:fillRef idx="0">
-            <a:schemeClr val="accent1"/>
-          </a:fillRef>
-          <a:effectRef idx="1">
-            <a:schemeClr val="accent1"/>
-          </a:effectRef>
-          <a:fontRef idx="minor">
-            <a:schemeClr val="tx1"/>
-          </a:fontRef>
-        </p:style>
-      </p:cxnSp>
-      <p:sp>
-        <p:nvSpPr>
-          <p:cNvPr id="35" name="TextBox 34"/>
-          <p:cNvSpPr txBox="1"/>
-          <p:nvPr/>
-        </p:nvSpPr>
-        <p:spPr>
-          <a:xfrm>
-            <a:off x="1005840" y="4663440"/>
-            <a:ext cx="5486400" cy="329184"/>
-          </a:xfrm>
-          <a:prstGeom prst="rect">
-            <a:avLst/>
-          </a:prstGeom>
-          <a:noFill/>
-        </p:spPr>
-        <p:txBody>
-          <a:bodyPr wrap="square" lIns="0" rIns="0" tIns="0" bIns="0">
-            <a:spAutoFit/>
-          </a:bodyPr>
-          <a:lstStyle/>
-          <a:p>
-            <a:pPr algn="l">
-              <a:lnSpc>
-                <a:spcPts val="1800"/>
-              </a:lnSpc>
-              <a:spcAft>
-                <a:spcPts val="0"/>
-              </a:spcAft>
-            </a:pPr>
-            <a:r>
-              <a:rPr sz="1200" b="0" i="0">
-                <a:solidFill>
-                  <a:srgbClr val="1A2430"/>
-                </a:solidFill>
-                <a:latin typeface="Garamond"/>
-              </a:rPr>
-              <a:t>Definition 1</a:t>
-            </a:r>
-          </a:p>
-        </p:txBody>
-      </p:sp>
-      <p:sp>
-        <p:nvSpPr>
-          <p:cNvPr id="36" name="TextBox 35"/>
-          <p:cNvSpPr txBox="1"/>
-          <p:nvPr/>
-        </p:nvSpPr>
-        <p:spPr>
-          <a:xfrm>
-            <a:off x="10058400" y="4663440"/>
-            <a:ext cx="1097280" cy="329184"/>
-          </a:xfrm>
-          <a:prstGeom prst="rect">
-            <a:avLst/>
-          </a:prstGeom>
-          <a:noFill/>
-        </p:spPr>
-        <p:txBody>
-          <a:bodyPr wrap="square" lIns="0" rIns="0" tIns="0" bIns="0">
-            <a:spAutoFit/>
-          </a:bodyPr>
-          <a:lstStyle/>
-          <a:p>
-            <a:pPr algn="l">
-              <a:lnSpc>
-                <a:spcPts val="1800"/>
-              </a:lnSpc>
-              <a:spcAft>
-                <a:spcPts val="0"/>
-              </a:spcAft>
-            </a:pPr>
-            <a:r>
-              <a:rPr sz="1200" b="1" i="0">
-                <a:solidFill>
-                  <a:srgbClr val="1A2430"/>
-                </a:solidFill>
-                <a:latin typeface="Garamond"/>
-              </a:rPr>
-              <a:t>12.9</a:t>
-            </a:r>
-          </a:p>
-        </p:txBody>
-      </p:sp>
-      <p:sp>
-        <p:nvSpPr>
-          <p:cNvPr id="37" name="TextBox 36"/>
-          <p:cNvSpPr txBox="1"/>
-          <p:nvPr/>
-        </p:nvSpPr>
-        <p:spPr>
-          <a:xfrm>
-            <a:off x="1005840" y="4992624"/>
-            <a:ext cx="5486400" cy="329184"/>
-          </a:xfrm>
-          <a:prstGeom prst="rect">
-            <a:avLst/>
-          </a:prstGeom>
-          <a:noFill/>
-        </p:spPr>
-        <p:txBody>
-          <a:bodyPr wrap="square" lIns="0" rIns="0" tIns="0" bIns="0">
-            <a:spAutoFit/>
-          </a:bodyPr>
-          <a:lstStyle/>
-          <a:p>
-            <a:pPr algn="l">
-              <a:lnSpc>
-                <a:spcPts val="1800"/>
-              </a:lnSpc>
-              <a:spcAft>
-                <a:spcPts val="0"/>
-              </a:spcAft>
-            </a:pPr>
-            <a:r>
-              <a:rPr sz="1200" b="0" i="0">
-                <a:solidFill>
-                  <a:srgbClr val="1A2430"/>
-                </a:solidFill>
-                <a:latin typeface="Garamond"/>
-              </a:rPr>
-              <a:t>Annual recall</a:t>
-            </a:r>
-          </a:p>
-        </p:txBody>
-      </p:sp>
-      <p:sp>
-        <p:nvSpPr>
-          <p:cNvPr id="38" name="TextBox 37"/>
-          <p:cNvSpPr txBox="1"/>
-          <p:nvPr/>
-        </p:nvSpPr>
-        <p:spPr>
-          <a:xfrm>
-            <a:off x="10058400" y="4992624"/>
-            <a:ext cx="1097280" cy="329184"/>
-          </a:xfrm>
-          <a:prstGeom prst="rect">
-            <a:avLst/>
-          </a:prstGeom>
-          <a:noFill/>
-        </p:spPr>
-        <p:txBody>
-          <a:bodyPr wrap="square" lIns="0" rIns="0" tIns="0" bIns="0">
-            <a:spAutoFit/>
-          </a:bodyPr>
-          <a:lstStyle/>
-          <a:p>
-            <a:pPr algn="l">
-              <a:lnSpc>
-                <a:spcPts val="1800"/>
-              </a:lnSpc>
-              <a:spcAft>
-                <a:spcPts val="0"/>
-              </a:spcAft>
-            </a:pPr>
-            <a:r>
-              <a:rPr sz="1200" b="1" i="0">
-                <a:solidFill>
-                  <a:srgbClr val="1A2430"/>
-                </a:solidFill>
-                <a:latin typeface="Garamond"/>
-              </a:rPr>
-              <a:t>7.1</a:t>
-            </a:r>
-          </a:p>
-        </p:txBody>
-      </p:sp>
-      <p:sp>
-        <p:nvSpPr>
-          <p:cNvPr id="39" name="TextBox 38"/>
-          <p:cNvSpPr txBox="1"/>
-          <p:nvPr/>
-        </p:nvSpPr>
-        <p:spPr>
-          <a:xfrm>
-            <a:off x="1005840" y="5321808"/>
-            <a:ext cx="5486400" cy="329184"/>
-          </a:xfrm>
-          <a:prstGeom prst="rect">
-            <a:avLst/>
-          </a:prstGeom>
-          <a:noFill/>
-        </p:spPr>
-        <p:txBody>
-          <a:bodyPr wrap="square" lIns="0" rIns="0" tIns="0" bIns="0">
-            <a:spAutoFit/>
-          </a:bodyPr>
-          <a:lstStyle/>
-          <a:p>
-            <a:pPr algn="l">
-              <a:lnSpc>
-                <a:spcPts val="1800"/>
-              </a:lnSpc>
-              <a:spcAft>
-                <a:spcPts val="0"/>
-              </a:spcAft>
-            </a:pPr>
-            <a:r>
-              <a:rPr sz="1200" b="0" i="0">
-                <a:solidFill>
-                  <a:srgbClr val="1A2430"/>
-                </a:solidFill>
-                <a:latin typeface="Garamond"/>
-              </a:rPr>
-              <a:t>Occupation pair</a:t>
-            </a:r>
-          </a:p>
-        </p:txBody>
-      </p:sp>
-      <p:sp>
-        <p:nvSpPr>
-          <p:cNvPr id="40" name="TextBox 39"/>
-          <p:cNvSpPr txBox="1"/>
-          <p:nvPr/>
-        </p:nvSpPr>
-        <p:spPr>
-          <a:xfrm>
-            <a:off x="10058400" y="5321808"/>
-            <a:ext cx="1097280" cy="329184"/>
-          </a:xfrm>
-          <a:prstGeom prst="rect">
-            <a:avLst/>
-          </a:prstGeom>
-          <a:noFill/>
-        </p:spPr>
-        <p:txBody>
-          <a:bodyPr wrap="square" lIns="0" rIns="0" tIns="0" bIns="0">
-            <a:spAutoFit/>
-          </a:bodyPr>
-          <a:lstStyle/>
-          <a:p>
-            <a:pPr algn="l">
-              <a:lnSpc>
-                <a:spcPts val="1800"/>
-              </a:lnSpc>
-              <a:spcAft>
-                <a:spcPts val="0"/>
-              </a:spcAft>
-            </a:pPr>
-            <a:r>
-              <a:rPr sz="1200" b="1" i="0">
-                <a:solidFill>
-                  <a:srgbClr val="1A2430"/>
-                </a:solidFill>
-                <a:latin typeface="Garamond"/>
-              </a:rPr>
-              <a:t>5.0</a:t>
-            </a:r>
-          </a:p>
-        </p:txBody>
-      </p:sp>
-      <p:sp>
-        <p:nvSpPr>
-          <p:cNvPr id="41" name="TextBox 40"/>
-          <p:cNvSpPr txBox="1"/>
-          <p:nvPr/>
-        </p:nvSpPr>
-        <p:spPr>
-          <a:xfrm>
-            <a:off x="1005840" y="5650992"/>
-            <a:ext cx="5486400" cy="329184"/>
-          </a:xfrm>
-          <a:prstGeom prst="rect">
-            <a:avLst/>
-          </a:prstGeom>
-          <a:noFill/>
-        </p:spPr>
-        <p:txBody>
-          <a:bodyPr wrap="square" lIns="0" rIns="0" tIns="0" bIns="0">
-            <a:spAutoFit/>
-          </a:bodyPr>
-          <a:lstStyle/>
-          <a:p>
-            <a:pPr algn="l">
-              <a:lnSpc>
-                <a:spcPts val="1800"/>
-              </a:lnSpc>
-              <a:spcAft>
-                <a:spcPts val="0"/>
-              </a:spcAft>
-            </a:pPr>
-            <a:r>
-              <a:rPr sz="1200" b="0" i="0">
-                <a:solidFill>
-                  <a:srgbClr val="1A2430"/>
-                </a:solidFill>
-                <a:latin typeface="Garamond"/>
-              </a:rPr>
-              <a:t>Month pairs</a:t>
-            </a:r>
-          </a:p>
-        </p:txBody>
-      </p:sp>
-      <p:sp>
-        <p:nvSpPr>
-          <p:cNvPr id="42" name="TextBox 41"/>
-          <p:cNvSpPr txBox="1"/>
-          <p:nvPr/>
-        </p:nvSpPr>
-        <p:spPr>
-          <a:xfrm>
-            <a:off x="10058400" y="5650992"/>
-            <a:ext cx="1097280" cy="329184"/>
-          </a:xfrm>
-          <a:prstGeom prst="rect">
-            <a:avLst/>
-          </a:prstGeom>
-          <a:noFill/>
-        </p:spPr>
-        <p:txBody>
-          <a:bodyPr wrap="square" lIns="0" rIns="0" tIns="0" bIns="0">
-            <a:spAutoFit/>
-          </a:bodyPr>
-          <a:lstStyle/>
-          <a:p>
-            <a:pPr algn="l">
-              <a:lnSpc>
-                <a:spcPts val="1800"/>
-              </a:lnSpc>
-              <a:spcAft>
-                <a:spcPts val="0"/>
-              </a:spcAft>
-            </a:pPr>
-            <a:r>
-              <a:rPr sz="1200" b="1" i="0">
-                <a:solidFill>
-                  <a:srgbClr val="1A2430"/>
-                </a:solidFill>
-                <a:latin typeface="Garamond"/>
-              </a:rPr>
-              <a:t>16.0</a:t>
-            </a:r>
-          </a:p>
-        </p:txBody>
-      </p:sp>
-      <p:sp>
-        <p:nvSpPr>
-          <p:cNvPr id="43" name="TextBox 42"/>
-          <p:cNvSpPr txBox="1"/>
-          <p:nvPr/>
-        </p:nvSpPr>
-        <p:spPr>
-          <a:xfrm>
-            <a:off x="1005840" y="5980176"/>
-            <a:ext cx="5486400" cy="329184"/>
-          </a:xfrm>
-          <a:prstGeom prst="rect">
-            <a:avLst/>
-          </a:prstGeom>
-          <a:noFill/>
-        </p:spPr>
-        <p:txBody>
-          <a:bodyPr wrap="square" lIns="0" rIns="0" tIns="0" bIns="0">
-            <a:spAutoFit/>
-          </a:bodyPr>
-          <a:lstStyle/>
-          <a:p>
-            <a:pPr algn="l">
-              <a:lnSpc>
-                <a:spcPts val="1800"/>
-              </a:lnSpc>
-              <a:spcAft>
-                <a:spcPts val="0"/>
-              </a:spcAft>
-            </a:pPr>
-            <a:r>
-              <a:rPr sz="1200" b="0" i="0">
-                <a:solidFill>
-                  <a:srgbClr val="1A2430"/>
-                </a:solidFill>
-                <a:latin typeface="Garamond"/>
-              </a:rPr>
-              <a:t>Any sighting</a:t>
-            </a:r>
-          </a:p>
-        </p:txBody>
-      </p:sp>
-      <p:sp>
-        <p:nvSpPr>
-          <p:cNvPr id="44" name="TextBox 43"/>
-          <p:cNvSpPr txBox="1"/>
-          <p:nvPr/>
-        </p:nvSpPr>
-        <p:spPr>
-          <a:xfrm>
-            <a:off x="10058400" y="5980176"/>
-            <a:ext cx="1097280" cy="329184"/>
-          </a:xfrm>
-          <a:prstGeom prst="rect">
-            <a:avLst/>
-          </a:prstGeom>
-          <a:noFill/>
-        </p:spPr>
-        <p:txBody>
-          <a:bodyPr wrap="square" lIns="0" rIns="0" tIns="0" bIns="0">
-            <a:spAutoFit/>
-          </a:bodyPr>
-          <a:lstStyle/>
-          <a:p>
-            <a:pPr algn="l">
-              <a:lnSpc>
-                <a:spcPts val="1800"/>
-              </a:lnSpc>
-              <a:spcAft>
-                <a:spcPts val="0"/>
-              </a:spcAft>
-            </a:pPr>
-            <a:r>
-              <a:rPr sz="1200" b="1" i="0">
-                <a:solidFill>
-                  <a:srgbClr val="1A2430"/>
-                </a:solidFill>
-                <a:latin typeface="Garamond"/>
-              </a:rPr>
-              <a:t>19.4</a:t>
-            </a:r>
-          </a:p>
-        </p:txBody>
-      </p:sp>
-      <p:sp>
-        <p:nvSpPr>
-          <p:cNvPr id="45" name="TextBox 44"/>
-          <p:cNvSpPr txBox="1"/>
-          <p:nvPr/>
-        </p:nvSpPr>
-        <p:spPr>
-          <a:xfrm>
-            <a:off x="1005840" y="6309360"/>
-            <a:ext cx="5486400" cy="329184"/>
-          </a:xfrm>
-          <a:prstGeom prst="rect">
-            <a:avLst/>
-          </a:prstGeom>
-          <a:noFill/>
-        </p:spPr>
-        <p:txBody>
-          <a:bodyPr wrap="square" lIns="0" rIns="0" tIns="0" bIns="0">
-            <a:spAutoFit/>
-          </a:bodyPr>
-          <a:lstStyle/>
-          <a:p>
-            <a:pPr algn="l">
-              <a:lnSpc>
-                <a:spcPts val="1800"/>
-              </a:lnSpc>
-              <a:spcAft>
-                <a:spcPts val="0"/>
-              </a:spcAft>
-            </a:pPr>
-            <a:r>
-              <a:rPr sz="1200" b="0" i="0">
-                <a:solidFill>
-                  <a:srgbClr val="1A2430"/>
-                </a:solidFill>
-                <a:latin typeface="Garamond"/>
-              </a:rPr>
-              <a:t>NCES follow-up survey</a:t>
-            </a:r>
-          </a:p>
-        </p:txBody>
-      </p:sp>
-      <p:sp>
-        <p:nvSpPr>
-          <p:cNvPr id="46" name="TextBox 45"/>
-          <p:cNvSpPr txBox="1"/>
-          <p:nvPr/>
-        </p:nvSpPr>
-        <p:spPr>
-          <a:xfrm>
-            <a:off x="10058400" y="6309360"/>
-            <a:ext cx="1097280" cy="329184"/>
-          </a:xfrm>
-          <a:prstGeom prst="rect">
-            <a:avLst/>
-          </a:prstGeom>
-          <a:noFill/>
-        </p:spPr>
-        <p:txBody>
-          <a:bodyPr wrap="square" lIns="0" rIns="0" tIns="0" bIns="0">
-            <a:spAutoFit/>
-          </a:bodyPr>
-          <a:lstStyle/>
-          <a:p>
-            <a:pPr algn="l">
-              <a:lnSpc>
-                <a:spcPts val="1800"/>
-              </a:lnSpc>
-              <a:spcAft>
-                <a:spcPts val="0"/>
-              </a:spcAft>
-            </a:pPr>
-            <a:r>
-              <a:rPr sz="1200" b="1" i="0">
-                <a:solidFill>
-                  <a:srgbClr val="1A2430"/>
-                </a:solidFill>
-                <a:latin typeface="Garamond"/>
-              </a:rPr>
-              <a:t>8.0</a:t>
-            </a:r>
-          </a:p>
-        </p:txBody>
-      </p:sp>
-      <p:cxnSp>
-        <p:nvCxnSpPr>
-          <p:cNvPr id="47" name="Connector 46"/>
-          <p:cNvCxnSpPr/>
-          <p:nvPr/>
-        </p:nvCxnSpPr>
-        <p:spPr>
-          <a:xfrm>
-            <a:off x="822960" y="6656832"/>
-            <a:ext cx="10543032" cy="0"/>
-          </a:xfrm>
-          <a:prstGeom prst="line">
-            <a:avLst/>
-          </a:prstGeom>
-          <a:ln w="12700">
-            <a:solidFill>
-              <a:srgbClr val="1A2430"/>
-            </a:solidFill>
-          </a:ln>
-        </p:spPr>
-        <p:style>
-          <a:lnRef idx="2">
-            <a:schemeClr val="accent1"/>
-          </a:lnRef>
-          <a:fillRef idx="0">
-            <a:schemeClr val="accent1"/>
-          </a:fillRef>
-          <a:effectRef idx="1">
-            <a:schemeClr val="accent1"/>
-          </a:effectRef>
-          <a:fontRef idx="minor">
-            <a:schemeClr val="tx1"/>
-          </a:fontRef>
-        </p:style>
-      </p:cxnSp>
+              <a:t>Interviews 1–4 and 5–8 fall exactly twelve months apart: whoever is observed in year 1 can be observed again one year later.</a:t>
+            </a:r>
+          </a:p>
+        </p:txBody>
+      </p:sp>
     </p:spTree>
   </p:cSld>
   <p:clrMapOvr>
@@ -11758,20 +13635,20 @@
           <a:p>
             <a:pPr algn="ctr">
               <a:lnSpc>
-                <a:spcPts val="2100"/>
+                <a:spcPts val="1875"/>
               </a:lnSpc>
               <a:spcAft>
                 <a:spcPts val="0"/>
               </a:spcAft>
             </a:pPr>
             <a:r>
-              <a:rPr sz="1400" b="1" i="0">
-                <a:solidFill>
-                  <a:srgbClr val="1F3864"/>
-                </a:solidFill>
-                <a:latin typeface="Garamond"/>
-              </a:rPr>
-              <a:t>stayer</a:t>
+              <a:rPr sz="1250" b="0" i="1">
+                <a:solidFill>
+                  <a:srgbClr val="6B7480"/>
+                </a:solidFill>
+                <a:latin typeface="Garamond"/>
+              </a:rPr>
+              <a:t>8 months out of the sample</a:t>
             </a:r>
           </a:p>
         </p:txBody>
@@ -11866,7 +13743,7 @@
                 </a:solidFill>
                 <a:latin typeface="Garamond"/>
               </a:rPr>
-              <a:t>T</a:t>
+              <a:t>1</a:t>
             </a:r>
           </a:p>
         </p:txBody>
@@ -11919,7 +13796,7 @@
                 </a:solidFill>
                 <a:latin typeface="Garamond"/>
               </a:rPr>
-              <a:t>T</a:t>
+              <a:t>2</a:t>
             </a:r>
           </a:p>
         </p:txBody>
@@ -11972,7 +13849,7 @@
                 </a:solidFill>
                 <a:latin typeface="Garamond"/>
               </a:rPr>
-              <a:t>T</a:t>
+              <a:t>3</a:t>
             </a:r>
           </a:p>
         </p:txBody>
@@ -12025,7 +13902,7 @@
                 </a:solidFill>
                 <a:latin typeface="Garamond"/>
               </a:rPr>
-              <a:t>T</a:t>
+              <a:t>4</a:t>
             </a:r>
           </a:p>
         </p:txBody>
@@ -12677,7 +14554,7 @@
                 </a:solidFill>
                 <a:latin typeface="Garamond"/>
               </a:rPr>
-              <a:t>T</a:t>
+              <a:t>16</a:t>
             </a:r>
           </a:p>
         </p:txBody>
@@ -12691,7 +14568,7 @@
         <p:spPr>
           <a:xfrm>
             <a:off x="822960" y="2340864"/>
-            <a:ext cx="3657600" cy="365760"/>
+            <a:ext cx="4572000" cy="365760"/>
           </a:xfrm>
           <a:prstGeom prst="rect">
             <a:avLst/>
@@ -12719,7 +14596,7 @@
                 </a:solidFill>
                 <a:latin typeface="Garamond"/>
               </a:rPr>
-              <a:t>Definition 1  (benchmark)</a:t>
+              <a:t>The panel measure  (benchmark)</a:t>
             </a:r>
           </a:p>
         </p:txBody>
@@ -13202,7 +15079,7 @@
                 </a:solidFill>
                 <a:latin typeface="Garamond"/>
               </a:rPr>
-              <a:t>Definition 1</a:t>
+              <a:t>Panel measure</a:t>
             </a:r>
           </a:p>
         </p:txBody>
@@ -13874,11 +15751,11 @@
             <a:r>
               <a:rPr sz="1400" b="1" i="0">
                 <a:solidFill>
-                  <a:srgbClr val="7B2530"/>
-                </a:solidFill>
-                <a:latin typeface="Garamond"/>
-              </a:rPr>
-              <a:t>leaver</a:t>
+                  <a:srgbClr val="1F3864"/>
+                </a:solidFill>
+                <a:latin typeface="Garamond"/>
+              </a:rPr>
+              <a:t>stayer</a:t>
             </a:r>
           </a:p>
         </p:txBody>
@@ -14079,7 +15956,7 @@
                 </a:solidFill>
                 <a:latin typeface="Garamond"/>
               </a:rPr>
-              <a:t>3</a:t>
+              <a:t>T</a:t>
             </a:r>
           </a:p>
         </p:txBody>
@@ -14132,7 +16009,7 @@
                 </a:solidFill>
                 <a:latin typeface="Garamond"/>
               </a:rPr>
-              <a:t>4</a:t>
+              <a:t>T</a:t>
             </a:r>
           </a:p>
         </p:txBody>
@@ -14784,7 +16661,7 @@
                 </a:solidFill>
                 <a:latin typeface="Garamond"/>
               </a:rPr>
-              <a:t>16</a:t>
+              <a:t>T</a:t>
             </a:r>
           </a:p>
         </p:txBody>
@@ -14798,7 +16675,7 @@
         <p:spPr>
           <a:xfrm>
             <a:off x="822960" y="2340864"/>
-            <a:ext cx="3657600" cy="365760"/>
+            <a:ext cx="4572000" cy="365760"/>
           </a:xfrm>
           <a:prstGeom prst="rect">
             <a:avLst/>
@@ -14826,7 +16703,7 @@
                 </a:solidFill>
                 <a:latin typeface="Garamond"/>
               </a:rPr>
-              <a:t>Definition 1  (benchmark)</a:t>
+              <a:t>The panel measure  (benchmark)</a:t>
             </a:r>
           </a:p>
         </p:txBody>
@@ -15309,7 +17186,7 @@
                 </a:solidFill>
                 <a:latin typeface="Garamond"/>
               </a:rPr>
-              <a:t>Definition 1</a:t>
+              <a:t>Panel measure</a:t>
             </a:r>
           </a:p>
         </p:txBody>
@@ -21169,11 +23046,11 @@
             <a:r>
               <a:rPr sz="1400" b="1" i="0">
                 <a:solidFill>
-                  <a:srgbClr val="6B7480"/>
-                </a:solidFill>
-                <a:latin typeface="Garamond"/>
-              </a:rPr>
-              <a:t>not a teacher</a:t>
+                  <a:srgbClr val="7B2530"/>
+                </a:solidFill>
+                <a:latin typeface="Garamond"/>
+              </a:rPr>
+              <a:t>leaver</a:t>
             </a:r>
           </a:p>
         </p:txBody>
@@ -21321,7 +23198,7 @@
                 </a:solidFill>
                 <a:latin typeface="Garamond"/>
               </a:rPr>
-              <a:t>2</a:t>
+              <a:t>T</a:t>
             </a:r>
           </a:p>
         </p:txBody>
@@ -22093,7 +23970,7 @@
         <p:spPr>
           <a:xfrm>
             <a:off x="822960" y="2340864"/>
-            <a:ext cx="3657600" cy="365760"/>
+            <a:ext cx="4572000" cy="365760"/>
           </a:xfrm>
           <a:prstGeom prst="rect">
             <a:avLst/>
@@ -22121,7 +23998,7 @@
                 </a:solidFill>
                 <a:latin typeface="Garamond"/>
               </a:rPr>
-              <a:t>Definition 1  (benchmark)</a:t>
+              <a:t>The panel measure  (benchmark)</a:t>
             </a:r>
           </a:p>
         </p:txBody>
@@ -22604,7 +24481,7 @@
                 </a:solidFill>
                 <a:latin typeface="Garamond"/>
               </a:rPr>
-              <a:t>Definition 1</a:t>
+              <a:t>Panel measure</a:t>
             </a:r>
           </a:p>
         </p:txBody>
@@ -23196,6 +25073,2113 @@
                 </a:solidFill>
                 <a:latin typeface="Garamond"/>
               </a:rPr>
+              <a:t>Measuring attrition: definitions</a:t>
+            </a:r>
+          </a:p>
+        </p:txBody>
+      </p:sp>
+      <p:sp>
+        <p:nvSpPr>
+          <p:cNvPr id="4" name="TextBox 3"/>
+          <p:cNvSpPr txBox="1"/>
+          <p:nvPr/>
+        </p:nvSpPr>
+        <p:spPr>
+          <a:xfrm>
+            <a:off x="822960" y="1417320"/>
+            <a:ext cx="3200400" cy="320040"/>
+          </a:xfrm>
+          <a:prstGeom prst="rect">
+            <a:avLst/>
+          </a:prstGeom>
+          <a:noFill/>
+        </p:spPr>
+        <p:txBody>
+          <a:bodyPr wrap="square" lIns="0" rIns="0" tIns="0" bIns="0">
+            <a:spAutoFit/>
+          </a:bodyPr>
+          <a:lstStyle/>
+          <a:p>
+            <a:pPr algn="l">
+              <a:lnSpc>
+                <a:spcPts val="1950"/>
+              </a:lnSpc>
+              <a:spcAft>
+                <a:spcPts val="0"/>
+              </a:spcAft>
+            </a:pPr>
+            <a:r>
+              <a:rPr sz="1300" b="1" i="0">
+                <a:solidFill>
+                  <a:srgbClr val="1F3864"/>
+                </a:solidFill>
+                <a:latin typeface="Garamond"/>
+              </a:rPr>
+              <a:t>Year 1: interviews 1–4</a:t>
+            </a:r>
+          </a:p>
+        </p:txBody>
+      </p:sp>
+      <p:sp>
+        <p:nvSpPr>
+          <p:cNvPr id="5" name="TextBox 4"/>
+          <p:cNvSpPr txBox="1"/>
+          <p:nvPr/>
+        </p:nvSpPr>
+        <p:spPr>
+          <a:xfrm>
+            <a:off x="4480560" y="1417320"/>
+            <a:ext cx="3291840" cy="320040"/>
+          </a:xfrm>
+          <a:prstGeom prst="rect">
+            <a:avLst/>
+          </a:prstGeom>
+          <a:noFill/>
+        </p:spPr>
+        <p:txBody>
+          <a:bodyPr wrap="square" lIns="0" rIns="0" tIns="0" bIns="0">
+            <a:spAutoFit/>
+          </a:bodyPr>
+          <a:lstStyle/>
+          <a:p>
+            <a:pPr algn="ctr">
+              <a:lnSpc>
+                <a:spcPts val="2100"/>
+              </a:lnSpc>
+              <a:spcAft>
+                <a:spcPts val="0"/>
+              </a:spcAft>
+            </a:pPr>
+            <a:r>
+              <a:rPr sz="1400" b="1" i="0">
+                <a:solidFill>
+                  <a:srgbClr val="6B7480"/>
+                </a:solidFill>
+                <a:latin typeface="Garamond"/>
+              </a:rPr>
+              <a:t>not a teacher</a:t>
+            </a:r>
+          </a:p>
+        </p:txBody>
+      </p:sp>
+      <p:sp>
+        <p:nvSpPr>
+          <p:cNvPr id="6" name="TextBox 5"/>
+          <p:cNvSpPr txBox="1"/>
+          <p:nvPr/>
+        </p:nvSpPr>
+        <p:spPr>
+          <a:xfrm>
+            <a:off x="8229600" y="1417320"/>
+            <a:ext cx="3200400" cy="320040"/>
+          </a:xfrm>
+          <a:prstGeom prst="rect">
+            <a:avLst/>
+          </a:prstGeom>
+          <a:noFill/>
+        </p:spPr>
+        <p:txBody>
+          <a:bodyPr wrap="square" lIns="0" rIns="0" tIns="0" bIns="0">
+            <a:spAutoFit/>
+          </a:bodyPr>
+          <a:lstStyle/>
+          <a:p>
+            <a:pPr algn="r">
+              <a:lnSpc>
+                <a:spcPts val="1950"/>
+              </a:lnSpc>
+              <a:spcAft>
+                <a:spcPts val="0"/>
+              </a:spcAft>
+            </a:pPr>
+            <a:r>
+              <a:rPr sz="1300" b="1" i="0">
+                <a:solidFill>
+                  <a:srgbClr val="7B2530"/>
+                </a:solidFill>
+                <a:latin typeface="Garamond"/>
+              </a:rPr>
+              <a:t>Year 2: interviews 5–8</a:t>
+            </a:r>
+          </a:p>
+        </p:txBody>
+      </p:sp>
+      <p:sp>
+        <p:nvSpPr>
+          <p:cNvPr id="7" name="Rectangle 6"/>
+          <p:cNvSpPr/>
+          <p:nvPr/>
+        </p:nvSpPr>
+        <p:spPr>
+          <a:xfrm>
+            <a:off x="822960" y="1755648"/>
+            <a:ext cx="658939" cy="457200"/>
+          </a:xfrm>
+          <a:prstGeom prst="rect">
+            <a:avLst/>
+          </a:prstGeom>
+          <a:solidFill>
+            <a:srgbClr val="1F3864"/>
+          </a:solidFill>
+          <a:ln>
+            <a:noFill/>
+          </a:ln>
+          <a:effectLst/>
+        </p:spPr>
+        <p:style>
+          <a:lnRef idx="1">
+            <a:schemeClr val="accent1"/>
+          </a:lnRef>
+          <a:fillRef idx="3">
+            <a:schemeClr val="accent1"/>
+          </a:fillRef>
+          <a:effectRef idx="2">
+            <a:schemeClr val="accent1"/>
+          </a:effectRef>
+          <a:fontRef idx="minor">
+            <a:schemeClr val="lt1"/>
+          </a:fontRef>
+        </p:style>
+        <p:txBody>
+          <a:bodyPr rtlCol="0" anchor="ctr" wrap="none"/>
+          <a:lstStyle/>
+          <a:p>
+            <a:pPr algn="ctr"/>
+            <a:r>
+              <a:rPr sz="1200" b="1">
+                <a:solidFill>
+                  <a:srgbClr val="FFFFFF"/>
+                </a:solidFill>
+                <a:latin typeface="Garamond"/>
+              </a:rPr>
+              <a:t>T</a:t>
+            </a:r>
+          </a:p>
+        </p:txBody>
+      </p:sp>
+      <p:sp>
+        <p:nvSpPr>
+          <p:cNvPr id="8" name="Rectangle 7"/>
+          <p:cNvSpPr/>
+          <p:nvPr/>
+        </p:nvSpPr>
+        <p:spPr>
+          <a:xfrm>
+            <a:off x="1481899" y="1755648"/>
+            <a:ext cx="658939" cy="457200"/>
+          </a:xfrm>
+          <a:prstGeom prst="rect">
+            <a:avLst/>
+          </a:prstGeom>
+          <a:solidFill>
+            <a:srgbClr val="1F3864"/>
+          </a:solidFill>
+          <a:ln>
+            <a:noFill/>
+          </a:ln>
+          <a:effectLst/>
+        </p:spPr>
+        <p:style>
+          <a:lnRef idx="1">
+            <a:schemeClr val="accent1"/>
+          </a:lnRef>
+          <a:fillRef idx="3">
+            <a:schemeClr val="accent1"/>
+          </a:fillRef>
+          <a:effectRef idx="2">
+            <a:schemeClr val="accent1"/>
+          </a:effectRef>
+          <a:fontRef idx="minor">
+            <a:schemeClr val="lt1"/>
+          </a:fontRef>
+        </p:style>
+        <p:txBody>
+          <a:bodyPr rtlCol="0" anchor="ctr" wrap="none"/>
+          <a:lstStyle/>
+          <a:p>
+            <a:pPr algn="ctr"/>
+            <a:r>
+              <a:rPr sz="1200" b="1">
+                <a:solidFill>
+                  <a:srgbClr val="FFFFFF"/>
+                </a:solidFill>
+                <a:latin typeface="Garamond"/>
+              </a:rPr>
+              <a:t>2</a:t>
+            </a:r>
+          </a:p>
+        </p:txBody>
+      </p:sp>
+      <p:sp>
+        <p:nvSpPr>
+          <p:cNvPr id="9" name="Rectangle 8"/>
+          <p:cNvSpPr/>
+          <p:nvPr/>
+        </p:nvSpPr>
+        <p:spPr>
+          <a:xfrm>
+            <a:off x="2140839" y="1755648"/>
+            <a:ext cx="658939" cy="457200"/>
+          </a:xfrm>
+          <a:prstGeom prst="rect">
+            <a:avLst/>
+          </a:prstGeom>
+          <a:solidFill>
+            <a:srgbClr val="1F3864"/>
+          </a:solidFill>
+          <a:ln>
+            <a:noFill/>
+          </a:ln>
+          <a:effectLst/>
+        </p:spPr>
+        <p:style>
+          <a:lnRef idx="1">
+            <a:schemeClr val="accent1"/>
+          </a:lnRef>
+          <a:fillRef idx="3">
+            <a:schemeClr val="accent1"/>
+          </a:fillRef>
+          <a:effectRef idx="2">
+            <a:schemeClr val="accent1"/>
+          </a:effectRef>
+          <a:fontRef idx="minor">
+            <a:schemeClr val="lt1"/>
+          </a:fontRef>
+        </p:style>
+        <p:txBody>
+          <a:bodyPr rtlCol="0" anchor="ctr" wrap="none"/>
+          <a:lstStyle/>
+          <a:p>
+            <a:pPr algn="ctr"/>
+            <a:r>
+              <a:rPr sz="1200" b="1">
+                <a:solidFill>
+                  <a:srgbClr val="FFFFFF"/>
+                </a:solidFill>
+                <a:latin typeface="Garamond"/>
+              </a:rPr>
+              <a:t>3</a:t>
+            </a:r>
+          </a:p>
+        </p:txBody>
+      </p:sp>
+      <p:sp>
+        <p:nvSpPr>
+          <p:cNvPr id="10" name="Rectangle 9"/>
+          <p:cNvSpPr/>
+          <p:nvPr/>
+        </p:nvSpPr>
+        <p:spPr>
+          <a:xfrm>
+            <a:off x="2799778" y="1755648"/>
+            <a:ext cx="658939" cy="457200"/>
+          </a:xfrm>
+          <a:prstGeom prst="rect">
+            <a:avLst/>
+          </a:prstGeom>
+          <a:solidFill>
+            <a:srgbClr val="1F3864"/>
+          </a:solidFill>
+          <a:ln>
+            <a:noFill/>
+          </a:ln>
+          <a:effectLst/>
+        </p:spPr>
+        <p:style>
+          <a:lnRef idx="1">
+            <a:schemeClr val="accent1"/>
+          </a:lnRef>
+          <a:fillRef idx="3">
+            <a:schemeClr val="accent1"/>
+          </a:fillRef>
+          <a:effectRef idx="2">
+            <a:schemeClr val="accent1"/>
+          </a:effectRef>
+          <a:fontRef idx="minor">
+            <a:schemeClr val="lt1"/>
+          </a:fontRef>
+        </p:style>
+        <p:txBody>
+          <a:bodyPr rtlCol="0" anchor="ctr" wrap="none"/>
+          <a:lstStyle/>
+          <a:p>
+            <a:pPr algn="ctr"/>
+            <a:r>
+              <a:rPr sz="1200" b="1">
+                <a:solidFill>
+                  <a:srgbClr val="FFFFFF"/>
+                </a:solidFill>
+                <a:latin typeface="Garamond"/>
+              </a:rPr>
+              <a:t>4</a:t>
+            </a:r>
+          </a:p>
+        </p:txBody>
+      </p:sp>
+      <p:sp>
+        <p:nvSpPr>
+          <p:cNvPr id="11" name="Rectangle 10"/>
+          <p:cNvSpPr/>
+          <p:nvPr/>
+        </p:nvSpPr>
+        <p:spPr>
+          <a:xfrm>
+            <a:off x="3458718" y="1755648"/>
+            <a:ext cx="658939" cy="457200"/>
+          </a:xfrm>
+          <a:prstGeom prst="rect">
+            <a:avLst/>
+          </a:prstGeom>
+          <a:solidFill>
+            <a:srgbClr val="FFFFFF"/>
+          </a:solidFill>
+          <a:ln w="9525">
+            <a:solidFill>
+              <a:srgbClr val="C9CFD6"/>
+            </a:solidFill>
+          </a:ln>
+          <a:effectLst/>
+        </p:spPr>
+        <p:style>
+          <a:lnRef idx="1">
+            <a:schemeClr val="accent1"/>
+          </a:lnRef>
+          <a:fillRef idx="3">
+            <a:schemeClr val="accent1"/>
+          </a:fillRef>
+          <a:effectRef idx="2">
+            <a:schemeClr val="accent1"/>
+          </a:effectRef>
+          <a:fontRef idx="minor">
+            <a:schemeClr val="lt1"/>
+          </a:fontRef>
+        </p:style>
+        <p:txBody>
+          <a:bodyPr rtlCol="0" anchor="ctr" wrap="none"/>
+          <a:lstStyle/>
+          <a:p>
+            <a:pPr algn="ctr"/>
+            <a:r>
+              <a:rPr sz="1200" b="1">
+                <a:solidFill>
+                  <a:srgbClr val="6B7480"/>
+                </a:solidFill>
+                <a:latin typeface="Garamond"/>
+              </a:rPr>
+              <a:t>5</a:t>
+            </a:r>
+          </a:p>
+        </p:txBody>
+      </p:sp>
+      <p:sp>
+        <p:nvSpPr>
+          <p:cNvPr id="12" name="Rectangle 11"/>
+          <p:cNvSpPr/>
+          <p:nvPr/>
+        </p:nvSpPr>
+        <p:spPr>
+          <a:xfrm>
+            <a:off x="4117657" y="1755648"/>
+            <a:ext cx="658939" cy="457200"/>
+          </a:xfrm>
+          <a:prstGeom prst="rect">
+            <a:avLst/>
+          </a:prstGeom>
+          <a:solidFill>
+            <a:srgbClr val="FFFFFF"/>
+          </a:solidFill>
+          <a:ln w="9525">
+            <a:solidFill>
+              <a:srgbClr val="C9CFD6"/>
+            </a:solidFill>
+          </a:ln>
+          <a:effectLst/>
+        </p:spPr>
+        <p:style>
+          <a:lnRef idx="1">
+            <a:schemeClr val="accent1"/>
+          </a:lnRef>
+          <a:fillRef idx="3">
+            <a:schemeClr val="accent1"/>
+          </a:fillRef>
+          <a:effectRef idx="2">
+            <a:schemeClr val="accent1"/>
+          </a:effectRef>
+          <a:fontRef idx="minor">
+            <a:schemeClr val="lt1"/>
+          </a:fontRef>
+        </p:style>
+        <p:txBody>
+          <a:bodyPr rtlCol="0" anchor="ctr" wrap="none"/>
+          <a:lstStyle/>
+          <a:p>
+            <a:pPr algn="ctr"/>
+            <a:r>
+              <a:rPr sz="1200" b="1">
+                <a:solidFill>
+                  <a:srgbClr val="6B7480"/>
+                </a:solidFill>
+                <a:latin typeface="Garamond"/>
+              </a:rPr>
+              <a:t>6</a:t>
+            </a:r>
+          </a:p>
+        </p:txBody>
+      </p:sp>
+      <p:sp>
+        <p:nvSpPr>
+          <p:cNvPr id="13" name="Rectangle 12"/>
+          <p:cNvSpPr/>
+          <p:nvPr/>
+        </p:nvSpPr>
+        <p:spPr>
+          <a:xfrm>
+            <a:off x="4776597" y="1755648"/>
+            <a:ext cx="658939" cy="457200"/>
+          </a:xfrm>
+          <a:prstGeom prst="rect">
+            <a:avLst/>
+          </a:prstGeom>
+          <a:solidFill>
+            <a:srgbClr val="FFFFFF"/>
+          </a:solidFill>
+          <a:ln w="9525">
+            <a:solidFill>
+              <a:srgbClr val="C9CFD6"/>
+            </a:solidFill>
+          </a:ln>
+          <a:effectLst/>
+        </p:spPr>
+        <p:style>
+          <a:lnRef idx="1">
+            <a:schemeClr val="accent1"/>
+          </a:lnRef>
+          <a:fillRef idx="3">
+            <a:schemeClr val="accent1"/>
+          </a:fillRef>
+          <a:effectRef idx="2">
+            <a:schemeClr val="accent1"/>
+          </a:effectRef>
+          <a:fontRef idx="minor">
+            <a:schemeClr val="lt1"/>
+          </a:fontRef>
+        </p:style>
+        <p:txBody>
+          <a:bodyPr rtlCol="0" anchor="ctr" wrap="none"/>
+          <a:lstStyle/>
+          <a:p>
+            <a:pPr algn="ctr"/>
+            <a:r>
+              <a:rPr sz="1200" b="1">
+                <a:solidFill>
+                  <a:srgbClr val="6B7480"/>
+                </a:solidFill>
+                <a:latin typeface="Garamond"/>
+              </a:rPr>
+              <a:t>7</a:t>
+            </a:r>
+          </a:p>
+        </p:txBody>
+      </p:sp>
+      <p:sp>
+        <p:nvSpPr>
+          <p:cNvPr id="14" name="Rectangle 13"/>
+          <p:cNvSpPr/>
+          <p:nvPr/>
+        </p:nvSpPr>
+        <p:spPr>
+          <a:xfrm>
+            <a:off x="5435536" y="1755648"/>
+            <a:ext cx="658939" cy="457200"/>
+          </a:xfrm>
+          <a:prstGeom prst="rect">
+            <a:avLst/>
+          </a:prstGeom>
+          <a:solidFill>
+            <a:srgbClr val="FFFFFF"/>
+          </a:solidFill>
+          <a:ln w="9525">
+            <a:solidFill>
+              <a:srgbClr val="C9CFD6"/>
+            </a:solidFill>
+          </a:ln>
+          <a:effectLst/>
+        </p:spPr>
+        <p:style>
+          <a:lnRef idx="1">
+            <a:schemeClr val="accent1"/>
+          </a:lnRef>
+          <a:fillRef idx="3">
+            <a:schemeClr val="accent1"/>
+          </a:fillRef>
+          <a:effectRef idx="2">
+            <a:schemeClr val="accent1"/>
+          </a:effectRef>
+          <a:fontRef idx="minor">
+            <a:schemeClr val="lt1"/>
+          </a:fontRef>
+        </p:style>
+        <p:txBody>
+          <a:bodyPr rtlCol="0" anchor="ctr" wrap="none"/>
+          <a:lstStyle/>
+          <a:p>
+            <a:pPr algn="ctr"/>
+            <a:r>
+              <a:rPr sz="1200" b="1">
+                <a:solidFill>
+                  <a:srgbClr val="6B7480"/>
+                </a:solidFill>
+                <a:latin typeface="Garamond"/>
+              </a:rPr>
+              <a:t>8</a:t>
+            </a:r>
+          </a:p>
+        </p:txBody>
+      </p:sp>
+      <p:sp>
+        <p:nvSpPr>
+          <p:cNvPr id="15" name="Rectangle 14"/>
+          <p:cNvSpPr/>
+          <p:nvPr/>
+        </p:nvSpPr>
+        <p:spPr>
+          <a:xfrm>
+            <a:off x="6094476" y="1755648"/>
+            <a:ext cx="658939" cy="457200"/>
+          </a:xfrm>
+          <a:prstGeom prst="rect">
+            <a:avLst/>
+          </a:prstGeom>
+          <a:solidFill>
+            <a:srgbClr val="FFFFFF"/>
+          </a:solidFill>
+          <a:ln w="9525">
+            <a:solidFill>
+              <a:srgbClr val="C9CFD6"/>
+            </a:solidFill>
+          </a:ln>
+          <a:effectLst/>
+        </p:spPr>
+        <p:style>
+          <a:lnRef idx="1">
+            <a:schemeClr val="accent1"/>
+          </a:lnRef>
+          <a:fillRef idx="3">
+            <a:schemeClr val="accent1"/>
+          </a:fillRef>
+          <a:effectRef idx="2">
+            <a:schemeClr val="accent1"/>
+          </a:effectRef>
+          <a:fontRef idx="minor">
+            <a:schemeClr val="lt1"/>
+          </a:fontRef>
+        </p:style>
+        <p:txBody>
+          <a:bodyPr rtlCol="0" anchor="ctr" wrap="none"/>
+          <a:lstStyle/>
+          <a:p>
+            <a:pPr algn="ctr"/>
+            <a:r>
+              <a:rPr sz="1200" b="1">
+                <a:solidFill>
+                  <a:srgbClr val="6B7480"/>
+                </a:solidFill>
+                <a:latin typeface="Garamond"/>
+              </a:rPr>
+              <a:t>9</a:t>
+            </a:r>
+          </a:p>
+        </p:txBody>
+      </p:sp>
+      <p:sp>
+        <p:nvSpPr>
+          <p:cNvPr id="16" name="Rectangle 15"/>
+          <p:cNvSpPr/>
+          <p:nvPr/>
+        </p:nvSpPr>
+        <p:spPr>
+          <a:xfrm>
+            <a:off x="6753415" y="1755648"/>
+            <a:ext cx="658939" cy="457200"/>
+          </a:xfrm>
+          <a:prstGeom prst="rect">
+            <a:avLst/>
+          </a:prstGeom>
+          <a:solidFill>
+            <a:srgbClr val="FFFFFF"/>
+          </a:solidFill>
+          <a:ln w="9525">
+            <a:solidFill>
+              <a:srgbClr val="C9CFD6"/>
+            </a:solidFill>
+          </a:ln>
+          <a:effectLst/>
+        </p:spPr>
+        <p:style>
+          <a:lnRef idx="1">
+            <a:schemeClr val="accent1"/>
+          </a:lnRef>
+          <a:fillRef idx="3">
+            <a:schemeClr val="accent1"/>
+          </a:fillRef>
+          <a:effectRef idx="2">
+            <a:schemeClr val="accent1"/>
+          </a:effectRef>
+          <a:fontRef idx="minor">
+            <a:schemeClr val="lt1"/>
+          </a:fontRef>
+        </p:style>
+        <p:txBody>
+          <a:bodyPr rtlCol="0" anchor="ctr" wrap="none"/>
+          <a:lstStyle/>
+          <a:p>
+            <a:pPr algn="ctr"/>
+            <a:r>
+              <a:rPr sz="1200" b="1">
+                <a:solidFill>
+                  <a:srgbClr val="6B7480"/>
+                </a:solidFill>
+                <a:latin typeface="Garamond"/>
+              </a:rPr>
+              <a:t>10</a:t>
+            </a:r>
+          </a:p>
+        </p:txBody>
+      </p:sp>
+      <p:sp>
+        <p:nvSpPr>
+          <p:cNvPr id="17" name="Rectangle 16"/>
+          <p:cNvSpPr/>
+          <p:nvPr/>
+        </p:nvSpPr>
+        <p:spPr>
+          <a:xfrm>
+            <a:off x="7412354" y="1755648"/>
+            <a:ext cx="658939" cy="457200"/>
+          </a:xfrm>
+          <a:prstGeom prst="rect">
+            <a:avLst/>
+          </a:prstGeom>
+          <a:solidFill>
+            <a:srgbClr val="FFFFFF"/>
+          </a:solidFill>
+          <a:ln w="9525">
+            <a:solidFill>
+              <a:srgbClr val="C9CFD6"/>
+            </a:solidFill>
+          </a:ln>
+          <a:effectLst/>
+        </p:spPr>
+        <p:style>
+          <a:lnRef idx="1">
+            <a:schemeClr val="accent1"/>
+          </a:lnRef>
+          <a:fillRef idx="3">
+            <a:schemeClr val="accent1"/>
+          </a:fillRef>
+          <a:effectRef idx="2">
+            <a:schemeClr val="accent1"/>
+          </a:effectRef>
+          <a:fontRef idx="minor">
+            <a:schemeClr val="lt1"/>
+          </a:fontRef>
+        </p:style>
+        <p:txBody>
+          <a:bodyPr rtlCol="0" anchor="ctr" wrap="none"/>
+          <a:lstStyle/>
+          <a:p>
+            <a:pPr algn="ctr"/>
+            <a:r>
+              <a:rPr sz="1200" b="1">
+                <a:solidFill>
+                  <a:srgbClr val="6B7480"/>
+                </a:solidFill>
+                <a:latin typeface="Garamond"/>
+              </a:rPr>
+              <a:t>11</a:t>
+            </a:r>
+          </a:p>
+        </p:txBody>
+      </p:sp>
+      <p:sp>
+        <p:nvSpPr>
+          <p:cNvPr id="18" name="Rectangle 17"/>
+          <p:cNvSpPr/>
+          <p:nvPr/>
+        </p:nvSpPr>
+        <p:spPr>
+          <a:xfrm>
+            <a:off x="8071294" y="1755648"/>
+            <a:ext cx="658939" cy="457200"/>
+          </a:xfrm>
+          <a:prstGeom prst="rect">
+            <a:avLst/>
+          </a:prstGeom>
+          <a:solidFill>
+            <a:srgbClr val="FFFFFF"/>
+          </a:solidFill>
+          <a:ln w="9525">
+            <a:solidFill>
+              <a:srgbClr val="C9CFD6"/>
+            </a:solidFill>
+          </a:ln>
+          <a:effectLst/>
+        </p:spPr>
+        <p:style>
+          <a:lnRef idx="1">
+            <a:schemeClr val="accent1"/>
+          </a:lnRef>
+          <a:fillRef idx="3">
+            <a:schemeClr val="accent1"/>
+          </a:fillRef>
+          <a:effectRef idx="2">
+            <a:schemeClr val="accent1"/>
+          </a:effectRef>
+          <a:fontRef idx="minor">
+            <a:schemeClr val="lt1"/>
+          </a:fontRef>
+        </p:style>
+        <p:txBody>
+          <a:bodyPr rtlCol="0" anchor="ctr" wrap="none"/>
+          <a:lstStyle/>
+          <a:p>
+            <a:pPr algn="ctr"/>
+            <a:r>
+              <a:rPr sz="1200" b="1">
+                <a:solidFill>
+                  <a:srgbClr val="6B7480"/>
+                </a:solidFill>
+                <a:latin typeface="Garamond"/>
+              </a:rPr>
+              <a:t>12</a:t>
+            </a:r>
+          </a:p>
+        </p:txBody>
+      </p:sp>
+      <p:sp>
+        <p:nvSpPr>
+          <p:cNvPr id="19" name="Rectangle 18"/>
+          <p:cNvSpPr/>
+          <p:nvPr/>
+        </p:nvSpPr>
+        <p:spPr>
+          <a:xfrm>
+            <a:off x="8730234" y="1755648"/>
+            <a:ext cx="658939" cy="457200"/>
+          </a:xfrm>
+          <a:prstGeom prst="rect">
+            <a:avLst/>
+          </a:prstGeom>
+          <a:solidFill>
+            <a:srgbClr val="7B2530"/>
+          </a:solidFill>
+          <a:ln>
+            <a:noFill/>
+          </a:ln>
+          <a:effectLst/>
+        </p:spPr>
+        <p:style>
+          <a:lnRef idx="1">
+            <a:schemeClr val="accent1"/>
+          </a:lnRef>
+          <a:fillRef idx="3">
+            <a:schemeClr val="accent1"/>
+          </a:fillRef>
+          <a:effectRef idx="2">
+            <a:schemeClr val="accent1"/>
+          </a:effectRef>
+          <a:fontRef idx="minor">
+            <a:schemeClr val="lt1"/>
+          </a:fontRef>
+        </p:style>
+        <p:txBody>
+          <a:bodyPr rtlCol="0" anchor="ctr" wrap="none"/>
+          <a:lstStyle/>
+          <a:p>
+            <a:pPr algn="ctr"/>
+            <a:r>
+              <a:rPr sz="1200" b="1">
+                <a:solidFill>
+                  <a:srgbClr val="FFFFFF"/>
+                </a:solidFill>
+                <a:latin typeface="Garamond"/>
+              </a:rPr>
+              <a:t>13</a:t>
+            </a:r>
+          </a:p>
+        </p:txBody>
+      </p:sp>
+      <p:sp>
+        <p:nvSpPr>
+          <p:cNvPr id="20" name="Rectangle 19"/>
+          <p:cNvSpPr/>
+          <p:nvPr/>
+        </p:nvSpPr>
+        <p:spPr>
+          <a:xfrm>
+            <a:off x="9389173" y="1755648"/>
+            <a:ext cx="658939" cy="457200"/>
+          </a:xfrm>
+          <a:prstGeom prst="rect">
+            <a:avLst/>
+          </a:prstGeom>
+          <a:solidFill>
+            <a:srgbClr val="7B2530"/>
+          </a:solidFill>
+          <a:ln>
+            <a:noFill/>
+          </a:ln>
+          <a:effectLst/>
+        </p:spPr>
+        <p:style>
+          <a:lnRef idx="1">
+            <a:schemeClr val="accent1"/>
+          </a:lnRef>
+          <a:fillRef idx="3">
+            <a:schemeClr val="accent1"/>
+          </a:fillRef>
+          <a:effectRef idx="2">
+            <a:schemeClr val="accent1"/>
+          </a:effectRef>
+          <a:fontRef idx="minor">
+            <a:schemeClr val="lt1"/>
+          </a:fontRef>
+        </p:style>
+        <p:txBody>
+          <a:bodyPr rtlCol="0" anchor="ctr" wrap="none"/>
+          <a:lstStyle/>
+          <a:p>
+            <a:pPr algn="ctr"/>
+            <a:r>
+              <a:rPr sz="1200" b="1">
+                <a:solidFill>
+                  <a:srgbClr val="FFFFFF"/>
+                </a:solidFill>
+                <a:latin typeface="Garamond"/>
+              </a:rPr>
+              <a:t>14</a:t>
+            </a:r>
+          </a:p>
+        </p:txBody>
+      </p:sp>
+      <p:sp>
+        <p:nvSpPr>
+          <p:cNvPr id="21" name="Rectangle 20"/>
+          <p:cNvSpPr/>
+          <p:nvPr/>
+        </p:nvSpPr>
+        <p:spPr>
+          <a:xfrm>
+            <a:off x="10048113" y="1755648"/>
+            <a:ext cx="658939" cy="457200"/>
+          </a:xfrm>
+          <a:prstGeom prst="rect">
+            <a:avLst/>
+          </a:prstGeom>
+          <a:solidFill>
+            <a:srgbClr val="7B2530"/>
+          </a:solidFill>
+          <a:ln>
+            <a:noFill/>
+          </a:ln>
+          <a:effectLst/>
+        </p:spPr>
+        <p:style>
+          <a:lnRef idx="1">
+            <a:schemeClr val="accent1"/>
+          </a:lnRef>
+          <a:fillRef idx="3">
+            <a:schemeClr val="accent1"/>
+          </a:fillRef>
+          <a:effectRef idx="2">
+            <a:schemeClr val="accent1"/>
+          </a:effectRef>
+          <a:fontRef idx="minor">
+            <a:schemeClr val="lt1"/>
+          </a:fontRef>
+        </p:style>
+        <p:txBody>
+          <a:bodyPr rtlCol="0" anchor="ctr" wrap="none"/>
+          <a:lstStyle/>
+          <a:p>
+            <a:pPr algn="ctr"/>
+            <a:r>
+              <a:rPr sz="1200" b="1">
+                <a:solidFill>
+                  <a:srgbClr val="FFFFFF"/>
+                </a:solidFill>
+                <a:latin typeface="Garamond"/>
+              </a:rPr>
+              <a:t>15</a:t>
+            </a:r>
+          </a:p>
+        </p:txBody>
+      </p:sp>
+      <p:sp>
+        <p:nvSpPr>
+          <p:cNvPr id="22" name="Rectangle 21"/>
+          <p:cNvSpPr/>
+          <p:nvPr/>
+        </p:nvSpPr>
+        <p:spPr>
+          <a:xfrm>
+            <a:off x="10707052" y="1755648"/>
+            <a:ext cx="658939" cy="457200"/>
+          </a:xfrm>
+          <a:prstGeom prst="rect">
+            <a:avLst/>
+          </a:prstGeom>
+          <a:solidFill>
+            <a:srgbClr val="7B2530"/>
+          </a:solidFill>
+          <a:ln>
+            <a:noFill/>
+          </a:ln>
+          <a:effectLst/>
+        </p:spPr>
+        <p:style>
+          <a:lnRef idx="1">
+            <a:schemeClr val="accent1"/>
+          </a:lnRef>
+          <a:fillRef idx="3">
+            <a:schemeClr val="accent1"/>
+          </a:fillRef>
+          <a:effectRef idx="2">
+            <a:schemeClr val="accent1"/>
+          </a:effectRef>
+          <a:fontRef idx="minor">
+            <a:schemeClr val="lt1"/>
+          </a:fontRef>
+        </p:style>
+        <p:txBody>
+          <a:bodyPr rtlCol="0" anchor="ctr" wrap="none"/>
+          <a:lstStyle/>
+          <a:p>
+            <a:pPr algn="ctr"/>
+            <a:r>
+              <a:rPr sz="1200" b="1">
+                <a:solidFill>
+                  <a:srgbClr val="FFFFFF"/>
+                </a:solidFill>
+                <a:latin typeface="Garamond"/>
+              </a:rPr>
+              <a:t>16</a:t>
+            </a:r>
+          </a:p>
+        </p:txBody>
+      </p:sp>
+      <p:sp>
+        <p:nvSpPr>
+          <p:cNvPr id="23" name="TextBox 22"/>
+          <p:cNvSpPr txBox="1"/>
+          <p:nvPr/>
+        </p:nvSpPr>
+        <p:spPr>
+          <a:xfrm>
+            <a:off x="822960" y="2340864"/>
+            <a:ext cx="4572000" cy="365760"/>
+          </a:xfrm>
+          <a:prstGeom prst="rect">
+            <a:avLst/>
+          </a:prstGeom>
+          <a:noFill/>
+        </p:spPr>
+        <p:txBody>
+          <a:bodyPr wrap="square" lIns="0" rIns="0" tIns="0" bIns="0">
+            <a:spAutoFit/>
+          </a:bodyPr>
+          <a:lstStyle/>
+          <a:p>
+            <a:pPr algn="l">
+              <a:lnSpc>
+                <a:spcPts val="2250"/>
+              </a:lnSpc>
+              <a:spcAft>
+                <a:spcPts val="0"/>
+              </a:spcAft>
+            </a:pPr>
+            <a:r>
+              <a:rPr sz="1500" b="1" i="0">
+                <a:solidFill>
+                  <a:srgbClr val="26456E"/>
+                </a:solidFill>
+                <a:latin typeface="Garamond"/>
+              </a:rPr>
+              <a:t>The panel measure  (benchmark)</a:t>
+            </a:r>
+          </a:p>
+        </p:txBody>
+      </p:sp>
+      <p:cxnSp>
+        <p:nvCxnSpPr>
+          <p:cNvPr id="24" name="Connector 23"/>
+          <p:cNvCxnSpPr/>
+          <p:nvPr/>
+        </p:nvCxnSpPr>
+        <p:spPr>
+          <a:xfrm>
+            <a:off x="822960" y="2743200"/>
+            <a:ext cx="10543032" cy="0"/>
+          </a:xfrm>
+          <a:prstGeom prst="line">
+            <a:avLst/>
+          </a:prstGeom>
+          <a:ln w="12700">
+            <a:solidFill>
+              <a:srgbClr val="1A2430"/>
+            </a:solidFill>
+          </a:ln>
+        </p:spPr>
+        <p:style>
+          <a:lnRef idx="2">
+            <a:schemeClr val="accent1"/>
+          </a:lnRef>
+          <a:fillRef idx="0">
+            <a:schemeClr val="accent1"/>
+          </a:fillRef>
+          <a:effectRef idx="1">
+            <a:schemeClr val="accent1"/>
+          </a:effectRef>
+          <a:fontRef idx="minor">
+            <a:schemeClr val="tx1"/>
+          </a:fontRef>
+        </p:style>
+      </p:cxnSp>
+      <p:sp>
+        <p:nvSpPr>
+          <p:cNvPr id="25" name="TextBox 24"/>
+          <p:cNvSpPr txBox="1"/>
+          <p:nvPr/>
+        </p:nvSpPr>
+        <p:spPr>
+          <a:xfrm>
+            <a:off x="1005840" y="2871216"/>
+            <a:ext cx="1463040" cy="384048"/>
+          </a:xfrm>
+          <a:prstGeom prst="rect">
+            <a:avLst/>
+          </a:prstGeom>
+          <a:noFill/>
+        </p:spPr>
+        <p:txBody>
+          <a:bodyPr wrap="square" lIns="0" rIns="0" tIns="0" bIns="0">
+            <a:spAutoFit/>
+          </a:bodyPr>
+          <a:lstStyle/>
+          <a:p>
+            <a:pPr algn="l">
+              <a:lnSpc>
+                <a:spcPts val="1950"/>
+              </a:lnSpc>
+              <a:spcAft>
+                <a:spcPts val="0"/>
+              </a:spcAft>
+            </a:pPr>
+            <a:r>
+              <a:rPr sz="1300" b="1" i="0">
+                <a:solidFill>
+                  <a:srgbClr val="1F3864"/>
+                </a:solidFill>
+                <a:latin typeface="Garamond"/>
+              </a:rPr>
+              <a:t>Teacher</a:t>
+            </a:r>
+          </a:p>
+        </p:txBody>
+      </p:sp>
+      <p:sp>
+        <p:nvSpPr>
+          <p:cNvPr id="26" name="TextBox 25"/>
+          <p:cNvSpPr txBox="1"/>
+          <p:nvPr/>
+        </p:nvSpPr>
+        <p:spPr>
+          <a:xfrm>
+            <a:off x="2651760" y="2871216"/>
+            <a:ext cx="8503920" cy="384048"/>
+          </a:xfrm>
+          <a:prstGeom prst="rect">
+            <a:avLst/>
+          </a:prstGeom>
+          <a:noFill/>
+        </p:spPr>
+        <p:txBody>
+          <a:bodyPr wrap="square" lIns="0" rIns="0" tIns="0" bIns="0">
+            <a:spAutoFit/>
+          </a:bodyPr>
+          <a:lstStyle/>
+          <a:p>
+            <a:pPr algn="l">
+              <a:lnSpc>
+                <a:spcPts val="1950"/>
+              </a:lnSpc>
+              <a:spcAft>
+                <a:spcPts val="0"/>
+              </a:spcAft>
+            </a:pPr>
+            <a:r>
+              <a:rPr sz="1300" b="0" i="0">
+                <a:solidFill>
+                  <a:srgbClr val="1A2430"/>
+                </a:solidFill>
+                <a:latin typeface="Garamond"/>
+              </a:rPr>
+              <a:t>teaching, with a bachelor’s degree, in at least two year-1 interviews</a:t>
+            </a:r>
+          </a:p>
+        </p:txBody>
+      </p:sp>
+      <p:sp>
+        <p:nvSpPr>
+          <p:cNvPr id="27" name="TextBox 26"/>
+          <p:cNvSpPr txBox="1"/>
+          <p:nvPr/>
+        </p:nvSpPr>
+        <p:spPr>
+          <a:xfrm>
+            <a:off x="1005840" y="3273552"/>
+            <a:ext cx="1463040" cy="384048"/>
+          </a:xfrm>
+          <a:prstGeom prst="rect">
+            <a:avLst/>
+          </a:prstGeom>
+          <a:noFill/>
+        </p:spPr>
+        <p:txBody>
+          <a:bodyPr wrap="square" lIns="0" rIns="0" tIns="0" bIns="0">
+            <a:spAutoFit/>
+          </a:bodyPr>
+          <a:lstStyle/>
+          <a:p>
+            <a:pPr algn="l">
+              <a:lnSpc>
+                <a:spcPts val="1950"/>
+              </a:lnSpc>
+              <a:spcAft>
+                <a:spcPts val="0"/>
+              </a:spcAft>
+            </a:pPr>
+            <a:r>
+              <a:rPr sz="1300" b="1" i="0">
+                <a:solidFill>
+                  <a:srgbClr val="1F3864"/>
+                </a:solidFill>
+                <a:latin typeface="Garamond"/>
+              </a:rPr>
+              <a:t>Stayer</a:t>
+            </a:r>
+          </a:p>
+        </p:txBody>
+      </p:sp>
+      <p:sp>
+        <p:nvSpPr>
+          <p:cNvPr id="28" name="TextBox 27"/>
+          <p:cNvSpPr txBox="1"/>
+          <p:nvPr/>
+        </p:nvSpPr>
+        <p:spPr>
+          <a:xfrm>
+            <a:off x="2651760" y="3273552"/>
+            <a:ext cx="8503920" cy="384048"/>
+          </a:xfrm>
+          <a:prstGeom prst="rect">
+            <a:avLst/>
+          </a:prstGeom>
+          <a:noFill/>
+        </p:spPr>
+        <p:txBody>
+          <a:bodyPr wrap="square" lIns="0" rIns="0" tIns="0" bIns="0">
+            <a:spAutoFit/>
+          </a:bodyPr>
+          <a:lstStyle/>
+          <a:p>
+            <a:pPr algn="l">
+              <a:lnSpc>
+                <a:spcPts val="1950"/>
+              </a:lnSpc>
+              <a:spcAft>
+                <a:spcPts val="0"/>
+              </a:spcAft>
+            </a:pPr>
+            <a:r>
+              <a:rPr sz="1300" b="0" i="0">
+                <a:solidFill>
+                  <a:srgbClr val="1A2430"/>
+                </a:solidFill>
+                <a:latin typeface="Garamond"/>
+              </a:rPr>
+              <a:t>teaching in at least one year-2 interview</a:t>
+            </a:r>
+          </a:p>
+        </p:txBody>
+      </p:sp>
+      <p:sp>
+        <p:nvSpPr>
+          <p:cNvPr id="29" name="TextBox 28"/>
+          <p:cNvSpPr txBox="1"/>
+          <p:nvPr/>
+        </p:nvSpPr>
+        <p:spPr>
+          <a:xfrm>
+            <a:off x="1005840" y="3675888"/>
+            <a:ext cx="1463040" cy="384048"/>
+          </a:xfrm>
+          <a:prstGeom prst="rect">
+            <a:avLst/>
+          </a:prstGeom>
+          <a:noFill/>
+        </p:spPr>
+        <p:txBody>
+          <a:bodyPr wrap="square" lIns="0" rIns="0" tIns="0" bIns="0">
+            <a:spAutoFit/>
+          </a:bodyPr>
+          <a:lstStyle/>
+          <a:p>
+            <a:pPr algn="l">
+              <a:lnSpc>
+                <a:spcPts val="1950"/>
+              </a:lnSpc>
+              <a:spcAft>
+                <a:spcPts val="0"/>
+              </a:spcAft>
+            </a:pPr>
+            <a:r>
+              <a:rPr sz="1300" b="1" i="0">
+                <a:solidFill>
+                  <a:srgbClr val="7B2530"/>
+                </a:solidFill>
+                <a:latin typeface="Garamond"/>
+              </a:rPr>
+              <a:t>Leaver</a:t>
+            </a:r>
+          </a:p>
+        </p:txBody>
+      </p:sp>
+      <p:sp>
+        <p:nvSpPr>
+          <p:cNvPr id="30" name="TextBox 29"/>
+          <p:cNvSpPr txBox="1"/>
+          <p:nvPr/>
+        </p:nvSpPr>
+        <p:spPr>
+          <a:xfrm>
+            <a:off x="2651760" y="3675888"/>
+            <a:ext cx="8503920" cy="384048"/>
+          </a:xfrm>
+          <a:prstGeom prst="rect">
+            <a:avLst/>
+          </a:prstGeom>
+          <a:noFill/>
+        </p:spPr>
+        <p:txBody>
+          <a:bodyPr wrap="square" lIns="0" rIns="0" tIns="0" bIns="0">
+            <a:spAutoFit/>
+          </a:bodyPr>
+          <a:lstStyle/>
+          <a:p>
+            <a:pPr algn="l">
+              <a:lnSpc>
+                <a:spcPts val="1950"/>
+              </a:lnSpc>
+              <a:spcAft>
+                <a:spcPts val="0"/>
+              </a:spcAft>
+            </a:pPr>
+            <a:r>
+              <a:rPr sz="1300" b="0" i="0">
+                <a:solidFill>
+                  <a:srgbClr val="1A2430"/>
+                </a:solidFill>
+                <a:latin typeface="Garamond"/>
+              </a:rPr>
+              <a:t>never teaching in year 2, given two or more interviews, one outside the summer</a:t>
+            </a:r>
+          </a:p>
+        </p:txBody>
+      </p:sp>
+      <p:cxnSp>
+        <p:nvCxnSpPr>
+          <p:cNvPr id="31" name="Connector 30"/>
+          <p:cNvCxnSpPr/>
+          <p:nvPr/>
+        </p:nvCxnSpPr>
+        <p:spPr>
+          <a:xfrm>
+            <a:off x="822960" y="4123944"/>
+            <a:ext cx="10543032" cy="0"/>
+          </a:xfrm>
+          <a:prstGeom prst="line">
+            <a:avLst/>
+          </a:prstGeom>
+          <a:ln w="12700">
+            <a:solidFill>
+              <a:srgbClr val="1A2430"/>
+            </a:solidFill>
+          </a:ln>
+        </p:spPr>
+        <p:style>
+          <a:lnRef idx="2">
+            <a:schemeClr val="accent1"/>
+          </a:lnRef>
+          <a:fillRef idx="0">
+            <a:schemeClr val="accent1"/>
+          </a:fillRef>
+          <a:effectRef idx="1">
+            <a:schemeClr val="accent1"/>
+          </a:effectRef>
+          <a:fontRef idx="minor">
+            <a:schemeClr val="tx1"/>
+          </a:fontRef>
+        </p:style>
+      </p:cxnSp>
+      <p:sp>
+        <p:nvSpPr>
+          <p:cNvPr id="32" name="TextBox 31"/>
+          <p:cNvSpPr txBox="1"/>
+          <p:nvPr/>
+        </p:nvSpPr>
+        <p:spPr>
+          <a:xfrm>
+            <a:off x="822960" y="4169664"/>
+            <a:ext cx="5486400" cy="365760"/>
+          </a:xfrm>
+          <a:prstGeom prst="rect">
+            <a:avLst/>
+          </a:prstGeom>
+          <a:noFill/>
+        </p:spPr>
+        <p:txBody>
+          <a:bodyPr wrap="square" lIns="0" rIns="0" tIns="0" bIns="0">
+            <a:spAutoFit/>
+          </a:bodyPr>
+          <a:lstStyle/>
+          <a:p>
+            <a:pPr algn="l">
+              <a:lnSpc>
+                <a:spcPts val="2250"/>
+              </a:lnSpc>
+              <a:spcAft>
+                <a:spcPts val="0"/>
+              </a:spcAft>
+            </a:pPr>
+            <a:r>
+              <a:rPr sz="1500" b="1" i="0">
+                <a:solidFill>
+                  <a:srgbClr val="26456E"/>
+                </a:solidFill>
+                <a:latin typeface="Garamond"/>
+              </a:rPr>
+              <a:t>Alternative measures</a:t>
+            </a:r>
+          </a:p>
+        </p:txBody>
+      </p:sp>
+      <p:sp>
+        <p:nvSpPr>
+          <p:cNvPr id="33" name="TextBox 32"/>
+          <p:cNvSpPr txBox="1"/>
+          <p:nvPr/>
+        </p:nvSpPr>
+        <p:spPr>
+          <a:xfrm>
+            <a:off x="10058400" y="4169664"/>
+            <a:ext cx="1280160" cy="365760"/>
+          </a:xfrm>
+          <a:prstGeom prst="rect">
+            <a:avLst/>
+          </a:prstGeom>
+          <a:noFill/>
+        </p:spPr>
+        <p:txBody>
+          <a:bodyPr wrap="square" lIns="0" rIns="0" tIns="0" bIns="0">
+            <a:spAutoFit/>
+          </a:bodyPr>
+          <a:lstStyle/>
+          <a:p>
+            <a:pPr algn="l">
+              <a:lnSpc>
+                <a:spcPts val="1950"/>
+              </a:lnSpc>
+              <a:spcAft>
+                <a:spcPts val="0"/>
+              </a:spcAft>
+            </a:pPr>
+            <a:r>
+              <a:rPr sz="1300" b="1" i="0">
+                <a:solidFill>
+                  <a:srgbClr val="1A2430"/>
+                </a:solidFill>
+                <a:latin typeface="Garamond"/>
+              </a:rPr>
+              <a:t>2021</a:t>
+            </a:r>
+          </a:p>
+        </p:txBody>
+      </p:sp>
+      <p:cxnSp>
+        <p:nvCxnSpPr>
+          <p:cNvPr id="34" name="Connector 33"/>
+          <p:cNvCxnSpPr/>
+          <p:nvPr/>
+        </p:nvCxnSpPr>
+        <p:spPr>
+          <a:xfrm>
+            <a:off x="822960" y="4553712"/>
+            <a:ext cx="10543032" cy="0"/>
+          </a:xfrm>
+          <a:prstGeom prst="line">
+            <a:avLst/>
+          </a:prstGeom>
+          <a:ln w="7620">
+            <a:solidFill>
+              <a:srgbClr val="1A2430"/>
+            </a:solidFill>
+          </a:ln>
+        </p:spPr>
+        <p:style>
+          <a:lnRef idx="2">
+            <a:schemeClr val="accent1"/>
+          </a:lnRef>
+          <a:fillRef idx="0">
+            <a:schemeClr val="accent1"/>
+          </a:fillRef>
+          <a:effectRef idx="1">
+            <a:schemeClr val="accent1"/>
+          </a:effectRef>
+          <a:fontRef idx="minor">
+            <a:schemeClr val="tx1"/>
+          </a:fontRef>
+        </p:style>
+      </p:cxnSp>
+      <p:sp>
+        <p:nvSpPr>
+          <p:cNvPr id="35" name="TextBox 34"/>
+          <p:cNvSpPr txBox="1"/>
+          <p:nvPr/>
+        </p:nvSpPr>
+        <p:spPr>
+          <a:xfrm>
+            <a:off x="1005840" y="4663440"/>
+            <a:ext cx="5486400" cy="329184"/>
+          </a:xfrm>
+          <a:prstGeom prst="rect">
+            <a:avLst/>
+          </a:prstGeom>
+          <a:noFill/>
+        </p:spPr>
+        <p:txBody>
+          <a:bodyPr wrap="square" lIns="0" rIns="0" tIns="0" bIns="0">
+            <a:spAutoFit/>
+          </a:bodyPr>
+          <a:lstStyle/>
+          <a:p>
+            <a:pPr algn="l">
+              <a:lnSpc>
+                <a:spcPts val="1800"/>
+              </a:lnSpc>
+              <a:spcAft>
+                <a:spcPts val="0"/>
+              </a:spcAft>
+            </a:pPr>
+            <a:r>
+              <a:rPr sz="1200" b="0" i="0">
+                <a:solidFill>
+                  <a:srgbClr val="1A2430"/>
+                </a:solidFill>
+                <a:latin typeface="Garamond"/>
+              </a:rPr>
+              <a:t>Panel measure</a:t>
+            </a:r>
+          </a:p>
+        </p:txBody>
+      </p:sp>
+      <p:sp>
+        <p:nvSpPr>
+          <p:cNvPr id="36" name="TextBox 35"/>
+          <p:cNvSpPr txBox="1"/>
+          <p:nvPr/>
+        </p:nvSpPr>
+        <p:spPr>
+          <a:xfrm>
+            <a:off x="10058400" y="4663440"/>
+            <a:ext cx="1097280" cy="329184"/>
+          </a:xfrm>
+          <a:prstGeom prst="rect">
+            <a:avLst/>
+          </a:prstGeom>
+          <a:noFill/>
+        </p:spPr>
+        <p:txBody>
+          <a:bodyPr wrap="square" lIns="0" rIns="0" tIns="0" bIns="0">
+            <a:spAutoFit/>
+          </a:bodyPr>
+          <a:lstStyle/>
+          <a:p>
+            <a:pPr algn="l">
+              <a:lnSpc>
+                <a:spcPts val="1800"/>
+              </a:lnSpc>
+              <a:spcAft>
+                <a:spcPts val="0"/>
+              </a:spcAft>
+            </a:pPr>
+            <a:r>
+              <a:rPr sz="1200" b="1" i="0">
+                <a:solidFill>
+                  <a:srgbClr val="1A2430"/>
+                </a:solidFill>
+                <a:latin typeface="Garamond"/>
+              </a:rPr>
+              <a:t>12.9</a:t>
+            </a:r>
+          </a:p>
+        </p:txBody>
+      </p:sp>
+      <p:sp>
+        <p:nvSpPr>
+          <p:cNvPr id="37" name="TextBox 36"/>
+          <p:cNvSpPr txBox="1"/>
+          <p:nvPr/>
+        </p:nvSpPr>
+        <p:spPr>
+          <a:xfrm>
+            <a:off x="1005840" y="4992624"/>
+            <a:ext cx="5486400" cy="329184"/>
+          </a:xfrm>
+          <a:prstGeom prst="rect">
+            <a:avLst/>
+          </a:prstGeom>
+          <a:noFill/>
+        </p:spPr>
+        <p:txBody>
+          <a:bodyPr wrap="square" lIns="0" rIns="0" tIns="0" bIns="0">
+            <a:spAutoFit/>
+          </a:bodyPr>
+          <a:lstStyle/>
+          <a:p>
+            <a:pPr algn="l">
+              <a:lnSpc>
+                <a:spcPts val="1800"/>
+              </a:lnSpc>
+              <a:spcAft>
+                <a:spcPts val="0"/>
+              </a:spcAft>
+            </a:pPr>
+            <a:r>
+              <a:rPr sz="1200" b="0" i="0">
+                <a:solidFill>
+                  <a:srgbClr val="1A2430"/>
+                </a:solidFill>
+                <a:latin typeface="Garamond"/>
+              </a:rPr>
+              <a:t>Annual recall</a:t>
+            </a:r>
+          </a:p>
+        </p:txBody>
+      </p:sp>
+      <p:sp>
+        <p:nvSpPr>
+          <p:cNvPr id="38" name="TextBox 37"/>
+          <p:cNvSpPr txBox="1"/>
+          <p:nvPr/>
+        </p:nvSpPr>
+        <p:spPr>
+          <a:xfrm>
+            <a:off x="10058400" y="4992624"/>
+            <a:ext cx="1097280" cy="329184"/>
+          </a:xfrm>
+          <a:prstGeom prst="rect">
+            <a:avLst/>
+          </a:prstGeom>
+          <a:noFill/>
+        </p:spPr>
+        <p:txBody>
+          <a:bodyPr wrap="square" lIns="0" rIns="0" tIns="0" bIns="0">
+            <a:spAutoFit/>
+          </a:bodyPr>
+          <a:lstStyle/>
+          <a:p>
+            <a:pPr algn="l">
+              <a:lnSpc>
+                <a:spcPts val="1800"/>
+              </a:lnSpc>
+              <a:spcAft>
+                <a:spcPts val="0"/>
+              </a:spcAft>
+            </a:pPr>
+            <a:r>
+              <a:rPr sz="1200" b="1" i="0">
+                <a:solidFill>
+                  <a:srgbClr val="1A2430"/>
+                </a:solidFill>
+                <a:latin typeface="Garamond"/>
+              </a:rPr>
+              <a:t>7.1</a:t>
+            </a:r>
+          </a:p>
+        </p:txBody>
+      </p:sp>
+      <p:sp>
+        <p:nvSpPr>
+          <p:cNvPr id="39" name="TextBox 38"/>
+          <p:cNvSpPr txBox="1"/>
+          <p:nvPr/>
+        </p:nvSpPr>
+        <p:spPr>
+          <a:xfrm>
+            <a:off x="1005840" y="5321808"/>
+            <a:ext cx="5486400" cy="329184"/>
+          </a:xfrm>
+          <a:prstGeom prst="rect">
+            <a:avLst/>
+          </a:prstGeom>
+          <a:noFill/>
+        </p:spPr>
+        <p:txBody>
+          <a:bodyPr wrap="square" lIns="0" rIns="0" tIns="0" bIns="0">
+            <a:spAutoFit/>
+          </a:bodyPr>
+          <a:lstStyle/>
+          <a:p>
+            <a:pPr algn="l">
+              <a:lnSpc>
+                <a:spcPts val="1800"/>
+              </a:lnSpc>
+              <a:spcAft>
+                <a:spcPts val="0"/>
+              </a:spcAft>
+            </a:pPr>
+            <a:r>
+              <a:rPr sz="1200" b="0" i="0">
+                <a:solidFill>
+                  <a:srgbClr val="1A2430"/>
+                </a:solidFill>
+                <a:latin typeface="Garamond"/>
+              </a:rPr>
+              <a:t>Occupation pair</a:t>
+            </a:r>
+          </a:p>
+        </p:txBody>
+      </p:sp>
+      <p:sp>
+        <p:nvSpPr>
+          <p:cNvPr id="40" name="TextBox 39"/>
+          <p:cNvSpPr txBox="1"/>
+          <p:nvPr/>
+        </p:nvSpPr>
+        <p:spPr>
+          <a:xfrm>
+            <a:off x="10058400" y="5321808"/>
+            <a:ext cx="1097280" cy="329184"/>
+          </a:xfrm>
+          <a:prstGeom prst="rect">
+            <a:avLst/>
+          </a:prstGeom>
+          <a:noFill/>
+        </p:spPr>
+        <p:txBody>
+          <a:bodyPr wrap="square" lIns="0" rIns="0" tIns="0" bIns="0">
+            <a:spAutoFit/>
+          </a:bodyPr>
+          <a:lstStyle/>
+          <a:p>
+            <a:pPr algn="l">
+              <a:lnSpc>
+                <a:spcPts val="1800"/>
+              </a:lnSpc>
+              <a:spcAft>
+                <a:spcPts val="0"/>
+              </a:spcAft>
+            </a:pPr>
+            <a:r>
+              <a:rPr sz="1200" b="1" i="0">
+                <a:solidFill>
+                  <a:srgbClr val="1A2430"/>
+                </a:solidFill>
+                <a:latin typeface="Garamond"/>
+              </a:rPr>
+              <a:t>5.0</a:t>
+            </a:r>
+          </a:p>
+        </p:txBody>
+      </p:sp>
+      <p:sp>
+        <p:nvSpPr>
+          <p:cNvPr id="41" name="TextBox 40"/>
+          <p:cNvSpPr txBox="1"/>
+          <p:nvPr/>
+        </p:nvSpPr>
+        <p:spPr>
+          <a:xfrm>
+            <a:off x="1005840" y="5650992"/>
+            <a:ext cx="5486400" cy="329184"/>
+          </a:xfrm>
+          <a:prstGeom prst="rect">
+            <a:avLst/>
+          </a:prstGeom>
+          <a:noFill/>
+        </p:spPr>
+        <p:txBody>
+          <a:bodyPr wrap="square" lIns="0" rIns="0" tIns="0" bIns="0">
+            <a:spAutoFit/>
+          </a:bodyPr>
+          <a:lstStyle/>
+          <a:p>
+            <a:pPr algn="l">
+              <a:lnSpc>
+                <a:spcPts val="1800"/>
+              </a:lnSpc>
+              <a:spcAft>
+                <a:spcPts val="0"/>
+              </a:spcAft>
+            </a:pPr>
+            <a:r>
+              <a:rPr sz="1200" b="0" i="0">
+                <a:solidFill>
+                  <a:srgbClr val="1A2430"/>
+                </a:solidFill>
+                <a:latin typeface="Garamond"/>
+              </a:rPr>
+              <a:t>Month pairs</a:t>
+            </a:r>
+          </a:p>
+        </p:txBody>
+      </p:sp>
+      <p:sp>
+        <p:nvSpPr>
+          <p:cNvPr id="42" name="TextBox 41"/>
+          <p:cNvSpPr txBox="1"/>
+          <p:nvPr/>
+        </p:nvSpPr>
+        <p:spPr>
+          <a:xfrm>
+            <a:off x="10058400" y="5650992"/>
+            <a:ext cx="1097280" cy="329184"/>
+          </a:xfrm>
+          <a:prstGeom prst="rect">
+            <a:avLst/>
+          </a:prstGeom>
+          <a:noFill/>
+        </p:spPr>
+        <p:txBody>
+          <a:bodyPr wrap="square" lIns="0" rIns="0" tIns="0" bIns="0">
+            <a:spAutoFit/>
+          </a:bodyPr>
+          <a:lstStyle/>
+          <a:p>
+            <a:pPr algn="l">
+              <a:lnSpc>
+                <a:spcPts val="1800"/>
+              </a:lnSpc>
+              <a:spcAft>
+                <a:spcPts val="0"/>
+              </a:spcAft>
+            </a:pPr>
+            <a:r>
+              <a:rPr sz="1200" b="1" i="0">
+                <a:solidFill>
+                  <a:srgbClr val="1A2430"/>
+                </a:solidFill>
+                <a:latin typeface="Garamond"/>
+              </a:rPr>
+              <a:t>16.0</a:t>
+            </a:r>
+          </a:p>
+        </p:txBody>
+      </p:sp>
+      <p:sp>
+        <p:nvSpPr>
+          <p:cNvPr id="43" name="TextBox 42"/>
+          <p:cNvSpPr txBox="1"/>
+          <p:nvPr/>
+        </p:nvSpPr>
+        <p:spPr>
+          <a:xfrm>
+            <a:off x="1005840" y="5980176"/>
+            <a:ext cx="5486400" cy="329184"/>
+          </a:xfrm>
+          <a:prstGeom prst="rect">
+            <a:avLst/>
+          </a:prstGeom>
+          <a:noFill/>
+        </p:spPr>
+        <p:txBody>
+          <a:bodyPr wrap="square" lIns="0" rIns="0" tIns="0" bIns="0">
+            <a:spAutoFit/>
+          </a:bodyPr>
+          <a:lstStyle/>
+          <a:p>
+            <a:pPr algn="l">
+              <a:lnSpc>
+                <a:spcPts val="1800"/>
+              </a:lnSpc>
+              <a:spcAft>
+                <a:spcPts val="0"/>
+              </a:spcAft>
+            </a:pPr>
+            <a:r>
+              <a:rPr sz="1200" b="0" i="0">
+                <a:solidFill>
+                  <a:srgbClr val="1A2430"/>
+                </a:solidFill>
+                <a:latin typeface="Garamond"/>
+              </a:rPr>
+              <a:t>Any sighting</a:t>
+            </a:r>
+          </a:p>
+        </p:txBody>
+      </p:sp>
+      <p:sp>
+        <p:nvSpPr>
+          <p:cNvPr id="44" name="TextBox 43"/>
+          <p:cNvSpPr txBox="1"/>
+          <p:nvPr/>
+        </p:nvSpPr>
+        <p:spPr>
+          <a:xfrm>
+            <a:off x="10058400" y="5980176"/>
+            <a:ext cx="1097280" cy="329184"/>
+          </a:xfrm>
+          <a:prstGeom prst="rect">
+            <a:avLst/>
+          </a:prstGeom>
+          <a:noFill/>
+        </p:spPr>
+        <p:txBody>
+          <a:bodyPr wrap="square" lIns="0" rIns="0" tIns="0" bIns="0">
+            <a:spAutoFit/>
+          </a:bodyPr>
+          <a:lstStyle/>
+          <a:p>
+            <a:pPr algn="l">
+              <a:lnSpc>
+                <a:spcPts val="1800"/>
+              </a:lnSpc>
+              <a:spcAft>
+                <a:spcPts val="0"/>
+              </a:spcAft>
+            </a:pPr>
+            <a:r>
+              <a:rPr sz="1200" b="1" i="0">
+                <a:solidFill>
+                  <a:srgbClr val="1A2430"/>
+                </a:solidFill>
+                <a:latin typeface="Garamond"/>
+              </a:rPr>
+              <a:t>19.4</a:t>
+            </a:r>
+          </a:p>
+        </p:txBody>
+      </p:sp>
+      <p:sp>
+        <p:nvSpPr>
+          <p:cNvPr id="45" name="TextBox 44"/>
+          <p:cNvSpPr txBox="1"/>
+          <p:nvPr/>
+        </p:nvSpPr>
+        <p:spPr>
+          <a:xfrm>
+            <a:off x="1005840" y="6309360"/>
+            <a:ext cx="5486400" cy="329184"/>
+          </a:xfrm>
+          <a:prstGeom prst="rect">
+            <a:avLst/>
+          </a:prstGeom>
+          <a:noFill/>
+        </p:spPr>
+        <p:txBody>
+          <a:bodyPr wrap="square" lIns="0" rIns="0" tIns="0" bIns="0">
+            <a:spAutoFit/>
+          </a:bodyPr>
+          <a:lstStyle/>
+          <a:p>
+            <a:pPr algn="l">
+              <a:lnSpc>
+                <a:spcPts val="1800"/>
+              </a:lnSpc>
+              <a:spcAft>
+                <a:spcPts val="0"/>
+              </a:spcAft>
+            </a:pPr>
+            <a:r>
+              <a:rPr sz="1200" b="0" i="0">
+                <a:solidFill>
+                  <a:srgbClr val="1A2430"/>
+                </a:solidFill>
+                <a:latin typeface="Garamond"/>
+              </a:rPr>
+              <a:t>NCES follow-up survey</a:t>
+            </a:r>
+          </a:p>
+        </p:txBody>
+      </p:sp>
+      <p:sp>
+        <p:nvSpPr>
+          <p:cNvPr id="46" name="TextBox 45"/>
+          <p:cNvSpPr txBox="1"/>
+          <p:nvPr/>
+        </p:nvSpPr>
+        <p:spPr>
+          <a:xfrm>
+            <a:off x="10058400" y="6309360"/>
+            <a:ext cx="1097280" cy="329184"/>
+          </a:xfrm>
+          <a:prstGeom prst="rect">
+            <a:avLst/>
+          </a:prstGeom>
+          <a:noFill/>
+        </p:spPr>
+        <p:txBody>
+          <a:bodyPr wrap="square" lIns="0" rIns="0" tIns="0" bIns="0">
+            <a:spAutoFit/>
+          </a:bodyPr>
+          <a:lstStyle/>
+          <a:p>
+            <a:pPr algn="l">
+              <a:lnSpc>
+                <a:spcPts val="1800"/>
+              </a:lnSpc>
+              <a:spcAft>
+                <a:spcPts val="0"/>
+              </a:spcAft>
+            </a:pPr>
+            <a:r>
+              <a:rPr sz="1200" b="1" i="0">
+                <a:solidFill>
+                  <a:srgbClr val="1A2430"/>
+                </a:solidFill>
+                <a:latin typeface="Garamond"/>
+              </a:rPr>
+              <a:t>8.0</a:t>
+            </a:r>
+          </a:p>
+        </p:txBody>
+      </p:sp>
+      <p:cxnSp>
+        <p:nvCxnSpPr>
+          <p:cNvPr id="47" name="Connector 46"/>
+          <p:cNvCxnSpPr/>
+          <p:nvPr/>
+        </p:nvCxnSpPr>
+        <p:spPr>
+          <a:xfrm>
+            <a:off x="822960" y="6656832"/>
+            <a:ext cx="10543032" cy="0"/>
+          </a:xfrm>
+          <a:prstGeom prst="line">
+            <a:avLst/>
+          </a:prstGeom>
+          <a:ln w="12700">
+            <a:solidFill>
+              <a:srgbClr val="1A2430"/>
+            </a:solidFill>
+          </a:ln>
+        </p:spPr>
+        <p:style>
+          <a:lnRef idx="2">
+            <a:schemeClr val="accent1"/>
+          </a:lnRef>
+          <a:fillRef idx="0">
+            <a:schemeClr val="accent1"/>
+          </a:fillRef>
+          <a:effectRef idx="1">
+            <a:schemeClr val="accent1"/>
+          </a:effectRef>
+          <a:fontRef idx="minor">
+            <a:schemeClr val="tx1"/>
+          </a:fontRef>
+        </p:style>
+      </p:cxnSp>
+    </p:spTree>
+  </p:cSld>
+  <p:clrMapOvr>
+    <a:masterClrMapping/>
+  </p:clrMapOvr>
+</p:sld>
+</file>
+
+<file path=ppt/slides/slide42.xml><?xml version="1.0" encoding="utf-8"?>
+<p:sld xmlns:a="http://schemas.openxmlformats.org/drawingml/2006/main" xmlns:p="http://schemas.openxmlformats.org/presentationml/2006/main" xmlns:r="http://schemas.openxmlformats.org/officeDocument/2006/relationships">
+  <p:cSld>
+    <p:spTree>
+      <p:nvGrpSpPr>
+        <p:cNvPr id="1" name=""/>
+        <p:cNvGrpSpPr/>
+        <p:nvPr/>
+      </p:nvGrpSpPr>
+      <p:grpSpPr/>
+      <p:sp>
+        <p:nvSpPr>
+          <p:cNvPr id="2" name="Rectangle 1"/>
+          <p:cNvSpPr/>
+          <p:nvPr/>
+        </p:nvSpPr>
+        <p:spPr>
+          <a:xfrm>
+            <a:off x="0" y="-27432"/>
+            <a:ext cx="12198096" cy="594360"/>
+          </a:xfrm>
+          <a:prstGeom prst="rect">
+            <a:avLst/>
+          </a:prstGeom>
+          <a:solidFill>
+            <a:srgbClr val="00549F"/>
+          </a:solidFill>
+          <a:ln>
+            <a:noFill/>
+          </a:ln>
+          <a:effectLst/>
+        </p:spPr>
+        <p:style>
+          <a:lnRef idx="1">
+            <a:schemeClr val="accent1"/>
+          </a:lnRef>
+          <a:fillRef idx="3">
+            <a:schemeClr val="accent1"/>
+          </a:fillRef>
+          <a:effectRef idx="2">
+            <a:schemeClr val="accent1"/>
+          </a:effectRef>
+          <a:fontRef idx="minor">
+            <a:schemeClr val="lt1"/>
+          </a:fontRef>
+        </p:style>
+        <p:txBody>
+          <a:bodyPr rtlCol="0" anchor="ctr"/>
+          <a:lstStyle/>
+          <a:p>
+            <a:pPr algn="ctr"/>
+          </a:p>
+        </p:txBody>
+      </p:sp>
+      <p:sp>
+        <p:nvSpPr>
+          <p:cNvPr id="3" name="TextBox 2"/>
+          <p:cNvSpPr txBox="1"/>
+          <p:nvPr/>
+        </p:nvSpPr>
+        <p:spPr>
+          <a:xfrm>
+            <a:off x="685800" y="868680"/>
+            <a:ext cx="9875520" cy="548640"/>
+          </a:xfrm>
+          <a:prstGeom prst="rect">
+            <a:avLst/>
+          </a:prstGeom>
+          <a:noFill/>
+        </p:spPr>
+        <p:txBody>
+          <a:bodyPr wrap="square" lIns="0" rIns="0" tIns="0" bIns="0"/>
+          <a:lstStyle/>
+          <a:p>
+            <a:pPr algn="l"/>
+            <a:r>
+              <a:rPr sz="2800" b="1">
+                <a:solidFill>
+                  <a:srgbClr val="26456E"/>
+                </a:solidFill>
+                <a:latin typeface="Garamond"/>
+              </a:rPr>
               <a:t>All the series, one axis</a:t>
             </a:r>
           </a:p>
@@ -23233,7 +27217,7 @@
 </p:sld>
 </file>
 
-<file path=ppt/slides/slide42.xml><?xml version="1.0" encoding="utf-8"?>
+<file path=ppt/slides/slide43.xml><?xml version="1.0" encoding="utf-8"?>
 <p:sld xmlns:a="http://schemas.openxmlformats.org/drawingml/2006/main" xmlns:p="http://schemas.openxmlformats.org/presentationml/2006/main" xmlns:r="http://schemas.openxmlformats.org/officeDocument/2006/relationships">
   <p:cSld>
     <p:spTree>
